--- a/이마트_AI카메라_설치매뉴얼.pptx
+++ b/이마트_AI카메라_설치매뉴얼.pptx
@@ -22,9 +22,11 @@
     <p:sldId id="270" r:id="rId16"/>
     <p:sldId id="271" r:id="rId17"/>
     <p:sldId id="272" r:id="rId18"/>
+    <p:sldId id="273" r:id="rId19"/>
+    <p:sldId id="274" r:id="rId20"/>
   </p:sldIdLst>
   <p:notesMasterIdLst>
-    <p:notesMasterId r:id="rId19"/>
+    <p:notesMasterId r:id="rId21"/>
   </p:notesMasterIdLst>
   <p:sldSz cx="12192000" cy="6858000"/>
   <p:notesSz cx="6858000" cy="12192000"/>
@@ -1246,6 +1248,182 @@
             <a:fld id="{F7021451-1387-4CA6-816F-3879F97B5CBC}" type="slidenum">
               <a:rPr lang="en-US"/>
               <a:t>17</a:t>
+            </a:fld>
+            <a:endParaRPr lang="en-US"/>
+          </a:p>
+        </p:txBody>
+      </p:sp>
+    </p:spTree>
+    <p:extLst>
+      <p:ext uri="{BB962C8B-B14F-4D97-AF65-F5344CB8AC3E}">
+        <p14:creationId xmlns:p14="http://schemas.microsoft.com/office/powerpoint/2010/main" val="1024086991"/>
+      </p:ext>
+    </p:extLst>
+  </p:cSld>
+  <p:clrMapOvr>
+    <a:masterClrMapping/>
+  </p:clrMapOvr>
+</p:notes>
+</file>
+
+<file path=ppt/notesSlides/notesSlide18.xml><?xml version="1.0" encoding="utf-8"?>
+<p:notes xmlns:a="http://schemas.openxmlformats.org/drawingml/2006/main" xmlns:r="http://schemas.openxmlformats.org/officeDocument/2006/relationships" xmlns:p="http://schemas.openxmlformats.org/presentationml/2006/main">
+  <p:cSld>
+    <p:spTree>
+      <p:nvGrpSpPr>
+        <p:cNvPr id="1" name=""/>
+        <p:cNvGrpSpPr/>
+        <p:nvPr/>
+      </p:nvGrpSpPr>
+      <p:grpSpPr>
+        <a:xfrm>
+          <a:off x="0" y="0"/>
+          <a:ext cx="0" cy="0"/>
+          <a:chOff x="0" y="0"/>
+          <a:chExt cx="0" cy="0"/>
+        </a:xfrm>
+      </p:grpSpPr>
+      <p:sp>
+        <p:nvSpPr>
+          <p:cNvPr id="2" name="Slide Image Placeholder 1"/>
+          <p:cNvSpPr>
+            <a:spLocks noGrp="1" noRot="1" noChangeAspect="1"/>
+          </p:cNvSpPr>
+          <p:nvPr>
+            <p:ph type="sldImg"/>
+          </p:nvPr>
+        </p:nvSpPr>
+        <p:spPr/>
+      </p:sp>
+      <p:sp>
+        <p:nvSpPr>
+          <p:cNvPr id="3" name="Notes Placeholder 2"/>
+          <p:cNvSpPr>
+            <a:spLocks noGrp="1"/>
+          </p:cNvSpPr>
+          <p:nvPr>
+            <p:ph type="body" idx="1"/>
+          </p:nvPr>
+        </p:nvSpPr>
+        <p:spPr/>
+        <p:txBody>
+          <a:bodyPr/>
+          <a:lstStyle/>
+          <a:p>
+            <a:r>
+              <a:rPr lang="en-US" dirty="0"/>
+              <a:t/>
+            </a:r>
+            <a:endParaRPr lang="en-US" dirty="0"/>
+          </a:p>
+        </p:txBody>
+      </p:sp>
+      <p:sp>
+        <p:nvSpPr>
+          <p:cNvPr id="4" name="Slide Number Placeholder 3"/>
+          <p:cNvSpPr>
+            <a:spLocks noGrp="1"/>
+          </p:cNvSpPr>
+          <p:nvPr>
+            <p:ph type="sldNum" sz="quarter" idx="10"/>
+          </p:nvPr>
+        </p:nvSpPr>
+        <p:spPr/>
+        <p:txBody>
+          <a:bodyPr/>
+          <a:lstStyle/>
+          <a:p>
+            <a:fld id="{F7021451-1387-4CA6-816F-3879F97B5CBC}" type="slidenum">
+              <a:rPr lang="en-US"/>
+              <a:t>18</a:t>
+            </a:fld>
+            <a:endParaRPr lang="en-US"/>
+          </a:p>
+        </p:txBody>
+      </p:sp>
+    </p:spTree>
+    <p:extLst>
+      <p:ext uri="{BB962C8B-B14F-4D97-AF65-F5344CB8AC3E}">
+        <p14:creationId xmlns:p14="http://schemas.microsoft.com/office/powerpoint/2010/main" val="1024086991"/>
+      </p:ext>
+    </p:extLst>
+  </p:cSld>
+  <p:clrMapOvr>
+    <a:masterClrMapping/>
+  </p:clrMapOvr>
+</p:notes>
+</file>
+
+<file path=ppt/notesSlides/notesSlide19.xml><?xml version="1.0" encoding="utf-8"?>
+<p:notes xmlns:a="http://schemas.openxmlformats.org/drawingml/2006/main" xmlns:r="http://schemas.openxmlformats.org/officeDocument/2006/relationships" xmlns:p="http://schemas.openxmlformats.org/presentationml/2006/main">
+  <p:cSld>
+    <p:spTree>
+      <p:nvGrpSpPr>
+        <p:cNvPr id="1" name=""/>
+        <p:cNvGrpSpPr/>
+        <p:nvPr/>
+      </p:nvGrpSpPr>
+      <p:grpSpPr>
+        <a:xfrm>
+          <a:off x="0" y="0"/>
+          <a:ext cx="0" cy="0"/>
+          <a:chOff x="0" y="0"/>
+          <a:chExt cx="0" cy="0"/>
+        </a:xfrm>
+      </p:grpSpPr>
+      <p:sp>
+        <p:nvSpPr>
+          <p:cNvPr id="2" name="Slide Image Placeholder 1"/>
+          <p:cNvSpPr>
+            <a:spLocks noGrp="1" noRot="1" noChangeAspect="1"/>
+          </p:cNvSpPr>
+          <p:nvPr>
+            <p:ph type="sldImg"/>
+          </p:nvPr>
+        </p:nvSpPr>
+        <p:spPr/>
+      </p:sp>
+      <p:sp>
+        <p:nvSpPr>
+          <p:cNvPr id="3" name="Notes Placeholder 2"/>
+          <p:cNvSpPr>
+            <a:spLocks noGrp="1"/>
+          </p:cNvSpPr>
+          <p:nvPr>
+            <p:ph type="body" idx="1"/>
+          </p:nvPr>
+        </p:nvSpPr>
+        <p:spPr/>
+        <p:txBody>
+          <a:bodyPr/>
+          <a:lstStyle/>
+          <a:p>
+            <a:r>
+              <a:rPr lang="en-US" dirty="0"/>
+              <a:t/>
+            </a:r>
+            <a:endParaRPr lang="en-US" dirty="0"/>
+          </a:p>
+        </p:txBody>
+      </p:sp>
+      <p:sp>
+        <p:nvSpPr>
+          <p:cNvPr id="4" name="Slide Number Placeholder 3"/>
+          <p:cNvSpPr>
+            <a:spLocks noGrp="1"/>
+          </p:cNvSpPr>
+          <p:nvPr>
+            <p:ph type="sldNum" sz="quarter" idx="10"/>
+          </p:nvPr>
+        </p:nvSpPr>
+        <p:spPr/>
+        <p:txBody>
+          <a:bodyPr/>
+          <a:lstStyle/>
+          <a:p>
+            <a:fld id="{F7021451-1387-4CA6-816F-3879F97B5CBC}" type="slidenum">
+              <a:rPr lang="en-US"/>
+              <a:t>19</a:t>
             </a:fld>
             <a:endParaRPr lang="en-US"/>
           </a:p>
@@ -2474,6 +2652,346 @@
     <p:bg>
       <p:bgPr>
         <a:solidFill>
+          <a:srgbClr val="FFFFFF"/>
+        </a:solidFill>
+      </p:bgPr>
+    </p:bg>
+    <p:spTree>
+      <p:nvGrpSpPr>
+        <p:cNvPr id="1" name=""/>
+        <p:cNvGrpSpPr/>
+        <p:nvPr/>
+      </p:nvGrpSpPr>
+      <p:grpSpPr>
+        <a:xfrm>
+          <a:off x="0" y="0"/>
+          <a:ext cx="0" cy="0"/>
+          <a:chOff x="0" y="0"/>
+          <a:chExt cx="0" cy="0"/>
+        </a:xfrm>
+      </p:grpSpPr>
+      <p:sp>
+        <p:nvSpPr>
+          <p:cNvPr id="2" name="Text 0"/>
+          <p:cNvSpPr/>
+          <p:nvPr/>
+        </p:nvSpPr>
+        <p:spPr>
+          <a:xfrm>
+            <a:off x="640080" y="411480"/>
+            <a:ext cx="6400800" cy="365760"/>
+          </a:xfrm>
+          <a:prstGeom prst="rect">
+            <a:avLst/>
+          </a:prstGeom>
+          <a:noFill/>
+          <a:ln/>
+        </p:spPr>
+        <p:txBody>
+          <a:bodyPr wrap="square" lIns="0" tIns="0" rIns="0" bIns="0" rtlCol="0" anchor="ctr"/>
+          <a:lstStyle/>
+          <a:p>
+            <a:pPr indent="0" marL="0">
+              <a:buNone/>
+            </a:pPr>
+            <a:r>
+              <a:rPr lang="en-US" sz="1600" b="1" dirty="0">
+                <a:solidFill>
+                  <a:srgbClr val="666666"/>
+                </a:solidFill>
+                <a:latin typeface="Malgun Gothic" pitchFamily="34" charset="0"/>
+                <a:ea typeface="Malgun Gothic" pitchFamily="34" charset="-122"/>
+                <a:cs typeface="Malgun Gothic" pitchFamily="34" charset="-120"/>
+              </a:rPr>
+              <a:t>동선스크린 설치 방법</a:t>
+            </a:r>
+            <a:endParaRPr lang="en-US" sz="1600" dirty="0"/>
+          </a:p>
+        </p:txBody>
+      </p:sp>
+      <p:sp>
+        <p:nvSpPr>
+          <p:cNvPr id="3" name="Text 1"/>
+          <p:cNvSpPr/>
+          <p:nvPr/>
+        </p:nvSpPr>
+        <p:spPr>
+          <a:xfrm>
+            <a:off x="9262872" y="411480"/>
+            <a:ext cx="2286000" cy="365760"/>
+          </a:xfrm>
+          <a:prstGeom prst="rect">
+            <a:avLst/>
+          </a:prstGeom>
+          <a:noFill/>
+          <a:ln/>
+        </p:spPr>
+        <p:txBody>
+          <a:bodyPr wrap="square" lIns="0" tIns="0" rIns="0" bIns="0" rtlCol="0" anchor="ctr"/>
+          <a:lstStyle/>
+          <a:p>
+            <a:pPr algn="r" indent="0" marL="0">
+              <a:buNone/>
+            </a:pPr>
+            <a:r>
+              <a:rPr lang="en-US" sz="1400" b="1" dirty="0">
+                <a:solidFill>
+                  <a:srgbClr val="9AA0A6"/>
+                </a:solidFill>
+                <a:latin typeface="Malgun Gothic" pitchFamily="34" charset="0"/>
+                <a:ea typeface="Malgun Gothic" pitchFamily="34" charset="-122"/>
+                <a:cs typeface="Malgun Gothic" pitchFamily="34" charset="-120"/>
+              </a:rPr>
+              <a:t>STEP 7 / 7</a:t>
+            </a:r>
+            <a:endParaRPr lang="en-US" sz="1400" dirty="0"/>
+          </a:p>
+        </p:txBody>
+      </p:sp>
+      <p:sp>
+        <p:nvSpPr>
+          <p:cNvPr id="4" name="Shape 2"/>
+          <p:cNvSpPr/>
+          <p:nvPr/>
+        </p:nvSpPr>
+        <p:spPr>
+          <a:xfrm>
+            <a:off x="640080" y="1143000"/>
+            <a:ext cx="914400" cy="914400"/>
+          </a:xfrm>
+          <a:prstGeom prst="ellipse">
+            <a:avLst/>
+          </a:prstGeom>
+          <a:solidFill>
+            <a:srgbClr val="FFD400"/>
+          </a:solidFill>
+          <a:ln/>
+        </p:spPr>
+      </p:sp>
+      <p:sp>
+        <p:nvSpPr>
+          <p:cNvPr id="5" name="Text 3"/>
+          <p:cNvSpPr/>
+          <p:nvPr/>
+        </p:nvSpPr>
+        <p:spPr>
+          <a:xfrm>
+            <a:off x="640080" y="1143000"/>
+            <a:ext cx="914400" cy="914400"/>
+          </a:xfrm>
+          <a:prstGeom prst="rect">
+            <a:avLst/>
+          </a:prstGeom>
+          <a:noFill/>
+          <a:ln/>
+        </p:spPr>
+        <p:txBody>
+          <a:bodyPr wrap="square" lIns="0" tIns="0" rIns="0" bIns="0" rtlCol="0" anchor="ctr"/>
+          <a:lstStyle/>
+          <a:p>
+            <a:pPr algn="ctr" indent="0" marL="0">
+              <a:buNone/>
+            </a:pPr>
+            <a:r>
+              <a:rPr lang="en-US" sz="3600" b="1" dirty="0">
+                <a:solidFill>
+                  <a:srgbClr val="1F1F1F"/>
+                </a:solidFill>
+                <a:latin typeface="Malgun Gothic" pitchFamily="34" charset="0"/>
+                <a:ea typeface="Malgun Gothic" pitchFamily="34" charset="-122"/>
+                <a:cs typeface="Malgun Gothic" pitchFamily="34" charset="-120"/>
+              </a:rPr>
+              <a:t>7</a:t>
+            </a:r>
+            <a:endParaRPr lang="en-US" sz="3600" dirty="0"/>
+          </a:p>
+        </p:txBody>
+      </p:sp>
+      <p:sp>
+        <p:nvSpPr>
+          <p:cNvPr id="6" name="Text 4"/>
+          <p:cNvSpPr/>
+          <p:nvPr/>
+        </p:nvSpPr>
+        <p:spPr>
+          <a:xfrm>
+            <a:off x="1783080" y="1143000"/>
+            <a:ext cx="4206240" cy="914400"/>
+          </a:xfrm>
+          <a:prstGeom prst="rect">
+            <a:avLst/>
+          </a:prstGeom>
+          <a:noFill/>
+          <a:ln/>
+        </p:spPr>
+        <p:txBody>
+          <a:bodyPr wrap="square" lIns="0" tIns="0" rIns="0" bIns="0" rtlCol="0" anchor="ctr"/>
+          <a:lstStyle/>
+          <a:p>
+            <a:pPr indent="0" marL="0">
+              <a:buNone/>
+            </a:pPr>
+            <a:r>
+              <a:rPr lang="en-US" sz="3000" b="1" dirty="0">
+                <a:solidFill>
+                  <a:srgbClr val="222222"/>
+                </a:solidFill>
+                <a:latin typeface="Malgun Gothic" pitchFamily="34" charset="0"/>
+                <a:ea typeface="Malgun Gothic" pitchFamily="34" charset="-122"/>
+                <a:cs typeface="Malgun Gothic" pitchFamily="34" charset="-120"/>
+              </a:rPr>
+              <a:t>케이블 정리</a:t>
+            </a:r>
+            <a:endParaRPr lang="en-US" sz="3000" dirty="0"/>
+          </a:p>
+        </p:txBody>
+      </p:sp>
+      <p:sp>
+        <p:nvSpPr>
+          <p:cNvPr id="7" name="Text 5"/>
+          <p:cNvSpPr/>
+          <p:nvPr/>
+        </p:nvSpPr>
+        <p:spPr>
+          <a:xfrm>
+            <a:off x="640080" y="2514600"/>
+            <a:ext cx="5120640" cy="2011680"/>
+          </a:xfrm>
+          <a:prstGeom prst="rect">
+            <a:avLst/>
+          </a:prstGeom>
+          <a:noFill/>
+          <a:ln/>
+        </p:spPr>
+        <p:txBody>
+          <a:bodyPr wrap="square" lIns="0" tIns="0" rIns="0" bIns="0" rtlCol="0" anchor="t"/>
+          <a:lstStyle/>
+          <a:p>
+            <a:pPr indent="0" marL="0">
+              <a:lnSpc>
+                <a:spcPct val="135000"/>
+              </a:lnSpc>
+              <a:buNone/>
+            </a:pPr>
+            <a:r>
+              <a:rPr lang="en-US" sz="2000" dirty="0">
+                <a:solidFill>
+                  <a:srgbClr val="222222"/>
+                </a:solidFill>
+                <a:latin typeface="Malgun Gothic" pitchFamily="34" charset="0"/>
+                <a:ea typeface="Malgun Gothic" pitchFamily="34" charset="-122"/>
+                <a:cs typeface="Malgun Gothic" pitchFamily="34" charset="-120"/>
+              </a:rPr>
+              <a:t>케이블 노출을 최소화할 수 있도록 선을 깔끔하게 정리합니다.</a:t>
+            </a:r>
+            <a:endParaRPr lang="en-US" sz="2000" dirty="0"/>
+          </a:p>
+        </p:txBody>
+      </p:sp>
+      <p:sp>
+        <p:nvSpPr>
+          <p:cNvPr id="8" name="Shape 6"/>
+          <p:cNvSpPr/>
+          <p:nvPr/>
+        </p:nvSpPr>
+        <p:spPr>
+          <a:xfrm>
+            <a:off x="6126480" y="1143000"/>
+            <a:ext cx="5394960" cy="5120640"/>
+          </a:xfrm>
+          <a:prstGeom prst="roundRect">
+            <a:avLst>
+              <a:gd name="adj" fmla="val 1429"/>
+            </a:avLst>
+          </a:prstGeom>
+          <a:solidFill>
+            <a:srgbClr val="F5F5F5"/>
+          </a:solidFill>
+          <a:ln w="19050">
+            <a:solidFill>
+              <a:srgbClr val="9AA0A6"/>
+            </a:solidFill>
+            <a:prstDash val="dash"/>
+          </a:ln>
+        </p:spPr>
+      </p:sp>
+      <p:pic>
+        <p:nvPicPr>
+          <p:cNvPr id="9" name="Image 0" descr="preencoded.png">    </p:cNvPr>
+          <p:cNvPicPr>
+            <a:picLocks noChangeAspect="1"/>
+          </p:cNvPicPr>
+          <p:nvPr/>
+        </p:nvPicPr>
+        <p:blipFill>
+          <a:blip r:embed="rId1"/>
+          <a:stretch>
+            <a:fillRect/>
+          </a:stretch>
+        </p:blipFill>
+        <p:spPr>
+          <a:xfrm>
+            <a:off x="8503920" y="3154680"/>
+            <a:ext cx="640080" cy="640080"/>
+          </a:xfrm>
+          <a:prstGeom prst="rect">
+            <a:avLst/>
+          </a:prstGeom>
+        </p:spPr>
+      </p:pic>
+      <p:sp>
+        <p:nvSpPr>
+          <p:cNvPr id="10" name="Text 7"/>
+          <p:cNvSpPr/>
+          <p:nvPr/>
+        </p:nvSpPr>
+        <p:spPr>
+          <a:xfrm>
+            <a:off x="6126480" y="3840480"/>
+            <a:ext cx="5394960" cy="457200"/>
+          </a:xfrm>
+          <a:prstGeom prst="rect">
+            <a:avLst/>
+          </a:prstGeom>
+          <a:noFill/>
+          <a:ln/>
+        </p:spPr>
+        <p:txBody>
+          <a:bodyPr wrap="square" lIns="0" tIns="0" rIns="0" bIns="0" rtlCol="0" anchor="ctr"/>
+          <a:lstStyle/>
+          <a:p>
+            <a:pPr algn="ctr" indent="0" marL="0">
+              <a:buNone/>
+            </a:pPr>
+            <a:r>
+              <a:rPr lang="en-US" sz="1400" dirty="0">
+                <a:solidFill>
+                  <a:srgbClr val="9AA0A6"/>
+                </a:solidFill>
+                <a:latin typeface="Malgun Gothic" pitchFamily="34" charset="0"/>
+                <a:ea typeface="Malgun Gothic" pitchFamily="34" charset="-122"/>
+                <a:cs typeface="Malgun Gothic" pitchFamily="34" charset="-120"/>
+              </a:rPr>
+              <a:t>사진을 여기에 넣어 주세요</a:t>
+            </a:r>
+            <a:endParaRPr lang="en-US" sz="1400" dirty="0"/>
+          </a:p>
+        </p:txBody>
+      </p:sp>
+    </p:spTree>
+  </p:cSld>
+  <p:clrMapOvr>
+    <a:masterClrMapping/>
+  </p:clrMapOvr>
+</p:sld>
+</file>
+
+<file path=ppt/slides/slide11.xml><?xml version="1.0" encoding="utf-8"?>
+<p:sld xmlns:a="http://schemas.openxmlformats.org/drawingml/2006/main" xmlns:r="http://schemas.openxmlformats.org/officeDocument/2006/relationships" xmlns:p="http://schemas.openxmlformats.org/presentationml/2006/main">
+  <p:cSld name="Slide 11">
+    <p:bg>
+      <p:bgPr>
+        <a:solidFill>
           <a:srgbClr val="1F1F1F"/>
         </a:solidFill>
       </p:bgPr>
@@ -2629,578 +3147,6 @@
               <a:t>(매장 내부 1대 · 매장 외부 1대)</a:t>
             </a:r>
             <a:endParaRPr lang="en-US" sz="2000" dirty="0"/>
-          </a:p>
-        </p:txBody>
-      </p:sp>
-    </p:spTree>
-  </p:cSld>
-  <p:clrMapOvr>
-    <a:masterClrMapping/>
-  </p:clrMapOvr>
-</p:sld>
-</file>
-
-<file path=ppt/slides/slide11.xml><?xml version="1.0" encoding="utf-8"?>
-<p:sld xmlns:a="http://schemas.openxmlformats.org/drawingml/2006/main" xmlns:r="http://schemas.openxmlformats.org/officeDocument/2006/relationships" xmlns:p="http://schemas.openxmlformats.org/presentationml/2006/main">
-  <p:cSld name="Slide 11">
-    <p:bg>
-      <p:bgPr>
-        <a:solidFill>
-          <a:srgbClr val="FFFFFF"/>
-        </a:solidFill>
-      </p:bgPr>
-    </p:bg>
-    <p:spTree>
-      <p:nvGrpSpPr>
-        <p:cNvPr id="1" name=""/>
-        <p:cNvGrpSpPr/>
-        <p:nvPr/>
-      </p:nvGrpSpPr>
-      <p:grpSpPr>
-        <a:xfrm>
-          <a:off x="0" y="0"/>
-          <a:ext cx="0" cy="0"/>
-          <a:chOff x="0" y="0"/>
-          <a:chExt cx="0" cy="0"/>
-        </a:xfrm>
-      </p:grpSpPr>
-      <p:sp>
-        <p:nvSpPr>
-          <p:cNvPr id="2" name="Text 0"/>
-          <p:cNvSpPr/>
-          <p:nvPr/>
-        </p:nvSpPr>
-        <p:spPr>
-          <a:xfrm>
-            <a:off x="640080" y="411480"/>
-            <a:ext cx="6400800" cy="365760"/>
-          </a:xfrm>
-          <a:prstGeom prst="rect">
-            <a:avLst/>
-          </a:prstGeom>
-          <a:noFill/>
-          <a:ln/>
-        </p:spPr>
-        <p:txBody>
-          <a:bodyPr wrap="square" lIns="0" tIns="0" rIns="0" bIns="0" rtlCol="0" anchor="ctr"/>
-          <a:lstStyle/>
-          <a:p>
-            <a:pPr indent="0" marL="0">
-              <a:buNone/>
-            </a:pPr>
-            <a:r>
-              <a:rPr lang="en-US" sz="1600" b="1" dirty="0">
-                <a:solidFill>
-                  <a:srgbClr val="666666"/>
-                </a:solidFill>
-                <a:latin typeface="Malgun Gothic" pitchFamily="34" charset="0"/>
-                <a:ea typeface="Malgun Gothic" pitchFamily="34" charset="-122"/>
-                <a:cs typeface="Malgun Gothic" pitchFamily="34" charset="-120"/>
-              </a:rPr>
-              <a:t>계산대미디어 설치 방법</a:t>
-            </a:r>
-            <a:endParaRPr lang="en-US" sz="1600" dirty="0"/>
-          </a:p>
-        </p:txBody>
-      </p:sp>
-      <p:sp>
-        <p:nvSpPr>
-          <p:cNvPr id="3" name="Text 1"/>
-          <p:cNvSpPr/>
-          <p:nvPr/>
-        </p:nvSpPr>
-        <p:spPr>
-          <a:xfrm>
-            <a:off x="9262872" y="411480"/>
-            <a:ext cx="2286000" cy="365760"/>
-          </a:xfrm>
-          <a:prstGeom prst="rect">
-            <a:avLst/>
-          </a:prstGeom>
-          <a:noFill/>
-          <a:ln/>
-        </p:spPr>
-        <p:txBody>
-          <a:bodyPr wrap="square" lIns="0" tIns="0" rIns="0" bIns="0" rtlCol="0" anchor="ctr"/>
-          <a:lstStyle/>
-          <a:p>
-            <a:pPr algn="r" indent="0" marL="0">
-              <a:buNone/>
-            </a:pPr>
-            <a:r>
-              <a:rPr lang="en-US" sz="1400" b="1" dirty="0">
-                <a:solidFill>
-                  <a:srgbClr val="9AA0A6"/>
-                </a:solidFill>
-                <a:latin typeface="Malgun Gothic" pitchFamily="34" charset="0"/>
-                <a:ea typeface="Malgun Gothic" pitchFamily="34" charset="-122"/>
-                <a:cs typeface="Malgun Gothic" pitchFamily="34" charset="-120"/>
-              </a:rPr>
-              <a:t>STEP 1 / 6</a:t>
-            </a:r>
-            <a:endParaRPr lang="en-US" sz="1400" dirty="0"/>
-          </a:p>
-        </p:txBody>
-      </p:sp>
-      <p:sp>
-        <p:nvSpPr>
-          <p:cNvPr id="4" name="Shape 2"/>
-          <p:cNvSpPr/>
-          <p:nvPr/>
-        </p:nvSpPr>
-        <p:spPr>
-          <a:xfrm>
-            <a:off x="640080" y="1143000"/>
-            <a:ext cx="914400" cy="914400"/>
-          </a:xfrm>
-          <a:prstGeom prst="ellipse">
-            <a:avLst/>
-          </a:prstGeom>
-          <a:solidFill>
-            <a:srgbClr val="FFD400"/>
-          </a:solidFill>
-          <a:ln/>
-        </p:spPr>
-      </p:sp>
-      <p:sp>
-        <p:nvSpPr>
-          <p:cNvPr id="5" name="Text 3"/>
-          <p:cNvSpPr/>
-          <p:nvPr/>
-        </p:nvSpPr>
-        <p:spPr>
-          <a:xfrm>
-            <a:off x="640080" y="1143000"/>
-            <a:ext cx="914400" cy="914400"/>
-          </a:xfrm>
-          <a:prstGeom prst="rect">
-            <a:avLst/>
-          </a:prstGeom>
-          <a:noFill/>
-          <a:ln/>
-        </p:spPr>
-        <p:txBody>
-          <a:bodyPr wrap="square" lIns="0" tIns="0" rIns="0" bIns="0" rtlCol="0" anchor="ctr"/>
-          <a:lstStyle/>
-          <a:p>
-            <a:pPr algn="ctr" indent="0" marL="0">
-              <a:buNone/>
-            </a:pPr>
-            <a:r>
-              <a:rPr lang="en-US" sz="3600" b="1" dirty="0">
-                <a:solidFill>
-                  <a:srgbClr val="1F1F1F"/>
-                </a:solidFill>
-                <a:latin typeface="Malgun Gothic" pitchFamily="34" charset="0"/>
-                <a:ea typeface="Malgun Gothic" pitchFamily="34" charset="-122"/>
-                <a:cs typeface="Malgun Gothic" pitchFamily="34" charset="-120"/>
-              </a:rPr>
-              <a:t>1</a:t>
-            </a:r>
-            <a:endParaRPr lang="en-US" sz="3600" dirty="0"/>
-          </a:p>
-        </p:txBody>
-      </p:sp>
-      <p:sp>
-        <p:nvSpPr>
-          <p:cNvPr id="6" name="Text 4"/>
-          <p:cNvSpPr/>
-          <p:nvPr/>
-        </p:nvSpPr>
-        <p:spPr>
-          <a:xfrm>
-            <a:off x="1783080" y="1143000"/>
-            <a:ext cx="4206240" cy="914400"/>
-          </a:xfrm>
-          <a:prstGeom prst="rect">
-            <a:avLst/>
-          </a:prstGeom>
-          <a:noFill/>
-          <a:ln/>
-        </p:spPr>
-        <p:txBody>
-          <a:bodyPr wrap="square" lIns="0" tIns="0" rIns="0" bIns="0" rtlCol="0" anchor="ctr"/>
-          <a:lstStyle/>
-          <a:p>
-            <a:pPr indent="0" marL="0">
-              <a:buNone/>
-            </a:pPr>
-            <a:r>
-              <a:rPr lang="en-US" sz="3000" b="1" dirty="0">
-                <a:solidFill>
-                  <a:srgbClr val="222222"/>
-                </a:solidFill>
-                <a:latin typeface="Malgun Gothic" pitchFamily="34" charset="0"/>
-                <a:ea typeface="Malgun Gothic" pitchFamily="34" charset="-122"/>
-                <a:cs typeface="Malgun Gothic" pitchFamily="34" charset="-120"/>
-              </a:rPr>
-              <a:t>HDMI 분배기 전원부 분리</a:t>
-            </a:r>
-            <a:endParaRPr lang="en-US" sz="3000" dirty="0"/>
-          </a:p>
-        </p:txBody>
-      </p:sp>
-      <p:sp>
-        <p:nvSpPr>
-          <p:cNvPr id="7" name="Text 5"/>
-          <p:cNvSpPr/>
-          <p:nvPr/>
-        </p:nvSpPr>
-        <p:spPr>
-          <a:xfrm>
-            <a:off x="640080" y="2514600"/>
-            <a:ext cx="5120640" cy="2011680"/>
-          </a:xfrm>
-          <a:prstGeom prst="rect">
-            <a:avLst/>
-          </a:prstGeom>
-          <a:noFill/>
-          <a:ln/>
-        </p:spPr>
-        <p:txBody>
-          <a:bodyPr wrap="square" lIns="0" tIns="0" rIns="0" bIns="0" rtlCol="0" anchor="t"/>
-          <a:lstStyle/>
-          <a:p>
-            <a:pPr indent="0" marL="0">
-              <a:lnSpc>
-                <a:spcPct val="135000"/>
-              </a:lnSpc>
-              <a:buNone/>
-            </a:pPr>
-            <a:r>
-              <a:rPr lang="en-US" sz="2000" dirty="0">
-                <a:solidFill>
-                  <a:srgbClr val="222222"/>
-                </a:solidFill>
-                <a:latin typeface="Malgun Gothic" pitchFamily="34" charset="0"/>
-                <a:ea typeface="Malgun Gothic" pitchFamily="34" charset="-122"/>
-                <a:cs typeface="Malgun Gothic" pitchFamily="34" charset="-120"/>
-              </a:rPr>
-              <a:t>셋톱박스에 연결되어 있는 HDMI 분배기의 전원부(USB 단자)를 분리합니다.</a:t>
-            </a:r>
-            <a:endParaRPr lang="en-US" sz="2000" dirty="0"/>
-          </a:p>
-        </p:txBody>
-      </p:sp>
-      <p:sp>
-        <p:nvSpPr>
-          <p:cNvPr id="8" name="Shape 6"/>
-          <p:cNvSpPr/>
-          <p:nvPr/>
-        </p:nvSpPr>
-        <p:spPr>
-          <a:xfrm>
-            <a:off x="640080" y="5120640"/>
-            <a:ext cx="5120640" cy="1097280"/>
-          </a:xfrm>
-          <a:prstGeom prst="roundRect">
-            <a:avLst>
-              <a:gd name="adj" fmla="val 6667"/>
-            </a:avLst>
-          </a:prstGeom>
-          <a:solidFill>
-            <a:srgbClr val="FFF7CC"/>
-          </a:solidFill>
-          <a:ln/>
-        </p:spPr>
-      </p:sp>
-      <p:sp>
-        <p:nvSpPr>
-          <p:cNvPr id="9" name="Text 7"/>
-          <p:cNvSpPr/>
-          <p:nvPr/>
-        </p:nvSpPr>
-        <p:spPr>
-          <a:xfrm>
-            <a:off x="868680" y="5120640"/>
-            <a:ext cx="4663440" cy="1097280"/>
-          </a:xfrm>
-          <a:prstGeom prst="rect">
-            <a:avLst/>
-          </a:prstGeom>
-          <a:noFill/>
-          <a:ln/>
-        </p:spPr>
-        <p:txBody>
-          <a:bodyPr wrap="square" lIns="0" tIns="0" rIns="0" bIns="0" rtlCol="0" anchor="ctr"/>
-          <a:lstStyle/>
-          <a:p>
-            <a:pPr indent="0" marL="0">
-              <a:lnSpc>
-                <a:spcPct val="125000"/>
-              </a:lnSpc>
-              <a:buNone/>
-            </a:pPr>
-            <a:r>
-              <a:rPr lang="en-US" sz="1500" dirty="0">
-                <a:solidFill>
-                  <a:srgbClr val="222222"/>
-                </a:solidFill>
-                <a:latin typeface="Malgun Gothic" pitchFamily="34" charset="0"/>
-                <a:ea typeface="Malgun Gothic" pitchFamily="34" charset="-122"/>
-                <a:cs typeface="Malgun Gothic" pitchFamily="34" charset="-120"/>
-              </a:rPr>
-              <a:t>※ 계산대미디어는 매체당 카메라 2대(매장 내부 · 매장 외부)를 각각 동일한 방법으로 설치합니다.</a:t>
-            </a:r>
-            <a:endParaRPr lang="en-US" sz="1500" dirty="0"/>
-          </a:p>
-        </p:txBody>
-      </p:sp>
-      <p:sp>
-        <p:nvSpPr>
-          <p:cNvPr id="10" name="Shape 8"/>
-          <p:cNvSpPr/>
-          <p:nvPr/>
-        </p:nvSpPr>
-        <p:spPr>
-          <a:xfrm>
-            <a:off x="6126480" y="1143000"/>
-            <a:ext cx="5394960" cy="2423160"/>
-          </a:xfrm>
-          <a:prstGeom prst="roundRect">
-            <a:avLst>
-              <a:gd name="adj" fmla="val 3019"/>
-            </a:avLst>
-          </a:prstGeom>
-          <a:solidFill>
-            <a:srgbClr val="F5F5F5"/>
-          </a:solidFill>
-          <a:ln w="19050">
-            <a:solidFill>
-              <a:srgbClr val="9AA0A6"/>
-            </a:solidFill>
-            <a:prstDash val="dash"/>
-          </a:ln>
-        </p:spPr>
-      </p:sp>
-      <p:pic>
-        <p:nvPicPr>
-          <p:cNvPr id="11" name="Image 0" descr="preencoded.png">    </p:cNvPr>
-          <p:cNvPicPr>
-            <a:picLocks noChangeAspect="1"/>
-          </p:cNvPicPr>
-          <p:nvPr/>
-        </p:nvPicPr>
-        <p:blipFill>
-          <a:blip r:embed="rId1"/>
-          <a:stretch>
-            <a:fillRect/>
-          </a:stretch>
-        </p:blipFill>
-        <p:spPr>
-          <a:xfrm>
-            <a:off x="8503920" y="1805940"/>
-            <a:ext cx="640080" cy="640080"/>
-          </a:xfrm>
-          <a:prstGeom prst="rect">
-            <a:avLst/>
-          </a:prstGeom>
-        </p:spPr>
-      </p:pic>
-      <p:sp>
-        <p:nvSpPr>
-          <p:cNvPr id="12" name="Text 9"/>
-          <p:cNvSpPr/>
-          <p:nvPr/>
-        </p:nvSpPr>
-        <p:spPr>
-          <a:xfrm>
-            <a:off x="6126480" y="2491740"/>
-            <a:ext cx="5394960" cy="457200"/>
-          </a:xfrm>
-          <a:prstGeom prst="rect">
-            <a:avLst/>
-          </a:prstGeom>
-          <a:noFill/>
-          <a:ln/>
-        </p:spPr>
-        <p:txBody>
-          <a:bodyPr wrap="square" lIns="0" tIns="0" rIns="0" bIns="0" rtlCol="0" anchor="ctr"/>
-          <a:lstStyle/>
-          <a:p>
-            <a:pPr algn="ctr" indent="0" marL="0">
-              <a:buNone/>
-            </a:pPr>
-            <a:r>
-              <a:rPr lang="en-US" sz="1400" dirty="0">
-                <a:solidFill>
-                  <a:srgbClr val="9AA0A6"/>
-                </a:solidFill>
-                <a:latin typeface="Malgun Gothic" pitchFamily="34" charset="0"/>
-                <a:ea typeface="Malgun Gothic" pitchFamily="34" charset="-122"/>
-                <a:cs typeface="Malgun Gothic" pitchFamily="34" charset="-120"/>
-              </a:rPr>
-              <a:t>사진: 매장 내부 카메라</a:t>
-            </a:r>
-            <a:endParaRPr lang="en-US" sz="1400" dirty="0"/>
-          </a:p>
-        </p:txBody>
-      </p:sp>
-      <p:sp>
-        <p:nvSpPr>
-          <p:cNvPr id="13" name="Text 10"/>
-          <p:cNvSpPr/>
-          <p:nvPr/>
-        </p:nvSpPr>
-        <p:spPr>
-          <a:xfrm>
-            <a:off x="6126480" y="1234440"/>
-            <a:ext cx="1463040" cy="320040"/>
-          </a:xfrm>
-          <a:prstGeom prst="rect">
-            <a:avLst/>
-          </a:prstGeom>
-          <a:noFill/>
-          <a:ln/>
-        </p:spPr>
-        <p:txBody>
-          <a:bodyPr wrap="square" rtlCol="0" anchor="ctr"/>
-          <a:lstStyle/>
-          <a:p>
-            <a:pPr algn="ctr" indent="0" marL="0">
-              <a:buNone/>
-            </a:pPr>
-            <a:r>
-              <a:rPr lang="en-US" sz="1200" b="1" dirty="0">
-                <a:solidFill>
-                  <a:srgbClr val="666666"/>
-                </a:solidFill>
-                <a:latin typeface="Malgun Gothic" pitchFamily="34" charset="0"/>
-                <a:ea typeface="Malgun Gothic" pitchFamily="34" charset="-122"/>
-                <a:cs typeface="Malgun Gothic" pitchFamily="34" charset="-120"/>
-              </a:rPr>
-              <a:t>매장 내부</a:t>
-            </a:r>
-            <a:endParaRPr lang="en-US" sz="1200" dirty="0"/>
-          </a:p>
-        </p:txBody>
-      </p:sp>
-      <p:sp>
-        <p:nvSpPr>
-          <p:cNvPr id="14" name="Shape 11"/>
-          <p:cNvSpPr/>
-          <p:nvPr/>
-        </p:nvSpPr>
-        <p:spPr>
-          <a:xfrm>
-            <a:off x="6126480" y="3840480"/>
-            <a:ext cx="5394960" cy="2423160"/>
-          </a:xfrm>
-          <a:prstGeom prst="roundRect">
-            <a:avLst>
-              <a:gd name="adj" fmla="val 3019"/>
-            </a:avLst>
-          </a:prstGeom>
-          <a:solidFill>
-            <a:srgbClr val="F5F5F5"/>
-          </a:solidFill>
-          <a:ln w="19050">
-            <a:solidFill>
-              <a:srgbClr val="9AA0A6"/>
-            </a:solidFill>
-            <a:prstDash val="dash"/>
-          </a:ln>
-        </p:spPr>
-      </p:sp>
-      <p:pic>
-        <p:nvPicPr>
-          <p:cNvPr id="15" name="Image 1" descr="preencoded.png">    </p:cNvPr>
-          <p:cNvPicPr>
-            <a:picLocks noChangeAspect="1"/>
-          </p:cNvPicPr>
-          <p:nvPr/>
-        </p:nvPicPr>
-        <p:blipFill>
-          <a:blip r:embed="rId2"/>
-          <a:stretch>
-            <a:fillRect/>
-          </a:stretch>
-        </p:blipFill>
-        <p:spPr>
-          <a:xfrm>
-            <a:off x="8503920" y="4503420"/>
-            <a:ext cx="640080" cy="640080"/>
-          </a:xfrm>
-          <a:prstGeom prst="rect">
-            <a:avLst/>
-          </a:prstGeom>
-        </p:spPr>
-      </p:pic>
-      <p:sp>
-        <p:nvSpPr>
-          <p:cNvPr id="16" name="Text 12"/>
-          <p:cNvSpPr/>
-          <p:nvPr/>
-        </p:nvSpPr>
-        <p:spPr>
-          <a:xfrm>
-            <a:off x="6126480" y="5189220"/>
-            <a:ext cx="5394960" cy="457200"/>
-          </a:xfrm>
-          <a:prstGeom prst="rect">
-            <a:avLst/>
-          </a:prstGeom>
-          <a:noFill/>
-          <a:ln/>
-        </p:spPr>
-        <p:txBody>
-          <a:bodyPr wrap="square" lIns="0" tIns="0" rIns="0" bIns="0" rtlCol="0" anchor="ctr"/>
-          <a:lstStyle/>
-          <a:p>
-            <a:pPr algn="ctr" indent="0" marL="0">
-              <a:buNone/>
-            </a:pPr>
-            <a:r>
-              <a:rPr lang="en-US" sz="1400" dirty="0">
-                <a:solidFill>
-                  <a:srgbClr val="9AA0A6"/>
-                </a:solidFill>
-                <a:latin typeface="Malgun Gothic" pitchFamily="34" charset="0"/>
-                <a:ea typeface="Malgun Gothic" pitchFamily="34" charset="-122"/>
-                <a:cs typeface="Malgun Gothic" pitchFamily="34" charset="-120"/>
-              </a:rPr>
-              <a:t>사진: 매장 외부 카메라</a:t>
-            </a:r>
-            <a:endParaRPr lang="en-US" sz="1400" dirty="0"/>
-          </a:p>
-        </p:txBody>
-      </p:sp>
-      <p:sp>
-        <p:nvSpPr>
-          <p:cNvPr id="17" name="Text 13"/>
-          <p:cNvSpPr/>
-          <p:nvPr/>
-        </p:nvSpPr>
-        <p:spPr>
-          <a:xfrm>
-            <a:off x="6126480" y="3931920"/>
-            <a:ext cx="1463040" cy="320040"/>
-          </a:xfrm>
-          <a:prstGeom prst="rect">
-            <a:avLst/>
-          </a:prstGeom>
-          <a:noFill/>
-          <a:ln/>
-        </p:spPr>
-        <p:txBody>
-          <a:bodyPr wrap="square" rtlCol="0" anchor="ctr"/>
-          <a:lstStyle/>
-          <a:p>
-            <a:pPr algn="ctr" indent="0" marL="0">
-              <a:buNone/>
-            </a:pPr>
-            <a:r>
-              <a:rPr lang="en-US" sz="1200" b="1" dirty="0">
-                <a:solidFill>
-                  <a:srgbClr val="666666"/>
-                </a:solidFill>
-                <a:latin typeface="Malgun Gothic" pitchFamily="34" charset="0"/>
-                <a:ea typeface="Malgun Gothic" pitchFamily="34" charset="-122"/>
-                <a:cs typeface="Malgun Gothic" pitchFamily="34" charset="-120"/>
-              </a:rPr>
-              <a:t>매장 외부</a:t>
-            </a:r>
-            <a:endParaRPr lang="en-US" sz="1200" dirty="0"/>
           </a:p>
         </p:txBody>
       </p:sp>
@@ -3308,7 +3254,7 @@
                 <a:ea typeface="Malgun Gothic" pitchFamily="34" charset="-122"/>
                 <a:cs typeface="Malgun Gothic" pitchFamily="34" charset="-120"/>
               </a:rPr>
-              <a:t>STEP 2 / 6</a:t>
+              <a:t>STEP 1 / 7</a:t>
             </a:r>
             <a:endParaRPr lang="en-US" sz="1400" dirty="0"/>
           </a:p>
@@ -3367,7 +3313,7 @@
                 <a:ea typeface="Malgun Gothic" pitchFamily="34" charset="-122"/>
                 <a:cs typeface="Malgun Gothic" pitchFamily="34" charset="-120"/>
               </a:rPr>
-              <a:t>2</a:t>
+              <a:t>1</a:t>
             </a:r>
             <a:endParaRPr lang="en-US" sz="3600" dirty="0"/>
           </a:p>
@@ -3406,7 +3352,7 @@
                 <a:ea typeface="Malgun Gothic" pitchFamily="34" charset="-122"/>
                 <a:cs typeface="Malgun Gothic" pitchFamily="34" charset="-120"/>
               </a:rPr>
-              <a:t>USB 어댑터 연결</a:t>
+              <a:t>HDMI 분배기 전원부 분리</a:t>
             </a:r>
             <a:endParaRPr lang="en-US" sz="3000" dirty="0"/>
           </a:p>
@@ -3448,7 +3394,7 @@
                 <a:ea typeface="Malgun Gothic" pitchFamily="34" charset="-122"/>
                 <a:cs typeface="Malgun Gothic" pitchFamily="34" charset="-120"/>
               </a:rPr>
-              <a:t>분리한 전원부(USB 단자)를 USB 어댑터에 연결합니다.</a:t>
+              <a:t>셋톱박스에 연결되어 있는 HDMI 분배기의 전원부(USB 단자)를 분리합니다.</a:t>
             </a:r>
             <a:endParaRPr lang="en-US" sz="2000" dirty="0"/>
           </a:p>
@@ -3880,7 +3826,7 @@
                 <a:ea typeface="Malgun Gothic" pitchFamily="34" charset="-122"/>
                 <a:cs typeface="Malgun Gothic" pitchFamily="34" charset="-120"/>
               </a:rPr>
-              <a:t>STEP 3 / 6</a:t>
+              <a:t>STEP 2 / 7</a:t>
             </a:r>
             <a:endParaRPr lang="en-US" sz="1400" dirty="0"/>
           </a:p>
@@ -3939,7 +3885,7 @@
                 <a:ea typeface="Malgun Gothic" pitchFamily="34" charset="-122"/>
                 <a:cs typeface="Malgun Gothic" pitchFamily="34" charset="-120"/>
               </a:rPr>
-              <a:t>3</a:t>
+              <a:t>2</a:t>
             </a:r>
             <a:endParaRPr lang="en-US" sz="3600" dirty="0"/>
           </a:p>
@@ -3978,7 +3924,7 @@
                 <a:ea typeface="Malgun Gothic" pitchFamily="34" charset="-122"/>
                 <a:cs typeface="Malgun Gothic" pitchFamily="34" charset="-120"/>
               </a:rPr>
-              <a:t>콘센트 연결</a:t>
+              <a:t>USB 어댑터 연결</a:t>
             </a:r>
             <a:endParaRPr lang="en-US" sz="3000" dirty="0"/>
           </a:p>
@@ -4020,7 +3966,7 @@
                 <a:ea typeface="Malgun Gothic" pitchFamily="34" charset="-122"/>
                 <a:cs typeface="Malgun Gothic" pitchFamily="34" charset="-120"/>
               </a:rPr>
-              <a:t>멀티탭을 활용하여 어댑터를 콘센트에 연결합니다.</a:t>
+              <a:t>분리한 전원부(USB 단자)를 USB 어댑터에 연결합니다.</a:t>
             </a:r>
             <a:endParaRPr lang="en-US" sz="2000" dirty="0"/>
           </a:p>
@@ -4452,7 +4398,7 @@
                 <a:ea typeface="Malgun Gothic" pitchFamily="34" charset="-122"/>
                 <a:cs typeface="Malgun Gothic" pitchFamily="34" charset="-120"/>
               </a:rPr>
-              <a:t>STEP 4 / 6</a:t>
+              <a:t>STEP 3 / 7</a:t>
             </a:r>
             <a:endParaRPr lang="en-US" sz="1400" dirty="0"/>
           </a:p>
@@ -4511,7 +4457,7 @@
                 <a:ea typeface="Malgun Gothic" pitchFamily="34" charset="-122"/>
                 <a:cs typeface="Malgun Gothic" pitchFamily="34" charset="-120"/>
               </a:rPr>
-              <a:t>4</a:t>
+              <a:t>3</a:t>
             </a:r>
             <a:endParaRPr lang="en-US" sz="3600" dirty="0"/>
           </a:p>
@@ -4550,7 +4496,7 @@
                 <a:ea typeface="Malgun Gothic" pitchFamily="34" charset="-122"/>
                 <a:cs typeface="Malgun Gothic" pitchFamily="34" charset="-120"/>
               </a:rPr>
-              <a:t>AI 카메라 연결</a:t>
+              <a:t>콘센트 연결</a:t>
             </a:r>
             <a:endParaRPr lang="en-US" sz="3000" dirty="0"/>
           </a:p>
@@ -4592,7 +4538,7 @@
                 <a:ea typeface="Malgun Gothic" pitchFamily="34" charset="-122"/>
                 <a:cs typeface="Malgun Gothic" pitchFamily="34" charset="-120"/>
               </a:rPr>
-              <a:t>AI 카메라의 USB 단자를 셋톱박스에 연결합니다.</a:t>
+              <a:t>멀티탭을 활용하여 어댑터를 콘센트에 연결합니다.</a:t>
             </a:r>
             <a:endParaRPr lang="en-US" sz="2000" dirty="0"/>
           </a:p>
@@ -5024,7 +4970,7 @@
                 <a:ea typeface="Malgun Gothic" pitchFamily="34" charset="-122"/>
                 <a:cs typeface="Malgun Gothic" pitchFamily="34" charset="-120"/>
               </a:rPr>
-              <a:t>STEP 5 / 6</a:t>
+              <a:t>STEP 4 / 7</a:t>
             </a:r>
             <a:endParaRPr lang="en-US" sz="1400" dirty="0"/>
           </a:p>
@@ -5083,7 +5029,7 @@
                 <a:ea typeface="Malgun Gothic" pitchFamily="34" charset="-122"/>
                 <a:cs typeface="Malgun Gothic" pitchFamily="34" charset="-120"/>
               </a:rPr>
-              <a:t>5</a:t>
+              <a:t>4</a:t>
             </a:r>
             <a:endParaRPr lang="en-US" sz="3600" dirty="0"/>
           </a:p>
@@ -5122,7 +5068,7 @@
                 <a:ea typeface="Malgun Gothic" pitchFamily="34" charset="-122"/>
                 <a:cs typeface="Malgun Gothic" pitchFamily="34" charset="-120"/>
               </a:rPr>
-              <a:t>AI 카메라 부착</a:t>
+              <a:t>AI 카메라 연결</a:t>
             </a:r>
             <a:endParaRPr lang="en-US" sz="3000" dirty="0"/>
           </a:p>
@@ -5164,7 +5110,7 @@
                 <a:ea typeface="Malgun Gothic" pitchFamily="34" charset="-122"/>
                 <a:cs typeface="Malgun Gothic" pitchFamily="34" charset="-120"/>
               </a:rPr>
-              <a:t>3M 테이프를 활용하여 AI 카메라를 TV 밑면 가운데 위치에 부착합니다.</a:t>
+              <a:t>AI 카메라의 USB 단자를 셋톱박스에 연결합니다.</a:t>
             </a:r>
             <a:endParaRPr lang="en-US" sz="2000" dirty="0"/>
           </a:p>
@@ -5596,7 +5542,7 @@
                 <a:ea typeface="Malgun Gothic" pitchFamily="34" charset="-122"/>
                 <a:cs typeface="Malgun Gothic" pitchFamily="34" charset="-120"/>
               </a:rPr>
-              <a:t>STEP 6 / 6</a:t>
+              <a:t>STEP 5 / 7</a:t>
             </a:r>
             <a:endParaRPr lang="en-US" sz="1400" dirty="0"/>
           </a:p>
@@ -5655,7 +5601,7 @@
                 <a:ea typeface="Malgun Gothic" pitchFamily="34" charset="-122"/>
                 <a:cs typeface="Malgun Gothic" pitchFamily="34" charset="-120"/>
               </a:rPr>
-              <a:t>6</a:t>
+              <a:t>5</a:t>
             </a:r>
             <a:endParaRPr lang="en-US" sz="3600" dirty="0"/>
           </a:p>
@@ -5694,7 +5640,7 @@
                 <a:ea typeface="Malgun Gothic" pitchFamily="34" charset="-122"/>
                 <a:cs typeface="Malgun Gothic" pitchFamily="34" charset="-120"/>
               </a:rPr>
-              <a:t>케이블 정리</a:t>
+              <a:t>AI 카메라 부착</a:t>
             </a:r>
             <a:endParaRPr lang="en-US" sz="3000" dirty="0"/>
           </a:p>
@@ -5736,7 +5682,7 @@
                 <a:ea typeface="Malgun Gothic" pitchFamily="34" charset="-122"/>
                 <a:cs typeface="Malgun Gothic" pitchFamily="34" charset="-120"/>
               </a:rPr>
-              <a:t>케이블 노출을 최소화할 수 있도록 선을 깔끔하게 정리합니다.</a:t>
+              <a:t>3M 테이프를 활용하여 AI 카메라를 TV 밑면 가운데 위치에 부착합니다.</a:t>
             </a:r>
             <a:endParaRPr lang="en-US" sz="2000" dirty="0"/>
           </a:p>
@@ -6075,6 +6021,1517 @@
 <file path=ppt/slides/slide17.xml><?xml version="1.0" encoding="utf-8"?>
 <p:sld xmlns:a="http://schemas.openxmlformats.org/drawingml/2006/main" xmlns:r="http://schemas.openxmlformats.org/officeDocument/2006/relationships" xmlns:p="http://schemas.openxmlformats.org/presentationml/2006/main">
   <p:cSld name="Slide 17">
+    <p:bg>
+      <p:bgPr>
+        <a:solidFill>
+          <a:srgbClr val="FFFFFF"/>
+        </a:solidFill>
+      </p:bgPr>
+    </p:bg>
+    <p:spTree>
+      <p:nvGrpSpPr>
+        <p:cNvPr id="1" name=""/>
+        <p:cNvGrpSpPr/>
+        <p:nvPr/>
+      </p:nvGrpSpPr>
+      <p:grpSpPr>
+        <a:xfrm>
+          <a:off x="0" y="0"/>
+          <a:ext cx="0" cy="0"/>
+          <a:chOff x="0" y="0"/>
+          <a:chExt cx="0" cy="0"/>
+        </a:xfrm>
+      </p:grpSpPr>
+      <p:sp>
+        <p:nvSpPr>
+          <p:cNvPr id="2" name="Text 0"/>
+          <p:cNvSpPr/>
+          <p:nvPr/>
+        </p:nvSpPr>
+        <p:spPr>
+          <a:xfrm>
+            <a:off x="640080" y="411480"/>
+            <a:ext cx="6400800" cy="365760"/>
+          </a:xfrm>
+          <a:prstGeom prst="rect">
+            <a:avLst/>
+          </a:prstGeom>
+          <a:noFill/>
+          <a:ln/>
+        </p:spPr>
+        <p:txBody>
+          <a:bodyPr wrap="square" lIns="0" tIns="0" rIns="0" bIns="0" rtlCol="0" anchor="ctr"/>
+          <a:lstStyle/>
+          <a:p>
+            <a:pPr indent="0" marL="0">
+              <a:buNone/>
+            </a:pPr>
+            <a:r>
+              <a:rPr lang="en-US" sz="1600" b="1" dirty="0">
+                <a:solidFill>
+                  <a:srgbClr val="666666"/>
+                </a:solidFill>
+                <a:latin typeface="Malgun Gothic" pitchFamily="34" charset="0"/>
+                <a:ea typeface="Malgun Gothic" pitchFamily="34" charset="-122"/>
+                <a:cs typeface="Malgun Gothic" pitchFamily="34" charset="-120"/>
+              </a:rPr>
+              <a:t>계산대미디어 설치 방법</a:t>
+            </a:r>
+            <a:endParaRPr lang="en-US" sz="1600" dirty="0"/>
+          </a:p>
+        </p:txBody>
+      </p:sp>
+      <p:sp>
+        <p:nvSpPr>
+          <p:cNvPr id="3" name="Text 1"/>
+          <p:cNvSpPr/>
+          <p:nvPr/>
+        </p:nvSpPr>
+        <p:spPr>
+          <a:xfrm>
+            <a:off x="9262872" y="411480"/>
+            <a:ext cx="2286000" cy="365760"/>
+          </a:xfrm>
+          <a:prstGeom prst="rect">
+            <a:avLst/>
+          </a:prstGeom>
+          <a:noFill/>
+          <a:ln/>
+        </p:spPr>
+        <p:txBody>
+          <a:bodyPr wrap="square" lIns="0" tIns="0" rIns="0" bIns="0" rtlCol="0" anchor="ctr"/>
+          <a:lstStyle/>
+          <a:p>
+            <a:pPr algn="r" indent="0" marL="0">
+              <a:buNone/>
+            </a:pPr>
+            <a:r>
+              <a:rPr lang="en-US" sz="1400" b="1" dirty="0">
+                <a:solidFill>
+                  <a:srgbClr val="9AA0A6"/>
+                </a:solidFill>
+                <a:latin typeface="Malgun Gothic" pitchFamily="34" charset="0"/>
+                <a:ea typeface="Malgun Gothic" pitchFamily="34" charset="-122"/>
+                <a:cs typeface="Malgun Gothic" pitchFamily="34" charset="-120"/>
+              </a:rPr>
+              <a:t>STEP 6 / 7</a:t>
+            </a:r>
+            <a:endParaRPr lang="en-US" sz="1400" dirty="0"/>
+          </a:p>
+        </p:txBody>
+      </p:sp>
+      <p:sp>
+        <p:nvSpPr>
+          <p:cNvPr id="4" name="Shape 2"/>
+          <p:cNvSpPr/>
+          <p:nvPr/>
+        </p:nvSpPr>
+        <p:spPr>
+          <a:xfrm>
+            <a:off x="640080" y="1143000"/>
+            <a:ext cx="914400" cy="914400"/>
+          </a:xfrm>
+          <a:prstGeom prst="ellipse">
+            <a:avLst/>
+          </a:prstGeom>
+          <a:solidFill>
+            <a:srgbClr val="FFD400"/>
+          </a:solidFill>
+          <a:ln/>
+        </p:spPr>
+      </p:sp>
+      <p:sp>
+        <p:nvSpPr>
+          <p:cNvPr id="5" name="Text 3"/>
+          <p:cNvSpPr/>
+          <p:nvPr/>
+        </p:nvSpPr>
+        <p:spPr>
+          <a:xfrm>
+            <a:off x="640080" y="1143000"/>
+            <a:ext cx="914400" cy="914400"/>
+          </a:xfrm>
+          <a:prstGeom prst="rect">
+            <a:avLst/>
+          </a:prstGeom>
+          <a:noFill/>
+          <a:ln/>
+        </p:spPr>
+        <p:txBody>
+          <a:bodyPr wrap="square" lIns="0" tIns="0" rIns="0" bIns="0" rtlCol="0" anchor="ctr"/>
+          <a:lstStyle/>
+          <a:p>
+            <a:pPr algn="ctr" indent="0" marL="0">
+              <a:buNone/>
+            </a:pPr>
+            <a:r>
+              <a:rPr lang="en-US" sz="3600" b="1" dirty="0">
+                <a:solidFill>
+                  <a:srgbClr val="1F1F1F"/>
+                </a:solidFill>
+                <a:latin typeface="Malgun Gothic" pitchFamily="34" charset="0"/>
+                <a:ea typeface="Malgun Gothic" pitchFamily="34" charset="-122"/>
+                <a:cs typeface="Malgun Gothic" pitchFamily="34" charset="-120"/>
+              </a:rPr>
+              <a:t>6</a:t>
+            </a:r>
+            <a:endParaRPr lang="en-US" sz="3600" dirty="0"/>
+          </a:p>
+        </p:txBody>
+      </p:sp>
+      <p:sp>
+        <p:nvSpPr>
+          <p:cNvPr id="6" name="Text 4"/>
+          <p:cNvSpPr/>
+          <p:nvPr/>
+        </p:nvSpPr>
+        <p:spPr>
+          <a:xfrm>
+            <a:off x="1783080" y="1143000"/>
+            <a:ext cx="4206240" cy="914400"/>
+          </a:xfrm>
+          <a:prstGeom prst="rect">
+            <a:avLst/>
+          </a:prstGeom>
+          <a:noFill/>
+          <a:ln/>
+        </p:spPr>
+        <p:txBody>
+          <a:bodyPr wrap="square" lIns="0" tIns="0" rIns="0" bIns="0" rtlCol="0" anchor="ctr"/>
+          <a:lstStyle/>
+          <a:p>
+            <a:pPr indent="0" marL="0">
+              <a:buNone/>
+            </a:pPr>
+            <a:r>
+              <a:rPr lang="en-US" sz="3000" b="1" dirty="0">
+                <a:solidFill>
+                  <a:srgbClr val="222222"/>
+                </a:solidFill>
+                <a:latin typeface="Malgun Gothic" pitchFamily="34" charset="0"/>
+                <a:ea typeface="Malgun Gothic" pitchFamily="34" charset="-122"/>
+                <a:cs typeface="Malgun Gothic" pitchFamily="34" charset="-120"/>
+              </a:rPr>
+              <a:t>AI 카메라 설정</a:t>
+            </a:r>
+            <a:endParaRPr lang="en-US" sz="3000" dirty="0"/>
+          </a:p>
+        </p:txBody>
+      </p:sp>
+      <p:sp>
+        <p:nvSpPr>
+          <p:cNvPr id="7" name="Text 5"/>
+          <p:cNvSpPr/>
+          <p:nvPr/>
+        </p:nvSpPr>
+        <p:spPr>
+          <a:xfrm>
+            <a:off x="640080" y="2514600"/>
+            <a:ext cx="5120640" cy="548640"/>
+          </a:xfrm>
+          <a:prstGeom prst="rect">
+            <a:avLst/>
+          </a:prstGeom>
+          <a:noFill/>
+          <a:ln/>
+        </p:spPr>
+        <p:txBody>
+          <a:bodyPr wrap="square" lIns="0" tIns="0" rIns="0" bIns="0" rtlCol="0" anchor="t"/>
+          <a:lstStyle/>
+          <a:p>
+            <a:pPr indent="0" marL="0">
+              <a:lnSpc>
+                <a:spcPct val="135000"/>
+              </a:lnSpc>
+              <a:buNone/>
+            </a:pPr>
+            <a:r>
+              <a:rPr lang="en-US" sz="2000" dirty="0">
+                <a:solidFill>
+                  <a:srgbClr val="222222"/>
+                </a:solidFill>
+                <a:latin typeface="Malgun Gothic" pitchFamily="34" charset="0"/>
+                <a:ea typeface="Malgun Gothic" pitchFamily="34" charset="-122"/>
+                <a:cs typeface="Malgun Gothic" pitchFamily="34" charset="-120"/>
+              </a:rPr>
+              <a:t>아래 순서에 따라 카메라 설정을 진행합니다.</a:t>
+            </a:r>
+            <a:endParaRPr lang="en-US" sz="2000" dirty="0"/>
+          </a:p>
+        </p:txBody>
+      </p:sp>
+      <p:sp>
+        <p:nvSpPr>
+          <p:cNvPr id="8" name="Shape 6"/>
+          <p:cNvSpPr/>
+          <p:nvPr/>
+        </p:nvSpPr>
+        <p:spPr>
+          <a:xfrm>
+            <a:off x="640080" y="3200400"/>
+            <a:ext cx="365760" cy="365760"/>
+          </a:xfrm>
+          <a:prstGeom prst="ellipse">
+            <a:avLst/>
+          </a:prstGeom>
+          <a:solidFill>
+            <a:srgbClr val="FFD400"/>
+          </a:solidFill>
+          <a:ln/>
+        </p:spPr>
+      </p:sp>
+      <p:sp>
+        <p:nvSpPr>
+          <p:cNvPr id="9" name="Text 7"/>
+          <p:cNvSpPr/>
+          <p:nvPr/>
+        </p:nvSpPr>
+        <p:spPr>
+          <a:xfrm>
+            <a:off x="640080" y="3200400"/>
+            <a:ext cx="365760" cy="365760"/>
+          </a:xfrm>
+          <a:prstGeom prst="rect">
+            <a:avLst/>
+          </a:prstGeom>
+          <a:noFill/>
+          <a:ln/>
+        </p:spPr>
+        <p:txBody>
+          <a:bodyPr wrap="square" lIns="0" tIns="0" rIns="0" bIns="0" rtlCol="0" anchor="ctr"/>
+          <a:lstStyle/>
+          <a:p>
+            <a:pPr algn="ctr" indent="0" marL="0">
+              <a:buNone/>
+            </a:pPr>
+            <a:r>
+              <a:rPr lang="en-US" sz="1400" b="1" dirty="0">
+                <a:solidFill>
+                  <a:srgbClr val="1F1F1F"/>
+                </a:solidFill>
+                <a:latin typeface="Malgun Gothic" pitchFamily="34" charset="0"/>
+                <a:ea typeface="Malgun Gothic" pitchFamily="34" charset="-122"/>
+                <a:cs typeface="Malgun Gothic" pitchFamily="34" charset="-120"/>
+              </a:rPr>
+              <a:t>1</a:t>
+            </a:r>
+            <a:endParaRPr lang="en-US" sz="1400" dirty="0"/>
+          </a:p>
+        </p:txBody>
+      </p:sp>
+      <p:sp>
+        <p:nvSpPr>
+          <p:cNvPr id="10" name="Text 8"/>
+          <p:cNvSpPr/>
+          <p:nvPr/>
+        </p:nvSpPr>
+        <p:spPr>
+          <a:xfrm>
+            <a:off x="1188720" y="3154680"/>
+            <a:ext cx="4663440" cy="457200"/>
+          </a:xfrm>
+          <a:prstGeom prst="rect">
+            <a:avLst/>
+          </a:prstGeom>
+          <a:noFill/>
+          <a:ln/>
+        </p:spPr>
+        <p:txBody>
+          <a:bodyPr wrap="square" lIns="0" tIns="0" rIns="0" bIns="0" rtlCol="0" anchor="ctr"/>
+          <a:lstStyle/>
+          <a:p>
+            <a:pPr indent="0" marL="0">
+              <a:buNone/>
+            </a:pPr>
+            <a:r>
+              <a:rPr lang="en-US" sz="1600" dirty="0">
+                <a:solidFill>
+                  <a:srgbClr val="222222"/>
+                </a:solidFill>
+                <a:latin typeface="Malgun Gothic" pitchFamily="34" charset="0"/>
+                <a:ea typeface="Malgun Gothic" pitchFamily="34" charset="-122"/>
+                <a:cs typeface="Malgun Gothic" pitchFamily="34" charset="-120"/>
+              </a:rPr>
+              <a:t>히든키 입력 (되감기 0407)</a:t>
+            </a:r>
+            <a:endParaRPr lang="en-US" sz="1600" dirty="0"/>
+          </a:p>
+        </p:txBody>
+      </p:sp>
+      <p:sp>
+        <p:nvSpPr>
+          <p:cNvPr id="11" name="Shape 9"/>
+          <p:cNvSpPr/>
+          <p:nvPr/>
+        </p:nvSpPr>
+        <p:spPr>
+          <a:xfrm>
+            <a:off x="640080" y="3730752"/>
+            <a:ext cx="365760" cy="365760"/>
+          </a:xfrm>
+          <a:prstGeom prst="ellipse">
+            <a:avLst/>
+          </a:prstGeom>
+          <a:solidFill>
+            <a:srgbClr val="FFD400"/>
+          </a:solidFill>
+          <a:ln/>
+        </p:spPr>
+      </p:sp>
+      <p:sp>
+        <p:nvSpPr>
+          <p:cNvPr id="12" name="Text 10"/>
+          <p:cNvSpPr/>
+          <p:nvPr/>
+        </p:nvSpPr>
+        <p:spPr>
+          <a:xfrm>
+            <a:off x="640080" y="3730752"/>
+            <a:ext cx="365760" cy="365760"/>
+          </a:xfrm>
+          <a:prstGeom prst="rect">
+            <a:avLst/>
+          </a:prstGeom>
+          <a:noFill/>
+          <a:ln/>
+        </p:spPr>
+        <p:txBody>
+          <a:bodyPr wrap="square" lIns="0" tIns="0" rIns="0" bIns="0" rtlCol="0" anchor="ctr"/>
+          <a:lstStyle/>
+          <a:p>
+            <a:pPr algn="ctr" indent="0" marL="0">
+              <a:buNone/>
+            </a:pPr>
+            <a:r>
+              <a:rPr lang="en-US" sz="1400" b="1" dirty="0">
+                <a:solidFill>
+                  <a:srgbClr val="1F1F1F"/>
+                </a:solidFill>
+                <a:latin typeface="Malgun Gothic" pitchFamily="34" charset="0"/>
+                <a:ea typeface="Malgun Gothic" pitchFamily="34" charset="-122"/>
+                <a:cs typeface="Malgun Gothic" pitchFamily="34" charset="-120"/>
+              </a:rPr>
+              <a:t>2</a:t>
+            </a:r>
+            <a:endParaRPr lang="en-US" sz="1400" dirty="0"/>
+          </a:p>
+        </p:txBody>
+      </p:sp>
+      <p:sp>
+        <p:nvSpPr>
+          <p:cNvPr id="13" name="Text 11"/>
+          <p:cNvSpPr/>
+          <p:nvPr/>
+        </p:nvSpPr>
+        <p:spPr>
+          <a:xfrm>
+            <a:off x="1188720" y="3685032"/>
+            <a:ext cx="4663440" cy="457200"/>
+          </a:xfrm>
+          <a:prstGeom prst="rect">
+            <a:avLst/>
+          </a:prstGeom>
+          <a:noFill/>
+          <a:ln/>
+        </p:spPr>
+        <p:txBody>
+          <a:bodyPr wrap="square" lIns="0" tIns="0" rIns="0" bIns="0" rtlCol="0" anchor="ctr"/>
+          <a:lstStyle/>
+          <a:p>
+            <a:pPr indent="0" marL="0">
+              <a:buNone/>
+            </a:pPr>
+            <a:r>
+              <a:rPr lang="en-US" sz="1600" dirty="0">
+                <a:solidFill>
+                  <a:srgbClr val="222222"/>
+                </a:solidFill>
+                <a:latin typeface="Malgun Gothic" pitchFamily="34" charset="0"/>
+                <a:ea typeface="Malgun Gothic" pitchFamily="34" charset="-122"/>
+                <a:cs typeface="Malgun Gothic" pitchFamily="34" charset="-120"/>
+              </a:rPr>
+              <a:t>카메라 설정 진행하기</a:t>
+            </a:r>
+            <a:endParaRPr lang="en-US" sz="1600" dirty="0"/>
+          </a:p>
+        </p:txBody>
+      </p:sp>
+      <p:sp>
+        <p:nvSpPr>
+          <p:cNvPr id="14" name="Shape 12"/>
+          <p:cNvSpPr/>
+          <p:nvPr/>
+        </p:nvSpPr>
+        <p:spPr>
+          <a:xfrm>
+            <a:off x="640080" y="4261104"/>
+            <a:ext cx="365760" cy="365760"/>
+          </a:xfrm>
+          <a:prstGeom prst="ellipse">
+            <a:avLst/>
+          </a:prstGeom>
+          <a:solidFill>
+            <a:srgbClr val="FFD400"/>
+          </a:solidFill>
+          <a:ln/>
+        </p:spPr>
+      </p:sp>
+      <p:sp>
+        <p:nvSpPr>
+          <p:cNvPr id="15" name="Text 13"/>
+          <p:cNvSpPr/>
+          <p:nvPr/>
+        </p:nvSpPr>
+        <p:spPr>
+          <a:xfrm>
+            <a:off x="640080" y="4261104"/>
+            <a:ext cx="365760" cy="365760"/>
+          </a:xfrm>
+          <a:prstGeom prst="rect">
+            <a:avLst/>
+          </a:prstGeom>
+          <a:noFill/>
+          <a:ln/>
+        </p:spPr>
+        <p:txBody>
+          <a:bodyPr wrap="square" lIns="0" tIns="0" rIns="0" bIns="0" rtlCol="0" anchor="ctr"/>
+          <a:lstStyle/>
+          <a:p>
+            <a:pPr algn="ctr" indent="0" marL="0">
+              <a:buNone/>
+            </a:pPr>
+            <a:r>
+              <a:rPr lang="en-US" sz="1400" b="1" dirty="0">
+                <a:solidFill>
+                  <a:srgbClr val="1F1F1F"/>
+                </a:solidFill>
+                <a:latin typeface="Malgun Gothic" pitchFamily="34" charset="0"/>
+                <a:ea typeface="Malgun Gothic" pitchFamily="34" charset="-122"/>
+                <a:cs typeface="Malgun Gothic" pitchFamily="34" charset="-120"/>
+              </a:rPr>
+              <a:t>3</a:t>
+            </a:r>
+            <a:endParaRPr lang="en-US" sz="1400" dirty="0"/>
+          </a:p>
+        </p:txBody>
+      </p:sp>
+      <p:sp>
+        <p:nvSpPr>
+          <p:cNvPr id="16" name="Text 14"/>
+          <p:cNvSpPr/>
+          <p:nvPr/>
+        </p:nvSpPr>
+        <p:spPr>
+          <a:xfrm>
+            <a:off x="1188720" y="4215384"/>
+            <a:ext cx="4663440" cy="457200"/>
+          </a:xfrm>
+          <a:prstGeom prst="rect">
+            <a:avLst/>
+          </a:prstGeom>
+          <a:noFill/>
+          <a:ln/>
+        </p:spPr>
+        <p:txBody>
+          <a:bodyPr wrap="square" lIns="0" tIns="0" rIns="0" bIns="0" rtlCol="0" anchor="ctr"/>
+          <a:lstStyle/>
+          <a:p>
+            <a:pPr indent="0" marL="0">
+              <a:buNone/>
+            </a:pPr>
+            <a:r>
+              <a:rPr lang="en-US" sz="1600" dirty="0">
+                <a:solidFill>
+                  <a:srgbClr val="222222"/>
+                </a:solidFill>
+                <a:latin typeface="Malgun Gothic" pitchFamily="34" charset="0"/>
+                <a:ea typeface="Malgun Gothic" pitchFamily="34" charset="-122"/>
+                <a:cs typeface="Malgun Gothic" pitchFamily="34" charset="-120"/>
+              </a:rPr>
+              <a:t>카메라 송출 영상 및 화각 확인 후 '다음' 선택</a:t>
+            </a:r>
+            <a:endParaRPr lang="en-US" sz="1600" dirty="0"/>
+          </a:p>
+        </p:txBody>
+      </p:sp>
+      <p:sp>
+        <p:nvSpPr>
+          <p:cNvPr id="17" name="Shape 15"/>
+          <p:cNvSpPr/>
+          <p:nvPr/>
+        </p:nvSpPr>
+        <p:spPr>
+          <a:xfrm>
+            <a:off x="640080" y="4791456"/>
+            <a:ext cx="365760" cy="365760"/>
+          </a:xfrm>
+          <a:prstGeom prst="ellipse">
+            <a:avLst/>
+          </a:prstGeom>
+          <a:solidFill>
+            <a:srgbClr val="FFD400"/>
+          </a:solidFill>
+          <a:ln/>
+        </p:spPr>
+      </p:sp>
+      <p:sp>
+        <p:nvSpPr>
+          <p:cNvPr id="18" name="Text 16"/>
+          <p:cNvSpPr/>
+          <p:nvPr/>
+        </p:nvSpPr>
+        <p:spPr>
+          <a:xfrm>
+            <a:off x="640080" y="4791456"/>
+            <a:ext cx="365760" cy="365760"/>
+          </a:xfrm>
+          <a:prstGeom prst="rect">
+            <a:avLst/>
+          </a:prstGeom>
+          <a:noFill/>
+          <a:ln/>
+        </p:spPr>
+        <p:txBody>
+          <a:bodyPr wrap="square" lIns="0" tIns="0" rIns="0" bIns="0" rtlCol="0" anchor="ctr"/>
+          <a:lstStyle/>
+          <a:p>
+            <a:pPr algn="ctr" indent="0" marL="0">
+              <a:buNone/>
+            </a:pPr>
+            <a:r>
+              <a:rPr lang="en-US" sz="1400" b="1" dirty="0">
+                <a:solidFill>
+                  <a:srgbClr val="1F1F1F"/>
+                </a:solidFill>
+                <a:latin typeface="Malgun Gothic" pitchFamily="34" charset="0"/>
+                <a:ea typeface="Malgun Gothic" pitchFamily="34" charset="-122"/>
+                <a:cs typeface="Malgun Gothic" pitchFamily="34" charset="-120"/>
+              </a:rPr>
+              <a:t>4</a:t>
+            </a:r>
+            <a:endParaRPr lang="en-US" sz="1400" dirty="0"/>
+          </a:p>
+        </p:txBody>
+      </p:sp>
+      <p:sp>
+        <p:nvSpPr>
+          <p:cNvPr id="19" name="Text 17"/>
+          <p:cNvSpPr/>
+          <p:nvPr/>
+        </p:nvSpPr>
+        <p:spPr>
+          <a:xfrm>
+            <a:off x="1188720" y="4745736"/>
+            <a:ext cx="4663440" cy="457200"/>
+          </a:xfrm>
+          <a:prstGeom prst="rect">
+            <a:avLst/>
+          </a:prstGeom>
+          <a:noFill/>
+          <a:ln/>
+        </p:spPr>
+        <p:txBody>
+          <a:bodyPr wrap="square" lIns="0" tIns="0" rIns="0" bIns="0" rtlCol="0" anchor="ctr"/>
+          <a:lstStyle/>
+          <a:p>
+            <a:pPr indent="0" marL="0">
+              <a:buNone/>
+            </a:pPr>
+            <a:r>
+              <a:rPr lang="en-US" sz="1600" dirty="0">
+                <a:solidFill>
+                  <a:srgbClr val="222222"/>
+                </a:solidFill>
+                <a:latin typeface="Malgun Gothic" pitchFamily="34" charset="0"/>
+                <a:ea typeface="Malgun Gothic" pitchFamily="34" charset="-122"/>
+                <a:cs typeface="Malgun Gothic" pitchFamily="34" charset="-120"/>
+              </a:rPr>
+              <a:t>서버 통신 테스트</a:t>
+            </a:r>
+            <a:endParaRPr lang="en-US" sz="1600" dirty="0"/>
+          </a:p>
+        </p:txBody>
+      </p:sp>
+      <p:sp>
+        <p:nvSpPr>
+          <p:cNvPr id="20" name="Text 18"/>
+          <p:cNvSpPr/>
+          <p:nvPr/>
+        </p:nvSpPr>
+        <p:spPr>
+          <a:xfrm>
+            <a:off x="640080" y="5458968"/>
+            <a:ext cx="5394960" cy="320040"/>
+          </a:xfrm>
+          <a:prstGeom prst="rect">
+            <a:avLst/>
+          </a:prstGeom>
+          <a:noFill/>
+          <a:ln/>
+        </p:spPr>
+        <p:txBody>
+          <a:bodyPr wrap="square" lIns="0" tIns="0" rIns="0" bIns="0" rtlCol="0" anchor="ctr"/>
+          <a:lstStyle/>
+          <a:p>
+            <a:pPr indent="0" marL="0">
+              <a:buNone/>
+            </a:pPr>
+            <a:r>
+              <a:rPr lang="en-US" sz="1300" dirty="0">
+                <a:solidFill>
+                  <a:srgbClr val="666666"/>
+                </a:solidFill>
+                <a:latin typeface="Malgun Gothic" pitchFamily="34" charset="0"/>
+                <a:ea typeface="Malgun Gothic" pitchFamily="34" charset="-122"/>
+                <a:cs typeface="Malgun Gothic" pitchFamily="34" charset="-120"/>
+              </a:rPr>
+              <a:t>※ 세부 내용은 시범 설치 후 업데이트 예정</a:t>
+            </a:r>
+            <a:endParaRPr lang="en-US" sz="1300" dirty="0"/>
+          </a:p>
+        </p:txBody>
+      </p:sp>
+      <p:sp>
+        <p:nvSpPr>
+          <p:cNvPr id="21" name="Shape 19"/>
+          <p:cNvSpPr/>
+          <p:nvPr/>
+        </p:nvSpPr>
+        <p:spPr>
+          <a:xfrm>
+            <a:off x="6126480" y="1143000"/>
+            <a:ext cx="5394960" cy="2423160"/>
+          </a:xfrm>
+          <a:prstGeom prst="roundRect">
+            <a:avLst>
+              <a:gd name="adj" fmla="val 3019"/>
+            </a:avLst>
+          </a:prstGeom>
+          <a:solidFill>
+            <a:srgbClr val="F5F5F5"/>
+          </a:solidFill>
+          <a:ln w="19050">
+            <a:solidFill>
+              <a:srgbClr val="9AA0A6"/>
+            </a:solidFill>
+            <a:prstDash val="dash"/>
+          </a:ln>
+        </p:spPr>
+      </p:sp>
+      <p:pic>
+        <p:nvPicPr>
+          <p:cNvPr id="22" name="Image 0" descr="preencoded.png">    </p:cNvPr>
+          <p:cNvPicPr>
+            <a:picLocks noChangeAspect="1"/>
+          </p:cNvPicPr>
+          <p:nvPr/>
+        </p:nvPicPr>
+        <p:blipFill>
+          <a:blip r:embed="rId1"/>
+          <a:stretch>
+            <a:fillRect/>
+          </a:stretch>
+        </p:blipFill>
+        <p:spPr>
+          <a:xfrm>
+            <a:off x="8503920" y="1805940"/>
+            <a:ext cx="640080" cy="640080"/>
+          </a:xfrm>
+          <a:prstGeom prst="rect">
+            <a:avLst/>
+          </a:prstGeom>
+        </p:spPr>
+      </p:pic>
+      <p:sp>
+        <p:nvSpPr>
+          <p:cNvPr id="23" name="Text 20"/>
+          <p:cNvSpPr/>
+          <p:nvPr/>
+        </p:nvSpPr>
+        <p:spPr>
+          <a:xfrm>
+            <a:off x="6126480" y="2491740"/>
+            <a:ext cx="5394960" cy="457200"/>
+          </a:xfrm>
+          <a:prstGeom prst="rect">
+            <a:avLst/>
+          </a:prstGeom>
+          <a:noFill/>
+          <a:ln/>
+        </p:spPr>
+        <p:txBody>
+          <a:bodyPr wrap="square" lIns="0" tIns="0" rIns="0" bIns="0" rtlCol="0" anchor="ctr"/>
+          <a:lstStyle/>
+          <a:p>
+            <a:pPr algn="ctr" indent="0" marL="0">
+              <a:buNone/>
+            </a:pPr>
+            <a:r>
+              <a:rPr lang="en-US" sz="1400" dirty="0">
+                <a:solidFill>
+                  <a:srgbClr val="9AA0A6"/>
+                </a:solidFill>
+                <a:latin typeface="Malgun Gothic" pitchFamily="34" charset="0"/>
+                <a:ea typeface="Malgun Gothic" pitchFamily="34" charset="-122"/>
+                <a:cs typeface="Malgun Gothic" pitchFamily="34" charset="-120"/>
+              </a:rPr>
+              <a:t>사진: 매장 내부 카메라</a:t>
+            </a:r>
+            <a:endParaRPr lang="en-US" sz="1400" dirty="0"/>
+          </a:p>
+        </p:txBody>
+      </p:sp>
+      <p:sp>
+        <p:nvSpPr>
+          <p:cNvPr id="24" name="Text 21"/>
+          <p:cNvSpPr/>
+          <p:nvPr/>
+        </p:nvSpPr>
+        <p:spPr>
+          <a:xfrm>
+            <a:off x="6126480" y="1234440"/>
+            <a:ext cx="1463040" cy="320040"/>
+          </a:xfrm>
+          <a:prstGeom prst="rect">
+            <a:avLst/>
+          </a:prstGeom>
+          <a:noFill/>
+          <a:ln/>
+        </p:spPr>
+        <p:txBody>
+          <a:bodyPr wrap="square" rtlCol="0" anchor="ctr"/>
+          <a:lstStyle/>
+          <a:p>
+            <a:pPr algn="ctr" indent="0" marL="0">
+              <a:buNone/>
+            </a:pPr>
+            <a:r>
+              <a:rPr lang="en-US" sz="1200" b="1" dirty="0">
+                <a:solidFill>
+                  <a:srgbClr val="666666"/>
+                </a:solidFill>
+                <a:latin typeface="Malgun Gothic" pitchFamily="34" charset="0"/>
+                <a:ea typeface="Malgun Gothic" pitchFamily="34" charset="-122"/>
+                <a:cs typeface="Malgun Gothic" pitchFamily="34" charset="-120"/>
+              </a:rPr>
+              <a:t>매장 내부</a:t>
+            </a:r>
+            <a:endParaRPr lang="en-US" sz="1200" dirty="0"/>
+          </a:p>
+        </p:txBody>
+      </p:sp>
+      <p:sp>
+        <p:nvSpPr>
+          <p:cNvPr id="25" name="Shape 22"/>
+          <p:cNvSpPr/>
+          <p:nvPr/>
+        </p:nvSpPr>
+        <p:spPr>
+          <a:xfrm>
+            <a:off x="6126480" y="3840480"/>
+            <a:ext cx="5394960" cy="2423160"/>
+          </a:xfrm>
+          <a:prstGeom prst="roundRect">
+            <a:avLst>
+              <a:gd name="adj" fmla="val 3019"/>
+            </a:avLst>
+          </a:prstGeom>
+          <a:solidFill>
+            <a:srgbClr val="F5F5F5"/>
+          </a:solidFill>
+          <a:ln w="19050">
+            <a:solidFill>
+              <a:srgbClr val="9AA0A6"/>
+            </a:solidFill>
+            <a:prstDash val="dash"/>
+          </a:ln>
+        </p:spPr>
+      </p:sp>
+      <p:pic>
+        <p:nvPicPr>
+          <p:cNvPr id="26" name="Image 1" descr="preencoded.png">    </p:cNvPr>
+          <p:cNvPicPr>
+            <a:picLocks noChangeAspect="1"/>
+          </p:cNvPicPr>
+          <p:nvPr/>
+        </p:nvPicPr>
+        <p:blipFill>
+          <a:blip r:embed="rId2"/>
+          <a:stretch>
+            <a:fillRect/>
+          </a:stretch>
+        </p:blipFill>
+        <p:spPr>
+          <a:xfrm>
+            <a:off x="8503920" y="4503420"/>
+            <a:ext cx="640080" cy="640080"/>
+          </a:xfrm>
+          <a:prstGeom prst="rect">
+            <a:avLst/>
+          </a:prstGeom>
+        </p:spPr>
+      </p:pic>
+      <p:sp>
+        <p:nvSpPr>
+          <p:cNvPr id="27" name="Text 23"/>
+          <p:cNvSpPr/>
+          <p:nvPr/>
+        </p:nvSpPr>
+        <p:spPr>
+          <a:xfrm>
+            <a:off x="6126480" y="5189220"/>
+            <a:ext cx="5394960" cy="457200"/>
+          </a:xfrm>
+          <a:prstGeom prst="rect">
+            <a:avLst/>
+          </a:prstGeom>
+          <a:noFill/>
+          <a:ln/>
+        </p:spPr>
+        <p:txBody>
+          <a:bodyPr wrap="square" lIns="0" tIns="0" rIns="0" bIns="0" rtlCol="0" anchor="ctr"/>
+          <a:lstStyle/>
+          <a:p>
+            <a:pPr algn="ctr" indent="0" marL="0">
+              <a:buNone/>
+            </a:pPr>
+            <a:r>
+              <a:rPr lang="en-US" sz="1400" dirty="0">
+                <a:solidFill>
+                  <a:srgbClr val="9AA0A6"/>
+                </a:solidFill>
+                <a:latin typeface="Malgun Gothic" pitchFamily="34" charset="0"/>
+                <a:ea typeface="Malgun Gothic" pitchFamily="34" charset="-122"/>
+                <a:cs typeface="Malgun Gothic" pitchFamily="34" charset="-120"/>
+              </a:rPr>
+              <a:t>사진: 매장 외부 카메라</a:t>
+            </a:r>
+            <a:endParaRPr lang="en-US" sz="1400" dirty="0"/>
+          </a:p>
+        </p:txBody>
+      </p:sp>
+      <p:sp>
+        <p:nvSpPr>
+          <p:cNvPr id="28" name="Text 24"/>
+          <p:cNvSpPr/>
+          <p:nvPr/>
+        </p:nvSpPr>
+        <p:spPr>
+          <a:xfrm>
+            <a:off x="6126480" y="3931920"/>
+            <a:ext cx="1463040" cy="320040"/>
+          </a:xfrm>
+          <a:prstGeom prst="rect">
+            <a:avLst/>
+          </a:prstGeom>
+          <a:noFill/>
+          <a:ln/>
+        </p:spPr>
+        <p:txBody>
+          <a:bodyPr wrap="square" rtlCol="0" anchor="ctr"/>
+          <a:lstStyle/>
+          <a:p>
+            <a:pPr algn="ctr" indent="0" marL="0">
+              <a:buNone/>
+            </a:pPr>
+            <a:r>
+              <a:rPr lang="en-US" sz="1200" b="1" dirty="0">
+                <a:solidFill>
+                  <a:srgbClr val="666666"/>
+                </a:solidFill>
+                <a:latin typeface="Malgun Gothic" pitchFamily="34" charset="0"/>
+                <a:ea typeface="Malgun Gothic" pitchFamily="34" charset="-122"/>
+                <a:cs typeface="Malgun Gothic" pitchFamily="34" charset="-120"/>
+              </a:rPr>
+              <a:t>매장 외부</a:t>
+            </a:r>
+            <a:endParaRPr lang="en-US" sz="1200" dirty="0"/>
+          </a:p>
+        </p:txBody>
+      </p:sp>
+    </p:spTree>
+  </p:cSld>
+  <p:clrMapOvr>
+    <a:masterClrMapping/>
+  </p:clrMapOvr>
+</p:sld>
+</file>
+
+<file path=ppt/slides/slide18.xml><?xml version="1.0" encoding="utf-8"?>
+<p:sld xmlns:a="http://schemas.openxmlformats.org/drawingml/2006/main" xmlns:r="http://schemas.openxmlformats.org/officeDocument/2006/relationships" xmlns:p="http://schemas.openxmlformats.org/presentationml/2006/main">
+  <p:cSld name="Slide 18">
+    <p:bg>
+      <p:bgPr>
+        <a:solidFill>
+          <a:srgbClr val="FFFFFF"/>
+        </a:solidFill>
+      </p:bgPr>
+    </p:bg>
+    <p:spTree>
+      <p:nvGrpSpPr>
+        <p:cNvPr id="1" name=""/>
+        <p:cNvGrpSpPr/>
+        <p:nvPr/>
+      </p:nvGrpSpPr>
+      <p:grpSpPr>
+        <a:xfrm>
+          <a:off x="0" y="0"/>
+          <a:ext cx="0" cy="0"/>
+          <a:chOff x="0" y="0"/>
+          <a:chExt cx="0" cy="0"/>
+        </a:xfrm>
+      </p:grpSpPr>
+      <p:sp>
+        <p:nvSpPr>
+          <p:cNvPr id="2" name="Text 0"/>
+          <p:cNvSpPr/>
+          <p:nvPr/>
+        </p:nvSpPr>
+        <p:spPr>
+          <a:xfrm>
+            <a:off x="640080" y="411480"/>
+            <a:ext cx="6400800" cy="365760"/>
+          </a:xfrm>
+          <a:prstGeom prst="rect">
+            <a:avLst/>
+          </a:prstGeom>
+          <a:noFill/>
+          <a:ln/>
+        </p:spPr>
+        <p:txBody>
+          <a:bodyPr wrap="square" lIns="0" tIns="0" rIns="0" bIns="0" rtlCol="0" anchor="ctr"/>
+          <a:lstStyle/>
+          <a:p>
+            <a:pPr indent="0" marL="0">
+              <a:buNone/>
+            </a:pPr>
+            <a:r>
+              <a:rPr lang="en-US" sz="1600" b="1" dirty="0">
+                <a:solidFill>
+                  <a:srgbClr val="666666"/>
+                </a:solidFill>
+                <a:latin typeface="Malgun Gothic" pitchFamily="34" charset="0"/>
+                <a:ea typeface="Malgun Gothic" pitchFamily="34" charset="-122"/>
+                <a:cs typeface="Malgun Gothic" pitchFamily="34" charset="-120"/>
+              </a:rPr>
+              <a:t>계산대미디어 설치 방법</a:t>
+            </a:r>
+            <a:endParaRPr lang="en-US" sz="1600" dirty="0"/>
+          </a:p>
+        </p:txBody>
+      </p:sp>
+      <p:sp>
+        <p:nvSpPr>
+          <p:cNvPr id="3" name="Text 1"/>
+          <p:cNvSpPr/>
+          <p:nvPr/>
+        </p:nvSpPr>
+        <p:spPr>
+          <a:xfrm>
+            <a:off x="9262872" y="411480"/>
+            <a:ext cx="2286000" cy="365760"/>
+          </a:xfrm>
+          <a:prstGeom prst="rect">
+            <a:avLst/>
+          </a:prstGeom>
+          <a:noFill/>
+          <a:ln/>
+        </p:spPr>
+        <p:txBody>
+          <a:bodyPr wrap="square" lIns="0" tIns="0" rIns="0" bIns="0" rtlCol="0" anchor="ctr"/>
+          <a:lstStyle/>
+          <a:p>
+            <a:pPr algn="r" indent="0" marL="0">
+              <a:buNone/>
+            </a:pPr>
+            <a:r>
+              <a:rPr lang="en-US" sz="1400" b="1" dirty="0">
+                <a:solidFill>
+                  <a:srgbClr val="9AA0A6"/>
+                </a:solidFill>
+                <a:latin typeface="Malgun Gothic" pitchFamily="34" charset="0"/>
+                <a:ea typeface="Malgun Gothic" pitchFamily="34" charset="-122"/>
+                <a:cs typeface="Malgun Gothic" pitchFamily="34" charset="-120"/>
+              </a:rPr>
+              <a:t>STEP 7 / 7</a:t>
+            </a:r>
+            <a:endParaRPr lang="en-US" sz="1400" dirty="0"/>
+          </a:p>
+        </p:txBody>
+      </p:sp>
+      <p:sp>
+        <p:nvSpPr>
+          <p:cNvPr id="4" name="Shape 2"/>
+          <p:cNvSpPr/>
+          <p:nvPr/>
+        </p:nvSpPr>
+        <p:spPr>
+          <a:xfrm>
+            <a:off x="640080" y="1143000"/>
+            <a:ext cx="914400" cy="914400"/>
+          </a:xfrm>
+          <a:prstGeom prst="ellipse">
+            <a:avLst/>
+          </a:prstGeom>
+          <a:solidFill>
+            <a:srgbClr val="FFD400"/>
+          </a:solidFill>
+          <a:ln/>
+        </p:spPr>
+      </p:sp>
+      <p:sp>
+        <p:nvSpPr>
+          <p:cNvPr id="5" name="Text 3"/>
+          <p:cNvSpPr/>
+          <p:nvPr/>
+        </p:nvSpPr>
+        <p:spPr>
+          <a:xfrm>
+            <a:off x="640080" y="1143000"/>
+            <a:ext cx="914400" cy="914400"/>
+          </a:xfrm>
+          <a:prstGeom prst="rect">
+            <a:avLst/>
+          </a:prstGeom>
+          <a:noFill/>
+          <a:ln/>
+        </p:spPr>
+        <p:txBody>
+          <a:bodyPr wrap="square" lIns="0" tIns="0" rIns="0" bIns="0" rtlCol="0" anchor="ctr"/>
+          <a:lstStyle/>
+          <a:p>
+            <a:pPr algn="ctr" indent="0" marL="0">
+              <a:buNone/>
+            </a:pPr>
+            <a:r>
+              <a:rPr lang="en-US" sz="3600" b="1" dirty="0">
+                <a:solidFill>
+                  <a:srgbClr val="1F1F1F"/>
+                </a:solidFill>
+                <a:latin typeface="Malgun Gothic" pitchFamily="34" charset="0"/>
+                <a:ea typeface="Malgun Gothic" pitchFamily="34" charset="-122"/>
+                <a:cs typeface="Malgun Gothic" pitchFamily="34" charset="-120"/>
+              </a:rPr>
+              <a:t>7</a:t>
+            </a:r>
+            <a:endParaRPr lang="en-US" sz="3600" dirty="0"/>
+          </a:p>
+        </p:txBody>
+      </p:sp>
+      <p:sp>
+        <p:nvSpPr>
+          <p:cNvPr id="6" name="Text 4"/>
+          <p:cNvSpPr/>
+          <p:nvPr/>
+        </p:nvSpPr>
+        <p:spPr>
+          <a:xfrm>
+            <a:off x="1783080" y="1143000"/>
+            <a:ext cx="4206240" cy="914400"/>
+          </a:xfrm>
+          <a:prstGeom prst="rect">
+            <a:avLst/>
+          </a:prstGeom>
+          <a:noFill/>
+          <a:ln/>
+        </p:spPr>
+        <p:txBody>
+          <a:bodyPr wrap="square" lIns="0" tIns="0" rIns="0" bIns="0" rtlCol="0" anchor="ctr"/>
+          <a:lstStyle/>
+          <a:p>
+            <a:pPr indent="0" marL="0">
+              <a:buNone/>
+            </a:pPr>
+            <a:r>
+              <a:rPr lang="en-US" sz="3000" b="1" dirty="0">
+                <a:solidFill>
+                  <a:srgbClr val="222222"/>
+                </a:solidFill>
+                <a:latin typeface="Malgun Gothic" pitchFamily="34" charset="0"/>
+                <a:ea typeface="Malgun Gothic" pitchFamily="34" charset="-122"/>
+                <a:cs typeface="Malgun Gothic" pitchFamily="34" charset="-120"/>
+              </a:rPr>
+              <a:t>케이블 정리</a:t>
+            </a:r>
+            <a:endParaRPr lang="en-US" sz="3000" dirty="0"/>
+          </a:p>
+        </p:txBody>
+      </p:sp>
+      <p:sp>
+        <p:nvSpPr>
+          <p:cNvPr id="7" name="Text 5"/>
+          <p:cNvSpPr/>
+          <p:nvPr/>
+        </p:nvSpPr>
+        <p:spPr>
+          <a:xfrm>
+            <a:off x="640080" y="2514600"/>
+            <a:ext cx="5120640" cy="2011680"/>
+          </a:xfrm>
+          <a:prstGeom prst="rect">
+            <a:avLst/>
+          </a:prstGeom>
+          <a:noFill/>
+          <a:ln/>
+        </p:spPr>
+        <p:txBody>
+          <a:bodyPr wrap="square" lIns="0" tIns="0" rIns="0" bIns="0" rtlCol="0" anchor="t"/>
+          <a:lstStyle/>
+          <a:p>
+            <a:pPr indent="0" marL="0">
+              <a:lnSpc>
+                <a:spcPct val="135000"/>
+              </a:lnSpc>
+              <a:buNone/>
+            </a:pPr>
+            <a:r>
+              <a:rPr lang="en-US" sz="2000" dirty="0">
+                <a:solidFill>
+                  <a:srgbClr val="222222"/>
+                </a:solidFill>
+                <a:latin typeface="Malgun Gothic" pitchFamily="34" charset="0"/>
+                <a:ea typeface="Malgun Gothic" pitchFamily="34" charset="-122"/>
+                <a:cs typeface="Malgun Gothic" pitchFamily="34" charset="-120"/>
+              </a:rPr>
+              <a:t>케이블 노출을 최소화할 수 있도록 선을 깔끔하게 정리합니다.</a:t>
+            </a:r>
+            <a:endParaRPr lang="en-US" sz="2000" dirty="0"/>
+          </a:p>
+        </p:txBody>
+      </p:sp>
+      <p:sp>
+        <p:nvSpPr>
+          <p:cNvPr id="8" name="Shape 6"/>
+          <p:cNvSpPr/>
+          <p:nvPr/>
+        </p:nvSpPr>
+        <p:spPr>
+          <a:xfrm>
+            <a:off x="640080" y="5120640"/>
+            <a:ext cx="5120640" cy="1097280"/>
+          </a:xfrm>
+          <a:prstGeom prst="roundRect">
+            <a:avLst>
+              <a:gd name="adj" fmla="val 6667"/>
+            </a:avLst>
+          </a:prstGeom>
+          <a:solidFill>
+            <a:srgbClr val="FFF7CC"/>
+          </a:solidFill>
+          <a:ln/>
+        </p:spPr>
+      </p:sp>
+      <p:sp>
+        <p:nvSpPr>
+          <p:cNvPr id="9" name="Text 7"/>
+          <p:cNvSpPr/>
+          <p:nvPr/>
+        </p:nvSpPr>
+        <p:spPr>
+          <a:xfrm>
+            <a:off x="868680" y="5120640"/>
+            <a:ext cx="4663440" cy="1097280"/>
+          </a:xfrm>
+          <a:prstGeom prst="rect">
+            <a:avLst/>
+          </a:prstGeom>
+          <a:noFill/>
+          <a:ln/>
+        </p:spPr>
+        <p:txBody>
+          <a:bodyPr wrap="square" lIns="0" tIns="0" rIns="0" bIns="0" rtlCol="0" anchor="ctr"/>
+          <a:lstStyle/>
+          <a:p>
+            <a:pPr indent="0" marL="0">
+              <a:lnSpc>
+                <a:spcPct val="125000"/>
+              </a:lnSpc>
+              <a:buNone/>
+            </a:pPr>
+            <a:r>
+              <a:rPr lang="en-US" sz="1500" dirty="0">
+                <a:solidFill>
+                  <a:srgbClr val="222222"/>
+                </a:solidFill>
+                <a:latin typeface="Malgun Gothic" pitchFamily="34" charset="0"/>
+                <a:ea typeface="Malgun Gothic" pitchFamily="34" charset="-122"/>
+                <a:cs typeface="Malgun Gothic" pitchFamily="34" charset="-120"/>
+              </a:rPr>
+              <a:t>※ 계산대미디어는 매체당 카메라 2대(매장 내부 · 매장 외부)를 각각 동일한 방법으로 설치합니다.</a:t>
+            </a:r>
+            <a:endParaRPr lang="en-US" sz="1500" dirty="0"/>
+          </a:p>
+        </p:txBody>
+      </p:sp>
+      <p:sp>
+        <p:nvSpPr>
+          <p:cNvPr id="10" name="Shape 8"/>
+          <p:cNvSpPr/>
+          <p:nvPr/>
+        </p:nvSpPr>
+        <p:spPr>
+          <a:xfrm>
+            <a:off x="6126480" y="1143000"/>
+            <a:ext cx="5394960" cy="2423160"/>
+          </a:xfrm>
+          <a:prstGeom prst="roundRect">
+            <a:avLst>
+              <a:gd name="adj" fmla="val 3019"/>
+            </a:avLst>
+          </a:prstGeom>
+          <a:solidFill>
+            <a:srgbClr val="F5F5F5"/>
+          </a:solidFill>
+          <a:ln w="19050">
+            <a:solidFill>
+              <a:srgbClr val="9AA0A6"/>
+            </a:solidFill>
+            <a:prstDash val="dash"/>
+          </a:ln>
+        </p:spPr>
+      </p:sp>
+      <p:pic>
+        <p:nvPicPr>
+          <p:cNvPr id="11" name="Image 0" descr="preencoded.png">    </p:cNvPr>
+          <p:cNvPicPr>
+            <a:picLocks noChangeAspect="1"/>
+          </p:cNvPicPr>
+          <p:nvPr/>
+        </p:nvPicPr>
+        <p:blipFill>
+          <a:blip r:embed="rId1"/>
+          <a:stretch>
+            <a:fillRect/>
+          </a:stretch>
+        </p:blipFill>
+        <p:spPr>
+          <a:xfrm>
+            <a:off x="8503920" y="1805940"/>
+            <a:ext cx="640080" cy="640080"/>
+          </a:xfrm>
+          <a:prstGeom prst="rect">
+            <a:avLst/>
+          </a:prstGeom>
+        </p:spPr>
+      </p:pic>
+      <p:sp>
+        <p:nvSpPr>
+          <p:cNvPr id="12" name="Text 9"/>
+          <p:cNvSpPr/>
+          <p:nvPr/>
+        </p:nvSpPr>
+        <p:spPr>
+          <a:xfrm>
+            <a:off x="6126480" y="2491740"/>
+            <a:ext cx="5394960" cy="457200"/>
+          </a:xfrm>
+          <a:prstGeom prst="rect">
+            <a:avLst/>
+          </a:prstGeom>
+          <a:noFill/>
+          <a:ln/>
+        </p:spPr>
+        <p:txBody>
+          <a:bodyPr wrap="square" lIns="0" tIns="0" rIns="0" bIns="0" rtlCol="0" anchor="ctr"/>
+          <a:lstStyle/>
+          <a:p>
+            <a:pPr algn="ctr" indent="0" marL="0">
+              <a:buNone/>
+            </a:pPr>
+            <a:r>
+              <a:rPr lang="en-US" sz="1400" dirty="0">
+                <a:solidFill>
+                  <a:srgbClr val="9AA0A6"/>
+                </a:solidFill>
+                <a:latin typeface="Malgun Gothic" pitchFamily="34" charset="0"/>
+                <a:ea typeface="Malgun Gothic" pitchFamily="34" charset="-122"/>
+                <a:cs typeface="Malgun Gothic" pitchFamily="34" charset="-120"/>
+              </a:rPr>
+              <a:t>사진: 매장 내부 카메라</a:t>
+            </a:r>
+            <a:endParaRPr lang="en-US" sz="1400" dirty="0"/>
+          </a:p>
+        </p:txBody>
+      </p:sp>
+      <p:sp>
+        <p:nvSpPr>
+          <p:cNvPr id="13" name="Text 10"/>
+          <p:cNvSpPr/>
+          <p:nvPr/>
+        </p:nvSpPr>
+        <p:spPr>
+          <a:xfrm>
+            <a:off x="6126480" y="1234440"/>
+            <a:ext cx="1463040" cy="320040"/>
+          </a:xfrm>
+          <a:prstGeom prst="rect">
+            <a:avLst/>
+          </a:prstGeom>
+          <a:noFill/>
+          <a:ln/>
+        </p:spPr>
+        <p:txBody>
+          <a:bodyPr wrap="square" rtlCol="0" anchor="ctr"/>
+          <a:lstStyle/>
+          <a:p>
+            <a:pPr algn="ctr" indent="0" marL="0">
+              <a:buNone/>
+            </a:pPr>
+            <a:r>
+              <a:rPr lang="en-US" sz="1200" b="1" dirty="0">
+                <a:solidFill>
+                  <a:srgbClr val="666666"/>
+                </a:solidFill>
+                <a:latin typeface="Malgun Gothic" pitchFamily="34" charset="0"/>
+                <a:ea typeface="Malgun Gothic" pitchFamily="34" charset="-122"/>
+                <a:cs typeface="Malgun Gothic" pitchFamily="34" charset="-120"/>
+              </a:rPr>
+              <a:t>매장 내부</a:t>
+            </a:r>
+            <a:endParaRPr lang="en-US" sz="1200" dirty="0"/>
+          </a:p>
+        </p:txBody>
+      </p:sp>
+      <p:sp>
+        <p:nvSpPr>
+          <p:cNvPr id="14" name="Shape 11"/>
+          <p:cNvSpPr/>
+          <p:nvPr/>
+        </p:nvSpPr>
+        <p:spPr>
+          <a:xfrm>
+            <a:off x="6126480" y="3840480"/>
+            <a:ext cx="5394960" cy="2423160"/>
+          </a:xfrm>
+          <a:prstGeom prst="roundRect">
+            <a:avLst>
+              <a:gd name="adj" fmla="val 3019"/>
+            </a:avLst>
+          </a:prstGeom>
+          <a:solidFill>
+            <a:srgbClr val="F5F5F5"/>
+          </a:solidFill>
+          <a:ln w="19050">
+            <a:solidFill>
+              <a:srgbClr val="9AA0A6"/>
+            </a:solidFill>
+            <a:prstDash val="dash"/>
+          </a:ln>
+        </p:spPr>
+      </p:sp>
+      <p:pic>
+        <p:nvPicPr>
+          <p:cNvPr id="15" name="Image 1" descr="preencoded.png">    </p:cNvPr>
+          <p:cNvPicPr>
+            <a:picLocks noChangeAspect="1"/>
+          </p:cNvPicPr>
+          <p:nvPr/>
+        </p:nvPicPr>
+        <p:blipFill>
+          <a:blip r:embed="rId2"/>
+          <a:stretch>
+            <a:fillRect/>
+          </a:stretch>
+        </p:blipFill>
+        <p:spPr>
+          <a:xfrm>
+            <a:off x="8503920" y="4503420"/>
+            <a:ext cx="640080" cy="640080"/>
+          </a:xfrm>
+          <a:prstGeom prst="rect">
+            <a:avLst/>
+          </a:prstGeom>
+        </p:spPr>
+      </p:pic>
+      <p:sp>
+        <p:nvSpPr>
+          <p:cNvPr id="16" name="Text 12"/>
+          <p:cNvSpPr/>
+          <p:nvPr/>
+        </p:nvSpPr>
+        <p:spPr>
+          <a:xfrm>
+            <a:off x="6126480" y="5189220"/>
+            <a:ext cx="5394960" cy="457200"/>
+          </a:xfrm>
+          <a:prstGeom prst="rect">
+            <a:avLst/>
+          </a:prstGeom>
+          <a:noFill/>
+          <a:ln/>
+        </p:spPr>
+        <p:txBody>
+          <a:bodyPr wrap="square" lIns="0" tIns="0" rIns="0" bIns="0" rtlCol="0" anchor="ctr"/>
+          <a:lstStyle/>
+          <a:p>
+            <a:pPr algn="ctr" indent="0" marL="0">
+              <a:buNone/>
+            </a:pPr>
+            <a:r>
+              <a:rPr lang="en-US" sz="1400" dirty="0">
+                <a:solidFill>
+                  <a:srgbClr val="9AA0A6"/>
+                </a:solidFill>
+                <a:latin typeface="Malgun Gothic" pitchFamily="34" charset="0"/>
+                <a:ea typeface="Malgun Gothic" pitchFamily="34" charset="-122"/>
+                <a:cs typeface="Malgun Gothic" pitchFamily="34" charset="-120"/>
+              </a:rPr>
+              <a:t>사진: 매장 외부 카메라</a:t>
+            </a:r>
+            <a:endParaRPr lang="en-US" sz="1400" dirty="0"/>
+          </a:p>
+        </p:txBody>
+      </p:sp>
+      <p:sp>
+        <p:nvSpPr>
+          <p:cNvPr id="17" name="Text 13"/>
+          <p:cNvSpPr/>
+          <p:nvPr/>
+        </p:nvSpPr>
+        <p:spPr>
+          <a:xfrm>
+            <a:off x="6126480" y="3931920"/>
+            <a:ext cx="1463040" cy="320040"/>
+          </a:xfrm>
+          <a:prstGeom prst="rect">
+            <a:avLst/>
+          </a:prstGeom>
+          <a:noFill/>
+          <a:ln/>
+        </p:spPr>
+        <p:txBody>
+          <a:bodyPr wrap="square" rtlCol="0" anchor="ctr"/>
+          <a:lstStyle/>
+          <a:p>
+            <a:pPr algn="ctr" indent="0" marL="0">
+              <a:buNone/>
+            </a:pPr>
+            <a:r>
+              <a:rPr lang="en-US" sz="1200" b="1" dirty="0">
+                <a:solidFill>
+                  <a:srgbClr val="666666"/>
+                </a:solidFill>
+                <a:latin typeface="Malgun Gothic" pitchFamily="34" charset="0"/>
+                <a:ea typeface="Malgun Gothic" pitchFamily="34" charset="-122"/>
+                <a:cs typeface="Malgun Gothic" pitchFamily="34" charset="-120"/>
+              </a:rPr>
+              <a:t>매장 외부</a:t>
+            </a:r>
+            <a:endParaRPr lang="en-US" sz="1200" dirty="0"/>
+          </a:p>
+        </p:txBody>
+      </p:sp>
+    </p:spTree>
+  </p:cSld>
+  <p:clrMapOvr>
+    <a:masterClrMapping/>
+  </p:clrMapOvr>
+</p:sld>
+</file>
+
+<file path=ppt/slides/slide19.xml><?xml version="1.0" encoding="utf-8"?>
+<p:sld xmlns:a="http://schemas.openxmlformats.org/drawingml/2006/main" xmlns:r="http://schemas.openxmlformats.org/officeDocument/2006/relationships" xmlns:p="http://schemas.openxmlformats.org/presentationml/2006/main">
+  <p:cSld name="Slide 19">
     <p:bg>
       <p:bgPr>
         <a:solidFill>
@@ -6143,7 +7600,7 @@
         </p:nvSpPr>
         <p:spPr>
           <a:xfrm>
-            <a:off x="822960" y="1901952"/>
+            <a:off x="822960" y="1856232"/>
             <a:ext cx="384048" cy="384048"/>
           </a:xfrm>
           <a:prstGeom prst="ellipse">
@@ -6163,7 +7620,7 @@
         </p:nvSpPr>
         <p:spPr>
           <a:xfrm>
-            <a:off x="822960" y="1901952"/>
+            <a:off x="822960" y="1856232"/>
             <a:ext cx="384048" cy="384048"/>
           </a:xfrm>
           <a:prstGeom prst="rect">
@@ -6202,7 +7659,7 @@
         </p:nvSpPr>
         <p:spPr>
           <a:xfrm>
-            <a:off x="1417320" y="1828800"/>
+            <a:off x="1417320" y="1783080"/>
             <a:ext cx="9966960" cy="548640"/>
           </a:xfrm>
           <a:prstGeom prst="rect">
@@ -6241,7 +7698,7 @@
         </p:nvSpPr>
         <p:spPr>
           <a:xfrm>
-            <a:off x="822960" y="2770632"/>
+            <a:off x="822960" y="2633472"/>
             <a:ext cx="384048" cy="384048"/>
           </a:xfrm>
           <a:prstGeom prst="ellipse">
@@ -6261,7 +7718,7 @@
         </p:nvSpPr>
         <p:spPr>
           <a:xfrm>
-            <a:off x="822960" y="2770632"/>
+            <a:off x="822960" y="2633472"/>
             <a:ext cx="384048" cy="384048"/>
           </a:xfrm>
           <a:prstGeom prst="rect">
@@ -6300,7 +7757,7 @@
         </p:nvSpPr>
         <p:spPr>
           <a:xfrm>
-            <a:off x="1417320" y="2697480"/>
+            <a:off x="1417320" y="2560320"/>
             <a:ext cx="9966960" cy="548640"/>
           </a:xfrm>
           <a:prstGeom prst="rect">
@@ -6339,7 +7796,7 @@
         </p:nvSpPr>
         <p:spPr>
           <a:xfrm>
-            <a:off x="822960" y="3639312"/>
+            <a:off x="822960" y="3410712"/>
             <a:ext cx="384048" cy="384048"/>
           </a:xfrm>
           <a:prstGeom prst="ellipse">
@@ -6359,7 +7816,7 @@
         </p:nvSpPr>
         <p:spPr>
           <a:xfrm>
-            <a:off x="822960" y="3639312"/>
+            <a:off x="822960" y="3410712"/>
             <a:ext cx="384048" cy="384048"/>
           </a:xfrm>
           <a:prstGeom prst="rect">
@@ -6398,7 +7855,7 @@
         </p:nvSpPr>
         <p:spPr>
           <a:xfrm>
-            <a:off x="1417320" y="3566160"/>
+            <a:off x="1417320" y="3337560"/>
             <a:ext cx="9966960" cy="548640"/>
           </a:xfrm>
           <a:prstGeom prst="rect">
@@ -6437,7 +7894,7 @@
         </p:nvSpPr>
         <p:spPr>
           <a:xfrm>
-            <a:off x="822960" y="4507992"/>
+            <a:off x="822960" y="4187952"/>
             <a:ext cx="384048" cy="384048"/>
           </a:xfrm>
           <a:prstGeom prst="ellipse">
@@ -6457,7 +7914,7 @@
         </p:nvSpPr>
         <p:spPr>
           <a:xfrm>
-            <a:off x="822960" y="4507992"/>
+            <a:off x="822960" y="4187952"/>
             <a:ext cx="384048" cy="384048"/>
           </a:xfrm>
           <a:prstGeom prst="rect">
@@ -6496,7 +7953,7 @@
         </p:nvSpPr>
         <p:spPr>
           <a:xfrm>
-            <a:off x="1417320" y="4434840"/>
+            <a:off x="1417320" y="4114800"/>
             <a:ext cx="9966960" cy="548640"/>
           </a:xfrm>
           <a:prstGeom prst="rect">
@@ -6521,7 +7978,7 @@
                 <a:ea typeface="Malgun Gothic" pitchFamily="34" charset="-122"/>
                 <a:cs typeface="Malgun Gothic" pitchFamily="34" charset="-120"/>
               </a:rPr>
-              <a:t>케이블이 외부에 노출되지 않도록 선 정리가 되어 있는가?</a:t>
+              <a:t>카메라 설정(화각 확인 · 서버 통신 테스트)이 완료되어 있는가?</a:t>
             </a:r>
             <a:endParaRPr lang="en-US" sz="1800" dirty="0"/>
           </a:p>
@@ -6535,7 +7992,7 @@
         </p:nvSpPr>
         <p:spPr>
           <a:xfrm>
-            <a:off x="822960" y="5376672"/>
+            <a:off x="822960" y="4965192"/>
             <a:ext cx="384048" cy="384048"/>
           </a:xfrm>
           <a:prstGeom prst="ellipse">
@@ -6555,7 +8012,7 @@
         </p:nvSpPr>
         <p:spPr>
           <a:xfrm>
-            <a:off x="822960" y="5376672"/>
+            <a:off x="822960" y="4965192"/>
             <a:ext cx="384048" cy="384048"/>
           </a:xfrm>
           <a:prstGeom prst="rect">
@@ -6594,7 +8051,105 @@
         </p:nvSpPr>
         <p:spPr>
           <a:xfrm>
-            <a:off x="1417320" y="5303520"/>
+            <a:off x="1417320" y="4892040"/>
+            <a:ext cx="9966960" cy="548640"/>
+          </a:xfrm>
+          <a:prstGeom prst="rect">
+            <a:avLst/>
+          </a:prstGeom>
+          <a:noFill/>
+          <a:ln/>
+        </p:spPr>
+        <p:txBody>
+          <a:bodyPr wrap="square" lIns="0" tIns="0" rIns="0" bIns="0" rtlCol="0" anchor="ctr"/>
+          <a:lstStyle/>
+          <a:p>
+            <a:pPr indent="0" marL="0">
+              <a:buNone/>
+            </a:pPr>
+            <a:r>
+              <a:rPr lang="en-US" sz="1800" dirty="0">
+                <a:solidFill>
+                  <a:srgbClr val="FFFFFF"/>
+                </a:solidFill>
+                <a:latin typeface="Malgun Gothic" pitchFamily="34" charset="0"/>
+                <a:ea typeface="Malgun Gothic" pitchFamily="34" charset="-122"/>
+                <a:cs typeface="Malgun Gothic" pitchFamily="34" charset="-120"/>
+              </a:rPr>
+              <a:t>케이블이 외부에 노출되지 않도록 선 정리가 되어 있는가?</a:t>
+            </a:r>
+            <a:endParaRPr lang="en-US" sz="1800" dirty="0"/>
+          </a:p>
+        </p:txBody>
+      </p:sp>
+      <p:sp>
+        <p:nvSpPr>
+          <p:cNvPr id="18" name="Shape 16"/>
+          <p:cNvSpPr/>
+          <p:nvPr/>
+        </p:nvSpPr>
+        <p:spPr>
+          <a:xfrm>
+            <a:off x="822960" y="5742432"/>
+            <a:ext cx="384048" cy="384048"/>
+          </a:xfrm>
+          <a:prstGeom prst="ellipse">
+            <a:avLst/>
+          </a:prstGeom>
+          <a:solidFill>
+            <a:srgbClr val="FFD400"/>
+          </a:solidFill>
+          <a:ln/>
+        </p:spPr>
+      </p:sp>
+      <p:sp>
+        <p:nvSpPr>
+          <p:cNvPr id="19" name="Text 17"/>
+          <p:cNvSpPr/>
+          <p:nvPr/>
+        </p:nvSpPr>
+        <p:spPr>
+          <a:xfrm>
+            <a:off x="822960" y="5742432"/>
+            <a:ext cx="384048" cy="384048"/>
+          </a:xfrm>
+          <a:prstGeom prst="rect">
+            <a:avLst/>
+          </a:prstGeom>
+          <a:noFill/>
+          <a:ln/>
+        </p:spPr>
+        <p:txBody>
+          <a:bodyPr wrap="square" lIns="0" tIns="0" rIns="0" bIns="0" rtlCol="0" anchor="ctr"/>
+          <a:lstStyle/>
+          <a:p>
+            <a:pPr algn="ctr" indent="0" marL="0">
+              <a:buNone/>
+            </a:pPr>
+            <a:r>
+              <a:rPr lang="en-US" sz="1600" b="1" dirty="0">
+                <a:solidFill>
+                  <a:srgbClr val="1F1F1F"/>
+                </a:solidFill>
+                <a:latin typeface="Malgun Gothic" pitchFamily="34" charset="0"/>
+                <a:ea typeface="Malgun Gothic" pitchFamily="34" charset="-122"/>
+                <a:cs typeface="Malgun Gothic" pitchFamily="34" charset="-120"/>
+              </a:rPr>
+              <a:t>✓</a:t>
+            </a:r>
+            <a:endParaRPr lang="en-US" sz="1600" dirty="0"/>
+          </a:p>
+        </p:txBody>
+      </p:sp>
+      <p:sp>
+        <p:nvSpPr>
+          <p:cNvPr id="20" name="Text 18"/>
+          <p:cNvSpPr/>
+          <p:nvPr/>
+        </p:nvSpPr>
+        <p:spPr>
+          <a:xfrm>
+            <a:off x="1417320" y="5669280"/>
             <a:ext cx="9966960" cy="548640"/>
           </a:xfrm>
           <a:prstGeom prst="rect">
@@ -6895,7 +8450,7 @@
                 <a:ea typeface="Malgun Gothic" pitchFamily="34" charset="-122"/>
                 <a:cs typeface="Malgun Gothic" pitchFamily="34" charset="-120"/>
               </a:rPr>
-              <a:t>총 6단계로 설치 진행</a:t>
+              <a:t>총 7단계로 설치 진행</a:t>
             </a:r>
             <a:endParaRPr lang="en-US" sz="1800" dirty="0"/>
           </a:p>
@@ -7311,7 +8866,7 @@
                 <a:ea typeface="Malgun Gothic" pitchFamily="34" charset="-122"/>
                 <a:cs typeface="Malgun Gothic" pitchFamily="34" charset="-120"/>
               </a:rPr>
-              <a:t>아래 6단계 순서에 따라 진행해 주세요.</a:t>
+              <a:t>아래 7단계 순서에 따라 진행해 주세요.</a:t>
             </a:r>
             <a:endParaRPr lang="en-US" sz="2000" dirty="0"/>
           </a:p>
@@ -7421,7 +8976,7 @@
                 <a:ea typeface="Malgun Gothic" pitchFamily="34" charset="-122"/>
                 <a:cs typeface="Malgun Gothic" pitchFamily="34" charset="-120"/>
               </a:rPr>
-              <a:t>STEP 1 / 6</a:t>
+              <a:t>STEP 1 / 7</a:t>
             </a:r>
             <a:endParaRPr lang="en-US" sz="1400" dirty="0"/>
           </a:p>
@@ -7761,7 +9316,7 @@
                 <a:ea typeface="Malgun Gothic" pitchFamily="34" charset="-122"/>
                 <a:cs typeface="Malgun Gothic" pitchFamily="34" charset="-120"/>
               </a:rPr>
-              <a:t>STEP 2 / 6</a:t>
+              <a:t>STEP 2 / 7</a:t>
             </a:r>
             <a:endParaRPr lang="en-US" sz="1400" dirty="0"/>
           </a:p>
@@ -8101,7 +9656,7 @@
                 <a:ea typeface="Malgun Gothic" pitchFamily="34" charset="-122"/>
                 <a:cs typeface="Malgun Gothic" pitchFamily="34" charset="-120"/>
               </a:rPr>
-              <a:t>STEP 3 / 6</a:t>
+              <a:t>STEP 3 / 7</a:t>
             </a:r>
             <a:endParaRPr lang="en-US" sz="1400" dirty="0"/>
           </a:p>
@@ -8441,7 +9996,7 @@
                 <a:ea typeface="Malgun Gothic" pitchFamily="34" charset="-122"/>
                 <a:cs typeface="Malgun Gothic" pitchFamily="34" charset="-120"/>
               </a:rPr>
-              <a:t>STEP 4 / 6</a:t>
+              <a:t>STEP 4 / 7</a:t>
             </a:r>
             <a:endParaRPr lang="en-US" sz="1400" dirty="0"/>
           </a:p>
@@ -8781,7 +10336,7 @@
                 <a:ea typeface="Malgun Gothic" pitchFamily="34" charset="-122"/>
                 <a:cs typeface="Malgun Gothic" pitchFamily="34" charset="-120"/>
               </a:rPr>
-              <a:t>STEP 5 / 6</a:t>
+              <a:t>STEP 5 / 7</a:t>
             </a:r>
             <a:endParaRPr lang="en-US" sz="1400" dirty="0"/>
           </a:p>
@@ -9121,7 +10676,7 @@
                 <a:ea typeface="Malgun Gothic" pitchFamily="34" charset="-122"/>
                 <a:cs typeface="Malgun Gothic" pitchFamily="34" charset="-120"/>
               </a:rPr>
-              <a:t>STEP 6 / 6</a:t>
+              <a:t>STEP 6 / 7</a:t>
             </a:r>
             <a:endParaRPr lang="en-US" sz="1400" dirty="0"/>
           </a:p>
@@ -9219,7 +10774,7 @@
                 <a:ea typeface="Malgun Gothic" pitchFamily="34" charset="-122"/>
                 <a:cs typeface="Malgun Gothic" pitchFamily="34" charset="-120"/>
               </a:rPr>
-              <a:t>케이블 정리</a:t>
+              <a:t>AI 카메라 설정</a:t>
             </a:r>
             <a:endParaRPr lang="en-US" sz="3000" dirty="0"/>
           </a:p>
@@ -9234,7 +10789,7 @@
         <p:spPr>
           <a:xfrm>
             <a:off x="640080" y="2514600"/>
-            <a:ext cx="5120640" cy="2011680"/>
+            <a:ext cx="5120640" cy="548640"/>
           </a:xfrm>
           <a:prstGeom prst="rect">
             <a:avLst/>
@@ -9261,7 +10816,7 @@
                 <a:ea typeface="Malgun Gothic" pitchFamily="34" charset="-122"/>
                 <a:cs typeface="Malgun Gothic" pitchFamily="34" charset="-120"/>
               </a:rPr>
-              <a:t>케이블 노출을 최소화할 수 있도록 선을 깔끔하게 정리합니다.</a:t>
+              <a:t>아래 순서에 따라 카메라 설정을 진행합니다.</a:t>
             </a:r>
             <a:endParaRPr lang="en-US" sz="2000" dirty="0"/>
           </a:p>
@@ -9270,6 +10825,437 @@
       <p:sp>
         <p:nvSpPr>
           <p:cNvPr id="8" name="Shape 6"/>
+          <p:cNvSpPr/>
+          <p:nvPr/>
+        </p:nvSpPr>
+        <p:spPr>
+          <a:xfrm>
+            <a:off x="640080" y="3200400"/>
+            <a:ext cx="365760" cy="365760"/>
+          </a:xfrm>
+          <a:prstGeom prst="ellipse">
+            <a:avLst/>
+          </a:prstGeom>
+          <a:solidFill>
+            <a:srgbClr val="FFD400"/>
+          </a:solidFill>
+          <a:ln/>
+        </p:spPr>
+      </p:sp>
+      <p:sp>
+        <p:nvSpPr>
+          <p:cNvPr id="9" name="Text 7"/>
+          <p:cNvSpPr/>
+          <p:nvPr/>
+        </p:nvSpPr>
+        <p:spPr>
+          <a:xfrm>
+            <a:off x="640080" y="3200400"/>
+            <a:ext cx="365760" cy="365760"/>
+          </a:xfrm>
+          <a:prstGeom prst="rect">
+            <a:avLst/>
+          </a:prstGeom>
+          <a:noFill/>
+          <a:ln/>
+        </p:spPr>
+        <p:txBody>
+          <a:bodyPr wrap="square" lIns="0" tIns="0" rIns="0" bIns="0" rtlCol="0" anchor="ctr"/>
+          <a:lstStyle/>
+          <a:p>
+            <a:pPr algn="ctr" indent="0" marL="0">
+              <a:buNone/>
+            </a:pPr>
+            <a:r>
+              <a:rPr lang="en-US" sz="1400" b="1" dirty="0">
+                <a:solidFill>
+                  <a:srgbClr val="1F1F1F"/>
+                </a:solidFill>
+                <a:latin typeface="Malgun Gothic" pitchFamily="34" charset="0"/>
+                <a:ea typeface="Malgun Gothic" pitchFamily="34" charset="-122"/>
+                <a:cs typeface="Malgun Gothic" pitchFamily="34" charset="-120"/>
+              </a:rPr>
+              <a:t>1</a:t>
+            </a:r>
+            <a:endParaRPr lang="en-US" sz="1400" dirty="0"/>
+          </a:p>
+        </p:txBody>
+      </p:sp>
+      <p:sp>
+        <p:nvSpPr>
+          <p:cNvPr id="10" name="Text 8"/>
+          <p:cNvSpPr/>
+          <p:nvPr/>
+        </p:nvSpPr>
+        <p:spPr>
+          <a:xfrm>
+            <a:off x="1188720" y="3154680"/>
+            <a:ext cx="4663440" cy="457200"/>
+          </a:xfrm>
+          <a:prstGeom prst="rect">
+            <a:avLst/>
+          </a:prstGeom>
+          <a:noFill/>
+          <a:ln/>
+        </p:spPr>
+        <p:txBody>
+          <a:bodyPr wrap="square" lIns="0" tIns="0" rIns="0" bIns="0" rtlCol="0" anchor="ctr"/>
+          <a:lstStyle/>
+          <a:p>
+            <a:pPr indent="0" marL="0">
+              <a:buNone/>
+            </a:pPr>
+            <a:r>
+              <a:rPr lang="en-US" sz="1600" dirty="0">
+                <a:solidFill>
+                  <a:srgbClr val="222222"/>
+                </a:solidFill>
+                <a:latin typeface="Malgun Gothic" pitchFamily="34" charset="0"/>
+                <a:ea typeface="Malgun Gothic" pitchFamily="34" charset="-122"/>
+                <a:cs typeface="Malgun Gothic" pitchFamily="34" charset="-120"/>
+              </a:rPr>
+              <a:t>히든키 입력 (되감기 0407)</a:t>
+            </a:r>
+            <a:endParaRPr lang="en-US" sz="1600" dirty="0"/>
+          </a:p>
+        </p:txBody>
+      </p:sp>
+      <p:sp>
+        <p:nvSpPr>
+          <p:cNvPr id="11" name="Shape 9"/>
+          <p:cNvSpPr/>
+          <p:nvPr/>
+        </p:nvSpPr>
+        <p:spPr>
+          <a:xfrm>
+            <a:off x="640080" y="3730752"/>
+            <a:ext cx="365760" cy="365760"/>
+          </a:xfrm>
+          <a:prstGeom prst="ellipse">
+            <a:avLst/>
+          </a:prstGeom>
+          <a:solidFill>
+            <a:srgbClr val="FFD400"/>
+          </a:solidFill>
+          <a:ln/>
+        </p:spPr>
+      </p:sp>
+      <p:sp>
+        <p:nvSpPr>
+          <p:cNvPr id="12" name="Text 10"/>
+          <p:cNvSpPr/>
+          <p:nvPr/>
+        </p:nvSpPr>
+        <p:spPr>
+          <a:xfrm>
+            <a:off x="640080" y="3730752"/>
+            <a:ext cx="365760" cy="365760"/>
+          </a:xfrm>
+          <a:prstGeom prst="rect">
+            <a:avLst/>
+          </a:prstGeom>
+          <a:noFill/>
+          <a:ln/>
+        </p:spPr>
+        <p:txBody>
+          <a:bodyPr wrap="square" lIns="0" tIns="0" rIns="0" bIns="0" rtlCol="0" anchor="ctr"/>
+          <a:lstStyle/>
+          <a:p>
+            <a:pPr algn="ctr" indent="0" marL="0">
+              <a:buNone/>
+            </a:pPr>
+            <a:r>
+              <a:rPr lang="en-US" sz="1400" b="1" dirty="0">
+                <a:solidFill>
+                  <a:srgbClr val="1F1F1F"/>
+                </a:solidFill>
+                <a:latin typeface="Malgun Gothic" pitchFamily="34" charset="0"/>
+                <a:ea typeface="Malgun Gothic" pitchFamily="34" charset="-122"/>
+                <a:cs typeface="Malgun Gothic" pitchFamily="34" charset="-120"/>
+              </a:rPr>
+              <a:t>2</a:t>
+            </a:r>
+            <a:endParaRPr lang="en-US" sz="1400" dirty="0"/>
+          </a:p>
+        </p:txBody>
+      </p:sp>
+      <p:sp>
+        <p:nvSpPr>
+          <p:cNvPr id="13" name="Text 11"/>
+          <p:cNvSpPr/>
+          <p:nvPr/>
+        </p:nvSpPr>
+        <p:spPr>
+          <a:xfrm>
+            <a:off x="1188720" y="3685032"/>
+            <a:ext cx="4663440" cy="457200"/>
+          </a:xfrm>
+          <a:prstGeom prst="rect">
+            <a:avLst/>
+          </a:prstGeom>
+          <a:noFill/>
+          <a:ln/>
+        </p:spPr>
+        <p:txBody>
+          <a:bodyPr wrap="square" lIns="0" tIns="0" rIns="0" bIns="0" rtlCol="0" anchor="ctr"/>
+          <a:lstStyle/>
+          <a:p>
+            <a:pPr indent="0" marL="0">
+              <a:buNone/>
+            </a:pPr>
+            <a:r>
+              <a:rPr lang="en-US" sz="1600" dirty="0">
+                <a:solidFill>
+                  <a:srgbClr val="222222"/>
+                </a:solidFill>
+                <a:latin typeface="Malgun Gothic" pitchFamily="34" charset="0"/>
+                <a:ea typeface="Malgun Gothic" pitchFamily="34" charset="-122"/>
+                <a:cs typeface="Malgun Gothic" pitchFamily="34" charset="-120"/>
+              </a:rPr>
+              <a:t>카메라 설정 진행하기</a:t>
+            </a:r>
+            <a:endParaRPr lang="en-US" sz="1600" dirty="0"/>
+          </a:p>
+        </p:txBody>
+      </p:sp>
+      <p:sp>
+        <p:nvSpPr>
+          <p:cNvPr id="14" name="Shape 12"/>
+          <p:cNvSpPr/>
+          <p:nvPr/>
+        </p:nvSpPr>
+        <p:spPr>
+          <a:xfrm>
+            <a:off x="640080" y="4261104"/>
+            <a:ext cx="365760" cy="365760"/>
+          </a:xfrm>
+          <a:prstGeom prst="ellipse">
+            <a:avLst/>
+          </a:prstGeom>
+          <a:solidFill>
+            <a:srgbClr val="FFD400"/>
+          </a:solidFill>
+          <a:ln/>
+        </p:spPr>
+      </p:sp>
+      <p:sp>
+        <p:nvSpPr>
+          <p:cNvPr id="15" name="Text 13"/>
+          <p:cNvSpPr/>
+          <p:nvPr/>
+        </p:nvSpPr>
+        <p:spPr>
+          <a:xfrm>
+            <a:off x="640080" y="4261104"/>
+            <a:ext cx="365760" cy="365760"/>
+          </a:xfrm>
+          <a:prstGeom prst="rect">
+            <a:avLst/>
+          </a:prstGeom>
+          <a:noFill/>
+          <a:ln/>
+        </p:spPr>
+        <p:txBody>
+          <a:bodyPr wrap="square" lIns="0" tIns="0" rIns="0" bIns="0" rtlCol="0" anchor="ctr"/>
+          <a:lstStyle/>
+          <a:p>
+            <a:pPr algn="ctr" indent="0" marL="0">
+              <a:buNone/>
+            </a:pPr>
+            <a:r>
+              <a:rPr lang="en-US" sz="1400" b="1" dirty="0">
+                <a:solidFill>
+                  <a:srgbClr val="1F1F1F"/>
+                </a:solidFill>
+                <a:latin typeface="Malgun Gothic" pitchFamily="34" charset="0"/>
+                <a:ea typeface="Malgun Gothic" pitchFamily="34" charset="-122"/>
+                <a:cs typeface="Malgun Gothic" pitchFamily="34" charset="-120"/>
+              </a:rPr>
+              <a:t>3</a:t>
+            </a:r>
+            <a:endParaRPr lang="en-US" sz="1400" dirty="0"/>
+          </a:p>
+        </p:txBody>
+      </p:sp>
+      <p:sp>
+        <p:nvSpPr>
+          <p:cNvPr id="16" name="Text 14"/>
+          <p:cNvSpPr/>
+          <p:nvPr/>
+        </p:nvSpPr>
+        <p:spPr>
+          <a:xfrm>
+            <a:off x="1188720" y="4215384"/>
+            <a:ext cx="4663440" cy="457200"/>
+          </a:xfrm>
+          <a:prstGeom prst="rect">
+            <a:avLst/>
+          </a:prstGeom>
+          <a:noFill/>
+          <a:ln/>
+        </p:spPr>
+        <p:txBody>
+          <a:bodyPr wrap="square" lIns="0" tIns="0" rIns="0" bIns="0" rtlCol="0" anchor="ctr"/>
+          <a:lstStyle/>
+          <a:p>
+            <a:pPr indent="0" marL="0">
+              <a:buNone/>
+            </a:pPr>
+            <a:r>
+              <a:rPr lang="en-US" sz="1600" dirty="0">
+                <a:solidFill>
+                  <a:srgbClr val="222222"/>
+                </a:solidFill>
+                <a:latin typeface="Malgun Gothic" pitchFamily="34" charset="0"/>
+                <a:ea typeface="Malgun Gothic" pitchFamily="34" charset="-122"/>
+                <a:cs typeface="Malgun Gothic" pitchFamily="34" charset="-120"/>
+              </a:rPr>
+              <a:t>카메라 송출 영상 및 화각 확인 후 '다음' 선택</a:t>
+            </a:r>
+            <a:endParaRPr lang="en-US" sz="1600" dirty="0"/>
+          </a:p>
+        </p:txBody>
+      </p:sp>
+      <p:sp>
+        <p:nvSpPr>
+          <p:cNvPr id="17" name="Shape 15"/>
+          <p:cNvSpPr/>
+          <p:nvPr/>
+        </p:nvSpPr>
+        <p:spPr>
+          <a:xfrm>
+            <a:off x="640080" y="4791456"/>
+            <a:ext cx="365760" cy="365760"/>
+          </a:xfrm>
+          <a:prstGeom prst="ellipse">
+            <a:avLst/>
+          </a:prstGeom>
+          <a:solidFill>
+            <a:srgbClr val="FFD400"/>
+          </a:solidFill>
+          <a:ln/>
+        </p:spPr>
+      </p:sp>
+      <p:sp>
+        <p:nvSpPr>
+          <p:cNvPr id="18" name="Text 16"/>
+          <p:cNvSpPr/>
+          <p:nvPr/>
+        </p:nvSpPr>
+        <p:spPr>
+          <a:xfrm>
+            <a:off x="640080" y="4791456"/>
+            <a:ext cx="365760" cy="365760"/>
+          </a:xfrm>
+          <a:prstGeom prst="rect">
+            <a:avLst/>
+          </a:prstGeom>
+          <a:noFill/>
+          <a:ln/>
+        </p:spPr>
+        <p:txBody>
+          <a:bodyPr wrap="square" lIns="0" tIns="0" rIns="0" bIns="0" rtlCol="0" anchor="ctr"/>
+          <a:lstStyle/>
+          <a:p>
+            <a:pPr algn="ctr" indent="0" marL="0">
+              <a:buNone/>
+            </a:pPr>
+            <a:r>
+              <a:rPr lang="en-US" sz="1400" b="1" dirty="0">
+                <a:solidFill>
+                  <a:srgbClr val="1F1F1F"/>
+                </a:solidFill>
+                <a:latin typeface="Malgun Gothic" pitchFamily="34" charset="0"/>
+                <a:ea typeface="Malgun Gothic" pitchFamily="34" charset="-122"/>
+                <a:cs typeface="Malgun Gothic" pitchFamily="34" charset="-120"/>
+              </a:rPr>
+              <a:t>4</a:t>
+            </a:r>
+            <a:endParaRPr lang="en-US" sz="1400" dirty="0"/>
+          </a:p>
+        </p:txBody>
+      </p:sp>
+      <p:sp>
+        <p:nvSpPr>
+          <p:cNvPr id="19" name="Text 17"/>
+          <p:cNvSpPr/>
+          <p:nvPr/>
+        </p:nvSpPr>
+        <p:spPr>
+          <a:xfrm>
+            <a:off x="1188720" y="4745736"/>
+            <a:ext cx="4663440" cy="457200"/>
+          </a:xfrm>
+          <a:prstGeom prst="rect">
+            <a:avLst/>
+          </a:prstGeom>
+          <a:noFill/>
+          <a:ln/>
+        </p:spPr>
+        <p:txBody>
+          <a:bodyPr wrap="square" lIns="0" tIns="0" rIns="0" bIns="0" rtlCol="0" anchor="ctr"/>
+          <a:lstStyle/>
+          <a:p>
+            <a:pPr indent="0" marL="0">
+              <a:buNone/>
+            </a:pPr>
+            <a:r>
+              <a:rPr lang="en-US" sz="1600" dirty="0">
+                <a:solidFill>
+                  <a:srgbClr val="222222"/>
+                </a:solidFill>
+                <a:latin typeface="Malgun Gothic" pitchFamily="34" charset="0"/>
+                <a:ea typeface="Malgun Gothic" pitchFamily="34" charset="-122"/>
+                <a:cs typeface="Malgun Gothic" pitchFamily="34" charset="-120"/>
+              </a:rPr>
+              <a:t>서버 통신 테스트</a:t>
+            </a:r>
+            <a:endParaRPr lang="en-US" sz="1600" dirty="0"/>
+          </a:p>
+        </p:txBody>
+      </p:sp>
+      <p:sp>
+        <p:nvSpPr>
+          <p:cNvPr id="20" name="Text 18"/>
+          <p:cNvSpPr/>
+          <p:nvPr/>
+        </p:nvSpPr>
+        <p:spPr>
+          <a:xfrm>
+            <a:off x="640080" y="5458968"/>
+            <a:ext cx="5394960" cy="320040"/>
+          </a:xfrm>
+          <a:prstGeom prst="rect">
+            <a:avLst/>
+          </a:prstGeom>
+          <a:noFill/>
+          <a:ln/>
+        </p:spPr>
+        <p:txBody>
+          <a:bodyPr wrap="square" lIns="0" tIns="0" rIns="0" bIns="0" rtlCol="0" anchor="ctr"/>
+          <a:lstStyle/>
+          <a:p>
+            <a:pPr indent="0" marL="0">
+              <a:buNone/>
+            </a:pPr>
+            <a:r>
+              <a:rPr lang="en-US" sz="1300" dirty="0">
+                <a:solidFill>
+                  <a:srgbClr val="666666"/>
+                </a:solidFill>
+                <a:latin typeface="Malgun Gothic" pitchFamily="34" charset="0"/>
+                <a:ea typeface="Malgun Gothic" pitchFamily="34" charset="-122"/>
+                <a:cs typeface="Malgun Gothic" pitchFamily="34" charset="-120"/>
+              </a:rPr>
+              <a:t>※ 세부 내용은 시범 설치 후 업데이트 예정</a:t>
+            </a:r>
+            <a:endParaRPr lang="en-US" sz="1300" dirty="0"/>
+          </a:p>
+        </p:txBody>
+      </p:sp>
+      <p:sp>
+        <p:nvSpPr>
+          <p:cNvPr id="21" name="Shape 19"/>
           <p:cNvSpPr/>
           <p:nvPr/>
         </p:nvSpPr>
@@ -9296,7 +11282,7 @@
       </p:sp>
       <p:pic>
         <p:nvPicPr>
-          <p:cNvPr id="9" name="Image 0" descr="preencoded.png">    </p:cNvPr>
+          <p:cNvPr id="22" name="Image 0" descr="preencoded.png">    </p:cNvPr>
           <p:cNvPicPr>
             <a:picLocks noChangeAspect="1"/>
           </p:cNvPicPr>
@@ -9320,7 +11306,7 @@
       </p:pic>
       <p:sp>
         <p:nvSpPr>
-          <p:cNvPr id="10" name="Text 7"/>
+          <p:cNvPr id="23" name="Text 20"/>
           <p:cNvSpPr/>
           <p:nvPr/>
         </p:nvSpPr>

--- a/이마트_AI카메라_설치매뉴얼.pptx
+++ b/이마트_AI카메라_설치매뉴얼.pptx
@@ -24,9 +24,11 @@
     <p:sldId id="272" r:id="rId18"/>
     <p:sldId id="273" r:id="rId19"/>
     <p:sldId id="274" r:id="rId20"/>
+    <p:sldId id="275" r:id="rId21"/>
+    <p:sldId id="276" r:id="rId22"/>
   </p:sldIdLst>
   <p:notesMasterIdLst>
-    <p:notesMasterId r:id="rId21"/>
+    <p:notesMasterId r:id="rId23"/>
   </p:notesMasterIdLst>
   <p:sldSz cx="12192000" cy="6858000"/>
   <p:notesSz cx="6858000" cy="12192000"/>
@@ -1512,6 +1514,182 @@
             <a:fld id="{F7021451-1387-4CA6-816F-3879F97B5CBC}" type="slidenum">
               <a:rPr lang="en-US"/>
               <a:t>2</a:t>
+            </a:fld>
+            <a:endParaRPr lang="en-US"/>
+          </a:p>
+        </p:txBody>
+      </p:sp>
+    </p:spTree>
+    <p:extLst>
+      <p:ext uri="{BB962C8B-B14F-4D97-AF65-F5344CB8AC3E}">
+        <p14:creationId xmlns:p14="http://schemas.microsoft.com/office/powerpoint/2010/main" val="1024086991"/>
+      </p:ext>
+    </p:extLst>
+  </p:cSld>
+  <p:clrMapOvr>
+    <a:masterClrMapping/>
+  </p:clrMapOvr>
+</p:notes>
+</file>
+
+<file path=ppt/notesSlides/notesSlide20.xml><?xml version="1.0" encoding="utf-8"?>
+<p:notes xmlns:a="http://schemas.openxmlformats.org/drawingml/2006/main" xmlns:r="http://schemas.openxmlformats.org/officeDocument/2006/relationships" xmlns:p="http://schemas.openxmlformats.org/presentationml/2006/main">
+  <p:cSld>
+    <p:spTree>
+      <p:nvGrpSpPr>
+        <p:cNvPr id="1" name=""/>
+        <p:cNvGrpSpPr/>
+        <p:nvPr/>
+      </p:nvGrpSpPr>
+      <p:grpSpPr>
+        <a:xfrm>
+          <a:off x="0" y="0"/>
+          <a:ext cx="0" cy="0"/>
+          <a:chOff x="0" y="0"/>
+          <a:chExt cx="0" cy="0"/>
+        </a:xfrm>
+      </p:grpSpPr>
+      <p:sp>
+        <p:nvSpPr>
+          <p:cNvPr id="2" name="Slide Image Placeholder 1"/>
+          <p:cNvSpPr>
+            <a:spLocks noGrp="1" noRot="1" noChangeAspect="1"/>
+          </p:cNvSpPr>
+          <p:nvPr>
+            <p:ph type="sldImg"/>
+          </p:nvPr>
+        </p:nvSpPr>
+        <p:spPr/>
+      </p:sp>
+      <p:sp>
+        <p:nvSpPr>
+          <p:cNvPr id="3" name="Notes Placeholder 2"/>
+          <p:cNvSpPr>
+            <a:spLocks noGrp="1"/>
+          </p:cNvSpPr>
+          <p:nvPr>
+            <p:ph type="body" idx="1"/>
+          </p:nvPr>
+        </p:nvSpPr>
+        <p:spPr/>
+        <p:txBody>
+          <a:bodyPr/>
+          <a:lstStyle/>
+          <a:p>
+            <a:r>
+              <a:rPr lang="en-US" dirty="0"/>
+              <a:t/>
+            </a:r>
+            <a:endParaRPr lang="en-US" dirty="0"/>
+          </a:p>
+        </p:txBody>
+      </p:sp>
+      <p:sp>
+        <p:nvSpPr>
+          <p:cNvPr id="4" name="Slide Number Placeholder 3"/>
+          <p:cNvSpPr>
+            <a:spLocks noGrp="1"/>
+          </p:cNvSpPr>
+          <p:nvPr>
+            <p:ph type="sldNum" sz="quarter" idx="10"/>
+          </p:nvPr>
+        </p:nvSpPr>
+        <p:spPr/>
+        <p:txBody>
+          <a:bodyPr/>
+          <a:lstStyle/>
+          <a:p>
+            <a:fld id="{F7021451-1387-4CA6-816F-3879F97B5CBC}" type="slidenum">
+              <a:rPr lang="en-US"/>
+              <a:t>20</a:t>
+            </a:fld>
+            <a:endParaRPr lang="en-US"/>
+          </a:p>
+        </p:txBody>
+      </p:sp>
+    </p:spTree>
+    <p:extLst>
+      <p:ext uri="{BB962C8B-B14F-4D97-AF65-F5344CB8AC3E}">
+        <p14:creationId xmlns:p14="http://schemas.microsoft.com/office/powerpoint/2010/main" val="1024086991"/>
+      </p:ext>
+    </p:extLst>
+  </p:cSld>
+  <p:clrMapOvr>
+    <a:masterClrMapping/>
+  </p:clrMapOvr>
+</p:notes>
+</file>
+
+<file path=ppt/notesSlides/notesSlide21.xml><?xml version="1.0" encoding="utf-8"?>
+<p:notes xmlns:a="http://schemas.openxmlformats.org/drawingml/2006/main" xmlns:r="http://schemas.openxmlformats.org/officeDocument/2006/relationships" xmlns:p="http://schemas.openxmlformats.org/presentationml/2006/main">
+  <p:cSld>
+    <p:spTree>
+      <p:nvGrpSpPr>
+        <p:cNvPr id="1" name=""/>
+        <p:cNvGrpSpPr/>
+        <p:nvPr/>
+      </p:nvGrpSpPr>
+      <p:grpSpPr>
+        <a:xfrm>
+          <a:off x="0" y="0"/>
+          <a:ext cx="0" cy="0"/>
+          <a:chOff x="0" y="0"/>
+          <a:chExt cx="0" cy="0"/>
+        </a:xfrm>
+      </p:grpSpPr>
+      <p:sp>
+        <p:nvSpPr>
+          <p:cNvPr id="2" name="Slide Image Placeholder 1"/>
+          <p:cNvSpPr>
+            <a:spLocks noGrp="1" noRot="1" noChangeAspect="1"/>
+          </p:cNvSpPr>
+          <p:nvPr>
+            <p:ph type="sldImg"/>
+          </p:nvPr>
+        </p:nvSpPr>
+        <p:spPr/>
+      </p:sp>
+      <p:sp>
+        <p:nvSpPr>
+          <p:cNvPr id="3" name="Notes Placeholder 2"/>
+          <p:cNvSpPr>
+            <a:spLocks noGrp="1"/>
+          </p:cNvSpPr>
+          <p:nvPr>
+            <p:ph type="body" idx="1"/>
+          </p:nvPr>
+        </p:nvSpPr>
+        <p:spPr/>
+        <p:txBody>
+          <a:bodyPr/>
+          <a:lstStyle/>
+          <a:p>
+            <a:r>
+              <a:rPr lang="en-US" dirty="0"/>
+              <a:t/>
+            </a:r>
+            <a:endParaRPr lang="en-US" dirty="0"/>
+          </a:p>
+        </p:txBody>
+      </p:sp>
+      <p:sp>
+        <p:nvSpPr>
+          <p:cNvPr id="4" name="Slide Number Placeholder 3"/>
+          <p:cNvSpPr>
+            <a:spLocks noGrp="1"/>
+          </p:cNvSpPr>
+          <p:nvPr>
+            <p:ph type="sldNum" sz="quarter" idx="10"/>
+          </p:nvPr>
+        </p:nvSpPr>
+        <p:spPr/>
+        <p:txBody>
+          <a:bodyPr/>
+          <a:lstStyle/>
+          <a:p>
+            <a:fld id="{F7021451-1387-4CA6-816F-3879F97B5CBC}" type="slidenum">
+              <a:rPr lang="en-US"/>
+              <a:t>21</a:t>
             </a:fld>
             <a:endParaRPr lang="en-US"/>
           </a:p>
@@ -2742,7 +2920,7 @@
                 <a:ea typeface="Malgun Gothic" pitchFamily="34" charset="-122"/>
                 <a:cs typeface="Malgun Gothic" pitchFamily="34" charset="-120"/>
               </a:rPr>
-              <a:t>STEP 7 / 7</a:t>
+              <a:t>STEP 7 / 8</a:t>
             </a:r>
             <a:endParaRPr lang="en-US" sz="1400" dirty="0"/>
           </a:p>
@@ -2840,7 +3018,7 @@
                 <a:ea typeface="Malgun Gothic" pitchFamily="34" charset="-122"/>
                 <a:cs typeface="Malgun Gothic" pitchFamily="34" charset="-120"/>
               </a:rPr>
-              <a:t>케이블 정리</a:t>
+              <a:t>AI 카메라 LED 가리기</a:t>
             </a:r>
             <a:endParaRPr lang="en-US" sz="3000" dirty="0"/>
           </a:p>
@@ -2882,7 +3060,7 @@
                 <a:ea typeface="Malgun Gothic" pitchFamily="34" charset="-122"/>
                 <a:cs typeface="Malgun Gothic" pitchFamily="34" charset="-120"/>
               </a:rPr>
-              <a:t>케이블 노출을 최소화할 수 있도록 선을 깔끔하게 정리합니다.</a:t>
+              <a:t>전달받은 펜으로 AI 카메라 작동 시 흰 불(LED)이 들어오는 부분을 칠합니다.</a:t>
             </a:r>
             <a:endParaRPr lang="en-US" sz="2000" dirty="0"/>
           </a:p>
@@ -2891,6 +3069,70 @@
       <p:sp>
         <p:nvSpPr>
           <p:cNvPr id="8" name="Shape 6"/>
+          <p:cNvSpPr/>
+          <p:nvPr/>
+        </p:nvSpPr>
+        <p:spPr>
+          <a:xfrm>
+            <a:off x="640080" y="5120640"/>
+            <a:ext cx="5120640" cy="1097280"/>
+          </a:xfrm>
+          <a:prstGeom prst="roundRect">
+            <a:avLst>
+              <a:gd name="adj" fmla="val 6667"/>
+            </a:avLst>
+          </a:prstGeom>
+          <a:solidFill>
+            <a:srgbClr val="FFF7CC"/>
+          </a:solidFill>
+          <a:ln/>
+        </p:spPr>
+      </p:sp>
+      <p:sp>
+        <p:nvSpPr>
+          <p:cNvPr id="9" name="Text 7"/>
+          <p:cNvSpPr/>
+          <p:nvPr/>
+        </p:nvSpPr>
+        <p:spPr>
+          <a:xfrm>
+            <a:off x="868680" y="5120640"/>
+            <a:ext cx="4663440" cy="1097280"/>
+          </a:xfrm>
+          <a:prstGeom prst="rect">
+            <a:avLst/>
+          </a:prstGeom>
+          <a:noFill/>
+          <a:ln/>
+        </p:spPr>
+        <p:txBody>
+          <a:bodyPr wrap="square" lIns="0" tIns="0" rIns="0" bIns="0" rtlCol="0" anchor="ctr"/>
+          <a:lstStyle/>
+          <a:p>
+            <a:pPr indent="0" marL="0">
+              <a:lnSpc>
+                <a:spcPct val="125000"/>
+              </a:lnSpc>
+              <a:buNone/>
+            </a:pPr>
+            <a:r>
+              <a:rPr lang="en-US" sz="1500" dirty="0">
+                <a:solidFill>
+                  <a:srgbClr val="222222"/>
+                </a:solidFill>
+                <a:latin typeface="Malgun Gothic" pitchFamily="34" charset="0"/>
+                <a:ea typeface="Malgun Gothic" pitchFamily="34" charset="-122"/>
+                <a:cs typeface="Malgun Gothic" pitchFamily="34" charset="-120"/>
+              </a:rPr>
+              <a:t>※ 칠하기 전 보호 테이프 제거 필수!</a:t>
+            </a:r>
+            <a:endParaRPr lang="en-US" sz="1500" dirty="0"/>
+          </a:p>
+        </p:txBody>
+      </p:sp>
+      <p:sp>
+        <p:nvSpPr>
+          <p:cNvPr id="10" name="Shape 8"/>
           <p:cNvSpPr/>
           <p:nvPr/>
         </p:nvSpPr>
@@ -2917,7 +3159,7 @@
       </p:sp>
       <p:pic>
         <p:nvPicPr>
-          <p:cNvPr id="9" name="Image 0" descr="preencoded.png">    </p:cNvPr>
+          <p:cNvPr id="11" name="Image 0" descr="preencoded.png">    </p:cNvPr>
           <p:cNvPicPr>
             <a:picLocks noChangeAspect="1"/>
           </p:cNvPicPr>
@@ -2941,7 +3183,7 @@
       </p:pic>
       <p:sp>
         <p:nvSpPr>
-          <p:cNvPr id="10" name="Text 7"/>
+          <p:cNvPr id="12" name="Text 9"/>
           <p:cNvSpPr/>
           <p:nvPr/>
         </p:nvSpPr>
@@ -2989,6 +3231,346 @@
 <file path=ppt/slides/slide11.xml><?xml version="1.0" encoding="utf-8"?>
 <p:sld xmlns:a="http://schemas.openxmlformats.org/drawingml/2006/main" xmlns:r="http://schemas.openxmlformats.org/officeDocument/2006/relationships" xmlns:p="http://schemas.openxmlformats.org/presentationml/2006/main">
   <p:cSld name="Slide 11">
+    <p:bg>
+      <p:bgPr>
+        <a:solidFill>
+          <a:srgbClr val="FFFFFF"/>
+        </a:solidFill>
+      </p:bgPr>
+    </p:bg>
+    <p:spTree>
+      <p:nvGrpSpPr>
+        <p:cNvPr id="1" name=""/>
+        <p:cNvGrpSpPr/>
+        <p:nvPr/>
+      </p:nvGrpSpPr>
+      <p:grpSpPr>
+        <a:xfrm>
+          <a:off x="0" y="0"/>
+          <a:ext cx="0" cy="0"/>
+          <a:chOff x="0" y="0"/>
+          <a:chExt cx="0" cy="0"/>
+        </a:xfrm>
+      </p:grpSpPr>
+      <p:sp>
+        <p:nvSpPr>
+          <p:cNvPr id="2" name="Text 0"/>
+          <p:cNvSpPr/>
+          <p:nvPr/>
+        </p:nvSpPr>
+        <p:spPr>
+          <a:xfrm>
+            <a:off x="640080" y="411480"/>
+            <a:ext cx="6400800" cy="365760"/>
+          </a:xfrm>
+          <a:prstGeom prst="rect">
+            <a:avLst/>
+          </a:prstGeom>
+          <a:noFill/>
+          <a:ln/>
+        </p:spPr>
+        <p:txBody>
+          <a:bodyPr wrap="square" lIns="0" tIns="0" rIns="0" bIns="0" rtlCol="0" anchor="ctr"/>
+          <a:lstStyle/>
+          <a:p>
+            <a:pPr indent="0" marL="0">
+              <a:buNone/>
+            </a:pPr>
+            <a:r>
+              <a:rPr lang="en-US" sz="1600" b="1" dirty="0">
+                <a:solidFill>
+                  <a:srgbClr val="666666"/>
+                </a:solidFill>
+                <a:latin typeface="Malgun Gothic" pitchFamily="34" charset="0"/>
+                <a:ea typeface="Malgun Gothic" pitchFamily="34" charset="-122"/>
+                <a:cs typeface="Malgun Gothic" pitchFamily="34" charset="-120"/>
+              </a:rPr>
+              <a:t>동선스크린 설치 방법</a:t>
+            </a:r>
+            <a:endParaRPr lang="en-US" sz="1600" dirty="0"/>
+          </a:p>
+        </p:txBody>
+      </p:sp>
+      <p:sp>
+        <p:nvSpPr>
+          <p:cNvPr id="3" name="Text 1"/>
+          <p:cNvSpPr/>
+          <p:nvPr/>
+        </p:nvSpPr>
+        <p:spPr>
+          <a:xfrm>
+            <a:off x="9262872" y="411480"/>
+            <a:ext cx="2286000" cy="365760"/>
+          </a:xfrm>
+          <a:prstGeom prst="rect">
+            <a:avLst/>
+          </a:prstGeom>
+          <a:noFill/>
+          <a:ln/>
+        </p:spPr>
+        <p:txBody>
+          <a:bodyPr wrap="square" lIns="0" tIns="0" rIns="0" bIns="0" rtlCol="0" anchor="ctr"/>
+          <a:lstStyle/>
+          <a:p>
+            <a:pPr algn="r" indent="0" marL="0">
+              <a:buNone/>
+            </a:pPr>
+            <a:r>
+              <a:rPr lang="en-US" sz="1400" b="1" dirty="0">
+                <a:solidFill>
+                  <a:srgbClr val="9AA0A6"/>
+                </a:solidFill>
+                <a:latin typeface="Malgun Gothic" pitchFamily="34" charset="0"/>
+                <a:ea typeface="Malgun Gothic" pitchFamily="34" charset="-122"/>
+                <a:cs typeface="Malgun Gothic" pitchFamily="34" charset="-120"/>
+              </a:rPr>
+              <a:t>STEP 8 / 8</a:t>
+            </a:r>
+            <a:endParaRPr lang="en-US" sz="1400" dirty="0"/>
+          </a:p>
+        </p:txBody>
+      </p:sp>
+      <p:sp>
+        <p:nvSpPr>
+          <p:cNvPr id="4" name="Shape 2"/>
+          <p:cNvSpPr/>
+          <p:nvPr/>
+        </p:nvSpPr>
+        <p:spPr>
+          <a:xfrm>
+            <a:off x="640080" y="1143000"/>
+            <a:ext cx="914400" cy="914400"/>
+          </a:xfrm>
+          <a:prstGeom prst="ellipse">
+            <a:avLst/>
+          </a:prstGeom>
+          <a:solidFill>
+            <a:srgbClr val="FFD400"/>
+          </a:solidFill>
+          <a:ln/>
+        </p:spPr>
+      </p:sp>
+      <p:sp>
+        <p:nvSpPr>
+          <p:cNvPr id="5" name="Text 3"/>
+          <p:cNvSpPr/>
+          <p:nvPr/>
+        </p:nvSpPr>
+        <p:spPr>
+          <a:xfrm>
+            <a:off x="640080" y="1143000"/>
+            <a:ext cx="914400" cy="914400"/>
+          </a:xfrm>
+          <a:prstGeom prst="rect">
+            <a:avLst/>
+          </a:prstGeom>
+          <a:noFill/>
+          <a:ln/>
+        </p:spPr>
+        <p:txBody>
+          <a:bodyPr wrap="square" lIns="0" tIns="0" rIns="0" bIns="0" rtlCol="0" anchor="ctr"/>
+          <a:lstStyle/>
+          <a:p>
+            <a:pPr algn="ctr" indent="0" marL="0">
+              <a:buNone/>
+            </a:pPr>
+            <a:r>
+              <a:rPr lang="en-US" sz="3600" b="1" dirty="0">
+                <a:solidFill>
+                  <a:srgbClr val="1F1F1F"/>
+                </a:solidFill>
+                <a:latin typeface="Malgun Gothic" pitchFamily="34" charset="0"/>
+                <a:ea typeface="Malgun Gothic" pitchFamily="34" charset="-122"/>
+                <a:cs typeface="Malgun Gothic" pitchFamily="34" charset="-120"/>
+              </a:rPr>
+              <a:t>8</a:t>
+            </a:r>
+            <a:endParaRPr lang="en-US" sz="3600" dirty="0"/>
+          </a:p>
+        </p:txBody>
+      </p:sp>
+      <p:sp>
+        <p:nvSpPr>
+          <p:cNvPr id="6" name="Text 4"/>
+          <p:cNvSpPr/>
+          <p:nvPr/>
+        </p:nvSpPr>
+        <p:spPr>
+          <a:xfrm>
+            <a:off x="1783080" y="1143000"/>
+            <a:ext cx="4206240" cy="914400"/>
+          </a:xfrm>
+          <a:prstGeom prst="rect">
+            <a:avLst/>
+          </a:prstGeom>
+          <a:noFill/>
+          <a:ln/>
+        </p:spPr>
+        <p:txBody>
+          <a:bodyPr wrap="square" lIns="0" tIns="0" rIns="0" bIns="0" rtlCol="0" anchor="ctr"/>
+          <a:lstStyle/>
+          <a:p>
+            <a:pPr indent="0" marL="0">
+              <a:buNone/>
+            </a:pPr>
+            <a:r>
+              <a:rPr lang="en-US" sz="3000" b="1" dirty="0">
+                <a:solidFill>
+                  <a:srgbClr val="222222"/>
+                </a:solidFill>
+                <a:latin typeface="Malgun Gothic" pitchFamily="34" charset="0"/>
+                <a:ea typeface="Malgun Gothic" pitchFamily="34" charset="-122"/>
+                <a:cs typeface="Malgun Gothic" pitchFamily="34" charset="-120"/>
+              </a:rPr>
+              <a:t>케이블 정리</a:t>
+            </a:r>
+            <a:endParaRPr lang="en-US" sz="3000" dirty="0"/>
+          </a:p>
+        </p:txBody>
+      </p:sp>
+      <p:sp>
+        <p:nvSpPr>
+          <p:cNvPr id="7" name="Text 5"/>
+          <p:cNvSpPr/>
+          <p:nvPr/>
+        </p:nvSpPr>
+        <p:spPr>
+          <a:xfrm>
+            <a:off x="640080" y="2514600"/>
+            <a:ext cx="5120640" cy="2011680"/>
+          </a:xfrm>
+          <a:prstGeom prst="rect">
+            <a:avLst/>
+          </a:prstGeom>
+          <a:noFill/>
+          <a:ln/>
+        </p:spPr>
+        <p:txBody>
+          <a:bodyPr wrap="square" lIns="0" tIns="0" rIns="0" bIns="0" rtlCol="0" anchor="t"/>
+          <a:lstStyle/>
+          <a:p>
+            <a:pPr indent="0" marL="0">
+              <a:lnSpc>
+                <a:spcPct val="135000"/>
+              </a:lnSpc>
+              <a:buNone/>
+            </a:pPr>
+            <a:r>
+              <a:rPr lang="en-US" sz="2000" dirty="0">
+                <a:solidFill>
+                  <a:srgbClr val="222222"/>
+                </a:solidFill>
+                <a:latin typeface="Malgun Gothic" pitchFamily="34" charset="0"/>
+                <a:ea typeface="Malgun Gothic" pitchFamily="34" charset="-122"/>
+                <a:cs typeface="Malgun Gothic" pitchFamily="34" charset="-120"/>
+              </a:rPr>
+              <a:t>케이블 노출을 최소화할 수 있도록 선을 깔끔하게 정리합니다.</a:t>
+            </a:r>
+            <a:endParaRPr lang="en-US" sz="2000" dirty="0"/>
+          </a:p>
+        </p:txBody>
+      </p:sp>
+      <p:sp>
+        <p:nvSpPr>
+          <p:cNvPr id="8" name="Shape 6"/>
+          <p:cNvSpPr/>
+          <p:nvPr/>
+        </p:nvSpPr>
+        <p:spPr>
+          <a:xfrm>
+            <a:off x="6126480" y="1143000"/>
+            <a:ext cx="5394960" cy="5120640"/>
+          </a:xfrm>
+          <a:prstGeom prst="roundRect">
+            <a:avLst>
+              <a:gd name="adj" fmla="val 1429"/>
+            </a:avLst>
+          </a:prstGeom>
+          <a:solidFill>
+            <a:srgbClr val="F5F5F5"/>
+          </a:solidFill>
+          <a:ln w="19050">
+            <a:solidFill>
+              <a:srgbClr val="9AA0A6"/>
+            </a:solidFill>
+            <a:prstDash val="dash"/>
+          </a:ln>
+        </p:spPr>
+      </p:sp>
+      <p:pic>
+        <p:nvPicPr>
+          <p:cNvPr id="9" name="Image 0" descr="preencoded.png">    </p:cNvPr>
+          <p:cNvPicPr>
+            <a:picLocks noChangeAspect="1"/>
+          </p:cNvPicPr>
+          <p:nvPr/>
+        </p:nvPicPr>
+        <p:blipFill>
+          <a:blip r:embed="rId1"/>
+          <a:stretch>
+            <a:fillRect/>
+          </a:stretch>
+        </p:blipFill>
+        <p:spPr>
+          <a:xfrm>
+            <a:off x="8503920" y="3154680"/>
+            <a:ext cx="640080" cy="640080"/>
+          </a:xfrm>
+          <a:prstGeom prst="rect">
+            <a:avLst/>
+          </a:prstGeom>
+        </p:spPr>
+      </p:pic>
+      <p:sp>
+        <p:nvSpPr>
+          <p:cNvPr id="10" name="Text 7"/>
+          <p:cNvSpPr/>
+          <p:nvPr/>
+        </p:nvSpPr>
+        <p:spPr>
+          <a:xfrm>
+            <a:off x="6126480" y="3840480"/>
+            <a:ext cx="5394960" cy="457200"/>
+          </a:xfrm>
+          <a:prstGeom prst="rect">
+            <a:avLst/>
+          </a:prstGeom>
+          <a:noFill/>
+          <a:ln/>
+        </p:spPr>
+        <p:txBody>
+          <a:bodyPr wrap="square" lIns="0" tIns="0" rIns="0" bIns="0" rtlCol="0" anchor="ctr"/>
+          <a:lstStyle/>
+          <a:p>
+            <a:pPr algn="ctr" indent="0" marL="0">
+              <a:buNone/>
+            </a:pPr>
+            <a:r>
+              <a:rPr lang="en-US" sz="1400" dirty="0">
+                <a:solidFill>
+                  <a:srgbClr val="9AA0A6"/>
+                </a:solidFill>
+                <a:latin typeface="Malgun Gothic" pitchFamily="34" charset="0"/>
+                <a:ea typeface="Malgun Gothic" pitchFamily="34" charset="-122"/>
+                <a:cs typeface="Malgun Gothic" pitchFamily="34" charset="-120"/>
+              </a:rPr>
+              <a:t>사진을 여기에 넣어 주세요</a:t>
+            </a:r>
+            <a:endParaRPr lang="en-US" sz="1400" dirty="0"/>
+          </a:p>
+        </p:txBody>
+      </p:sp>
+    </p:spTree>
+  </p:cSld>
+  <p:clrMapOvr>
+    <a:masterClrMapping/>
+  </p:clrMapOvr>
+</p:sld>
+</file>
+
+<file path=ppt/slides/slide12.xml><?xml version="1.0" encoding="utf-8"?>
+<p:sld xmlns:a="http://schemas.openxmlformats.org/drawingml/2006/main" xmlns:r="http://schemas.openxmlformats.org/officeDocument/2006/relationships" xmlns:p="http://schemas.openxmlformats.org/presentationml/2006/main">
+  <p:cSld name="Slide 12">
     <p:bg>
       <p:bgPr>
         <a:solidFill>
@@ -3147,578 +3729,6 @@
               <a:t>(매장 내부 1대 · 매장 외부 1대)</a:t>
             </a:r>
             <a:endParaRPr lang="en-US" sz="2000" dirty="0"/>
-          </a:p>
-        </p:txBody>
-      </p:sp>
-    </p:spTree>
-  </p:cSld>
-  <p:clrMapOvr>
-    <a:masterClrMapping/>
-  </p:clrMapOvr>
-</p:sld>
-</file>
-
-<file path=ppt/slides/slide12.xml><?xml version="1.0" encoding="utf-8"?>
-<p:sld xmlns:a="http://schemas.openxmlformats.org/drawingml/2006/main" xmlns:r="http://schemas.openxmlformats.org/officeDocument/2006/relationships" xmlns:p="http://schemas.openxmlformats.org/presentationml/2006/main">
-  <p:cSld name="Slide 12">
-    <p:bg>
-      <p:bgPr>
-        <a:solidFill>
-          <a:srgbClr val="FFFFFF"/>
-        </a:solidFill>
-      </p:bgPr>
-    </p:bg>
-    <p:spTree>
-      <p:nvGrpSpPr>
-        <p:cNvPr id="1" name=""/>
-        <p:cNvGrpSpPr/>
-        <p:nvPr/>
-      </p:nvGrpSpPr>
-      <p:grpSpPr>
-        <a:xfrm>
-          <a:off x="0" y="0"/>
-          <a:ext cx="0" cy="0"/>
-          <a:chOff x="0" y="0"/>
-          <a:chExt cx="0" cy="0"/>
-        </a:xfrm>
-      </p:grpSpPr>
-      <p:sp>
-        <p:nvSpPr>
-          <p:cNvPr id="2" name="Text 0"/>
-          <p:cNvSpPr/>
-          <p:nvPr/>
-        </p:nvSpPr>
-        <p:spPr>
-          <a:xfrm>
-            <a:off x="640080" y="411480"/>
-            <a:ext cx="6400800" cy="365760"/>
-          </a:xfrm>
-          <a:prstGeom prst="rect">
-            <a:avLst/>
-          </a:prstGeom>
-          <a:noFill/>
-          <a:ln/>
-        </p:spPr>
-        <p:txBody>
-          <a:bodyPr wrap="square" lIns="0" tIns="0" rIns="0" bIns="0" rtlCol="0" anchor="ctr"/>
-          <a:lstStyle/>
-          <a:p>
-            <a:pPr indent="0" marL="0">
-              <a:buNone/>
-            </a:pPr>
-            <a:r>
-              <a:rPr lang="en-US" sz="1600" b="1" dirty="0">
-                <a:solidFill>
-                  <a:srgbClr val="666666"/>
-                </a:solidFill>
-                <a:latin typeface="Malgun Gothic" pitchFamily="34" charset="0"/>
-                <a:ea typeface="Malgun Gothic" pitchFamily="34" charset="-122"/>
-                <a:cs typeface="Malgun Gothic" pitchFamily="34" charset="-120"/>
-              </a:rPr>
-              <a:t>계산대미디어 설치 방법</a:t>
-            </a:r>
-            <a:endParaRPr lang="en-US" sz="1600" dirty="0"/>
-          </a:p>
-        </p:txBody>
-      </p:sp>
-      <p:sp>
-        <p:nvSpPr>
-          <p:cNvPr id="3" name="Text 1"/>
-          <p:cNvSpPr/>
-          <p:nvPr/>
-        </p:nvSpPr>
-        <p:spPr>
-          <a:xfrm>
-            <a:off x="9262872" y="411480"/>
-            <a:ext cx="2286000" cy="365760"/>
-          </a:xfrm>
-          <a:prstGeom prst="rect">
-            <a:avLst/>
-          </a:prstGeom>
-          <a:noFill/>
-          <a:ln/>
-        </p:spPr>
-        <p:txBody>
-          <a:bodyPr wrap="square" lIns="0" tIns="0" rIns="0" bIns="0" rtlCol="0" anchor="ctr"/>
-          <a:lstStyle/>
-          <a:p>
-            <a:pPr algn="r" indent="0" marL="0">
-              <a:buNone/>
-            </a:pPr>
-            <a:r>
-              <a:rPr lang="en-US" sz="1400" b="1" dirty="0">
-                <a:solidFill>
-                  <a:srgbClr val="9AA0A6"/>
-                </a:solidFill>
-                <a:latin typeface="Malgun Gothic" pitchFamily="34" charset="0"/>
-                <a:ea typeface="Malgun Gothic" pitchFamily="34" charset="-122"/>
-                <a:cs typeface="Malgun Gothic" pitchFamily="34" charset="-120"/>
-              </a:rPr>
-              <a:t>STEP 1 / 7</a:t>
-            </a:r>
-            <a:endParaRPr lang="en-US" sz="1400" dirty="0"/>
-          </a:p>
-        </p:txBody>
-      </p:sp>
-      <p:sp>
-        <p:nvSpPr>
-          <p:cNvPr id="4" name="Shape 2"/>
-          <p:cNvSpPr/>
-          <p:nvPr/>
-        </p:nvSpPr>
-        <p:spPr>
-          <a:xfrm>
-            <a:off x="640080" y="1143000"/>
-            <a:ext cx="914400" cy="914400"/>
-          </a:xfrm>
-          <a:prstGeom prst="ellipse">
-            <a:avLst/>
-          </a:prstGeom>
-          <a:solidFill>
-            <a:srgbClr val="FFD400"/>
-          </a:solidFill>
-          <a:ln/>
-        </p:spPr>
-      </p:sp>
-      <p:sp>
-        <p:nvSpPr>
-          <p:cNvPr id="5" name="Text 3"/>
-          <p:cNvSpPr/>
-          <p:nvPr/>
-        </p:nvSpPr>
-        <p:spPr>
-          <a:xfrm>
-            <a:off x="640080" y="1143000"/>
-            <a:ext cx="914400" cy="914400"/>
-          </a:xfrm>
-          <a:prstGeom prst="rect">
-            <a:avLst/>
-          </a:prstGeom>
-          <a:noFill/>
-          <a:ln/>
-        </p:spPr>
-        <p:txBody>
-          <a:bodyPr wrap="square" lIns="0" tIns="0" rIns="0" bIns="0" rtlCol="0" anchor="ctr"/>
-          <a:lstStyle/>
-          <a:p>
-            <a:pPr algn="ctr" indent="0" marL="0">
-              <a:buNone/>
-            </a:pPr>
-            <a:r>
-              <a:rPr lang="en-US" sz="3600" b="1" dirty="0">
-                <a:solidFill>
-                  <a:srgbClr val="1F1F1F"/>
-                </a:solidFill>
-                <a:latin typeface="Malgun Gothic" pitchFamily="34" charset="0"/>
-                <a:ea typeface="Malgun Gothic" pitchFamily="34" charset="-122"/>
-                <a:cs typeface="Malgun Gothic" pitchFamily="34" charset="-120"/>
-              </a:rPr>
-              <a:t>1</a:t>
-            </a:r>
-            <a:endParaRPr lang="en-US" sz="3600" dirty="0"/>
-          </a:p>
-        </p:txBody>
-      </p:sp>
-      <p:sp>
-        <p:nvSpPr>
-          <p:cNvPr id="6" name="Text 4"/>
-          <p:cNvSpPr/>
-          <p:nvPr/>
-        </p:nvSpPr>
-        <p:spPr>
-          <a:xfrm>
-            <a:off x="1783080" y="1143000"/>
-            <a:ext cx="4206240" cy="914400"/>
-          </a:xfrm>
-          <a:prstGeom prst="rect">
-            <a:avLst/>
-          </a:prstGeom>
-          <a:noFill/>
-          <a:ln/>
-        </p:spPr>
-        <p:txBody>
-          <a:bodyPr wrap="square" lIns="0" tIns="0" rIns="0" bIns="0" rtlCol="0" anchor="ctr"/>
-          <a:lstStyle/>
-          <a:p>
-            <a:pPr indent="0" marL="0">
-              <a:buNone/>
-            </a:pPr>
-            <a:r>
-              <a:rPr lang="en-US" sz="3000" b="1" dirty="0">
-                <a:solidFill>
-                  <a:srgbClr val="222222"/>
-                </a:solidFill>
-                <a:latin typeface="Malgun Gothic" pitchFamily="34" charset="0"/>
-                <a:ea typeface="Malgun Gothic" pitchFamily="34" charset="-122"/>
-                <a:cs typeface="Malgun Gothic" pitchFamily="34" charset="-120"/>
-              </a:rPr>
-              <a:t>HDMI 분배기 전원부 분리</a:t>
-            </a:r>
-            <a:endParaRPr lang="en-US" sz="3000" dirty="0"/>
-          </a:p>
-        </p:txBody>
-      </p:sp>
-      <p:sp>
-        <p:nvSpPr>
-          <p:cNvPr id="7" name="Text 5"/>
-          <p:cNvSpPr/>
-          <p:nvPr/>
-        </p:nvSpPr>
-        <p:spPr>
-          <a:xfrm>
-            <a:off x="640080" y="2514600"/>
-            <a:ext cx="5120640" cy="2011680"/>
-          </a:xfrm>
-          <a:prstGeom prst="rect">
-            <a:avLst/>
-          </a:prstGeom>
-          <a:noFill/>
-          <a:ln/>
-        </p:spPr>
-        <p:txBody>
-          <a:bodyPr wrap="square" lIns="0" tIns="0" rIns="0" bIns="0" rtlCol="0" anchor="t"/>
-          <a:lstStyle/>
-          <a:p>
-            <a:pPr indent="0" marL="0">
-              <a:lnSpc>
-                <a:spcPct val="135000"/>
-              </a:lnSpc>
-              <a:buNone/>
-            </a:pPr>
-            <a:r>
-              <a:rPr lang="en-US" sz="2000" dirty="0">
-                <a:solidFill>
-                  <a:srgbClr val="222222"/>
-                </a:solidFill>
-                <a:latin typeface="Malgun Gothic" pitchFamily="34" charset="0"/>
-                <a:ea typeface="Malgun Gothic" pitchFamily="34" charset="-122"/>
-                <a:cs typeface="Malgun Gothic" pitchFamily="34" charset="-120"/>
-              </a:rPr>
-              <a:t>셋톱박스에 연결되어 있는 HDMI 분배기의 전원부(USB 단자)를 분리합니다.</a:t>
-            </a:r>
-            <a:endParaRPr lang="en-US" sz="2000" dirty="0"/>
-          </a:p>
-        </p:txBody>
-      </p:sp>
-      <p:sp>
-        <p:nvSpPr>
-          <p:cNvPr id="8" name="Shape 6"/>
-          <p:cNvSpPr/>
-          <p:nvPr/>
-        </p:nvSpPr>
-        <p:spPr>
-          <a:xfrm>
-            <a:off x="640080" y="5120640"/>
-            <a:ext cx="5120640" cy="1097280"/>
-          </a:xfrm>
-          <a:prstGeom prst="roundRect">
-            <a:avLst>
-              <a:gd name="adj" fmla="val 6667"/>
-            </a:avLst>
-          </a:prstGeom>
-          <a:solidFill>
-            <a:srgbClr val="FFF7CC"/>
-          </a:solidFill>
-          <a:ln/>
-        </p:spPr>
-      </p:sp>
-      <p:sp>
-        <p:nvSpPr>
-          <p:cNvPr id="9" name="Text 7"/>
-          <p:cNvSpPr/>
-          <p:nvPr/>
-        </p:nvSpPr>
-        <p:spPr>
-          <a:xfrm>
-            <a:off x="868680" y="5120640"/>
-            <a:ext cx="4663440" cy="1097280"/>
-          </a:xfrm>
-          <a:prstGeom prst="rect">
-            <a:avLst/>
-          </a:prstGeom>
-          <a:noFill/>
-          <a:ln/>
-        </p:spPr>
-        <p:txBody>
-          <a:bodyPr wrap="square" lIns="0" tIns="0" rIns="0" bIns="0" rtlCol="0" anchor="ctr"/>
-          <a:lstStyle/>
-          <a:p>
-            <a:pPr indent="0" marL="0">
-              <a:lnSpc>
-                <a:spcPct val="125000"/>
-              </a:lnSpc>
-              <a:buNone/>
-            </a:pPr>
-            <a:r>
-              <a:rPr lang="en-US" sz="1500" dirty="0">
-                <a:solidFill>
-                  <a:srgbClr val="222222"/>
-                </a:solidFill>
-                <a:latin typeface="Malgun Gothic" pitchFamily="34" charset="0"/>
-                <a:ea typeface="Malgun Gothic" pitchFamily="34" charset="-122"/>
-                <a:cs typeface="Malgun Gothic" pitchFamily="34" charset="-120"/>
-              </a:rPr>
-              <a:t>※ 계산대미디어는 매체당 카메라 2대(매장 내부 · 매장 외부)를 각각 동일한 방법으로 설치합니다.</a:t>
-            </a:r>
-            <a:endParaRPr lang="en-US" sz="1500" dirty="0"/>
-          </a:p>
-        </p:txBody>
-      </p:sp>
-      <p:sp>
-        <p:nvSpPr>
-          <p:cNvPr id="10" name="Shape 8"/>
-          <p:cNvSpPr/>
-          <p:nvPr/>
-        </p:nvSpPr>
-        <p:spPr>
-          <a:xfrm>
-            <a:off x="6126480" y="1143000"/>
-            <a:ext cx="5394960" cy="2423160"/>
-          </a:xfrm>
-          <a:prstGeom prst="roundRect">
-            <a:avLst>
-              <a:gd name="adj" fmla="val 3019"/>
-            </a:avLst>
-          </a:prstGeom>
-          <a:solidFill>
-            <a:srgbClr val="F5F5F5"/>
-          </a:solidFill>
-          <a:ln w="19050">
-            <a:solidFill>
-              <a:srgbClr val="9AA0A6"/>
-            </a:solidFill>
-            <a:prstDash val="dash"/>
-          </a:ln>
-        </p:spPr>
-      </p:sp>
-      <p:pic>
-        <p:nvPicPr>
-          <p:cNvPr id="11" name="Image 0" descr="preencoded.png">    </p:cNvPr>
-          <p:cNvPicPr>
-            <a:picLocks noChangeAspect="1"/>
-          </p:cNvPicPr>
-          <p:nvPr/>
-        </p:nvPicPr>
-        <p:blipFill>
-          <a:blip r:embed="rId1"/>
-          <a:stretch>
-            <a:fillRect/>
-          </a:stretch>
-        </p:blipFill>
-        <p:spPr>
-          <a:xfrm>
-            <a:off x="8503920" y="1805940"/>
-            <a:ext cx="640080" cy="640080"/>
-          </a:xfrm>
-          <a:prstGeom prst="rect">
-            <a:avLst/>
-          </a:prstGeom>
-        </p:spPr>
-      </p:pic>
-      <p:sp>
-        <p:nvSpPr>
-          <p:cNvPr id="12" name="Text 9"/>
-          <p:cNvSpPr/>
-          <p:nvPr/>
-        </p:nvSpPr>
-        <p:spPr>
-          <a:xfrm>
-            <a:off x="6126480" y="2491740"/>
-            <a:ext cx="5394960" cy="457200"/>
-          </a:xfrm>
-          <a:prstGeom prst="rect">
-            <a:avLst/>
-          </a:prstGeom>
-          <a:noFill/>
-          <a:ln/>
-        </p:spPr>
-        <p:txBody>
-          <a:bodyPr wrap="square" lIns="0" tIns="0" rIns="0" bIns="0" rtlCol="0" anchor="ctr"/>
-          <a:lstStyle/>
-          <a:p>
-            <a:pPr algn="ctr" indent="0" marL="0">
-              <a:buNone/>
-            </a:pPr>
-            <a:r>
-              <a:rPr lang="en-US" sz="1400" dirty="0">
-                <a:solidFill>
-                  <a:srgbClr val="9AA0A6"/>
-                </a:solidFill>
-                <a:latin typeface="Malgun Gothic" pitchFamily="34" charset="0"/>
-                <a:ea typeface="Malgun Gothic" pitchFamily="34" charset="-122"/>
-                <a:cs typeface="Malgun Gothic" pitchFamily="34" charset="-120"/>
-              </a:rPr>
-              <a:t>사진: 매장 내부 카메라</a:t>
-            </a:r>
-            <a:endParaRPr lang="en-US" sz="1400" dirty="0"/>
-          </a:p>
-        </p:txBody>
-      </p:sp>
-      <p:sp>
-        <p:nvSpPr>
-          <p:cNvPr id="13" name="Text 10"/>
-          <p:cNvSpPr/>
-          <p:nvPr/>
-        </p:nvSpPr>
-        <p:spPr>
-          <a:xfrm>
-            <a:off x="6126480" y="1234440"/>
-            <a:ext cx="1463040" cy="320040"/>
-          </a:xfrm>
-          <a:prstGeom prst="rect">
-            <a:avLst/>
-          </a:prstGeom>
-          <a:noFill/>
-          <a:ln/>
-        </p:spPr>
-        <p:txBody>
-          <a:bodyPr wrap="square" rtlCol="0" anchor="ctr"/>
-          <a:lstStyle/>
-          <a:p>
-            <a:pPr algn="ctr" indent="0" marL="0">
-              <a:buNone/>
-            </a:pPr>
-            <a:r>
-              <a:rPr lang="en-US" sz="1200" b="1" dirty="0">
-                <a:solidFill>
-                  <a:srgbClr val="666666"/>
-                </a:solidFill>
-                <a:latin typeface="Malgun Gothic" pitchFamily="34" charset="0"/>
-                <a:ea typeface="Malgun Gothic" pitchFamily="34" charset="-122"/>
-                <a:cs typeface="Malgun Gothic" pitchFamily="34" charset="-120"/>
-              </a:rPr>
-              <a:t>매장 내부</a:t>
-            </a:r>
-            <a:endParaRPr lang="en-US" sz="1200" dirty="0"/>
-          </a:p>
-        </p:txBody>
-      </p:sp>
-      <p:sp>
-        <p:nvSpPr>
-          <p:cNvPr id="14" name="Shape 11"/>
-          <p:cNvSpPr/>
-          <p:nvPr/>
-        </p:nvSpPr>
-        <p:spPr>
-          <a:xfrm>
-            <a:off x="6126480" y="3840480"/>
-            <a:ext cx="5394960" cy="2423160"/>
-          </a:xfrm>
-          <a:prstGeom prst="roundRect">
-            <a:avLst>
-              <a:gd name="adj" fmla="val 3019"/>
-            </a:avLst>
-          </a:prstGeom>
-          <a:solidFill>
-            <a:srgbClr val="F5F5F5"/>
-          </a:solidFill>
-          <a:ln w="19050">
-            <a:solidFill>
-              <a:srgbClr val="9AA0A6"/>
-            </a:solidFill>
-            <a:prstDash val="dash"/>
-          </a:ln>
-        </p:spPr>
-      </p:sp>
-      <p:pic>
-        <p:nvPicPr>
-          <p:cNvPr id="15" name="Image 1" descr="preencoded.png">    </p:cNvPr>
-          <p:cNvPicPr>
-            <a:picLocks noChangeAspect="1"/>
-          </p:cNvPicPr>
-          <p:nvPr/>
-        </p:nvPicPr>
-        <p:blipFill>
-          <a:blip r:embed="rId2"/>
-          <a:stretch>
-            <a:fillRect/>
-          </a:stretch>
-        </p:blipFill>
-        <p:spPr>
-          <a:xfrm>
-            <a:off x="8503920" y="4503420"/>
-            <a:ext cx="640080" cy="640080"/>
-          </a:xfrm>
-          <a:prstGeom prst="rect">
-            <a:avLst/>
-          </a:prstGeom>
-        </p:spPr>
-      </p:pic>
-      <p:sp>
-        <p:nvSpPr>
-          <p:cNvPr id="16" name="Text 12"/>
-          <p:cNvSpPr/>
-          <p:nvPr/>
-        </p:nvSpPr>
-        <p:spPr>
-          <a:xfrm>
-            <a:off x="6126480" y="5189220"/>
-            <a:ext cx="5394960" cy="457200"/>
-          </a:xfrm>
-          <a:prstGeom prst="rect">
-            <a:avLst/>
-          </a:prstGeom>
-          <a:noFill/>
-          <a:ln/>
-        </p:spPr>
-        <p:txBody>
-          <a:bodyPr wrap="square" lIns="0" tIns="0" rIns="0" bIns="0" rtlCol="0" anchor="ctr"/>
-          <a:lstStyle/>
-          <a:p>
-            <a:pPr algn="ctr" indent="0" marL="0">
-              <a:buNone/>
-            </a:pPr>
-            <a:r>
-              <a:rPr lang="en-US" sz="1400" dirty="0">
-                <a:solidFill>
-                  <a:srgbClr val="9AA0A6"/>
-                </a:solidFill>
-                <a:latin typeface="Malgun Gothic" pitchFamily="34" charset="0"/>
-                <a:ea typeface="Malgun Gothic" pitchFamily="34" charset="-122"/>
-                <a:cs typeface="Malgun Gothic" pitchFamily="34" charset="-120"/>
-              </a:rPr>
-              <a:t>사진: 매장 외부 카메라</a:t>
-            </a:r>
-            <a:endParaRPr lang="en-US" sz="1400" dirty="0"/>
-          </a:p>
-        </p:txBody>
-      </p:sp>
-      <p:sp>
-        <p:nvSpPr>
-          <p:cNvPr id="17" name="Text 13"/>
-          <p:cNvSpPr/>
-          <p:nvPr/>
-        </p:nvSpPr>
-        <p:spPr>
-          <a:xfrm>
-            <a:off x="6126480" y="3931920"/>
-            <a:ext cx="1463040" cy="320040"/>
-          </a:xfrm>
-          <a:prstGeom prst="rect">
-            <a:avLst/>
-          </a:prstGeom>
-          <a:noFill/>
-          <a:ln/>
-        </p:spPr>
-        <p:txBody>
-          <a:bodyPr wrap="square" rtlCol="0" anchor="ctr"/>
-          <a:lstStyle/>
-          <a:p>
-            <a:pPr algn="ctr" indent="0" marL="0">
-              <a:buNone/>
-            </a:pPr>
-            <a:r>
-              <a:rPr lang="en-US" sz="1200" b="1" dirty="0">
-                <a:solidFill>
-                  <a:srgbClr val="666666"/>
-                </a:solidFill>
-                <a:latin typeface="Malgun Gothic" pitchFamily="34" charset="0"/>
-                <a:ea typeface="Malgun Gothic" pitchFamily="34" charset="-122"/>
-                <a:cs typeface="Malgun Gothic" pitchFamily="34" charset="-120"/>
-              </a:rPr>
-              <a:t>매장 외부</a:t>
-            </a:r>
-            <a:endParaRPr lang="en-US" sz="1200" dirty="0"/>
           </a:p>
         </p:txBody>
       </p:sp>
@@ -3826,7 +3836,7 @@
                 <a:ea typeface="Malgun Gothic" pitchFamily="34" charset="-122"/>
                 <a:cs typeface="Malgun Gothic" pitchFamily="34" charset="-120"/>
               </a:rPr>
-              <a:t>STEP 2 / 7</a:t>
+              <a:t>STEP 1 / 8</a:t>
             </a:r>
             <a:endParaRPr lang="en-US" sz="1400" dirty="0"/>
           </a:p>
@@ -3885,7 +3895,7 @@
                 <a:ea typeface="Malgun Gothic" pitchFamily="34" charset="-122"/>
                 <a:cs typeface="Malgun Gothic" pitchFamily="34" charset="-120"/>
               </a:rPr>
-              <a:t>2</a:t>
+              <a:t>1</a:t>
             </a:r>
             <a:endParaRPr lang="en-US" sz="3600" dirty="0"/>
           </a:p>
@@ -3924,7 +3934,7 @@
                 <a:ea typeface="Malgun Gothic" pitchFamily="34" charset="-122"/>
                 <a:cs typeface="Malgun Gothic" pitchFamily="34" charset="-120"/>
               </a:rPr>
-              <a:t>USB 어댑터 연결</a:t>
+              <a:t>HDMI 분배기 전원부 분리</a:t>
             </a:r>
             <a:endParaRPr lang="en-US" sz="3000" dirty="0"/>
           </a:p>
@@ -3966,7 +3976,7 @@
                 <a:ea typeface="Malgun Gothic" pitchFamily="34" charset="-122"/>
                 <a:cs typeface="Malgun Gothic" pitchFamily="34" charset="-120"/>
               </a:rPr>
-              <a:t>분리한 전원부(USB 단자)를 USB 어댑터에 연결합니다.</a:t>
+              <a:t>셋톱박스에 연결되어 있는 HDMI 분배기의 전원부(USB 단자)를 분리합니다.</a:t>
             </a:r>
             <a:endParaRPr lang="en-US" sz="2000" dirty="0"/>
           </a:p>
@@ -4398,7 +4408,7 @@
                 <a:ea typeface="Malgun Gothic" pitchFamily="34" charset="-122"/>
                 <a:cs typeface="Malgun Gothic" pitchFamily="34" charset="-120"/>
               </a:rPr>
-              <a:t>STEP 3 / 7</a:t>
+              <a:t>STEP 2 / 8</a:t>
             </a:r>
             <a:endParaRPr lang="en-US" sz="1400" dirty="0"/>
           </a:p>
@@ -4457,7 +4467,7 @@
                 <a:ea typeface="Malgun Gothic" pitchFamily="34" charset="-122"/>
                 <a:cs typeface="Malgun Gothic" pitchFamily="34" charset="-120"/>
               </a:rPr>
-              <a:t>3</a:t>
+              <a:t>2</a:t>
             </a:r>
             <a:endParaRPr lang="en-US" sz="3600" dirty="0"/>
           </a:p>
@@ -4496,7 +4506,7 @@
                 <a:ea typeface="Malgun Gothic" pitchFamily="34" charset="-122"/>
                 <a:cs typeface="Malgun Gothic" pitchFamily="34" charset="-120"/>
               </a:rPr>
-              <a:t>콘센트 연결</a:t>
+              <a:t>USB 어댑터 연결</a:t>
             </a:r>
             <a:endParaRPr lang="en-US" sz="3000" dirty="0"/>
           </a:p>
@@ -4538,7 +4548,7 @@
                 <a:ea typeface="Malgun Gothic" pitchFamily="34" charset="-122"/>
                 <a:cs typeface="Malgun Gothic" pitchFamily="34" charset="-120"/>
               </a:rPr>
-              <a:t>멀티탭을 활용하여 어댑터를 콘센트에 연결합니다.</a:t>
+              <a:t>분리한 전원부(USB 단자)를 USB 어댑터에 연결합니다.</a:t>
             </a:r>
             <a:endParaRPr lang="en-US" sz="2000" dirty="0"/>
           </a:p>
@@ -4970,7 +4980,7 @@
                 <a:ea typeface="Malgun Gothic" pitchFamily="34" charset="-122"/>
                 <a:cs typeface="Malgun Gothic" pitchFamily="34" charset="-120"/>
               </a:rPr>
-              <a:t>STEP 4 / 7</a:t>
+              <a:t>STEP 3 / 8</a:t>
             </a:r>
             <a:endParaRPr lang="en-US" sz="1400" dirty="0"/>
           </a:p>
@@ -5029,7 +5039,7 @@
                 <a:ea typeface="Malgun Gothic" pitchFamily="34" charset="-122"/>
                 <a:cs typeface="Malgun Gothic" pitchFamily="34" charset="-120"/>
               </a:rPr>
-              <a:t>4</a:t>
+              <a:t>3</a:t>
             </a:r>
             <a:endParaRPr lang="en-US" sz="3600" dirty="0"/>
           </a:p>
@@ -5068,7 +5078,7 @@
                 <a:ea typeface="Malgun Gothic" pitchFamily="34" charset="-122"/>
                 <a:cs typeface="Malgun Gothic" pitchFamily="34" charset="-120"/>
               </a:rPr>
-              <a:t>AI 카메라 연결</a:t>
+              <a:t>콘센트 연결</a:t>
             </a:r>
             <a:endParaRPr lang="en-US" sz="3000" dirty="0"/>
           </a:p>
@@ -5110,7 +5120,7 @@
                 <a:ea typeface="Malgun Gothic" pitchFamily="34" charset="-122"/>
                 <a:cs typeface="Malgun Gothic" pitchFamily="34" charset="-120"/>
               </a:rPr>
-              <a:t>AI 카메라의 USB 단자를 셋톱박스에 연결합니다.</a:t>
+              <a:t>멀티탭을 활용하여 어댑터를 콘센트에 연결합니다.</a:t>
             </a:r>
             <a:endParaRPr lang="en-US" sz="2000" dirty="0"/>
           </a:p>
@@ -5542,7 +5552,7 @@
                 <a:ea typeface="Malgun Gothic" pitchFamily="34" charset="-122"/>
                 <a:cs typeface="Malgun Gothic" pitchFamily="34" charset="-120"/>
               </a:rPr>
-              <a:t>STEP 5 / 7</a:t>
+              <a:t>STEP 4 / 8</a:t>
             </a:r>
             <a:endParaRPr lang="en-US" sz="1400" dirty="0"/>
           </a:p>
@@ -5601,7 +5611,7 @@
                 <a:ea typeface="Malgun Gothic" pitchFamily="34" charset="-122"/>
                 <a:cs typeface="Malgun Gothic" pitchFamily="34" charset="-120"/>
               </a:rPr>
-              <a:t>5</a:t>
+              <a:t>4</a:t>
             </a:r>
             <a:endParaRPr lang="en-US" sz="3600" dirty="0"/>
           </a:p>
@@ -5640,7 +5650,7 @@
                 <a:ea typeface="Malgun Gothic" pitchFamily="34" charset="-122"/>
                 <a:cs typeface="Malgun Gothic" pitchFamily="34" charset="-120"/>
               </a:rPr>
-              <a:t>AI 카메라 부착</a:t>
+              <a:t>AI 카메라 연결</a:t>
             </a:r>
             <a:endParaRPr lang="en-US" sz="3000" dirty="0"/>
           </a:p>
@@ -5682,7 +5692,7 @@
                 <a:ea typeface="Malgun Gothic" pitchFamily="34" charset="-122"/>
                 <a:cs typeface="Malgun Gothic" pitchFamily="34" charset="-120"/>
               </a:rPr>
-              <a:t>3M 테이프를 활용하여 AI 카메라를 TV 밑면 가운데 위치에 부착합니다.</a:t>
+              <a:t>AI 카메라의 USB 단자를 셋톱박스에 연결합니다.</a:t>
             </a:r>
             <a:endParaRPr lang="en-US" sz="2000" dirty="0"/>
           </a:p>
@@ -6114,7 +6124,7 @@
                 <a:ea typeface="Malgun Gothic" pitchFamily="34" charset="-122"/>
                 <a:cs typeface="Malgun Gothic" pitchFamily="34" charset="-120"/>
               </a:rPr>
-              <a:t>STEP 6 / 7</a:t>
+              <a:t>STEP 5 / 8</a:t>
             </a:r>
             <a:endParaRPr lang="en-US" sz="1400" dirty="0"/>
           </a:p>
@@ -6173,7 +6183,7 @@
                 <a:ea typeface="Malgun Gothic" pitchFamily="34" charset="-122"/>
                 <a:cs typeface="Malgun Gothic" pitchFamily="34" charset="-120"/>
               </a:rPr>
-              <a:t>6</a:t>
+              <a:t>5</a:t>
             </a:r>
             <a:endParaRPr lang="en-US" sz="3600" dirty="0"/>
           </a:p>
@@ -6212,7 +6222,7 @@
                 <a:ea typeface="Malgun Gothic" pitchFamily="34" charset="-122"/>
                 <a:cs typeface="Malgun Gothic" pitchFamily="34" charset="-120"/>
               </a:rPr>
-              <a:t>AI 카메라 설정</a:t>
+              <a:t>AI 카메라 부착</a:t>
             </a:r>
             <a:endParaRPr lang="en-US" sz="3000" dirty="0"/>
           </a:p>
@@ -6227,7 +6237,7 @@
         <p:spPr>
           <a:xfrm>
             <a:off x="640080" y="2514600"/>
-            <a:ext cx="5120640" cy="548640"/>
+            <a:ext cx="5120640" cy="2011680"/>
           </a:xfrm>
           <a:prstGeom prst="rect">
             <a:avLst/>
@@ -6254,7 +6264,7 @@
                 <a:ea typeface="Malgun Gothic" pitchFamily="34" charset="-122"/>
                 <a:cs typeface="Malgun Gothic" pitchFamily="34" charset="-120"/>
               </a:rPr>
-              <a:t>아래 순서에 따라 카메라 설정을 진행합니다.</a:t>
+              <a:t>3M 테이프를 활용하여 AI 카메라를 TV 밑면 가운데 위치에 부착합니다.</a:t>
             </a:r>
             <a:endParaRPr lang="en-US" sz="2000" dirty="0"/>
           </a:p>
@@ -6268,14 +6278,16 @@
         </p:nvSpPr>
         <p:spPr>
           <a:xfrm>
-            <a:off x="640080" y="3200400"/>
-            <a:ext cx="365760" cy="365760"/>
-          </a:xfrm>
-          <a:prstGeom prst="ellipse">
-            <a:avLst/>
+            <a:off x="640080" y="5120640"/>
+            <a:ext cx="5120640" cy="1097280"/>
+          </a:xfrm>
+          <a:prstGeom prst="roundRect">
+            <a:avLst>
+              <a:gd name="adj" fmla="val 6667"/>
+            </a:avLst>
           </a:prstGeom>
           <a:solidFill>
-            <a:srgbClr val="FFD400"/>
+            <a:srgbClr val="FFF7CC"/>
           </a:solidFill>
           <a:ln/>
         </p:spPr>
@@ -6288,47 +6300,8 @@
         </p:nvSpPr>
         <p:spPr>
           <a:xfrm>
-            <a:off x="640080" y="3200400"/>
-            <a:ext cx="365760" cy="365760"/>
-          </a:xfrm>
-          <a:prstGeom prst="rect">
-            <a:avLst/>
-          </a:prstGeom>
-          <a:noFill/>
-          <a:ln/>
-        </p:spPr>
-        <p:txBody>
-          <a:bodyPr wrap="square" lIns="0" tIns="0" rIns="0" bIns="0" rtlCol="0" anchor="ctr"/>
-          <a:lstStyle/>
-          <a:p>
-            <a:pPr algn="ctr" indent="0" marL="0">
-              <a:buNone/>
-            </a:pPr>
-            <a:r>
-              <a:rPr lang="en-US" sz="1400" b="1" dirty="0">
-                <a:solidFill>
-                  <a:srgbClr val="1F1F1F"/>
-                </a:solidFill>
-                <a:latin typeface="Malgun Gothic" pitchFamily="34" charset="0"/>
-                <a:ea typeface="Malgun Gothic" pitchFamily="34" charset="-122"/>
-                <a:cs typeface="Malgun Gothic" pitchFamily="34" charset="-120"/>
-              </a:rPr>
-              <a:t>1</a:t>
-            </a:r>
-            <a:endParaRPr lang="en-US" sz="1400" dirty="0"/>
-          </a:p>
-        </p:txBody>
-      </p:sp>
-      <p:sp>
-        <p:nvSpPr>
-          <p:cNvPr id="10" name="Text 8"/>
-          <p:cNvSpPr/>
-          <p:nvPr/>
-        </p:nvSpPr>
-        <p:spPr>
-          <a:xfrm>
-            <a:off x="1188720" y="3154680"/>
-            <a:ext cx="4663440" cy="457200"/>
+            <a:off x="868680" y="5120640"/>
+            <a:ext cx="4663440" cy="1097280"/>
           </a:xfrm>
           <a:prstGeom prst="rect">
             <a:avLst/>
@@ -6341,10 +6314,13 @@
           <a:lstStyle/>
           <a:p>
             <a:pPr indent="0" marL="0">
-              <a:buNone/>
-            </a:pPr>
-            <a:r>
-              <a:rPr lang="en-US" sz="1600" dirty="0">
+              <a:lnSpc>
+                <a:spcPct val="125000"/>
+              </a:lnSpc>
+              <a:buNone/>
+            </a:pPr>
+            <a:r>
+              <a:rPr lang="en-US" sz="1500" dirty="0">
                 <a:solidFill>
                   <a:srgbClr val="222222"/>
                 </a:solidFill>
@@ -6352,348 +6328,15 @@
                 <a:ea typeface="Malgun Gothic" pitchFamily="34" charset="-122"/>
                 <a:cs typeface="Malgun Gothic" pitchFamily="34" charset="-120"/>
               </a:rPr>
-              <a:t>히든키 입력 (되감기 0407)</a:t>
-            </a:r>
-            <a:endParaRPr lang="en-US" sz="1600" dirty="0"/>
-          </a:p>
-        </p:txBody>
-      </p:sp>
-      <p:sp>
-        <p:nvSpPr>
-          <p:cNvPr id="11" name="Shape 9"/>
-          <p:cNvSpPr/>
-          <p:nvPr/>
-        </p:nvSpPr>
-        <p:spPr>
-          <a:xfrm>
-            <a:off x="640080" y="3730752"/>
-            <a:ext cx="365760" cy="365760"/>
-          </a:xfrm>
-          <a:prstGeom prst="ellipse">
-            <a:avLst/>
-          </a:prstGeom>
-          <a:solidFill>
-            <a:srgbClr val="FFD400"/>
-          </a:solidFill>
-          <a:ln/>
-        </p:spPr>
-      </p:sp>
-      <p:sp>
-        <p:nvSpPr>
-          <p:cNvPr id="12" name="Text 10"/>
-          <p:cNvSpPr/>
-          <p:nvPr/>
-        </p:nvSpPr>
-        <p:spPr>
-          <a:xfrm>
-            <a:off x="640080" y="3730752"/>
-            <a:ext cx="365760" cy="365760"/>
-          </a:xfrm>
-          <a:prstGeom prst="rect">
-            <a:avLst/>
-          </a:prstGeom>
-          <a:noFill/>
-          <a:ln/>
-        </p:spPr>
-        <p:txBody>
-          <a:bodyPr wrap="square" lIns="0" tIns="0" rIns="0" bIns="0" rtlCol="0" anchor="ctr"/>
-          <a:lstStyle/>
-          <a:p>
-            <a:pPr algn="ctr" indent="0" marL="0">
-              <a:buNone/>
-            </a:pPr>
-            <a:r>
-              <a:rPr lang="en-US" sz="1400" b="1" dirty="0">
-                <a:solidFill>
-                  <a:srgbClr val="1F1F1F"/>
-                </a:solidFill>
-                <a:latin typeface="Malgun Gothic" pitchFamily="34" charset="0"/>
-                <a:ea typeface="Malgun Gothic" pitchFamily="34" charset="-122"/>
-                <a:cs typeface="Malgun Gothic" pitchFamily="34" charset="-120"/>
-              </a:rPr>
-              <a:t>2</a:t>
-            </a:r>
-            <a:endParaRPr lang="en-US" sz="1400" dirty="0"/>
-          </a:p>
-        </p:txBody>
-      </p:sp>
-      <p:sp>
-        <p:nvSpPr>
-          <p:cNvPr id="13" name="Text 11"/>
-          <p:cNvSpPr/>
-          <p:nvPr/>
-        </p:nvSpPr>
-        <p:spPr>
-          <a:xfrm>
-            <a:off x="1188720" y="3685032"/>
-            <a:ext cx="4663440" cy="457200"/>
-          </a:xfrm>
-          <a:prstGeom prst="rect">
-            <a:avLst/>
-          </a:prstGeom>
-          <a:noFill/>
-          <a:ln/>
-        </p:spPr>
-        <p:txBody>
-          <a:bodyPr wrap="square" lIns="0" tIns="0" rIns="0" bIns="0" rtlCol="0" anchor="ctr"/>
-          <a:lstStyle/>
-          <a:p>
-            <a:pPr indent="0" marL="0">
-              <a:buNone/>
-            </a:pPr>
-            <a:r>
-              <a:rPr lang="en-US" sz="1600" dirty="0">
-                <a:solidFill>
-                  <a:srgbClr val="222222"/>
-                </a:solidFill>
-                <a:latin typeface="Malgun Gothic" pitchFamily="34" charset="0"/>
-                <a:ea typeface="Malgun Gothic" pitchFamily="34" charset="-122"/>
-                <a:cs typeface="Malgun Gothic" pitchFamily="34" charset="-120"/>
-              </a:rPr>
-              <a:t>카메라 설정 진행하기</a:t>
-            </a:r>
-            <a:endParaRPr lang="en-US" sz="1600" dirty="0"/>
-          </a:p>
-        </p:txBody>
-      </p:sp>
-      <p:sp>
-        <p:nvSpPr>
-          <p:cNvPr id="14" name="Shape 12"/>
-          <p:cNvSpPr/>
-          <p:nvPr/>
-        </p:nvSpPr>
-        <p:spPr>
-          <a:xfrm>
-            <a:off x="640080" y="4261104"/>
-            <a:ext cx="365760" cy="365760"/>
-          </a:xfrm>
-          <a:prstGeom prst="ellipse">
-            <a:avLst/>
-          </a:prstGeom>
-          <a:solidFill>
-            <a:srgbClr val="FFD400"/>
-          </a:solidFill>
-          <a:ln/>
-        </p:spPr>
-      </p:sp>
-      <p:sp>
-        <p:nvSpPr>
-          <p:cNvPr id="15" name="Text 13"/>
-          <p:cNvSpPr/>
-          <p:nvPr/>
-        </p:nvSpPr>
-        <p:spPr>
-          <a:xfrm>
-            <a:off x="640080" y="4261104"/>
-            <a:ext cx="365760" cy="365760"/>
-          </a:xfrm>
-          <a:prstGeom prst="rect">
-            <a:avLst/>
-          </a:prstGeom>
-          <a:noFill/>
-          <a:ln/>
-        </p:spPr>
-        <p:txBody>
-          <a:bodyPr wrap="square" lIns="0" tIns="0" rIns="0" bIns="0" rtlCol="0" anchor="ctr"/>
-          <a:lstStyle/>
-          <a:p>
-            <a:pPr algn="ctr" indent="0" marL="0">
-              <a:buNone/>
-            </a:pPr>
-            <a:r>
-              <a:rPr lang="en-US" sz="1400" b="1" dirty="0">
-                <a:solidFill>
-                  <a:srgbClr val="1F1F1F"/>
-                </a:solidFill>
-                <a:latin typeface="Malgun Gothic" pitchFamily="34" charset="0"/>
-                <a:ea typeface="Malgun Gothic" pitchFamily="34" charset="-122"/>
-                <a:cs typeface="Malgun Gothic" pitchFamily="34" charset="-120"/>
-              </a:rPr>
-              <a:t>3</a:t>
-            </a:r>
-            <a:endParaRPr lang="en-US" sz="1400" dirty="0"/>
-          </a:p>
-        </p:txBody>
-      </p:sp>
-      <p:sp>
-        <p:nvSpPr>
-          <p:cNvPr id="16" name="Text 14"/>
-          <p:cNvSpPr/>
-          <p:nvPr/>
-        </p:nvSpPr>
-        <p:spPr>
-          <a:xfrm>
-            <a:off x="1188720" y="4215384"/>
-            <a:ext cx="4663440" cy="457200"/>
-          </a:xfrm>
-          <a:prstGeom prst="rect">
-            <a:avLst/>
-          </a:prstGeom>
-          <a:noFill/>
-          <a:ln/>
-        </p:spPr>
-        <p:txBody>
-          <a:bodyPr wrap="square" lIns="0" tIns="0" rIns="0" bIns="0" rtlCol="0" anchor="ctr"/>
-          <a:lstStyle/>
-          <a:p>
-            <a:pPr indent="0" marL="0">
-              <a:buNone/>
-            </a:pPr>
-            <a:r>
-              <a:rPr lang="en-US" sz="1600" dirty="0">
-                <a:solidFill>
-                  <a:srgbClr val="222222"/>
-                </a:solidFill>
-                <a:latin typeface="Malgun Gothic" pitchFamily="34" charset="0"/>
-                <a:ea typeface="Malgun Gothic" pitchFamily="34" charset="-122"/>
-                <a:cs typeface="Malgun Gothic" pitchFamily="34" charset="-120"/>
-              </a:rPr>
-              <a:t>카메라 송출 영상 및 화각 확인 후 '다음' 선택</a:t>
-            </a:r>
-            <a:endParaRPr lang="en-US" sz="1600" dirty="0"/>
-          </a:p>
-        </p:txBody>
-      </p:sp>
-      <p:sp>
-        <p:nvSpPr>
-          <p:cNvPr id="17" name="Shape 15"/>
-          <p:cNvSpPr/>
-          <p:nvPr/>
-        </p:nvSpPr>
-        <p:spPr>
-          <a:xfrm>
-            <a:off x="640080" y="4791456"/>
-            <a:ext cx="365760" cy="365760"/>
-          </a:xfrm>
-          <a:prstGeom prst="ellipse">
-            <a:avLst/>
-          </a:prstGeom>
-          <a:solidFill>
-            <a:srgbClr val="FFD400"/>
-          </a:solidFill>
-          <a:ln/>
-        </p:spPr>
-      </p:sp>
-      <p:sp>
-        <p:nvSpPr>
-          <p:cNvPr id="18" name="Text 16"/>
-          <p:cNvSpPr/>
-          <p:nvPr/>
-        </p:nvSpPr>
-        <p:spPr>
-          <a:xfrm>
-            <a:off x="640080" y="4791456"/>
-            <a:ext cx="365760" cy="365760"/>
-          </a:xfrm>
-          <a:prstGeom prst="rect">
-            <a:avLst/>
-          </a:prstGeom>
-          <a:noFill/>
-          <a:ln/>
-        </p:spPr>
-        <p:txBody>
-          <a:bodyPr wrap="square" lIns="0" tIns="0" rIns="0" bIns="0" rtlCol="0" anchor="ctr"/>
-          <a:lstStyle/>
-          <a:p>
-            <a:pPr algn="ctr" indent="0" marL="0">
-              <a:buNone/>
-            </a:pPr>
-            <a:r>
-              <a:rPr lang="en-US" sz="1400" b="1" dirty="0">
-                <a:solidFill>
-                  <a:srgbClr val="1F1F1F"/>
-                </a:solidFill>
-                <a:latin typeface="Malgun Gothic" pitchFamily="34" charset="0"/>
-                <a:ea typeface="Malgun Gothic" pitchFamily="34" charset="-122"/>
-                <a:cs typeface="Malgun Gothic" pitchFamily="34" charset="-120"/>
-              </a:rPr>
-              <a:t>4</a:t>
-            </a:r>
-            <a:endParaRPr lang="en-US" sz="1400" dirty="0"/>
-          </a:p>
-        </p:txBody>
-      </p:sp>
-      <p:sp>
-        <p:nvSpPr>
-          <p:cNvPr id="19" name="Text 17"/>
-          <p:cNvSpPr/>
-          <p:nvPr/>
-        </p:nvSpPr>
-        <p:spPr>
-          <a:xfrm>
-            <a:off x="1188720" y="4745736"/>
-            <a:ext cx="4663440" cy="457200"/>
-          </a:xfrm>
-          <a:prstGeom prst="rect">
-            <a:avLst/>
-          </a:prstGeom>
-          <a:noFill/>
-          <a:ln/>
-        </p:spPr>
-        <p:txBody>
-          <a:bodyPr wrap="square" lIns="0" tIns="0" rIns="0" bIns="0" rtlCol="0" anchor="ctr"/>
-          <a:lstStyle/>
-          <a:p>
-            <a:pPr indent="0" marL="0">
-              <a:buNone/>
-            </a:pPr>
-            <a:r>
-              <a:rPr lang="en-US" sz="1600" dirty="0">
-                <a:solidFill>
-                  <a:srgbClr val="222222"/>
-                </a:solidFill>
-                <a:latin typeface="Malgun Gothic" pitchFamily="34" charset="0"/>
-                <a:ea typeface="Malgun Gothic" pitchFamily="34" charset="-122"/>
-                <a:cs typeface="Malgun Gothic" pitchFamily="34" charset="-120"/>
-              </a:rPr>
-              <a:t>서버 통신 테스트</a:t>
-            </a:r>
-            <a:endParaRPr lang="en-US" sz="1600" dirty="0"/>
-          </a:p>
-        </p:txBody>
-      </p:sp>
-      <p:sp>
-        <p:nvSpPr>
-          <p:cNvPr id="20" name="Text 18"/>
-          <p:cNvSpPr/>
-          <p:nvPr/>
-        </p:nvSpPr>
-        <p:spPr>
-          <a:xfrm>
-            <a:off x="640080" y="5458968"/>
-            <a:ext cx="5394960" cy="320040"/>
-          </a:xfrm>
-          <a:prstGeom prst="rect">
-            <a:avLst/>
-          </a:prstGeom>
-          <a:noFill/>
-          <a:ln/>
-        </p:spPr>
-        <p:txBody>
-          <a:bodyPr wrap="square" lIns="0" tIns="0" rIns="0" bIns="0" rtlCol="0" anchor="ctr"/>
-          <a:lstStyle/>
-          <a:p>
-            <a:pPr indent="0" marL="0">
-              <a:buNone/>
-            </a:pPr>
-            <a:r>
-              <a:rPr lang="en-US" sz="1300" dirty="0">
-                <a:solidFill>
-                  <a:srgbClr val="666666"/>
-                </a:solidFill>
-                <a:latin typeface="Malgun Gothic" pitchFamily="34" charset="0"/>
-                <a:ea typeface="Malgun Gothic" pitchFamily="34" charset="-122"/>
-                <a:cs typeface="Malgun Gothic" pitchFamily="34" charset="-120"/>
-              </a:rPr>
-              <a:t>※ 세부 내용은 시범 설치 후 업데이트 예정</a:t>
-            </a:r>
-            <a:endParaRPr lang="en-US" sz="1300" dirty="0"/>
-          </a:p>
-        </p:txBody>
-      </p:sp>
-      <p:sp>
-        <p:nvSpPr>
-          <p:cNvPr id="21" name="Shape 19"/>
+              <a:t>※ 계산대미디어는 매체당 카메라 2대(매장 내부 · 매장 외부)를 각각 동일한 방법으로 설치합니다.</a:t>
+            </a:r>
+            <a:endParaRPr lang="en-US" sz="1500" dirty="0"/>
+          </a:p>
+        </p:txBody>
+      </p:sp>
+      <p:sp>
+        <p:nvSpPr>
+          <p:cNvPr id="10" name="Shape 8"/>
           <p:cNvSpPr/>
           <p:nvPr/>
         </p:nvSpPr>
@@ -6720,7 +6363,7 @@
       </p:sp>
       <p:pic>
         <p:nvPicPr>
-          <p:cNvPr id="22" name="Image 0" descr="preencoded.png">    </p:cNvPr>
+          <p:cNvPr id="11" name="Image 0" descr="preencoded.png">    </p:cNvPr>
           <p:cNvPicPr>
             <a:picLocks noChangeAspect="1"/>
           </p:cNvPicPr>
@@ -6744,7 +6387,7 @@
       </p:pic>
       <p:sp>
         <p:nvSpPr>
-          <p:cNvPr id="23" name="Text 20"/>
+          <p:cNvPr id="12" name="Text 9"/>
           <p:cNvSpPr/>
           <p:nvPr/>
         </p:nvSpPr>
@@ -6783,7 +6426,7 @@
       </p:sp>
       <p:sp>
         <p:nvSpPr>
-          <p:cNvPr id="24" name="Text 21"/>
+          <p:cNvPr id="13" name="Text 10"/>
           <p:cNvSpPr/>
           <p:nvPr/>
         </p:nvSpPr>
@@ -6822,7 +6465,7 @@
       </p:sp>
       <p:sp>
         <p:nvSpPr>
-          <p:cNvPr id="25" name="Shape 22"/>
+          <p:cNvPr id="14" name="Shape 11"/>
           <p:cNvSpPr/>
           <p:nvPr/>
         </p:nvSpPr>
@@ -6849,7 +6492,7 @@
       </p:sp>
       <p:pic>
         <p:nvPicPr>
-          <p:cNvPr id="26" name="Image 1" descr="preencoded.png">    </p:cNvPr>
+          <p:cNvPr id="15" name="Image 1" descr="preencoded.png">    </p:cNvPr>
           <p:cNvPicPr>
             <a:picLocks noChangeAspect="1"/>
           </p:cNvPicPr>
@@ -6873,7 +6516,7 @@
       </p:pic>
       <p:sp>
         <p:nvSpPr>
-          <p:cNvPr id="27" name="Text 23"/>
+          <p:cNvPr id="16" name="Text 12"/>
           <p:cNvSpPr/>
           <p:nvPr/>
         </p:nvSpPr>
@@ -6912,7 +6555,7 @@
       </p:sp>
       <p:sp>
         <p:nvSpPr>
-          <p:cNvPr id="28" name="Text 24"/>
+          <p:cNvPr id="17" name="Text 13"/>
           <p:cNvSpPr/>
           <p:nvPr/>
         </p:nvSpPr>
@@ -7053,7 +6696,7 @@
                 <a:ea typeface="Malgun Gothic" pitchFamily="34" charset="-122"/>
                 <a:cs typeface="Malgun Gothic" pitchFamily="34" charset="-120"/>
               </a:rPr>
-              <a:t>STEP 7 / 7</a:t>
+              <a:t>STEP 6 / 8</a:t>
             </a:r>
             <a:endParaRPr lang="en-US" sz="1400" dirty="0"/>
           </a:p>
@@ -7112,7 +6755,7 @@
                 <a:ea typeface="Malgun Gothic" pitchFamily="34" charset="-122"/>
                 <a:cs typeface="Malgun Gothic" pitchFamily="34" charset="-120"/>
               </a:rPr>
-              <a:t>7</a:t>
+              <a:t>6</a:t>
             </a:r>
             <a:endParaRPr lang="en-US" sz="3600" dirty="0"/>
           </a:p>
@@ -7151,7 +6794,7 @@
                 <a:ea typeface="Malgun Gothic" pitchFamily="34" charset="-122"/>
                 <a:cs typeface="Malgun Gothic" pitchFamily="34" charset="-120"/>
               </a:rPr>
-              <a:t>케이블 정리</a:t>
+              <a:t>AI 카메라 설정</a:t>
             </a:r>
             <a:endParaRPr lang="en-US" sz="3000" dirty="0"/>
           </a:p>
@@ -7166,7 +6809,7 @@
         <p:spPr>
           <a:xfrm>
             <a:off x="640080" y="2514600"/>
-            <a:ext cx="5120640" cy="2011680"/>
+            <a:ext cx="5120640" cy="548640"/>
           </a:xfrm>
           <a:prstGeom prst="rect">
             <a:avLst/>
@@ -7193,7 +6836,7 @@
                 <a:ea typeface="Malgun Gothic" pitchFamily="34" charset="-122"/>
                 <a:cs typeface="Malgun Gothic" pitchFamily="34" charset="-120"/>
               </a:rPr>
-              <a:t>케이블 노출을 최소화할 수 있도록 선을 깔끔하게 정리합니다.</a:t>
+              <a:t>아래 순서에 따라 카메라 설정을 진행합니다.</a:t>
             </a:r>
             <a:endParaRPr lang="en-US" sz="2000" dirty="0"/>
           </a:p>
@@ -7207,16 +6850,14 @@
         </p:nvSpPr>
         <p:spPr>
           <a:xfrm>
-            <a:off x="640080" y="5120640"/>
-            <a:ext cx="5120640" cy="1097280"/>
-          </a:xfrm>
-          <a:prstGeom prst="roundRect">
-            <a:avLst>
-              <a:gd name="adj" fmla="val 6667"/>
-            </a:avLst>
+            <a:off x="640080" y="3200400"/>
+            <a:ext cx="365760" cy="365760"/>
+          </a:xfrm>
+          <a:prstGeom prst="ellipse">
+            <a:avLst/>
           </a:prstGeom>
           <a:solidFill>
-            <a:srgbClr val="FFF7CC"/>
+            <a:srgbClr val="FFD400"/>
           </a:solidFill>
           <a:ln/>
         </p:spPr>
@@ -7229,8 +6870,47 @@
         </p:nvSpPr>
         <p:spPr>
           <a:xfrm>
-            <a:off x="868680" y="5120640"/>
-            <a:ext cx="4663440" cy="1097280"/>
+            <a:off x="640080" y="3200400"/>
+            <a:ext cx="365760" cy="365760"/>
+          </a:xfrm>
+          <a:prstGeom prst="rect">
+            <a:avLst/>
+          </a:prstGeom>
+          <a:noFill/>
+          <a:ln/>
+        </p:spPr>
+        <p:txBody>
+          <a:bodyPr wrap="square" lIns="0" tIns="0" rIns="0" bIns="0" rtlCol="0" anchor="ctr"/>
+          <a:lstStyle/>
+          <a:p>
+            <a:pPr algn="ctr" indent="0" marL="0">
+              <a:buNone/>
+            </a:pPr>
+            <a:r>
+              <a:rPr lang="en-US" sz="1400" b="1" dirty="0">
+                <a:solidFill>
+                  <a:srgbClr val="1F1F1F"/>
+                </a:solidFill>
+                <a:latin typeface="Malgun Gothic" pitchFamily="34" charset="0"/>
+                <a:ea typeface="Malgun Gothic" pitchFamily="34" charset="-122"/>
+                <a:cs typeface="Malgun Gothic" pitchFamily="34" charset="-120"/>
+              </a:rPr>
+              <a:t>1</a:t>
+            </a:r>
+            <a:endParaRPr lang="en-US" sz="1400" dirty="0"/>
+          </a:p>
+        </p:txBody>
+      </p:sp>
+      <p:sp>
+        <p:nvSpPr>
+          <p:cNvPr id="10" name="Text 8"/>
+          <p:cNvSpPr/>
+          <p:nvPr/>
+        </p:nvSpPr>
+        <p:spPr>
+          <a:xfrm>
+            <a:off x="1188720" y="3154680"/>
+            <a:ext cx="4663440" cy="457200"/>
           </a:xfrm>
           <a:prstGeom prst="rect">
             <a:avLst/>
@@ -7243,13 +6923,10 @@
           <a:lstStyle/>
           <a:p>
             <a:pPr indent="0" marL="0">
-              <a:lnSpc>
-                <a:spcPct val="125000"/>
-              </a:lnSpc>
-              <a:buNone/>
-            </a:pPr>
-            <a:r>
-              <a:rPr lang="en-US" sz="1500" dirty="0">
+              <a:buNone/>
+            </a:pPr>
+            <a:r>
+              <a:rPr lang="en-US" sz="1600" dirty="0">
                 <a:solidFill>
                   <a:srgbClr val="222222"/>
                 </a:solidFill>
@@ -7257,15 +6934,348 @@
                 <a:ea typeface="Malgun Gothic" pitchFamily="34" charset="-122"/>
                 <a:cs typeface="Malgun Gothic" pitchFamily="34" charset="-120"/>
               </a:rPr>
-              <a:t>※ 계산대미디어는 매체당 카메라 2대(매장 내부 · 매장 외부)를 각각 동일한 방법으로 설치합니다.</a:t>
-            </a:r>
-            <a:endParaRPr lang="en-US" sz="1500" dirty="0"/>
-          </a:p>
-        </p:txBody>
-      </p:sp>
-      <p:sp>
-        <p:nvSpPr>
-          <p:cNvPr id="10" name="Shape 8"/>
+              <a:t>히든키 입력 (되감기 0407)</a:t>
+            </a:r>
+            <a:endParaRPr lang="en-US" sz="1600" dirty="0"/>
+          </a:p>
+        </p:txBody>
+      </p:sp>
+      <p:sp>
+        <p:nvSpPr>
+          <p:cNvPr id="11" name="Shape 9"/>
+          <p:cNvSpPr/>
+          <p:nvPr/>
+        </p:nvSpPr>
+        <p:spPr>
+          <a:xfrm>
+            <a:off x="640080" y="3730752"/>
+            <a:ext cx="365760" cy="365760"/>
+          </a:xfrm>
+          <a:prstGeom prst="ellipse">
+            <a:avLst/>
+          </a:prstGeom>
+          <a:solidFill>
+            <a:srgbClr val="FFD400"/>
+          </a:solidFill>
+          <a:ln/>
+        </p:spPr>
+      </p:sp>
+      <p:sp>
+        <p:nvSpPr>
+          <p:cNvPr id="12" name="Text 10"/>
+          <p:cNvSpPr/>
+          <p:nvPr/>
+        </p:nvSpPr>
+        <p:spPr>
+          <a:xfrm>
+            <a:off x="640080" y="3730752"/>
+            <a:ext cx="365760" cy="365760"/>
+          </a:xfrm>
+          <a:prstGeom prst="rect">
+            <a:avLst/>
+          </a:prstGeom>
+          <a:noFill/>
+          <a:ln/>
+        </p:spPr>
+        <p:txBody>
+          <a:bodyPr wrap="square" lIns="0" tIns="0" rIns="0" bIns="0" rtlCol="0" anchor="ctr"/>
+          <a:lstStyle/>
+          <a:p>
+            <a:pPr algn="ctr" indent="0" marL="0">
+              <a:buNone/>
+            </a:pPr>
+            <a:r>
+              <a:rPr lang="en-US" sz="1400" b="1" dirty="0">
+                <a:solidFill>
+                  <a:srgbClr val="1F1F1F"/>
+                </a:solidFill>
+                <a:latin typeface="Malgun Gothic" pitchFamily="34" charset="0"/>
+                <a:ea typeface="Malgun Gothic" pitchFamily="34" charset="-122"/>
+                <a:cs typeface="Malgun Gothic" pitchFamily="34" charset="-120"/>
+              </a:rPr>
+              <a:t>2</a:t>
+            </a:r>
+            <a:endParaRPr lang="en-US" sz="1400" dirty="0"/>
+          </a:p>
+        </p:txBody>
+      </p:sp>
+      <p:sp>
+        <p:nvSpPr>
+          <p:cNvPr id="13" name="Text 11"/>
+          <p:cNvSpPr/>
+          <p:nvPr/>
+        </p:nvSpPr>
+        <p:spPr>
+          <a:xfrm>
+            <a:off x="1188720" y="3685032"/>
+            <a:ext cx="4663440" cy="457200"/>
+          </a:xfrm>
+          <a:prstGeom prst="rect">
+            <a:avLst/>
+          </a:prstGeom>
+          <a:noFill/>
+          <a:ln/>
+        </p:spPr>
+        <p:txBody>
+          <a:bodyPr wrap="square" lIns="0" tIns="0" rIns="0" bIns="0" rtlCol="0" anchor="ctr"/>
+          <a:lstStyle/>
+          <a:p>
+            <a:pPr indent="0" marL="0">
+              <a:buNone/>
+            </a:pPr>
+            <a:r>
+              <a:rPr lang="en-US" sz="1600" dirty="0">
+                <a:solidFill>
+                  <a:srgbClr val="222222"/>
+                </a:solidFill>
+                <a:latin typeface="Malgun Gothic" pitchFamily="34" charset="0"/>
+                <a:ea typeface="Malgun Gothic" pitchFamily="34" charset="-122"/>
+                <a:cs typeface="Malgun Gothic" pitchFamily="34" charset="-120"/>
+              </a:rPr>
+              <a:t>카메라 설정 진행하기</a:t>
+            </a:r>
+            <a:endParaRPr lang="en-US" sz="1600" dirty="0"/>
+          </a:p>
+        </p:txBody>
+      </p:sp>
+      <p:sp>
+        <p:nvSpPr>
+          <p:cNvPr id="14" name="Shape 12"/>
+          <p:cNvSpPr/>
+          <p:nvPr/>
+        </p:nvSpPr>
+        <p:spPr>
+          <a:xfrm>
+            <a:off x="640080" y="4261104"/>
+            <a:ext cx="365760" cy="365760"/>
+          </a:xfrm>
+          <a:prstGeom prst="ellipse">
+            <a:avLst/>
+          </a:prstGeom>
+          <a:solidFill>
+            <a:srgbClr val="FFD400"/>
+          </a:solidFill>
+          <a:ln/>
+        </p:spPr>
+      </p:sp>
+      <p:sp>
+        <p:nvSpPr>
+          <p:cNvPr id="15" name="Text 13"/>
+          <p:cNvSpPr/>
+          <p:nvPr/>
+        </p:nvSpPr>
+        <p:spPr>
+          <a:xfrm>
+            <a:off x="640080" y="4261104"/>
+            <a:ext cx="365760" cy="365760"/>
+          </a:xfrm>
+          <a:prstGeom prst="rect">
+            <a:avLst/>
+          </a:prstGeom>
+          <a:noFill/>
+          <a:ln/>
+        </p:spPr>
+        <p:txBody>
+          <a:bodyPr wrap="square" lIns="0" tIns="0" rIns="0" bIns="0" rtlCol="0" anchor="ctr"/>
+          <a:lstStyle/>
+          <a:p>
+            <a:pPr algn="ctr" indent="0" marL="0">
+              <a:buNone/>
+            </a:pPr>
+            <a:r>
+              <a:rPr lang="en-US" sz="1400" b="1" dirty="0">
+                <a:solidFill>
+                  <a:srgbClr val="1F1F1F"/>
+                </a:solidFill>
+                <a:latin typeface="Malgun Gothic" pitchFamily="34" charset="0"/>
+                <a:ea typeface="Malgun Gothic" pitchFamily="34" charset="-122"/>
+                <a:cs typeface="Malgun Gothic" pitchFamily="34" charset="-120"/>
+              </a:rPr>
+              <a:t>3</a:t>
+            </a:r>
+            <a:endParaRPr lang="en-US" sz="1400" dirty="0"/>
+          </a:p>
+        </p:txBody>
+      </p:sp>
+      <p:sp>
+        <p:nvSpPr>
+          <p:cNvPr id="16" name="Text 14"/>
+          <p:cNvSpPr/>
+          <p:nvPr/>
+        </p:nvSpPr>
+        <p:spPr>
+          <a:xfrm>
+            <a:off x="1188720" y="4215384"/>
+            <a:ext cx="4663440" cy="457200"/>
+          </a:xfrm>
+          <a:prstGeom prst="rect">
+            <a:avLst/>
+          </a:prstGeom>
+          <a:noFill/>
+          <a:ln/>
+        </p:spPr>
+        <p:txBody>
+          <a:bodyPr wrap="square" lIns="0" tIns="0" rIns="0" bIns="0" rtlCol="0" anchor="ctr"/>
+          <a:lstStyle/>
+          <a:p>
+            <a:pPr indent="0" marL="0">
+              <a:buNone/>
+            </a:pPr>
+            <a:r>
+              <a:rPr lang="en-US" sz="1600" dirty="0">
+                <a:solidFill>
+                  <a:srgbClr val="222222"/>
+                </a:solidFill>
+                <a:latin typeface="Malgun Gothic" pitchFamily="34" charset="0"/>
+                <a:ea typeface="Malgun Gothic" pitchFamily="34" charset="-122"/>
+                <a:cs typeface="Malgun Gothic" pitchFamily="34" charset="-120"/>
+              </a:rPr>
+              <a:t>카메라 송출 영상 및 화각 확인 후 '다음' 선택</a:t>
+            </a:r>
+            <a:endParaRPr lang="en-US" sz="1600" dirty="0"/>
+          </a:p>
+        </p:txBody>
+      </p:sp>
+      <p:sp>
+        <p:nvSpPr>
+          <p:cNvPr id="17" name="Shape 15"/>
+          <p:cNvSpPr/>
+          <p:nvPr/>
+        </p:nvSpPr>
+        <p:spPr>
+          <a:xfrm>
+            <a:off x="640080" y="4791456"/>
+            <a:ext cx="365760" cy="365760"/>
+          </a:xfrm>
+          <a:prstGeom prst="ellipse">
+            <a:avLst/>
+          </a:prstGeom>
+          <a:solidFill>
+            <a:srgbClr val="FFD400"/>
+          </a:solidFill>
+          <a:ln/>
+        </p:spPr>
+      </p:sp>
+      <p:sp>
+        <p:nvSpPr>
+          <p:cNvPr id="18" name="Text 16"/>
+          <p:cNvSpPr/>
+          <p:nvPr/>
+        </p:nvSpPr>
+        <p:spPr>
+          <a:xfrm>
+            <a:off x="640080" y="4791456"/>
+            <a:ext cx="365760" cy="365760"/>
+          </a:xfrm>
+          <a:prstGeom prst="rect">
+            <a:avLst/>
+          </a:prstGeom>
+          <a:noFill/>
+          <a:ln/>
+        </p:spPr>
+        <p:txBody>
+          <a:bodyPr wrap="square" lIns="0" tIns="0" rIns="0" bIns="0" rtlCol="0" anchor="ctr"/>
+          <a:lstStyle/>
+          <a:p>
+            <a:pPr algn="ctr" indent="0" marL="0">
+              <a:buNone/>
+            </a:pPr>
+            <a:r>
+              <a:rPr lang="en-US" sz="1400" b="1" dirty="0">
+                <a:solidFill>
+                  <a:srgbClr val="1F1F1F"/>
+                </a:solidFill>
+                <a:latin typeface="Malgun Gothic" pitchFamily="34" charset="0"/>
+                <a:ea typeface="Malgun Gothic" pitchFamily="34" charset="-122"/>
+                <a:cs typeface="Malgun Gothic" pitchFamily="34" charset="-120"/>
+              </a:rPr>
+              <a:t>4</a:t>
+            </a:r>
+            <a:endParaRPr lang="en-US" sz="1400" dirty="0"/>
+          </a:p>
+        </p:txBody>
+      </p:sp>
+      <p:sp>
+        <p:nvSpPr>
+          <p:cNvPr id="19" name="Text 17"/>
+          <p:cNvSpPr/>
+          <p:nvPr/>
+        </p:nvSpPr>
+        <p:spPr>
+          <a:xfrm>
+            <a:off x="1188720" y="4745736"/>
+            <a:ext cx="4663440" cy="457200"/>
+          </a:xfrm>
+          <a:prstGeom prst="rect">
+            <a:avLst/>
+          </a:prstGeom>
+          <a:noFill/>
+          <a:ln/>
+        </p:spPr>
+        <p:txBody>
+          <a:bodyPr wrap="square" lIns="0" tIns="0" rIns="0" bIns="0" rtlCol="0" anchor="ctr"/>
+          <a:lstStyle/>
+          <a:p>
+            <a:pPr indent="0" marL="0">
+              <a:buNone/>
+            </a:pPr>
+            <a:r>
+              <a:rPr lang="en-US" sz="1600" dirty="0">
+                <a:solidFill>
+                  <a:srgbClr val="222222"/>
+                </a:solidFill>
+                <a:latin typeface="Malgun Gothic" pitchFamily="34" charset="0"/>
+                <a:ea typeface="Malgun Gothic" pitchFamily="34" charset="-122"/>
+                <a:cs typeface="Malgun Gothic" pitchFamily="34" charset="-120"/>
+              </a:rPr>
+              <a:t>서버 통신 테스트</a:t>
+            </a:r>
+            <a:endParaRPr lang="en-US" sz="1600" dirty="0"/>
+          </a:p>
+        </p:txBody>
+      </p:sp>
+      <p:sp>
+        <p:nvSpPr>
+          <p:cNvPr id="20" name="Text 18"/>
+          <p:cNvSpPr/>
+          <p:nvPr/>
+        </p:nvSpPr>
+        <p:spPr>
+          <a:xfrm>
+            <a:off x="640080" y="5458968"/>
+            <a:ext cx="5394960" cy="320040"/>
+          </a:xfrm>
+          <a:prstGeom prst="rect">
+            <a:avLst/>
+          </a:prstGeom>
+          <a:noFill/>
+          <a:ln/>
+        </p:spPr>
+        <p:txBody>
+          <a:bodyPr wrap="square" lIns="0" tIns="0" rIns="0" bIns="0" rtlCol="0" anchor="ctr"/>
+          <a:lstStyle/>
+          <a:p>
+            <a:pPr indent="0" marL="0">
+              <a:buNone/>
+            </a:pPr>
+            <a:r>
+              <a:rPr lang="en-US" sz="1300" dirty="0">
+                <a:solidFill>
+                  <a:srgbClr val="666666"/>
+                </a:solidFill>
+                <a:latin typeface="Malgun Gothic" pitchFamily="34" charset="0"/>
+                <a:ea typeface="Malgun Gothic" pitchFamily="34" charset="-122"/>
+                <a:cs typeface="Malgun Gothic" pitchFamily="34" charset="-120"/>
+              </a:rPr>
+              <a:t>※ 세부 내용은 시범 설치 후 업데이트 예정</a:t>
+            </a:r>
+            <a:endParaRPr lang="en-US" sz="1300" dirty="0"/>
+          </a:p>
+        </p:txBody>
+      </p:sp>
+      <p:sp>
+        <p:nvSpPr>
+          <p:cNvPr id="21" name="Shape 19"/>
           <p:cNvSpPr/>
           <p:nvPr/>
         </p:nvSpPr>
@@ -7292,7 +7302,7 @@
       </p:sp>
       <p:pic>
         <p:nvPicPr>
-          <p:cNvPr id="11" name="Image 0" descr="preencoded.png">    </p:cNvPr>
+          <p:cNvPr id="22" name="Image 0" descr="preencoded.png">    </p:cNvPr>
           <p:cNvPicPr>
             <a:picLocks noChangeAspect="1"/>
           </p:cNvPicPr>
@@ -7316,7 +7326,7 @@
       </p:pic>
       <p:sp>
         <p:nvSpPr>
-          <p:cNvPr id="12" name="Text 9"/>
+          <p:cNvPr id="23" name="Text 20"/>
           <p:cNvSpPr/>
           <p:nvPr/>
         </p:nvSpPr>
@@ -7355,7 +7365,7 @@
       </p:sp>
       <p:sp>
         <p:nvSpPr>
-          <p:cNvPr id="13" name="Text 10"/>
+          <p:cNvPr id="24" name="Text 21"/>
           <p:cNvSpPr/>
           <p:nvPr/>
         </p:nvSpPr>
@@ -7394,7 +7404,7 @@
       </p:sp>
       <p:sp>
         <p:nvSpPr>
-          <p:cNvPr id="14" name="Shape 11"/>
+          <p:cNvPr id="25" name="Shape 22"/>
           <p:cNvSpPr/>
           <p:nvPr/>
         </p:nvSpPr>
@@ -7421,7 +7431,7 @@
       </p:sp>
       <p:pic>
         <p:nvPicPr>
-          <p:cNvPr id="15" name="Image 1" descr="preencoded.png">    </p:cNvPr>
+          <p:cNvPr id="26" name="Image 1" descr="preencoded.png">    </p:cNvPr>
           <p:cNvPicPr>
             <a:picLocks noChangeAspect="1"/>
           </p:cNvPicPr>
@@ -7445,7 +7455,7 @@
       </p:pic>
       <p:sp>
         <p:nvSpPr>
-          <p:cNvPr id="16" name="Text 12"/>
+          <p:cNvPr id="27" name="Text 23"/>
           <p:cNvSpPr/>
           <p:nvPr/>
         </p:nvSpPr>
@@ -7484,7 +7494,7 @@
       </p:sp>
       <p:sp>
         <p:nvSpPr>
-          <p:cNvPr id="17" name="Text 13"/>
+          <p:cNvPr id="28" name="Text 24"/>
           <p:cNvSpPr/>
           <p:nvPr/>
         </p:nvSpPr>
@@ -7535,7 +7545,7 @@
     <p:bg>
       <p:bgPr>
         <a:solidFill>
-          <a:srgbClr val="1F1F1F"/>
+          <a:srgbClr val="FFFFFF"/>
         </a:solidFill>
       </p:bgPr>
     </p:bg>
@@ -7561,8 +7571,8 @@
         </p:nvSpPr>
         <p:spPr>
           <a:xfrm>
-            <a:off x="822960" y="640080"/>
-            <a:ext cx="10515600" cy="822960"/>
+            <a:off x="640080" y="411480"/>
+            <a:ext cx="6400800" cy="365760"/>
           </a:xfrm>
           <a:prstGeom prst="rect">
             <a:avLst/>
@@ -7578,30 +7588,69 @@
               <a:buNone/>
             </a:pPr>
             <a:r>
-              <a:rPr lang="en-US" sz="4000" b="1" dirty="0">
-                <a:solidFill>
-                  <a:srgbClr val="FFFFFF"/>
-                </a:solidFill>
-                <a:latin typeface="Malgun Gothic" pitchFamily="34" charset="0"/>
-                <a:ea typeface="Malgun Gothic" pitchFamily="34" charset="-122"/>
-                <a:cs typeface="Malgun Gothic" pitchFamily="34" charset="-120"/>
-              </a:rPr>
-              <a:t>설치 완료 확인 사항</a:t>
-            </a:r>
-            <a:endParaRPr lang="en-US" sz="4000" dirty="0"/>
-          </a:p>
-        </p:txBody>
-      </p:sp>
-      <p:sp>
-        <p:nvSpPr>
-          <p:cNvPr id="3" name="Shape 1"/>
-          <p:cNvSpPr/>
-          <p:nvPr/>
-        </p:nvSpPr>
-        <p:spPr>
-          <a:xfrm>
-            <a:off x="822960" y="1856232"/>
-            <a:ext cx="384048" cy="384048"/>
+              <a:rPr lang="en-US" sz="1600" b="1" dirty="0">
+                <a:solidFill>
+                  <a:srgbClr val="666666"/>
+                </a:solidFill>
+                <a:latin typeface="Malgun Gothic" pitchFamily="34" charset="0"/>
+                <a:ea typeface="Malgun Gothic" pitchFamily="34" charset="-122"/>
+                <a:cs typeface="Malgun Gothic" pitchFamily="34" charset="-120"/>
+              </a:rPr>
+              <a:t>계산대미디어 설치 방법</a:t>
+            </a:r>
+            <a:endParaRPr lang="en-US" sz="1600" dirty="0"/>
+          </a:p>
+        </p:txBody>
+      </p:sp>
+      <p:sp>
+        <p:nvSpPr>
+          <p:cNvPr id="3" name="Text 1"/>
+          <p:cNvSpPr/>
+          <p:nvPr/>
+        </p:nvSpPr>
+        <p:spPr>
+          <a:xfrm>
+            <a:off x="9262872" y="411480"/>
+            <a:ext cx="2286000" cy="365760"/>
+          </a:xfrm>
+          <a:prstGeom prst="rect">
+            <a:avLst/>
+          </a:prstGeom>
+          <a:noFill/>
+          <a:ln/>
+        </p:spPr>
+        <p:txBody>
+          <a:bodyPr wrap="square" lIns="0" tIns="0" rIns="0" bIns="0" rtlCol="0" anchor="ctr"/>
+          <a:lstStyle/>
+          <a:p>
+            <a:pPr algn="r" indent="0" marL="0">
+              <a:buNone/>
+            </a:pPr>
+            <a:r>
+              <a:rPr lang="en-US" sz="1400" b="1" dirty="0">
+                <a:solidFill>
+                  <a:srgbClr val="9AA0A6"/>
+                </a:solidFill>
+                <a:latin typeface="Malgun Gothic" pitchFamily="34" charset="0"/>
+                <a:ea typeface="Malgun Gothic" pitchFamily="34" charset="-122"/>
+                <a:cs typeface="Malgun Gothic" pitchFamily="34" charset="-120"/>
+              </a:rPr>
+              <a:t>STEP 7 / 8</a:t>
+            </a:r>
+            <a:endParaRPr lang="en-US" sz="1400" dirty="0"/>
+          </a:p>
+        </p:txBody>
+      </p:sp>
+      <p:sp>
+        <p:nvSpPr>
+          <p:cNvPr id="4" name="Shape 2"/>
+          <p:cNvSpPr/>
+          <p:nvPr/>
+        </p:nvSpPr>
+        <p:spPr>
+          <a:xfrm>
+            <a:off x="640080" y="1143000"/>
+            <a:ext cx="914400" cy="914400"/>
           </a:xfrm>
           <a:prstGeom prst="ellipse">
             <a:avLst/>
@@ -7614,14 +7663,14 @@
       </p:sp>
       <p:sp>
         <p:nvSpPr>
-          <p:cNvPr id="4" name="Text 2"/>
-          <p:cNvSpPr/>
-          <p:nvPr/>
-        </p:nvSpPr>
-        <p:spPr>
-          <a:xfrm>
-            <a:off x="822960" y="1856232"/>
-            <a:ext cx="384048" cy="384048"/>
+          <p:cNvPr id="5" name="Text 3"/>
+          <p:cNvSpPr/>
+          <p:nvPr/>
+        </p:nvSpPr>
+        <p:spPr>
+          <a:xfrm>
+            <a:off x="640080" y="1143000"/>
+            <a:ext cx="914400" cy="914400"/>
           </a:xfrm>
           <a:prstGeom prst="rect">
             <a:avLst/>
@@ -7637,7 +7686,7 @@
               <a:buNone/>
             </a:pPr>
             <a:r>
-              <a:rPr lang="en-US" sz="1600" b="1" dirty="0">
+              <a:rPr lang="en-US" sz="3600" b="1" dirty="0">
                 <a:solidFill>
                   <a:srgbClr val="1F1F1F"/>
                 </a:solidFill>
@@ -7645,22 +7694,22 @@
                 <a:ea typeface="Malgun Gothic" pitchFamily="34" charset="-122"/>
                 <a:cs typeface="Malgun Gothic" pitchFamily="34" charset="-120"/>
               </a:rPr>
-              <a:t>✓</a:t>
-            </a:r>
-            <a:endParaRPr lang="en-US" sz="1600" dirty="0"/>
-          </a:p>
-        </p:txBody>
-      </p:sp>
-      <p:sp>
-        <p:nvSpPr>
-          <p:cNvPr id="5" name="Text 3"/>
-          <p:cNvSpPr/>
-          <p:nvPr/>
-        </p:nvSpPr>
-        <p:spPr>
-          <a:xfrm>
-            <a:off x="1417320" y="1783080"/>
-            <a:ext cx="9966960" cy="548640"/>
+              <a:t>7</a:t>
+            </a:r>
+            <a:endParaRPr lang="en-US" sz="3600" dirty="0"/>
+          </a:p>
+        </p:txBody>
+      </p:sp>
+      <p:sp>
+        <p:nvSpPr>
+          <p:cNvPr id="6" name="Text 4"/>
+          <p:cNvSpPr/>
+          <p:nvPr/>
+        </p:nvSpPr>
+        <p:spPr>
+          <a:xfrm>
+            <a:off x="1783080" y="1143000"/>
+            <a:ext cx="4206240" cy="914400"/>
           </a:xfrm>
           <a:prstGeom prst="rect">
             <a:avLst/>
@@ -7676,50 +7725,187 @@
               <a:buNone/>
             </a:pPr>
             <a:r>
-              <a:rPr lang="en-US" sz="1800" dirty="0">
-                <a:solidFill>
-                  <a:srgbClr val="FFFFFF"/>
-                </a:solidFill>
-                <a:latin typeface="Malgun Gothic" pitchFamily="34" charset="0"/>
-                <a:ea typeface="Malgun Gothic" pitchFamily="34" charset="-122"/>
-                <a:cs typeface="Malgun Gothic" pitchFamily="34" charset="-120"/>
-              </a:rPr>
-              <a:t>HDMI 분배기 전원부가 USB 어댑터를 통해 콘센트에 연결되어 있는가?</a:t>
-            </a:r>
-            <a:endParaRPr lang="en-US" sz="1800" dirty="0"/>
-          </a:p>
-        </p:txBody>
-      </p:sp>
-      <p:sp>
-        <p:nvSpPr>
-          <p:cNvPr id="6" name="Shape 4"/>
-          <p:cNvSpPr/>
-          <p:nvPr/>
-        </p:nvSpPr>
-        <p:spPr>
-          <a:xfrm>
-            <a:off x="822960" y="2633472"/>
-            <a:ext cx="384048" cy="384048"/>
-          </a:xfrm>
-          <a:prstGeom prst="ellipse">
-            <a:avLst/>
+              <a:rPr lang="en-US" sz="3000" b="1" dirty="0">
+                <a:solidFill>
+                  <a:srgbClr val="222222"/>
+                </a:solidFill>
+                <a:latin typeface="Malgun Gothic" pitchFamily="34" charset="0"/>
+                <a:ea typeface="Malgun Gothic" pitchFamily="34" charset="-122"/>
+                <a:cs typeface="Malgun Gothic" pitchFamily="34" charset="-120"/>
+              </a:rPr>
+              <a:t>AI 카메라 LED 가리기</a:t>
+            </a:r>
+            <a:endParaRPr lang="en-US" sz="3000" dirty="0"/>
+          </a:p>
+        </p:txBody>
+      </p:sp>
+      <p:sp>
+        <p:nvSpPr>
+          <p:cNvPr id="7" name="Text 5"/>
+          <p:cNvSpPr/>
+          <p:nvPr/>
+        </p:nvSpPr>
+        <p:spPr>
+          <a:xfrm>
+            <a:off x="640080" y="2514600"/>
+            <a:ext cx="5120640" cy="2011680"/>
+          </a:xfrm>
+          <a:prstGeom prst="rect">
+            <a:avLst/>
+          </a:prstGeom>
+          <a:noFill/>
+          <a:ln/>
+        </p:spPr>
+        <p:txBody>
+          <a:bodyPr wrap="square" lIns="0" tIns="0" rIns="0" bIns="0" rtlCol="0" anchor="t"/>
+          <a:lstStyle/>
+          <a:p>
+            <a:pPr indent="0" marL="0">
+              <a:lnSpc>
+                <a:spcPct val="135000"/>
+              </a:lnSpc>
+              <a:buNone/>
+            </a:pPr>
+            <a:r>
+              <a:rPr lang="en-US" sz="2000" dirty="0">
+                <a:solidFill>
+                  <a:srgbClr val="222222"/>
+                </a:solidFill>
+                <a:latin typeface="Malgun Gothic" pitchFamily="34" charset="0"/>
+                <a:ea typeface="Malgun Gothic" pitchFamily="34" charset="-122"/>
+                <a:cs typeface="Malgun Gothic" pitchFamily="34" charset="-120"/>
+              </a:rPr>
+              <a:t>전달받은 펜으로 AI 카메라 작동 시 흰 불(LED)이 들어오는 부분을 칠합니다.</a:t>
+            </a:r>
+            <a:endParaRPr lang="en-US" sz="2000" dirty="0"/>
+          </a:p>
+        </p:txBody>
+      </p:sp>
+      <p:sp>
+        <p:nvSpPr>
+          <p:cNvPr id="8" name="Shape 6"/>
+          <p:cNvSpPr/>
+          <p:nvPr/>
+        </p:nvSpPr>
+        <p:spPr>
+          <a:xfrm>
+            <a:off x="640080" y="5120640"/>
+            <a:ext cx="5120640" cy="1097280"/>
+          </a:xfrm>
+          <a:prstGeom prst="roundRect">
+            <a:avLst>
+              <a:gd name="adj" fmla="val 6667"/>
+            </a:avLst>
           </a:prstGeom>
           <a:solidFill>
-            <a:srgbClr val="FFD400"/>
+            <a:srgbClr val="FFF7CC"/>
           </a:solidFill>
           <a:ln/>
         </p:spPr>
       </p:sp>
       <p:sp>
         <p:nvSpPr>
-          <p:cNvPr id="7" name="Text 5"/>
-          <p:cNvSpPr/>
-          <p:nvPr/>
-        </p:nvSpPr>
-        <p:spPr>
-          <a:xfrm>
-            <a:off x="822960" y="2633472"/>
-            <a:ext cx="384048" cy="384048"/>
+          <p:cNvPr id="9" name="Text 7"/>
+          <p:cNvSpPr/>
+          <p:nvPr/>
+        </p:nvSpPr>
+        <p:spPr>
+          <a:xfrm>
+            <a:off x="868680" y="5120640"/>
+            <a:ext cx="4663440" cy="1097280"/>
+          </a:xfrm>
+          <a:prstGeom prst="rect">
+            <a:avLst/>
+          </a:prstGeom>
+          <a:noFill/>
+          <a:ln/>
+        </p:spPr>
+        <p:txBody>
+          <a:bodyPr wrap="square" lIns="0" tIns="0" rIns="0" bIns="0" rtlCol="0" anchor="ctr"/>
+          <a:lstStyle/>
+          <a:p>
+            <a:pPr indent="0" marL="0">
+              <a:lnSpc>
+                <a:spcPct val="125000"/>
+              </a:lnSpc>
+              <a:buNone/>
+            </a:pPr>
+            <a:r>
+              <a:rPr lang="en-US" sz="1500" dirty="0">
+                <a:solidFill>
+                  <a:srgbClr val="222222"/>
+                </a:solidFill>
+                <a:latin typeface="Malgun Gothic" pitchFamily="34" charset="0"/>
+                <a:ea typeface="Malgun Gothic" pitchFamily="34" charset="-122"/>
+                <a:cs typeface="Malgun Gothic" pitchFamily="34" charset="-120"/>
+              </a:rPr>
+              <a:t>※ 칠하기 전 보호 테이프 제거 필수!</a:t>
+            </a:r>
+            <a:endParaRPr lang="en-US" sz="1500" dirty="0"/>
+          </a:p>
+        </p:txBody>
+      </p:sp>
+      <p:sp>
+        <p:nvSpPr>
+          <p:cNvPr id="10" name="Shape 8"/>
+          <p:cNvSpPr/>
+          <p:nvPr/>
+        </p:nvSpPr>
+        <p:spPr>
+          <a:xfrm>
+            <a:off x="6126480" y="1143000"/>
+            <a:ext cx="5394960" cy="2423160"/>
+          </a:xfrm>
+          <a:prstGeom prst="roundRect">
+            <a:avLst>
+              <a:gd name="adj" fmla="val 3019"/>
+            </a:avLst>
+          </a:prstGeom>
+          <a:solidFill>
+            <a:srgbClr val="F5F5F5"/>
+          </a:solidFill>
+          <a:ln w="19050">
+            <a:solidFill>
+              <a:srgbClr val="9AA0A6"/>
+            </a:solidFill>
+            <a:prstDash val="dash"/>
+          </a:ln>
+        </p:spPr>
+      </p:sp>
+      <p:pic>
+        <p:nvPicPr>
+          <p:cNvPr id="11" name="Image 0" descr="preencoded.png">    </p:cNvPr>
+          <p:cNvPicPr>
+            <a:picLocks noChangeAspect="1"/>
+          </p:cNvPicPr>
+          <p:nvPr/>
+        </p:nvPicPr>
+        <p:blipFill>
+          <a:blip r:embed="rId1"/>
+          <a:stretch>
+            <a:fillRect/>
+          </a:stretch>
+        </p:blipFill>
+        <p:spPr>
+          <a:xfrm>
+            <a:off x="8503920" y="1805940"/>
+            <a:ext cx="640080" cy="640080"/>
+          </a:xfrm>
+          <a:prstGeom prst="rect">
+            <a:avLst/>
+          </a:prstGeom>
+        </p:spPr>
+      </p:pic>
+      <p:sp>
+        <p:nvSpPr>
+          <p:cNvPr id="12" name="Text 9"/>
+          <p:cNvSpPr/>
+          <p:nvPr/>
+        </p:nvSpPr>
+        <p:spPr>
+          <a:xfrm>
+            <a:off x="6126480" y="2491740"/>
+            <a:ext cx="5394960" cy="457200"/>
           </a:xfrm>
           <a:prstGeom prst="rect">
             <a:avLst/>
@@ -7735,89 +7921,120 @@
               <a:buNone/>
             </a:pPr>
             <a:r>
-              <a:rPr lang="en-US" sz="1600" b="1" dirty="0">
-                <a:solidFill>
-                  <a:srgbClr val="1F1F1F"/>
-                </a:solidFill>
-                <a:latin typeface="Malgun Gothic" pitchFamily="34" charset="0"/>
-                <a:ea typeface="Malgun Gothic" pitchFamily="34" charset="-122"/>
-                <a:cs typeface="Malgun Gothic" pitchFamily="34" charset="-120"/>
-              </a:rPr>
-              <a:t>✓</a:t>
-            </a:r>
-            <a:endParaRPr lang="en-US" sz="1600" dirty="0"/>
-          </a:p>
-        </p:txBody>
-      </p:sp>
-      <p:sp>
-        <p:nvSpPr>
-          <p:cNvPr id="8" name="Text 6"/>
-          <p:cNvSpPr/>
-          <p:nvPr/>
-        </p:nvSpPr>
-        <p:spPr>
-          <a:xfrm>
-            <a:off x="1417320" y="2560320"/>
-            <a:ext cx="9966960" cy="548640"/>
-          </a:xfrm>
-          <a:prstGeom prst="rect">
-            <a:avLst/>
-          </a:prstGeom>
-          <a:noFill/>
-          <a:ln/>
-        </p:spPr>
-        <p:txBody>
-          <a:bodyPr wrap="square" lIns="0" tIns="0" rIns="0" bIns="0" rtlCol="0" anchor="ctr"/>
-          <a:lstStyle/>
-          <a:p>
-            <a:pPr indent="0" marL="0">
-              <a:buNone/>
-            </a:pPr>
-            <a:r>
-              <a:rPr lang="en-US" sz="1800" dirty="0">
-                <a:solidFill>
-                  <a:srgbClr val="FFFFFF"/>
-                </a:solidFill>
-                <a:latin typeface="Malgun Gothic" pitchFamily="34" charset="0"/>
-                <a:ea typeface="Malgun Gothic" pitchFamily="34" charset="-122"/>
-                <a:cs typeface="Malgun Gothic" pitchFamily="34" charset="-120"/>
-              </a:rPr>
-              <a:t>AI 카메라의 USB 단자가 셋톱박스에 정상적으로 연결되어 있는가?</a:t>
-            </a:r>
-            <a:endParaRPr lang="en-US" sz="1800" dirty="0"/>
-          </a:p>
-        </p:txBody>
-      </p:sp>
-      <p:sp>
-        <p:nvSpPr>
-          <p:cNvPr id="9" name="Shape 7"/>
-          <p:cNvSpPr/>
-          <p:nvPr/>
-        </p:nvSpPr>
-        <p:spPr>
-          <a:xfrm>
-            <a:off x="822960" y="3410712"/>
-            <a:ext cx="384048" cy="384048"/>
-          </a:xfrm>
-          <a:prstGeom prst="ellipse">
-            <a:avLst/>
+              <a:rPr lang="en-US" sz="1400" dirty="0">
+                <a:solidFill>
+                  <a:srgbClr val="9AA0A6"/>
+                </a:solidFill>
+                <a:latin typeface="Malgun Gothic" pitchFamily="34" charset="0"/>
+                <a:ea typeface="Malgun Gothic" pitchFamily="34" charset="-122"/>
+                <a:cs typeface="Malgun Gothic" pitchFamily="34" charset="-120"/>
+              </a:rPr>
+              <a:t>사진: 매장 내부 카메라</a:t>
+            </a:r>
+            <a:endParaRPr lang="en-US" sz="1400" dirty="0"/>
+          </a:p>
+        </p:txBody>
+      </p:sp>
+      <p:sp>
+        <p:nvSpPr>
+          <p:cNvPr id="13" name="Text 10"/>
+          <p:cNvSpPr/>
+          <p:nvPr/>
+        </p:nvSpPr>
+        <p:spPr>
+          <a:xfrm>
+            <a:off x="6126480" y="1234440"/>
+            <a:ext cx="1463040" cy="320040"/>
+          </a:xfrm>
+          <a:prstGeom prst="rect">
+            <a:avLst/>
+          </a:prstGeom>
+          <a:noFill/>
+          <a:ln/>
+        </p:spPr>
+        <p:txBody>
+          <a:bodyPr wrap="square" rtlCol="0" anchor="ctr"/>
+          <a:lstStyle/>
+          <a:p>
+            <a:pPr algn="ctr" indent="0" marL="0">
+              <a:buNone/>
+            </a:pPr>
+            <a:r>
+              <a:rPr lang="en-US" sz="1200" b="1" dirty="0">
+                <a:solidFill>
+                  <a:srgbClr val="666666"/>
+                </a:solidFill>
+                <a:latin typeface="Malgun Gothic" pitchFamily="34" charset="0"/>
+                <a:ea typeface="Malgun Gothic" pitchFamily="34" charset="-122"/>
+                <a:cs typeface="Malgun Gothic" pitchFamily="34" charset="-120"/>
+              </a:rPr>
+              <a:t>매장 내부</a:t>
+            </a:r>
+            <a:endParaRPr lang="en-US" sz="1200" dirty="0"/>
+          </a:p>
+        </p:txBody>
+      </p:sp>
+      <p:sp>
+        <p:nvSpPr>
+          <p:cNvPr id="14" name="Shape 11"/>
+          <p:cNvSpPr/>
+          <p:nvPr/>
+        </p:nvSpPr>
+        <p:spPr>
+          <a:xfrm>
+            <a:off x="6126480" y="3840480"/>
+            <a:ext cx="5394960" cy="2423160"/>
+          </a:xfrm>
+          <a:prstGeom prst="roundRect">
+            <a:avLst>
+              <a:gd name="adj" fmla="val 3019"/>
+            </a:avLst>
           </a:prstGeom>
           <a:solidFill>
-            <a:srgbClr val="FFD400"/>
+            <a:srgbClr val="F5F5F5"/>
           </a:solidFill>
-          <a:ln/>
-        </p:spPr>
-      </p:sp>
-      <p:sp>
-        <p:nvSpPr>
-          <p:cNvPr id="10" name="Text 8"/>
-          <p:cNvSpPr/>
-          <p:nvPr/>
-        </p:nvSpPr>
-        <p:spPr>
-          <a:xfrm>
-            <a:off x="822960" y="3410712"/>
-            <a:ext cx="384048" cy="384048"/>
+          <a:ln w="19050">
+            <a:solidFill>
+              <a:srgbClr val="9AA0A6"/>
+            </a:solidFill>
+            <a:prstDash val="dash"/>
+          </a:ln>
+        </p:spPr>
+      </p:sp>
+      <p:pic>
+        <p:nvPicPr>
+          <p:cNvPr id="15" name="Image 1" descr="preencoded.png">    </p:cNvPr>
+          <p:cNvPicPr>
+            <a:picLocks noChangeAspect="1"/>
+          </p:cNvPicPr>
+          <p:nvPr/>
+        </p:nvPicPr>
+        <p:blipFill>
+          <a:blip r:embed="rId2"/>
+          <a:stretch>
+            <a:fillRect/>
+          </a:stretch>
+        </p:blipFill>
+        <p:spPr>
+          <a:xfrm>
+            <a:off x="8503920" y="4503420"/>
+            <a:ext cx="640080" cy="640080"/>
+          </a:xfrm>
+          <a:prstGeom prst="rect">
+            <a:avLst/>
+          </a:prstGeom>
+        </p:spPr>
+      </p:pic>
+      <p:sp>
+        <p:nvSpPr>
+          <p:cNvPr id="16" name="Text 12"/>
+          <p:cNvSpPr/>
+          <p:nvPr/>
+        </p:nvSpPr>
+        <p:spPr>
+          <a:xfrm>
+            <a:off x="6126480" y="5189220"/>
+            <a:ext cx="5394960" cy="457200"/>
           </a:xfrm>
           <a:prstGeom prst="rect">
             <a:avLst/>
@@ -7833,350 +8050,56 @@
               <a:buNone/>
             </a:pPr>
             <a:r>
-              <a:rPr lang="en-US" sz="1600" b="1" dirty="0">
-                <a:solidFill>
-                  <a:srgbClr val="1F1F1F"/>
-                </a:solidFill>
-                <a:latin typeface="Malgun Gothic" pitchFamily="34" charset="0"/>
-                <a:ea typeface="Malgun Gothic" pitchFamily="34" charset="-122"/>
-                <a:cs typeface="Malgun Gothic" pitchFamily="34" charset="-120"/>
-              </a:rPr>
-              <a:t>✓</a:t>
-            </a:r>
-            <a:endParaRPr lang="en-US" sz="1600" dirty="0"/>
-          </a:p>
-        </p:txBody>
-      </p:sp>
-      <p:sp>
-        <p:nvSpPr>
-          <p:cNvPr id="11" name="Text 9"/>
-          <p:cNvSpPr/>
-          <p:nvPr/>
-        </p:nvSpPr>
-        <p:spPr>
-          <a:xfrm>
-            <a:off x="1417320" y="3337560"/>
-            <a:ext cx="9966960" cy="548640"/>
-          </a:xfrm>
-          <a:prstGeom prst="rect">
-            <a:avLst/>
-          </a:prstGeom>
-          <a:noFill/>
-          <a:ln/>
-        </p:spPr>
-        <p:txBody>
-          <a:bodyPr wrap="square" lIns="0" tIns="0" rIns="0" bIns="0" rtlCol="0" anchor="ctr"/>
-          <a:lstStyle/>
-          <a:p>
-            <a:pPr indent="0" marL="0">
-              <a:buNone/>
-            </a:pPr>
-            <a:r>
-              <a:rPr lang="en-US" sz="1800" dirty="0">
-                <a:solidFill>
-                  <a:srgbClr val="FFFFFF"/>
-                </a:solidFill>
-                <a:latin typeface="Malgun Gothic" pitchFamily="34" charset="0"/>
-                <a:ea typeface="Malgun Gothic" pitchFamily="34" charset="-122"/>
-                <a:cs typeface="Malgun Gothic" pitchFamily="34" charset="-120"/>
-              </a:rPr>
-              <a:t>AI 카메라가 TV 밑면 가운데 위치에 단단히 부착되어 있는가?</a:t>
-            </a:r>
-            <a:endParaRPr lang="en-US" sz="1800" dirty="0"/>
-          </a:p>
-        </p:txBody>
-      </p:sp>
-      <p:sp>
-        <p:nvSpPr>
-          <p:cNvPr id="12" name="Shape 10"/>
-          <p:cNvSpPr/>
-          <p:nvPr/>
-        </p:nvSpPr>
-        <p:spPr>
-          <a:xfrm>
-            <a:off x="822960" y="4187952"/>
-            <a:ext cx="384048" cy="384048"/>
-          </a:xfrm>
-          <a:prstGeom prst="ellipse">
-            <a:avLst/>
-          </a:prstGeom>
-          <a:solidFill>
-            <a:srgbClr val="FFD400"/>
-          </a:solidFill>
-          <a:ln/>
-        </p:spPr>
-      </p:sp>
-      <p:sp>
-        <p:nvSpPr>
-          <p:cNvPr id="13" name="Text 11"/>
-          <p:cNvSpPr/>
-          <p:nvPr/>
-        </p:nvSpPr>
-        <p:spPr>
-          <a:xfrm>
-            <a:off x="822960" y="4187952"/>
-            <a:ext cx="384048" cy="384048"/>
-          </a:xfrm>
-          <a:prstGeom prst="rect">
-            <a:avLst/>
-          </a:prstGeom>
-          <a:noFill/>
-          <a:ln/>
-        </p:spPr>
-        <p:txBody>
-          <a:bodyPr wrap="square" lIns="0" tIns="0" rIns="0" bIns="0" rtlCol="0" anchor="ctr"/>
+              <a:rPr lang="en-US" sz="1400" dirty="0">
+                <a:solidFill>
+                  <a:srgbClr val="9AA0A6"/>
+                </a:solidFill>
+                <a:latin typeface="Malgun Gothic" pitchFamily="34" charset="0"/>
+                <a:ea typeface="Malgun Gothic" pitchFamily="34" charset="-122"/>
+                <a:cs typeface="Malgun Gothic" pitchFamily="34" charset="-120"/>
+              </a:rPr>
+              <a:t>사진: 매장 외부 카메라</a:t>
+            </a:r>
+            <a:endParaRPr lang="en-US" sz="1400" dirty="0"/>
+          </a:p>
+        </p:txBody>
+      </p:sp>
+      <p:sp>
+        <p:nvSpPr>
+          <p:cNvPr id="17" name="Text 13"/>
+          <p:cNvSpPr/>
+          <p:nvPr/>
+        </p:nvSpPr>
+        <p:spPr>
+          <a:xfrm>
+            <a:off x="6126480" y="3931920"/>
+            <a:ext cx="1463040" cy="320040"/>
+          </a:xfrm>
+          <a:prstGeom prst="rect">
+            <a:avLst/>
+          </a:prstGeom>
+          <a:noFill/>
+          <a:ln/>
+        </p:spPr>
+        <p:txBody>
+          <a:bodyPr wrap="square" rtlCol="0" anchor="ctr"/>
           <a:lstStyle/>
           <a:p>
             <a:pPr algn="ctr" indent="0" marL="0">
               <a:buNone/>
             </a:pPr>
             <a:r>
-              <a:rPr lang="en-US" sz="1600" b="1" dirty="0">
-                <a:solidFill>
-                  <a:srgbClr val="1F1F1F"/>
-                </a:solidFill>
-                <a:latin typeface="Malgun Gothic" pitchFamily="34" charset="0"/>
-                <a:ea typeface="Malgun Gothic" pitchFamily="34" charset="-122"/>
-                <a:cs typeface="Malgun Gothic" pitchFamily="34" charset="-120"/>
-              </a:rPr>
-              <a:t>✓</a:t>
-            </a:r>
-            <a:endParaRPr lang="en-US" sz="1600" dirty="0"/>
-          </a:p>
-        </p:txBody>
-      </p:sp>
-      <p:sp>
-        <p:nvSpPr>
-          <p:cNvPr id="14" name="Text 12"/>
-          <p:cNvSpPr/>
-          <p:nvPr/>
-        </p:nvSpPr>
-        <p:spPr>
-          <a:xfrm>
-            <a:off x="1417320" y="4114800"/>
-            <a:ext cx="9966960" cy="548640"/>
-          </a:xfrm>
-          <a:prstGeom prst="rect">
-            <a:avLst/>
-          </a:prstGeom>
-          <a:noFill/>
-          <a:ln/>
-        </p:spPr>
-        <p:txBody>
-          <a:bodyPr wrap="square" lIns="0" tIns="0" rIns="0" bIns="0" rtlCol="0" anchor="ctr"/>
-          <a:lstStyle/>
-          <a:p>
-            <a:pPr indent="0" marL="0">
-              <a:buNone/>
-            </a:pPr>
-            <a:r>
-              <a:rPr lang="en-US" sz="1800" dirty="0">
-                <a:solidFill>
-                  <a:srgbClr val="FFFFFF"/>
-                </a:solidFill>
-                <a:latin typeface="Malgun Gothic" pitchFamily="34" charset="0"/>
-                <a:ea typeface="Malgun Gothic" pitchFamily="34" charset="-122"/>
-                <a:cs typeface="Malgun Gothic" pitchFamily="34" charset="-120"/>
-              </a:rPr>
-              <a:t>카메라 설정(화각 확인 · 서버 통신 테스트)이 완료되어 있는가?</a:t>
-            </a:r>
-            <a:endParaRPr lang="en-US" sz="1800" dirty="0"/>
-          </a:p>
-        </p:txBody>
-      </p:sp>
-      <p:sp>
-        <p:nvSpPr>
-          <p:cNvPr id="15" name="Shape 13"/>
-          <p:cNvSpPr/>
-          <p:nvPr/>
-        </p:nvSpPr>
-        <p:spPr>
-          <a:xfrm>
-            <a:off x="822960" y="4965192"/>
-            <a:ext cx="384048" cy="384048"/>
-          </a:xfrm>
-          <a:prstGeom prst="ellipse">
-            <a:avLst/>
-          </a:prstGeom>
-          <a:solidFill>
-            <a:srgbClr val="FFD400"/>
-          </a:solidFill>
-          <a:ln/>
-        </p:spPr>
-      </p:sp>
-      <p:sp>
-        <p:nvSpPr>
-          <p:cNvPr id="16" name="Text 14"/>
-          <p:cNvSpPr/>
-          <p:nvPr/>
-        </p:nvSpPr>
-        <p:spPr>
-          <a:xfrm>
-            <a:off x="822960" y="4965192"/>
-            <a:ext cx="384048" cy="384048"/>
-          </a:xfrm>
-          <a:prstGeom prst="rect">
-            <a:avLst/>
-          </a:prstGeom>
-          <a:noFill/>
-          <a:ln/>
-        </p:spPr>
-        <p:txBody>
-          <a:bodyPr wrap="square" lIns="0" tIns="0" rIns="0" bIns="0" rtlCol="0" anchor="ctr"/>
-          <a:lstStyle/>
-          <a:p>
-            <a:pPr algn="ctr" indent="0" marL="0">
-              <a:buNone/>
-            </a:pPr>
-            <a:r>
-              <a:rPr lang="en-US" sz="1600" b="1" dirty="0">
-                <a:solidFill>
-                  <a:srgbClr val="1F1F1F"/>
-                </a:solidFill>
-                <a:latin typeface="Malgun Gothic" pitchFamily="34" charset="0"/>
-                <a:ea typeface="Malgun Gothic" pitchFamily="34" charset="-122"/>
-                <a:cs typeface="Malgun Gothic" pitchFamily="34" charset="-120"/>
-              </a:rPr>
-              <a:t>✓</a:t>
-            </a:r>
-            <a:endParaRPr lang="en-US" sz="1600" dirty="0"/>
-          </a:p>
-        </p:txBody>
-      </p:sp>
-      <p:sp>
-        <p:nvSpPr>
-          <p:cNvPr id="17" name="Text 15"/>
-          <p:cNvSpPr/>
-          <p:nvPr/>
-        </p:nvSpPr>
-        <p:spPr>
-          <a:xfrm>
-            <a:off x="1417320" y="4892040"/>
-            <a:ext cx="9966960" cy="548640"/>
-          </a:xfrm>
-          <a:prstGeom prst="rect">
-            <a:avLst/>
-          </a:prstGeom>
-          <a:noFill/>
-          <a:ln/>
-        </p:spPr>
-        <p:txBody>
-          <a:bodyPr wrap="square" lIns="0" tIns="0" rIns="0" bIns="0" rtlCol="0" anchor="ctr"/>
-          <a:lstStyle/>
-          <a:p>
-            <a:pPr indent="0" marL="0">
-              <a:buNone/>
-            </a:pPr>
-            <a:r>
-              <a:rPr lang="en-US" sz="1800" dirty="0">
-                <a:solidFill>
-                  <a:srgbClr val="FFFFFF"/>
-                </a:solidFill>
-                <a:latin typeface="Malgun Gothic" pitchFamily="34" charset="0"/>
-                <a:ea typeface="Malgun Gothic" pitchFamily="34" charset="-122"/>
-                <a:cs typeface="Malgun Gothic" pitchFamily="34" charset="-120"/>
-              </a:rPr>
-              <a:t>케이블이 외부에 노출되지 않도록 선 정리가 되어 있는가?</a:t>
-            </a:r>
-            <a:endParaRPr lang="en-US" sz="1800" dirty="0"/>
-          </a:p>
-        </p:txBody>
-      </p:sp>
-      <p:sp>
-        <p:nvSpPr>
-          <p:cNvPr id="18" name="Shape 16"/>
-          <p:cNvSpPr/>
-          <p:nvPr/>
-        </p:nvSpPr>
-        <p:spPr>
-          <a:xfrm>
-            <a:off x="822960" y="5742432"/>
-            <a:ext cx="384048" cy="384048"/>
-          </a:xfrm>
-          <a:prstGeom prst="ellipse">
-            <a:avLst/>
-          </a:prstGeom>
-          <a:solidFill>
-            <a:srgbClr val="FFD400"/>
-          </a:solidFill>
-          <a:ln/>
-        </p:spPr>
-      </p:sp>
-      <p:sp>
-        <p:nvSpPr>
-          <p:cNvPr id="19" name="Text 17"/>
-          <p:cNvSpPr/>
-          <p:nvPr/>
-        </p:nvSpPr>
-        <p:spPr>
-          <a:xfrm>
-            <a:off x="822960" y="5742432"/>
-            <a:ext cx="384048" cy="384048"/>
-          </a:xfrm>
-          <a:prstGeom prst="rect">
-            <a:avLst/>
-          </a:prstGeom>
-          <a:noFill/>
-          <a:ln/>
-        </p:spPr>
-        <p:txBody>
-          <a:bodyPr wrap="square" lIns="0" tIns="0" rIns="0" bIns="0" rtlCol="0" anchor="ctr"/>
-          <a:lstStyle/>
-          <a:p>
-            <a:pPr algn="ctr" indent="0" marL="0">
-              <a:buNone/>
-            </a:pPr>
-            <a:r>
-              <a:rPr lang="en-US" sz="1600" b="1" dirty="0">
-                <a:solidFill>
-                  <a:srgbClr val="1F1F1F"/>
-                </a:solidFill>
-                <a:latin typeface="Malgun Gothic" pitchFamily="34" charset="0"/>
-                <a:ea typeface="Malgun Gothic" pitchFamily="34" charset="-122"/>
-                <a:cs typeface="Malgun Gothic" pitchFamily="34" charset="-120"/>
-              </a:rPr>
-              <a:t>✓</a:t>
-            </a:r>
-            <a:endParaRPr lang="en-US" sz="1600" dirty="0"/>
-          </a:p>
-        </p:txBody>
-      </p:sp>
-      <p:sp>
-        <p:nvSpPr>
-          <p:cNvPr id="20" name="Text 18"/>
-          <p:cNvSpPr/>
-          <p:nvPr/>
-        </p:nvSpPr>
-        <p:spPr>
-          <a:xfrm>
-            <a:off x="1417320" y="5669280"/>
-            <a:ext cx="9966960" cy="548640"/>
-          </a:xfrm>
-          <a:prstGeom prst="rect">
-            <a:avLst/>
-          </a:prstGeom>
-          <a:noFill/>
-          <a:ln/>
-        </p:spPr>
-        <p:txBody>
-          <a:bodyPr wrap="square" lIns="0" tIns="0" rIns="0" bIns="0" rtlCol="0" anchor="ctr"/>
-          <a:lstStyle/>
-          <a:p>
-            <a:pPr indent="0" marL="0">
-              <a:buNone/>
-            </a:pPr>
-            <a:r>
-              <a:rPr lang="en-US" sz="1800" dirty="0">
-                <a:solidFill>
-                  <a:srgbClr val="FFFFFF"/>
-                </a:solidFill>
-                <a:latin typeface="Malgun Gothic" pitchFamily="34" charset="0"/>
-                <a:ea typeface="Malgun Gothic" pitchFamily="34" charset="-122"/>
-                <a:cs typeface="Malgun Gothic" pitchFamily="34" charset="-120"/>
-              </a:rPr>
-              <a:t>(계산대미디어) 매장 내부 · 외부 카메라 2대가 모두 설치되어 있는가?</a:t>
-            </a:r>
-            <a:endParaRPr lang="en-US" sz="1800" dirty="0"/>
+              <a:rPr lang="en-US" sz="1200" b="1" dirty="0">
+                <a:solidFill>
+                  <a:srgbClr val="666666"/>
+                </a:solidFill>
+                <a:latin typeface="Malgun Gothic" pitchFamily="34" charset="0"/>
+                <a:ea typeface="Malgun Gothic" pitchFamily="34" charset="-122"/>
+                <a:cs typeface="Malgun Gothic" pitchFamily="34" charset="-120"/>
+              </a:rPr>
+              <a:t>매장 외부</a:t>
+            </a:r>
+            <a:endParaRPr lang="en-US" sz="1200" dirty="0"/>
           </a:p>
         </p:txBody>
       </p:sp>
@@ -8450,7 +8373,7 @@
                 <a:ea typeface="Malgun Gothic" pitchFamily="34" charset="-122"/>
                 <a:cs typeface="Malgun Gothic" pitchFamily="34" charset="-120"/>
               </a:rPr>
-              <a:t>총 7단계로 설치 진행</a:t>
+              <a:t>총 8단계로 설치 진행</a:t>
             </a:r>
             <a:endParaRPr lang="en-US" sz="1800" dirty="0"/>
           </a:p>
@@ -8697,6 +8620,1335 @@
               <a:t>※ 각 단계 페이지의 사진 칸에 현장 사진을 넣어 활용해 주세요.</a:t>
             </a:r>
             <a:endParaRPr lang="en-US" sz="1400" dirty="0"/>
+          </a:p>
+        </p:txBody>
+      </p:sp>
+    </p:spTree>
+  </p:cSld>
+  <p:clrMapOvr>
+    <a:masterClrMapping/>
+  </p:clrMapOvr>
+</p:sld>
+</file>
+
+<file path=ppt/slides/slide20.xml><?xml version="1.0" encoding="utf-8"?>
+<p:sld xmlns:a="http://schemas.openxmlformats.org/drawingml/2006/main" xmlns:r="http://schemas.openxmlformats.org/officeDocument/2006/relationships" xmlns:p="http://schemas.openxmlformats.org/presentationml/2006/main">
+  <p:cSld name="Slide 20">
+    <p:bg>
+      <p:bgPr>
+        <a:solidFill>
+          <a:srgbClr val="FFFFFF"/>
+        </a:solidFill>
+      </p:bgPr>
+    </p:bg>
+    <p:spTree>
+      <p:nvGrpSpPr>
+        <p:cNvPr id="1" name=""/>
+        <p:cNvGrpSpPr/>
+        <p:nvPr/>
+      </p:nvGrpSpPr>
+      <p:grpSpPr>
+        <a:xfrm>
+          <a:off x="0" y="0"/>
+          <a:ext cx="0" cy="0"/>
+          <a:chOff x="0" y="0"/>
+          <a:chExt cx="0" cy="0"/>
+        </a:xfrm>
+      </p:grpSpPr>
+      <p:sp>
+        <p:nvSpPr>
+          <p:cNvPr id="2" name="Text 0"/>
+          <p:cNvSpPr/>
+          <p:nvPr/>
+        </p:nvSpPr>
+        <p:spPr>
+          <a:xfrm>
+            <a:off x="640080" y="411480"/>
+            <a:ext cx="6400800" cy="365760"/>
+          </a:xfrm>
+          <a:prstGeom prst="rect">
+            <a:avLst/>
+          </a:prstGeom>
+          <a:noFill/>
+          <a:ln/>
+        </p:spPr>
+        <p:txBody>
+          <a:bodyPr wrap="square" lIns="0" tIns="0" rIns="0" bIns="0" rtlCol="0" anchor="ctr"/>
+          <a:lstStyle/>
+          <a:p>
+            <a:pPr indent="0" marL="0">
+              <a:buNone/>
+            </a:pPr>
+            <a:r>
+              <a:rPr lang="en-US" sz="1600" b="1" dirty="0">
+                <a:solidFill>
+                  <a:srgbClr val="666666"/>
+                </a:solidFill>
+                <a:latin typeface="Malgun Gothic" pitchFamily="34" charset="0"/>
+                <a:ea typeface="Malgun Gothic" pitchFamily="34" charset="-122"/>
+                <a:cs typeface="Malgun Gothic" pitchFamily="34" charset="-120"/>
+              </a:rPr>
+              <a:t>계산대미디어 설치 방법</a:t>
+            </a:r>
+            <a:endParaRPr lang="en-US" sz="1600" dirty="0"/>
+          </a:p>
+        </p:txBody>
+      </p:sp>
+      <p:sp>
+        <p:nvSpPr>
+          <p:cNvPr id="3" name="Text 1"/>
+          <p:cNvSpPr/>
+          <p:nvPr/>
+        </p:nvSpPr>
+        <p:spPr>
+          <a:xfrm>
+            <a:off x="9262872" y="411480"/>
+            <a:ext cx="2286000" cy="365760"/>
+          </a:xfrm>
+          <a:prstGeom prst="rect">
+            <a:avLst/>
+          </a:prstGeom>
+          <a:noFill/>
+          <a:ln/>
+        </p:spPr>
+        <p:txBody>
+          <a:bodyPr wrap="square" lIns="0" tIns="0" rIns="0" bIns="0" rtlCol="0" anchor="ctr"/>
+          <a:lstStyle/>
+          <a:p>
+            <a:pPr algn="r" indent="0" marL="0">
+              <a:buNone/>
+            </a:pPr>
+            <a:r>
+              <a:rPr lang="en-US" sz="1400" b="1" dirty="0">
+                <a:solidFill>
+                  <a:srgbClr val="9AA0A6"/>
+                </a:solidFill>
+                <a:latin typeface="Malgun Gothic" pitchFamily="34" charset="0"/>
+                <a:ea typeface="Malgun Gothic" pitchFamily="34" charset="-122"/>
+                <a:cs typeface="Malgun Gothic" pitchFamily="34" charset="-120"/>
+              </a:rPr>
+              <a:t>STEP 8 / 8</a:t>
+            </a:r>
+            <a:endParaRPr lang="en-US" sz="1400" dirty="0"/>
+          </a:p>
+        </p:txBody>
+      </p:sp>
+      <p:sp>
+        <p:nvSpPr>
+          <p:cNvPr id="4" name="Shape 2"/>
+          <p:cNvSpPr/>
+          <p:nvPr/>
+        </p:nvSpPr>
+        <p:spPr>
+          <a:xfrm>
+            <a:off x="640080" y="1143000"/>
+            <a:ext cx="914400" cy="914400"/>
+          </a:xfrm>
+          <a:prstGeom prst="ellipse">
+            <a:avLst/>
+          </a:prstGeom>
+          <a:solidFill>
+            <a:srgbClr val="FFD400"/>
+          </a:solidFill>
+          <a:ln/>
+        </p:spPr>
+      </p:sp>
+      <p:sp>
+        <p:nvSpPr>
+          <p:cNvPr id="5" name="Text 3"/>
+          <p:cNvSpPr/>
+          <p:nvPr/>
+        </p:nvSpPr>
+        <p:spPr>
+          <a:xfrm>
+            <a:off x="640080" y="1143000"/>
+            <a:ext cx="914400" cy="914400"/>
+          </a:xfrm>
+          <a:prstGeom prst="rect">
+            <a:avLst/>
+          </a:prstGeom>
+          <a:noFill/>
+          <a:ln/>
+        </p:spPr>
+        <p:txBody>
+          <a:bodyPr wrap="square" lIns="0" tIns="0" rIns="0" bIns="0" rtlCol="0" anchor="ctr"/>
+          <a:lstStyle/>
+          <a:p>
+            <a:pPr algn="ctr" indent="0" marL="0">
+              <a:buNone/>
+            </a:pPr>
+            <a:r>
+              <a:rPr lang="en-US" sz="3600" b="1" dirty="0">
+                <a:solidFill>
+                  <a:srgbClr val="1F1F1F"/>
+                </a:solidFill>
+                <a:latin typeface="Malgun Gothic" pitchFamily="34" charset="0"/>
+                <a:ea typeface="Malgun Gothic" pitchFamily="34" charset="-122"/>
+                <a:cs typeface="Malgun Gothic" pitchFamily="34" charset="-120"/>
+              </a:rPr>
+              <a:t>8</a:t>
+            </a:r>
+            <a:endParaRPr lang="en-US" sz="3600" dirty="0"/>
+          </a:p>
+        </p:txBody>
+      </p:sp>
+      <p:sp>
+        <p:nvSpPr>
+          <p:cNvPr id="6" name="Text 4"/>
+          <p:cNvSpPr/>
+          <p:nvPr/>
+        </p:nvSpPr>
+        <p:spPr>
+          <a:xfrm>
+            <a:off x="1783080" y="1143000"/>
+            <a:ext cx="4206240" cy="914400"/>
+          </a:xfrm>
+          <a:prstGeom prst="rect">
+            <a:avLst/>
+          </a:prstGeom>
+          <a:noFill/>
+          <a:ln/>
+        </p:spPr>
+        <p:txBody>
+          <a:bodyPr wrap="square" lIns="0" tIns="0" rIns="0" bIns="0" rtlCol="0" anchor="ctr"/>
+          <a:lstStyle/>
+          <a:p>
+            <a:pPr indent="0" marL="0">
+              <a:buNone/>
+            </a:pPr>
+            <a:r>
+              <a:rPr lang="en-US" sz="3000" b="1" dirty="0">
+                <a:solidFill>
+                  <a:srgbClr val="222222"/>
+                </a:solidFill>
+                <a:latin typeface="Malgun Gothic" pitchFamily="34" charset="0"/>
+                <a:ea typeface="Malgun Gothic" pitchFamily="34" charset="-122"/>
+                <a:cs typeface="Malgun Gothic" pitchFamily="34" charset="-120"/>
+              </a:rPr>
+              <a:t>케이블 정리</a:t>
+            </a:r>
+            <a:endParaRPr lang="en-US" sz="3000" dirty="0"/>
+          </a:p>
+        </p:txBody>
+      </p:sp>
+      <p:sp>
+        <p:nvSpPr>
+          <p:cNvPr id="7" name="Text 5"/>
+          <p:cNvSpPr/>
+          <p:nvPr/>
+        </p:nvSpPr>
+        <p:spPr>
+          <a:xfrm>
+            <a:off x="640080" y="2514600"/>
+            <a:ext cx="5120640" cy="2011680"/>
+          </a:xfrm>
+          <a:prstGeom prst="rect">
+            <a:avLst/>
+          </a:prstGeom>
+          <a:noFill/>
+          <a:ln/>
+        </p:spPr>
+        <p:txBody>
+          <a:bodyPr wrap="square" lIns="0" tIns="0" rIns="0" bIns="0" rtlCol="0" anchor="t"/>
+          <a:lstStyle/>
+          <a:p>
+            <a:pPr indent="0" marL="0">
+              <a:lnSpc>
+                <a:spcPct val="135000"/>
+              </a:lnSpc>
+              <a:buNone/>
+            </a:pPr>
+            <a:r>
+              <a:rPr lang="en-US" sz="2000" dirty="0">
+                <a:solidFill>
+                  <a:srgbClr val="222222"/>
+                </a:solidFill>
+                <a:latin typeface="Malgun Gothic" pitchFamily="34" charset="0"/>
+                <a:ea typeface="Malgun Gothic" pitchFamily="34" charset="-122"/>
+                <a:cs typeface="Malgun Gothic" pitchFamily="34" charset="-120"/>
+              </a:rPr>
+              <a:t>케이블 노출을 최소화할 수 있도록 선을 깔끔하게 정리합니다.</a:t>
+            </a:r>
+            <a:endParaRPr lang="en-US" sz="2000" dirty="0"/>
+          </a:p>
+        </p:txBody>
+      </p:sp>
+      <p:sp>
+        <p:nvSpPr>
+          <p:cNvPr id="8" name="Shape 6"/>
+          <p:cNvSpPr/>
+          <p:nvPr/>
+        </p:nvSpPr>
+        <p:spPr>
+          <a:xfrm>
+            <a:off x="640080" y="5120640"/>
+            <a:ext cx="5120640" cy="1097280"/>
+          </a:xfrm>
+          <a:prstGeom prst="roundRect">
+            <a:avLst>
+              <a:gd name="adj" fmla="val 6667"/>
+            </a:avLst>
+          </a:prstGeom>
+          <a:solidFill>
+            <a:srgbClr val="FFF7CC"/>
+          </a:solidFill>
+          <a:ln/>
+        </p:spPr>
+      </p:sp>
+      <p:sp>
+        <p:nvSpPr>
+          <p:cNvPr id="9" name="Text 7"/>
+          <p:cNvSpPr/>
+          <p:nvPr/>
+        </p:nvSpPr>
+        <p:spPr>
+          <a:xfrm>
+            <a:off x="868680" y="5120640"/>
+            <a:ext cx="4663440" cy="1097280"/>
+          </a:xfrm>
+          <a:prstGeom prst="rect">
+            <a:avLst/>
+          </a:prstGeom>
+          <a:noFill/>
+          <a:ln/>
+        </p:spPr>
+        <p:txBody>
+          <a:bodyPr wrap="square" lIns="0" tIns="0" rIns="0" bIns="0" rtlCol="0" anchor="ctr"/>
+          <a:lstStyle/>
+          <a:p>
+            <a:pPr indent="0" marL="0">
+              <a:lnSpc>
+                <a:spcPct val="125000"/>
+              </a:lnSpc>
+              <a:buNone/>
+            </a:pPr>
+            <a:r>
+              <a:rPr lang="en-US" sz="1500" dirty="0">
+                <a:solidFill>
+                  <a:srgbClr val="222222"/>
+                </a:solidFill>
+                <a:latin typeface="Malgun Gothic" pitchFamily="34" charset="0"/>
+                <a:ea typeface="Malgun Gothic" pitchFamily="34" charset="-122"/>
+                <a:cs typeface="Malgun Gothic" pitchFamily="34" charset="-120"/>
+              </a:rPr>
+              <a:t>※ 계산대미디어는 매체당 카메라 2대(매장 내부 · 매장 외부)를 각각 동일한 방법으로 설치합니다.</a:t>
+            </a:r>
+            <a:endParaRPr lang="en-US" sz="1500" dirty="0"/>
+          </a:p>
+        </p:txBody>
+      </p:sp>
+      <p:sp>
+        <p:nvSpPr>
+          <p:cNvPr id="10" name="Shape 8"/>
+          <p:cNvSpPr/>
+          <p:nvPr/>
+        </p:nvSpPr>
+        <p:spPr>
+          <a:xfrm>
+            <a:off x="6126480" y="1143000"/>
+            <a:ext cx="5394960" cy="2423160"/>
+          </a:xfrm>
+          <a:prstGeom prst="roundRect">
+            <a:avLst>
+              <a:gd name="adj" fmla="val 3019"/>
+            </a:avLst>
+          </a:prstGeom>
+          <a:solidFill>
+            <a:srgbClr val="F5F5F5"/>
+          </a:solidFill>
+          <a:ln w="19050">
+            <a:solidFill>
+              <a:srgbClr val="9AA0A6"/>
+            </a:solidFill>
+            <a:prstDash val="dash"/>
+          </a:ln>
+        </p:spPr>
+      </p:sp>
+      <p:pic>
+        <p:nvPicPr>
+          <p:cNvPr id="11" name="Image 0" descr="preencoded.png">    </p:cNvPr>
+          <p:cNvPicPr>
+            <a:picLocks noChangeAspect="1"/>
+          </p:cNvPicPr>
+          <p:nvPr/>
+        </p:nvPicPr>
+        <p:blipFill>
+          <a:blip r:embed="rId1"/>
+          <a:stretch>
+            <a:fillRect/>
+          </a:stretch>
+        </p:blipFill>
+        <p:spPr>
+          <a:xfrm>
+            <a:off x="8503920" y="1805940"/>
+            <a:ext cx="640080" cy="640080"/>
+          </a:xfrm>
+          <a:prstGeom prst="rect">
+            <a:avLst/>
+          </a:prstGeom>
+        </p:spPr>
+      </p:pic>
+      <p:sp>
+        <p:nvSpPr>
+          <p:cNvPr id="12" name="Text 9"/>
+          <p:cNvSpPr/>
+          <p:nvPr/>
+        </p:nvSpPr>
+        <p:spPr>
+          <a:xfrm>
+            <a:off x="6126480" y="2491740"/>
+            <a:ext cx="5394960" cy="457200"/>
+          </a:xfrm>
+          <a:prstGeom prst="rect">
+            <a:avLst/>
+          </a:prstGeom>
+          <a:noFill/>
+          <a:ln/>
+        </p:spPr>
+        <p:txBody>
+          <a:bodyPr wrap="square" lIns="0" tIns="0" rIns="0" bIns="0" rtlCol="0" anchor="ctr"/>
+          <a:lstStyle/>
+          <a:p>
+            <a:pPr algn="ctr" indent="0" marL="0">
+              <a:buNone/>
+            </a:pPr>
+            <a:r>
+              <a:rPr lang="en-US" sz="1400" dirty="0">
+                <a:solidFill>
+                  <a:srgbClr val="9AA0A6"/>
+                </a:solidFill>
+                <a:latin typeface="Malgun Gothic" pitchFamily="34" charset="0"/>
+                <a:ea typeface="Malgun Gothic" pitchFamily="34" charset="-122"/>
+                <a:cs typeface="Malgun Gothic" pitchFamily="34" charset="-120"/>
+              </a:rPr>
+              <a:t>사진: 매장 내부 카메라</a:t>
+            </a:r>
+            <a:endParaRPr lang="en-US" sz="1400" dirty="0"/>
+          </a:p>
+        </p:txBody>
+      </p:sp>
+      <p:sp>
+        <p:nvSpPr>
+          <p:cNvPr id="13" name="Text 10"/>
+          <p:cNvSpPr/>
+          <p:nvPr/>
+        </p:nvSpPr>
+        <p:spPr>
+          <a:xfrm>
+            <a:off x="6126480" y="1234440"/>
+            <a:ext cx="1463040" cy="320040"/>
+          </a:xfrm>
+          <a:prstGeom prst="rect">
+            <a:avLst/>
+          </a:prstGeom>
+          <a:noFill/>
+          <a:ln/>
+        </p:spPr>
+        <p:txBody>
+          <a:bodyPr wrap="square" rtlCol="0" anchor="ctr"/>
+          <a:lstStyle/>
+          <a:p>
+            <a:pPr algn="ctr" indent="0" marL="0">
+              <a:buNone/>
+            </a:pPr>
+            <a:r>
+              <a:rPr lang="en-US" sz="1200" b="1" dirty="0">
+                <a:solidFill>
+                  <a:srgbClr val="666666"/>
+                </a:solidFill>
+                <a:latin typeface="Malgun Gothic" pitchFamily="34" charset="0"/>
+                <a:ea typeface="Malgun Gothic" pitchFamily="34" charset="-122"/>
+                <a:cs typeface="Malgun Gothic" pitchFamily="34" charset="-120"/>
+              </a:rPr>
+              <a:t>매장 내부</a:t>
+            </a:r>
+            <a:endParaRPr lang="en-US" sz="1200" dirty="0"/>
+          </a:p>
+        </p:txBody>
+      </p:sp>
+      <p:sp>
+        <p:nvSpPr>
+          <p:cNvPr id="14" name="Shape 11"/>
+          <p:cNvSpPr/>
+          <p:nvPr/>
+        </p:nvSpPr>
+        <p:spPr>
+          <a:xfrm>
+            <a:off x="6126480" y="3840480"/>
+            <a:ext cx="5394960" cy="2423160"/>
+          </a:xfrm>
+          <a:prstGeom prst="roundRect">
+            <a:avLst>
+              <a:gd name="adj" fmla="val 3019"/>
+            </a:avLst>
+          </a:prstGeom>
+          <a:solidFill>
+            <a:srgbClr val="F5F5F5"/>
+          </a:solidFill>
+          <a:ln w="19050">
+            <a:solidFill>
+              <a:srgbClr val="9AA0A6"/>
+            </a:solidFill>
+            <a:prstDash val="dash"/>
+          </a:ln>
+        </p:spPr>
+      </p:sp>
+      <p:pic>
+        <p:nvPicPr>
+          <p:cNvPr id="15" name="Image 1" descr="preencoded.png">    </p:cNvPr>
+          <p:cNvPicPr>
+            <a:picLocks noChangeAspect="1"/>
+          </p:cNvPicPr>
+          <p:nvPr/>
+        </p:nvPicPr>
+        <p:blipFill>
+          <a:blip r:embed="rId2"/>
+          <a:stretch>
+            <a:fillRect/>
+          </a:stretch>
+        </p:blipFill>
+        <p:spPr>
+          <a:xfrm>
+            <a:off x="8503920" y="4503420"/>
+            <a:ext cx="640080" cy="640080"/>
+          </a:xfrm>
+          <a:prstGeom prst="rect">
+            <a:avLst/>
+          </a:prstGeom>
+        </p:spPr>
+      </p:pic>
+      <p:sp>
+        <p:nvSpPr>
+          <p:cNvPr id="16" name="Text 12"/>
+          <p:cNvSpPr/>
+          <p:nvPr/>
+        </p:nvSpPr>
+        <p:spPr>
+          <a:xfrm>
+            <a:off x="6126480" y="5189220"/>
+            <a:ext cx="5394960" cy="457200"/>
+          </a:xfrm>
+          <a:prstGeom prst="rect">
+            <a:avLst/>
+          </a:prstGeom>
+          <a:noFill/>
+          <a:ln/>
+        </p:spPr>
+        <p:txBody>
+          <a:bodyPr wrap="square" lIns="0" tIns="0" rIns="0" bIns="0" rtlCol="0" anchor="ctr"/>
+          <a:lstStyle/>
+          <a:p>
+            <a:pPr algn="ctr" indent="0" marL="0">
+              <a:buNone/>
+            </a:pPr>
+            <a:r>
+              <a:rPr lang="en-US" sz="1400" dirty="0">
+                <a:solidFill>
+                  <a:srgbClr val="9AA0A6"/>
+                </a:solidFill>
+                <a:latin typeface="Malgun Gothic" pitchFamily="34" charset="0"/>
+                <a:ea typeface="Malgun Gothic" pitchFamily="34" charset="-122"/>
+                <a:cs typeface="Malgun Gothic" pitchFamily="34" charset="-120"/>
+              </a:rPr>
+              <a:t>사진: 매장 외부 카메라</a:t>
+            </a:r>
+            <a:endParaRPr lang="en-US" sz="1400" dirty="0"/>
+          </a:p>
+        </p:txBody>
+      </p:sp>
+      <p:sp>
+        <p:nvSpPr>
+          <p:cNvPr id="17" name="Text 13"/>
+          <p:cNvSpPr/>
+          <p:nvPr/>
+        </p:nvSpPr>
+        <p:spPr>
+          <a:xfrm>
+            <a:off x="6126480" y="3931920"/>
+            <a:ext cx="1463040" cy="320040"/>
+          </a:xfrm>
+          <a:prstGeom prst="rect">
+            <a:avLst/>
+          </a:prstGeom>
+          <a:noFill/>
+          <a:ln/>
+        </p:spPr>
+        <p:txBody>
+          <a:bodyPr wrap="square" rtlCol="0" anchor="ctr"/>
+          <a:lstStyle/>
+          <a:p>
+            <a:pPr algn="ctr" indent="0" marL="0">
+              <a:buNone/>
+            </a:pPr>
+            <a:r>
+              <a:rPr lang="en-US" sz="1200" b="1" dirty="0">
+                <a:solidFill>
+                  <a:srgbClr val="666666"/>
+                </a:solidFill>
+                <a:latin typeface="Malgun Gothic" pitchFamily="34" charset="0"/>
+                <a:ea typeface="Malgun Gothic" pitchFamily="34" charset="-122"/>
+                <a:cs typeface="Malgun Gothic" pitchFamily="34" charset="-120"/>
+              </a:rPr>
+              <a:t>매장 외부</a:t>
+            </a:r>
+            <a:endParaRPr lang="en-US" sz="1200" dirty="0"/>
+          </a:p>
+        </p:txBody>
+      </p:sp>
+    </p:spTree>
+  </p:cSld>
+  <p:clrMapOvr>
+    <a:masterClrMapping/>
+  </p:clrMapOvr>
+</p:sld>
+</file>
+
+<file path=ppt/slides/slide21.xml><?xml version="1.0" encoding="utf-8"?>
+<p:sld xmlns:a="http://schemas.openxmlformats.org/drawingml/2006/main" xmlns:r="http://schemas.openxmlformats.org/officeDocument/2006/relationships" xmlns:p="http://schemas.openxmlformats.org/presentationml/2006/main">
+  <p:cSld name="Slide 21">
+    <p:bg>
+      <p:bgPr>
+        <a:solidFill>
+          <a:srgbClr val="1F1F1F"/>
+        </a:solidFill>
+      </p:bgPr>
+    </p:bg>
+    <p:spTree>
+      <p:nvGrpSpPr>
+        <p:cNvPr id="1" name=""/>
+        <p:cNvGrpSpPr/>
+        <p:nvPr/>
+      </p:nvGrpSpPr>
+      <p:grpSpPr>
+        <a:xfrm>
+          <a:off x="0" y="0"/>
+          <a:ext cx="0" cy="0"/>
+          <a:chOff x="0" y="0"/>
+          <a:chExt cx="0" cy="0"/>
+        </a:xfrm>
+      </p:grpSpPr>
+      <p:sp>
+        <p:nvSpPr>
+          <p:cNvPr id="2" name="Text 0"/>
+          <p:cNvSpPr/>
+          <p:nvPr/>
+        </p:nvSpPr>
+        <p:spPr>
+          <a:xfrm>
+            <a:off x="822960" y="640080"/>
+            <a:ext cx="10515600" cy="822960"/>
+          </a:xfrm>
+          <a:prstGeom prst="rect">
+            <a:avLst/>
+          </a:prstGeom>
+          <a:noFill/>
+          <a:ln/>
+        </p:spPr>
+        <p:txBody>
+          <a:bodyPr wrap="square" lIns="0" tIns="0" rIns="0" bIns="0" rtlCol="0" anchor="ctr"/>
+          <a:lstStyle/>
+          <a:p>
+            <a:pPr indent="0" marL="0">
+              <a:buNone/>
+            </a:pPr>
+            <a:r>
+              <a:rPr lang="en-US" sz="4000" b="1" dirty="0">
+                <a:solidFill>
+                  <a:srgbClr val="FFFFFF"/>
+                </a:solidFill>
+                <a:latin typeface="Malgun Gothic" pitchFamily="34" charset="0"/>
+                <a:ea typeface="Malgun Gothic" pitchFamily="34" charset="-122"/>
+                <a:cs typeface="Malgun Gothic" pitchFamily="34" charset="-120"/>
+              </a:rPr>
+              <a:t>설치 완료 확인 사항</a:t>
+            </a:r>
+            <a:endParaRPr lang="en-US" sz="4000" dirty="0"/>
+          </a:p>
+        </p:txBody>
+      </p:sp>
+      <p:sp>
+        <p:nvSpPr>
+          <p:cNvPr id="3" name="Shape 1"/>
+          <p:cNvSpPr/>
+          <p:nvPr/>
+        </p:nvSpPr>
+        <p:spPr>
+          <a:xfrm>
+            <a:off x="822960" y="1810512"/>
+            <a:ext cx="384048" cy="384048"/>
+          </a:xfrm>
+          <a:prstGeom prst="ellipse">
+            <a:avLst/>
+          </a:prstGeom>
+          <a:solidFill>
+            <a:srgbClr val="FFD400"/>
+          </a:solidFill>
+          <a:ln/>
+        </p:spPr>
+      </p:sp>
+      <p:sp>
+        <p:nvSpPr>
+          <p:cNvPr id="4" name="Text 2"/>
+          <p:cNvSpPr/>
+          <p:nvPr/>
+        </p:nvSpPr>
+        <p:spPr>
+          <a:xfrm>
+            <a:off x="822960" y="1810512"/>
+            <a:ext cx="384048" cy="384048"/>
+          </a:xfrm>
+          <a:prstGeom prst="rect">
+            <a:avLst/>
+          </a:prstGeom>
+          <a:noFill/>
+          <a:ln/>
+        </p:spPr>
+        <p:txBody>
+          <a:bodyPr wrap="square" lIns="0" tIns="0" rIns="0" bIns="0" rtlCol="0" anchor="ctr"/>
+          <a:lstStyle/>
+          <a:p>
+            <a:pPr algn="ctr" indent="0" marL="0">
+              <a:buNone/>
+            </a:pPr>
+            <a:r>
+              <a:rPr lang="en-US" sz="1600" b="1" dirty="0">
+                <a:solidFill>
+                  <a:srgbClr val="1F1F1F"/>
+                </a:solidFill>
+                <a:latin typeface="Malgun Gothic" pitchFamily="34" charset="0"/>
+                <a:ea typeface="Malgun Gothic" pitchFamily="34" charset="-122"/>
+                <a:cs typeface="Malgun Gothic" pitchFamily="34" charset="-120"/>
+              </a:rPr>
+              <a:t>✓</a:t>
+            </a:r>
+            <a:endParaRPr lang="en-US" sz="1600" dirty="0"/>
+          </a:p>
+        </p:txBody>
+      </p:sp>
+      <p:sp>
+        <p:nvSpPr>
+          <p:cNvPr id="5" name="Text 3"/>
+          <p:cNvSpPr/>
+          <p:nvPr/>
+        </p:nvSpPr>
+        <p:spPr>
+          <a:xfrm>
+            <a:off x="1417320" y="1737360"/>
+            <a:ext cx="9966960" cy="548640"/>
+          </a:xfrm>
+          <a:prstGeom prst="rect">
+            <a:avLst/>
+          </a:prstGeom>
+          <a:noFill/>
+          <a:ln/>
+        </p:spPr>
+        <p:txBody>
+          <a:bodyPr wrap="square" lIns="0" tIns="0" rIns="0" bIns="0" rtlCol="0" anchor="ctr"/>
+          <a:lstStyle/>
+          <a:p>
+            <a:pPr indent="0" marL="0">
+              <a:buNone/>
+            </a:pPr>
+            <a:r>
+              <a:rPr lang="en-US" sz="1800" dirty="0">
+                <a:solidFill>
+                  <a:srgbClr val="FFFFFF"/>
+                </a:solidFill>
+                <a:latin typeface="Malgun Gothic" pitchFamily="34" charset="0"/>
+                <a:ea typeface="Malgun Gothic" pitchFamily="34" charset="-122"/>
+                <a:cs typeface="Malgun Gothic" pitchFamily="34" charset="-120"/>
+              </a:rPr>
+              <a:t>HDMI 분배기 전원부가 USB 어댑터를 통해 콘센트에 연결되어 있는가?</a:t>
+            </a:r>
+            <a:endParaRPr lang="en-US" sz="1800" dirty="0"/>
+          </a:p>
+        </p:txBody>
+      </p:sp>
+      <p:sp>
+        <p:nvSpPr>
+          <p:cNvPr id="6" name="Shape 4"/>
+          <p:cNvSpPr/>
+          <p:nvPr/>
+        </p:nvSpPr>
+        <p:spPr>
+          <a:xfrm>
+            <a:off x="822960" y="2505456"/>
+            <a:ext cx="384048" cy="384048"/>
+          </a:xfrm>
+          <a:prstGeom prst="ellipse">
+            <a:avLst/>
+          </a:prstGeom>
+          <a:solidFill>
+            <a:srgbClr val="FFD400"/>
+          </a:solidFill>
+          <a:ln/>
+        </p:spPr>
+      </p:sp>
+      <p:sp>
+        <p:nvSpPr>
+          <p:cNvPr id="7" name="Text 5"/>
+          <p:cNvSpPr/>
+          <p:nvPr/>
+        </p:nvSpPr>
+        <p:spPr>
+          <a:xfrm>
+            <a:off x="822960" y="2505456"/>
+            <a:ext cx="384048" cy="384048"/>
+          </a:xfrm>
+          <a:prstGeom prst="rect">
+            <a:avLst/>
+          </a:prstGeom>
+          <a:noFill/>
+          <a:ln/>
+        </p:spPr>
+        <p:txBody>
+          <a:bodyPr wrap="square" lIns="0" tIns="0" rIns="0" bIns="0" rtlCol="0" anchor="ctr"/>
+          <a:lstStyle/>
+          <a:p>
+            <a:pPr algn="ctr" indent="0" marL="0">
+              <a:buNone/>
+            </a:pPr>
+            <a:r>
+              <a:rPr lang="en-US" sz="1600" b="1" dirty="0">
+                <a:solidFill>
+                  <a:srgbClr val="1F1F1F"/>
+                </a:solidFill>
+                <a:latin typeface="Malgun Gothic" pitchFamily="34" charset="0"/>
+                <a:ea typeface="Malgun Gothic" pitchFamily="34" charset="-122"/>
+                <a:cs typeface="Malgun Gothic" pitchFamily="34" charset="-120"/>
+              </a:rPr>
+              <a:t>✓</a:t>
+            </a:r>
+            <a:endParaRPr lang="en-US" sz="1600" dirty="0"/>
+          </a:p>
+        </p:txBody>
+      </p:sp>
+      <p:sp>
+        <p:nvSpPr>
+          <p:cNvPr id="8" name="Text 6"/>
+          <p:cNvSpPr/>
+          <p:nvPr/>
+        </p:nvSpPr>
+        <p:spPr>
+          <a:xfrm>
+            <a:off x="1417320" y="2432304"/>
+            <a:ext cx="9966960" cy="548640"/>
+          </a:xfrm>
+          <a:prstGeom prst="rect">
+            <a:avLst/>
+          </a:prstGeom>
+          <a:noFill/>
+          <a:ln/>
+        </p:spPr>
+        <p:txBody>
+          <a:bodyPr wrap="square" lIns="0" tIns="0" rIns="0" bIns="0" rtlCol="0" anchor="ctr"/>
+          <a:lstStyle/>
+          <a:p>
+            <a:pPr indent="0" marL="0">
+              <a:buNone/>
+            </a:pPr>
+            <a:r>
+              <a:rPr lang="en-US" sz="1800" dirty="0">
+                <a:solidFill>
+                  <a:srgbClr val="FFFFFF"/>
+                </a:solidFill>
+                <a:latin typeface="Malgun Gothic" pitchFamily="34" charset="0"/>
+                <a:ea typeface="Malgun Gothic" pitchFamily="34" charset="-122"/>
+                <a:cs typeface="Malgun Gothic" pitchFamily="34" charset="-120"/>
+              </a:rPr>
+              <a:t>AI 카메라의 USB 단자가 셋톱박스에 정상적으로 연결되어 있는가?</a:t>
+            </a:r>
+            <a:endParaRPr lang="en-US" sz="1800" dirty="0"/>
+          </a:p>
+        </p:txBody>
+      </p:sp>
+      <p:sp>
+        <p:nvSpPr>
+          <p:cNvPr id="9" name="Shape 7"/>
+          <p:cNvSpPr/>
+          <p:nvPr/>
+        </p:nvSpPr>
+        <p:spPr>
+          <a:xfrm>
+            <a:off x="822960" y="3200400"/>
+            <a:ext cx="384048" cy="384048"/>
+          </a:xfrm>
+          <a:prstGeom prst="ellipse">
+            <a:avLst/>
+          </a:prstGeom>
+          <a:solidFill>
+            <a:srgbClr val="FFD400"/>
+          </a:solidFill>
+          <a:ln/>
+        </p:spPr>
+      </p:sp>
+      <p:sp>
+        <p:nvSpPr>
+          <p:cNvPr id="10" name="Text 8"/>
+          <p:cNvSpPr/>
+          <p:nvPr/>
+        </p:nvSpPr>
+        <p:spPr>
+          <a:xfrm>
+            <a:off x="822960" y="3200400"/>
+            <a:ext cx="384048" cy="384048"/>
+          </a:xfrm>
+          <a:prstGeom prst="rect">
+            <a:avLst/>
+          </a:prstGeom>
+          <a:noFill/>
+          <a:ln/>
+        </p:spPr>
+        <p:txBody>
+          <a:bodyPr wrap="square" lIns="0" tIns="0" rIns="0" bIns="0" rtlCol="0" anchor="ctr"/>
+          <a:lstStyle/>
+          <a:p>
+            <a:pPr algn="ctr" indent="0" marL="0">
+              <a:buNone/>
+            </a:pPr>
+            <a:r>
+              <a:rPr lang="en-US" sz="1600" b="1" dirty="0">
+                <a:solidFill>
+                  <a:srgbClr val="1F1F1F"/>
+                </a:solidFill>
+                <a:latin typeface="Malgun Gothic" pitchFamily="34" charset="0"/>
+                <a:ea typeface="Malgun Gothic" pitchFamily="34" charset="-122"/>
+                <a:cs typeface="Malgun Gothic" pitchFamily="34" charset="-120"/>
+              </a:rPr>
+              <a:t>✓</a:t>
+            </a:r>
+            <a:endParaRPr lang="en-US" sz="1600" dirty="0"/>
+          </a:p>
+        </p:txBody>
+      </p:sp>
+      <p:sp>
+        <p:nvSpPr>
+          <p:cNvPr id="11" name="Text 9"/>
+          <p:cNvSpPr/>
+          <p:nvPr/>
+        </p:nvSpPr>
+        <p:spPr>
+          <a:xfrm>
+            <a:off x="1417320" y="3127248"/>
+            <a:ext cx="9966960" cy="548640"/>
+          </a:xfrm>
+          <a:prstGeom prst="rect">
+            <a:avLst/>
+          </a:prstGeom>
+          <a:noFill/>
+          <a:ln/>
+        </p:spPr>
+        <p:txBody>
+          <a:bodyPr wrap="square" lIns="0" tIns="0" rIns="0" bIns="0" rtlCol="0" anchor="ctr"/>
+          <a:lstStyle/>
+          <a:p>
+            <a:pPr indent="0" marL="0">
+              <a:buNone/>
+            </a:pPr>
+            <a:r>
+              <a:rPr lang="en-US" sz="1800" dirty="0">
+                <a:solidFill>
+                  <a:srgbClr val="FFFFFF"/>
+                </a:solidFill>
+                <a:latin typeface="Malgun Gothic" pitchFamily="34" charset="0"/>
+                <a:ea typeface="Malgun Gothic" pitchFamily="34" charset="-122"/>
+                <a:cs typeface="Malgun Gothic" pitchFamily="34" charset="-120"/>
+              </a:rPr>
+              <a:t>AI 카메라가 TV 밑면 가운데 위치에 단단히 부착되어 있는가?</a:t>
+            </a:r>
+            <a:endParaRPr lang="en-US" sz="1800" dirty="0"/>
+          </a:p>
+        </p:txBody>
+      </p:sp>
+      <p:sp>
+        <p:nvSpPr>
+          <p:cNvPr id="12" name="Shape 10"/>
+          <p:cNvSpPr/>
+          <p:nvPr/>
+        </p:nvSpPr>
+        <p:spPr>
+          <a:xfrm>
+            <a:off x="822960" y="3895344"/>
+            <a:ext cx="384048" cy="384048"/>
+          </a:xfrm>
+          <a:prstGeom prst="ellipse">
+            <a:avLst/>
+          </a:prstGeom>
+          <a:solidFill>
+            <a:srgbClr val="FFD400"/>
+          </a:solidFill>
+          <a:ln/>
+        </p:spPr>
+      </p:sp>
+      <p:sp>
+        <p:nvSpPr>
+          <p:cNvPr id="13" name="Text 11"/>
+          <p:cNvSpPr/>
+          <p:nvPr/>
+        </p:nvSpPr>
+        <p:spPr>
+          <a:xfrm>
+            <a:off x="822960" y="3895344"/>
+            <a:ext cx="384048" cy="384048"/>
+          </a:xfrm>
+          <a:prstGeom prst="rect">
+            <a:avLst/>
+          </a:prstGeom>
+          <a:noFill/>
+          <a:ln/>
+        </p:spPr>
+        <p:txBody>
+          <a:bodyPr wrap="square" lIns="0" tIns="0" rIns="0" bIns="0" rtlCol="0" anchor="ctr"/>
+          <a:lstStyle/>
+          <a:p>
+            <a:pPr algn="ctr" indent="0" marL="0">
+              <a:buNone/>
+            </a:pPr>
+            <a:r>
+              <a:rPr lang="en-US" sz="1600" b="1" dirty="0">
+                <a:solidFill>
+                  <a:srgbClr val="1F1F1F"/>
+                </a:solidFill>
+                <a:latin typeface="Malgun Gothic" pitchFamily="34" charset="0"/>
+                <a:ea typeface="Malgun Gothic" pitchFamily="34" charset="-122"/>
+                <a:cs typeface="Malgun Gothic" pitchFamily="34" charset="-120"/>
+              </a:rPr>
+              <a:t>✓</a:t>
+            </a:r>
+            <a:endParaRPr lang="en-US" sz="1600" dirty="0"/>
+          </a:p>
+        </p:txBody>
+      </p:sp>
+      <p:sp>
+        <p:nvSpPr>
+          <p:cNvPr id="14" name="Text 12"/>
+          <p:cNvSpPr/>
+          <p:nvPr/>
+        </p:nvSpPr>
+        <p:spPr>
+          <a:xfrm>
+            <a:off x="1417320" y="3822192"/>
+            <a:ext cx="9966960" cy="548640"/>
+          </a:xfrm>
+          <a:prstGeom prst="rect">
+            <a:avLst/>
+          </a:prstGeom>
+          <a:noFill/>
+          <a:ln/>
+        </p:spPr>
+        <p:txBody>
+          <a:bodyPr wrap="square" lIns="0" tIns="0" rIns="0" bIns="0" rtlCol="0" anchor="ctr"/>
+          <a:lstStyle/>
+          <a:p>
+            <a:pPr indent="0" marL="0">
+              <a:buNone/>
+            </a:pPr>
+            <a:r>
+              <a:rPr lang="en-US" sz="1800" dirty="0">
+                <a:solidFill>
+                  <a:srgbClr val="FFFFFF"/>
+                </a:solidFill>
+                <a:latin typeface="Malgun Gothic" pitchFamily="34" charset="0"/>
+                <a:ea typeface="Malgun Gothic" pitchFamily="34" charset="-122"/>
+                <a:cs typeface="Malgun Gothic" pitchFamily="34" charset="-120"/>
+              </a:rPr>
+              <a:t>카메라 설정(화각 확인 · 서버 통신 테스트)이 완료되어 있는가?</a:t>
+            </a:r>
+            <a:endParaRPr lang="en-US" sz="1800" dirty="0"/>
+          </a:p>
+        </p:txBody>
+      </p:sp>
+      <p:sp>
+        <p:nvSpPr>
+          <p:cNvPr id="15" name="Shape 13"/>
+          <p:cNvSpPr/>
+          <p:nvPr/>
+        </p:nvSpPr>
+        <p:spPr>
+          <a:xfrm>
+            <a:off x="822960" y="4590288"/>
+            <a:ext cx="384048" cy="384048"/>
+          </a:xfrm>
+          <a:prstGeom prst="ellipse">
+            <a:avLst/>
+          </a:prstGeom>
+          <a:solidFill>
+            <a:srgbClr val="FFD400"/>
+          </a:solidFill>
+          <a:ln/>
+        </p:spPr>
+      </p:sp>
+      <p:sp>
+        <p:nvSpPr>
+          <p:cNvPr id="16" name="Text 14"/>
+          <p:cNvSpPr/>
+          <p:nvPr/>
+        </p:nvSpPr>
+        <p:spPr>
+          <a:xfrm>
+            <a:off x="822960" y="4590288"/>
+            <a:ext cx="384048" cy="384048"/>
+          </a:xfrm>
+          <a:prstGeom prst="rect">
+            <a:avLst/>
+          </a:prstGeom>
+          <a:noFill/>
+          <a:ln/>
+        </p:spPr>
+        <p:txBody>
+          <a:bodyPr wrap="square" lIns="0" tIns="0" rIns="0" bIns="0" rtlCol="0" anchor="ctr"/>
+          <a:lstStyle/>
+          <a:p>
+            <a:pPr algn="ctr" indent="0" marL="0">
+              <a:buNone/>
+            </a:pPr>
+            <a:r>
+              <a:rPr lang="en-US" sz="1600" b="1" dirty="0">
+                <a:solidFill>
+                  <a:srgbClr val="1F1F1F"/>
+                </a:solidFill>
+                <a:latin typeface="Malgun Gothic" pitchFamily="34" charset="0"/>
+                <a:ea typeface="Malgun Gothic" pitchFamily="34" charset="-122"/>
+                <a:cs typeface="Malgun Gothic" pitchFamily="34" charset="-120"/>
+              </a:rPr>
+              <a:t>✓</a:t>
+            </a:r>
+            <a:endParaRPr lang="en-US" sz="1600" dirty="0"/>
+          </a:p>
+        </p:txBody>
+      </p:sp>
+      <p:sp>
+        <p:nvSpPr>
+          <p:cNvPr id="17" name="Text 15"/>
+          <p:cNvSpPr/>
+          <p:nvPr/>
+        </p:nvSpPr>
+        <p:spPr>
+          <a:xfrm>
+            <a:off x="1417320" y="4517136"/>
+            <a:ext cx="9966960" cy="548640"/>
+          </a:xfrm>
+          <a:prstGeom prst="rect">
+            <a:avLst/>
+          </a:prstGeom>
+          <a:noFill/>
+          <a:ln/>
+        </p:spPr>
+        <p:txBody>
+          <a:bodyPr wrap="square" lIns="0" tIns="0" rIns="0" bIns="0" rtlCol="0" anchor="ctr"/>
+          <a:lstStyle/>
+          <a:p>
+            <a:pPr indent="0" marL="0">
+              <a:buNone/>
+            </a:pPr>
+            <a:r>
+              <a:rPr lang="en-US" sz="1800" dirty="0">
+                <a:solidFill>
+                  <a:srgbClr val="FFFFFF"/>
+                </a:solidFill>
+                <a:latin typeface="Malgun Gothic" pitchFamily="34" charset="0"/>
+                <a:ea typeface="Malgun Gothic" pitchFamily="34" charset="-122"/>
+                <a:cs typeface="Malgun Gothic" pitchFamily="34" charset="-120"/>
+              </a:rPr>
+              <a:t>보호 테이프 제거 후 카메라 LED 부분을 펜으로 칠했는가?</a:t>
+            </a:r>
+            <a:endParaRPr lang="en-US" sz="1800" dirty="0"/>
+          </a:p>
+        </p:txBody>
+      </p:sp>
+      <p:sp>
+        <p:nvSpPr>
+          <p:cNvPr id="18" name="Shape 16"/>
+          <p:cNvSpPr/>
+          <p:nvPr/>
+        </p:nvSpPr>
+        <p:spPr>
+          <a:xfrm>
+            <a:off x="822960" y="5285232"/>
+            <a:ext cx="384048" cy="384048"/>
+          </a:xfrm>
+          <a:prstGeom prst="ellipse">
+            <a:avLst/>
+          </a:prstGeom>
+          <a:solidFill>
+            <a:srgbClr val="FFD400"/>
+          </a:solidFill>
+          <a:ln/>
+        </p:spPr>
+      </p:sp>
+      <p:sp>
+        <p:nvSpPr>
+          <p:cNvPr id="19" name="Text 17"/>
+          <p:cNvSpPr/>
+          <p:nvPr/>
+        </p:nvSpPr>
+        <p:spPr>
+          <a:xfrm>
+            <a:off x="822960" y="5285232"/>
+            <a:ext cx="384048" cy="384048"/>
+          </a:xfrm>
+          <a:prstGeom prst="rect">
+            <a:avLst/>
+          </a:prstGeom>
+          <a:noFill/>
+          <a:ln/>
+        </p:spPr>
+        <p:txBody>
+          <a:bodyPr wrap="square" lIns="0" tIns="0" rIns="0" bIns="0" rtlCol="0" anchor="ctr"/>
+          <a:lstStyle/>
+          <a:p>
+            <a:pPr algn="ctr" indent="0" marL="0">
+              <a:buNone/>
+            </a:pPr>
+            <a:r>
+              <a:rPr lang="en-US" sz="1600" b="1" dirty="0">
+                <a:solidFill>
+                  <a:srgbClr val="1F1F1F"/>
+                </a:solidFill>
+                <a:latin typeface="Malgun Gothic" pitchFamily="34" charset="0"/>
+                <a:ea typeface="Malgun Gothic" pitchFamily="34" charset="-122"/>
+                <a:cs typeface="Malgun Gothic" pitchFamily="34" charset="-120"/>
+              </a:rPr>
+              <a:t>✓</a:t>
+            </a:r>
+            <a:endParaRPr lang="en-US" sz="1600" dirty="0"/>
+          </a:p>
+        </p:txBody>
+      </p:sp>
+      <p:sp>
+        <p:nvSpPr>
+          <p:cNvPr id="20" name="Text 18"/>
+          <p:cNvSpPr/>
+          <p:nvPr/>
+        </p:nvSpPr>
+        <p:spPr>
+          <a:xfrm>
+            <a:off x="1417320" y="5212080"/>
+            <a:ext cx="9966960" cy="548640"/>
+          </a:xfrm>
+          <a:prstGeom prst="rect">
+            <a:avLst/>
+          </a:prstGeom>
+          <a:noFill/>
+          <a:ln/>
+        </p:spPr>
+        <p:txBody>
+          <a:bodyPr wrap="square" lIns="0" tIns="0" rIns="0" bIns="0" rtlCol="0" anchor="ctr"/>
+          <a:lstStyle/>
+          <a:p>
+            <a:pPr indent="0" marL="0">
+              <a:buNone/>
+            </a:pPr>
+            <a:r>
+              <a:rPr lang="en-US" sz="1800" dirty="0">
+                <a:solidFill>
+                  <a:srgbClr val="FFFFFF"/>
+                </a:solidFill>
+                <a:latin typeface="Malgun Gothic" pitchFamily="34" charset="0"/>
+                <a:ea typeface="Malgun Gothic" pitchFamily="34" charset="-122"/>
+                <a:cs typeface="Malgun Gothic" pitchFamily="34" charset="-120"/>
+              </a:rPr>
+              <a:t>케이블이 외부에 노출되지 않도록 선 정리가 되어 있는가?</a:t>
+            </a:r>
+            <a:endParaRPr lang="en-US" sz="1800" dirty="0"/>
+          </a:p>
+        </p:txBody>
+      </p:sp>
+      <p:sp>
+        <p:nvSpPr>
+          <p:cNvPr id="21" name="Shape 19"/>
+          <p:cNvSpPr/>
+          <p:nvPr/>
+        </p:nvSpPr>
+        <p:spPr>
+          <a:xfrm>
+            <a:off x="822960" y="5980176"/>
+            <a:ext cx="384048" cy="384048"/>
+          </a:xfrm>
+          <a:prstGeom prst="ellipse">
+            <a:avLst/>
+          </a:prstGeom>
+          <a:solidFill>
+            <a:srgbClr val="FFD400"/>
+          </a:solidFill>
+          <a:ln/>
+        </p:spPr>
+      </p:sp>
+      <p:sp>
+        <p:nvSpPr>
+          <p:cNvPr id="22" name="Text 20"/>
+          <p:cNvSpPr/>
+          <p:nvPr/>
+        </p:nvSpPr>
+        <p:spPr>
+          <a:xfrm>
+            <a:off x="822960" y="5980176"/>
+            <a:ext cx="384048" cy="384048"/>
+          </a:xfrm>
+          <a:prstGeom prst="rect">
+            <a:avLst/>
+          </a:prstGeom>
+          <a:noFill/>
+          <a:ln/>
+        </p:spPr>
+        <p:txBody>
+          <a:bodyPr wrap="square" lIns="0" tIns="0" rIns="0" bIns="0" rtlCol="0" anchor="ctr"/>
+          <a:lstStyle/>
+          <a:p>
+            <a:pPr algn="ctr" indent="0" marL="0">
+              <a:buNone/>
+            </a:pPr>
+            <a:r>
+              <a:rPr lang="en-US" sz="1600" b="1" dirty="0">
+                <a:solidFill>
+                  <a:srgbClr val="1F1F1F"/>
+                </a:solidFill>
+                <a:latin typeface="Malgun Gothic" pitchFamily="34" charset="0"/>
+                <a:ea typeface="Malgun Gothic" pitchFamily="34" charset="-122"/>
+                <a:cs typeface="Malgun Gothic" pitchFamily="34" charset="-120"/>
+              </a:rPr>
+              <a:t>✓</a:t>
+            </a:r>
+            <a:endParaRPr lang="en-US" sz="1600" dirty="0"/>
+          </a:p>
+        </p:txBody>
+      </p:sp>
+      <p:sp>
+        <p:nvSpPr>
+          <p:cNvPr id="23" name="Text 21"/>
+          <p:cNvSpPr/>
+          <p:nvPr/>
+        </p:nvSpPr>
+        <p:spPr>
+          <a:xfrm>
+            <a:off x="1417320" y="5907024"/>
+            <a:ext cx="9966960" cy="548640"/>
+          </a:xfrm>
+          <a:prstGeom prst="rect">
+            <a:avLst/>
+          </a:prstGeom>
+          <a:noFill/>
+          <a:ln/>
+        </p:spPr>
+        <p:txBody>
+          <a:bodyPr wrap="square" lIns="0" tIns="0" rIns="0" bIns="0" rtlCol="0" anchor="ctr"/>
+          <a:lstStyle/>
+          <a:p>
+            <a:pPr indent="0" marL="0">
+              <a:buNone/>
+            </a:pPr>
+            <a:r>
+              <a:rPr lang="en-US" sz="1800" dirty="0">
+                <a:solidFill>
+                  <a:srgbClr val="FFFFFF"/>
+                </a:solidFill>
+                <a:latin typeface="Malgun Gothic" pitchFamily="34" charset="0"/>
+                <a:ea typeface="Malgun Gothic" pitchFamily="34" charset="-122"/>
+                <a:cs typeface="Malgun Gothic" pitchFamily="34" charset="-120"/>
+              </a:rPr>
+              <a:t>(계산대미디어) 매장 내부 · 외부 카메라 2대가 모두 설치되어 있는가?</a:t>
+            </a:r>
+            <a:endParaRPr lang="en-US" sz="1800" dirty="0"/>
           </a:p>
         </p:txBody>
       </p:sp>
@@ -8866,7 +10118,7 @@
                 <a:ea typeface="Malgun Gothic" pitchFamily="34" charset="-122"/>
                 <a:cs typeface="Malgun Gothic" pitchFamily="34" charset="-120"/>
               </a:rPr>
-              <a:t>아래 7단계 순서에 따라 진행해 주세요.</a:t>
+              <a:t>아래 8단계 순서에 따라 진행해 주세요.</a:t>
             </a:r>
             <a:endParaRPr lang="en-US" sz="2000" dirty="0"/>
           </a:p>
@@ -8976,7 +10228,7 @@
                 <a:ea typeface="Malgun Gothic" pitchFamily="34" charset="-122"/>
                 <a:cs typeface="Malgun Gothic" pitchFamily="34" charset="-120"/>
               </a:rPr>
-              <a:t>STEP 1 / 7</a:t>
+              <a:t>STEP 1 / 8</a:t>
             </a:r>
             <a:endParaRPr lang="en-US" sz="1400" dirty="0"/>
           </a:p>
@@ -9316,7 +10568,7 @@
                 <a:ea typeface="Malgun Gothic" pitchFamily="34" charset="-122"/>
                 <a:cs typeface="Malgun Gothic" pitchFamily="34" charset="-120"/>
               </a:rPr>
-              <a:t>STEP 2 / 7</a:t>
+              <a:t>STEP 2 / 8</a:t>
             </a:r>
             <a:endParaRPr lang="en-US" sz="1400" dirty="0"/>
           </a:p>
@@ -9656,7 +10908,7 @@
                 <a:ea typeface="Malgun Gothic" pitchFamily="34" charset="-122"/>
                 <a:cs typeface="Malgun Gothic" pitchFamily="34" charset="-120"/>
               </a:rPr>
-              <a:t>STEP 3 / 7</a:t>
+              <a:t>STEP 3 / 8</a:t>
             </a:r>
             <a:endParaRPr lang="en-US" sz="1400" dirty="0"/>
           </a:p>
@@ -9996,7 +11248,7 @@
                 <a:ea typeface="Malgun Gothic" pitchFamily="34" charset="-122"/>
                 <a:cs typeface="Malgun Gothic" pitchFamily="34" charset="-120"/>
               </a:rPr>
-              <a:t>STEP 4 / 7</a:t>
+              <a:t>STEP 4 / 8</a:t>
             </a:r>
             <a:endParaRPr lang="en-US" sz="1400" dirty="0"/>
           </a:p>
@@ -10336,7 +11588,7 @@
                 <a:ea typeface="Malgun Gothic" pitchFamily="34" charset="-122"/>
                 <a:cs typeface="Malgun Gothic" pitchFamily="34" charset="-120"/>
               </a:rPr>
-              <a:t>STEP 5 / 7</a:t>
+              <a:t>STEP 5 / 8</a:t>
             </a:r>
             <a:endParaRPr lang="en-US" sz="1400" dirty="0"/>
           </a:p>
@@ -10676,7 +11928,7 @@
                 <a:ea typeface="Malgun Gothic" pitchFamily="34" charset="-122"/>
                 <a:cs typeface="Malgun Gothic" pitchFamily="34" charset="-120"/>
               </a:rPr>
-              <a:t>STEP 6 / 7</a:t>
+              <a:t>STEP 6 / 8</a:t>
             </a:r>
             <a:endParaRPr lang="en-US" sz="1400" dirty="0"/>
           </a:p>

--- a/이마트_AI카메라_설치매뉴얼.pptx
+++ b/이마트_AI카메라_설치매뉴얼.pptx
@@ -3130,36 +3130,9 @@
           </a:p>
         </p:txBody>
       </p:sp>
-      <p:sp>
-        <p:nvSpPr>
-          <p:cNvPr id="10" name="Shape 8"/>
-          <p:cNvSpPr/>
-          <p:nvPr/>
-        </p:nvSpPr>
-        <p:spPr>
-          <a:xfrm>
-            <a:off x="6126480" y="1143000"/>
-            <a:ext cx="5394960" cy="5120640"/>
-          </a:xfrm>
-          <a:prstGeom prst="roundRect">
-            <a:avLst>
-              <a:gd name="adj" fmla="val 1429"/>
-            </a:avLst>
-          </a:prstGeom>
-          <a:solidFill>
-            <a:srgbClr val="F5F5F5"/>
-          </a:solidFill>
-          <a:ln w="19050">
-            <a:solidFill>
-              <a:srgbClr val="9AA0A6"/>
-            </a:solidFill>
-            <a:prstDash val="dash"/>
-          </a:ln>
-        </p:spPr>
-      </p:sp>
       <p:pic>
         <p:nvPicPr>
-          <p:cNvPr id="11" name="Image 0" descr="preencoded.png">    </p:cNvPr>
+          <p:cNvPr id="10" name="Image 0" descr="/tmp/claude-0/-home-user-ars/e10980de-cf93-514e-8d8f-658883089fc8/scratchpad/photos/photo11.jpg">    </p:cNvPr>
           <p:cNvPicPr>
             <a:picLocks noChangeAspect="1"/>
           </p:cNvPicPr>
@@ -3167,59 +3140,19 @@
         </p:nvPicPr>
         <p:blipFill>
           <a:blip r:embed="rId1"/>
-          <a:stretch>
-            <a:fillRect/>
-          </a:stretch>
+          <a:srcRect l="0" r="0" t="0" b="0"/>
+          <a:stretch/>
         </p:blipFill>
         <p:spPr>
           <a:xfrm>
-            <a:off x="8503920" y="3154680"/>
-            <a:ext cx="640080" cy="640080"/>
+            <a:off x="6126480" y="1143000"/>
+            <a:ext cx="5394960" cy="5120640"/>
           </a:xfrm>
           <a:prstGeom prst="rect">
             <a:avLst/>
           </a:prstGeom>
         </p:spPr>
       </p:pic>
-      <p:sp>
-        <p:nvSpPr>
-          <p:cNvPr id="12" name="Text 9"/>
-          <p:cNvSpPr/>
-          <p:nvPr/>
-        </p:nvSpPr>
-        <p:spPr>
-          <a:xfrm>
-            <a:off x="6126480" y="3840480"/>
-            <a:ext cx="5394960" cy="457200"/>
-          </a:xfrm>
-          <a:prstGeom prst="rect">
-            <a:avLst/>
-          </a:prstGeom>
-          <a:noFill/>
-          <a:ln/>
-        </p:spPr>
-        <p:txBody>
-          <a:bodyPr wrap="square" lIns="0" tIns="0" rIns="0" bIns="0" rtlCol="0" anchor="ctr"/>
-          <a:lstStyle/>
-          <a:p>
-            <a:pPr algn="ctr" indent="0" marL="0">
-              <a:buNone/>
-            </a:pPr>
-            <a:r>
-              <a:rPr lang="en-US" sz="1400" dirty="0">
-                <a:solidFill>
-                  <a:srgbClr val="9AA0A6"/>
-                </a:solidFill>
-                <a:latin typeface="Malgun Gothic" pitchFamily="34" charset="0"/>
-                <a:ea typeface="Malgun Gothic" pitchFamily="34" charset="-122"/>
-                <a:cs typeface="Malgun Gothic" pitchFamily="34" charset="-120"/>
-              </a:rPr>
-              <a:t>사진을 여기에 넣어 주세요</a:t>
-            </a:r>
-            <a:endParaRPr lang="en-US" sz="1400" dirty="0"/>
-          </a:p>
-        </p:txBody>
-      </p:sp>
     </p:spTree>
   </p:cSld>
   <p:clrMapOvr>
@@ -10374,36 +10307,9 @@
           </a:p>
         </p:txBody>
       </p:sp>
-      <p:sp>
-        <p:nvSpPr>
-          <p:cNvPr id="8" name="Shape 6"/>
-          <p:cNvSpPr/>
-          <p:nvPr/>
-        </p:nvSpPr>
-        <p:spPr>
-          <a:xfrm>
-            <a:off x="6126480" y="1143000"/>
-            <a:ext cx="5394960" cy="5120640"/>
-          </a:xfrm>
-          <a:prstGeom prst="roundRect">
-            <a:avLst>
-              <a:gd name="adj" fmla="val 1429"/>
-            </a:avLst>
-          </a:prstGeom>
-          <a:solidFill>
-            <a:srgbClr val="F5F5F5"/>
-          </a:solidFill>
-          <a:ln w="19050">
-            <a:solidFill>
-              <a:srgbClr val="9AA0A6"/>
-            </a:solidFill>
-            <a:prstDash val="dash"/>
-          </a:ln>
-        </p:spPr>
-      </p:sp>
       <p:pic>
         <p:nvPicPr>
-          <p:cNvPr id="9" name="Image 0" descr="preencoded.png">    </p:cNvPr>
+          <p:cNvPr id="8" name="Image 0" descr="/tmp/claude-0/-home-user-ars/e10980de-cf93-514e-8d8f-658883089fc8/scratchpad/photos/photo02.jpg">    </p:cNvPr>
           <p:cNvPicPr>
             <a:picLocks noChangeAspect="1"/>
           </p:cNvPicPr>
@@ -10411,59 +10317,19 @@
         </p:nvPicPr>
         <p:blipFill>
           <a:blip r:embed="rId1"/>
-          <a:stretch>
-            <a:fillRect/>
-          </a:stretch>
+          <a:srcRect l="0" r="0" t="0" b="0"/>
+          <a:stretch/>
         </p:blipFill>
         <p:spPr>
           <a:xfrm>
-            <a:off x="8503920" y="3154680"/>
-            <a:ext cx="640080" cy="640080"/>
+            <a:off x="6126480" y="1143000"/>
+            <a:ext cx="5394960" cy="5120640"/>
           </a:xfrm>
           <a:prstGeom prst="rect">
             <a:avLst/>
           </a:prstGeom>
         </p:spPr>
       </p:pic>
-      <p:sp>
-        <p:nvSpPr>
-          <p:cNvPr id="10" name="Text 7"/>
-          <p:cNvSpPr/>
-          <p:nvPr/>
-        </p:nvSpPr>
-        <p:spPr>
-          <a:xfrm>
-            <a:off x="6126480" y="3840480"/>
-            <a:ext cx="5394960" cy="457200"/>
-          </a:xfrm>
-          <a:prstGeom prst="rect">
-            <a:avLst/>
-          </a:prstGeom>
-          <a:noFill/>
-          <a:ln/>
-        </p:spPr>
-        <p:txBody>
-          <a:bodyPr wrap="square" lIns="0" tIns="0" rIns="0" bIns="0" rtlCol="0" anchor="ctr"/>
-          <a:lstStyle/>
-          <a:p>
-            <a:pPr algn="ctr" indent="0" marL="0">
-              <a:buNone/>
-            </a:pPr>
-            <a:r>
-              <a:rPr lang="en-US" sz="1400" dirty="0">
-                <a:solidFill>
-                  <a:srgbClr val="9AA0A6"/>
-                </a:solidFill>
-                <a:latin typeface="Malgun Gothic" pitchFamily="34" charset="0"/>
-                <a:ea typeface="Malgun Gothic" pitchFamily="34" charset="-122"/>
-                <a:cs typeface="Malgun Gothic" pitchFamily="34" charset="-120"/>
-              </a:rPr>
-              <a:t>사진을 여기에 넣어 주세요</a:t>
-            </a:r>
-            <a:endParaRPr lang="en-US" sz="1400" dirty="0"/>
-          </a:p>
-        </p:txBody>
-      </p:sp>
     </p:spTree>
   </p:cSld>
   <p:clrMapOvr>
@@ -10714,36 +10580,9 @@
           </a:p>
         </p:txBody>
       </p:sp>
-      <p:sp>
-        <p:nvSpPr>
-          <p:cNvPr id="8" name="Shape 6"/>
-          <p:cNvSpPr/>
-          <p:nvPr/>
-        </p:nvSpPr>
-        <p:spPr>
-          <a:xfrm>
-            <a:off x="6126480" y="1143000"/>
-            <a:ext cx="5394960" cy="5120640"/>
-          </a:xfrm>
-          <a:prstGeom prst="roundRect">
-            <a:avLst>
-              <a:gd name="adj" fmla="val 1429"/>
-            </a:avLst>
-          </a:prstGeom>
-          <a:solidFill>
-            <a:srgbClr val="F5F5F5"/>
-          </a:solidFill>
-          <a:ln w="19050">
-            <a:solidFill>
-              <a:srgbClr val="9AA0A6"/>
-            </a:solidFill>
-            <a:prstDash val="dash"/>
-          </a:ln>
-        </p:spPr>
-      </p:sp>
       <p:pic>
         <p:nvPicPr>
-          <p:cNvPr id="9" name="Image 0" descr="preencoded.png">    </p:cNvPr>
+          <p:cNvPr id="8" name="Image 0" descr="/tmp/claude-0/-home-user-ars/e10980de-cf93-514e-8d8f-658883089fc8/scratchpad/photos/photo03.jpg">    </p:cNvPr>
           <p:cNvPicPr>
             <a:picLocks noChangeAspect="1"/>
           </p:cNvPicPr>
@@ -10751,59 +10590,19 @@
         </p:nvPicPr>
         <p:blipFill>
           <a:blip r:embed="rId1"/>
-          <a:stretch>
-            <a:fillRect/>
-          </a:stretch>
+          <a:srcRect l="0" r="0" t="0" b="0"/>
+          <a:stretch/>
         </p:blipFill>
         <p:spPr>
           <a:xfrm>
-            <a:off x="8503920" y="3154680"/>
-            <a:ext cx="640080" cy="640080"/>
+            <a:off x="6126480" y="1143000"/>
+            <a:ext cx="5394960" cy="5120640"/>
           </a:xfrm>
           <a:prstGeom prst="rect">
             <a:avLst/>
           </a:prstGeom>
         </p:spPr>
       </p:pic>
-      <p:sp>
-        <p:nvSpPr>
-          <p:cNvPr id="10" name="Text 7"/>
-          <p:cNvSpPr/>
-          <p:nvPr/>
-        </p:nvSpPr>
-        <p:spPr>
-          <a:xfrm>
-            <a:off x="6126480" y="3840480"/>
-            <a:ext cx="5394960" cy="457200"/>
-          </a:xfrm>
-          <a:prstGeom prst="rect">
-            <a:avLst/>
-          </a:prstGeom>
-          <a:noFill/>
-          <a:ln/>
-        </p:spPr>
-        <p:txBody>
-          <a:bodyPr wrap="square" lIns="0" tIns="0" rIns="0" bIns="0" rtlCol="0" anchor="ctr"/>
-          <a:lstStyle/>
-          <a:p>
-            <a:pPr algn="ctr" indent="0" marL="0">
-              <a:buNone/>
-            </a:pPr>
-            <a:r>
-              <a:rPr lang="en-US" sz="1400" dirty="0">
-                <a:solidFill>
-                  <a:srgbClr val="9AA0A6"/>
-                </a:solidFill>
-                <a:latin typeface="Malgun Gothic" pitchFamily="34" charset="0"/>
-                <a:ea typeface="Malgun Gothic" pitchFamily="34" charset="-122"/>
-                <a:cs typeface="Malgun Gothic" pitchFamily="34" charset="-120"/>
-              </a:rPr>
-              <a:t>사진을 여기에 넣어 주세요</a:t>
-            </a:r>
-            <a:endParaRPr lang="en-US" sz="1400" dirty="0"/>
-          </a:p>
-        </p:txBody>
-      </p:sp>
     </p:spTree>
   </p:cSld>
   <p:clrMapOvr>
@@ -11054,36 +10853,9 @@
           </a:p>
         </p:txBody>
       </p:sp>
-      <p:sp>
-        <p:nvSpPr>
-          <p:cNvPr id="8" name="Shape 6"/>
-          <p:cNvSpPr/>
-          <p:nvPr/>
-        </p:nvSpPr>
-        <p:spPr>
-          <a:xfrm>
-            <a:off x="6126480" y="1143000"/>
-            <a:ext cx="5394960" cy="5120640"/>
-          </a:xfrm>
-          <a:prstGeom prst="roundRect">
-            <a:avLst>
-              <a:gd name="adj" fmla="val 1429"/>
-            </a:avLst>
-          </a:prstGeom>
-          <a:solidFill>
-            <a:srgbClr val="F5F5F5"/>
-          </a:solidFill>
-          <a:ln w="19050">
-            <a:solidFill>
-              <a:srgbClr val="9AA0A6"/>
-            </a:solidFill>
-            <a:prstDash val="dash"/>
-          </a:ln>
-        </p:spPr>
-      </p:sp>
       <p:pic>
         <p:nvPicPr>
-          <p:cNvPr id="9" name="Image 0" descr="preencoded.png">    </p:cNvPr>
+          <p:cNvPr id="8" name="Image 0" descr="/tmp/claude-0/-home-user-ars/e10980de-cf93-514e-8d8f-658883089fc8/scratchpad/photos/photo03.jpg">    </p:cNvPr>
           <p:cNvPicPr>
             <a:picLocks noChangeAspect="1"/>
           </p:cNvPicPr>
@@ -11091,59 +10863,19 @@
         </p:nvPicPr>
         <p:blipFill>
           <a:blip r:embed="rId1"/>
-          <a:stretch>
-            <a:fillRect/>
-          </a:stretch>
+          <a:srcRect l="0" r="0" t="0" b="0"/>
+          <a:stretch/>
         </p:blipFill>
         <p:spPr>
           <a:xfrm>
-            <a:off x="8503920" y="3154680"/>
-            <a:ext cx="640080" cy="640080"/>
+            <a:off x="6126480" y="1143000"/>
+            <a:ext cx="5394960" cy="5120640"/>
           </a:xfrm>
           <a:prstGeom prst="rect">
             <a:avLst/>
           </a:prstGeom>
         </p:spPr>
       </p:pic>
-      <p:sp>
-        <p:nvSpPr>
-          <p:cNvPr id="10" name="Text 7"/>
-          <p:cNvSpPr/>
-          <p:nvPr/>
-        </p:nvSpPr>
-        <p:spPr>
-          <a:xfrm>
-            <a:off x="6126480" y="3840480"/>
-            <a:ext cx="5394960" cy="457200"/>
-          </a:xfrm>
-          <a:prstGeom prst="rect">
-            <a:avLst/>
-          </a:prstGeom>
-          <a:noFill/>
-          <a:ln/>
-        </p:spPr>
-        <p:txBody>
-          <a:bodyPr wrap="square" lIns="0" tIns="0" rIns="0" bIns="0" rtlCol="0" anchor="ctr"/>
-          <a:lstStyle/>
-          <a:p>
-            <a:pPr algn="ctr" indent="0" marL="0">
-              <a:buNone/>
-            </a:pPr>
-            <a:r>
-              <a:rPr lang="en-US" sz="1400" dirty="0">
-                <a:solidFill>
-                  <a:srgbClr val="9AA0A6"/>
-                </a:solidFill>
-                <a:latin typeface="Malgun Gothic" pitchFamily="34" charset="0"/>
-                <a:ea typeface="Malgun Gothic" pitchFamily="34" charset="-122"/>
-                <a:cs typeface="Malgun Gothic" pitchFamily="34" charset="-120"/>
-              </a:rPr>
-              <a:t>사진을 여기에 넣어 주세요</a:t>
-            </a:r>
-            <a:endParaRPr lang="en-US" sz="1400" dirty="0"/>
-          </a:p>
-        </p:txBody>
-      </p:sp>
     </p:spTree>
   </p:cSld>
   <p:clrMapOvr>
@@ -11394,36 +11126,9 @@
           </a:p>
         </p:txBody>
       </p:sp>
-      <p:sp>
-        <p:nvSpPr>
-          <p:cNvPr id="8" name="Shape 6"/>
-          <p:cNvSpPr/>
-          <p:nvPr/>
-        </p:nvSpPr>
-        <p:spPr>
-          <a:xfrm>
-            <a:off x="6126480" y="1143000"/>
-            <a:ext cx="5394960" cy="5120640"/>
-          </a:xfrm>
-          <a:prstGeom prst="roundRect">
-            <a:avLst>
-              <a:gd name="adj" fmla="val 1429"/>
-            </a:avLst>
-          </a:prstGeom>
-          <a:solidFill>
-            <a:srgbClr val="F5F5F5"/>
-          </a:solidFill>
-          <a:ln w="19050">
-            <a:solidFill>
-              <a:srgbClr val="9AA0A6"/>
-            </a:solidFill>
-            <a:prstDash val="dash"/>
-          </a:ln>
-        </p:spPr>
-      </p:sp>
       <p:pic>
         <p:nvPicPr>
-          <p:cNvPr id="9" name="Image 0" descr="preencoded.png">    </p:cNvPr>
+          <p:cNvPr id="8" name="Image 0" descr="/tmp/claude-0/-home-user-ars/e10980de-cf93-514e-8d8f-658883089fc8/scratchpad/photos/photo01.jpg">    </p:cNvPr>
           <p:cNvPicPr>
             <a:picLocks noChangeAspect="1"/>
           </p:cNvPicPr>
@@ -11431,14 +11136,13 @@
         </p:nvPicPr>
         <p:blipFill>
           <a:blip r:embed="rId1"/>
-          <a:stretch>
-            <a:fillRect/>
-          </a:stretch>
+          <a:srcRect l="0" r="0" t="0" b="0"/>
+          <a:stretch/>
         </p:blipFill>
         <p:spPr>
           <a:xfrm>
-            <a:off x="8503920" y="3154680"/>
-            <a:ext cx="640080" cy="640080"/>
+            <a:off x="6126480" y="1143000"/>
+            <a:ext cx="5394960" cy="2491740"/>
           </a:xfrm>
           <a:prstGeom prst="rect">
             <a:avLst/>
@@ -11447,14 +11151,38 @@
       </p:pic>
       <p:sp>
         <p:nvSpPr>
+          <p:cNvPr id="9" name="Shape 6"/>
+          <p:cNvSpPr/>
+          <p:nvPr/>
+        </p:nvSpPr>
+        <p:spPr>
+          <a:xfrm>
+            <a:off x="6236208" y="1252728"/>
+            <a:ext cx="1371600" cy="347472"/>
+          </a:xfrm>
+          <a:prstGeom prst="roundRect">
+            <a:avLst>
+              <a:gd name="adj" fmla="val 13158"/>
+            </a:avLst>
+          </a:prstGeom>
+          <a:solidFill>
+            <a:srgbClr val="1F1F1F">
+              <a:alpha val="75000"/>
+            </a:srgbClr>
+          </a:solidFill>
+          <a:ln/>
+        </p:spPr>
+      </p:sp>
+      <p:sp>
+        <p:nvSpPr>
           <p:cNvPr id="10" name="Text 7"/>
           <p:cNvSpPr/>
           <p:nvPr/>
         </p:nvSpPr>
         <p:spPr>
           <a:xfrm>
-            <a:off x="6126480" y="3840480"/>
-            <a:ext cx="5394960" cy="457200"/>
+            <a:off x="6236208" y="1252728"/>
+            <a:ext cx="1371600" cy="347472"/>
           </a:xfrm>
           <a:prstGeom prst="rect">
             <a:avLst/>
@@ -11470,17 +11198,103 @@
               <a:buNone/>
             </a:pPr>
             <a:r>
-              <a:rPr lang="en-US" sz="1400" dirty="0">
-                <a:solidFill>
-                  <a:srgbClr val="9AA0A6"/>
-                </a:solidFill>
-                <a:latin typeface="Malgun Gothic" pitchFamily="34" charset="0"/>
-                <a:ea typeface="Malgun Gothic" pitchFamily="34" charset="-122"/>
-                <a:cs typeface="Malgun Gothic" pitchFamily="34" charset="-120"/>
-              </a:rPr>
-              <a:t>사진을 여기에 넣어 주세요</a:t>
-            </a:r>
-            <a:endParaRPr lang="en-US" sz="1400" dirty="0"/>
+              <a:rPr lang="en-US" sz="1200" b="1" dirty="0">
+                <a:solidFill>
+                  <a:srgbClr val="FFFFFF"/>
+                </a:solidFill>
+                <a:latin typeface="Malgun Gothic" pitchFamily="34" charset="0"/>
+                <a:ea typeface="Malgun Gothic" pitchFamily="34" charset="-122"/>
+                <a:cs typeface="Malgun Gothic" pitchFamily="34" charset="-120"/>
+              </a:rPr>
+              <a:t>연결 작업</a:t>
+            </a:r>
+            <a:endParaRPr lang="en-US" sz="1200" dirty="0"/>
+          </a:p>
+        </p:txBody>
+      </p:sp>
+      <p:pic>
+        <p:nvPicPr>
+          <p:cNvPr id="11" name="Image 1" descr="/tmp/claude-0/-home-user-ars/e10980de-cf93-514e-8d8f-658883089fc8/scratchpad/photos/photo04.jpg">    </p:cNvPr>
+          <p:cNvPicPr>
+            <a:picLocks noChangeAspect="1"/>
+          </p:cNvPicPr>
+          <p:nvPr/>
+        </p:nvPicPr>
+        <p:blipFill>
+          <a:blip r:embed="rId2"/>
+          <a:srcRect l="0" r="0" t="0" b="0"/>
+          <a:stretch/>
+        </p:blipFill>
+        <p:spPr>
+          <a:xfrm>
+            <a:off x="6126480" y="3771900"/>
+            <a:ext cx="5394960" cy="2491740"/>
+          </a:xfrm>
+          <a:prstGeom prst="rect">
+            <a:avLst/>
+          </a:prstGeom>
+        </p:spPr>
+      </p:pic>
+      <p:sp>
+        <p:nvSpPr>
+          <p:cNvPr id="12" name="Shape 8"/>
+          <p:cNvSpPr/>
+          <p:nvPr/>
+        </p:nvSpPr>
+        <p:spPr>
+          <a:xfrm>
+            <a:off x="6236208" y="3881628"/>
+            <a:ext cx="1371600" cy="347472"/>
+          </a:xfrm>
+          <a:prstGeom prst="roundRect">
+            <a:avLst>
+              <a:gd name="adj" fmla="val 13158"/>
+            </a:avLst>
+          </a:prstGeom>
+          <a:solidFill>
+            <a:srgbClr val="1F1F1F">
+              <a:alpha val="75000"/>
+            </a:srgbClr>
+          </a:solidFill>
+          <a:ln/>
+        </p:spPr>
+      </p:sp>
+      <p:sp>
+        <p:nvSpPr>
+          <p:cNvPr id="13" name="Text 9"/>
+          <p:cNvSpPr/>
+          <p:nvPr/>
+        </p:nvSpPr>
+        <p:spPr>
+          <a:xfrm>
+            <a:off x="6236208" y="3881628"/>
+            <a:ext cx="1371600" cy="347472"/>
+          </a:xfrm>
+          <a:prstGeom prst="rect">
+            <a:avLst/>
+          </a:prstGeom>
+          <a:noFill/>
+          <a:ln/>
+        </p:spPr>
+        <p:txBody>
+          <a:bodyPr wrap="square" lIns="0" tIns="0" rIns="0" bIns="0" rtlCol="0" anchor="ctr"/>
+          <a:lstStyle/>
+          <a:p>
+            <a:pPr algn="ctr" indent="0" marL="0">
+              <a:buNone/>
+            </a:pPr>
+            <a:r>
+              <a:rPr lang="en-US" sz="1200" b="1" dirty="0">
+                <a:solidFill>
+                  <a:srgbClr val="FFFFFF"/>
+                </a:solidFill>
+                <a:latin typeface="Malgun Gothic" pitchFamily="34" charset="0"/>
+                <a:ea typeface="Malgun Gothic" pitchFamily="34" charset="-122"/>
+                <a:cs typeface="Malgun Gothic" pitchFamily="34" charset="-120"/>
+              </a:rPr>
+              <a:t>연결 완료</a:t>
+            </a:r>
+            <a:endParaRPr lang="en-US" sz="1200" dirty="0"/>
           </a:p>
         </p:txBody>
       </p:sp>
@@ -11734,36 +11548,9 @@
           </a:p>
         </p:txBody>
       </p:sp>
-      <p:sp>
-        <p:nvSpPr>
-          <p:cNvPr id="8" name="Shape 6"/>
-          <p:cNvSpPr/>
-          <p:nvPr/>
-        </p:nvSpPr>
-        <p:spPr>
-          <a:xfrm>
-            <a:off x="6126480" y="1143000"/>
-            <a:ext cx="5394960" cy="5120640"/>
-          </a:xfrm>
-          <a:prstGeom prst="roundRect">
-            <a:avLst>
-              <a:gd name="adj" fmla="val 1429"/>
-            </a:avLst>
-          </a:prstGeom>
-          <a:solidFill>
-            <a:srgbClr val="F5F5F5"/>
-          </a:solidFill>
-          <a:ln w="19050">
-            <a:solidFill>
-              <a:srgbClr val="9AA0A6"/>
-            </a:solidFill>
-            <a:prstDash val="dash"/>
-          </a:ln>
-        </p:spPr>
-      </p:sp>
       <p:pic>
         <p:nvPicPr>
-          <p:cNvPr id="9" name="Image 0" descr="preencoded.png">    </p:cNvPr>
+          <p:cNvPr id="8" name="Image 0" descr="/tmp/claude-0/-home-user-ars/e10980de-cf93-514e-8d8f-658883089fc8/scratchpad/photos/photo05.jpg">    </p:cNvPr>
           <p:cNvPicPr>
             <a:picLocks noChangeAspect="1"/>
           </p:cNvPicPr>
@@ -11771,14 +11558,13 @@
         </p:nvPicPr>
         <p:blipFill>
           <a:blip r:embed="rId1"/>
-          <a:stretch>
-            <a:fillRect/>
-          </a:stretch>
+          <a:srcRect l="0" r="0" t="0" b="0"/>
+          <a:stretch/>
         </p:blipFill>
         <p:spPr>
           <a:xfrm>
-            <a:off x="8503920" y="3154680"/>
-            <a:ext cx="640080" cy="640080"/>
+            <a:off x="6126480" y="1143000"/>
+            <a:ext cx="5394960" cy="2491740"/>
           </a:xfrm>
           <a:prstGeom prst="rect">
             <a:avLst/>
@@ -11787,14 +11573,38 @@
       </p:pic>
       <p:sp>
         <p:nvSpPr>
+          <p:cNvPr id="9" name="Shape 6"/>
+          <p:cNvSpPr/>
+          <p:nvPr/>
+        </p:nvSpPr>
+        <p:spPr>
+          <a:xfrm>
+            <a:off x="6236208" y="1252728"/>
+            <a:ext cx="1371600" cy="347472"/>
+          </a:xfrm>
+          <a:prstGeom prst="roundRect">
+            <a:avLst>
+              <a:gd name="adj" fmla="val 13158"/>
+            </a:avLst>
+          </a:prstGeom>
+          <a:solidFill>
+            <a:srgbClr val="1F1F1F">
+              <a:alpha val="75000"/>
+            </a:srgbClr>
+          </a:solidFill>
+          <a:ln/>
+        </p:spPr>
+      </p:sp>
+      <p:sp>
+        <p:nvSpPr>
           <p:cNvPr id="10" name="Text 7"/>
           <p:cNvSpPr/>
           <p:nvPr/>
         </p:nvSpPr>
         <p:spPr>
           <a:xfrm>
-            <a:off x="6126480" y="3840480"/>
-            <a:ext cx="5394960" cy="457200"/>
+            <a:off x="6236208" y="1252728"/>
+            <a:ext cx="1371600" cy="347472"/>
           </a:xfrm>
           <a:prstGeom prst="rect">
             <a:avLst/>
@@ -11810,17 +11620,103 @@
               <a:buNone/>
             </a:pPr>
             <a:r>
-              <a:rPr lang="en-US" sz="1400" dirty="0">
-                <a:solidFill>
-                  <a:srgbClr val="9AA0A6"/>
-                </a:solidFill>
-                <a:latin typeface="Malgun Gothic" pitchFamily="34" charset="0"/>
-                <a:ea typeface="Malgun Gothic" pitchFamily="34" charset="-122"/>
-                <a:cs typeface="Malgun Gothic" pitchFamily="34" charset="-120"/>
-              </a:rPr>
-              <a:t>사진을 여기에 넣어 주세요</a:t>
-            </a:r>
-            <a:endParaRPr lang="en-US" sz="1400" dirty="0"/>
+              <a:rPr lang="en-US" sz="1200" b="1" dirty="0">
+                <a:solidFill>
+                  <a:srgbClr val="FFFFFF"/>
+                </a:solidFill>
+                <a:latin typeface="Malgun Gothic" pitchFamily="34" charset="0"/>
+                <a:ea typeface="Malgun Gothic" pitchFamily="34" charset="-122"/>
+                <a:cs typeface="Malgun Gothic" pitchFamily="34" charset="-120"/>
+              </a:rPr>
+              <a:t>작업 모습</a:t>
+            </a:r>
+            <a:endParaRPr lang="en-US" sz="1200" dirty="0"/>
+          </a:p>
+        </p:txBody>
+      </p:sp>
+      <p:pic>
+        <p:nvPicPr>
+          <p:cNvPr id="11" name="Image 1" descr="/tmp/claude-0/-home-user-ars/e10980de-cf93-514e-8d8f-658883089fc8/scratchpad/photos/photo12.jpg">    </p:cNvPr>
+          <p:cNvPicPr>
+            <a:picLocks noChangeAspect="1"/>
+          </p:cNvPicPr>
+          <p:nvPr/>
+        </p:nvPicPr>
+        <p:blipFill>
+          <a:blip r:embed="rId2"/>
+          <a:srcRect l="0" r="0" t="0" b="0"/>
+          <a:stretch/>
+        </p:blipFill>
+        <p:spPr>
+          <a:xfrm>
+            <a:off x="6126480" y="3771900"/>
+            <a:ext cx="5394960" cy="2491740"/>
+          </a:xfrm>
+          <a:prstGeom prst="rect">
+            <a:avLst/>
+          </a:prstGeom>
+        </p:spPr>
+      </p:pic>
+      <p:sp>
+        <p:nvSpPr>
+          <p:cNvPr id="12" name="Shape 8"/>
+          <p:cNvSpPr/>
+          <p:nvPr/>
+        </p:nvSpPr>
+        <p:spPr>
+          <a:xfrm>
+            <a:off x="6236208" y="3881628"/>
+            <a:ext cx="1371600" cy="347472"/>
+          </a:xfrm>
+          <a:prstGeom prst="roundRect">
+            <a:avLst>
+              <a:gd name="adj" fmla="val 13158"/>
+            </a:avLst>
+          </a:prstGeom>
+          <a:solidFill>
+            <a:srgbClr val="1F1F1F">
+              <a:alpha val="75000"/>
+            </a:srgbClr>
+          </a:solidFill>
+          <a:ln/>
+        </p:spPr>
+      </p:sp>
+      <p:sp>
+        <p:nvSpPr>
+          <p:cNvPr id="13" name="Text 9"/>
+          <p:cNvSpPr/>
+          <p:nvPr/>
+        </p:nvSpPr>
+        <p:spPr>
+          <a:xfrm>
+            <a:off x="6236208" y="3881628"/>
+            <a:ext cx="1371600" cy="347472"/>
+          </a:xfrm>
+          <a:prstGeom prst="rect">
+            <a:avLst/>
+          </a:prstGeom>
+          <a:noFill/>
+          <a:ln/>
+        </p:spPr>
+        <p:txBody>
+          <a:bodyPr wrap="square" lIns="0" tIns="0" rIns="0" bIns="0" rtlCol="0" anchor="ctr"/>
+          <a:lstStyle/>
+          <a:p>
+            <a:pPr algn="ctr" indent="0" marL="0">
+              <a:buNone/>
+            </a:pPr>
+            <a:r>
+              <a:rPr lang="en-US" sz="1200" b="1" dirty="0">
+                <a:solidFill>
+                  <a:srgbClr val="FFFFFF"/>
+                </a:solidFill>
+                <a:latin typeface="Malgun Gothic" pitchFamily="34" charset="0"/>
+                <a:ea typeface="Malgun Gothic" pitchFamily="34" charset="-122"/>
+                <a:cs typeface="Malgun Gothic" pitchFamily="34" charset="-120"/>
+              </a:rPr>
+              <a:t>부착 완료</a:t>
+            </a:r>
+            <a:endParaRPr lang="en-US" sz="1200" dirty="0"/>
           </a:p>
         </p:txBody>
       </p:sp>
@@ -12505,36 +12401,9 @@
           </a:p>
         </p:txBody>
       </p:sp>
-      <p:sp>
-        <p:nvSpPr>
-          <p:cNvPr id="21" name="Shape 19"/>
-          <p:cNvSpPr/>
-          <p:nvPr/>
-        </p:nvSpPr>
-        <p:spPr>
-          <a:xfrm>
-            <a:off x="6126480" y="1143000"/>
-            <a:ext cx="5394960" cy="5120640"/>
-          </a:xfrm>
-          <a:prstGeom prst="roundRect">
-            <a:avLst>
-              <a:gd name="adj" fmla="val 1429"/>
-            </a:avLst>
-          </a:prstGeom>
-          <a:solidFill>
-            <a:srgbClr val="F5F5F5"/>
-          </a:solidFill>
-          <a:ln w="19050">
-            <a:solidFill>
-              <a:srgbClr val="9AA0A6"/>
-            </a:solidFill>
-            <a:prstDash val="dash"/>
-          </a:ln>
-        </p:spPr>
-      </p:sp>
       <p:pic>
         <p:nvPicPr>
-          <p:cNvPr id="22" name="Image 0" descr="preencoded.png">    </p:cNvPr>
+          <p:cNvPr id="21" name="Image 0" descr="/tmp/claude-0/-home-user-ars/e10980de-cf93-514e-8d8f-658883089fc8/scratchpad/photos/photo06.jpg">    </p:cNvPr>
           <p:cNvPicPr>
             <a:picLocks noChangeAspect="1"/>
           </p:cNvPicPr>
@@ -12542,14 +12411,13 @@
         </p:nvPicPr>
         <p:blipFill>
           <a:blip r:embed="rId1"/>
-          <a:stretch>
-            <a:fillRect/>
-          </a:stretch>
+          <a:srcRect l="0" r="0" t="0" b="0"/>
+          <a:stretch/>
         </p:blipFill>
         <p:spPr>
           <a:xfrm>
-            <a:off x="8503920" y="3154680"/>
-            <a:ext cx="640080" cy="640080"/>
+            <a:off x="6126480" y="1143000"/>
+            <a:ext cx="2628900" cy="1615440"/>
           </a:xfrm>
           <a:prstGeom prst="rect">
             <a:avLst/>
@@ -12558,14 +12426,38 @@
       </p:pic>
       <p:sp>
         <p:nvSpPr>
+          <p:cNvPr id="22" name="Shape 19"/>
+          <p:cNvSpPr/>
+          <p:nvPr/>
+        </p:nvSpPr>
+        <p:spPr>
+          <a:xfrm>
+            <a:off x="6236208" y="1252728"/>
+            <a:ext cx="1371600" cy="347472"/>
+          </a:xfrm>
+          <a:prstGeom prst="roundRect">
+            <a:avLst>
+              <a:gd name="adj" fmla="val 13158"/>
+            </a:avLst>
+          </a:prstGeom>
+          <a:solidFill>
+            <a:srgbClr val="1F1F1F">
+              <a:alpha val="75000"/>
+            </a:srgbClr>
+          </a:solidFill>
+          <a:ln/>
+        </p:spPr>
+      </p:sp>
+      <p:sp>
+        <p:nvSpPr>
           <p:cNvPr id="23" name="Text 20"/>
           <p:cNvSpPr/>
           <p:nvPr/>
         </p:nvSpPr>
         <p:spPr>
           <a:xfrm>
-            <a:off x="6126480" y="3840480"/>
-            <a:ext cx="5394960" cy="457200"/>
+            <a:off x="6236208" y="1252728"/>
+            <a:ext cx="1371600" cy="347472"/>
           </a:xfrm>
           <a:prstGeom prst="rect">
             <a:avLst/>
@@ -12581,17 +12473,361 @@
               <a:buNone/>
             </a:pPr>
             <a:r>
-              <a:rPr lang="en-US" sz="1400" dirty="0">
-                <a:solidFill>
-                  <a:srgbClr val="9AA0A6"/>
-                </a:solidFill>
-                <a:latin typeface="Malgun Gothic" pitchFamily="34" charset="0"/>
-                <a:ea typeface="Malgun Gothic" pitchFamily="34" charset="-122"/>
-                <a:cs typeface="Malgun Gothic" pitchFamily="34" charset="-120"/>
-              </a:rPr>
-              <a:t>사진을 여기에 넣어 주세요</a:t>
-            </a:r>
-            <a:endParaRPr lang="en-US" sz="1400" dirty="0"/>
+              <a:rPr lang="en-US" sz="1200" b="1" dirty="0">
+                <a:solidFill>
+                  <a:srgbClr val="FFFFFF"/>
+                </a:solidFill>
+                <a:latin typeface="Malgun Gothic" pitchFamily="34" charset="0"/>
+                <a:ea typeface="Malgun Gothic" pitchFamily="34" charset="-122"/>
+                <a:cs typeface="Malgun Gothic" pitchFamily="34" charset="-120"/>
+              </a:rPr>
+              <a:t>히든키 입력</a:t>
+            </a:r>
+            <a:endParaRPr lang="en-US" sz="1200" dirty="0"/>
+          </a:p>
+        </p:txBody>
+      </p:sp>
+      <p:pic>
+        <p:nvPicPr>
+          <p:cNvPr id="24" name="Image 1" descr="/tmp/claude-0/-home-user-ars/e10980de-cf93-514e-8d8f-658883089fc8/scratchpad/photos/photo08.jpg">    </p:cNvPr>
+          <p:cNvPicPr>
+            <a:picLocks noChangeAspect="1"/>
+          </p:cNvPicPr>
+          <p:nvPr/>
+        </p:nvPicPr>
+        <p:blipFill>
+          <a:blip r:embed="rId2"/>
+          <a:srcRect l="0" r="0" t="0" b="0"/>
+          <a:stretch/>
+        </p:blipFill>
+        <p:spPr>
+          <a:xfrm>
+            <a:off x="8892540" y="1143000"/>
+            <a:ext cx="2628900" cy="1615440"/>
+          </a:xfrm>
+          <a:prstGeom prst="rect">
+            <a:avLst/>
+          </a:prstGeom>
+        </p:spPr>
+      </p:pic>
+      <p:sp>
+        <p:nvSpPr>
+          <p:cNvPr id="25" name="Shape 21"/>
+          <p:cNvSpPr/>
+          <p:nvPr/>
+        </p:nvSpPr>
+        <p:spPr>
+          <a:xfrm>
+            <a:off x="9002268" y="1252728"/>
+            <a:ext cx="1371600" cy="347472"/>
+          </a:xfrm>
+          <a:prstGeom prst="roundRect">
+            <a:avLst>
+              <a:gd name="adj" fmla="val 13158"/>
+            </a:avLst>
+          </a:prstGeom>
+          <a:solidFill>
+            <a:srgbClr val="1F1F1F">
+              <a:alpha val="75000"/>
+            </a:srgbClr>
+          </a:solidFill>
+          <a:ln/>
+        </p:spPr>
+      </p:sp>
+      <p:sp>
+        <p:nvSpPr>
+          <p:cNvPr id="26" name="Text 22"/>
+          <p:cNvSpPr/>
+          <p:nvPr/>
+        </p:nvSpPr>
+        <p:spPr>
+          <a:xfrm>
+            <a:off x="9002268" y="1252728"/>
+            <a:ext cx="1371600" cy="347472"/>
+          </a:xfrm>
+          <a:prstGeom prst="rect">
+            <a:avLst/>
+          </a:prstGeom>
+          <a:noFill/>
+          <a:ln/>
+        </p:spPr>
+        <p:txBody>
+          <a:bodyPr wrap="square" lIns="0" tIns="0" rIns="0" bIns="0" rtlCol="0" anchor="ctr"/>
+          <a:lstStyle/>
+          <a:p>
+            <a:pPr algn="ctr" indent="0" marL="0">
+              <a:buNone/>
+            </a:pPr>
+            <a:r>
+              <a:rPr lang="en-US" sz="1200" b="1" dirty="0">
+                <a:solidFill>
+                  <a:srgbClr val="FFFFFF"/>
+                </a:solidFill>
+                <a:latin typeface="Malgun Gothic" pitchFamily="34" charset="0"/>
+                <a:ea typeface="Malgun Gothic" pitchFamily="34" charset="-122"/>
+                <a:cs typeface="Malgun Gothic" pitchFamily="34" charset="-120"/>
+              </a:rPr>
+              <a:t>설정 페이지</a:t>
+            </a:r>
+            <a:endParaRPr lang="en-US" sz="1200" dirty="0"/>
+          </a:p>
+        </p:txBody>
+      </p:sp>
+      <p:pic>
+        <p:nvPicPr>
+          <p:cNvPr id="27" name="Image 2" descr="/tmp/claude-0/-home-user-ars/e10980de-cf93-514e-8d8f-658883089fc8/scratchpad/photos/photo07.jpg">    </p:cNvPr>
+          <p:cNvPicPr>
+            <a:picLocks noChangeAspect="1"/>
+          </p:cNvPicPr>
+          <p:nvPr/>
+        </p:nvPicPr>
+        <p:blipFill>
+          <a:blip r:embed="rId3"/>
+          <a:srcRect l="0" r="0" t="0" b="0"/>
+          <a:stretch/>
+        </p:blipFill>
+        <p:spPr>
+          <a:xfrm>
+            <a:off x="6126480" y="2895600"/>
+            <a:ext cx="2628900" cy="1615440"/>
+          </a:xfrm>
+          <a:prstGeom prst="rect">
+            <a:avLst/>
+          </a:prstGeom>
+        </p:spPr>
+      </p:pic>
+      <p:sp>
+        <p:nvSpPr>
+          <p:cNvPr id="28" name="Shape 23"/>
+          <p:cNvSpPr/>
+          <p:nvPr/>
+        </p:nvSpPr>
+        <p:spPr>
+          <a:xfrm>
+            <a:off x="6236208" y="3005328"/>
+            <a:ext cx="1371600" cy="347472"/>
+          </a:xfrm>
+          <a:prstGeom prst="roundRect">
+            <a:avLst>
+              <a:gd name="adj" fmla="val 13158"/>
+            </a:avLst>
+          </a:prstGeom>
+          <a:solidFill>
+            <a:srgbClr val="1F1F1F">
+              <a:alpha val="75000"/>
+            </a:srgbClr>
+          </a:solidFill>
+          <a:ln/>
+        </p:spPr>
+      </p:sp>
+      <p:sp>
+        <p:nvSpPr>
+          <p:cNvPr id="29" name="Text 24"/>
+          <p:cNvSpPr/>
+          <p:nvPr/>
+        </p:nvSpPr>
+        <p:spPr>
+          <a:xfrm>
+            <a:off x="6236208" y="3005328"/>
+            <a:ext cx="1371600" cy="347472"/>
+          </a:xfrm>
+          <a:prstGeom prst="rect">
+            <a:avLst/>
+          </a:prstGeom>
+          <a:noFill/>
+          <a:ln/>
+        </p:spPr>
+        <p:txBody>
+          <a:bodyPr wrap="square" lIns="0" tIns="0" rIns="0" bIns="0" rtlCol="0" anchor="ctr"/>
+          <a:lstStyle/>
+          <a:p>
+            <a:pPr algn="ctr" indent="0" marL="0">
+              <a:buNone/>
+            </a:pPr>
+            <a:r>
+              <a:rPr lang="en-US" sz="1200" b="1" dirty="0">
+                <a:solidFill>
+                  <a:srgbClr val="FFFFFF"/>
+                </a:solidFill>
+                <a:latin typeface="Malgun Gothic" pitchFamily="34" charset="0"/>
+                <a:ea typeface="Malgun Gothic" pitchFamily="34" charset="-122"/>
+                <a:cs typeface="Malgun Gothic" pitchFamily="34" charset="-120"/>
+              </a:rPr>
+              <a:t>AI 모드 선택</a:t>
+            </a:r>
+            <a:endParaRPr lang="en-US" sz="1200" dirty="0"/>
+          </a:p>
+        </p:txBody>
+      </p:sp>
+      <p:pic>
+        <p:nvPicPr>
+          <p:cNvPr id="30" name="Image 3" descr="/tmp/claude-0/-home-user-ars/e10980de-cf93-514e-8d8f-658883089fc8/scratchpad/photos/photo09.jpg">    </p:cNvPr>
+          <p:cNvPicPr>
+            <a:picLocks noChangeAspect="1"/>
+          </p:cNvPicPr>
+          <p:nvPr/>
+        </p:nvPicPr>
+        <p:blipFill>
+          <a:blip r:embed="rId4"/>
+          <a:srcRect l="0" r="0" t="0" b="0"/>
+          <a:stretch/>
+        </p:blipFill>
+        <p:spPr>
+          <a:xfrm>
+            <a:off x="8892540" y="2895600"/>
+            <a:ext cx="2628900" cy="1615440"/>
+          </a:xfrm>
+          <a:prstGeom prst="rect">
+            <a:avLst/>
+          </a:prstGeom>
+        </p:spPr>
+      </p:pic>
+      <p:sp>
+        <p:nvSpPr>
+          <p:cNvPr id="31" name="Shape 25"/>
+          <p:cNvSpPr/>
+          <p:nvPr/>
+        </p:nvSpPr>
+        <p:spPr>
+          <a:xfrm>
+            <a:off x="9002268" y="3005328"/>
+            <a:ext cx="1371600" cy="347472"/>
+          </a:xfrm>
+          <a:prstGeom prst="roundRect">
+            <a:avLst>
+              <a:gd name="adj" fmla="val 13158"/>
+            </a:avLst>
+          </a:prstGeom>
+          <a:solidFill>
+            <a:srgbClr val="1F1F1F">
+              <a:alpha val="75000"/>
+            </a:srgbClr>
+          </a:solidFill>
+          <a:ln/>
+        </p:spPr>
+      </p:sp>
+      <p:sp>
+        <p:nvSpPr>
+          <p:cNvPr id="32" name="Text 26"/>
+          <p:cNvSpPr/>
+          <p:nvPr/>
+        </p:nvSpPr>
+        <p:spPr>
+          <a:xfrm>
+            <a:off x="9002268" y="3005328"/>
+            <a:ext cx="1371600" cy="347472"/>
+          </a:xfrm>
+          <a:prstGeom prst="rect">
+            <a:avLst/>
+          </a:prstGeom>
+          <a:noFill/>
+          <a:ln/>
+        </p:spPr>
+        <p:txBody>
+          <a:bodyPr wrap="square" lIns="0" tIns="0" rIns="0" bIns="0" rtlCol="0" anchor="ctr"/>
+          <a:lstStyle/>
+          <a:p>
+            <a:pPr algn="ctr" indent="0" marL="0">
+              <a:buNone/>
+            </a:pPr>
+            <a:r>
+              <a:rPr lang="en-US" sz="1200" b="1" dirty="0">
+                <a:solidFill>
+                  <a:srgbClr val="FFFFFF"/>
+                </a:solidFill>
+                <a:latin typeface="Malgun Gothic" pitchFamily="34" charset="0"/>
+                <a:ea typeface="Malgun Gothic" pitchFamily="34" charset="-122"/>
+                <a:cs typeface="Malgun Gothic" pitchFamily="34" charset="-120"/>
+              </a:rPr>
+              <a:t>화각 확인 1</a:t>
+            </a:r>
+            <a:endParaRPr lang="en-US" sz="1200" dirty="0"/>
+          </a:p>
+        </p:txBody>
+      </p:sp>
+      <p:pic>
+        <p:nvPicPr>
+          <p:cNvPr id="33" name="Image 4" descr="/tmp/claude-0/-home-user-ars/e10980de-cf93-514e-8d8f-658883089fc8/scratchpad/photos/photo10.jpg">    </p:cNvPr>
+          <p:cNvPicPr>
+            <a:picLocks noChangeAspect="1"/>
+          </p:cNvPicPr>
+          <p:nvPr/>
+        </p:nvPicPr>
+        <p:blipFill>
+          <a:blip r:embed="rId5"/>
+          <a:srcRect l="0" r="0" t="0" b="0"/>
+          <a:stretch/>
+        </p:blipFill>
+        <p:spPr>
+          <a:xfrm>
+            <a:off x="6126480" y="4648200"/>
+            <a:ext cx="5394960" cy="1615440"/>
+          </a:xfrm>
+          <a:prstGeom prst="rect">
+            <a:avLst/>
+          </a:prstGeom>
+        </p:spPr>
+      </p:pic>
+      <p:sp>
+        <p:nvSpPr>
+          <p:cNvPr id="34" name="Shape 27"/>
+          <p:cNvSpPr/>
+          <p:nvPr/>
+        </p:nvSpPr>
+        <p:spPr>
+          <a:xfrm>
+            <a:off x="6236208" y="4757928"/>
+            <a:ext cx="1371600" cy="347472"/>
+          </a:xfrm>
+          <a:prstGeom prst="roundRect">
+            <a:avLst>
+              <a:gd name="adj" fmla="val 13158"/>
+            </a:avLst>
+          </a:prstGeom>
+          <a:solidFill>
+            <a:srgbClr val="1F1F1F">
+              <a:alpha val="75000"/>
+            </a:srgbClr>
+          </a:solidFill>
+          <a:ln/>
+        </p:spPr>
+      </p:sp>
+      <p:sp>
+        <p:nvSpPr>
+          <p:cNvPr id="35" name="Text 28"/>
+          <p:cNvSpPr/>
+          <p:nvPr/>
+        </p:nvSpPr>
+        <p:spPr>
+          <a:xfrm>
+            <a:off x="6236208" y="4757928"/>
+            <a:ext cx="1371600" cy="347472"/>
+          </a:xfrm>
+          <a:prstGeom prst="rect">
+            <a:avLst/>
+          </a:prstGeom>
+          <a:noFill/>
+          <a:ln/>
+        </p:spPr>
+        <p:txBody>
+          <a:bodyPr wrap="square" lIns="0" tIns="0" rIns="0" bIns="0" rtlCol="0" anchor="ctr"/>
+          <a:lstStyle/>
+          <a:p>
+            <a:pPr algn="ctr" indent="0" marL="0">
+              <a:buNone/>
+            </a:pPr>
+            <a:r>
+              <a:rPr lang="en-US" sz="1200" b="1" dirty="0">
+                <a:solidFill>
+                  <a:srgbClr val="FFFFFF"/>
+                </a:solidFill>
+                <a:latin typeface="Malgun Gothic" pitchFamily="34" charset="0"/>
+                <a:ea typeface="Malgun Gothic" pitchFamily="34" charset="-122"/>
+                <a:cs typeface="Malgun Gothic" pitchFamily="34" charset="-120"/>
+              </a:rPr>
+              <a:t>화각 확인 2</a:t>
+            </a:r>
+            <a:endParaRPr lang="en-US" sz="1200" dirty="0"/>
           </a:p>
         </p:txBody>
       </p:sp>

--- a/이마트_AI카메라_설치매뉴얼.pptx
+++ b/이마트_AI카메라_설치매뉴얼.pptx
@@ -3019,8 +3019,8 @@
         </p:nvSpPr>
         <p:spPr>
           <a:xfrm>
-            <a:off x="822960" y="1051560"/>
-            <a:ext cx="1188720" cy="1188720"/>
+            <a:off x="8138160" y="685800"/>
+            <a:ext cx="5486400" cy="5486400"/>
           </a:xfrm>
           <a:prstGeom prst="ellipse">
             <a:avLst/>
@@ -3047,8 +3047,8 @@
         </p:blipFill>
         <p:spPr>
           <a:xfrm>
-            <a:off x="1124712" y="1353312"/>
-            <a:ext cx="585216" cy="585216"/>
+            <a:off x="9646920" y="2606040"/>
+            <a:ext cx="1645920" cy="1645920"/>
           </a:xfrm>
           <a:prstGeom prst="rect">
             <a:avLst/>
@@ -3057,14 +3057,76 @@
       </p:pic>
       <p:sp>
         <p:nvSpPr>
-          <p:cNvPr id="4" name="Text 1"/>
-          <p:cNvSpPr/>
-          <p:nvPr/>
-        </p:nvSpPr>
-        <p:spPr>
-          <a:xfrm>
-            <a:off x="822960" y="2743200"/>
-            <a:ext cx="10515600" cy="1097280"/>
+          <p:cNvPr id="4" name="Shape 1"/>
+          <p:cNvSpPr/>
+          <p:nvPr/>
+        </p:nvSpPr>
+        <p:spPr>
+          <a:xfrm>
+            <a:off x="7315200" y="5120640"/>
+            <a:ext cx="1371600" cy="1371600"/>
+          </a:xfrm>
+          <a:prstGeom prst="ellipse">
+            <a:avLst/>
+          </a:prstGeom>
+          <a:ln w="31750">
+            <a:solidFill>
+              <a:srgbClr val="FFD400"/>
+            </a:solidFill>
+            <a:prstDash val="solid"/>
+          </a:ln>
+        </p:spPr>
+      </p:sp>
+      <p:sp>
+        <p:nvSpPr>
+          <p:cNvPr id="5" name="Shape 2"/>
+          <p:cNvSpPr/>
+          <p:nvPr/>
+        </p:nvSpPr>
+        <p:spPr>
+          <a:xfrm>
+            <a:off x="7818120" y="411480"/>
+            <a:ext cx="457200" cy="457200"/>
+          </a:xfrm>
+          <a:prstGeom prst="ellipse">
+            <a:avLst/>
+          </a:prstGeom>
+          <a:solidFill>
+            <a:srgbClr val="3C3C3C"/>
+          </a:solidFill>
+          <a:ln/>
+        </p:spPr>
+      </p:sp>
+      <p:sp>
+        <p:nvSpPr>
+          <p:cNvPr id="6" name="Shape 3"/>
+          <p:cNvSpPr/>
+          <p:nvPr/>
+        </p:nvSpPr>
+        <p:spPr>
+          <a:xfrm>
+            <a:off x="822960" y="822960"/>
+            <a:ext cx="320040" cy="320040"/>
+          </a:xfrm>
+          <a:prstGeom prst="ellipse">
+            <a:avLst/>
+          </a:prstGeom>
+          <a:solidFill>
+            <a:srgbClr val="FFD400"/>
+          </a:solidFill>
+          <a:ln/>
+        </p:spPr>
+      </p:sp>
+      <p:sp>
+        <p:nvSpPr>
+          <p:cNvPr id="7" name="Text 4"/>
+          <p:cNvSpPr/>
+          <p:nvPr/>
+        </p:nvSpPr>
+        <p:spPr>
+          <a:xfrm>
+            <a:off x="822960" y="2148840"/>
+            <a:ext cx="7315200" cy="457200"/>
           </a:xfrm>
           <a:prstGeom prst="rect">
             <a:avLst/>
@@ -3080,30 +3142,30 @@
               <a:buNone/>
             </a:pPr>
             <a:r>
-              <a:rPr lang="en-US" sz="4800" b="1" dirty="0">
-                <a:solidFill>
-                  <a:srgbClr val="FFFFFF"/>
+              <a:rPr lang="en-US" sz="2000" b="1" spc="600" kern="0" dirty="0">
+                <a:solidFill>
+                  <a:srgbClr val="FFD400"/>
                 </a:solidFill>
                 <a:latin typeface="Malgun Gothic" pitchFamily="34" charset="0"/>
                 <a:ea typeface="Malgun Gothic" pitchFamily="34" charset="-122"/>
                 <a:cs typeface="Malgun Gothic" pitchFamily="34" charset="-120"/>
               </a:rPr>
-              <a:t>이마트 AI 카메라 설치 매뉴얼</a:t>
-            </a:r>
-            <a:endParaRPr lang="en-US" sz="4800" dirty="0"/>
-          </a:p>
-        </p:txBody>
-      </p:sp>
-      <p:sp>
-        <p:nvSpPr>
-          <p:cNvPr id="5" name="Text 2"/>
-          <p:cNvSpPr/>
-          <p:nvPr/>
-        </p:nvSpPr>
-        <p:spPr>
-          <a:xfrm>
-            <a:off x="822960" y="3931920"/>
-            <a:ext cx="10515600" cy="548640"/>
+              <a:t>설치 매뉴얼</a:t>
+            </a:r>
+            <a:endParaRPr lang="en-US" sz="2000" dirty="0"/>
+          </a:p>
+        </p:txBody>
+      </p:sp>
+      <p:sp>
+        <p:nvSpPr>
+          <p:cNvPr id="8" name="Text 5"/>
+          <p:cNvSpPr/>
+          <p:nvPr/>
+        </p:nvSpPr>
+        <p:spPr>
+          <a:xfrm>
+            <a:off x="822960" y="2606040"/>
+            <a:ext cx="7498080" cy="2194560"/>
           </a:xfrm>
           <a:prstGeom prst="rect">
             <a:avLst/>
@@ -3116,12 +3178,74 @@
           <a:lstStyle/>
           <a:p>
             <a:pPr indent="0" marL="0">
-              <a:buNone/>
-            </a:pPr>
-            <a:r>
-              <a:rPr lang="en-US" sz="2200" dirty="0">
-                <a:solidFill>
-                  <a:srgbClr val="FFD400"/>
+              <a:lnSpc>
+                <a:spcPct val="115000"/>
+              </a:lnSpc>
+              <a:buNone/>
+            </a:pPr>
+            <a:r>
+              <a:rPr lang="en-US" sz="4600" dirty="0">
+                <a:solidFill>
+                  <a:srgbClr val="FFFFFF"/>
+                </a:solidFill>
+                <a:latin typeface="HY헤드라인M" pitchFamily="34" charset="0"/>
+                <a:ea typeface="HY헤드라인M" pitchFamily="34" charset="-122"/>
+                <a:cs typeface="HY헤드라인M" pitchFamily="34" charset="-120"/>
+              </a:rPr>
+              <a:t>이마트</a:t>
+            </a:r>
+            <a:endParaRPr lang="en-US" sz="4600" dirty="0"/>
+          </a:p>
+          <a:p>
+            <a:pPr indent="0" marL="0">
+              <a:lnSpc>
+                <a:spcPct val="115000"/>
+              </a:lnSpc>
+              <a:buNone/>
+            </a:pPr>
+            <a:r>
+              <a:rPr lang="en-US" sz="4600" dirty="0">
+                <a:solidFill>
+                  <a:srgbClr val="FFFFFF"/>
+                </a:solidFill>
+                <a:latin typeface="HY헤드라인M" pitchFamily="34" charset="0"/>
+                <a:ea typeface="HY헤드라인M" pitchFamily="34" charset="-122"/>
+                <a:cs typeface="HY헤드라인M" pitchFamily="34" charset="-120"/>
+              </a:rPr>
+              <a:t>AI 카메라 설치 매뉴얼</a:t>
+            </a:r>
+            <a:endParaRPr lang="en-US" sz="4600" dirty="0"/>
+          </a:p>
+        </p:txBody>
+      </p:sp>
+      <p:sp>
+        <p:nvSpPr>
+          <p:cNvPr id="9" name="Text 6"/>
+          <p:cNvSpPr/>
+          <p:nvPr/>
+        </p:nvSpPr>
+        <p:spPr>
+          <a:xfrm>
+            <a:off x="822960" y="4983480"/>
+            <a:ext cx="7498080" cy="548640"/>
+          </a:xfrm>
+          <a:prstGeom prst="rect">
+            <a:avLst/>
+          </a:prstGeom>
+          <a:noFill/>
+          <a:ln/>
+        </p:spPr>
+        <p:txBody>
+          <a:bodyPr wrap="square" lIns="0" tIns="0" rIns="0" bIns="0" rtlCol="0" anchor="ctr"/>
+          <a:lstStyle/>
+          <a:p>
+            <a:pPr indent="0" marL="0">
+              <a:buNone/>
+            </a:pPr>
+            <a:r>
+              <a:rPr lang="en-US" sz="1900" dirty="0">
+                <a:solidFill>
+                  <a:srgbClr val="CCCCCC"/>
                 </a:solidFill>
                 <a:latin typeface="Malgun Gothic" pitchFamily="34" charset="0"/>
                 <a:ea typeface="Malgun Gothic" pitchFamily="34" charset="-122"/>
@@ -3129,20 +3253,20 @@
               </a:rPr>
               <a:t>동선스크린 · 계산대미디어  |  단계별 설치 가이드</a:t>
             </a:r>
-            <a:endParaRPr lang="en-US" sz="2200" dirty="0"/>
-          </a:p>
-        </p:txBody>
-      </p:sp>
-      <p:sp>
-        <p:nvSpPr>
-          <p:cNvPr id="6" name="Text 3"/>
-          <p:cNvSpPr/>
-          <p:nvPr/>
-        </p:nvSpPr>
-        <p:spPr>
-          <a:xfrm>
-            <a:off x="822960" y="5943600"/>
-            <a:ext cx="10515600" cy="457200"/>
+            <a:endParaRPr lang="en-US" sz="1900" dirty="0"/>
+          </a:p>
+        </p:txBody>
+      </p:sp>
+      <p:sp>
+        <p:nvSpPr>
+          <p:cNvPr id="10" name="Text 7"/>
+          <p:cNvSpPr/>
+          <p:nvPr/>
+        </p:nvSpPr>
+        <p:spPr>
+          <a:xfrm>
+            <a:off x="822960" y="6035040"/>
+            <a:ext cx="7315200" cy="457200"/>
           </a:xfrm>
           <a:prstGeom prst="rect">
             <a:avLst/>
@@ -3160,7 +3284,7 @@
             <a:r>
               <a:rPr lang="en-US" sz="1400" dirty="0">
                 <a:solidFill>
-                  <a:srgbClr val="999999"/>
+                  <a:srgbClr val="888888"/>
                 </a:solidFill>
                 <a:latin typeface="Malgun Gothic" pitchFamily="34" charset="0"/>
                 <a:ea typeface="Malgun Gothic" pitchFamily="34" charset="-122"/>
@@ -3206,32 +3330,54 @@
       </p:grpSpPr>
       <p:sp>
         <p:nvSpPr>
-          <p:cNvPr id="2" name="Text 0"/>
-          <p:cNvSpPr/>
-          <p:nvPr/>
-        </p:nvSpPr>
-        <p:spPr>
-          <a:xfrm>
-            <a:off x="640080" y="365760"/>
-            <a:ext cx="7315200" cy="320040"/>
-          </a:xfrm>
-          <a:prstGeom prst="rect">
-            <a:avLst/>
-          </a:prstGeom>
-          <a:noFill/>
-          <a:ln/>
-        </p:spPr>
-        <p:txBody>
-          <a:bodyPr wrap="square" lIns="0" tIns="0" rIns="0" bIns="0" rtlCol="0" anchor="ctr"/>
-          <a:lstStyle/>
-          <a:p>
-            <a:pPr indent="0" marL="0">
-              <a:buNone/>
-            </a:pPr>
-            <a:r>
-              <a:rPr lang="en-US" sz="1500" b="1" dirty="0">
-                <a:solidFill>
-                  <a:srgbClr val="666666"/>
+          <p:cNvPr id="2" name="Shape 0"/>
+          <p:cNvSpPr/>
+          <p:nvPr/>
+        </p:nvSpPr>
+        <p:spPr>
+          <a:xfrm>
+            <a:off x="640080" y="347472"/>
+            <a:ext cx="2377440" cy="384048"/>
+          </a:xfrm>
+          <a:prstGeom prst="roundRect">
+            <a:avLst>
+              <a:gd name="adj" fmla="val 50000"/>
+            </a:avLst>
+          </a:prstGeom>
+          <a:solidFill>
+            <a:srgbClr val="FFD400"/>
+          </a:solidFill>
+          <a:ln/>
+        </p:spPr>
+      </p:sp>
+      <p:sp>
+        <p:nvSpPr>
+          <p:cNvPr id="3" name="Text 1"/>
+          <p:cNvSpPr/>
+          <p:nvPr/>
+        </p:nvSpPr>
+        <p:spPr>
+          <a:xfrm>
+            <a:off x="640080" y="347472"/>
+            <a:ext cx="2377440" cy="384048"/>
+          </a:xfrm>
+          <a:prstGeom prst="rect">
+            <a:avLst/>
+          </a:prstGeom>
+          <a:noFill/>
+          <a:ln/>
+        </p:spPr>
+        <p:txBody>
+          <a:bodyPr wrap="square" lIns="0" tIns="0" rIns="0" bIns="0" rtlCol="0" anchor="ctr"/>
+          <a:lstStyle/>
+          <a:p>
+            <a:pPr algn="ctr" indent="0" marL="0">
+              <a:buNone/>
+            </a:pPr>
+            <a:r>
+              <a:rPr lang="en-US" sz="1250" b="1" dirty="0">
+                <a:solidFill>
+                  <a:srgbClr val="1F1F1F"/>
                 </a:solidFill>
                 <a:latin typeface="Malgun Gothic" pitchFamily="34" charset="0"/>
                 <a:ea typeface="Malgun Gothic" pitchFamily="34" charset="-122"/>
@@ -3239,20 +3385,20 @@
               </a:rPr>
               <a:t>동선스크린 설치 방법</a:t>
             </a:r>
-            <a:endParaRPr lang="en-US" sz="1500" dirty="0"/>
-          </a:p>
-        </p:txBody>
-      </p:sp>
-      <p:sp>
-        <p:nvSpPr>
-          <p:cNvPr id="3" name="Text 1"/>
+            <a:endParaRPr lang="en-US" sz="1250" dirty="0"/>
+          </a:p>
+        </p:txBody>
+      </p:sp>
+      <p:sp>
+        <p:nvSpPr>
+          <p:cNvPr id="4" name="Text 2"/>
           <p:cNvSpPr/>
           <p:nvPr/>
         </p:nvSpPr>
         <p:spPr>
           <a:xfrm>
             <a:off x="9262872" y="365760"/>
-            <a:ext cx="2286000" cy="320040"/>
+            <a:ext cx="2286000" cy="365760"/>
           </a:xfrm>
           <a:prstGeom prst="rect">
             <a:avLst/>
@@ -3284,14 +3430,14 @@
       </p:sp>
       <p:sp>
         <p:nvSpPr>
-          <p:cNvPr id="4" name="Shape 2"/>
-          <p:cNvSpPr/>
-          <p:nvPr/>
-        </p:nvSpPr>
-        <p:spPr>
-          <a:xfrm>
-            <a:off x="640080" y="822960"/>
-            <a:ext cx="685800" cy="685800"/>
+          <p:cNvPr id="5" name="Shape 3"/>
+          <p:cNvSpPr/>
+          <p:nvPr/>
+        </p:nvSpPr>
+        <p:spPr>
+          <a:xfrm>
+            <a:off x="640080" y="914400"/>
+            <a:ext cx="731520" cy="731520"/>
           </a:xfrm>
           <a:prstGeom prst="ellipse">
             <a:avLst/>
@@ -3300,18 +3446,25 @@
             <a:srgbClr val="FFD400"/>
           </a:solidFill>
           <a:ln/>
-        </p:spPr>
-      </p:sp>
-      <p:sp>
-        <p:nvSpPr>
-          <p:cNvPr id="5" name="Text 3"/>
-          <p:cNvSpPr/>
-          <p:nvPr/>
-        </p:nvSpPr>
-        <p:spPr>
-          <a:xfrm>
-            <a:off x="640080" y="822960"/>
-            <a:ext cx="685800" cy="685800"/>
+          <a:effectLst>
+            <a:outerShdw sx="100000" sy="100000" kx="0" ky="0" algn="bl" rotWithShape="0" blurRad="114300" dist="38100" dir="5400000">
+              <a:srgbClr val="666666">
+                <a:alpha val="30000"/>
+              </a:srgbClr>
+            </a:outerShdw>
+          </a:effectLst>
+        </p:spPr>
+      </p:sp>
+      <p:sp>
+        <p:nvSpPr>
+          <p:cNvPr id="6" name="Text 4"/>
+          <p:cNvSpPr/>
+          <p:nvPr/>
+        </p:nvSpPr>
+        <p:spPr>
+          <a:xfrm>
+            <a:off x="640080" y="914400"/>
+            <a:ext cx="731520" cy="731520"/>
           </a:xfrm>
           <a:prstGeom prst="rect">
             <a:avLst/>
@@ -3327,30 +3480,30 @@
               <a:buNone/>
             </a:pPr>
             <a:r>
-              <a:rPr lang="en-US" sz="2600" b="1" dirty="0">
+              <a:rPr lang="en-US" sz="2400" dirty="0">
                 <a:solidFill>
                   <a:srgbClr val="1F1F1F"/>
                 </a:solidFill>
-                <a:latin typeface="Malgun Gothic" pitchFamily="34" charset="0"/>
-                <a:ea typeface="Malgun Gothic" pitchFamily="34" charset="-122"/>
-                <a:cs typeface="Malgun Gothic" pitchFamily="34" charset="-120"/>
+                <a:latin typeface="HY헤드라인M" pitchFamily="34" charset="0"/>
+                <a:ea typeface="HY헤드라인M" pitchFamily="34" charset="-122"/>
+                <a:cs typeface="HY헤드라인M" pitchFamily="34" charset="-120"/>
               </a:rPr>
               <a:t>6</a:t>
             </a:r>
-            <a:endParaRPr lang="en-US" sz="2600" dirty="0"/>
-          </a:p>
-        </p:txBody>
-      </p:sp>
-      <p:sp>
-        <p:nvSpPr>
-          <p:cNvPr id="6" name="Text 4"/>
-          <p:cNvSpPr/>
-          <p:nvPr/>
-        </p:nvSpPr>
-        <p:spPr>
-          <a:xfrm>
-            <a:off x="1554480" y="822960"/>
-            <a:ext cx="10424160" cy="685800"/>
+            <a:endParaRPr lang="en-US" sz="2400" dirty="0"/>
+          </a:p>
+        </p:txBody>
+      </p:sp>
+      <p:sp>
+        <p:nvSpPr>
+          <p:cNvPr id="7" name="Text 5"/>
+          <p:cNvSpPr/>
+          <p:nvPr/>
+        </p:nvSpPr>
+        <p:spPr>
+          <a:xfrm>
+            <a:off x="1645920" y="914400"/>
+            <a:ext cx="10241280" cy="731520"/>
           </a:xfrm>
           <a:prstGeom prst="rect">
             <a:avLst/>
@@ -3366,23 +3519,50 @@
               <a:buNone/>
             </a:pPr>
             <a:r>
-              <a:rPr lang="en-US" sz="2400" b="1" dirty="0">
+              <a:rPr lang="en-US" sz="2400" dirty="0">
                 <a:solidFill>
                   <a:srgbClr val="222222"/>
                 </a:solidFill>
-                <a:latin typeface="Malgun Gothic" pitchFamily="34" charset="0"/>
-                <a:ea typeface="Malgun Gothic" pitchFamily="34" charset="-122"/>
-                <a:cs typeface="Malgun Gothic" pitchFamily="34" charset="-120"/>
+                <a:latin typeface="HY헤드라인M" pitchFamily="34" charset="0"/>
+                <a:ea typeface="HY헤드라인M" pitchFamily="34" charset="-122"/>
+                <a:cs typeface="HY헤드라인M" pitchFamily="34" charset="-120"/>
               </a:rPr>
               <a:t>AI 카메라 설정 ② — 화각 확인</a:t>
             </a:r>
             <a:endParaRPr lang="en-US" sz="2400" dirty="0"/>
           </a:p>
         </p:txBody>
+      </p:sp>
+      <p:sp>
+        <p:nvSpPr>
+          <p:cNvPr id="8" name="Shape 6"/>
+          <p:cNvSpPr/>
+          <p:nvPr/>
+        </p:nvSpPr>
+        <p:spPr>
+          <a:xfrm>
+            <a:off x="516636" y="2162429"/>
+            <a:ext cx="5479946" cy="3127503"/>
+          </a:xfrm>
+          <a:prstGeom prst="rect">
+            <a:avLst/>
+          </a:prstGeom>
+          <a:solidFill>
+            <a:srgbClr val="FFFFFF"/>
+          </a:solidFill>
+          <a:ln/>
+          <a:effectLst>
+            <a:outerShdw sx="100000" sy="100000" kx="0" ky="0" algn="bl" rotWithShape="0" blurRad="114300" dist="38100" dir="5400000">
+              <a:srgbClr val="666666">
+                <a:alpha val="30000"/>
+              </a:srgbClr>
+            </a:outerShdw>
+          </a:effectLst>
+        </p:spPr>
       </p:sp>
       <p:pic>
         <p:nvPicPr>
-          <p:cNvPr id="7" name="Image 0" descr="/tmp/claude-0/-home-user-ars/e10980de-cf93-514e-8d8f-658883089fc8/scratchpad/photos/b2.jpg">    </p:cNvPr>
+          <p:cNvPr id="9" name="Image 0" descr="/tmp/claude-0/-home-user-ars/e10980de-cf93-514e-8d8f-658883089fc8/scratchpad/photos/b2.jpg">    </p:cNvPr>
           <p:cNvPicPr>
             <a:picLocks noChangeAspect="1"/>
           </p:cNvPicPr>
@@ -3406,7 +3586,7 @@
       </p:pic>
       <p:sp>
         <p:nvSpPr>
-          <p:cNvPr id="8" name="Shape 5"/>
+          <p:cNvPr id="10" name="Shape 7"/>
           <p:cNvSpPr/>
           <p:nvPr/>
         </p:nvSpPr>
@@ -3430,7 +3610,7 @@
       </p:sp>
       <p:sp>
         <p:nvSpPr>
-          <p:cNvPr id="9" name="Text 6"/>
+          <p:cNvPr id="11" name="Text 8"/>
           <p:cNvSpPr/>
           <p:nvPr/>
         </p:nvSpPr>
@@ -3467,9 +3647,36 @@
           </a:p>
         </p:txBody>
       </p:sp>
+      <p:sp>
+        <p:nvSpPr>
+          <p:cNvPr id="12" name="Shape 9"/>
+          <p:cNvSpPr/>
+          <p:nvPr/>
+        </p:nvSpPr>
+        <p:spPr>
+          <a:xfrm>
+            <a:off x="6270902" y="2162429"/>
+            <a:ext cx="5401414" cy="3127503"/>
+          </a:xfrm>
+          <a:prstGeom prst="rect">
+            <a:avLst/>
+          </a:prstGeom>
+          <a:solidFill>
+            <a:srgbClr val="FFFFFF"/>
+          </a:solidFill>
+          <a:ln/>
+          <a:effectLst>
+            <a:outerShdw sx="100000" sy="100000" kx="0" ky="0" algn="bl" rotWithShape="0" blurRad="114300" dist="38100" dir="5400000">
+              <a:srgbClr val="666666">
+                <a:alpha val="30000"/>
+              </a:srgbClr>
+            </a:outerShdw>
+          </a:effectLst>
+        </p:spPr>
+      </p:sp>
       <p:pic>
         <p:nvPicPr>
-          <p:cNvPr id="10" name="Image 1" descr="/tmp/claude-0/-home-user-ars/e10980de-cf93-514e-8d8f-658883089fc8/scratchpad/photos/b3.jpg">    </p:cNvPr>
+          <p:cNvPr id="13" name="Image 1" descr="/tmp/claude-0/-home-user-ars/e10980de-cf93-514e-8d8f-658883089fc8/scratchpad/photos/b3.jpg">    </p:cNvPr>
           <p:cNvPicPr>
             <a:picLocks noChangeAspect="1"/>
           </p:cNvPicPr>
@@ -3493,7 +3700,7 @@
       </p:pic>
       <p:sp>
         <p:nvSpPr>
-          <p:cNvPr id="11" name="Shape 7"/>
+          <p:cNvPr id="14" name="Shape 10"/>
           <p:cNvSpPr/>
           <p:nvPr/>
         </p:nvSpPr>
@@ -3517,7 +3724,7 @@
       </p:sp>
       <p:sp>
         <p:nvSpPr>
-          <p:cNvPr id="12" name="Text 8"/>
+          <p:cNvPr id="15" name="Text 11"/>
           <p:cNvSpPr/>
           <p:nvPr/>
         </p:nvSpPr>
@@ -3556,7 +3763,7 @@
       </p:sp>
       <p:sp>
         <p:nvSpPr>
-          <p:cNvPr id="13" name="Text 9"/>
+          <p:cNvPr id="16" name="Text 12"/>
           <p:cNvSpPr/>
           <p:nvPr/>
         </p:nvSpPr>
@@ -3630,32 +3837,54 @@
       </p:grpSpPr>
       <p:sp>
         <p:nvSpPr>
-          <p:cNvPr id="2" name="Text 0"/>
-          <p:cNvSpPr/>
-          <p:nvPr/>
-        </p:nvSpPr>
-        <p:spPr>
-          <a:xfrm>
-            <a:off x="640080" y="365760"/>
-            <a:ext cx="7315200" cy="320040"/>
-          </a:xfrm>
-          <a:prstGeom prst="rect">
-            <a:avLst/>
-          </a:prstGeom>
-          <a:noFill/>
-          <a:ln/>
-        </p:spPr>
-        <p:txBody>
-          <a:bodyPr wrap="square" lIns="0" tIns="0" rIns="0" bIns="0" rtlCol="0" anchor="ctr"/>
-          <a:lstStyle/>
-          <a:p>
-            <a:pPr indent="0" marL="0">
-              <a:buNone/>
-            </a:pPr>
-            <a:r>
-              <a:rPr lang="en-US" sz="1500" b="1" dirty="0">
-                <a:solidFill>
-                  <a:srgbClr val="666666"/>
+          <p:cNvPr id="2" name="Shape 0"/>
+          <p:cNvSpPr/>
+          <p:nvPr/>
+        </p:nvSpPr>
+        <p:spPr>
+          <a:xfrm>
+            <a:off x="640080" y="347472"/>
+            <a:ext cx="2377440" cy="384048"/>
+          </a:xfrm>
+          <a:prstGeom prst="roundRect">
+            <a:avLst>
+              <a:gd name="adj" fmla="val 50000"/>
+            </a:avLst>
+          </a:prstGeom>
+          <a:solidFill>
+            <a:srgbClr val="FFD400"/>
+          </a:solidFill>
+          <a:ln/>
+        </p:spPr>
+      </p:sp>
+      <p:sp>
+        <p:nvSpPr>
+          <p:cNvPr id="3" name="Text 1"/>
+          <p:cNvSpPr/>
+          <p:nvPr/>
+        </p:nvSpPr>
+        <p:spPr>
+          <a:xfrm>
+            <a:off x="640080" y="347472"/>
+            <a:ext cx="2377440" cy="384048"/>
+          </a:xfrm>
+          <a:prstGeom prst="rect">
+            <a:avLst/>
+          </a:prstGeom>
+          <a:noFill/>
+          <a:ln/>
+        </p:spPr>
+        <p:txBody>
+          <a:bodyPr wrap="square" lIns="0" tIns="0" rIns="0" bIns="0" rtlCol="0" anchor="ctr"/>
+          <a:lstStyle/>
+          <a:p>
+            <a:pPr algn="ctr" indent="0" marL="0">
+              <a:buNone/>
+            </a:pPr>
+            <a:r>
+              <a:rPr lang="en-US" sz="1250" b="1" dirty="0">
+                <a:solidFill>
+                  <a:srgbClr val="1F1F1F"/>
                 </a:solidFill>
                 <a:latin typeface="Malgun Gothic" pitchFamily="34" charset="0"/>
                 <a:ea typeface="Malgun Gothic" pitchFamily="34" charset="-122"/>
@@ -3663,20 +3892,20 @@
               </a:rPr>
               <a:t>동선스크린 설치 방법</a:t>
             </a:r>
-            <a:endParaRPr lang="en-US" sz="1500" dirty="0"/>
-          </a:p>
-        </p:txBody>
-      </p:sp>
-      <p:sp>
-        <p:nvSpPr>
-          <p:cNvPr id="3" name="Text 1"/>
+            <a:endParaRPr lang="en-US" sz="1250" dirty="0"/>
+          </a:p>
+        </p:txBody>
+      </p:sp>
+      <p:sp>
+        <p:nvSpPr>
+          <p:cNvPr id="4" name="Text 2"/>
           <p:cNvSpPr/>
           <p:nvPr/>
         </p:nvSpPr>
         <p:spPr>
           <a:xfrm>
             <a:off x="9262872" y="365760"/>
-            <a:ext cx="2286000" cy="320040"/>
+            <a:ext cx="2286000" cy="365760"/>
           </a:xfrm>
           <a:prstGeom prst="rect">
             <a:avLst/>
@@ -3708,14 +3937,14 @@
       </p:sp>
       <p:sp>
         <p:nvSpPr>
-          <p:cNvPr id="4" name="Shape 2"/>
-          <p:cNvSpPr/>
-          <p:nvPr/>
-        </p:nvSpPr>
-        <p:spPr>
-          <a:xfrm>
-            <a:off x="640080" y="822960"/>
-            <a:ext cx="685800" cy="685800"/>
+          <p:cNvPr id="5" name="Shape 3"/>
+          <p:cNvSpPr/>
+          <p:nvPr/>
+        </p:nvSpPr>
+        <p:spPr>
+          <a:xfrm>
+            <a:off x="640080" y="914400"/>
+            <a:ext cx="731520" cy="731520"/>
           </a:xfrm>
           <a:prstGeom prst="ellipse">
             <a:avLst/>
@@ -3724,18 +3953,25 @@
             <a:srgbClr val="FFD400"/>
           </a:solidFill>
           <a:ln/>
-        </p:spPr>
-      </p:sp>
-      <p:sp>
-        <p:nvSpPr>
-          <p:cNvPr id="5" name="Text 3"/>
-          <p:cNvSpPr/>
-          <p:nvPr/>
-        </p:nvSpPr>
-        <p:spPr>
-          <a:xfrm>
-            <a:off x="640080" y="822960"/>
-            <a:ext cx="685800" cy="685800"/>
+          <a:effectLst>
+            <a:outerShdw sx="100000" sy="100000" kx="0" ky="0" algn="bl" rotWithShape="0" blurRad="114300" dist="38100" dir="5400000">
+              <a:srgbClr val="666666">
+                <a:alpha val="30000"/>
+              </a:srgbClr>
+            </a:outerShdw>
+          </a:effectLst>
+        </p:spPr>
+      </p:sp>
+      <p:sp>
+        <p:nvSpPr>
+          <p:cNvPr id="6" name="Text 4"/>
+          <p:cNvSpPr/>
+          <p:nvPr/>
+        </p:nvSpPr>
+        <p:spPr>
+          <a:xfrm>
+            <a:off x="640080" y="914400"/>
+            <a:ext cx="731520" cy="731520"/>
           </a:xfrm>
           <a:prstGeom prst="rect">
             <a:avLst/>
@@ -3751,30 +3987,30 @@
               <a:buNone/>
             </a:pPr>
             <a:r>
-              <a:rPr lang="en-US" sz="2600" b="1" dirty="0">
+              <a:rPr lang="en-US" sz="2400" dirty="0">
                 <a:solidFill>
                   <a:srgbClr val="1F1F1F"/>
                 </a:solidFill>
-                <a:latin typeface="Malgun Gothic" pitchFamily="34" charset="0"/>
-                <a:ea typeface="Malgun Gothic" pitchFamily="34" charset="-122"/>
-                <a:cs typeface="Malgun Gothic" pitchFamily="34" charset="-120"/>
+                <a:latin typeface="HY헤드라인M" pitchFamily="34" charset="0"/>
+                <a:ea typeface="HY헤드라인M" pitchFamily="34" charset="-122"/>
+                <a:cs typeface="HY헤드라인M" pitchFamily="34" charset="-120"/>
               </a:rPr>
               <a:t>7</a:t>
             </a:r>
-            <a:endParaRPr lang="en-US" sz="2600" dirty="0"/>
-          </a:p>
-        </p:txBody>
-      </p:sp>
-      <p:sp>
-        <p:nvSpPr>
-          <p:cNvPr id="6" name="Text 4"/>
-          <p:cNvSpPr/>
-          <p:nvPr/>
-        </p:nvSpPr>
-        <p:spPr>
-          <a:xfrm>
-            <a:off x="1554480" y="822960"/>
-            <a:ext cx="10424160" cy="685800"/>
+            <a:endParaRPr lang="en-US" sz="2400" dirty="0"/>
+          </a:p>
+        </p:txBody>
+      </p:sp>
+      <p:sp>
+        <p:nvSpPr>
+          <p:cNvPr id="7" name="Text 5"/>
+          <p:cNvSpPr/>
+          <p:nvPr/>
+        </p:nvSpPr>
+        <p:spPr>
+          <a:xfrm>
+            <a:off x="1645920" y="914400"/>
+            <a:ext cx="10241280" cy="731520"/>
           </a:xfrm>
           <a:prstGeom prst="rect">
             <a:avLst/>
@@ -3790,23 +4026,50 @@
               <a:buNone/>
             </a:pPr>
             <a:r>
-              <a:rPr lang="en-US" sz="2400" b="1" dirty="0">
+              <a:rPr lang="en-US" sz="2400" dirty="0">
                 <a:solidFill>
                   <a:srgbClr val="222222"/>
                 </a:solidFill>
-                <a:latin typeface="Malgun Gothic" pitchFamily="34" charset="0"/>
-                <a:ea typeface="Malgun Gothic" pitchFamily="34" charset="-122"/>
-                <a:cs typeface="Malgun Gothic" pitchFamily="34" charset="-120"/>
+                <a:latin typeface="HY헤드라인M" pitchFamily="34" charset="0"/>
+                <a:ea typeface="HY헤드라인M" pitchFamily="34" charset="-122"/>
+                <a:cs typeface="HY헤드라인M" pitchFamily="34" charset="-120"/>
               </a:rPr>
               <a:t>AI 카메라 부착 — 위치 확인</a:t>
             </a:r>
             <a:endParaRPr lang="en-US" sz="2400" dirty="0"/>
           </a:p>
         </p:txBody>
+      </p:sp>
+      <p:sp>
+        <p:nvSpPr>
+          <p:cNvPr id="8" name="Shape 6"/>
+          <p:cNvSpPr/>
+          <p:nvPr/>
+        </p:nvSpPr>
+        <p:spPr>
+          <a:xfrm>
+            <a:off x="2705899" y="1783080"/>
+            <a:ext cx="6777154" cy="3886200"/>
+          </a:xfrm>
+          <a:prstGeom prst="rect">
+            <a:avLst/>
+          </a:prstGeom>
+          <a:solidFill>
+            <a:srgbClr val="FFFFFF"/>
+          </a:solidFill>
+          <a:ln/>
+          <a:effectLst>
+            <a:outerShdw sx="100000" sy="100000" kx="0" ky="0" algn="bl" rotWithShape="0" blurRad="114300" dist="38100" dir="5400000">
+              <a:srgbClr val="666666">
+                <a:alpha val="30000"/>
+              </a:srgbClr>
+            </a:outerShdw>
+          </a:effectLst>
+        </p:spPr>
       </p:sp>
       <p:pic>
         <p:nvPicPr>
-          <p:cNvPr id="7" name="Image 0" descr="/tmp/claude-0/-home-user-ars/e10980de-cf93-514e-8d8f-658883089fc8/scratchpad/photos/b8.jpg">    </p:cNvPr>
+          <p:cNvPr id="9" name="Image 0" descr="/tmp/claude-0/-home-user-ars/e10980de-cf93-514e-8d8f-658883089fc8/scratchpad/photos/b8.jpg">    </p:cNvPr>
           <p:cNvPicPr>
             <a:picLocks noChangeAspect="1"/>
           </p:cNvPicPr>
@@ -3830,7 +4093,7 @@
       </p:pic>
       <p:sp>
         <p:nvSpPr>
-          <p:cNvPr id="8" name="Shape 5"/>
+          <p:cNvPr id="10" name="Shape 7"/>
           <p:cNvSpPr/>
           <p:nvPr/>
         </p:nvSpPr>
@@ -3852,7 +4115,7 @@
       </p:sp>
       <p:sp>
         <p:nvSpPr>
-          <p:cNvPr id="9" name="Text 6"/>
+          <p:cNvPr id="11" name="Text 8"/>
           <p:cNvSpPr/>
           <p:nvPr/>
         </p:nvSpPr>
@@ -3926,32 +4189,54 @@
       </p:grpSpPr>
       <p:sp>
         <p:nvSpPr>
-          <p:cNvPr id="2" name="Text 0"/>
-          <p:cNvSpPr/>
-          <p:nvPr/>
-        </p:nvSpPr>
-        <p:spPr>
-          <a:xfrm>
-            <a:off x="640080" y="365760"/>
-            <a:ext cx="7315200" cy="320040"/>
-          </a:xfrm>
-          <a:prstGeom prst="rect">
-            <a:avLst/>
-          </a:prstGeom>
-          <a:noFill/>
-          <a:ln/>
-        </p:spPr>
-        <p:txBody>
-          <a:bodyPr wrap="square" lIns="0" tIns="0" rIns="0" bIns="0" rtlCol="0" anchor="ctr"/>
-          <a:lstStyle/>
-          <a:p>
-            <a:pPr indent="0" marL="0">
-              <a:buNone/>
-            </a:pPr>
-            <a:r>
-              <a:rPr lang="en-US" sz="1500" b="1" dirty="0">
-                <a:solidFill>
-                  <a:srgbClr val="666666"/>
+          <p:cNvPr id="2" name="Shape 0"/>
+          <p:cNvSpPr/>
+          <p:nvPr/>
+        </p:nvSpPr>
+        <p:spPr>
+          <a:xfrm>
+            <a:off x="640080" y="347472"/>
+            <a:ext cx="2377440" cy="384048"/>
+          </a:xfrm>
+          <a:prstGeom prst="roundRect">
+            <a:avLst>
+              <a:gd name="adj" fmla="val 50000"/>
+            </a:avLst>
+          </a:prstGeom>
+          <a:solidFill>
+            <a:srgbClr val="FFD400"/>
+          </a:solidFill>
+          <a:ln/>
+        </p:spPr>
+      </p:sp>
+      <p:sp>
+        <p:nvSpPr>
+          <p:cNvPr id="3" name="Text 1"/>
+          <p:cNvSpPr/>
+          <p:nvPr/>
+        </p:nvSpPr>
+        <p:spPr>
+          <a:xfrm>
+            <a:off x="640080" y="347472"/>
+            <a:ext cx="2377440" cy="384048"/>
+          </a:xfrm>
+          <a:prstGeom prst="rect">
+            <a:avLst/>
+          </a:prstGeom>
+          <a:noFill/>
+          <a:ln/>
+        </p:spPr>
+        <p:txBody>
+          <a:bodyPr wrap="square" lIns="0" tIns="0" rIns="0" bIns="0" rtlCol="0" anchor="ctr"/>
+          <a:lstStyle/>
+          <a:p>
+            <a:pPr algn="ctr" indent="0" marL="0">
+              <a:buNone/>
+            </a:pPr>
+            <a:r>
+              <a:rPr lang="en-US" sz="1250" b="1" dirty="0">
+                <a:solidFill>
+                  <a:srgbClr val="1F1F1F"/>
                 </a:solidFill>
                 <a:latin typeface="Malgun Gothic" pitchFamily="34" charset="0"/>
                 <a:ea typeface="Malgun Gothic" pitchFamily="34" charset="-122"/>
@@ -3959,20 +4244,20 @@
               </a:rPr>
               <a:t>동선스크린 설치 방법</a:t>
             </a:r>
-            <a:endParaRPr lang="en-US" sz="1500" dirty="0"/>
-          </a:p>
-        </p:txBody>
-      </p:sp>
-      <p:sp>
-        <p:nvSpPr>
-          <p:cNvPr id="3" name="Text 1"/>
+            <a:endParaRPr lang="en-US" sz="1250" dirty="0"/>
+          </a:p>
+        </p:txBody>
+      </p:sp>
+      <p:sp>
+        <p:nvSpPr>
+          <p:cNvPr id="4" name="Text 2"/>
           <p:cNvSpPr/>
           <p:nvPr/>
         </p:nvSpPr>
         <p:spPr>
           <a:xfrm>
             <a:off x="9262872" y="365760"/>
-            <a:ext cx="2286000" cy="320040"/>
+            <a:ext cx="2286000" cy="365760"/>
           </a:xfrm>
           <a:prstGeom prst="rect">
             <a:avLst/>
@@ -4004,14 +4289,14 @@
       </p:sp>
       <p:sp>
         <p:nvSpPr>
-          <p:cNvPr id="4" name="Shape 2"/>
-          <p:cNvSpPr/>
-          <p:nvPr/>
-        </p:nvSpPr>
-        <p:spPr>
-          <a:xfrm>
-            <a:off x="640080" y="822960"/>
-            <a:ext cx="685800" cy="685800"/>
+          <p:cNvPr id="5" name="Shape 3"/>
+          <p:cNvSpPr/>
+          <p:nvPr/>
+        </p:nvSpPr>
+        <p:spPr>
+          <a:xfrm>
+            <a:off x="640080" y="914400"/>
+            <a:ext cx="731520" cy="731520"/>
           </a:xfrm>
           <a:prstGeom prst="ellipse">
             <a:avLst/>
@@ -4020,18 +4305,25 @@
             <a:srgbClr val="FFD400"/>
           </a:solidFill>
           <a:ln/>
-        </p:spPr>
-      </p:sp>
-      <p:sp>
-        <p:nvSpPr>
-          <p:cNvPr id="5" name="Text 3"/>
-          <p:cNvSpPr/>
-          <p:nvPr/>
-        </p:nvSpPr>
-        <p:spPr>
-          <a:xfrm>
-            <a:off x="640080" y="822960"/>
-            <a:ext cx="685800" cy="685800"/>
+          <a:effectLst>
+            <a:outerShdw sx="100000" sy="100000" kx="0" ky="0" algn="bl" rotWithShape="0" blurRad="114300" dist="38100" dir="5400000">
+              <a:srgbClr val="666666">
+                <a:alpha val="30000"/>
+              </a:srgbClr>
+            </a:outerShdw>
+          </a:effectLst>
+        </p:spPr>
+      </p:sp>
+      <p:sp>
+        <p:nvSpPr>
+          <p:cNvPr id="6" name="Text 4"/>
+          <p:cNvSpPr/>
+          <p:nvPr/>
+        </p:nvSpPr>
+        <p:spPr>
+          <a:xfrm>
+            <a:off x="640080" y="914400"/>
+            <a:ext cx="731520" cy="731520"/>
           </a:xfrm>
           <a:prstGeom prst="rect">
             <a:avLst/>
@@ -4047,30 +4339,30 @@
               <a:buNone/>
             </a:pPr>
             <a:r>
-              <a:rPr lang="en-US" sz="2600" b="1" dirty="0">
+              <a:rPr lang="en-US" sz="2400" dirty="0">
                 <a:solidFill>
                   <a:srgbClr val="1F1F1F"/>
                 </a:solidFill>
-                <a:latin typeface="Malgun Gothic" pitchFamily="34" charset="0"/>
-                <a:ea typeface="Malgun Gothic" pitchFamily="34" charset="-122"/>
-                <a:cs typeface="Malgun Gothic" pitchFamily="34" charset="-120"/>
+                <a:latin typeface="HY헤드라인M" pitchFamily="34" charset="0"/>
+                <a:ea typeface="HY헤드라인M" pitchFamily="34" charset="-122"/>
+                <a:cs typeface="HY헤드라인M" pitchFamily="34" charset="-120"/>
               </a:rPr>
               <a:t>7</a:t>
             </a:r>
-            <a:endParaRPr lang="en-US" sz="2600" dirty="0"/>
-          </a:p>
-        </p:txBody>
-      </p:sp>
-      <p:sp>
-        <p:nvSpPr>
-          <p:cNvPr id="6" name="Text 4"/>
-          <p:cNvSpPr/>
-          <p:nvPr/>
-        </p:nvSpPr>
-        <p:spPr>
-          <a:xfrm>
-            <a:off x="1554480" y="822960"/>
-            <a:ext cx="10424160" cy="685800"/>
+            <a:endParaRPr lang="en-US" sz="2400" dirty="0"/>
+          </a:p>
+        </p:txBody>
+      </p:sp>
+      <p:sp>
+        <p:nvSpPr>
+          <p:cNvPr id="7" name="Text 5"/>
+          <p:cNvSpPr/>
+          <p:nvPr/>
+        </p:nvSpPr>
+        <p:spPr>
+          <a:xfrm>
+            <a:off x="1645920" y="914400"/>
+            <a:ext cx="10241280" cy="731520"/>
           </a:xfrm>
           <a:prstGeom prst="rect">
             <a:avLst/>
@@ -4086,23 +4378,50 @@
               <a:buNone/>
             </a:pPr>
             <a:r>
-              <a:rPr lang="en-US" sz="2400" b="1" dirty="0">
+              <a:rPr lang="en-US" sz="2400" dirty="0">
                 <a:solidFill>
                   <a:srgbClr val="222222"/>
                 </a:solidFill>
-                <a:latin typeface="Malgun Gothic" pitchFamily="34" charset="0"/>
-                <a:ea typeface="Malgun Gothic" pitchFamily="34" charset="-122"/>
-                <a:cs typeface="Malgun Gothic" pitchFamily="34" charset="-120"/>
+                <a:latin typeface="HY헤드라인M" pitchFamily="34" charset="0"/>
+                <a:ea typeface="HY헤드라인M" pitchFamily="34" charset="-122"/>
+                <a:cs typeface="HY헤드라인M" pitchFamily="34" charset="-120"/>
               </a:rPr>
               <a:t>AI 카메라 부착</a:t>
             </a:r>
             <a:endParaRPr lang="en-US" sz="2400" dirty="0"/>
           </a:p>
         </p:txBody>
+      </p:sp>
+      <p:sp>
+        <p:nvSpPr>
+          <p:cNvPr id="8" name="Shape 6"/>
+          <p:cNvSpPr/>
+          <p:nvPr/>
+        </p:nvSpPr>
+        <p:spPr>
+          <a:xfrm>
+            <a:off x="1257640" y="1783080"/>
+            <a:ext cx="2185988" cy="3886200"/>
+          </a:xfrm>
+          <a:prstGeom prst="rect">
+            <a:avLst/>
+          </a:prstGeom>
+          <a:solidFill>
+            <a:srgbClr val="FFFFFF"/>
+          </a:solidFill>
+          <a:ln/>
+          <a:effectLst>
+            <a:outerShdw sx="100000" sy="100000" kx="0" ky="0" algn="bl" rotWithShape="0" blurRad="114300" dist="38100" dir="5400000">
+              <a:srgbClr val="666666">
+                <a:alpha val="30000"/>
+              </a:srgbClr>
+            </a:outerShdw>
+          </a:effectLst>
+        </p:spPr>
       </p:sp>
       <p:pic>
         <p:nvPicPr>
-          <p:cNvPr id="7" name="Image 0" descr="/tmp/claude-0/-home-user-ars/e10980de-cf93-514e-8d8f-658883089fc8/scratchpad/photos/a3.jpg">    </p:cNvPr>
+          <p:cNvPr id="9" name="Image 0" descr="/tmp/claude-0/-home-user-ars/e10980de-cf93-514e-8d8f-658883089fc8/scratchpad/photos/a3.jpg">    </p:cNvPr>
           <p:cNvPicPr>
             <a:picLocks noChangeAspect="1"/>
           </p:cNvPicPr>
@@ -4126,7 +4445,7 @@
       </p:pic>
       <p:sp>
         <p:nvSpPr>
-          <p:cNvPr id="8" name="Shape 5"/>
+          <p:cNvPr id="10" name="Shape 7"/>
           <p:cNvSpPr/>
           <p:nvPr/>
         </p:nvSpPr>
@@ -4150,7 +4469,7 @@
       </p:sp>
       <p:sp>
         <p:nvSpPr>
-          <p:cNvPr id="9" name="Text 6"/>
+          <p:cNvPr id="11" name="Text 8"/>
           <p:cNvSpPr/>
           <p:nvPr/>
         </p:nvSpPr>
@@ -4187,9 +4506,36 @@
           </a:p>
         </p:txBody>
       </p:sp>
+      <p:sp>
+        <p:nvSpPr>
+          <p:cNvPr id="12" name="Shape 9"/>
+          <p:cNvSpPr/>
+          <p:nvPr/>
+        </p:nvSpPr>
+        <p:spPr>
+          <a:xfrm>
+            <a:off x="3717948" y="1783080"/>
+            <a:ext cx="7213364" cy="3886200"/>
+          </a:xfrm>
+          <a:prstGeom prst="rect">
+            <a:avLst/>
+          </a:prstGeom>
+          <a:solidFill>
+            <a:srgbClr val="FFFFFF"/>
+          </a:solidFill>
+          <a:ln/>
+          <a:effectLst>
+            <a:outerShdw sx="100000" sy="100000" kx="0" ky="0" algn="bl" rotWithShape="0" blurRad="114300" dist="38100" dir="5400000">
+              <a:srgbClr val="666666">
+                <a:alpha val="30000"/>
+              </a:srgbClr>
+            </a:outerShdw>
+          </a:effectLst>
+        </p:spPr>
+      </p:sp>
       <p:pic>
         <p:nvPicPr>
-          <p:cNvPr id="10" name="Image 1" descr="/tmp/claude-0/-home-user-ars/e10980de-cf93-514e-8d8f-658883089fc8/scratchpad/photos/b7.jpg">    </p:cNvPr>
+          <p:cNvPr id="13" name="Image 1" descr="/tmp/claude-0/-home-user-ars/e10980de-cf93-514e-8d8f-658883089fc8/scratchpad/photos/b7.jpg">    </p:cNvPr>
           <p:cNvPicPr>
             <a:picLocks noChangeAspect="1"/>
           </p:cNvPicPr>
@@ -4213,7 +4559,7 @@
       </p:pic>
       <p:sp>
         <p:nvSpPr>
-          <p:cNvPr id="11" name="Shape 7"/>
+          <p:cNvPr id="14" name="Shape 10"/>
           <p:cNvSpPr/>
           <p:nvPr/>
         </p:nvSpPr>
@@ -4237,7 +4583,7 @@
       </p:sp>
       <p:sp>
         <p:nvSpPr>
-          <p:cNvPr id="12" name="Text 8"/>
+          <p:cNvPr id="15" name="Text 11"/>
           <p:cNvSpPr/>
           <p:nvPr/>
         </p:nvSpPr>
@@ -4276,7 +4622,7 @@
       </p:sp>
       <p:sp>
         <p:nvSpPr>
-          <p:cNvPr id="13" name="Text 9"/>
+          <p:cNvPr id="16" name="Text 12"/>
           <p:cNvSpPr/>
           <p:nvPr/>
         </p:nvSpPr>
@@ -4350,32 +4696,54 @@
       </p:grpSpPr>
       <p:sp>
         <p:nvSpPr>
-          <p:cNvPr id="2" name="Text 0"/>
-          <p:cNvSpPr/>
-          <p:nvPr/>
-        </p:nvSpPr>
-        <p:spPr>
-          <a:xfrm>
-            <a:off x="640080" y="365760"/>
-            <a:ext cx="7315200" cy="320040"/>
-          </a:xfrm>
-          <a:prstGeom prst="rect">
-            <a:avLst/>
-          </a:prstGeom>
-          <a:noFill/>
-          <a:ln/>
-        </p:spPr>
-        <p:txBody>
-          <a:bodyPr wrap="square" lIns="0" tIns="0" rIns="0" bIns="0" rtlCol="0" anchor="ctr"/>
-          <a:lstStyle/>
-          <a:p>
-            <a:pPr indent="0" marL="0">
-              <a:buNone/>
-            </a:pPr>
-            <a:r>
-              <a:rPr lang="en-US" sz="1500" b="1" dirty="0">
-                <a:solidFill>
-                  <a:srgbClr val="666666"/>
+          <p:cNvPr id="2" name="Shape 0"/>
+          <p:cNvSpPr/>
+          <p:nvPr/>
+        </p:nvSpPr>
+        <p:spPr>
+          <a:xfrm>
+            <a:off x="640080" y="347472"/>
+            <a:ext cx="2377440" cy="384048"/>
+          </a:xfrm>
+          <a:prstGeom prst="roundRect">
+            <a:avLst>
+              <a:gd name="adj" fmla="val 50000"/>
+            </a:avLst>
+          </a:prstGeom>
+          <a:solidFill>
+            <a:srgbClr val="FFD400"/>
+          </a:solidFill>
+          <a:ln/>
+        </p:spPr>
+      </p:sp>
+      <p:sp>
+        <p:nvSpPr>
+          <p:cNvPr id="3" name="Text 1"/>
+          <p:cNvSpPr/>
+          <p:nvPr/>
+        </p:nvSpPr>
+        <p:spPr>
+          <a:xfrm>
+            <a:off x="640080" y="347472"/>
+            <a:ext cx="2377440" cy="384048"/>
+          </a:xfrm>
+          <a:prstGeom prst="rect">
+            <a:avLst/>
+          </a:prstGeom>
+          <a:noFill/>
+          <a:ln/>
+        </p:spPr>
+        <p:txBody>
+          <a:bodyPr wrap="square" lIns="0" tIns="0" rIns="0" bIns="0" rtlCol="0" anchor="ctr"/>
+          <a:lstStyle/>
+          <a:p>
+            <a:pPr algn="ctr" indent="0" marL="0">
+              <a:buNone/>
+            </a:pPr>
+            <a:r>
+              <a:rPr lang="en-US" sz="1250" b="1" dirty="0">
+                <a:solidFill>
+                  <a:srgbClr val="1F1F1F"/>
                 </a:solidFill>
                 <a:latin typeface="Malgun Gothic" pitchFamily="34" charset="0"/>
                 <a:ea typeface="Malgun Gothic" pitchFamily="34" charset="-122"/>
@@ -4383,20 +4751,20 @@
               </a:rPr>
               <a:t>동선스크린 설치 방법</a:t>
             </a:r>
-            <a:endParaRPr lang="en-US" sz="1500" dirty="0"/>
-          </a:p>
-        </p:txBody>
-      </p:sp>
-      <p:sp>
-        <p:nvSpPr>
-          <p:cNvPr id="3" name="Text 1"/>
+            <a:endParaRPr lang="en-US" sz="1250" dirty="0"/>
+          </a:p>
+        </p:txBody>
+      </p:sp>
+      <p:sp>
+        <p:nvSpPr>
+          <p:cNvPr id="4" name="Text 2"/>
           <p:cNvSpPr/>
           <p:nvPr/>
         </p:nvSpPr>
         <p:spPr>
           <a:xfrm>
             <a:off x="9262872" y="365760"/>
-            <a:ext cx="2286000" cy="320040"/>
+            <a:ext cx="2286000" cy="365760"/>
           </a:xfrm>
           <a:prstGeom prst="rect">
             <a:avLst/>
@@ -4428,14 +4796,14 @@
       </p:sp>
       <p:sp>
         <p:nvSpPr>
-          <p:cNvPr id="4" name="Shape 2"/>
-          <p:cNvSpPr/>
-          <p:nvPr/>
-        </p:nvSpPr>
-        <p:spPr>
-          <a:xfrm>
-            <a:off x="640080" y="822960"/>
-            <a:ext cx="685800" cy="685800"/>
+          <p:cNvPr id="5" name="Shape 3"/>
+          <p:cNvSpPr/>
+          <p:nvPr/>
+        </p:nvSpPr>
+        <p:spPr>
+          <a:xfrm>
+            <a:off x="640080" y="914400"/>
+            <a:ext cx="731520" cy="731520"/>
           </a:xfrm>
           <a:prstGeom prst="ellipse">
             <a:avLst/>
@@ -4444,18 +4812,25 @@
             <a:srgbClr val="FFD400"/>
           </a:solidFill>
           <a:ln/>
-        </p:spPr>
-      </p:sp>
-      <p:sp>
-        <p:nvSpPr>
-          <p:cNvPr id="5" name="Text 3"/>
-          <p:cNvSpPr/>
-          <p:nvPr/>
-        </p:nvSpPr>
-        <p:spPr>
-          <a:xfrm>
-            <a:off x="640080" y="822960"/>
-            <a:ext cx="685800" cy="685800"/>
+          <a:effectLst>
+            <a:outerShdw sx="100000" sy="100000" kx="0" ky="0" algn="bl" rotWithShape="0" blurRad="114300" dist="38100" dir="5400000">
+              <a:srgbClr val="666666">
+                <a:alpha val="30000"/>
+              </a:srgbClr>
+            </a:outerShdw>
+          </a:effectLst>
+        </p:spPr>
+      </p:sp>
+      <p:sp>
+        <p:nvSpPr>
+          <p:cNvPr id="6" name="Text 4"/>
+          <p:cNvSpPr/>
+          <p:nvPr/>
+        </p:nvSpPr>
+        <p:spPr>
+          <a:xfrm>
+            <a:off x="640080" y="914400"/>
+            <a:ext cx="731520" cy="731520"/>
           </a:xfrm>
           <a:prstGeom prst="rect">
             <a:avLst/>
@@ -4471,30 +4846,30 @@
               <a:buNone/>
             </a:pPr>
             <a:r>
-              <a:rPr lang="en-US" sz="2600" b="1" dirty="0">
+              <a:rPr lang="en-US" sz="2400" dirty="0">
                 <a:solidFill>
                   <a:srgbClr val="1F1F1F"/>
                 </a:solidFill>
-                <a:latin typeface="Malgun Gothic" pitchFamily="34" charset="0"/>
-                <a:ea typeface="Malgun Gothic" pitchFamily="34" charset="-122"/>
-                <a:cs typeface="Malgun Gothic" pitchFamily="34" charset="-120"/>
+                <a:latin typeface="HY헤드라인M" pitchFamily="34" charset="0"/>
+                <a:ea typeface="HY헤드라인M" pitchFamily="34" charset="-122"/>
+                <a:cs typeface="HY헤드라인M" pitchFamily="34" charset="-120"/>
               </a:rPr>
               <a:t>8</a:t>
             </a:r>
-            <a:endParaRPr lang="en-US" sz="2600" dirty="0"/>
-          </a:p>
-        </p:txBody>
-      </p:sp>
-      <p:sp>
-        <p:nvSpPr>
-          <p:cNvPr id="6" name="Text 4"/>
-          <p:cNvSpPr/>
-          <p:nvPr/>
-        </p:nvSpPr>
-        <p:spPr>
-          <a:xfrm>
-            <a:off x="1554480" y="822960"/>
-            <a:ext cx="10424160" cy="685800"/>
+            <a:endParaRPr lang="en-US" sz="2400" dirty="0"/>
+          </a:p>
+        </p:txBody>
+      </p:sp>
+      <p:sp>
+        <p:nvSpPr>
+          <p:cNvPr id="7" name="Text 5"/>
+          <p:cNvSpPr/>
+          <p:nvPr/>
+        </p:nvSpPr>
+        <p:spPr>
+          <a:xfrm>
+            <a:off x="1645920" y="914400"/>
+            <a:ext cx="10241280" cy="731520"/>
           </a:xfrm>
           <a:prstGeom prst="rect">
             <a:avLst/>
@@ -4510,23 +4885,50 @@
               <a:buNone/>
             </a:pPr>
             <a:r>
-              <a:rPr lang="en-US" sz="2400" b="1" dirty="0">
+              <a:rPr lang="en-US" sz="2400" dirty="0">
                 <a:solidFill>
                   <a:srgbClr val="222222"/>
                 </a:solidFill>
-                <a:latin typeface="Malgun Gothic" pitchFamily="34" charset="0"/>
-                <a:ea typeface="Malgun Gothic" pitchFamily="34" charset="-122"/>
-                <a:cs typeface="Malgun Gothic" pitchFamily="34" charset="-120"/>
+                <a:latin typeface="HY헤드라인M" pitchFamily="34" charset="0"/>
+                <a:ea typeface="HY헤드라인M" pitchFamily="34" charset="-122"/>
+                <a:cs typeface="HY헤드라인M" pitchFamily="34" charset="-120"/>
               </a:rPr>
               <a:t>AI 카메라 LED 가리기</a:t>
             </a:r>
             <a:endParaRPr lang="en-US" sz="2400" dirty="0"/>
           </a:p>
         </p:txBody>
+      </p:sp>
+      <p:sp>
+        <p:nvSpPr>
+          <p:cNvPr id="8" name="Shape 6"/>
+          <p:cNvSpPr/>
+          <p:nvPr/>
+        </p:nvSpPr>
+        <p:spPr>
+          <a:xfrm>
+            <a:off x="1392301" y="1783080"/>
+            <a:ext cx="6421120" cy="3611880"/>
+          </a:xfrm>
+          <a:prstGeom prst="rect">
+            <a:avLst/>
+          </a:prstGeom>
+          <a:solidFill>
+            <a:srgbClr val="FFFFFF"/>
+          </a:solidFill>
+          <a:ln/>
+          <a:effectLst>
+            <a:outerShdw sx="100000" sy="100000" kx="0" ky="0" algn="bl" rotWithShape="0" blurRad="114300" dist="38100" dir="5400000">
+              <a:srgbClr val="666666">
+                <a:alpha val="30000"/>
+              </a:srgbClr>
+            </a:outerShdw>
+          </a:effectLst>
+        </p:spPr>
       </p:sp>
       <p:pic>
         <p:nvPicPr>
-          <p:cNvPr id="7" name="Image 0" descr="/tmp/claude-0/-home-user-ars/e10980de-cf93-514e-8d8f-658883089fc8/scratchpad/photos/b6.jpg">    </p:cNvPr>
+          <p:cNvPr id="9" name="Image 0" descr="/tmp/claude-0/-home-user-ars/e10980de-cf93-514e-8d8f-658883089fc8/scratchpad/photos/b6.jpg">    </p:cNvPr>
           <p:cNvPicPr>
             <a:picLocks noChangeAspect="1"/>
           </p:cNvPicPr>
@@ -4550,7 +4952,7 @@
       </p:pic>
       <p:sp>
         <p:nvSpPr>
-          <p:cNvPr id="8" name="Shape 5"/>
+          <p:cNvPr id="10" name="Shape 7"/>
           <p:cNvSpPr/>
           <p:nvPr/>
         </p:nvSpPr>
@@ -4574,7 +4976,7 @@
       </p:sp>
       <p:sp>
         <p:nvSpPr>
-          <p:cNvPr id="9" name="Text 6"/>
+          <p:cNvPr id="11" name="Text 8"/>
           <p:cNvSpPr/>
           <p:nvPr/>
         </p:nvSpPr>
@@ -4611,9 +5013,36 @@
           </a:p>
         </p:txBody>
       </p:sp>
+      <p:sp>
+        <p:nvSpPr>
+          <p:cNvPr id="12" name="Shape 9"/>
+          <p:cNvSpPr/>
+          <p:nvPr/>
+        </p:nvSpPr>
+        <p:spPr>
+          <a:xfrm>
+            <a:off x="8087741" y="1783080"/>
+            <a:ext cx="2708910" cy="3611880"/>
+          </a:xfrm>
+          <a:prstGeom prst="rect">
+            <a:avLst/>
+          </a:prstGeom>
+          <a:solidFill>
+            <a:srgbClr val="FFFFFF"/>
+          </a:solidFill>
+          <a:ln/>
+          <a:effectLst>
+            <a:outerShdw sx="100000" sy="100000" kx="0" ky="0" algn="bl" rotWithShape="0" blurRad="114300" dist="38100" dir="5400000">
+              <a:srgbClr val="666666">
+                <a:alpha val="30000"/>
+              </a:srgbClr>
+            </a:outerShdw>
+          </a:effectLst>
+        </p:spPr>
+      </p:sp>
       <p:pic>
         <p:nvPicPr>
-          <p:cNvPr id="10" name="Image 1" descr="/tmp/claude-0/-home-user-ars/e10980de-cf93-514e-8d8f-658883089fc8/scratchpad/photos/c1.jpg">    </p:cNvPr>
+          <p:cNvPr id="13" name="Image 1" descr="/tmp/claude-0/-home-user-ars/e10980de-cf93-514e-8d8f-658883089fc8/scratchpad/photos/c1.jpg">    </p:cNvPr>
           <p:cNvPicPr>
             <a:picLocks noChangeAspect="1"/>
           </p:cNvPicPr>
@@ -4637,7 +5066,7 @@
       </p:pic>
       <p:sp>
         <p:nvSpPr>
-          <p:cNvPr id="11" name="Shape 7"/>
+          <p:cNvPr id="14" name="Shape 10"/>
           <p:cNvSpPr/>
           <p:nvPr/>
         </p:nvSpPr>
@@ -4661,7 +5090,7 @@
       </p:sp>
       <p:sp>
         <p:nvSpPr>
-          <p:cNvPr id="12" name="Text 8"/>
+          <p:cNvPr id="15" name="Text 11"/>
           <p:cNvSpPr/>
           <p:nvPr/>
         </p:nvSpPr>
@@ -4700,7 +5129,7 @@
       </p:sp>
       <p:sp>
         <p:nvSpPr>
-          <p:cNvPr id="13" name="Text 9"/>
+          <p:cNvPr id="16" name="Text 12"/>
           <p:cNvSpPr/>
           <p:nvPr/>
         </p:nvSpPr>
@@ -4742,7 +5171,7 @@
       </p:sp>
       <p:sp>
         <p:nvSpPr>
-          <p:cNvPr id="14" name="Text 10"/>
+          <p:cNvPr id="17" name="Text 13"/>
           <p:cNvSpPr/>
           <p:nvPr/>
         </p:nvSpPr>
@@ -4813,32 +5242,54 @@
       </p:grpSpPr>
       <p:sp>
         <p:nvSpPr>
-          <p:cNvPr id="2" name="Text 0"/>
-          <p:cNvSpPr/>
-          <p:nvPr/>
-        </p:nvSpPr>
-        <p:spPr>
-          <a:xfrm>
-            <a:off x="640080" y="365760"/>
-            <a:ext cx="7315200" cy="320040"/>
-          </a:xfrm>
-          <a:prstGeom prst="rect">
-            <a:avLst/>
-          </a:prstGeom>
-          <a:noFill/>
-          <a:ln/>
-        </p:spPr>
-        <p:txBody>
-          <a:bodyPr wrap="square" lIns="0" tIns="0" rIns="0" bIns="0" rtlCol="0" anchor="ctr"/>
-          <a:lstStyle/>
-          <a:p>
-            <a:pPr indent="0" marL="0">
-              <a:buNone/>
-            </a:pPr>
-            <a:r>
-              <a:rPr lang="en-US" sz="1500" b="1" dirty="0">
-                <a:solidFill>
-                  <a:srgbClr val="666666"/>
+          <p:cNvPr id="2" name="Shape 0"/>
+          <p:cNvSpPr/>
+          <p:nvPr/>
+        </p:nvSpPr>
+        <p:spPr>
+          <a:xfrm>
+            <a:off x="640080" y="347472"/>
+            <a:ext cx="2377440" cy="384048"/>
+          </a:xfrm>
+          <a:prstGeom prst="roundRect">
+            <a:avLst>
+              <a:gd name="adj" fmla="val 50000"/>
+            </a:avLst>
+          </a:prstGeom>
+          <a:solidFill>
+            <a:srgbClr val="FFD400"/>
+          </a:solidFill>
+          <a:ln/>
+        </p:spPr>
+      </p:sp>
+      <p:sp>
+        <p:nvSpPr>
+          <p:cNvPr id="3" name="Text 1"/>
+          <p:cNvSpPr/>
+          <p:nvPr/>
+        </p:nvSpPr>
+        <p:spPr>
+          <a:xfrm>
+            <a:off x="640080" y="347472"/>
+            <a:ext cx="2377440" cy="384048"/>
+          </a:xfrm>
+          <a:prstGeom prst="rect">
+            <a:avLst/>
+          </a:prstGeom>
+          <a:noFill/>
+          <a:ln/>
+        </p:spPr>
+        <p:txBody>
+          <a:bodyPr wrap="square" lIns="0" tIns="0" rIns="0" bIns="0" rtlCol="0" anchor="ctr"/>
+          <a:lstStyle/>
+          <a:p>
+            <a:pPr algn="ctr" indent="0" marL="0">
+              <a:buNone/>
+            </a:pPr>
+            <a:r>
+              <a:rPr lang="en-US" sz="1250" b="1" dirty="0">
+                <a:solidFill>
+                  <a:srgbClr val="1F1F1F"/>
                 </a:solidFill>
                 <a:latin typeface="Malgun Gothic" pitchFamily="34" charset="0"/>
                 <a:ea typeface="Malgun Gothic" pitchFamily="34" charset="-122"/>
@@ -4846,20 +5297,20 @@
               </a:rPr>
               <a:t>동선스크린 설치 방법</a:t>
             </a:r>
-            <a:endParaRPr lang="en-US" sz="1500" dirty="0"/>
-          </a:p>
-        </p:txBody>
-      </p:sp>
-      <p:sp>
-        <p:nvSpPr>
-          <p:cNvPr id="3" name="Text 1"/>
+            <a:endParaRPr lang="en-US" sz="1250" dirty="0"/>
+          </a:p>
+        </p:txBody>
+      </p:sp>
+      <p:sp>
+        <p:nvSpPr>
+          <p:cNvPr id="4" name="Text 2"/>
           <p:cNvSpPr/>
           <p:nvPr/>
         </p:nvSpPr>
         <p:spPr>
           <a:xfrm>
             <a:off x="9262872" y="365760"/>
-            <a:ext cx="2286000" cy="320040"/>
+            <a:ext cx="2286000" cy="365760"/>
           </a:xfrm>
           <a:prstGeom prst="rect">
             <a:avLst/>
@@ -4891,14 +5342,14 @@
       </p:sp>
       <p:sp>
         <p:nvSpPr>
-          <p:cNvPr id="4" name="Shape 2"/>
-          <p:cNvSpPr/>
-          <p:nvPr/>
-        </p:nvSpPr>
-        <p:spPr>
-          <a:xfrm>
-            <a:off x="640080" y="1143000"/>
-            <a:ext cx="914400" cy="914400"/>
+          <p:cNvPr id="5" name="Shape 3"/>
+          <p:cNvSpPr/>
+          <p:nvPr/>
+        </p:nvSpPr>
+        <p:spPr>
+          <a:xfrm>
+            <a:off x="640080" y="1188720"/>
+            <a:ext cx="960120" cy="960120"/>
           </a:xfrm>
           <a:prstGeom prst="ellipse">
             <a:avLst/>
@@ -4907,18 +5358,25 @@
             <a:srgbClr val="FFD400"/>
           </a:solidFill>
           <a:ln/>
-        </p:spPr>
-      </p:sp>
-      <p:sp>
-        <p:nvSpPr>
-          <p:cNvPr id="5" name="Text 3"/>
-          <p:cNvSpPr/>
-          <p:nvPr/>
-        </p:nvSpPr>
-        <p:spPr>
-          <a:xfrm>
-            <a:off x="640080" y="1143000"/>
-            <a:ext cx="914400" cy="914400"/>
+          <a:effectLst>
+            <a:outerShdw sx="100000" sy="100000" kx="0" ky="0" algn="bl" rotWithShape="0" blurRad="114300" dist="38100" dir="5400000">
+              <a:srgbClr val="666666">
+                <a:alpha val="30000"/>
+              </a:srgbClr>
+            </a:outerShdw>
+          </a:effectLst>
+        </p:spPr>
+      </p:sp>
+      <p:sp>
+        <p:nvSpPr>
+          <p:cNvPr id="6" name="Text 4"/>
+          <p:cNvSpPr/>
+          <p:nvPr/>
+        </p:nvSpPr>
+        <p:spPr>
+          <a:xfrm>
+            <a:off x="640080" y="1188720"/>
+            <a:ext cx="960120" cy="960120"/>
           </a:xfrm>
           <a:prstGeom prst="rect">
             <a:avLst/>
@@ -4934,30 +5392,30 @@
               <a:buNone/>
             </a:pPr>
             <a:r>
-              <a:rPr lang="en-US" sz="3600" b="1" dirty="0">
+              <a:rPr lang="en-US" sz="3200" dirty="0">
                 <a:solidFill>
                   <a:srgbClr val="1F1F1F"/>
                 </a:solidFill>
-                <a:latin typeface="Malgun Gothic" pitchFamily="34" charset="0"/>
-                <a:ea typeface="Malgun Gothic" pitchFamily="34" charset="-122"/>
-                <a:cs typeface="Malgun Gothic" pitchFamily="34" charset="-120"/>
+                <a:latin typeface="HY헤드라인M" pitchFamily="34" charset="0"/>
+                <a:ea typeface="HY헤드라인M" pitchFamily="34" charset="-122"/>
+                <a:cs typeface="HY헤드라인M" pitchFamily="34" charset="-120"/>
               </a:rPr>
               <a:t>9</a:t>
             </a:r>
-            <a:endParaRPr lang="en-US" sz="3600" dirty="0"/>
-          </a:p>
-        </p:txBody>
-      </p:sp>
-      <p:sp>
-        <p:nvSpPr>
-          <p:cNvPr id="6" name="Text 4"/>
-          <p:cNvSpPr/>
-          <p:nvPr/>
-        </p:nvSpPr>
-        <p:spPr>
-          <a:xfrm>
-            <a:off x="1783080" y="1143000"/>
-            <a:ext cx="4206240" cy="914400"/>
+            <a:endParaRPr lang="en-US" sz="3200" dirty="0"/>
+          </a:p>
+        </p:txBody>
+      </p:sp>
+      <p:sp>
+        <p:nvSpPr>
+          <p:cNvPr id="7" name="Text 5"/>
+          <p:cNvSpPr/>
+          <p:nvPr/>
+        </p:nvSpPr>
+        <p:spPr>
+          <a:xfrm>
+            <a:off x="1874520" y="1188720"/>
+            <a:ext cx="4114800" cy="960120"/>
           </a:xfrm>
           <a:prstGeom prst="rect">
             <a:avLst/>
@@ -4973,23 +5431,23 @@
               <a:buNone/>
             </a:pPr>
             <a:r>
-              <a:rPr lang="en-US" sz="3000" b="1" dirty="0">
+              <a:rPr lang="en-US" sz="2800" dirty="0">
                 <a:solidFill>
                   <a:srgbClr val="222222"/>
                 </a:solidFill>
-                <a:latin typeface="Malgun Gothic" pitchFamily="34" charset="0"/>
-                <a:ea typeface="Malgun Gothic" pitchFamily="34" charset="-122"/>
-                <a:cs typeface="Malgun Gothic" pitchFamily="34" charset="-120"/>
+                <a:latin typeface="HY헤드라인M" pitchFamily="34" charset="0"/>
+                <a:ea typeface="HY헤드라인M" pitchFamily="34" charset="-122"/>
+                <a:cs typeface="HY헤드라인M" pitchFamily="34" charset="-120"/>
               </a:rPr>
               <a:t>케이블 정리</a:t>
             </a:r>
-            <a:endParaRPr lang="en-US" sz="3000" dirty="0"/>
-          </a:p>
-        </p:txBody>
-      </p:sp>
-      <p:sp>
-        <p:nvSpPr>
-          <p:cNvPr id="7" name="Text 5"/>
+            <a:endParaRPr lang="en-US" sz="2800" dirty="0"/>
+          </a:p>
+        </p:txBody>
+      </p:sp>
+      <p:sp>
+        <p:nvSpPr>
+          <p:cNvPr id="8" name="Text 6"/>
           <p:cNvSpPr/>
           <p:nvPr/>
         </p:nvSpPr>
@@ -5031,7 +5489,7 @@
       </p:sp>
       <p:sp>
         <p:nvSpPr>
-          <p:cNvPr id="8" name="Shape 6"/>
+          <p:cNvPr id="9" name="Shape 7"/>
           <p:cNvSpPr/>
           <p:nvPr/>
         </p:nvSpPr>
@@ -5058,7 +5516,7 @@
       </p:sp>
       <p:pic>
         <p:nvPicPr>
-          <p:cNvPr id="9" name="Image 0" descr="preencoded.png">    </p:cNvPr>
+          <p:cNvPr id="10" name="Image 0" descr="preencoded.png">    </p:cNvPr>
           <p:cNvPicPr>
             <a:picLocks noChangeAspect="1"/>
           </p:cNvPicPr>
@@ -5082,7 +5540,7 @@
       </p:pic>
       <p:sp>
         <p:nvSpPr>
-          <p:cNvPr id="10" name="Text 7"/>
+          <p:cNvPr id="11" name="Text 8"/>
           <p:cNvSpPr/>
           <p:nvPr/>
         </p:nvSpPr>
@@ -5153,14 +5611,144 @@
       </p:grpSpPr>
       <p:sp>
         <p:nvSpPr>
-          <p:cNvPr id="2" name="Text 0"/>
-          <p:cNvSpPr/>
-          <p:nvPr/>
-        </p:nvSpPr>
-        <p:spPr>
-          <a:xfrm>
-            <a:off x="822960" y="1463040"/>
-            <a:ext cx="3657600" cy="1463040"/>
+          <p:cNvPr id="2" name="Shape 0"/>
+          <p:cNvSpPr/>
+          <p:nvPr/>
+        </p:nvSpPr>
+        <p:spPr>
+          <a:xfrm>
+            <a:off x="8595360" y="-1463040"/>
+            <a:ext cx="5669280" cy="5669280"/>
+          </a:xfrm>
+          <a:prstGeom prst="ellipse">
+            <a:avLst/>
+          </a:prstGeom>
+          <a:ln w="31750">
+            <a:solidFill>
+              <a:srgbClr val="3C3C3C"/>
+            </a:solidFill>
+            <a:prstDash val="solid"/>
+          </a:ln>
+        </p:spPr>
+      </p:sp>
+      <p:sp>
+        <p:nvSpPr>
+          <p:cNvPr id="3" name="Shape 1"/>
+          <p:cNvSpPr/>
+          <p:nvPr/>
+        </p:nvSpPr>
+        <p:spPr>
+          <a:xfrm>
+            <a:off x="10607040" y="4480560"/>
+            <a:ext cx="3108960" cy="3108960"/>
+          </a:xfrm>
+          <a:prstGeom prst="ellipse">
+            <a:avLst/>
+          </a:prstGeom>
+          <a:solidFill>
+            <a:srgbClr val="FFD400"/>
+          </a:solidFill>
+          <a:ln/>
+        </p:spPr>
+      </p:sp>
+      <p:sp>
+        <p:nvSpPr>
+          <p:cNvPr id="4" name="Shape 2"/>
+          <p:cNvSpPr/>
+          <p:nvPr/>
+        </p:nvSpPr>
+        <p:spPr>
+          <a:xfrm>
+            <a:off x="9966960" y="3977640"/>
+            <a:ext cx="502920" cy="502920"/>
+          </a:xfrm>
+          <a:prstGeom prst="ellipse">
+            <a:avLst/>
+          </a:prstGeom>
+          <a:ln w="25400">
+            <a:solidFill>
+              <a:srgbClr val="FFD400"/>
+            </a:solidFill>
+            <a:prstDash val="solid"/>
+          </a:ln>
+        </p:spPr>
+      </p:sp>
+      <p:sp>
+        <p:nvSpPr>
+          <p:cNvPr id="5" name="Shape 3"/>
+          <p:cNvSpPr/>
+          <p:nvPr/>
+        </p:nvSpPr>
+        <p:spPr>
+          <a:xfrm>
+            <a:off x="822960" y="1234440"/>
+            <a:ext cx="1554480" cy="1554480"/>
+          </a:xfrm>
+          <a:prstGeom prst="ellipse">
+            <a:avLst/>
+          </a:prstGeom>
+          <a:solidFill>
+            <a:srgbClr val="FFD400"/>
+          </a:solidFill>
+          <a:ln/>
+          <a:effectLst>
+            <a:outerShdw sx="100000" sy="100000" kx="0" ky="0" algn="bl" rotWithShape="0" blurRad="114300" dist="38100" dir="5400000">
+              <a:srgbClr val="666666">
+                <a:alpha val="30000"/>
+              </a:srgbClr>
+            </a:outerShdw>
+          </a:effectLst>
+        </p:spPr>
+      </p:sp>
+      <p:sp>
+        <p:nvSpPr>
+          <p:cNvPr id="6" name="Text 4"/>
+          <p:cNvSpPr/>
+          <p:nvPr/>
+        </p:nvSpPr>
+        <p:spPr>
+          <a:xfrm>
+            <a:off x="822960" y="1234440"/>
+            <a:ext cx="1554480" cy="1554480"/>
+          </a:xfrm>
+          <a:prstGeom prst="rect">
+            <a:avLst/>
+          </a:prstGeom>
+          <a:noFill/>
+          <a:ln/>
+        </p:spPr>
+        <p:txBody>
+          <a:bodyPr wrap="square" lIns="0" tIns="0" rIns="0" bIns="0" rtlCol="0" anchor="ctr"/>
+          <a:lstStyle/>
+          <a:p>
+            <a:pPr algn="ctr" indent="0" marL="0">
+              <a:buNone/>
+            </a:pPr>
+            <a:r>
+              <a:rPr lang="en-US" sz="4000" dirty="0">
+                <a:solidFill>
+                  <a:srgbClr val="1F1F1F"/>
+                </a:solidFill>
+                <a:latin typeface="HY헤드라인M" pitchFamily="34" charset="0"/>
+                <a:ea typeface="HY헤드라인M" pitchFamily="34" charset="-122"/>
+                <a:cs typeface="HY헤드라인M" pitchFamily="34" charset="-120"/>
+              </a:rPr>
+              <a:t>02</a:t>
+            </a:r>
+            <a:endParaRPr lang="en-US" sz="4000" dirty="0"/>
+          </a:p>
+        </p:txBody>
+      </p:sp>
+      <p:sp>
+        <p:nvSpPr>
+          <p:cNvPr id="7" name="Text 5"/>
+          <p:cNvSpPr/>
+          <p:nvPr/>
+        </p:nvSpPr>
+        <p:spPr>
+          <a:xfrm>
+            <a:off x="822960" y="3154680"/>
+            <a:ext cx="10515600" cy="1005840"/>
           </a:xfrm>
           <a:prstGeom prst="rect">
             <a:avLst/>
@@ -5176,69 +5764,30 @@
               <a:buNone/>
             </a:pPr>
             <a:r>
-              <a:rPr lang="en-US" sz="8000" b="1" dirty="0">
-                <a:solidFill>
-                  <a:srgbClr val="FFD400"/>
-                </a:solidFill>
-                <a:latin typeface="Malgun Gothic" pitchFamily="34" charset="0"/>
-                <a:ea typeface="Malgun Gothic" pitchFamily="34" charset="-122"/>
-                <a:cs typeface="Malgun Gothic" pitchFamily="34" charset="-120"/>
-              </a:rPr>
-              <a:t>02</a:t>
-            </a:r>
-            <a:endParaRPr lang="en-US" sz="8000" dirty="0"/>
-          </a:p>
-        </p:txBody>
-      </p:sp>
-      <p:sp>
-        <p:nvSpPr>
-          <p:cNvPr id="3" name="Text 1"/>
-          <p:cNvSpPr/>
-          <p:nvPr/>
-        </p:nvSpPr>
-        <p:spPr>
-          <a:xfrm>
-            <a:off x="822960" y="3017520"/>
-            <a:ext cx="10515600" cy="1005840"/>
-          </a:xfrm>
-          <a:prstGeom prst="rect">
-            <a:avLst/>
-          </a:prstGeom>
-          <a:noFill/>
-          <a:ln/>
-        </p:spPr>
-        <p:txBody>
-          <a:bodyPr wrap="square" lIns="0" tIns="0" rIns="0" bIns="0" rtlCol="0" anchor="ctr"/>
-          <a:lstStyle/>
-          <a:p>
-            <a:pPr indent="0" marL="0">
-              <a:buNone/>
-            </a:pPr>
-            <a:r>
-              <a:rPr lang="en-US" sz="4400" b="1" dirty="0">
+              <a:rPr lang="en-US" sz="4000" dirty="0">
                 <a:solidFill>
                   <a:srgbClr val="FFFFFF"/>
                 </a:solidFill>
-                <a:latin typeface="Malgun Gothic" pitchFamily="34" charset="0"/>
-                <a:ea typeface="Malgun Gothic" pitchFamily="34" charset="-122"/>
-                <a:cs typeface="Malgun Gothic" pitchFamily="34" charset="-120"/>
+                <a:latin typeface="HY헤드라인M" pitchFamily="34" charset="0"/>
+                <a:ea typeface="HY헤드라인M" pitchFamily="34" charset="-122"/>
+                <a:cs typeface="HY헤드라인M" pitchFamily="34" charset="-120"/>
               </a:rPr>
               <a:t>계산대미디어 AI 카메라 설치 방법</a:t>
             </a:r>
-            <a:endParaRPr lang="en-US" sz="4400" dirty="0"/>
-          </a:p>
-        </p:txBody>
-      </p:sp>
-      <p:sp>
-        <p:nvSpPr>
-          <p:cNvPr id="4" name="Text 2"/>
-          <p:cNvSpPr/>
-          <p:nvPr/>
-        </p:nvSpPr>
-        <p:spPr>
-          <a:xfrm>
-            <a:off x="822960" y="4114800"/>
-            <a:ext cx="10515600" cy="1280160"/>
+            <a:endParaRPr lang="en-US" sz="4000" dirty="0"/>
+          </a:p>
+        </p:txBody>
+      </p:sp>
+      <p:sp>
+        <p:nvSpPr>
+          <p:cNvPr id="8" name="Text 6"/>
+          <p:cNvSpPr/>
+          <p:nvPr/>
+        </p:nvSpPr>
+        <p:spPr>
+          <a:xfrm>
+            <a:off x="822960" y="4251960"/>
+            <a:ext cx="9326880" cy="1280160"/>
           </a:xfrm>
           <a:prstGeom prst="rect">
             <a:avLst/>
@@ -5257,7 +5806,7 @@
               <a:buNone/>
             </a:pPr>
             <a:r>
-              <a:rPr lang="en-US" sz="2000" dirty="0">
+              <a:rPr lang="en-US" sz="1900" dirty="0">
                 <a:solidFill>
                   <a:srgbClr val="CCCCCC"/>
                 </a:solidFill>
@@ -5267,7 +5816,7 @@
               </a:rPr>
               <a:t>설치 방법은 동선스크린과 동일하며, 매체당 카메라 2대를 설치합니다.</a:t>
             </a:r>
-            <a:endParaRPr lang="en-US" sz="2000" dirty="0"/>
+            <a:endParaRPr lang="en-US" sz="1900" dirty="0"/>
           </a:p>
           <a:p>
             <a:pPr indent="0" marL="0">
@@ -5277,7 +5826,7 @@
               <a:buNone/>
             </a:pPr>
             <a:r>
-              <a:rPr lang="en-US" sz="2000" dirty="0">
+              <a:rPr lang="en-US" sz="1900" dirty="0">
                 <a:solidFill>
                   <a:srgbClr val="CCCCCC"/>
                 </a:solidFill>
@@ -5287,7 +5836,7 @@
               </a:rPr>
               <a:t>(매장 내부 1대 · 매장 외부 1대)</a:t>
             </a:r>
-            <a:endParaRPr lang="en-US" sz="2000" dirty="0"/>
+            <a:endParaRPr lang="en-US" sz="1900" dirty="0"/>
           </a:p>
         </p:txBody>
       </p:sp>
@@ -5325,32 +5874,54 @@
       </p:grpSpPr>
       <p:sp>
         <p:nvSpPr>
-          <p:cNvPr id="2" name="Text 0"/>
-          <p:cNvSpPr/>
-          <p:nvPr/>
-        </p:nvSpPr>
-        <p:spPr>
-          <a:xfrm>
-            <a:off x="640080" y="365760"/>
-            <a:ext cx="7315200" cy="320040"/>
-          </a:xfrm>
-          <a:prstGeom prst="rect">
-            <a:avLst/>
-          </a:prstGeom>
-          <a:noFill/>
-          <a:ln/>
-        </p:spPr>
-        <p:txBody>
-          <a:bodyPr wrap="square" lIns="0" tIns="0" rIns="0" bIns="0" rtlCol="0" anchor="ctr"/>
-          <a:lstStyle/>
-          <a:p>
-            <a:pPr indent="0" marL="0">
-              <a:buNone/>
-            </a:pPr>
-            <a:r>
-              <a:rPr lang="en-US" sz="1500" b="1" dirty="0">
-                <a:solidFill>
-                  <a:srgbClr val="666666"/>
+          <p:cNvPr id="2" name="Shape 0"/>
+          <p:cNvSpPr/>
+          <p:nvPr/>
+        </p:nvSpPr>
+        <p:spPr>
+          <a:xfrm>
+            <a:off x="640080" y="347472"/>
+            <a:ext cx="2377440" cy="384048"/>
+          </a:xfrm>
+          <a:prstGeom prst="roundRect">
+            <a:avLst>
+              <a:gd name="adj" fmla="val 50000"/>
+            </a:avLst>
+          </a:prstGeom>
+          <a:solidFill>
+            <a:srgbClr val="FFD400"/>
+          </a:solidFill>
+          <a:ln/>
+        </p:spPr>
+      </p:sp>
+      <p:sp>
+        <p:nvSpPr>
+          <p:cNvPr id="3" name="Text 1"/>
+          <p:cNvSpPr/>
+          <p:nvPr/>
+        </p:nvSpPr>
+        <p:spPr>
+          <a:xfrm>
+            <a:off x="640080" y="347472"/>
+            <a:ext cx="2377440" cy="384048"/>
+          </a:xfrm>
+          <a:prstGeom prst="rect">
+            <a:avLst/>
+          </a:prstGeom>
+          <a:noFill/>
+          <a:ln/>
+        </p:spPr>
+        <p:txBody>
+          <a:bodyPr wrap="square" lIns="0" tIns="0" rIns="0" bIns="0" rtlCol="0" anchor="ctr"/>
+          <a:lstStyle/>
+          <a:p>
+            <a:pPr algn="ctr" indent="0" marL="0">
+              <a:buNone/>
+            </a:pPr>
+            <a:r>
+              <a:rPr lang="en-US" sz="1250" b="1" dirty="0">
+                <a:solidFill>
+                  <a:srgbClr val="1F1F1F"/>
                 </a:solidFill>
                 <a:latin typeface="Malgun Gothic" pitchFamily="34" charset="0"/>
                 <a:ea typeface="Malgun Gothic" pitchFamily="34" charset="-122"/>
@@ -5358,20 +5929,20 @@
               </a:rPr>
               <a:t>계산대미디어 설치 방법</a:t>
             </a:r>
-            <a:endParaRPr lang="en-US" sz="1500" dirty="0"/>
-          </a:p>
-        </p:txBody>
-      </p:sp>
-      <p:sp>
-        <p:nvSpPr>
-          <p:cNvPr id="3" name="Text 1"/>
+            <a:endParaRPr lang="en-US" sz="1250" dirty="0"/>
+          </a:p>
+        </p:txBody>
+      </p:sp>
+      <p:sp>
+        <p:nvSpPr>
+          <p:cNvPr id="4" name="Text 2"/>
           <p:cNvSpPr/>
           <p:nvPr/>
         </p:nvSpPr>
         <p:spPr>
           <a:xfrm>
             <a:off x="9262872" y="365760"/>
-            <a:ext cx="2286000" cy="320040"/>
+            <a:ext cx="2286000" cy="365760"/>
           </a:xfrm>
           <a:prstGeom prst="rect">
             <a:avLst/>
@@ -5403,14 +5974,14 @@
       </p:sp>
       <p:sp>
         <p:nvSpPr>
-          <p:cNvPr id="4" name="Shape 2"/>
-          <p:cNvSpPr/>
-          <p:nvPr/>
-        </p:nvSpPr>
-        <p:spPr>
-          <a:xfrm>
-            <a:off x="640080" y="1143000"/>
-            <a:ext cx="914400" cy="914400"/>
+          <p:cNvPr id="5" name="Shape 3"/>
+          <p:cNvSpPr/>
+          <p:nvPr/>
+        </p:nvSpPr>
+        <p:spPr>
+          <a:xfrm>
+            <a:off x="640080" y="1188720"/>
+            <a:ext cx="960120" cy="960120"/>
           </a:xfrm>
           <a:prstGeom prst="ellipse">
             <a:avLst/>
@@ -5419,18 +5990,25 @@
             <a:srgbClr val="FFD400"/>
           </a:solidFill>
           <a:ln/>
-        </p:spPr>
-      </p:sp>
-      <p:sp>
-        <p:nvSpPr>
-          <p:cNvPr id="5" name="Text 3"/>
-          <p:cNvSpPr/>
-          <p:nvPr/>
-        </p:nvSpPr>
-        <p:spPr>
-          <a:xfrm>
-            <a:off x="640080" y="1143000"/>
-            <a:ext cx="914400" cy="914400"/>
+          <a:effectLst>
+            <a:outerShdw sx="100000" sy="100000" kx="0" ky="0" algn="bl" rotWithShape="0" blurRad="114300" dist="38100" dir="5400000">
+              <a:srgbClr val="666666">
+                <a:alpha val="30000"/>
+              </a:srgbClr>
+            </a:outerShdw>
+          </a:effectLst>
+        </p:spPr>
+      </p:sp>
+      <p:sp>
+        <p:nvSpPr>
+          <p:cNvPr id="6" name="Text 4"/>
+          <p:cNvSpPr/>
+          <p:nvPr/>
+        </p:nvSpPr>
+        <p:spPr>
+          <a:xfrm>
+            <a:off x="640080" y="1188720"/>
+            <a:ext cx="960120" cy="960120"/>
           </a:xfrm>
           <a:prstGeom prst="rect">
             <a:avLst/>
@@ -5446,30 +6024,30 @@
               <a:buNone/>
             </a:pPr>
             <a:r>
-              <a:rPr lang="en-US" sz="3600" b="1" dirty="0">
+              <a:rPr lang="en-US" sz="3200" dirty="0">
                 <a:solidFill>
                   <a:srgbClr val="1F1F1F"/>
                 </a:solidFill>
-                <a:latin typeface="Malgun Gothic" pitchFamily="34" charset="0"/>
-                <a:ea typeface="Malgun Gothic" pitchFamily="34" charset="-122"/>
-                <a:cs typeface="Malgun Gothic" pitchFamily="34" charset="-120"/>
+                <a:latin typeface="HY헤드라인M" pitchFamily="34" charset="0"/>
+                <a:ea typeface="HY헤드라인M" pitchFamily="34" charset="-122"/>
+                <a:cs typeface="HY헤드라인M" pitchFamily="34" charset="-120"/>
               </a:rPr>
               <a:t>1</a:t>
             </a:r>
-            <a:endParaRPr lang="en-US" sz="3600" dirty="0"/>
-          </a:p>
-        </p:txBody>
-      </p:sp>
-      <p:sp>
-        <p:nvSpPr>
-          <p:cNvPr id="6" name="Text 4"/>
-          <p:cNvSpPr/>
-          <p:nvPr/>
-        </p:nvSpPr>
-        <p:spPr>
-          <a:xfrm>
-            <a:off x="1783080" y="1143000"/>
-            <a:ext cx="4206240" cy="914400"/>
+            <a:endParaRPr lang="en-US" sz="3200" dirty="0"/>
+          </a:p>
+        </p:txBody>
+      </p:sp>
+      <p:sp>
+        <p:nvSpPr>
+          <p:cNvPr id="7" name="Text 5"/>
+          <p:cNvSpPr/>
+          <p:nvPr/>
+        </p:nvSpPr>
+        <p:spPr>
+          <a:xfrm>
+            <a:off x="1874520" y="1188720"/>
+            <a:ext cx="4114800" cy="960120"/>
           </a:xfrm>
           <a:prstGeom prst="rect">
             <a:avLst/>
@@ -5485,23 +6063,23 @@
               <a:buNone/>
             </a:pPr>
             <a:r>
-              <a:rPr lang="en-US" sz="3000" b="1" dirty="0">
+              <a:rPr lang="en-US" sz="2800" dirty="0">
                 <a:solidFill>
                   <a:srgbClr val="222222"/>
                 </a:solidFill>
-                <a:latin typeface="Malgun Gothic" pitchFamily="34" charset="0"/>
-                <a:ea typeface="Malgun Gothic" pitchFamily="34" charset="-122"/>
-                <a:cs typeface="Malgun Gothic" pitchFamily="34" charset="-120"/>
+                <a:latin typeface="HY헤드라인M" pitchFamily="34" charset="0"/>
+                <a:ea typeface="HY헤드라인M" pitchFamily="34" charset="-122"/>
+                <a:cs typeface="HY헤드라인M" pitchFamily="34" charset="-120"/>
               </a:rPr>
               <a:t>HDMI 분배기 전원부 분리</a:t>
             </a:r>
-            <a:endParaRPr lang="en-US" sz="3000" dirty="0"/>
-          </a:p>
-        </p:txBody>
-      </p:sp>
-      <p:sp>
-        <p:nvSpPr>
-          <p:cNvPr id="7" name="Text 5"/>
+            <a:endParaRPr lang="en-US" sz="2800" dirty="0"/>
+          </a:p>
+        </p:txBody>
+      </p:sp>
+      <p:sp>
+        <p:nvSpPr>
+          <p:cNvPr id="8" name="Text 6"/>
           <p:cNvSpPr/>
           <p:nvPr/>
         </p:nvSpPr>
@@ -5543,7 +6121,7 @@
       </p:sp>
       <p:sp>
         <p:nvSpPr>
-          <p:cNvPr id="8" name="Shape 6"/>
+          <p:cNvPr id="9" name="Shape 7"/>
           <p:cNvSpPr/>
           <p:nvPr/>
         </p:nvSpPr>
@@ -5565,7 +6143,7 @@
       </p:sp>
       <p:sp>
         <p:nvSpPr>
-          <p:cNvPr id="9" name="Text 7"/>
+          <p:cNvPr id="10" name="Text 8"/>
           <p:cNvSpPr/>
           <p:nvPr/>
         </p:nvSpPr>
@@ -5607,7 +6185,7 @@
       </p:sp>
       <p:sp>
         <p:nvSpPr>
-          <p:cNvPr id="10" name="Shape 8"/>
+          <p:cNvPr id="11" name="Shape 9"/>
           <p:cNvSpPr/>
           <p:nvPr/>
         </p:nvSpPr>
@@ -5634,7 +6212,7 @@
       </p:sp>
       <p:pic>
         <p:nvPicPr>
-          <p:cNvPr id="11" name="Image 0" descr="preencoded.png">    </p:cNvPr>
+          <p:cNvPr id="12" name="Image 0" descr="preencoded.png">    </p:cNvPr>
           <p:cNvPicPr>
             <a:picLocks noChangeAspect="1"/>
           </p:cNvPicPr>
@@ -5658,7 +6236,7 @@
       </p:pic>
       <p:sp>
         <p:nvSpPr>
-          <p:cNvPr id="12" name="Text 9"/>
+          <p:cNvPr id="13" name="Text 10"/>
           <p:cNvSpPr/>
           <p:nvPr/>
         </p:nvSpPr>
@@ -5697,7 +6275,7 @@
       </p:sp>
       <p:sp>
         <p:nvSpPr>
-          <p:cNvPr id="13" name="Text 10"/>
+          <p:cNvPr id="14" name="Text 11"/>
           <p:cNvSpPr/>
           <p:nvPr/>
         </p:nvSpPr>
@@ -5736,7 +6314,7 @@
       </p:sp>
       <p:sp>
         <p:nvSpPr>
-          <p:cNvPr id="14" name="Shape 11"/>
+          <p:cNvPr id="15" name="Shape 12"/>
           <p:cNvSpPr/>
           <p:nvPr/>
         </p:nvSpPr>
@@ -5763,7 +6341,7 @@
       </p:sp>
       <p:pic>
         <p:nvPicPr>
-          <p:cNvPr id="15" name="Image 1" descr="preencoded.png">    </p:cNvPr>
+          <p:cNvPr id="16" name="Image 1" descr="preencoded.png">    </p:cNvPr>
           <p:cNvPicPr>
             <a:picLocks noChangeAspect="1"/>
           </p:cNvPicPr>
@@ -5787,7 +6365,7 @@
       </p:pic>
       <p:sp>
         <p:nvSpPr>
-          <p:cNvPr id="16" name="Text 12"/>
+          <p:cNvPr id="17" name="Text 13"/>
           <p:cNvSpPr/>
           <p:nvPr/>
         </p:nvSpPr>
@@ -5826,7 +6404,7 @@
       </p:sp>
       <p:sp>
         <p:nvSpPr>
-          <p:cNvPr id="17" name="Text 13"/>
+          <p:cNvPr id="18" name="Text 14"/>
           <p:cNvSpPr/>
           <p:nvPr/>
         </p:nvSpPr>
@@ -5897,32 +6475,54 @@
       </p:grpSpPr>
       <p:sp>
         <p:nvSpPr>
-          <p:cNvPr id="2" name="Text 0"/>
-          <p:cNvSpPr/>
-          <p:nvPr/>
-        </p:nvSpPr>
-        <p:spPr>
-          <a:xfrm>
-            <a:off x="640080" y="365760"/>
-            <a:ext cx="7315200" cy="320040"/>
-          </a:xfrm>
-          <a:prstGeom prst="rect">
-            <a:avLst/>
-          </a:prstGeom>
-          <a:noFill/>
-          <a:ln/>
-        </p:spPr>
-        <p:txBody>
-          <a:bodyPr wrap="square" lIns="0" tIns="0" rIns="0" bIns="0" rtlCol="0" anchor="ctr"/>
-          <a:lstStyle/>
-          <a:p>
-            <a:pPr indent="0" marL="0">
-              <a:buNone/>
-            </a:pPr>
-            <a:r>
-              <a:rPr lang="en-US" sz="1500" b="1" dirty="0">
-                <a:solidFill>
-                  <a:srgbClr val="666666"/>
+          <p:cNvPr id="2" name="Shape 0"/>
+          <p:cNvSpPr/>
+          <p:nvPr/>
+        </p:nvSpPr>
+        <p:spPr>
+          <a:xfrm>
+            <a:off x="640080" y="347472"/>
+            <a:ext cx="2377440" cy="384048"/>
+          </a:xfrm>
+          <a:prstGeom prst="roundRect">
+            <a:avLst>
+              <a:gd name="adj" fmla="val 50000"/>
+            </a:avLst>
+          </a:prstGeom>
+          <a:solidFill>
+            <a:srgbClr val="FFD400"/>
+          </a:solidFill>
+          <a:ln/>
+        </p:spPr>
+      </p:sp>
+      <p:sp>
+        <p:nvSpPr>
+          <p:cNvPr id="3" name="Text 1"/>
+          <p:cNvSpPr/>
+          <p:nvPr/>
+        </p:nvSpPr>
+        <p:spPr>
+          <a:xfrm>
+            <a:off x="640080" y="347472"/>
+            <a:ext cx="2377440" cy="384048"/>
+          </a:xfrm>
+          <a:prstGeom prst="rect">
+            <a:avLst/>
+          </a:prstGeom>
+          <a:noFill/>
+          <a:ln/>
+        </p:spPr>
+        <p:txBody>
+          <a:bodyPr wrap="square" lIns="0" tIns="0" rIns="0" bIns="0" rtlCol="0" anchor="ctr"/>
+          <a:lstStyle/>
+          <a:p>
+            <a:pPr algn="ctr" indent="0" marL="0">
+              <a:buNone/>
+            </a:pPr>
+            <a:r>
+              <a:rPr lang="en-US" sz="1250" b="1" dirty="0">
+                <a:solidFill>
+                  <a:srgbClr val="1F1F1F"/>
                 </a:solidFill>
                 <a:latin typeface="Malgun Gothic" pitchFamily="34" charset="0"/>
                 <a:ea typeface="Malgun Gothic" pitchFamily="34" charset="-122"/>
@@ -5930,20 +6530,20 @@
               </a:rPr>
               <a:t>계산대미디어 설치 방법</a:t>
             </a:r>
-            <a:endParaRPr lang="en-US" sz="1500" dirty="0"/>
-          </a:p>
-        </p:txBody>
-      </p:sp>
-      <p:sp>
-        <p:nvSpPr>
-          <p:cNvPr id="3" name="Text 1"/>
+            <a:endParaRPr lang="en-US" sz="1250" dirty="0"/>
+          </a:p>
+        </p:txBody>
+      </p:sp>
+      <p:sp>
+        <p:nvSpPr>
+          <p:cNvPr id="4" name="Text 2"/>
           <p:cNvSpPr/>
           <p:nvPr/>
         </p:nvSpPr>
         <p:spPr>
           <a:xfrm>
             <a:off x="9262872" y="365760"/>
-            <a:ext cx="2286000" cy="320040"/>
+            <a:ext cx="2286000" cy="365760"/>
           </a:xfrm>
           <a:prstGeom prst="rect">
             <a:avLst/>
@@ -5975,14 +6575,14 @@
       </p:sp>
       <p:sp>
         <p:nvSpPr>
-          <p:cNvPr id="4" name="Shape 2"/>
-          <p:cNvSpPr/>
-          <p:nvPr/>
-        </p:nvSpPr>
-        <p:spPr>
-          <a:xfrm>
-            <a:off x="640080" y="1143000"/>
-            <a:ext cx="914400" cy="914400"/>
+          <p:cNvPr id="5" name="Shape 3"/>
+          <p:cNvSpPr/>
+          <p:nvPr/>
+        </p:nvSpPr>
+        <p:spPr>
+          <a:xfrm>
+            <a:off x="640080" y="1188720"/>
+            <a:ext cx="960120" cy="960120"/>
           </a:xfrm>
           <a:prstGeom prst="ellipse">
             <a:avLst/>
@@ -5991,18 +6591,25 @@
             <a:srgbClr val="FFD400"/>
           </a:solidFill>
           <a:ln/>
-        </p:spPr>
-      </p:sp>
-      <p:sp>
-        <p:nvSpPr>
-          <p:cNvPr id="5" name="Text 3"/>
-          <p:cNvSpPr/>
-          <p:nvPr/>
-        </p:nvSpPr>
-        <p:spPr>
-          <a:xfrm>
-            <a:off x="640080" y="1143000"/>
-            <a:ext cx="914400" cy="914400"/>
+          <a:effectLst>
+            <a:outerShdw sx="100000" sy="100000" kx="0" ky="0" algn="bl" rotWithShape="0" blurRad="114300" dist="38100" dir="5400000">
+              <a:srgbClr val="666666">
+                <a:alpha val="30000"/>
+              </a:srgbClr>
+            </a:outerShdw>
+          </a:effectLst>
+        </p:spPr>
+      </p:sp>
+      <p:sp>
+        <p:nvSpPr>
+          <p:cNvPr id="6" name="Text 4"/>
+          <p:cNvSpPr/>
+          <p:nvPr/>
+        </p:nvSpPr>
+        <p:spPr>
+          <a:xfrm>
+            <a:off x="640080" y="1188720"/>
+            <a:ext cx="960120" cy="960120"/>
           </a:xfrm>
           <a:prstGeom prst="rect">
             <a:avLst/>
@@ -6018,30 +6625,30 @@
               <a:buNone/>
             </a:pPr>
             <a:r>
-              <a:rPr lang="en-US" sz="3600" b="1" dirty="0">
+              <a:rPr lang="en-US" sz="3200" dirty="0">
                 <a:solidFill>
                   <a:srgbClr val="1F1F1F"/>
                 </a:solidFill>
-                <a:latin typeface="Malgun Gothic" pitchFamily="34" charset="0"/>
-                <a:ea typeface="Malgun Gothic" pitchFamily="34" charset="-122"/>
-                <a:cs typeface="Malgun Gothic" pitchFamily="34" charset="-120"/>
+                <a:latin typeface="HY헤드라인M" pitchFamily="34" charset="0"/>
+                <a:ea typeface="HY헤드라인M" pitchFamily="34" charset="-122"/>
+                <a:cs typeface="HY헤드라인M" pitchFamily="34" charset="-120"/>
               </a:rPr>
               <a:t>2</a:t>
             </a:r>
-            <a:endParaRPr lang="en-US" sz="3600" dirty="0"/>
-          </a:p>
-        </p:txBody>
-      </p:sp>
-      <p:sp>
-        <p:nvSpPr>
-          <p:cNvPr id="6" name="Text 4"/>
-          <p:cNvSpPr/>
-          <p:nvPr/>
-        </p:nvSpPr>
-        <p:spPr>
-          <a:xfrm>
-            <a:off x="1783080" y="1143000"/>
-            <a:ext cx="4206240" cy="914400"/>
+            <a:endParaRPr lang="en-US" sz="3200" dirty="0"/>
+          </a:p>
+        </p:txBody>
+      </p:sp>
+      <p:sp>
+        <p:nvSpPr>
+          <p:cNvPr id="7" name="Text 5"/>
+          <p:cNvSpPr/>
+          <p:nvPr/>
+        </p:nvSpPr>
+        <p:spPr>
+          <a:xfrm>
+            <a:off x="1874520" y="1188720"/>
+            <a:ext cx="4114800" cy="960120"/>
           </a:xfrm>
           <a:prstGeom prst="rect">
             <a:avLst/>
@@ -6057,23 +6664,23 @@
               <a:buNone/>
             </a:pPr>
             <a:r>
-              <a:rPr lang="en-US" sz="3000" b="1" dirty="0">
+              <a:rPr lang="en-US" sz="2800" dirty="0">
                 <a:solidFill>
                   <a:srgbClr val="222222"/>
                 </a:solidFill>
-                <a:latin typeface="Malgun Gothic" pitchFamily="34" charset="0"/>
-                <a:ea typeface="Malgun Gothic" pitchFamily="34" charset="-122"/>
-                <a:cs typeface="Malgun Gothic" pitchFamily="34" charset="-120"/>
+                <a:latin typeface="HY헤드라인M" pitchFamily="34" charset="0"/>
+                <a:ea typeface="HY헤드라인M" pitchFamily="34" charset="-122"/>
+                <a:cs typeface="HY헤드라인M" pitchFamily="34" charset="-120"/>
               </a:rPr>
               <a:t>USB 어댑터 연결</a:t>
             </a:r>
-            <a:endParaRPr lang="en-US" sz="3000" dirty="0"/>
-          </a:p>
-        </p:txBody>
-      </p:sp>
-      <p:sp>
-        <p:nvSpPr>
-          <p:cNvPr id="7" name="Text 5"/>
+            <a:endParaRPr lang="en-US" sz="2800" dirty="0"/>
+          </a:p>
+        </p:txBody>
+      </p:sp>
+      <p:sp>
+        <p:nvSpPr>
+          <p:cNvPr id="8" name="Text 6"/>
           <p:cNvSpPr/>
           <p:nvPr/>
         </p:nvSpPr>
@@ -6115,7 +6722,7 @@
       </p:sp>
       <p:sp>
         <p:nvSpPr>
-          <p:cNvPr id="8" name="Shape 6"/>
+          <p:cNvPr id="9" name="Shape 7"/>
           <p:cNvSpPr/>
           <p:nvPr/>
         </p:nvSpPr>
@@ -6137,7 +6744,7 @@
       </p:sp>
       <p:sp>
         <p:nvSpPr>
-          <p:cNvPr id="9" name="Text 7"/>
+          <p:cNvPr id="10" name="Text 8"/>
           <p:cNvSpPr/>
           <p:nvPr/>
         </p:nvSpPr>
@@ -6179,7 +6786,7 @@
       </p:sp>
       <p:sp>
         <p:nvSpPr>
-          <p:cNvPr id="10" name="Shape 8"/>
+          <p:cNvPr id="11" name="Shape 9"/>
           <p:cNvSpPr/>
           <p:nvPr/>
         </p:nvSpPr>
@@ -6206,7 +6813,7 @@
       </p:sp>
       <p:pic>
         <p:nvPicPr>
-          <p:cNvPr id="11" name="Image 0" descr="preencoded.png">    </p:cNvPr>
+          <p:cNvPr id="12" name="Image 0" descr="preencoded.png">    </p:cNvPr>
           <p:cNvPicPr>
             <a:picLocks noChangeAspect="1"/>
           </p:cNvPicPr>
@@ -6230,7 +6837,7 @@
       </p:pic>
       <p:sp>
         <p:nvSpPr>
-          <p:cNvPr id="12" name="Text 9"/>
+          <p:cNvPr id="13" name="Text 10"/>
           <p:cNvSpPr/>
           <p:nvPr/>
         </p:nvSpPr>
@@ -6269,7 +6876,7 @@
       </p:sp>
       <p:sp>
         <p:nvSpPr>
-          <p:cNvPr id="13" name="Text 10"/>
+          <p:cNvPr id="14" name="Text 11"/>
           <p:cNvSpPr/>
           <p:nvPr/>
         </p:nvSpPr>
@@ -6308,7 +6915,7 @@
       </p:sp>
       <p:sp>
         <p:nvSpPr>
-          <p:cNvPr id="14" name="Shape 11"/>
+          <p:cNvPr id="15" name="Shape 12"/>
           <p:cNvSpPr/>
           <p:nvPr/>
         </p:nvSpPr>
@@ -6335,7 +6942,7 @@
       </p:sp>
       <p:pic>
         <p:nvPicPr>
-          <p:cNvPr id="15" name="Image 1" descr="preencoded.png">    </p:cNvPr>
+          <p:cNvPr id="16" name="Image 1" descr="preencoded.png">    </p:cNvPr>
           <p:cNvPicPr>
             <a:picLocks noChangeAspect="1"/>
           </p:cNvPicPr>
@@ -6359,7 +6966,7 @@
       </p:pic>
       <p:sp>
         <p:nvSpPr>
-          <p:cNvPr id="16" name="Text 12"/>
+          <p:cNvPr id="17" name="Text 13"/>
           <p:cNvSpPr/>
           <p:nvPr/>
         </p:nvSpPr>
@@ -6398,7 +7005,7 @@
       </p:sp>
       <p:sp>
         <p:nvSpPr>
-          <p:cNvPr id="17" name="Text 13"/>
+          <p:cNvPr id="18" name="Text 14"/>
           <p:cNvSpPr/>
           <p:nvPr/>
         </p:nvSpPr>
@@ -6469,32 +7076,54 @@
       </p:grpSpPr>
       <p:sp>
         <p:nvSpPr>
-          <p:cNvPr id="2" name="Text 0"/>
-          <p:cNvSpPr/>
-          <p:nvPr/>
-        </p:nvSpPr>
-        <p:spPr>
-          <a:xfrm>
-            <a:off x="640080" y="365760"/>
-            <a:ext cx="7315200" cy="320040"/>
-          </a:xfrm>
-          <a:prstGeom prst="rect">
-            <a:avLst/>
-          </a:prstGeom>
-          <a:noFill/>
-          <a:ln/>
-        </p:spPr>
-        <p:txBody>
-          <a:bodyPr wrap="square" lIns="0" tIns="0" rIns="0" bIns="0" rtlCol="0" anchor="ctr"/>
-          <a:lstStyle/>
-          <a:p>
-            <a:pPr indent="0" marL="0">
-              <a:buNone/>
-            </a:pPr>
-            <a:r>
-              <a:rPr lang="en-US" sz="1500" b="1" dirty="0">
-                <a:solidFill>
-                  <a:srgbClr val="666666"/>
+          <p:cNvPr id="2" name="Shape 0"/>
+          <p:cNvSpPr/>
+          <p:nvPr/>
+        </p:nvSpPr>
+        <p:spPr>
+          <a:xfrm>
+            <a:off x="640080" y="347472"/>
+            <a:ext cx="2377440" cy="384048"/>
+          </a:xfrm>
+          <a:prstGeom prst="roundRect">
+            <a:avLst>
+              <a:gd name="adj" fmla="val 50000"/>
+            </a:avLst>
+          </a:prstGeom>
+          <a:solidFill>
+            <a:srgbClr val="FFD400"/>
+          </a:solidFill>
+          <a:ln/>
+        </p:spPr>
+      </p:sp>
+      <p:sp>
+        <p:nvSpPr>
+          <p:cNvPr id="3" name="Text 1"/>
+          <p:cNvSpPr/>
+          <p:nvPr/>
+        </p:nvSpPr>
+        <p:spPr>
+          <a:xfrm>
+            <a:off x="640080" y="347472"/>
+            <a:ext cx="2377440" cy="384048"/>
+          </a:xfrm>
+          <a:prstGeom prst="rect">
+            <a:avLst/>
+          </a:prstGeom>
+          <a:noFill/>
+          <a:ln/>
+        </p:spPr>
+        <p:txBody>
+          <a:bodyPr wrap="square" lIns="0" tIns="0" rIns="0" bIns="0" rtlCol="0" anchor="ctr"/>
+          <a:lstStyle/>
+          <a:p>
+            <a:pPr algn="ctr" indent="0" marL="0">
+              <a:buNone/>
+            </a:pPr>
+            <a:r>
+              <a:rPr lang="en-US" sz="1250" b="1" dirty="0">
+                <a:solidFill>
+                  <a:srgbClr val="1F1F1F"/>
                 </a:solidFill>
                 <a:latin typeface="Malgun Gothic" pitchFamily="34" charset="0"/>
                 <a:ea typeface="Malgun Gothic" pitchFamily="34" charset="-122"/>
@@ -6502,20 +7131,20 @@
               </a:rPr>
               <a:t>계산대미디어 설치 방법</a:t>
             </a:r>
-            <a:endParaRPr lang="en-US" sz="1500" dirty="0"/>
-          </a:p>
-        </p:txBody>
-      </p:sp>
-      <p:sp>
-        <p:nvSpPr>
-          <p:cNvPr id="3" name="Text 1"/>
+            <a:endParaRPr lang="en-US" sz="1250" dirty="0"/>
+          </a:p>
+        </p:txBody>
+      </p:sp>
+      <p:sp>
+        <p:nvSpPr>
+          <p:cNvPr id="4" name="Text 2"/>
           <p:cNvSpPr/>
           <p:nvPr/>
         </p:nvSpPr>
         <p:spPr>
           <a:xfrm>
             <a:off x="9262872" y="365760"/>
-            <a:ext cx="2286000" cy="320040"/>
+            <a:ext cx="2286000" cy="365760"/>
           </a:xfrm>
           <a:prstGeom prst="rect">
             <a:avLst/>
@@ -6547,14 +7176,14 @@
       </p:sp>
       <p:sp>
         <p:nvSpPr>
-          <p:cNvPr id="4" name="Shape 2"/>
-          <p:cNvSpPr/>
-          <p:nvPr/>
-        </p:nvSpPr>
-        <p:spPr>
-          <a:xfrm>
-            <a:off x="640080" y="1143000"/>
-            <a:ext cx="914400" cy="914400"/>
+          <p:cNvPr id="5" name="Shape 3"/>
+          <p:cNvSpPr/>
+          <p:nvPr/>
+        </p:nvSpPr>
+        <p:spPr>
+          <a:xfrm>
+            <a:off x="640080" y="1188720"/>
+            <a:ext cx="960120" cy="960120"/>
           </a:xfrm>
           <a:prstGeom prst="ellipse">
             <a:avLst/>
@@ -6563,18 +7192,25 @@
             <a:srgbClr val="FFD400"/>
           </a:solidFill>
           <a:ln/>
-        </p:spPr>
-      </p:sp>
-      <p:sp>
-        <p:nvSpPr>
-          <p:cNvPr id="5" name="Text 3"/>
-          <p:cNvSpPr/>
-          <p:nvPr/>
-        </p:nvSpPr>
-        <p:spPr>
-          <a:xfrm>
-            <a:off x="640080" y="1143000"/>
-            <a:ext cx="914400" cy="914400"/>
+          <a:effectLst>
+            <a:outerShdw sx="100000" sy="100000" kx="0" ky="0" algn="bl" rotWithShape="0" blurRad="114300" dist="38100" dir="5400000">
+              <a:srgbClr val="666666">
+                <a:alpha val="30000"/>
+              </a:srgbClr>
+            </a:outerShdw>
+          </a:effectLst>
+        </p:spPr>
+      </p:sp>
+      <p:sp>
+        <p:nvSpPr>
+          <p:cNvPr id="6" name="Text 4"/>
+          <p:cNvSpPr/>
+          <p:nvPr/>
+        </p:nvSpPr>
+        <p:spPr>
+          <a:xfrm>
+            <a:off x="640080" y="1188720"/>
+            <a:ext cx="960120" cy="960120"/>
           </a:xfrm>
           <a:prstGeom prst="rect">
             <a:avLst/>
@@ -6590,30 +7226,30 @@
               <a:buNone/>
             </a:pPr>
             <a:r>
-              <a:rPr lang="en-US" sz="3600" b="1" dirty="0">
+              <a:rPr lang="en-US" sz="3200" dirty="0">
                 <a:solidFill>
                   <a:srgbClr val="1F1F1F"/>
                 </a:solidFill>
-                <a:latin typeface="Malgun Gothic" pitchFamily="34" charset="0"/>
-                <a:ea typeface="Malgun Gothic" pitchFamily="34" charset="-122"/>
-                <a:cs typeface="Malgun Gothic" pitchFamily="34" charset="-120"/>
+                <a:latin typeface="HY헤드라인M" pitchFamily="34" charset="0"/>
+                <a:ea typeface="HY헤드라인M" pitchFamily="34" charset="-122"/>
+                <a:cs typeface="HY헤드라인M" pitchFamily="34" charset="-120"/>
               </a:rPr>
               <a:t>3</a:t>
             </a:r>
-            <a:endParaRPr lang="en-US" sz="3600" dirty="0"/>
-          </a:p>
-        </p:txBody>
-      </p:sp>
-      <p:sp>
-        <p:nvSpPr>
-          <p:cNvPr id="6" name="Text 4"/>
-          <p:cNvSpPr/>
-          <p:nvPr/>
-        </p:nvSpPr>
-        <p:spPr>
-          <a:xfrm>
-            <a:off x="1783080" y="1143000"/>
-            <a:ext cx="4206240" cy="914400"/>
+            <a:endParaRPr lang="en-US" sz="3200" dirty="0"/>
+          </a:p>
+        </p:txBody>
+      </p:sp>
+      <p:sp>
+        <p:nvSpPr>
+          <p:cNvPr id="7" name="Text 5"/>
+          <p:cNvSpPr/>
+          <p:nvPr/>
+        </p:nvSpPr>
+        <p:spPr>
+          <a:xfrm>
+            <a:off x="1874520" y="1188720"/>
+            <a:ext cx="4114800" cy="960120"/>
           </a:xfrm>
           <a:prstGeom prst="rect">
             <a:avLst/>
@@ -6629,23 +7265,23 @@
               <a:buNone/>
             </a:pPr>
             <a:r>
-              <a:rPr lang="en-US" sz="3000" b="1" dirty="0">
+              <a:rPr lang="en-US" sz="2800" dirty="0">
                 <a:solidFill>
                   <a:srgbClr val="222222"/>
                 </a:solidFill>
-                <a:latin typeface="Malgun Gothic" pitchFamily="34" charset="0"/>
-                <a:ea typeface="Malgun Gothic" pitchFamily="34" charset="-122"/>
-                <a:cs typeface="Malgun Gothic" pitchFamily="34" charset="-120"/>
+                <a:latin typeface="HY헤드라인M" pitchFamily="34" charset="0"/>
+                <a:ea typeface="HY헤드라인M" pitchFamily="34" charset="-122"/>
+                <a:cs typeface="HY헤드라인M" pitchFamily="34" charset="-120"/>
               </a:rPr>
               <a:t>콘센트 연결</a:t>
             </a:r>
-            <a:endParaRPr lang="en-US" sz="3000" dirty="0"/>
-          </a:p>
-        </p:txBody>
-      </p:sp>
-      <p:sp>
-        <p:nvSpPr>
-          <p:cNvPr id="7" name="Text 5"/>
+            <a:endParaRPr lang="en-US" sz="2800" dirty="0"/>
+          </a:p>
+        </p:txBody>
+      </p:sp>
+      <p:sp>
+        <p:nvSpPr>
+          <p:cNvPr id="8" name="Text 6"/>
           <p:cNvSpPr/>
           <p:nvPr/>
         </p:nvSpPr>
@@ -6687,7 +7323,7 @@
       </p:sp>
       <p:sp>
         <p:nvSpPr>
-          <p:cNvPr id="8" name="Shape 6"/>
+          <p:cNvPr id="9" name="Shape 7"/>
           <p:cNvSpPr/>
           <p:nvPr/>
         </p:nvSpPr>
@@ -6709,7 +7345,7 @@
       </p:sp>
       <p:sp>
         <p:nvSpPr>
-          <p:cNvPr id="9" name="Text 7"/>
+          <p:cNvPr id="10" name="Text 8"/>
           <p:cNvSpPr/>
           <p:nvPr/>
         </p:nvSpPr>
@@ -6751,7 +7387,7 @@
       </p:sp>
       <p:sp>
         <p:nvSpPr>
-          <p:cNvPr id="10" name="Shape 8"/>
+          <p:cNvPr id="11" name="Shape 9"/>
           <p:cNvSpPr/>
           <p:nvPr/>
         </p:nvSpPr>
@@ -6778,7 +7414,7 @@
       </p:sp>
       <p:pic>
         <p:nvPicPr>
-          <p:cNvPr id="11" name="Image 0" descr="preencoded.png">    </p:cNvPr>
+          <p:cNvPr id="12" name="Image 0" descr="preencoded.png">    </p:cNvPr>
           <p:cNvPicPr>
             <a:picLocks noChangeAspect="1"/>
           </p:cNvPicPr>
@@ -6802,7 +7438,7 @@
       </p:pic>
       <p:sp>
         <p:nvSpPr>
-          <p:cNvPr id="12" name="Text 9"/>
+          <p:cNvPr id="13" name="Text 10"/>
           <p:cNvSpPr/>
           <p:nvPr/>
         </p:nvSpPr>
@@ -6841,7 +7477,7 @@
       </p:sp>
       <p:sp>
         <p:nvSpPr>
-          <p:cNvPr id="13" name="Text 10"/>
+          <p:cNvPr id="14" name="Text 11"/>
           <p:cNvSpPr/>
           <p:nvPr/>
         </p:nvSpPr>
@@ -6880,7 +7516,7 @@
       </p:sp>
       <p:sp>
         <p:nvSpPr>
-          <p:cNvPr id="14" name="Shape 11"/>
+          <p:cNvPr id="15" name="Shape 12"/>
           <p:cNvSpPr/>
           <p:nvPr/>
         </p:nvSpPr>
@@ -6907,7 +7543,7 @@
       </p:sp>
       <p:pic>
         <p:nvPicPr>
-          <p:cNvPr id="15" name="Image 1" descr="preencoded.png">    </p:cNvPr>
+          <p:cNvPr id="16" name="Image 1" descr="preencoded.png">    </p:cNvPr>
           <p:cNvPicPr>
             <a:picLocks noChangeAspect="1"/>
           </p:cNvPicPr>
@@ -6931,7 +7567,7 @@
       </p:pic>
       <p:sp>
         <p:nvSpPr>
-          <p:cNvPr id="16" name="Text 12"/>
+          <p:cNvPr id="17" name="Text 13"/>
           <p:cNvSpPr/>
           <p:nvPr/>
         </p:nvSpPr>
@@ -6970,7 +7606,7 @@
       </p:sp>
       <p:sp>
         <p:nvSpPr>
-          <p:cNvPr id="17" name="Text 13"/>
+          <p:cNvPr id="18" name="Text 14"/>
           <p:cNvSpPr/>
           <p:nvPr/>
         </p:nvSpPr>
@@ -7041,32 +7677,54 @@
       </p:grpSpPr>
       <p:sp>
         <p:nvSpPr>
-          <p:cNvPr id="2" name="Text 0"/>
-          <p:cNvSpPr/>
-          <p:nvPr/>
-        </p:nvSpPr>
-        <p:spPr>
-          <a:xfrm>
-            <a:off x="640080" y="365760"/>
-            <a:ext cx="7315200" cy="320040"/>
-          </a:xfrm>
-          <a:prstGeom prst="rect">
-            <a:avLst/>
-          </a:prstGeom>
-          <a:noFill/>
-          <a:ln/>
-        </p:spPr>
-        <p:txBody>
-          <a:bodyPr wrap="square" lIns="0" tIns="0" rIns="0" bIns="0" rtlCol="0" anchor="ctr"/>
-          <a:lstStyle/>
-          <a:p>
-            <a:pPr indent="0" marL="0">
-              <a:buNone/>
-            </a:pPr>
-            <a:r>
-              <a:rPr lang="en-US" sz="1500" b="1" dirty="0">
-                <a:solidFill>
-                  <a:srgbClr val="666666"/>
+          <p:cNvPr id="2" name="Shape 0"/>
+          <p:cNvSpPr/>
+          <p:nvPr/>
+        </p:nvSpPr>
+        <p:spPr>
+          <a:xfrm>
+            <a:off x="640080" y="347472"/>
+            <a:ext cx="2377440" cy="384048"/>
+          </a:xfrm>
+          <a:prstGeom prst="roundRect">
+            <a:avLst>
+              <a:gd name="adj" fmla="val 50000"/>
+            </a:avLst>
+          </a:prstGeom>
+          <a:solidFill>
+            <a:srgbClr val="FFD400"/>
+          </a:solidFill>
+          <a:ln/>
+        </p:spPr>
+      </p:sp>
+      <p:sp>
+        <p:nvSpPr>
+          <p:cNvPr id="3" name="Text 1"/>
+          <p:cNvSpPr/>
+          <p:nvPr/>
+        </p:nvSpPr>
+        <p:spPr>
+          <a:xfrm>
+            <a:off x="640080" y="347472"/>
+            <a:ext cx="2377440" cy="384048"/>
+          </a:xfrm>
+          <a:prstGeom prst="rect">
+            <a:avLst/>
+          </a:prstGeom>
+          <a:noFill/>
+          <a:ln/>
+        </p:spPr>
+        <p:txBody>
+          <a:bodyPr wrap="square" lIns="0" tIns="0" rIns="0" bIns="0" rtlCol="0" anchor="ctr"/>
+          <a:lstStyle/>
+          <a:p>
+            <a:pPr algn="ctr" indent="0" marL="0">
+              <a:buNone/>
+            </a:pPr>
+            <a:r>
+              <a:rPr lang="en-US" sz="1250" b="1" dirty="0">
+                <a:solidFill>
+                  <a:srgbClr val="1F1F1F"/>
                 </a:solidFill>
                 <a:latin typeface="Malgun Gothic" pitchFamily="34" charset="0"/>
                 <a:ea typeface="Malgun Gothic" pitchFamily="34" charset="-122"/>
@@ -7074,20 +7732,20 @@
               </a:rPr>
               <a:t>계산대미디어 설치 방법</a:t>
             </a:r>
-            <a:endParaRPr lang="en-US" sz="1500" dirty="0"/>
-          </a:p>
-        </p:txBody>
-      </p:sp>
-      <p:sp>
-        <p:nvSpPr>
-          <p:cNvPr id="3" name="Text 1"/>
+            <a:endParaRPr lang="en-US" sz="1250" dirty="0"/>
+          </a:p>
+        </p:txBody>
+      </p:sp>
+      <p:sp>
+        <p:nvSpPr>
+          <p:cNvPr id="4" name="Text 2"/>
           <p:cNvSpPr/>
           <p:nvPr/>
         </p:nvSpPr>
         <p:spPr>
           <a:xfrm>
             <a:off x="9262872" y="365760"/>
-            <a:ext cx="2286000" cy="320040"/>
+            <a:ext cx="2286000" cy="365760"/>
           </a:xfrm>
           <a:prstGeom prst="rect">
             <a:avLst/>
@@ -7119,14 +7777,14 @@
       </p:sp>
       <p:sp>
         <p:nvSpPr>
-          <p:cNvPr id="4" name="Shape 2"/>
-          <p:cNvSpPr/>
-          <p:nvPr/>
-        </p:nvSpPr>
-        <p:spPr>
-          <a:xfrm>
-            <a:off x="640080" y="1143000"/>
-            <a:ext cx="914400" cy="914400"/>
+          <p:cNvPr id="5" name="Shape 3"/>
+          <p:cNvSpPr/>
+          <p:nvPr/>
+        </p:nvSpPr>
+        <p:spPr>
+          <a:xfrm>
+            <a:off x="640080" y="1188720"/>
+            <a:ext cx="960120" cy="960120"/>
           </a:xfrm>
           <a:prstGeom prst="ellipse">
             <a:avLst/>
@@ -7135,18 +7793,25 @@
             <a:srgbClr val="FFD400"/>
           </a:solidFill>
           <a:ln/>
-        </p:spPr>
-      </p:sp>
-      <p:sp>
-        <p:nvSpPr>
-          <p:cNvPr id="5" name="Text 3"/>
-          <p:cNvSpPr/>
-          <p:nvPr/>
-        </p:nvSpPr>
-        <p:spPr>
-          <a:xfrm>
-            <a:off x="640080" y="1143000"/>
-            <a:ext cx="914400" cy="914400"/>
+          <a:effectLst>
+            <a:outerShdw sx="100000" sy="100000" kx="0" ky="0" algn="bl" rotWithShape="0" blurRad="114300" dist="38100" dir="5400000">
+              <a:srgbClr val="666666">
+                <a:alpha val="30000"/>
+              </a:srgbClr>
+            </a:outerShdw>
+          </a:effectLst>
+        </p:spPr>
+      </p:sp>
+      <p:sp>
+        <p:nvSpPr>
+          <p:cNvPr id="6" name="Text 4"/>
+          <p:cNvSpPr/>
+          <p:nvPr/>
+        </p:nvSpPr>
+        <p:spPr>
+          <a:xfrm>
+            <a:off x="640080" y="1188720"/>
+            <a:ext cx="960120" cy="960120"/>
           </a:xfrm>
           <a:prstGeom prst="rect">
             <a:avLst/>
@@ -7162,30 +7827,30 @@
               <a:buNone/>
             </a:pPr>
             <a:r>
-              <a:rPr lang="en-US" sz="3600" b="1" dirty="0">
+              <a:rPr lang="en-US" sz="3200" dirty="0">
                 <a:solidFill>
                   <a:srgbClr val="1F1F1F"/>
                 </a:solidFill>
-                <a:latin typeface="Malgun Gothic" pitchFamily="34" charset="0"/>
-                <a:ea typeface="Malgun Gothic" pitchFamily="34" charset="-122"/>
-                <a:cs typeface="Malgun Gothic" pitchFamily="34" charset="-120"/>
+                <a:latin typeface="HY헤드라인M" pitchFamily="34" charset="0"/>
+                <a:ea typeface="HY헤드라인M" pitchFamily="34" charset="-122"/>
+                <a:cs typeface="HY헤드라인M" pitchFamily="34" charset="-120"/>
               </a:rPr>
               <a:t>4</a:t>
             </a:r>
-            <a:endParaRPr lang="en-US" sz="3600" dirty="0"/>
-          </a:p>
-        </p:txBody>
-      </p:sp>
-      <p:sp>
-        <p:nvSpPr>
-          <p:cNvPr id="6" name="Text 4"/>
-          <p:cNvSpPr/>
-          <p:nvPr/>
-        </p:nvSpPr>
-        <p:spPr>
-          <a:xfrm>
-            <a:off x="1783080" y="1143000"/>
-            <a:ext cx="4206240" cy="914400"/>
+            <a:endParaRPr lang="en-US" sz="3200" dirty="0"/>
+          </a:p>
+        </p:txBody>
+      </p:sp>
+      <p:sp>
+        <p:nvSpPr>
+          <p:cNvPr id="7" name="Text 5"/>
+          <p:cNvSpPr/>
+          <p:nvPr/>
+        </p:nvSpPr>
+        <p:spPr>
+          <a:xfrm>
+            <a:off x="1874520" y="1188720"/>
+            <a:ext cx="4114800" cy="960120"/>
           </a:xfrm>
           <a:prstGeom prst="rect">
             <a:avLst/>
@@ -7201,23 +7866,23 @@
               <a:buNone/>
             </a:pPr>
             <a:r>
-              <a:rPr lang="en-US" sz="3000" b="1" dirty="0">
+              <a:rPr lang="en-US" sz="2800" dirty="0">
                 <a:solidFill>
                   <a:srgbClr val="222222"/>
                 </a:solidFill>
-                <a:latin typeface="Malgun Gothic" pitchFamily="34" charset="0"/>
-                <a:ea typeface="Malgun Gothic" pitchFamily="34" charset="-122"/>
-                <a:cs typeface="Malgun Gothic" pitchFamily="34" charset="-120"/>
+                <a:latin typeface="HY헤드라인M" pitchFamily="34" charset="0"/>
+                <a:ea typeface="HY헤드라인M" pitchFamily="34" charset="-122"/>
+                <a:cs typeface="HY헤드라인M" pitchFamily="34" charset="-120"/>
               </a:rPr>
               <a:t>AI 카메라 연결</a:t>
             </a:r>
-            <a:endParaRPr lang="en-US" sz="3000" dirty="0"/>
-          </a:p>
-        </p:txBody>
-      </p:sp>
-      <p:sp>
-        <p:nvSpPr>
-          <p:cNvPr id="7" name="Text 5"/>
+            <a:endParaRPr lang="en-US" sz="2800" dirty="0"/>
+          </a:p>
+        </p:txBody>
+      </p:sp>
+      <p:sp>
+        <p:nvSpPr>
+          <p:cNvPr id="8" name="Text 6"/>
           <p:cNvSpPr/>
           <p:nvPr/>
         </p:nvSpPr>
@@ -7259,7 +7924,7 @@
       </p:sp>
       <p:sp>
         <p:nvSpPr>
-          <p:cNvPr id="8" name="Shape 6"/>
+          <p:cNvPr id="9" name="Shape 7"/>
           <p:cNvSpPr/>
           <p:nvPr/>
         </p:nvSpPr>
@@ -7281,7 +7946,7 @@
       </p:sp>
       <p:sp>
         <p:nvSpPr>
-          <p:cNvPr id="9" name="Text 7"/>
+          <p:cNvPr id="10" name="Text 8"/>
           <p:cNvSpPr/>
           <p:nvPr/>
         </p:nvSpPr>
@@ -7323,7 +7988,7 @@
       </p:sp>
       <p:sp>
         <p:nvSpPr>
-          <p:cNvPr id="10" name="Shape 8"/>
+          <p:cNvPr id="11" name="Shape 9"/>
           <p:cNvSpPr/>
           <p:nvPr/>
         </p:nvSpPr>
@@ -7350,7 +8015,7 @@
       </p:sp>
       <p:pic>
         <p:nvPicPr>
-          <p:cNvPr id="11" name="Image 0" descr="preencoded.png">    </p:cNvPr>
+          <p:cNvPr id="12" name="Image 0" descr="preencoded.png">    </p:cNvPr>
           <p:cNvPicPr>
             <a:picLocks noChangeAspect="1"/>
           </p:cNvPicPr>
@@ -7374,7 +8039,7 @@
       </p:pic>
       <p:sp>
         <p:nvSpPr>
-          <p:cNvPr id="12" name="Text 9"/>
+          <p:cNvPr id="13" name="Text 10"/>
           <p:cNvSpPr/>
           <p:nvPr/>
         </p:nvSpPr>
@@ -7413,7 +8078,7 @@
       </p:sp>
       <p:sp>
         <p:nvSpPr>
-          <p:cNvPr id="13" name="Text 10"/>
+          <p:cNvPr id="14" name="Text 11"/>
           <p:cNvSpPr/>
           <p:nvPr/>
         </p:nvSpPr>
@@ -7452,7 +8117,7 @@
       </p:sp>
       <p:sp>
         <p:nvSpPr>
-          <p:cNvPr id="14" name="Shape 11"/>
+          <p:cNvPr id="15" name="Shape 12"/>
           <p:cNvSpPr/>
           <p:nvPr/>
         </p:nvSpPr>
@@ -7479,7 +8144,7 @@
       </p:sp>
       <p:pic>
         <p:nvPicPr>
-          <p:cNvPr id="15" name="Image 1" descr="preencoded.png">    </p:cNvPr>
+          <p:cNvPr id="16" name="Image 1" descr="preencoded.png">    </p:cNvPr>
           <p:cNvPicPr>
             <a:picLocks noChangeAspect="1"/>
           </p:cNvPicPr>
@@ -7503,7 +8168,7 @@
       </p:pic>
       <p:sp>
         <p:nvSpPr>
-          <p:cNvPr id="16" name="Text 12"/>
+          <p:cNvPr id="17" name="Text 13"/>
           <p:cNvSpPr/>
           <p:nvPr/>
         </p:nvSpPr>
@@ -7542,7 +8207,7 @@
       </p:sp>
       <p:sp>
         <p:nvSpPr>
-          <p:cNvPr id="17" name="Text 13"/>
+          <p:cNvPr id="18" name="Text 14"/>
           <p:cNvSpPr/>
           <p:nvPr/>
         </p:nvSpPr>
@@ -7593,7 +8258,7 @@
     <p:bg>
       <p:bgPr>
         <a:solidFill>
-          <a:srgbClr val="FFFFFF"/>
+          <a:srgbClr val="F5F5F3"/>
         </a:solidFill>
       </p:bgPr>
     </p:bg>
@@ -7613,75 +8278,14 @@
       </p:grpSpPr>
       <p:sp>
         <p:nvSpPr>
-          <p:cNvPr id="2" name="Text 0"/>
-          <p:cNvSpPr/>
-          <p:nvPr/>
-        </p:nvSpPr>
-        <p:spPr>
-          <a:xfrm>
-            <a:off x="640080" y="502920"/>
-            <a:ext cx="7315200" cy="731520"/>
-          </a:xfrm>
-          <a:prstGeom prst="rect">
-            <a:avLst/>
-          </a:prstGeom>
-          <a:noFill/>
-          <a:ln/>
-        </p:spPr>
-        <p:txBody>
-          <a:bodyPr wrap="square" lIns="0" tIns="0" rIns="0" bIns="0" rtlCol="0" anchor="ctr"/>
-          <a:lstStyle/>
-          <a:p>
-            <a:pPr indent="0" marL="0">
-              <a:buNone/>
-            </a:pPr>
-            <a:r>
-              <a:rPr lang="en-US" sz="3600" b="1" dirty="0">
-                <a:solidFill>
-                  <a:srgbClr val="222222"/>
-                </a:solidFill>
-                <a:latin typeface="Malgun Gothic" pitchFamily="34" charset="0"/>
-                <a:ea typeface="Malgun Gothic" pitchFamily="34" charset="-122"/>
-                <a:cs typeface="Malgun Gothic" pitchFamily="34" charset="-120"/>
-              </a:rPr>
-              <a:t>설치 개요</a:t>
-            </a:r>
-            <a:endParaRPr lang="en-US" sz="3600" dirty="0"/>
-          </a:p>
-        </p:txBody>
-      </p:sp>
-      <p:sp>
-        <p:nvSpPr>
-          <p:cNvPr id="3" name="Shape 1"/>
-          <p:cNvSpPr/>
-          <p:nvPr/>
-        </p:nvSpPr>
-        <p:spPr>
-          <a:xfrm>
-            <a:off x="640080" y="1645920"/>
-            <a:ext cx="5257800" cy="4206240"/>
-          </a:xfrm>
-          <a:prstGeom prst="roundRect">
-            <a:avLst>
-              <a:gd name="adj" fmla="val 2174"/>
-            </a:avLst>
-          </a:prstGeom>
-          <a:solidFill>
-            <a:srgbClr val="F5F5F5"/>
-          </a:solidFill>
-          <a:ln/>
-        </p:spPr>
-      </p:sp>
-      <p:sp>
-        <p:nvSpPr>
-          <p:cNvPr id="4" name="Shape 2"/>
-          <p:cNvSpPr/>
-          <p:nvPr/>
-        </p:nvSpPr>
-        <p:spPr>
-          <a:xfrm>
-            <a:off x="1051560" y="2057400"/>
-            <a:ext cx="822960" cy="822960"/>
+          <p:cNvPr id="2" name="Shape 0"/>
+          <p:cNvSpPr/>
+          <p:nvPr/>
+        </p:nvSpPr>
+        <p:spPr>
+          <a:xfrm>
+            <a:off x="11155680" y="-1005840"/>
+            <a:ext cx="2377440" cy="2377440"/>
           </a:xfrm>
           <a:prstGeom prst="ellipse">
             <a:avLst/>
@@ -7694,7 +8298,75 @@
       </p:sp>
       <p:sp>
         <p:nvSpPr>
-          <p:cNvPr id="5" name="Text 3"/>
+          <p:cNvPr id="3" name="Text 1"/>
+          <p:cNvSpPr/>
+          <p:nvPr/>
+        </p:nvSpPr>
+        <p:spPr>
+          <a:xfrm>
+            <a:off x="640080" y="502920"/>
+            <a:ext cx="7315200" cy="731520"/>
+          </a:xfrm>
+          <a:prstGeom prst="rect">
+            <a:avLst/>
+          </a:prstGeom>
+          <a:noFill/>
+          <a:ln/>
+        </p:spPr>
+        <p:txBody>
+          <a:bodyPr wrap="square" lIns="0" tIns="0" rIns="0" bIns="0" rtlCol="0" anchor="ctr"/>
+          <a:lstStyle/>
+          <a:p>
+            <a:pPr indent="0" marL="0">
+              <a:buNone/>
+            </a:pPr>
+            <a:r>
+              <a:rPr lang="en-US" sz="3400" dirty="0">
+                <a:solidFill>
+                  <a:srgbClr val="222222"/>
+                </a:solidFill>
+                <a:latin typeface="HY헤드라인M" pitchFamily="34" charset="0"/>
+                <a:ea typeface="HY헤드라인M" pitchFamily="34" charset="-122"/>
+                <a:cs typeface="HY헤드라인M" pitchFamily="34" charset="-120"/>
+              </a:rPr>
+              <a:t>설치 개요</a:t>
+            </a:r>
+            <a:endParaRPr lang="en-US" sz="3400" dirty="0"/>
+          </a:p>
+        </p:txBody>
+      </p:sp>
+      <p:sp>
+        <p:nvSpPr>
+          <p:cNvPr id="4" name="Shape 2"/>
+          <p:cNvSpPr/>
+          <p:nvPr/>
+        </p:nvSpPr>
+        <p:spPr>
+          <a:xfrm>
+            <a:off x="640080" y="1645920"/>
+            <a:ext cx="5257800" cy="4206240"/>
+          </a:xfrm>
+          <a:prstGeom prst="roundRect">
+            <a:avLst>
+              <a:gd name="adj" fmla="val 2609"/>
+            </a:avLst>
+          </a:prstGeom>
+          <a:solidFill>
+            <a:srgbClr val="FFFFFF"/>
+          </a:solidFill>
+          <a:ln/>
+          <a:effectLst>
+            <a:outerShdw sx="100000" sy="100000" kx="0" ky="0" algn="bl" rotWithShape="0" blurRad="114300" dist="38100" dir="5400000">
+              <a:srgbClr val="666666">
+                <a:alpha val="30000"/>
+              </a:srgbClr>
+            </a:outerShdw>
+          </a:effectLst>
+        </p:spPr>
+      </p:sp>
+      <p:sp>
+        <p:nvSpPr>
+          <p:cNvPr id="5" name="Shape 3"/>
           <p:cNvSpPr/>
           <p:nvPr/>
         </p:nvSpPr>
@@ -7703,6 +8375,26 @@
             <a:off x="1051560" y="2057400"/>
             <a:ext cx="822960" cy="822960"/>
           </a:xfrm>
+          <a:prstGeom prst="ellipse">
+            <a:avLst/>
+          </a:prstGeom>
+          <a:solidFill>
+            <a:srgbClr val="FFD400"/>
+          </a:solidFill>
+          <a:ln/>
+        </p:spPr>
+      </p:sp>
+      <p:sp>
+        <p:nvSpPr>
+          <p:cNvPr id="6" name="Text 4"/>
+          <p:cNvSpPr/>
+          <p:nvPr/>
+        </p:nvSpPr>
+        <p:spPr>
+          <a:xfrm>
+            <a:off x="1051560" y="2057400"/>
+            <a:ext cx="822960" cy="822960"/>
+          </a:xfrm>
           <a:prstGeom prst="rect">
             <a:avLst/>
           </a:prstGeom>
@@ -7717,23 +8409,23 @@
               <a:buNone/>
             </a:pPr>
             <a:r>
-              <a:rPr lang="en-US" sz="2200" b="1" dirty="0">
+              <a:rPr lang="en-US" sz="2000" dirty="0">
                 <a:solidFill>
                   <a:srgbClr val="1F1F1F"/>
                 </a:solidFill>
-                <a:latin typeface="Malgun Gothic" pitchFamily="34" charset="0"/>
-                <a:ea typeface="Malgun Gothic" pitchFamily="34" charset="-122"/>
-                <a:cs typeface="Malgun Gothic" pitchFamily="34" charset="-120"/>
+                <a:latin typeface="HY헤드라인M" pitchFamily="34" charset="0"/>
+                <a:ea typeface="HY헤드라인M" pitchFamily="34" charset="-122"/>
+                <a:cs typeface="HY헤드라인M" pitchFamily="34" charset="-120"/>
               </a:rPr>
               <a:t>01</a:t>
             </a:r>
-            <a:endParaRPr lang="en-US" sz="2200" dirty="0"/>
-          </a:p>
-        </p:txBody>
-      </p:sp>
-      <p:sp>
-        <p:nvSpPr>
-          <p:cNvPr id="6" name="Text 4"/>
+            <a:endParaRPr lang="en-US" sz="2000" dirty="0"/>
+          </a:p>
+        </p:txBody>
+      </p:sp>
+      <p:sp>
+        <p:nvSpPr>
+          <p:cNvPr id="7" name="Text 5"/>
           <p:cNvSpPr/>
           <p:nvPr/>
         </p:nvSpPr>
@@ -7756,23 +8448,23 @@
               <a:buNone/>
             </a:pPr>
             <a:r>
-              <a:rPr lang="en-US" sz="2800" b="1" dirty="0">
+              <a:rPr lang="en-US" sz="2600" dirty="0">
                 <a:solidFill>
                   <a:srgbClr val="222222"/>
                 </a:solidFill>
-                <a:latin typeface="Malgun Gothic" pitchFamily="34" charset="0"/>
-                <a:ea typeface="Malgun Gothic" pitchFamily="34" charset="-122"/>
-                <a:cs typeface="Malgun Gothic" pitchFamily="34" charset="-120"/>
+                <a:latin typeface="HY헤드라인M" pitchFamily="34" charset="0"/>
+                <a:ea typeface="HY헤드라인M" pitchFamily="34" charset="-122"/>
+                <a:cs typeface="HY헤드라인M" pitchFamily="34" charset="-120"/>
               </a:rPr>
               <a:t>동선스크린</a:t>
             </a:r>
-            <a:endParaRPr lang="en-US" sz="2800" dirty="0"/>
-          </a:p>
-        </p:txBody>
-      </p:sp>
-      <p:sp>
-        <p:nvSpPr>
-          <p:cNvPr id="7" name="Text 5"/>
+            <a:endParaRPr lang="en-US" sz="2600" dirty="0"/>
+          </a:p>
+        </p:txBody>
+      </p:sp>
+      <p:sp>
+        <p:nvSpPr>
+          <p:cNvPr id="8" name="Text 6"/>
           <p:cNvSpPr/>
           <p:nvPr/>
         </p:nvSpPr>
@@ -7857,7 +8549,7 @@
       </p:sp>
       <p:sp>
         <p:nvSpPr>
-          <p:cNvPr id="8" name="Shape 6"/>
+          <p:cNvPr id="9" name="Shape 7"/>
           <p:cNvSpPr/>
           <p:nvPr/>
         </p:nvSpPr>
@@ -7868,18 +8560,25 @@
           </a:xfrm>
           <a:prstGeom prst="roundRect">
             <a:avLst>
-              <a:gd name="adj" fmla="val 2174"/>
+              <a:gd name="adj" fmla="val 2609"/>
             </a:avLst>
           </a:prstGeom>
           <a:solidFill>
-            <a:srgbClr val="F5F5F5"/>
+            <a:srgbClr val="FFFFFF"/>
           </a:solidFill>
           <a:ln/>
-        </p:spPr>
-      </p:sp>
-      <p:sp>
-        <p:nvSpPr>
-          <p:cNvPr id="9" name="Shape 7"/>
+          <a:effectLst>
+            <a:outerShdw sx="100000" sy="100000" kx="0" ky="0" algn="bl" rotWithShape="0" blurRad="114300" dist="38100" dir="5400000">
+              <a:srgbClr val="666666">
+                <a:alpha val="30000"/>
+              </a:srgbClr>
+            </a:outerShdw>
+          </a:effectLst>
+        </p:spPr>
+      </p:sp>
+      <p:sp>
+        <p:nvSpPr>
+          <p:cNvPr id="10" name="Shape 8"/>
           <p:cNvSpPr/>
           <p:nvPr/>
         </p:nvSpPr>
@@ -7899,7 +8598,7 @@
       </p:sp>
       <p:sp>
         <p:nvSpPr>
-          <p:cNvPr id="10" name="Text 8"/>
+          <p:cNvPr id="11" name="Text 9"/>
           <p:cNvSpPr/>
           <p:nvPr/>
         </p:nvSpPr>
@@ -7922,23 +8621,23 @@
               <a:buNone/>
             </a:pPr>
             <a:r>
-              <a:rPr lang="en-US" sz="2200" b="1" dirty="0">
+              <a:rPr lang="en-US" sz="2000" dirty="0">
                 <a:solidFill>
                   <a:srgbClr val="1F1F1F"/>
                 </a:solidFill>
-                <a:latin typeface="Malgun Gothic" pitchFamily="34" charset="0"/>
-                <a:ea typeface="Malgun Gothic" pitchFamily="34" charset="-122"/>
-                <a:cs typeface="Malgun Gothic" pitchFamily="34" charset="-120"/>
+                <a:latin typeface="HY헤드라인M" pitchFamily="34" charset="0"/>
+                <a:ea typeface="HY헤드라인M" pitchFamily="34" charset="-122"/>
+                <a:cs typeface="HY헤드라인M" pitchFamily="34" charset="-120"/>
               </a:rPr>
               <a:t>02</a:t>
             </a:r>
-            <a:endParaRPr lang="en-US" sz="2200" dirty="0"/>
-          </a:p>
-        </p:txBody>
-      </p:sp>
-      <p:sp>
-        <p:nvSpPr>
-          <p:cNvPr id="11" name="Text 9"/>
+            <a:endParaRPr lang="en-US" sz="2000" dirty="0"/>
+          </a:p>
+        </p:txBody>
+      </p:sp>
+      <p:sp>
+        <p:nvSpPr>
+          <p:cNvPr id="12" name="Text 10"/>
           <p:cNvSpPr/>
           <p:nvPr/>
         </p:nvSpPr>
@@ -7961,23 +8660,23 @@
               <a:buNone/>
             </a:pPr>
             <a:r>
-              <a:rPr lang="en-US" sz="2800" b="1" dirty="0">
+              <a:rPr lang="en-US" sz="2600" dirty="0">
                 <a:solidFill>
                   <a:srgbClr val="222222"/>
                 </a:solidFill>
-                <a:latin typeface="Malgun Gothic" pitchFamily="34" charset="0"/>
-                <a:ea typeface="Malgun Gothic" pitchFamily="34" charset="-122"/>
-                <a:cs typeface="Malgun Gothic" pitchFamily="34" charset="-120"/>
+                <a:latin typeface="HY헤드라인M" pitchFamily="34" charset="0"/>
+                <a:ea typeface="HY헤드라인M" pitchFamily="34" charset="-122"/>
+                <a:cs typeface="HY헤드라인M" pitchFamily="34" charset="-120"/>
               </a:rPr>
               <a:t>계산대미디어</a:t>
             </a:r>
-            <a:endParaRPr lang="en-US" sz="2800" dirty="0"/>
-          </a:p>
-        </p:txBody>
-      </p:sp>
-      <p:sp>
-        <p:nvSpPr>
-          <p:cNvPr id="12" name="Text 10"/>
+            <a:endParaRPr lang="en-US" sz="2600" dirty="0"/>
+          </a:p>
+        </p:txBody>
+      </p:sp>
+      <p:sp>
+        <p:nvSpPr>
+          <p:cNvPr id="13" name="Text 11"/>
           <p:cNvSpPr/>
           <p:nvPr/>
         </p:nvSpPr>
@@ -8094,32 +8793,54 @@
       </p:grpSpPr>
       <p:sp>
         <p:nvSpPr>
-          <p:cNvPr id="2" name="Text 0"/>
-          <p:cNvSpPr/>
-          <p:nvPr/>
-        </p:nvSpPr>
-        <p:spPr>
-          <a:xfrm>
-            <a:off x="640080" y="365760"/>
-            <a:ext cx="7315200" cy="320040"/>
-          </a:xfrm>
-          <a:prstGeom prst="rect">
-            <a:avLst/>
-          </a:prstGeom>
-          <a:noFill/>
-          <a:ln/>
-        </p:spPr>
-        <p:txBody>
-          <a:bodyPr wrap="square" lIns="0" tIns="0" rIns="0" bIns="0" rtlCol="0" anchor="ctr"/>
-          <a:lstStyle/>
-          <a:p>
-            <a:pPr indent="0" marL="0">
-              <a:buNone/>
-            </a:pPr>
-            <a:r>
-              <a:rPr lang="en-US" sz="1500" b="1" dirty="0">
-                <a:solidFill>
-                  <a:srgbClr val="666666"/>
+          <p:cNvPr id="2" name="Shape 0"/>
+          <p:cNvSpPr/>
+          <p:nvPr/>
+        </p:nvSpPr>
+        <p:spPr>
+          <a:xfrm>
+            <a:off x="640080" y="347472"/>
+            <a:ext cx="2377440" cy="384048"/>
+          </a:xfrm>
+          <a:prstGeom prst="roundRect">
+            <a:avLst>
+              <a:gd name="adj" fmla="val 50000"/>
+            </a:avLst>
+          </a:prstGeom>
+          <a:solidFill>
+            <a:srgbClr val="FFD400"/>
+          </a:solidFill>
+          <a:ln/>
+        </p:spPr>
+      </p:sp>
+      <p:sp>
+        <p:nvSpPr>
+          <p:cNvPr id="3" name="Text 1"/>
+          <p:cNvSpPr/>
+          <p:nvPr/>
+        </p:nvSpPr>
+        <p:spPr>
+          <a:xfrm>
+            <a:off x="640080" y="347472"/>
+            <a:ext cx="2377440" cy="384048"/>
+          </a:xfrm>
+          <a:prstGeom prst="rect">
+            <a:avLst/>
+          </a:prstGeom>
+          <a:noFill/>
+          <a:ln/>
+        </p:spPr>
+        <p:txBody>
+          <a:bodyPr wrap="square" lIns="0" tIns="0" rIns="0" bIns="0" rtlCol="0" anchor="ctr"/>
+          <a:lstStyle/>
+          <a:p>
+            <a:pPr algn="ctr" indent="0" marL="0">
+              <a:buNone/>
+            </a:pPr>
+            <a:r>
+              <a:rPr lang="en-US" sz="1250" b="1" dirty="0">
+                <a:solidFill>
+                  <a:srgbClr val="1F1F1F"/>
                 </a:solidFill>
                 <a:latin typeface="Malgun Gothic" pitchFamily="34" charset="0"/>
                 <a:ea typeface="Malgun Gothic" pitchFamily="34" charset="-122"/>
@@ -8127,20 +8848,20 @@
               </a:rPr>
               <a:t>계산대미디어 설치 방법</a:t>
             </a:r>
-            <a:endParaRPr lang="en-US" sz="1500" dirty="0"/>
-          </a:p>
-        </p:txBody>
-      </p:sp>
-      <p:sp>
-        <p:nvSpPr>
-          <p:cNvPr id="3" name="Text 1"/>
+            <a:endParaRPr lang="en-US" sz="1250" dirty="0"/>
+          </a:p>
+        </p:txBody>
+      </p:sp>
+      <p:sp>
+        <p:nvSpPr>
+          <p:cNvPr id="4" name="Text 2"/>
           <p:cNvSpPr/>
           <p:nvPr/>
         </p:nvSpPr>
         <p:spPr>
           <a:xfrm>
             <a:off x="9262872" y="365760"/>
-            <a:ext cx="2286000" cy="320040"/>
+            <a:ext cx="2286000" cy="365760"/>
           </a:xfrm>
           <a:prstGeom prst="rect">
             <a:avLst/>
@@ -8172,14 +8893,14 @@
       </p:sp>
       <p:sp>
         <p:nvSpPr>
-          <p:cNvPr id="4" name="Shape 2"/>
-          <p:cNvSpPr/>
-          <p:nvPr/>
-        </p:nvSpPr>
-        <p:spPr>
-          <a:xfrm>
-            <a:off x="640080" y="1143000"/>
-            <a:ext cx="914400" cy="914400"/>
+          <p:cNvPr id="5" name="Shape 3"/>
+          <p:cNvSpPr/>
+          <p:nvPr/>
+        </p:nvSpPr>
+        <p:spPr>
+          <a:xfrm>
+            <a:off x="640080" y="1188720"/>
+            <a:ext cx="960120" cy="960120"/>
           </a:xfrm>
           <a:prstGeom prst="ellipse">
             <a:avLst/>
@@ -8188,18 +8909,25 @@
             <a:srgbClr val="FFD400"/>
           </a:solidFill>
           <a:ln/>
-        </p:spPr>
-      </p:sp>
-      <p:sp>
-        <p:nvSpPr>
-          <p:cNvPr id="5" name="Text 3"/>
-          <p:cNvSpPr/>
-          <p:nvPr/>
-        </p:nvSpPr>
-        <p:spPr>
-          <a:xfrm>
-            <a:off x="640080" y="1143000"/>
-            <a:ext cx="914400" cy="914400"/>
+          <a:effectLst>
+            <a:outerShdw sx="100000" sy="100000" kx="0" ky="0" algn="bl" rotWithShape="0" blurRad="114300" dist="38100" dir="5400000">
+              <a:srgbClr val="666666">
+                <a:alpha val="30000"/>
+              </a:srgbClr>
+            </a:outerShdw>
+          </a:effectLst>
+        </p:spPr>
+      </p:sp>
+      <p:sp>
+        <p:nvSpPr>
+          <p:cNvPr id="6" name="Text 4"/>
+          <p:cNvSpPr/>
+          <p:nvPr/>
+        </p:nvSpPr>
+        <p:spPr>
+          <a:xfrm>
+            <a:off x="640080" y="1188720"/>
+            <a:ext cx="960120" cy="960120"/>
           </a:xfrm>
           <a:prstGeom prst="rect">
             <a:avLst/>
@@ -8215,30 +8943,30 @@
               <a:buNone/>
             </a:pPr>
             <a:r>
-              <a:rPr lang="en-US" sz="3600" b="1" dirty="0">
+              <a:rPr lang="en-US" sz="3200" dirty="0">
                 <a:solidFill>
                   <a:srgbClr val="1F1F1F"/>
                 </a:solidFill>
-                <a:latin typeface="Malgun Gothic" pitchFamily="34" charset="0"/>
-                <a:ea typeface="Malgun Gothic" pitchFamily="34" charset="-122"/>
-                <a:cs typeface="Malgun Gothic" pitchFamily="34" charset="-120"/>
+                <a:latin typeface="HY헤드라인M" pitchFamily="34" charset="0"/>
+                <a:ea typeface="HY헤드라인M" pitchFamily="34" charset="-122"/>
+                <a:cs typeface="HY헤드라인M" pitchFamily="34" charset="-120"/>
               </a:rPr>
               <a:t>5</a:t>
             </a:r>
-            <a:endParaRPr lang="en-US" sz="3600" dirty="0"/>
-          </a:p>
-        </p:txBody>
-      </p:sp>
-      <p:sp>
-        <p:nvSpPr>
-          <p:cNvPr id="6" name="Text 4"/>
-          <p:cNvSpPr/>
-          <p:nvPr/>
-        </p:nvSpPr>
-        <p:spPr>
-          <a:xfrm>
-            <a:off x="1783080" y="1143000"/>
-            <a:ext cx="4206240" cy="914400"/>
+            <a:endParaRPr lang="en-US" sz="3200" dirty="0"/>
+          </a:p>
+        </p:txBody>
+      </p:sp>
+      <p:sp>
+        <p:nvSpPr>
+          <p:cNvPr id="7" name="Text 5"/>
+          <p:cNvSpPr/>
+          <p:nvPr/>
+        </p:nvSpPr>
+        <p:spPr>
+          <a:xfrm>
+            <a:off x="1874520" y="1188720"/>
+            <a:ext cx="4114800" cy="960120"/>
           </a:xfrm>
           <a:prstGeom prst="rect">
             <a:avLst/>
@@ -8254,23 +8982,23 @@
               <a:buNone/>
             </a:pPr>
             <a:r>
-              <a:rPr lang="en-US" sz="3000" b="1" dirty="0">
+              <a:rPr lang="en-US" sz="2800" dirty="0">
                 <a:solidFill>
                   <a:srgbClr val="222222"/>
                 </a:solidFill>
-                <a:latin typeface="Malgun Gothic" pitchFamily="34" charset="0"/>
-                <a:ea typeface="Malgun Gothic" pitchFamily="34" charset="-122"/>
-                <a:cs typeface="Malgun Gothic" pitchFamily="34" charset="-120"/>
+                <a:latin typeface="HY헤드라인M" pitchFamily="34" charset="0"/>
+                <a:ea typeface="HY헤드라인M" pitchFamily="34" charset="-122"/>
+                <a:cs typeface="HY헤드라인M" pitchFamily="34" charset="-120"/>
               </a:rPr>
               <a:t>AI 카메라 설정 ① 모드 변경</a:t>
             </a:r>
-            <a:endParaRPr lang="en-US" sz="3000" dirty="0"/>
-          </a:p>
-        </p:txBody>
-      </p:sp>
-      <p:sp>
-        <p:nvSpPr>
-          <p:cNvPr id="7" name="Text 5"/>
+            <a:endParaRPr lang="en-US" sz="2800" dirty="0"/>
+          </a:p>
+        </p:txBody>
+      </p:sp>
+      <p:sp>
+        <p:nvSpPr>
+          <p:cNvPr id="8" name="Text 6"/>
           <p:cNvSpPr/>
           <p:nvPr/>
         </p:nvSpPr>
@@ -8312,7 +9040,7 @@
       </p:sp>
       <p:sp>
         <p:nvSpPr>
-          <p:cNvPr id="8" name="Shape 6"/>
+          <p:cNvPr id="9" name="Shape 7"/>
           <p:cNvSpPr/>
           <p:nvPr/>
         </p:nvSpPr>
@@ -8332,7 +9060,7 @@
       </p:sp>
       <p:sp>
         <p:nvSpPr>
-          <p:cNvPr id="9" name="Text 7"/>
+          <p:cNvPr id="10" name="Text 8"/>
           <p:cNvSpPr/>
           <p:nvPr/>
         </p:nvSpPr>
@@ -8371,7 +9099,7 @@
       </p:sp>
       <p:sp>
         <p:nvSpPr>
-          <p:cNvPr id="10" name="Text 8"/>
+          <p:cNvPr id="11" name="Text 9"/>
           <p:cNvSpPr/>
           <p:nvPr/>
         </p:nvSpPr>
@@ -8410,7 +9138,7 @@
       </p:sp>
       <p:sp>
         <p:nvSpPr>
-          <p:cNvPr id="11" name="Shape 9"/>
+          <p:cNvPr id="12" name="Shape 10"/>
           <p:cNvSpPr/>
           <p:nvPr/>
         </p:nvSpPr>
@@ -8430,7 +9158,7 @@
       </p:sp>
       <p:sp>
         <p:nvSpPr>
-          <p:cNvPr id="12" name="Text 10"/>
+          <p:cNvPr id="13" name="Text 11"/>
           <p:cNvSpPr/>
           <p:nvPr/>
         </p:nvSpPr>
@@ -8469,7 +9197,7 @@
       </p:sp>
       <p:sp>
         <p:nvSpPr>
-          <p:cNvPr id="13" name="Text 11"/>
+          <p:cNvPr id="14" name="Text 12"/>
           <p:cNvSpPr/>
           <p:nvPr/>
         </p:nvSpPr>
@@ -8508,7 +9236,7 @@
       </p:sp>
       <p:sp>
         <p:nvSpPr>
-          <p:cNvPr id="14" name="Shape 12"/>
+          <p:cNvPr id="15" name="Shape 13"/>
           <p:cNvSpPr/>
           <p:nvPr/>
         </p:nvSpPr>
@@ -8528,7 +9256,7 @@
       </p:sp>
       <p:sp>
         <p:nvSpPr>
-          <p:cNvPr id="15" name="Text 13"/>
+          <p:cNvPr id="16" name="Text 14"/>
           <p:cNvSpPr/>
           <p:nvPr/>
         </p:nvSpPr>
@@ -8567,7 +9295,7 @@
       </p:sp>
       <p:sp>
         <p:nvSpPr>
-          <p:cNvPr id="16" name="Text 14"/>
+          <p:cNvPr id="17" name="Text 15"/>
           <p:cNvSpPr/>
           <p:nvPr/>
         </p:nvSpPr>
@@ -8606,7 +9334,7 @@
       </p:sp>
       <p:sp>
         <p:nvSpPr>
-          <p:cNvPr id="17" name="Shape 15"/>
+          <p:cNvPr id="18" name="Shape 16"/>
           <p:cNvSpPr/>
           <p:nvPr/>
         </p:nvSpPr>
@@ -8633,7 +9361,7 @@
       </p:sp>
       <p:pic>
         <p:nvPicPr>
-          <p:cNvPr id="18" name="Image 0" descr="preencoded.png">    </p:cNvPr>
+          <p:cNvPr id="19" name="Image 0" descr="preencoded.png">    </p:cNvPr>
           <p:cNvPicPr>
             <a:picLocks noChangeAspect="1"/>
           </p:cNvPicPr>
@@ -8657,7 +9385,7 @@
       </p:pic>
       <p:sp>
         <p:nvSpPr>
-          <p:cNvPr id="19" name="Text 16"/>
+          <p:cNvPr id="20" name="Text 17"/>
           <p:cNvSpPr/>
           <p:nvPr/>
         </p:nvSpPr>
@@ -8696,7 +9424,7 @@
       </p:sp>
       <p:sp>
         <p:nvSpPr>
-          <p:cNvPr id="20" name="Text 17"/>
+          <p:cNvPr id="21" name="Text 18"/>
           <p:cNvSpPr/>
           <p:nvPr/>
         </p:nvSpPr>
@@ -8735,7 +9463,7 @@
       </p:sp>
       <p:sp>
         <p:nvSpPr>
-          <p:cNvPr id="21" name="Shape 18"/>
+          <p:cNvPr id="22" name="Shape 19"/>
           <p:cNvSpPr/>
           <p:nvPr/>
         </p:nvSpPr>
@@ -8762,7 +9490,7 @@
       </p:sp>
       <p:pic>
         <p:nvPicPr>
-          <p:cNvPr id="22" name="Image 1" descr="preencoded.png">    </p:cNvPr>
+          <p:cNvPr id="23" name="Image 1" descr="preencoded.png">    </p:cNvPr>
           <p:cNvPicPr>
             <a:picLocks noChangeAspect="1"/>
           </p:cNvPicPr>
@@ -8786,7 +9514,7 @@
       </p:pic>
       <p:sp>
         <p:nvSpPr>
-          <p:cNvPr id="23" name="Text 19"/>
+          <p:cNvPr id="24" name="Text 20"/>
           <p:cNvSpPr/>
           <p:nvPr/>
         </p:nvSpPr>
@@ -8825,7 +9553,7 @@
       </p:sp>
       <p:sp>
         <p:nvSpPr>
-          <p:cNvPr id="24" name="Text 20"/>
+          <p:cNvPr id="25" name="Text 21"/>
           <p:cNvSpPr/>
           <p:nvPr/>
         </p:nvSpPr>
@@ -8896,32 +9624,54 @@
       </p:grpSpPr>
       <p:sp>
         <p:nvSpPr>
-          <p:cNvPr id="2" name="Text 0"/>
-          <p:cNvSpPr/>
-          <p:nvPr/>
-        </p:nvSpPr>
-        <p:spPr>
-          <a:xfrm>
-            <a:off x="640080" y="365760"/>
-            <a:ext cx="7315200" cy="320040"/>
-          </a:xfrm>
-          <a:prstGeom prst="rect">
-            <a:avLst/>
-          </a:prstGeom>
-          <a:noFill/>
-          <a:ln/>
-        </p:spPr>
-        <p:txBody>
-          <a:bodyPr wrap="square" lIns="0" tIns="0" rIns="0" bIns="0" rtlCol="0" anchor="ctr"/>
-          <a:lstStyle/>
-          <a:p>
-            <a:pPr indent="0" marL="0">
-              <a:buNone/>
-            </a:pPr>
-            <a:r>
-              <a:rPr lang="en-US" sz="1500" b="1" dirty="0">
-                <a:solidFill>
-                  <a:srgbClr val="666666"/>
+          <p:cNvPr id="2" name="Shape 0"/>
+          <p:cNvSpPr/>
+          <p:nvPr/>
+        </p:nvSpPr>
+        <p:spPr>
+          <a:xfrm>
+            <a:off x="640080" y="347472"/>
+            <a:ext cx="2377440" cy="384048"/>
+          </a:xfrm>
+          <a:prstGeom prst="roundRect">
+            <a:avLst>
+              <a:gd name="adj" fmla="val 50000"/>
+            </a:avLst>
+          </a:prstGeom>
+          <a:solidFill>
+            <a:srgbClr val="FFD400"/>
+          </a:solidFill>
+          <a:ln/>
+        </p:spPr>
+      </p:sp>
+      <p:sp>
+        <p:nvSpPr>
+          <p:cNvPr id="3" name="Text 1"/>
+          <p:cNvSpPr/>
+          <p:nvPr/>
+        </p:nvSpPr>
+        <p:spPr>
+          <a:xfrm>
+            <a:off x="640080" y="347472"/>
+            <a:ext cx="2377440" cy="384048"/>
+          </a:xfrm>
+          <a:prstGeom prst="rect">
+            <a:avLst/>
+          </a:prstGeom>
+          <a:noFill/>
+          <a:ln/>
+        </p:spPr>
+        <p:txBody>
+          <a:bodyPr wrap="square" lIns="0" tIns="0" rIns="0" bIns="0" rtlCol="0" anchor="ctr"/>
+          <a:lstStyle/>
+          <a:p>
+            <a:pPr algn="ctr" indent="0" marL="0">
+              <a:buNone/>
+            </a:pPr>
+            <a:r>
+              <a:rPr lang="en-US" sz="1250" b="1" dirty="0">
+                <a:solidFill>
+                  <a:srgbClr val="1F1F1F"/>
                 </a:solidFill>
                 <a:latin typeface="Malgun Gothic" pitchFamily="34" charset="0"/>
                 <a:ea typeface="Malgun Gothic" pitchFamily="34" charset="-122"/>
@@ -8929,20 +9679,20 @@
               </a:rPr>
               <a:t>계산대미디어 설치 방법</a:t>
             </a:r>
-            <a:endParaRPr lang="en-US" sz="1500" dirty="0"/>
-          </a:p>
-        </p:txBody>
-      </p:sp>
-      <p:sp>
-        <p:nvSpPr>
-          <p:cNvPr id="3" name="Text 1"/>
+            <a:endParaRPr lang="en-US" sz="1250" dirty="0"/>
+          </a:p>
+        </p:txBody>
+      </p:sp>
+      <p:sp>
+        <p:nvSpPr>
+          <p:cNvPr id="4" name="Text 2"/>
           <p:cNvSpPr/>
           <p:nvPr/>
         </p:nvSpPr>
         <p:spPr>
           <a:xfrm>
             <a:off x="9262872" y="365760"/>
-            <a:ext cx="2286000" cy="320040"/>
+            <a:ext cx="2286000" cy="365760"/>
           </a:xfrm>
           <a:prstGeom prst="rect">
             <a:avLst/>
@@ -8974,14 +9724,14 @@
       </p:sp>
       <p:sp>
         <p:nvSpPr>
-          <p:cNvPr id="4" name="Shape 2"/>
-          <p:cNvSpPr/>
-          <p:nvPr/>
-        </p:nvSpPr>
-        <p:spPr>
-          <a:xfrm>
-            <a:off x="640080" y="1143000"/>
-            <a:ext cx="914400" cy="914400"/>
+          <p:cNvPr id="5" name="Shape 3"/>
+          <p:cNvSpPr/>
+          <p:nvPr/>
+        </p:nvSpPr>
+        <p:spPr>
+          <a:xfrm>
+            <a:off x="640080" y="1188720"/>
+            <a:ext cx="960120" cy="960120"/>
           </a:xfrm>
           <a:prstGeom prst="ellipse">
             <a:avLst/>
@@ -8990,18 +9740,25 @@
             <a:srgbClr val="FFD400"/>
           </a:solidFill>
           <a:ln/>
-        </p:spPr>
-      </p:sp>
-      <p:sp>
-        <p:nvSpPr>
-          <p:cNvPr id="5" name="Text 3"/>
-          <p:cNvSpPr/>
-          <p:nvPr/>
-        </p:nvSpPr>
-        <p:spPr>
-          <a:xfrm>
-            <a:off x="640080" y="1143000"/>
-            <a:ext cx="914400" cy="914400"/>
+          <a:effectLst>
+            <a:outerShdw sx="100000" sy="100000" kx="0" ky="0" algn="bl" rotWithShape="0" blurRad="114300" dist="38100" dir="5400000">
+              <a:srgbClr val="666666">
+                <a:alpha val="30000"/>
+              </a:srgbClr>
+            </a:outerShdw>
+          </a:effectLst>
+        </p:spPr>
+      </p:sp>
+      <p:sp>
+        <p:nvSpPr>
+          <p:cNvPr id="6" name="Text 4"/>
+          <p:cNvSpPr/>
+          <p:nvPr/>
+        </p:nvSpPr>
+        <p:spPr>
+          <a:xfrm>
+            <a:off x="640080" y="1188720"/>
+            <a:ext cx="960120" cy="960120"/>
           </a:xfrm>
           <a:prstGeom prst="rect">
             <a:avLst/>
@@ -9017,30 +9774,30 @@
               <a:buNone/>
             </a:pPr>
             <a:r>
-              <a:rPr lang="en-US" sz="3600" b="1" dirty="0">
+              <a:rPr lang="en-US" sz="3200" dirty="0">
                 <a:solidFill>
                   <a:srgbClr val="1F1F1F"/>
                 </a:solidFill>
-                <a:latin typeface="Malgun Gothic" pitchFamily="34" charset="0"/>
-                <a:ea typeface="Malgun Gothic" pitchFamily="34" charset="-122"/>
-                <a:cs typeface="Malgun Gothic" pitchFamily="34" charset="-120"/>
+                <a:latin typeface="HY헤드라인M" pitchFamily="34" charset="0"/>
+                <a:ea typeface="HY헤드라인M" pitchFamily="34" charset="-122"/>
+                <a:cs typeface="HY헤드라인M" pitchFamily="34" charset="-120"/>
               </a:rPr>
               <a:t>6</a:t>
             </a:r>
-            <a:endParaRPr lang="en-US" sz="3600" dirty="0"/>
-          </a:p>
-        </p:txBody>
-      </p:sp>
-      <p:sp>
-        <p:nvSpPr>
-          <p:cNvPr id="6" name="Text 4"/>
-          <p:cNvSpPr/>
-          <p:nvPr/>
-        </p:nvSpPr>
-        <p:spPr>
-          <a:xfrm>
-            <a:off x="1783080" y="1143000"/>
-            <a:ext cx="4206240" cy="914400"/>
+            <a:endParaRPr lang="en-US" sz="3200" dirty="0"/>
+          </a:p>
+        </p:txBody>
+      </p:sp>
+      <p:sp>
+        <p:nvSpPr>
+          <p:cNvPr id="7" name="Text 5"/>
+          <p:cNvSpPr/>
+          <p:nvPr/>
+        </p:nvSpPr>
+        <p:spPr>
+          <a:xfrm>
+            <a:off x="1874520" y="1188720"/>
+            <a:ext cx="4114800" cy="960120"/>
           </a:xfrm>
           <a:prstGeom prst="rect">
             <a:avLst/>
@@ -9056,23 +9813,23 @@
               <a:buNone/>
             </a:pPr>
             <a:r>
-              <a:rPr lang="en-US" sz="3000" b="1" dirty="0">
+              <a:rPr lang="en-US" sz="2800" dirty="0">
                 <a:solidFill>
                   <a:srgbClr val="222222"/>
                 </a:solidFill>
-                <a:latin typeface="Malgun Gothic" pitchFamily="34" charset="0"/>
-                <a:ea typeface="Malgun Gothic" pitchFamily="34" charset="-122"/>
-                <a:cs typeface="Malgun Gothic" pitchFamily="34" charset="-120"/>
+                <a:latin typeface="HY헤드라인M" pitchFamily="34" charset="0"/>
+                <a:ea typeface="HY헤드라인M" pitchFamily="34" charset="-122"/>
+                <a:cs typeface="HY헤드라인M" pitchFamily="34" charset="-120"/>
               </a:rPr>
               <a:t>AI 카메라 설정 ② 화각 확인</a:t>
             </a:r>
-            <a:endParaRPr lang="en-US" sz="3000" dirty="0"/>
-          </a:p>
-        </p:txBody>
-      </p:sp>
-      <p:sp>
-        <p:nvSpPr>
-          <p:cNvPr id="7" name="Text 5"/>
+            <a:endParaRPr lang="en-US" sz="2800" dirty="0"/>
+          </a:p>
+        </p:txBody>
+      </p:sp>
+      <p:sp>
+        <p:nvSpPr>
+          <p:cNvPr id="8" name="Text 6"/>
           <p:cNvSpPr/>
           <p:nvPr/>
         </p:nvSpPr>
@@ -9114,7 +9871,7 @@
       </p:sp>
       <p:sp>
         <p:nvSpPr>
-          <p:cNvPr id="8" name="Shape 6"/>
+          <p:cNvPr id="9" name="Shape 7"/>
           <p:cNvSpPr/>
           <p:nvPr/>
         </p:nvSpPr>
@@ -9134,7 +9891,7 @@
       </p:sp>
       <p:sp>
         <p:nvSpPr>
-          <p:cNvPr id="9" name="Text 7"/>
+          <p:cNvPr id="10" name="Text 8"/>
           <p:cNvSpPr/>
           <p:nvPr/>
         </p:nvSpPr>
@@ -9173,7 +9930,7 @@
       </p:sp>
       <p:sp>
         <p:nvSpPr>
-          <p:cNvPr id="10" name="Text 8"/>
+          <p:cNvPr id="11" name="Text 9"/>
           <p:cNvSpPr/>
           <p:nvPr/>
         </p:nvSpPr>
@@ -9212,7 +9969,7 @@
       </p:sp>
       <p:sp>
         <p:nvSpPr>
-          <p:cNvPr id="11" name="Shape 9"/>
+          <p:cNvPr id="12" name="Shape 10"/>
           <p:cNvSpPr/>
           <p:nvPr/>
         </p:nvSpPr>
@@ -9232,7 +9989,7 @@
       </p:sp>
       <p:sp>
         <p:nvSpPr>
-          <p:cNvPr id="12" name="Text 10"/>
+          <p:cNvPr id="13" name="Text 11"/>
           <p:cNvSpPr/>
           <p:nvPr/>
         </p:nvSpPr>
@@ -9271,7 +10028,7 @@
       </p:sp>
       <p:sp>
         <p:nvSpPr>
-          <p:cNvPr id="13" name="Text 11"/>
+          <p:cNvPr id="14" name="Text 12"/>
           <p:cNvSpPr/>
           <p:nvPr/>
         </p:nvSpPr>
@@ -9310,7 +10067,7 @@
       </p:sp>
       <p:sp>
         <p:nvSpPr>
-          <p:cNvPr id="14" name="Shape 12"/>
+          <p:cNvPr id="15" name="Shape 13"/>
           <p:cNvSpPr/>
           <p:nvPr/>
         </p:nvSpPr>
@@ -9330,7 +10087,7 @@
       </p:sp>
       <p:sp>
         <p:nvSpPr>
-          <p:cNvPr id="15" name="Text 13"/>
+          <p:cNvPr id="16" name="Text 14"/>
           <p:cNvSpPr/>
           <p:nvPr/>
         </p:nvSpPr>
@@ -9369,7 +10126,7 @@
       </p:sp>
       <p:sp>
         <p:nvSpPr>
-          <p:cNvPr id="16" name="Text 14"/>
+          <p:cNvPr id="17" name="Text 15"/>
           <p:cNvSpPr/>
           <p:nvPr/>
         </p:nvSpPr>
@@ -9408,7 +10165,7 @@
       </p:sp>
       <p:sp>
         <p:nvSpPr>
-          <p:cNvPr id="17" name="Shape 15"/>
+          <p:cNvPr id="18" name="Shape 16"/>
           <p:cNvSpPr/>
           <p:nvPr/>
         </p:nvSpPr>
@@ -9428,7 +10185,7 @@
       </p:sp>
       <p:sp>
         <p:nvSpPr>
-          <p:cNvPr id="18" name="Text 16"/>
+          <p:cNvPr id="19" name="Text 17"/>
           <p:cNvSpPr/>
           <p:nvPr/>
         </p:nvSpPr>
@@ -9467,7 +10224,7 @@
       </p:sp>
       <p:sp>
         <p:nvSpPr>
-          <p:cNvPr id="19" name="Text 17"/>
+          <p:cNvPr id="20" name="Text 18"/>
           <p:cNvSpPr/>
           <p:nvPr/>
         </p:nvSpPr>
@@ -9506,7 +10263,7 @@
       </p:sp>
       <p:sp>
         <p:nvSpPr>
-          <p:cNvPr id="20" name="Shape 18"/>
+          <p:cNvPr id="21" name="Shape 19"/>
           <p:cNvSpPr/>
           <p:nvPr/>
         </p:nvSpPr>
@@ -9533,7 +10290,7 @@
       </p:sp>
       <p:pic>
         <p:nvPicPr>
-          <p:cNvPr id="21" name="Image 0" descr="preencoded.png">    </p:cNvPr>
+          <p:cNvPr id="22" name="Image 0" descr="preencoded.png">    </p:cNvPr>
           <p:cNvPicPr>
             <a:picLocks noChangeAspect="1"/>
           </p:cNvPicPr>
@@ -9557,7 +10314,7 @@
       </p:pic>
       <p:sp>
         <p:nvSpPr>
-          <p:cNvPr id="22" name="Text 19"/>
+          <p:cNvPr id="23" name="Text 20"/>
           <p:cNvSpPr/>
           <p:nvPr/>
         </p:nvSpPr>
@@ -9596,7 +10353,7 @@
       </p:sp>
       <p:sp>
         <p:nvSpPr>
-          <p:cNvPr id="23" name="Text 20"/>
+          <p:cNvPr id="24" name="Text 21"/>
           <p:cNvSpPr/>
           <p:nvPr/>
         </p:nvSpPr>
@@ -9635,7 +10392,7 @@
       </p:sp>
       <p:sp>
         <p:nvSpPr>
-          <p:cNvPr id="24" name="Shape 21"/>
+          <p:cNvPr id="25" name="Shape 22"/>
           <p:cNvSpPr/>
           <p:nvPr/>
         </p:nvSpPr>
@@ -9662,7 +10419,7 @@
       </p:sp>
       <p:pic>
         <p:nvPicPr>
-          <p:cNvPr id="25" name="Image 1" descr="preencoded.png">    </p:cNvPr>
+          <p:cNvPr id="26" name="Image 1" descr="preencoded.png">    </p:cNvPr>
           <p:cNvPicPr>
             <a:picLocks noChangeAspect="1"/>
           </p:cNvPicPr>
@@ -9686,7 +10443,7 @@
       </p:pic>
       <p:sp>
         <p:nvSpPr>
-          <p:cNvPr id="26" name="Text 22"/>
+          <p:cNvPr id="27" name="Text 23"/>
           <p:cNvSpPr/>
           <p:nvPr/>
         </p:nvSpPr>
@@ -9725,7 +10482,7 @@
       </p:sp>
       <p:sp>
         <p:nvSpPr>
-          <p:cNvPr id="27" name="Text 23"/>
+          <p:cNvPr id="28" name="Text 24"/>
           <p:cNvSpPr/>
           <p:nvPr/>
         </p:nvSpPr>
@@ -9796,32 +10553,54 @@
       </p:grpSpPr>
       <p:sp>
         <p:nvSpPr>
-          <p:cNvPr id="2" name="Text 0"/>
-          <p:cNvSpPr/>
-          <p:nvPr/>
-        </p:nvSpPr>
-        <p:spPr>
-          <a:xfrm>
-            <a:off x="640080" y="365760"/>
-            <a:ext cx="7315200" cy="320040"/>
-          </a:xfrm>
-          <a:prstGeom prst="rect">
-            <a:avLst/>
-          </a:prstGeom>
-          <a:noFill/>
-          <a:ln/>
-        </p:spPr>
-        <p:txBody>
-          <a:bodyPr wrap="square" lIns="0" tIns="0" rIns="0" bIns="0" rtlCol="0" anchor="ctr"/>
-          <a:lstStyle/>
-          <a:p>
-            <a:pPr indent="0" marL="0">
-              <a:buNone/>
-            </a:pPr>
-            <a:r>
-              <a:rPr lang="en-US" sz="1500" b="1" dirty="0">
-                <a:solidFill>
-                  <a:srgbClr val="666666"/>
+          <p:cNvPr id="2" name="Shape 0"/>
+          <p:cNvSpPr/>
+          <p:nvPr/>
+        </p:nvSpPr>
+        <p:spPr>
+          <a:xfrm>
+            <a:off x="640080" y="347472"/>
+            <a:ext cx="2377440" cy="384048"/>
+          </a:xfrm>
+          <a:prstGeom prst="roundRect">
+            <a:avLst>
+              <a:gd name="adj" fmla="val 50000"/>
+            </a:avLst>
+          </a:prstGeom>
+          <a:solidFill>
+            <a:srgbClr val="FFD400"/>
+          </a:solidFill>
+          <a:ln/>
+        </p:spPr>
+      </p:sp>
+      <p:sp>
+        <p:nvSpPr>
+          <p:cNvPr id="3" name="Text 1"/>
+          <p:cNvSpPr/>
+          <p:nvPr/>
+        </p:nvSpPr>
+        <p:spPr>
+          <a:xfrm>
+            <a:off x="640080" y="347472"/>
+            <a:ext cx="2377440" cy="384048"/>
+          </a:xfrm>
+          <a:prstGeom prst="rect">
+            <a:avLst/>
+          </a:prstGeom>
+          <a:noFill/>
+          <a:ln/>
+        </p:spPr>
+        <p:txBody>
+          <a:bodyPr wrap="square" lIns="0" tIns="0" rIns="0" bIns="0" rtlCol="0" anchor="ctr"/>
+          <a:lstStyle/>
+          <a:p>
+            <a:pPr algn="ctr" indent="0" marL="0">
+              <a:buNone/>
+            </a:pPr>
+            <a:r>
+              <a:rPr lang="en-US" sz="1250" b="1" dirty="0">
+                <a:solidFill>
+                  <a:srgbClr val="1F1F1F"/>
                 </a:solidFill>
                 <a:latin typeface="Malgun Gothic" pitchFamily="34" charset="0"/>
                 <a:ea typeface="Malgun Gothic" pitchFamily="34" charset="-122"/>
@@ -9829,20 +10608,20 @@
               </a:rPr>
               <a:t>계산대미디어 설치 방법</a:t>
             </a:r>
-            <a:endParaRPr lang="en-US" sz="1500" dirty="0"/>
-          </a:p>
-        </p:txBody>
-      </p:sp>
-      <p:sp>
-        <p:nvSpPr>
-          <p:cNvPr id="3" name="Text 1"/>
+            <a:endParaRPr lang="en-US" sz="1250" dirty="0"/>
+          </a:p>
+        </p:txBody>
+      </p:sp>
+      <p:sp>
+        <p:nvSpPr>
+          <p:cNvPr id="4" name="Text 2"/>
           <p:cNvSpPr/>
           <p:nvPr/>
         </p:nvSpPr>
         <p:spPr>
           <a:xfrm>
             <a:off x="9262872" y="365760"/>
-            <a:ext cx="2286000" cy="320040"/>
+            <a:ext cx="2286000" cy="365760"/>
           </a:xfrm>
           <a:prstGeom prst="rect">
             <a:avLst/>
@@ -9874,14 +10653,14 @@
       </p:sp>
       <p:sp>
         <p:nvSpPr>
-          <p:cNvPr id="4" name="Shape 2"/>
-          <p:cNvSpPr/>
-          <p:nvPr/>
-        </p:nvSpPr>
-        <p:spPr>
-          <a:xfrm>
-            <a:off x="640080" y="1143000"/>
-            <a:ext cx="914400" cy="914400"/>
+          <p:cNvPr id="5" name="Shape 3"/>
+          <p:cNvSpPr/>
+          <p:nvPr/>
+        </p:nvSpPr>
+        <p:spPr>
+          <a:xfrm>
+            <a:off x="640080" y="1188720"/>
+            <a:ext cx="960120" cy="960120"/>
           </a:xfrm>
           <a:prstGeom prst="ellipse">
             <a:avLst/>
@@ -9890,18 +10669,25 @@
             <a:srgbClr val="FFD400"/>
           </a:solidFill>
           <a:ln/>
-        </p:spPr>
-      </p:sp>
-      <p:sp>
-        <p:nvSpPr>
-          <p:cNvPr id="5" name="Text 3"/>
-          <p:cNvSpPr/>
-          <p:nvPr/>
-        </p:nvSpPr>
-        <p:spPr>
-          <a:xfrm>
-            <a:off x="640080" y="1143000"/>
-            <a:ext cx="914400" cy="914400"/>
+          <a:effectLst>
+            <a:outerShdw sx="100000" sy="100000" kx="0" ky="0" algn="bl" rotWithShape="0" blurRad="114300" dist="38100" dir="5400000">
+              <a:srgbClr val="666666">
+                <a:alpha val="30000"/>
+              </a:srgbClr>
+            </a:outerShdw>
+          </a:effectLst>
+        </p:spPr>
+      </p:sp>
+      <p:sp>
+        <p:nvSpPr>
+          <p:cNvPr id="6" name="Text 4"/>
+          <p:cNvSpPr/>
+          <p:nvPr/>
+        </p:nvSpPr>
+        <p:spPr>
+          <a:xfrm>
+            <a:off x="640080" y="1188720"/>
+            <a:ext cx="960120" cy="960120"/>
           </a:xfrm>
           <a:prstGeom prst="rect">
             <a:avLst/>
@@ -9917,30 +10703,30 @@
               <a:buNone/>
             </a:pPr>
             <a:r>
-              <a:rPr lang="en-US" sz="3600" b="1" dirty="0">
+              <a:rPr lang="en-US" sz="3200" dirty="0">
                 <a:solidFill>
                   <a:srgbClr val="1F1F1F"/>
                 </a:solidFill>
-                <a:latin typeface="Malgun Gothic" pitchFamily="34" charset="0"/>
-                <a:ea typeface="Malgun Gothic" pitchFamily="34" charset="-122"/>
-                <a:cs typeface="Malgun Gothic" pitchFamily="34" charset="-120"/>
+                <a:latin typeface="HY헤드라인M" pitchFamily="34" charset="0"/>
+                <a:ea typeface="HY헤드라인M" pitchFamily="34" charset="-122"/>
+                <a:cs typeface="HY헤드라인M" pitchFamily="34" charset="-120"/>
               </a:rPr>
               <a:t>7</a:t>
             </a:r>
-            <a:endParaRPr lang="en-US" sz="3600" dirty="0"/>
-          </a:p>
-        </p:txBody>
-      </p:sp>
-      <p:sp>
-        <p:nvSpPr>
-          <p:cNvPr id="6" name="Text 4"/>
-          <p:cNvSpPr/>
-          <p:nvPr/>
-        </p:nvSpPr>
-        <p:spPr>
-          <a:xfrm>
-            <a:off x="1783080" y="1143000"/>
-            <a:ext cx="4206240" cy="914400"/>
+            <a:endParaRPr lang="en-US" sz="3200" dirty="0"/>
+          </a:p>
+        </p:txBody>
+      </p:sp>
+      <p:sp>
+        <p:nvSpPr>
+          <p:cNvPr id="7" name="Text 5"/>
+          <p:cNvSpPr/>
+          <p:nvPr/>
+        </p:nvSpPr>
+        <p:spPr>
+          <a:xfrm>
+            <a:off x="1874520" y="1188720"/>
+            <a:ext cx="4114800" cy="960120"/>
           </a:xfrm>
           <a:prstGeom prst="rect">
             <a:avLst/>
@@ -9956,23 +10742,23 @@
               <a:buNone/>
             </a:pPr>
             <a:r>
-              <a:rPr lang="en-US" sz="3000" b="1" dirty="0">
+              <a:rPr lang="en-US" sz="2800" dirty="0">
                 <a:solidFill>
                   <a:srgbClr val="222222"/>
                 </a:solidFill>
-                <a:latin typeface="Malgun Gothic" pitchFamily="34" charset="0"/>
-                <a:ea typeface="Malgun Gothic" pitchFamily="34" charset="-122"/>
-                <a:cs typeface="Malgun Gothic" pitchFamily="34" charset="-120"/>
+                <a:latin typeface="HY헤드라인M" pitchFamily="34" charset="0"/>
+                <a:ea typeface="HY헤드라인M" pitchFamily="34" charset="-122"/>
+                <a:cs typeface="HY헤드라인M" pitchFamily="34" charset="-120"/>
               </a:rPr>
               <a:t>AI 카메라 부착</a:t>
             </a:r>
-            <a:endParaRPr lang="en-US" sz="3000" dirty="0"/>
-          </a:p>
-        </p:txBody>
-      </p:sp>
-      <p:sp>
-        <p:nvSpPr>
-          <p:cNvPr id="7" name="Text 5"/>
+            <a:endParaRPr lang="en-US" sz="2800" dirty="0"/>
+          </a:p>
+        </p:txBody>
+      </p:sp>
+      <p:sp>
+        <p:nvSpPr>
+          <p:cNvPr id="8" name="Text 6"/>
           <p:cNvSpPr/>
           <p:nvPr/>
         </p:nvSpPr>
@@ -10014,7 +10800,7 @@
       </p:sp>
       <p:sp>
         <p:nvSpPr>
-          <p:cNvPr id="8" name="Shape 6"/>
+          <p:cNvPr id="9" name="Shape 7"/>
           <p:cNvSpPr/>
           <p:nvPr/>
         </p:nvSpPr>
@@ -10036,7 +10822,7 @@
       </p:sp>
       <p:sp>
         <p:nvSpPr>
-          <p:cNvPr id="9" name="Text 7"/>
+          <p:cNvPr id="10" name="Text 8"/>
           <p:cNvSpPr/>
           <p:nvPr/>
         </p:nvSpPr>
@@ -10078,7 +10864,7 @@
       </p:sp>
       <p:sp>
         <p:nvSpPr>
-          <p:cNvPr id="10" name="Shape 8"/>
+          <p:cNvPr id="11" name="Shape 9"/>
           <p:cNvSpPr/>
           <p:nvPr/>
         </p:nvSpPr>
@@ -10105,7 +10891,7 @@
       </p:sp>
       <p:pic>
         <p:nvPicPr>
-          <p:cNvPr id="11" name="Image 0" descr="preencoded.png">    </p:cNvPr>
+          <p:cNvPr id="12" name="Image 0" descr="preencoded.png">    </p:cNvPr>
           <p:cNvPicPr>
             <a:picLocks noChangeAspect="1"/>
           </p:cNvPicPr>
@@ -10129,7 +10915,7 @@
       </p:pic>
       <p:sp>
         <p:nvSpPr>
-          <p:cNvPr id="12" name="Text 9"/>
+          <p:cNvPr id="13" name="Text 10"/>
           <p:cNvSpPr/>
           <p:nvPr/>
         </p:nvSpPr>
@@ -10168,7 +10954,7 @@
       </p:sp>
       <p:sp>
         <p:nvSpPr>
-          <p:cNvPr id="13" name="Text 10"/>
+          <p:cNvPr id="14" name="Text 11"/>
           <p:cNvSpPr/>
           <p:nvPr/>
         </p:nvSpPr>
@@ -10207,7 +10993,7 @@
       </p:sp>
       <p:sp>
         <p:nvSpPr>
-          <p:cNvPr id="14" name="Shape 11"/>
+          <p:cNvPr id="15" name="Shape 12"/>
           <p:cNvSpPr/>
           <p:nvPr/>
         </p:nvSpPr>
@@ -10234,7 +11020,7 @@
       </p:sp>
       <p:pic>
         <p:nvPicPr>
-          <p:cNvPr id="15" name="Image 1" descr="preencoded.png">    </p:cNvPr>
+          <p:cNvPr id="16" name="Image 1" descr="preencoded.png">    </p:cNvPr>
           <p:cNvPicPr>
             <a:picLocks noChangeAspect="1"/>
           </p:cNvPicPr>
@@ -10258,7 +11044,7 @@
       </p:pic>
       <p:sp>
         <p:nvSpPr>
-          <p:cNvPr id="16" name="Text 12"/>
+          <p:cNvPr id="17" name="Text 13"/>
           <p:cNvSpPr/>
           <p:nvPr/>
         </p:nvSpPr>
@@ -10297,7 +11083,7 @@
       </p:sp>
       <p:sp>
         <p:nvSpPr>
-          <p:cNvPr id="17" name="Text 13"/>
+          <p:cNvPr id="18" name="Text 14"/>
           <p:cNvSpPr/>
           <p:nvPr/>
         </p:nvSpPr>
@@ -10368,32 +11154,54 @@
       </p:grpSpPr>
       <p:sp>
         <p:nvSpPr>
-          <p:cNvPr id="2" name="Text 0"/>
-          <p:cNvSpPr/>
-          <p:nvPr/>
-        </p:nvSpPr>
-        <p:spPr>
-          <a:xfrm>
-            <a:off x="640080" y="365760"/>
-            <a:ext cx="7315200" cy="320040"/>
-          </a:xfrm>
-          <a:prstGeom prst="rect">
-            <a:avLst/>
-          </a:prstGeom>
-          <a:noFill/>
-          <a:ln/>
-        </p:spPr>
-        <p:txBody>
-          <a:bodyPr wrap="square" lIns="0" tIns="0" rIns="0" bIns="0" rtlCol="0" anchor="ctr"/>
-          <a:lstStyle/>
-          <a:p>
-            <a:pPr indent="0" marL="0">
-              <a:buNone/>
-            </a:pPr>
-            <a:r>
-              <a:rPr lang="en-US" sz="1500" b="1" dirty="0">
-                <a:solidFill>
-                  <a:srgbClr val="666666"/>
+          <p:cNvPr id="2" name="Shape 0"/>
+          <p:cNvSpPr/>
+          <p:nvPr/>
+        </p:nvSpPr>
+        <p:spPr>
+          <a:xfrm>
+            <a:off x="640080" y="347472"/>
+            <a:ext cx="2377440" cy="384048"/>
+          </a:xfrm>
+          <a:prstGeom prst="roundRect">
+            <a:avLst>
+              <a:gd name="adj" fmla="val 50000"/>
+            </a:avLst>
+          </a:prstGeom>
+          <a:solidFill>
+            <a:srgbClr val="FFD400"/>
+          </a:solidFill>
+          <a:ln/>
+        </p:spPr>
+      </p:sp>
+      <p:sp>
+        <p:nvSpPr>
+          <p:cNvPr id="3" name="Text 1"/>
+          <p:cNvSpPr/>
+          <p:nvPr/>
+        </p:nvSpPr>
+        <p:spPr>
+          <a:xfrm>
+            <a:off x="640080" y="347472"/>
+            <a:ext cx="2377440" cy="384048"/>
+          </a:xfrm>
+          <a:prstGeom prst="rect">
+            <a:avLst/>
+          </a:prstGeom>
+          <a:noFill/>
+          <a:ln/>
+        </p:spPr>
+        <p:txBody>
+          <a:bodyPr wrap="square" lIns="0" tIns="0" rIns="0" bIns="0" rtlCol="0" anchor="ctr"/>
+          <a:lstStyle/>
+          <a:p>
+            <a:pPr algn="ctr" indent="0" marL="0">
+              <a:buNone/>
+            </a:pPr>
+            <a:r>
+              <a:rPr lang="en-US" sz="1250" b="1" dirty="0">
+                <a:solidFill>
+                  <a:srgbClr val="1F1F1F"/>
                 </a:solidFill>
                 <a:latin typeface="Malgun Gothic" pitchFamily="34" charset="0"/>
                 <a:ea typeface="Malgun Gothic" pitchFamily="34" charset="-122"/>
@@ -10401,20 +11209,20 @@
               </a:rPr>
               <a:t>계산대미디어 설치 방법</a:t>
             </a:r>
-            <a:endParaRPr lang="en-US" sz="1500" dirty="0"/>
-          </a:p>
-        </p:txBody>
-      </p:sp>
-      <p:sp>
-        <p:nvSpPr>
-          <p:cNvPr id="3" name="Text 1"/>
+            <a:endParaRPr lang="en-US" sz="1250" dirty="0"/>
+          </a:p>
+        </p:txBody>
+      </p:sp>
+      <p:sp>
+        <p:nvSpPr>
+          <p:cNvPr id="4" name="Text 2"/>
           <p:cNvSpPr/>
           <p:nvPr/>
         </p:nvSpPr>
         <p:spPr>
           <a:xfrm>
             <a:off x="9262872" y="365760"/>
-            <a:ext cx="2286000" cy="320040"/>
+            <a:ext cx="2286000" cy="365760"/>
           </a:xfrm>
           <a:prstGeom prst="rect">
             <a:avLst/>
@@ -10446,14 +11254,14 @@
       </p:sp>
       <p:sp>
         <p:nvSpPr>
-          <p:cNvPr id="4" name="Shape 2"/>
-          <p:cNvSpPr/>
-          <p:nvPr/>
-        </p:nvSpPr>
-        <p:spPr>
-          <a:xfrm>
-            <a:off x="640080" y="1143000"/>
-            <a:ext cx="914400" cy="914400"/>
+          <p:cNvPr id="5" name="Shape 3"/>
+          <p:cNvSpPr/>
+          <p:nvPr/>
+        </p:nvSpPr>
+        <p:spPr>
+          <a:xfrm>
+            <a:off x="640080" y="1188720"/>
+            <a:ext cx="960120" cy="960120"/>
           </a:xfrm>
           <a:prstGeom prst="ellipse">
             <a:avLst/>
@@ -10462,18 +11270,25 @@
             <a:srgbClr val="FFD400"/>
           </a:solidFill>
           <a:ln/>
-        </p:spPr>
-      </p:sp>
-      <p:sp>
-        <p:nvSpPr>
-          <p:cNvPr id="5" name="Text 3"/>
-          <p:cNvSpPr/>
-          <p:nvPr/>
-        </p:nvSpPr>
-        <p:spPr>
-          <a:xfrm>
-            <a:off x="640080" y="1143000"/>
-            <a:ext cx="914400" cy="914400"/>
+          <a:effectLst>
+            <a:outerShdw sx="100000" sy="100000" kx="0" ky="0" algn="bl" rotWithShape="0" blurRad="114300" dist="38100" dir="5400000">
+              <a:srgbClr val="666666">
+                <a:alpha val="30000"/>
+              </a:srgbClr>
+            </a:outerShdw>
+          </a:effectLst>
+        </p:spPr>
+      </p:sp>
+      <p:sp>
+        <p:nvSpPr>
+          <p:cNvPr id="6" name="Text 4"/>
+          <p:cNvSpPr/>
+          <p:nvPr/>
+        </p:nvSpPr>
+        <p:spPr>
+          <a:xfrm>
+            <a:off x="640080" y="1188720"/>
+            <a:ext cx="960120" cy="960120"/>
           </a:xfrm>
           <a:prstGeom prst="rect">
             <a:avLst/>
@@ -10489,30 +11304,30 @@
               <a:buNone/>
             </a:pPr>
             <a:r>
-              <a:rPr lang="en-US" sz="3600" b="1" dirty="0">
+              <a:rPr lang="en-US" sz="3200" dirty="0">
                 <a:solidFill>
                   <a:srgbClr val="1F1F1F"/>
                 </a:solidFill>
-                <a:latin typeface="Malgun Gothic" pitchFamily="34" charset="0"/>
-                <a:ea typeface="Malgun Gothic" pitchFamily="34" charset="-122"/>
-                <a:cs typeface="Malgun Gothic" pitchFamily="34" charset="-120"/>
+                <a:latin typeface="HY헤드라인M" pitchFamily="34" charset="0"/>
+                <a:ea typeface="HY헤드라인M" pitchFamily="34" charset="-122"/>
+                <a:cs typeface="HY헤드라인M" pitchFamily="34" charset="-120"/>
               </a:rPr>
               <a:t>8</a:t>
             </a:r>
-            <a:endParaRPr lang="en-US" sz="3600" dirty="0"/>
-          </a:p>
-        </p:txBody>
-      </p:sp>
-      <p:sp>
-        <p:nvSpPr>
-          <p:cNvPr id="6" name="Text 4"/>
-          <p:cNvSpPr/>
-          <p:nvPr/>
-        </p:nvSpPr>
-        <p:spPr>
-          <a:xfrm>
-            <a:off x="1783080" y="1143000"/>
-            <a:ext cx="4206240" cy="914400"/>
+            <a:endParaRPr lang="en-US" sz="3200" dirty="0"/>
+          </a:p>
+        </p:txBody>
+      </p:sp>
+      <p:sp>
+        <p:nvSpPr>
+          <p:cNvPr id="7" name="Text 5"/>
+          <p:cNvSpPr/>
+          <p:nvPr/>
+        </p:nvSpPr>
+        <p:spPr>
+          <a:xfrm>
+            <a:off x="1874520" y="1188720"/>
+            <a:ext cx="4114800" cy="960120"/>
           </a:xfrm>
           <a:prstGeom prst="rect">
             <a:avLst/>
@@ -10528,23 +11343,23 @@
               <a:buNone/>
             </a:pPr>
             <a:r>
-              <a:rPr lang="en-US" sz="3000" b="1" dirty="0">
+              <a:rPr lang="en-US" sz="2800" dirty="0">
                 <a:solidFill>
                   <a:srgbClr val="222222"/>
                 </a:solidFill>
-                <a:latin typeface="Malgun Gothic" pitchFamily="34" charset="0"/>
-                <a:ea typeface="Malgun Gothic" pitchFamily="34" charset="-122"/>
-                <a:cs typeface="Malgun Gothic" pitchFamily="34" charset="-120"/>
+                <a:latin typeface="HY헤드라인M" pitchFamily="34" charset="0"/>
+                <a:ea typeface="HY헤드라인M" pitchFamily="34" charset="-122"/>
+                <a:cs typeface="HY헤드라인M" pitchFamily="34" charset="-120"/>
               </a:rPr>
               <a:t>AI 카메라 LED 가리기</a:t>
             </a:r>
-            <a:endParaRPr lang="en-US" sz="3000" dirty="0"/>
-          </a:p>
-        </p:txBody>
-      </p:sp>
-      <p:sp>
-        <p:nvSpPr>
-          <p:cNvPr id="7" name="Text 5"/>
+            <a:endParaRPr lang="en-US" sz="2800" dirty="0"/>
+          </a:p>
+        </p:txBody>
+      </p:sp>
+      <p:sp>
+        <p:nvSpPr>
+          <p:cNvPr id="8" name="Text 6"/>
           <p:cNvSpPr/>
           <p:nvPr/>
         </p:nvSpPr>
@@ -10586,7 +11401,7 @@
       </p:sp>
       <p:sp>
         <p:nvSpPr>
-          <p:cNvPr id="8" name="Shape 6"/>
+          <p:cNvPr id="9" name="Shape 7"/>
           <p:cNvSpPr/>
           <p:nvPr/>
         </p:nvSpPr>
@@ -10608,7 +11423,7 @@
       </p:sp>
       <p:sp>
         <p:nvSpPr>
-          <p:cNvPr id="9" name="Text 7"/>
+          <p:cNvPr id="10" name="Text 8"/>
           <p:cNvSpPr/>
           <p:nvPr/>
         </p:nvSpPr>
@@ -10650,7 +11465,7 @@
       </p:sp>
       <p:sp>
         <p:nvSpPr>
-          <p:cNvPr id="10" name="Shape 8"/>
+          <p:cNvPr id="11" name="Shape 9"/>
           <p:cNvSpPr/>
           <p:nvPr/>
         </p:nvSpPr>
@@ -10677,7 +11492,7 @@
       </p:sp>
       <p:pic>
         <p:nvPicPr>
-          <p:cNvPr id="11" name="Image 0" descr="preencoded.png">    </p:cNvPr>
+          <p:cNvPr id="12" name="Image 0" descr="preencoded.png">    </p:cNvPr>
           <p:cNvPicPr>
             <a:picLocks noChangeAspect="1"/>
           </p:cNvPicPr>
@@ -10701,7 +11516,7 @@
       </p:pic>
       <p:sp>
         <p:nvSpPr>
-          <p:cNvPr id="12" name="Text 9"/>
+          <p:cNvPr id="13" name="Text 10"/>
           <p:cNvSpPr/>
           <p:nvPr/>
         </p:nvSpPr>
@@ -10740,7 +11555,7 @@
       </p:sp>
       <p:sp>
         <p:nvSpPr>
-          <p:cNvPr id="13" name="Text 10"/>
+          <p:cNvPr id="14" name="Text 11"/>
           <p:cNvSpPr/>
           <p:nvPr/>
         </p:nvSpPr>
@@ -10779,7 +11594,7 @@
       </p:sp>
       <p:sp>
         <p:nvSpPr>
-          <p:cNvPr id="14" name="Shape 11"/>
+          <p:cNvPr id="15" name="Shape 12"/>
           <p:cNvSpPr/>
           <p:nvPr/>
         </p:nvSpPr>
@@ -10806,7 +11621,7 @@
       </p:sp>
       <p:pic>
         <p:nvPicPr>
-          <p:cNvPr id="15" name="Image 1" descr="preencoded.png">    </p:cNvPr>
+          <p:cNvPr id="16" name="Image 1" descr="preencoded.png">    </p:cNvPr>
           <p:cNvPicPr>
             <a:picLocks noChangeAspect="1"/>
           </p:cNvPicPr>
@@ -10830,7 +11645,7 @@
       </p:pic>
       <p:sp>
         <p:nvSpPr>
-          <p:cNvPr id="16" name="Text 12"/>
+          <p:cNvPr id="17" name="Text 13"/>
           <p:cNvSpPr/>
           <p:nvPr/>
         </p:nvSpPr>
@@ -10869,7 +11684,7 @@
       </p:sp>
       <p:sp>
         <p:nvSpPr>
-          <p:cNvPr id="17" name="Text 13"/>
+          <p:cNvPr id="18" name="Text 14"/>
           <p:cNvSpPr/>
           <p:nvPr/>
         </p:nvSpPr>
@@ -10940,32 +11755,54 @@
       </p:grpSpPr>
       <p:sp>
         <p:nvSpPr>
-          <p:cNvPr id="2" name="Text 0"/>
-          <p:cNvSpPr/>
-          <p:nvPr/>
-        </p:nvSpPr>
-        <p:spPr>
-          <a:xfrm>
-            <a:off x="640080" y="365760"/>
-            <a:ext cx="7315200" cy="320040"/>
-          </a:xfrm>
-          <a:prstGeom prst="rect">
-            <a:avLst/>
-          </a:prstGeom>
-          <a:noFill/>
-          <a:ln/>
-        </p:spPr>
-        <p:txBody>
-          <a:bodyPr wrap="square" lIns="0" tIns="0" rIns="0" bIns="0" rtlCol="0" anchor="ctr"/>
-          <a:lstStyle/>
-          <a:p>
-            <a:pPr indent="0" marL="0">
-              <a:buNone/>
-            </a:pPr>
-            <a:r>
-              <a:rPr lang="en-US" sz="1500" b="1" dirty="0">
-                <a:solidFill>
-                  <a:srgbClr val="666666"/>
+          <p:cNvPr id="2" name="Shape 0"/>
+          <p:cNvSpPr/>
+          <p:nvPr/>
+        </p:nvSpPr>
+        <p:spPr>
+          <a:xfrm>
+            <a:off x="640080" y="347472"/>
+            <a:ext cx="2377440" cy="384048"/>
+          </a:xfrm>
+          <a:prstGeom prst="roundRect">
+            <a:avLst>
+              <a:gd name="adj" fmla="val 50000"/>
+            </a:avLst>
+          </a:prstGeom>
+          <a:solidFill>
+            <a:srgbClr val="FFD400"/>
+          </a:solidFill>
+          <a:ln/>
+        </p:spPr>
+      </p:sp>
+      <p:sp>
+        <p:nvSpPr>
+          <p:cNvPr id="3" name="Text 1"/>
+          <p:cNvSpPr/>
+          <p:nvPr/>
+        </p:nvSpPr>
+        <p:spPr>
+          <a:xfrm>
+            <a:off x="640080" y="347472"/>
+            <a:ext cx="2377440" cy="384048"/>
+          </a:xfrm>
+          <a:prstGeom prst="rect">
+            <a:avLst/>
+          </a:prstGeom>
+          <a:noFill/>
+          <a:ln/>
+        </p:spPr>
+        <p:txBody>
+          <a:bodyPr wrap="square" lIns="0" tIns="0" rIns="0" bIns="0" rtlCol="0" anchor="ctr"/>
+          <a:lstStyle/>
+          <a:p>
+            <a:pPr algn="ctr" indent="0" marL="0">
+              <a:buNone/>
+            </a:pPr>
+            <a:r>
+              <a:rPr lang="en-US" sz="1250" b="1" dirty="0">
+                <a:solidFill>
+                  <a:srgbClr val="1F1F1F"/>
                 </a:solidFill>
                 <a:latin typeface="Malgun Gothic" pitchFamily="34" charset="0"/>
                 <a:ea typeface="Malgun Gothic" pitchFamily="34" charset="-122"/>
@@ -10973,20 +11810,20 @@
               </a:rPr>
               <a:t>계산대미디어 설치 방법</a:t>
             </a:r>
-            <a:endParaRPr lang="en-US" sz="1500" dirty="0"/>
-          </a:p>
-        </p:txBody>
-      </p:sp>
-      <p:sp>
-        <p:nvSpPr>
-          <p:cNvPr id="3" name="Text 1"/>
+            <a:endParaRPr lang="en-US" sz="1250" dirty="0"/>
+          </a:p>
+        </p:txBody>
+      </p:sp>
+      <p:sp>
+        <p:nvSpPr>
+          <p:cNvPr id="4" name="Text 2"/>
           <p:cNvSpPr/>
           <p:nvPr/>
         </p:nvSpPr>
         <p:spPr>
           <a:xfrm>
             <a:off x="9262872" y="365760"/>
-            <a:ext cx="2286000" cy="320040"/>
+            <a:ext cx="2286000" cy="365760"/>
           </a:xfrm>
           <a:prstGeom prst="rect">
             <a:avLst/>
@@ -11018,14 +11855,14 @@
       </p:sp>
       <p:sp>
         <p:nvSpPr>
-          <p:cNvPr id="4" name="Shape 2"/>
-          <p:cNvSpPr/>
-          <p:nvPr/>
-        </p:nvSpPr>
-        <p:spPr>
-          <a:xfrm>
-            <a:off x="640080" y="1143000"/>
-            <a:ext cx="914400" cy="914400"/>
+          <p:cNvPr id="5" name="Shape 3"/>
+          <p:cNvSpPr/>
+          <p:nvPr/>
+        </p:nvSpPr>
+        <p:spPr>
+          <a:xfrm>
+            <a:off x="640080" y="1188720"/>
+            <a:ext cx="960120" cy="960120"/>
           </a:xfrm>
           <a:prstGeom prst="ellipse">
             <a:avLst/>
@@ -11034,18 +11871,25 @@
             <a:srgbClr val="FFD400"/>
           </a:solidFill>
           <a:ln/>
-        </p:spPr>
-      </p:sp>
-      <p:sp>
-        <p:nvSpPr>
-          <p:cNvPr id="5" name="Text 3"/>
-          <p:cNvSpPr/>
-          <p:nvPr/>
-        </p:nvSpPr>
-        <p:spPr>
-          <a:xfrm>
-            <a:off x="640080" y="1143000"/>
-            <a:ext cx="914400" cy="914400"/>
+          <a:effectLst>
+            <a:outerShdw sx="100000" sy="100000" kx="0" ky="0" algn="bl" rotWithShape="0" blurRad="114300" dist="38100" dir="5400000">
+              <a:srgbClr val="666666">
+                <a:alpha val="30000"/>
+              </a:srgbClr>
+            </a:outerShdw>
+          </a:effectLst>
+        </p:spPr>
+      </p:sp>
+      <p:sp>
+        <p:nvSpPr>
+          <p:cNvPr id="6" name="Text 4"/>
+          <p:cNvSpPr/>
+          <p:nvPr/>
+        </p:nvSpPr>
+        <p:spPr>
+          <a:xfrm>
+            <a:off x="640080" y="1188720"/>
+            <a:ext cx="960120" cy="960120"/>
           </a:xfrm>
           <a:prstGeom prst="rect">
             <a:avLst/>
@@ -11061,30 +11905,30 @@
               <a:buNone/>
             </a:pPr>
             <a:r>
-              <a:rPr lang="en-US" sz="3600" b="1" dirty="0">
+              <a:rPr lang="en-US" sz="3200" dirty="0">
                 <a:solidFill>
                   <a:srgbClr val="1F1F1F"/>
                 </a:solidFill>
-                <a:latin typeface="Malgun Gothic" pitchFamily="34" charset="0"/>
-                <a:ea typeface="Malgun Gothic" pitchFamily="34" charset="-122"/>
-                <a:cs typeface="Malgun Gothic" pitchFamily="34" charset="-120"/>
+                <a:latin typeface="HY헤드라인M" pitchFamily="34" charset="0"/>
+                <a:ea typeface="HY헤드라인M" pitchFamily="34" charset="-122"/>
+                <a:cs typeface="HY헤드라인M" pitchFamily="34" charset="-120"/>
               </a:rPr>
               <a:t>9</a:t>
             </a:r>
-            <a:endParaRPr lang="en-US" sz="3600" dirty="0"/>
-          </a:p>
-        </p:txBody>
-      </p:sp>
-      <p:sp>
-        <p:nvSpPr>
-          <p:cNvPr id="6" name="Text 4"/>
-          <p:cNvSpPr/>
-          <p:nvPr/>
-        </p:nvSpPr>
-        <p:spPr>
-          <a:xfrm>
-            <a:off x="1783080" y="1143000"/>
-            <a:ext cx="4206240" cy="914400"/>
+            <a:endParaRPr lang="en-US" sz="3200" dirty="0"/>
+          </a:p>
+        </p:txBody>
+      </p:sp>
+      <p:sp>
+        <p:nvSpPr>
+          <p:cNvPr id="7" name="Text 5"/>
+          <p:cNvSpPr/>
+          <p:nvPr/>
+        </p:nvSpPr>
+        <p:spPr>
+          <a:xfrm>
+            <a:off x="1874520" y="1188720"/>
+            <a:ext cx="4114800" cy="960120"/>
           </a:xfrm>
           <a:prstGeom prst="rect">
             <a:avLst/>
@@ -11100,23 +11944,23 @@
               <a:buNone/>
             </a:pPr>
             <a:r>
-              <a:rPr lang="en-US" sz="3000" b="1" dirty="0">
+              <a:rPr lang="en-US" sz="2800" dirty="0">
                 <a:solidFill>
                   <a:srgbClr val="222222"/>
                 </a:solidFill>
-                <a:latin typeface="Malgun Gothic" pitchFamily="34" charset="0"/>
-                <a:ea typeface="Malgun Gothic" pitchFamily="34" charset="-122"/>
-                <a:cs typeface="Malgun Gothic" pitchFamily="34" charset="-120"/>
+                <a:latin typeface="HY헤드라인M" pitchFamily="34" charset="0"/>
+                <a:ea typeface="HY헤드라인M" pitchFamily="34" charset="-122"/>
+                <a:cs typeface="HY헤드라인M" pitchFamily="34" charset="-120"/>
               </a:rPr>
               <a:t>케이블 정리</a:t>
             </a:r>
-            <a:endParaRPr lang="en-US" sz="3000" dirty="0"/>
-          </a:p>
-        </p:txBody>
-      </p:sp>
-      <p:sp>
-        <p:nvSpPr>
-          <p:cNvPr id="7" name="Text 5"/>
+            <a:endParaRPr lang="en-US" sz="2800" dirty="0"/>
+          </a:p>
+        </p:txBody>
+      </p:sp>
+      <p:sp>
+        <p:nvSpPr>
+          <p:cNvPr id="8" name="Text 6"/>
           <p:cNvSpPr/>
           <p:nvPr/>
         </p:nvSpPr>
@@ -11158,7 +12002,7 @@
       </p:sp>
       <p:sp>
         <p:nvSpPr>
-          <p:cNvPr id="8" name="Shape 6"/>
+          <p:cNvPr id="9" name="Shape 7"/>
           <p:cNvSpPr/>
           <p:nvPr/>
         </p:nvSpPr>
@@ -11180,7 +12024,7 @@
       </p:sp>
       <p:sp>
         <p:nvSpPr>
-          <p:cNvPr id="9" name="Text 7"/>
+          <p:cNvPr id="10" name="Text 8"/>
           <p:cNvSpPr/>
           <p:nvPr/>
         </p:nvSpPr>
@@ -11222,7 +12066,7 @@
       </p:sp>
       <p:sp>
         <p:nvSpPr>
-          <p:cNvPr id="10" name="Shape 8"/>
+          <p:cNvPr id="11" name="Shape 9"/>
           <p:cNvSpPr/>
           <p:nvPr/>
         </p:nvSpPr>
@@ -11249,7 +12093,7 @@
       </p:sp>
       <p:pic>
         <p:nvPicPr>
-          <p:cNvPr id="11" name="Image 0" descr="preencoded.png">    </p:cNvPr>
+          <p:cNvPr id="12" name="Image 0" descr="preencoded.png">    </p:cNvPr>
           <p:cNvPicPr>
             <a:picLocks noChangeAspect="1"/>
           </p:cNvPicPr>
@@ -11273,7 +12117,7 @@
       </p:pic>
       <p:sp>
         <p:nvSpPr>
-          <p:cNvPr id="12" name="Text 9"/>
+          <p:cNvPr id="13" name="Text 10"/>
           <p:cNvSpPr/>
           <p:nvPr/>
         </p:nvSpPr>
@@ -11312,7 +12156,7 @@
       </p:sp>
       <p:sp>
         <p:nvSpPr>
-          <p:cNvPr id="13" name="Text 10"/>
+          <p:cNvPr id="14" name="Text 11"/>
           <p:cNvSpPr/>
           <p:nvPr/>
         </p:nvSpPr>
@@ -11351,7 +12195,7 @@
       </p:sp>
       <p:sp>
         <p:nvSpPr>
-          <p:cNvPr id="14" name="Shape 11"/>
+          <p:cNvPr id="15" name="Shape 12"/>
           <p:cNvSpPr/>
           <p:nvPr/>
         </p:nvSpPr>
@@ -11378,7 +12222,7 @@
       </p:sp>
       <p:pic>
         <p:nvPicPr>
-          <p:cNvPr id="15" name="Image 1" descr="preencoded.png">    </p:cNvPr>
+          <p:cNvPr id="16" name="Image 1" descr="preencoded.png">    </p:cNvPr>
           <p:cNvPicPr>
             <a:picLocks noChangeAspect="1"/>
           </p:cNvPicPr>
@@ -11402,7 +12246,7 @@
       </p:pic>
       <p:sp>
         <p:nvSpPr>
-          <p:cNvPr id="16" name="Text 12"/>
+          <p:cNvPr id="17" name="Text 13"/>
           <p:cNvSpPr/>
           <p:nvPr/>
         </p:nvSpPr>
@@ -11441,7 +12285,7 @@
       </p:sp>
       <p:sp>
         <p:nvSpPr>
-          <p:cNvPr id="17" name="Text 13"/>
+          <p:cNvPr id="18" name="Text 14"/>
           <p:cNvSpPr/>
           <p:nvPr/>
         </p:nvSpPr>
@@ -11512,7 +12356,49 @@
       </p:grpSpPr>
       <p:sp>
         <p:nvSpPr>
-          <p:cNvPr id="2" name="Text 0"/>
+          <p:cNvPr id="2" name="Shape 0"/>
+          <p:cNvSpPr/>
+          <p:nvPr/>
+        </p:nvSpPr>
+        <p:spPr>
+          <a:xfrm>
+            <a:off x="10698480" y="-1554480"/>
+            <a:ext cx="3291840" cy="3291840"/>
+          </a:xfrm>
+          <a:prstGeom prst="ellipse">
+            <a:avLst/>
+          </a:prstGeom>
+          <a:ln w="31750">
+            <a:solidFill>
+              <a:srgbClr val="3C3C3C"/>
+            </a:solidFill>
+            <a:prstDash val="solid"/>
+          </a:ln>
+        </p:spPr>
+      </p:sp>
+      <p:sp>
+        <p:nvSpPr>
+          <p:cNvPr id="3" name="Shape 1"/>
+          <p:cNvSpPr/>
+          <p:nvPr/>
+        </p:nvSpPr>
+        <p:spPr>
+          <a:xfrm>
+            <a:off x="11521440" y="6035040"/>
+            <a:ext cx="1463040" cy="1463040"/>
+          </a:xfrm>
+          <a:prstGeom prst="ellipse">
+            <a:avLst/>
+          </a:prstGeom>
+          <a:solidFill>
+            <a:srgbClr val="FFD400"/>
+          </a:solidFill>
+          <a:ln/>
+        </p:spPr>
+      </p:sp>
+      <p:sp>
+        <p:nvSpPr>
+          <p:cNvPr id="4" name="Text 2"/>
           <p:cNvSpPr/>
           <p:nvPr/>
         </p:nvSpPr>
@@ -11535,29 +12421,127 @@
               <a:buNone/>
             </a:pPr>
             <a:r>
-              <a:rPr lang="en-US" sz="4000" b="1" dirty="0">
+              <a:rPr lang="en-US" sz="3600" dirty="0">
                 <a:solidFill>
                   <a:srgbClr val="FFFFFF"/>
+                </a:solidFill>
+                <a:latin typeface="HY헤드라인M" pitchFamily="34" charset="0"/>
+                <a:ea typeface="HY헤드라인M" pitchFamily="34" charset="-122"/>
+                <a:cs typeface="HY헤드라인M" pitchFamily="34" charset="-120"/>
+              </a:rPr>
+              <a:t>설치 완료 확인 사항</a:t>
+            </a:r>
+            <a:endParaRPr lang="en-US" sz="3600" dirty="0"/>
+          </a:p>
+        </p:txBody>
+      </p:sp>
+      <p:sp>
+        <p:nvSpPr>
+          <p:cNvPr id="5" name="Shape 3"/>
+          <p:cNvSpPr/>
+          <p:nvPr/>
+        </p:nvSpPr>
+        <p:spPr>
+          <a:xfrm>
+            <a:off x="822960" y="1792224"/>
+            <a:ext cx="384048" cy="384048"/>
+          </a:xfrm>
+          <a:prstGeom prst="ellipse">
+            <a:avLst/>
+          </a:prstGeom>
+          <a:solidFill>
+            <a:srgbClr val="FFD400"/>
+          </a:solidFill>
+          <a:ln/>
+        </p:spPr>
+      </p:sp>
+      <p:sp>
+        <p:nvSpPr>
+          <p:cNvPr id="6" name="Text 4"/>
+          <p:cNvSpPr/>
+          <p:nvPr/>
+        </p:nvSpPr>
+        <p:spPr>
+          <a:xfrm>
+            <a:off x="822960" y="1792224"/>
+            <a:ext cx="384048" cy="384048"/>
+          </a:xfrm>
+          <a:prstGeom prst="rect">
+            <a:avLst/>
+          </a:prstGeom>
+          <a:noFill/>
+          <a:ln/>
+        </p:spPr>
+        <p:txBody>
+          <a:bodyPr wrap="square" lIns="0" tIns="0" rIns="0" bIns="0" rtlCol="0" anchor="ctr"/>
+          <a:lstStyle/>
+          <a:p>
+            <a:pPr algn="ctr" indent="0" marL="0">
+              <a:buNone/>
+            </a:pPr>
+            <a:r>
+              <a:rPr lang="en-US" sz="1600" b="1" dirty="0">
+                <a:solidFill>
+                  <a:srgbClr val="1F1F1F"/>
                 </a:solidFill>
                 <a:latin typeface="Malgun Gothic" pitchFamily="34" charset="0"/>
                 <a:ea typeface="Malgun Gothic" pitchFamily="34" charset="-122"/>
                 <a:cs typeface="Malgun Gothic" pitchFamily="34" charset="-120"/>
               </a:rPr>
-              <a:t>설치 완료 확인 사항</a:t>
-            </a:r>
-            <a:endParaRPr lang="en-US" sz="4000" dirty="0"/>
-          </a:p>
-        </p:txBody>
-      </p:sp>
-      <p:sp>
-        <p:nvSpPr>
-          <p:cNvPr id="3" name="Shape 1"/>
-          <p:cNvSpPr/>
-          <p:nvPr/>
-        </p:nvSpPr>
-        <p:spPr>
-          <a:xfrm>
-            <a:off x="822960" y="1792224"/>
+              <a:t>✓</a:t>
+            </a:r>
+            <a:endParaRPr lang="en-US" sz="1600" dirty="0"/>
+          </a:p>
+        </p:txBody>
+      </p:sp>
+      <p:sp>
+        <p:nvSpPr>
+          <p:cNvPr id="7" name="Text 5"/>
+          <p:cNvSpPr/>
+          <p:nvPr/>
+        </p:nvSpPr>
+        <p:spPr>
+          <a:xfrm>
+            <a:off x="1417320" y="1737360"/>
+            <a:ext cx="9966960" cy="512064"/>
+          </a:xfrm>
+          <a:prstGeom prst="rect">
+            <a:avLst/>
+          </a:prstGeom>
+          <a:noFill/>
+          <a:ln/>
+        </p:spPr>
+        <p:txBody>
+          <a:bodyPr wrap="square" lIns="0" tIns="0" rIns="0" bIns="0" rtlCol="0" anchor="ctr"/>
+          <a:lstStyle/>
+          <a:p>
+            <a:pPr indent="0" marL="0">
+              <a:buNone/>
+            </a:pPr>
+            <a:r>
+              <a:rPr lang="en-US" sz="1700" dirty="0">
+                <a:solidFill>
+                  <a:srgbClr val="FFFFFF"/>
+                </a:solidFill>
+                <a:latin typeface="Malgun Gothic" pitchFamily="34" charset="0"/>
+                <a:ea typeface="Malgun Gothic" pitchFamily="34" charset="-122"/>
+                <a:cs typeface="Malgun Gothic" pitchFamily="34" charset="-120"/>
+              </a:rPr>
+              <a:t>HDMI 분배기 전원부가 USB 어댑터를 통해 콘센트에 연결되어 있는가?</a:t>
+            </a:r>
+            <a:endParaRPr lang="en-US" sz="1700" dirty="0"/>
+          </a:p>
+        </p:txBody>
+      </p:sp>
+      <p:sp>
+        <p:nvSpPr>
+          <p:cNvPr id="8" name="Shape 6"/>
+          <p:cNvSpPr/>
+          <p:nvPr/>
+        </p:nvSpPr>
+        <p:spPr>
+          <a:xfrm>
+            <a:off x="822960" y="2487168"/>
             <a:ext cx="384048" cy="384048"/>
           </a:xfrm>
           <a:prstGeom prst="ellipse">
@@ -11571,13 +12555,13 @@
       </p:sp>
       <p:sp>
         <p:nvSpPr>
-          <p:cNvPr id="4" name="Text 2"/>
-          <p:cNvSpPr/>
-          <p:nvPr/>
-        </p:nvSpPr>
-        <p:spPr>
-          <a:xfrm>
-            <a:off x="822960" y="1792224"/>
+          <p:cNvPr id="9" name="Text 7"/>
+          <p:cNvSpPr/>
+          <p:nvPr/>
+        </p:nvSpPr>
+        <p:spPr>
+          <a:xfrm>
+            <a:off x="822960" y="2487168"/>
             <a:ext cx="384048" cy="384048"/>
           </a:xfrm>
           <a:prstGeom prst="rect">
@@ -11610,13 +12594,13 @@
       </p:sp>
       <p:sp>
         <p:nvSpPr>
-          <p:cNvPr id="5" name="Text 3"/>
-          <p:cNvSpPr/>
-          <p:nvPr/>
-        </p:nvSpPr>
-        <p:spPr>
-          <a:xfrm>
-            <a:off x="1417320" y="1737360"/>
+          <p:cNvPr id="10" name="Text 8"/>
+          <p:cNvSpPr/>
+          <p:nvPr/>
+        </p:nvSpPr>
+        <p:spPr>
+          <a:xfrm>
+            <a:off x="1417320" y="2432304"/>
             <a:ext cx="9966960" cy="512064"/>
           </a:xfrm>
           <a:prstGeom prst="rect">
@@ -11641,7 +12625,7 @@
                 <a:ea typeface="Malgun Gothic" pitchFamily="34" charset="-122"/>
                 <a:cs typeface="Malgun Gothic" pitchFamily="34" charset="-120"/>
               </a:rPr>
-              <a:t>HDMI 분배기 전원부가 USB 어댑터를 통해 콘센트에 연결되어 있는가?</a:t>
+              <a:t>AI 카메라의 USB 단자가 셋톱박스에 정상적으로 연결되어 있는가?</a:t>
             </a:r>
             <a:endParaRPr lang="en-US" sz="1700" dirty="0"/>
           </a:p>
@@ -11649,13 +12633,13 @@
       </p:sp>
       <p:sp>
         <p:nvSpPr>
-          <p:cNvPr id="6" name="Shape 4"/>
-          <p:cNvSpPr/>
-          <p:nvPr/>
-        </p:nvSpPr>
-        <p:spPr>
-          <a:xfrm>
-            <a:off x="822960" y="2487168"/>
+          <p:cNvPr id="11" name="Shape 9"/>
+          <p:cNvSpPr/>
+          <p:nvPr/>
+        </p:nvSpPr>
+        <p:spPr>
+          <a:xfrm>
+            <a:off x="822960" y="3182112"/>
             <a:ext cx="384048" cy="384048"/>
           </a:xfrm>
           <a:prstGeom prst="ellipse">
@@ -11669,13 +12653,13 @@
       </p:sp>
       <p:sp>
         <p:nvSpPr>
-          <p:cNvPr id="7" name="Text 5"/>
-          <p:cNvSpPr/>
-          <p:nvPr/>
-        </p:nvSpPr>
-        <p:spPr>
-          <a:xfrm>
-            <a:off x="822960" y="2487168"/>
+          <p:cNvPr id="12" name="Text 10"/>
+          <p:cNvSpPr/>
+          <p:nvPr/>
+        </p:nvSpPr>
+        <p:spPr>
+          <a:xfrm>
+            <a:off x="822960" y="3182112"/>
             <a:ext cx="384048" cy="384048"/>
           </a:xfrm>
           <a:prstGeom prst="rect">
@@ -11708,13 +12692,13 @@
       </p:sp>
       <p:sp>
         <p:nvSpPr>
-          <p:cNvPr id="8" name="Text 6"/>
-          <p:cNvSpPr/>
-          <p:nvPr/>
-        </p:nvSpPr>
-        <p:spPr>
-          <a:xfrm>
-            <a:off x="1417320" y="2432304"/>
+          <p:cNvPr id="13" name="Text 11"/>
+          <p:cNvSpPr/>
+          <p:nvPr/>
+        </p:nvSpPr>
+        <p:spPr>
+          <a:xfrm>
+            <a:off x="1417320" y="3127248"/>
             <a:ext cx="9966960" cy="512064"/>
           </a:xfrm>
           <a:prstGeom prst="rect">
@@ -11739,7 +12723,7 @@
                 <a:ea typeface="Malgun Gothic" pitchFamily="34" charset="-122"/>
                 <a:cs typeface="Malgun Gothic" pitchFamily="34" charset="-120"/>
               </a:rPr>
-              <a:t>AI 카메라의 USB 단자가 셋톱박스에 정상적으로 연결되어 있는가?</a:t>
+              <a:t>AI 모드가 [통행량 + 성별/연령 분석]으로 변경되어 있는가?</a:t>
             </a:r>
             <a:endParaRPr lang="en-US" sz="1700" dirty="0"/>
           </a:p>
@@ -11747,13 +12731,13 @@
       </p:sp>
       <p:sp>
         <p:nvSpPr>
-          <p:cNvPr id="9" name="Shape 7"/>
-          <p:cNvSpPr/>
-          <p:nvPr/>
-        </p:nvSpPr>
-        <p:spPr>
-          <a:xfrm>
-            <a:off x="822960" y="3182112"/>
+          <p:cNvPr id="14" name="Shape 12"/>
+          <p:cNvSpPr/>
+          <p:nvPr/>
+        </p:nvSpPr>
+        <p:spPr>
+          <a:xfrm>
+            <a:off x="822960" y="3877056"/>
             <a:ext cx="384048" cy="384048"/>
           </a:xfrm>
           <a:prstGeom prst="ellipse">
@@ -11767,13 +12751,13 @@
       </p:sp>
       <p:sp>
         <p:nvSpPr>
-          <p:cNvPr id="10" name="Text 8"/>
-          <p:cNvSpPr/>
-          <p:nvPr/>
-        </p:nvSpPr>
-        <p:spPr>
-          <a:xfrm>
-            <a:off x="822960" y="3182112"/>
+          <p:cNvPr id="15" name="Text 13"/>
+          <p:cNvSpPr/>
+          <p:nvPr/>
+        </p:nvSpPr>
+        <p:spPr>
+          <a:xfrm>
+            <a:off x="822960" y="3877056"/>
             <a:ext cx="384048" cy="384048"/>
           </a:xfrm>
           <a:prstGeom prst="rect">
@@ -11806,13 +12790,13 @@
       </p:sp>
       <p:sp>
         <p:nvSpPr>
-          <p:cNvPr id="11" name="Text 9"/>
-          <p:cNvSpPr/>
-          <p:nvPr/>
-        </p:nvSpPr>
-        <p:spPr>
-          <a:xfrm>
-            <a:off x="1417320" y="3127248"/>
+          <p:cNvPr id="16" name="Text 14"/>
+          <p:cNvSpPr/>
+          <p:nvPr/>
+        </p:nvSpPr>
+        <p:spPr>
+          <a:xfrm>
+            <a:off x="1417320" y="3822192"/>
             <a:ext cx="9966960" cy="512064"/>
           </a:xfrm>
           <a:prstGeom prst="rect">
@@ -11837,7 +12821,7 @@
                 <a:ea typeface="Malgun Gothic" pitchFamily="34" charset="-122"/>
                 <a:cs typeface="Malgun Gothic" pitchFamily="34" charset="-120"/>
               </a:rPr>
-              <a:t>AI 모드가 [통행량 + 성별/연령 분석]으로 변경되어 있는가?</a:t>
+              <a:t>화각 확인 후 카메라가 화면 정가운데 위치('세요' 글자 아래)에 부착되어 있는가?</a:t>
             </a:r>
             <a:endParaRPr lang="en-US" sz="1700" dirty="0"/>
           </a:p>
@@ -11845,13 +12829,13 @@
       </p:sp>
       <p:sp>
         <p:nvSpPr>
-          <p:cNvPr id="12" name="Shape 10"/>
-          <p:cNvSpPr/>
-          <p:nvPr/>
-        </p:nvSpPr>
-        <p:spPr>
-          <a:xfrm>
-            <a:off x="822960" y="3877056"/>
+          <p:cNvPr id="17" name="Shape 15"/>
+          <p:cNvSpPr/>
+          <p:nvPr/>
+        </p:nvSpPr>
+        <p:spPr>
+          <a:xfrm>
+            <a:off x="822960" y="4572000"/>
             <a:ext cx="384048" cy="384048"/>
           </a:xfrm>
           <a:prstGeom prst="ellipse">
@@ -11865,13 +12849,13 @@
       </p:sp>
       <p:sp>
         <p:nvSpPr>
-          <p:cNvPr id="13" name="Text 11"/>
-          <p:cNvSpPr/>
-          <p:nvPr/>
-        </p:nvSpPr>
-        <p:spPr>
-          <a:xfrm>
-            <a:off x="822960" y="3877056"/>
+          <p:cNvPr id="18" name="Text 16"/>
+          <p:cNvSpPr/>
+          <p:nvPr/>
+        </p:nvSpPr>
+        <p:spPr>
+          <a:xfrm>
+            <a:off x="822960" y="4572000"/>
             <a:ext cx="384048" cy="384048"/>
           </a:xfrm>
           <a:prstGeom prst="rect">
@@ -11904,13 +12888,13 @@
       </p:sp>
       <p:sp>
         <p:nvSpPr>
-          <p:cNvPr id="14" name="Text 12"/>
-          <p:cNvSpPr/>
-          <p:nvPr/>
-        </p:nvSpPr>
-        <p:spPr>
-          <a:xfrm>
-            <a:off x="1417320" y="3822192"/>
+          <p:cNvPr id="19" name="Text 17"/>
+          <p:cNvSpPr/>
+          <p:nvPr/>
+        </p:nvSpPr>
+        <p:spPr>
+          <a:xfrm>
+            <a:off x="1417320" y="4517136"/>
             <a:ext cx="9966960" cy="512064"/>
           </a:xfrm>
           <a:prstGeom prst="rect">
@@ -11935,7 +12919,7 @@
                 <a:ea typeface="Malgun Gothic" pitchFamily="34" charset="-122"/>
                 <a:cs typeface="Malgun Gothic" pitchFamily="34" charset="-120"/>
               </a:rPr>
-              <a:t>화각 확인 후 카메라가 화면 정가운데 위치('세요' 글자 아래)에 부착되어 있는가?</a:t>
+              <a:t>보호 필름 제거 후 카메라 LED 부분을 페인트 마커로 칠했는가?</a:t>
             </a:r>
             <a:endParaRPr lang="en-US" sz="1700" dirty="0"/>
           </a:p>
@@ -11943,13 +12927,13 @@
       </p:sp>
       <p:sp>
         <p:nvSpPr>
-          <p:cNvPr id="15" name="Shape 13"/>
-          <p:cNvSpPr/>
-          <p:nvPr/>
-        </p:nvSpPr>
-        <p:spPr>
-          <a:xfrm>
-            <a:off x="822960" y="4572000"/>
+          <p:cNvPr id="20" name="Shape 18"/>
+          <p:cNvSpPr/>
+          <p:nvPr/>
+        </p:nvSpPr>
+        <p:spPr>
+          <a:xfrm>
+            <a:off x="822960" y="5266944"/>
             <a:ext cx="384048" cy="384048"/>
           </a:xfrm>
           <a:prstGeom prst="ellipse">
@@ -11963,13 +12947,13 @@
       </p:sp>
       <p:sp>
         <p:nvSpPr>
-          <p:cNvPr id="16" name="Text 14"/>
-          <p:cNvSpPr/>
-          <p:nvPr/>
-        </p:nvSpPr>
-        <p:spPr>
-          <a:xfrm>
-            <a:off x="822960" y="4572000"/>
+          <p:cNvPr id="21" name="Text 19"/>
+          <p:cNvSpPr/>
+          <p:nvPr/>
+        </p:nvSpPr>
+        <p:spPr>
+          <a:xfrm>
+            <a:off x="822960" y="5266944"/>
             <a:ext cx="384048" cy="384048"/>
           </a:xfrm>
           <a:prstGeom prst="rect">
@@ -12002,13 +12986,13 @@
       </p:sp>
       <p:sp>
         <p:nvSpPr>
-          <p:cNvPr id="17" name="Text 15"/>
-          <p:cNvSpPr/>
-          <p:nvPr/>
-        </p:nvSpPr>
-        <p:spPr>
-          <a:xfrm>
-            <a:off x="1417320" y="4517136"/>
+          <p:cNvPr id="22" name="Text 20"/>
+          <p:cNvSpPr/>
+          <p:nvPr/>
+        </p:nvSpPr>
+        <p:spPr>
+          <a:xfrm>
+            <a:off x="1417320" y="5212080"/>
             <a:ext cx="9966960" cy="512064"/>
           </a:xfrm>
           <a:prstGeom prst="rect">
@@ -12033,7 +13017,7 @@
                 <a:ea typeface="Malgun Gothic" pitchFamily="34" charset="-122"/>
                 <a:cs typeface="Malgun Gothic" pitchFamily="34" charset="-120"/>
               </a:rPr>
-              <a:t>보호 필름 제거 후 카메라 LED 부분을 페인트 마커로 칠했는가?</a:t>
+              <a:t>케이블이 외부에 노출되지 않도록 선 정리가 되어 있는가?</a:t>
             </a:r>
             <a:endParaRPr lang="en-US" sz="1700" dirty="0"/>
           </a:p>
@@ -12041,13 +13025,13 @@
       </p:sp>
       <p:sp>
         <p:nvSpPr>
-          <p:cNvPr id="18" name="Shape 16"/>
-          <p:cNvSpPr/>
-          <p:nvPr/>
-        </p:nvSpPr>
-        <p:spPr>
-          <a:xfrm>
-            <a:off x="822960" y="5266944"/>
+          <p:cNvPr id="23" name="Shape 21"/>
+          <p:cNvSpPr/>
+          <p:nvPr/>
+        </p:nvSpPr>
+        <p:spPr>
+          <a:xfrm>
+            <a:off x="822960" y="5961888"/>
             <a:ext cx="384048" cy="384048"/>
           </a:xfrm>
           <a:prstGeom prst="ellipse">
@@ -12061,13 +13045,13 @@
       </p:sp>
       <p:sp>
         <p:nvSpPr>
-          <p:cNvPr id="19" name="Text 17"/>
-          <p:cNvSpPr/>
-          <p:nvPr/>
-        </p:nvSpPr>
-        <p:spPr>
-          <a:xfrm>
-            <a:off x="822960" y="5266944"/>
+          <p:cNvPr id="24" name="Text 22"/>
+          <p:cNvSpPr/>
+          <p:nvPr/>
+        </p:nvSpPr>
+        <p:spPr>
+          <a:xfrm>
+            <a:off x="822960" y="5961888"/>
             <a:ext cx="384048" cy="384048"/>
           </a:xfrm>
           <a:prstGeom prst="rect">
@@ -12100,105 +13084,7 @@
       </p:sp>
       <p:sp>
         <p:nvSpPr>
-          <p:cNvPr id="20" name="Text 18"/>
-          <p:cNvSpPr/>
-          <p:nvPr/>
-        </p:nvSpPr>
-        <p:spPr>
-          <a:xfrm>
-            <a:off x="1417320" y="5212080"/>
-            <a:ext cx="9966960" cy="512064"/>
-          </a:xfrm>
-          <a:prstGeom prst="rect">
-            <a:avLst/>
-          </a:prstGeom>
-          <a:noFill/>
-          <a:ln/>
-        </p:spPr>
-        <p:txBody>
-          <a:bodyPr wrap="square" lIns="0" tIns="0" rIns="0" bIns="0" rtlCol="0" anchor="ctr"/>
-          <a:lstStyle/>
-          <a:p>
-            <a:pPr indent="0" marL="0">
-              <a:buNone/>
-            </a:pPr>
-            <a:r>
-              <a:rPr lang="en-US" sz="1700" dirty="0">
-                <a:solidFill>
-                  <a:srgbClr val="FFFFFF"/>
-                </a:solidFill>
-                <a:latin typeface="Malgun Gothic" pitchFamily="34" charset="0"/>
-                <a:ea typeface="Malgun Gothic" pitchFamily="34" charset="-122"/>
-                <a:cs typeface="Malgun Gothic" pitchFamily="34" charset="-120"/>
-              </a:rPr>
-              <a:t>케이블이 외부에 노출되지 않도록 선 정리가 되어 있는가?</a:t>
-            </a:r>
-            <a:endParaRPr lang="en-US" sz="1700" dirty="0"/>
-          </a:p>
-        </p:txBody>
-      </p:sp>
-      <p:sp>
-        <p:nvSpPr>
-          <p:cNvPr id="21" name="Shape 19"/>
-          <p:cNvSpPr/>
-          <p:nvPr/>
-        </p:nvSpPr>
-        <p:spPr>
-          <a:xfrm>
-            <a:off x="822960" y="5961888"/>
-            <a:ext cx="384048" cy="384048"/>
-          </a:xfrm>
-          <a:prstGeom prst="ellipse">
-            <a:avLst/>
-          </a:prstGeom>
-          <a:solidFill>
-            <a:srgbClr val="FFD400"/>
-          </a:solidFill>
-          <a:ln/>
-        </p:spPr>
-      </p:sp>
-      <p:sp>
-        <p:nvSpPr>
-          <p:cNvPr id="22" name="Text 20"/>
-          <p:cNvSpPr/>
-          <p:nvPr/>
-        </p:nvSpPr>
-        <p:spPr>
-          <a:xfrm>
-            <a:off x="822960" y="5961888"/>
-            <a:ext cx="384048" cy="384048"/>
-          </a:xfrm>
-          <a:prstGeom prst="rect">
-            <a:avLst/>
-          </a:prstGeom>
-          <a:noFill/>
-          <a:ln/>
-        </p:spPr>
-        <p:txBody>
-          <a:bodyPr wrap="square" lIns="0" tIns="0" rIns="0" bIns="0" rtlCol="0" anchor="ctr"/>
-          <a:lstStyle/>
-          <a:p>
-            <a:pPr algn="ctr" indent="0" marL="0">
-              <a:buNone/>
-            </a:pPr>
-            <a:r>
-              <a:rPr lang="en-US" sz="1600" b="1" dirty="0">
-                <a:solidFill>
-                  <a:srgbClr val="1F1F1F"/>
-                </a:solidFill>
-                <a:latin typeface="Malgun Gothic" pitchFamily="34" charset="0"/>
-                <a:ea typeface="Malgun Gothic" pitchFamily="34" charset="-122"/>
-                <a:cs typeface="Malgun Gothic" pitchFamily="34" charset="-120"/>
-              </a:rPr>
-              <a:t>✓</a:t>
-            </a:r>
-            <a:endParaRPr lang="en-US" sz="1600" dirty="0"/>
-          </a:p>
-        </p:txBody>
-      </p:sp>
-      <p:sp>
-        <p:nvSpPr>
-          <p:cNvPr id="23" name="Text 21"/>
+          <p:cNvPr id="25" name="Text 23"/>
           <p:cNvSpPr/>
           <p:nvPr/>
         </p:nvSpPr>
@@ -12269,14 +13155,144 @@
       </p:grpSpPr>
       <p:sp>
         <p:nvSpPr>
-          <p:cNvPr id="2" name="Text 0"/>
-          <p:cNvSpPr/>
-          <p:nvPr/>
-        </p:nvSpPr>
-        <p:spPr>
-          <a:xfrm>
-            <a:off x="822960" y="1463040"/>
-            <a:ext cx="3657600" cy="1463040"/>
+          <p:cNvPr id="2" name="Shape 0"/>
+          <p:cNvSpPr/>
+          <p:nvPr/>
+        </p:nvSpPr>
+        <p:spPr>
+          <a:xfrm>
+            <a:off x="8595360" y="-1463040"/>
+            <a:ext cx="5669280" cy="5669280"/>
+          </a:xfrm>
+          <a:prstGeom prst="ellipse">
+            <a:avLst/>
+          </a:prstGeom>
+          <a:ln w="31750">
+            <a:solidFill>
+              <a:srgbClr val="3C3C3C"/>
+            </a:solidFill>
+            <a:prstDash val="solid"/>
+          </a:ln>
+        </p:spPr>
+      </p:sp>
+      <p:sp>
+        <p:nvSpPr>
+          <p:cNvPr id="3" name="Shape 1"/>
+          <p:cNvSpPr/>
+          <p:nvPr/>
+        </p:nvSpPr>
+        <p:spPr>
+          <a:xfrm>
+            <a:off x="10607040" y="4480560"/>
+            <a:ext cx="3108960" cy="3108960"/>
+          </a:xfrm>
+          <a:prstGeom prst="ellipse">
+            <a:avLst/>
+          </a:prstGeom>
+          <a:solidFill>
+            <a:srgbClr val="FFD400"/>
+          </a:solidFill>
+          <a:ln/>
+        </p:spPr>
+      </p:sp>
+      <p:sp>
+        <p:nvSpPr>
+          <p:cNvPr id="4" name="Shape 2"/>
+          <p:cNvSpPr/>
+          <p:nvPr/>
+        </p:nvSpPr>
+        <p:spPr>
+          <a:xfrm>
+            <a:off x="9966960" y="3977640"/>
+            <a:ext cx="502920" cy="502920"/>
+          </a:xfrm>
+          <a:prstGeom prst="ellipse">
+            <a:avLst/>
+          </a:prstGeom>
+          <a:ln w="25400">
+            <a:solidFill>
+              <a:srgbClr val="FFD400"/>
+            </a:solidFill>
+            <a:prstDash val="solid"/>
+          </a:ln>
+        </p:spPr>
+      </p:sp>
+      <p:sp>
+        <p:nvSpPr>
+          <p:cNvPr id="5" name="Shape 3"/>
+          <p:cNvSpPr/>
+          <p:nvPr/>
+        </p:nvSpPr>
+        <p:spPr>
+          <a:xfrm>
+            <a:off x="822960" y="1234440"/>
+            <a:ext cx="1554480" cy="1554480"/>
+          </a:xfrm>
+          <a:prstGeom prst="ellipse">
+            <a:avLst/>
+          </a:prstGeom>
+          <a:solidFill>
+            <a:srgbClr val="FFD400"/>
+          </a:solidFill>
+          <a:ln/>
+          <a:effectLst>
+            <a:outerShdw sx="100000" sy="100000" kx="0" ky="0" algn="bl" rotWithShape="0" blurRad="114300" dist="38100" dir="5400000">
+              <a:srgbClr val="666666">
+                <a:alpha val="30000"/>
+              </a:srgbClr>
+            </a:outerShdw>
+          </a:effectLst>
+        </p:spPr>
+      </p:sp>
+      <p:sp>
+        <p:nvSpPr>
+          <p:cNvPr id="6" name="Text 4"/>
+          <p:cNvSpPr/>
+          <p:nvPr/>
+        </p:nvSpPr>
+        <p:spPr>
+          <a:xfrm>
+            <a:off x="822960" y="1234440"/>
+            <a:ext cx="1554480" cy="1554480"/>
+          </a:xfrm>
+          <a:prstGeom prst="rect">
+            <a:avLst/>
+          </a:prstGeom>
+          <a:noFill/>
+          <a:ln/>
+        </p:spPr>
+        <p:txBody>
+          <a:bodyPr wrap="square" lIns="0" tIns="0" rIns="0" bIns="0" rtlCol="0" anchor="ctr"/>
+          <a:lstStyle/>
+          <a:p>
+            <a:pPr algn="ctr" indent="0" marL="0">
+              <a:buNone/>
+            </a:pPr>
+            <a:r>
+              <a:rPr lang="en-US" sz="4000" dirty="0">
+                <a:solidFill>
+                  <a:srgbClr val="1F1F1F"/>
+                </a:solidFill>
+                <a:latin typeface="HY헤드라인M" pitchFamily="34" charset="0"/>
+                <a:ea typeface="HY헤드라인M" pitchFamily="34" charset="-122"/>
+                <a:cs typeface="HY헤드라인M" pitchFamily="34" charset="-120"/>
+              </a:rPr>
+              <a:t>01</a:t>
+            </a:r>
+            <a:endParaRPr lang="en-US" sz="4000" dirty="0"/>
+          </a:p>
+        </p:txBody>
+      </p:sp>
+      <p:sp>
+        <p:nvSpPr>
+          <p:cNvPr id="7" name="Text 5"/>
+          <p:cNvSpPr/>
+          <p:nvPr/>
+        </p:nvSpPr>
+        <p:spPr>
+          <a:xfrm>
+            <a:off x="822960" y="3154680"/>
+            <a:ext cx="10515600" cy="1005840"/>
           </a:xfrm>
           <a:prstGeom prst="rect">
             <a:avLst/>
@@ -12292,69 +13308,30 @@
               <a:buNone/>
             </a:pPr>
             <a:r>
-              <a:rPr lang="en-US" sz="8000" b="1" dirty="0">
-                <a:solidFill>
-                  <a:srgbClr val="FFD400"/>
-                </a:solidFill>
-                <a:latin typeface="Malgun Gothic" pitchFamily="34" charset="0"/>
-                <a:ea typeface="Malgun Gothic" pitchFamily="34" charset="-122"/>
-                <a:cs typeface="Malgun Gothic" pitchFamily="34" charset="-120"/>
-              </a:rPr>
-              <a:t>01</a:t>
-            </a:r>
-            <a:endParaRPr lang="en-US" sz="8000" dirty="0"/>
-          </a:p>
-        </p:txBody>
-      </p:sp>
-      <p:sp>
-        <p:nvSpPr>
-          <p:cNvPr id="3" name="Text 1"/>
-          <p:cNvSpPr/>
-          <p:nvPr/>
-        </p:nvSpPr>
-        <p:spPr>
-          <a:xfrm>
-            <a:off x="822960" y="3017520"/>
-            <a:ext cx="10515600" cy="1005840"/>
-          </a:xfrm>
-          <a:prstGeom prst="rect">
-            <a:avLst/>
-          </a:prstGeom>
-          <a:noFill/>
-          <a:ln/>
-        </p:spPr>
-        <p:txBody>
-          <a:bodyPr wrap="square" lIns="0" tIns="0" rIns="0" bIns="0" rtlCol="0" anchor="ctr"/>
-          <a:lstStyle/>
-          <a:p>
-            <a:pPr indent="0" marL="0">
-              <a:buNone/>
-            </a:pPr>
-            <a:r>
-              <a:rPr lang="en-US" sz="4400" b="1" dirty="0">
+              <a:rPr lang="en-US" sz="4000" dirty="0">
                 <a:solidFill>
                   <a:srgbClr val="FFFFFF"/>
                 </a:solidFill>
-                <a:latin typeface="Malgun Gothic" pitchFamily="34" charset="0"/>
-                <a:ea typeface="Malgun Gothic" pitchFamily="34" charset="-122"/>
-                <a:cs typeface="Malgun Gothic" pitchFamily="34" charset="-120"/>
+                <a:latin typeface="HY헤드라인M" pitchFamily="34" charset="0"/>
+                <a:ea typeface="HY헤드라인M" pitchFamily="34" charset="-122"/>
+                <a:cs typeface="HY헤드라인M" pitchFamily="34" charset="-120"/>
               </a:rPr>
               <a:t>동선스크린 AI 카메라 설치 방법</a:t>
             </a:r>
-            <a:endParaRPr lang="en-US" sz="4400" dirty="0"/>
-          </a:p>
-        </p:txBody>
-      </p:sp>
-      <p:sp>
-        <p:nvSpPr>
-          <p:cNvPr id="4" name="Text 2"/>
-          <p:cNvSpPr/>
-          <p:nvPr/>
-        </p:nvSpPr>
-        <p:spPr>
-          <a:xfrm>
-            <a:off x="822960" y="4114800"/>
-            <a:ext cx="10515600" cy="1280160"/>
+            <a:endParaRPr lang="en-US" sz="4000" dirty="0"/>
+          </a:p>
+        </p:txBody>
+      </p:sp>
+      <p:sp>
+        <p:nvSpPr>
+          <p:cNvPr id="8" name="Text 6"/>
+          <p:cNvSpPr/>
+          <p:nvPr/>
+        </p:nvSpPr>
+        <p:spPr>
+          <a:xfrm>
+            <a:off x="822960" y="4251960"/>
+            <a:ext cx="9326880" cy="1280160"/>
           </a:xfrm>
           <a:prstGeom prst="rect">
             <a:avLst/>
@@ -12373,7 +13350,7 @@
               <a:buNone/>
             </a:pPr>
             <a:r>
-              <a:rPr lang="en-US" sz="2000" dirty="0">
+              <a:rPr lang="en-US" sz="1900" dirty="0">
                 <a:solidFill>
                   <a:srgbClr val="CCCCCC"/>
                 </a:solidFill>
@@ -12383,7 +13360,7 @@
               </a:rPr>
               <a:t>매체당 AI 카메라 1대를 설치합니다.</a:t>
             </a:r>
-            <a:endParaRPr lang="en-US" sz="2000" dirty="0"/>
+            <a:endParaRPr lang="en-US" sz="1900" dirty="0"/>
           </a:p>
           <a:p>
             <a:pPr indent="0" marL="0">
@@ -12393,7 +13370,7 @@
               <a:buNone/>
             </a:pPr>
             <a:r>
-              <a:rPr lang="en-US" sz="2000" dirty="0">
+              <a:rPr lang="en-US" sz="1900" dirty="0">
                 <a:solidFill>
                   <a:srgbClr val="CCCCCC"/>
                 </a:solidFill>
@@ -12403,7 +13380,7 @@
               </a:rPr>
               <a:t>아래 9단계 순서에 따라 진행해 주세요.</a:t>
             </a:r>
-            <a:endParaRPr lang="en-US" sz="2000" dirty="0"/>
+            <a:endParaRPr lang="en-US" sz="1900" dirty="0"/>
           </a:p>
         </p:txBody>
       </p:sp>
@@ -12441,32 +13418,54 @@
       </p:grpSpPr>
       <p:sp>
         <p:nvSpPr>
-          <p:cNvPr id="2" name="Text 0"/>
-          <p:cNvSpPr/>
-          <p:nvPr/>
-        </p:nvSpPr>
-        <p:spPr>
-          <a:xfrm>
-            <a:off x="640080" y="365760"/>
-            <a:ext cx="7315200" cy="320040"/>
-          </a:xfrm>
-          <a:prstGeom prst="rect">
-            <a:avLst/>
-          </a:prstGeom>
-          <a:noFill/>
-          <a:ln/>
-        </p:spPr>
-        <p:txBody>
-          <a:bodyPr wrap="square" lIns="0" tIns="0" rIns="0" bIns="0" rtlCol="0" anchor="ctr"/>
-          <a:lstStyle/>
-          <a:p>
-            <a:pPr indent="0" marL="0">
-              <a:buNone/>
-            </a:pPr>
-            <a:r>
-              <a:rPr lang="en-US" sz="1500" b="1" dirty="0">
-                <a:solidFill>
-                  <a:srgbClr val="666666"/>
+          <p:cNvPr id="2" name="Shape 0"/>
+          <p:cNvSpPr/>
+          <p:nvPr/>
+        </p:nvSpPr>
+        <p:spPr>
+          <a:xfrm>
+            <a:off x="640080" y="347472"/>
+            <a:ext cx="2377440" cy="384048"/>
+          </a:xfrm>
+          <a:prstGeom prst="roundRect">
+            <a:avLst>
+              <a:gd name="adj" fmla="val 50000"/>
+            </a:avLst>
+          </a:prstGeom>
+          <a:solidFill>
+            <a:srgbClr val="FFD400"/>
+          </a:solidFill>
+          <a:ln/>
+        </p:spPr>
+      </p:sp>
+      <p:sp>
+        <p:nvSpPr>
+          <p:cNvPr id="3" name="Text 1"/>
+          <p:cNvSpPr/>
+          <p:nvPr/>
+        </p:nvSpPr>
+        <p:spPr>
+          <a:xfrm>
+            <a:off x="640080" y="347472"/>
+            <a:ext cx="2377440" cy="384048"/>
+          </a:xfrm>
+          <a:prstGeom prst="rect">
+            <a:avLst/>
+          </a:prstGeom>
+          <a:noFill/>
+          <a:ln/>
+        </p:spPr>
+        <p:txBody>
+          <a:bodyPr wrap="square" lIns="0" tIns="0" rIns="0" bIns="0" rtlCol="0" anchor="ctr"/>
+          <a:lstStyle/>
+          <a:p>
+            <a:pPr algn="ctr" indent="0" marL="0">
+              <a:buNone/>
+            </a:pPr>
+            <a:r>
+              <a:rPr lang="en-US" sz="1250" b="1" dirty="0">
+                <a:solidFill>
+                  <a:srgbClr val="1F1F1F"/>
                 </a:solidFill>
                 <a:latin typeface="Malgun Gothic" pitchFamily="34" charset="0"/>
                 <a:ea typeface="Malgun Gothic" pitchFamily="34" charset="-122"/>
@@ -12474,20 +13473,20 @@
               </a:rPr>
               <a:t>동선스크린 설치 방법</a:t>
             </a:r>
-            <a:endParaRPr lang="en-US" sz="1500" dirty="0"/>
-          </a:p>
-        </p:txBody>
-      </p:sp>
-      <p:sp>
-        <p:nvSpPr>
-          <p:cNvPr id="3" name="Text 1"/>
+            <a:endParaRPr lang="en-US" sz="1250" dirty="0"/>
+          </a:p>
+        </p:txBody>
+      </p:sp>
+      <p:sp>
+        <p:nvSpPr>
+          <p:cNvPr id="4" name="Text 2"/>
           <p:cNvSpPr/>
           <p:nvPr/>
         </p:nvSpPr>
         <p:spPr>
           <a:xfrm>
             <a:off x="9262872" y="365760"/>
-            <a:ext cx="2286000" cy="320040"/>
+            <a:ext cx="2286000" cy="365760"/>
           </a:xfrm>
           <a:prstGeom prst="rect">
             <a:avLst/>
@@ -12519,14 +13518,14 @@
       </p:sp>
       <p:sp>
         <p:nvSpPr>
-          <p:cNvPr id="4" name="Shape 2"/>
-          <p:cNvSpPr/>
-          <p:nvPr/>
-        </p:nvSpPr>
-        <p:spPr>
-          <a:xfrm>
-            <a:off x="640080" y="1143000"/>
-            <a:ext cx="914400" cy="914400"/>
+          <p:cNvPr id="5" name="Shape 3"/>
+          <p:cNvSpPr/>
+          <p:nvPr/>
+        </p:nvSpPr>
+        <p:spPr>
+          <a:xfrm>
+            <a:off x="640080" y="1188720"/>
+            <a:ext cx="960120" cy="960120"/>
           </a:xfrm>
           <a:prstGeom prst="ellipse">
             <a:avLst/>
@@ -12535,18 +13534,25 @@
             <a:srgbClr val="FFD400"/>
           </a:solidFill>
           <a:ln/>
-        </p:spPr>
-      </p:sp>
-      <p:sp>
-        <p:nvSpPr>
-          <p:cNvPr id="5" name="Text 3"/>
-          <p:cNvSpPr/>
-          <p:nvPr/>
-        </p:nvSpPr>
-        <p:spPr>
-          <a:xfrm>
-            <a:off x="640080" y="1143000"/>
-            <a:ext cx="914400" cy="914400"/>
+          <a:effectLst>
+            <a:outerShdw sx="100000" sy="100000" kx="0" ky="0" algn="bl" rotWithShape="0" blurRad="114300" dist="38100" dir="5400000">
+              <a:srgbClr val="666666">
+                <a:alpha val="30000"/>
+              </a:srgbClr>
+            </a:outerShdw>
+          </a:effectLst>
+        </p:spPr>
+      </p:sp>
+      <p:sp>
+        <p:nvSpPr>
+          <p:cNvPr id="6" name="Text 4"/>
+          <p:cNvSpPr/>
+          <p:nvPr/>
+        </p:nvSpPr>
+        <p:spPr>
+          <a:xfrm>
+            <a:off x="640080" y="1188720"/>
+            <a:ext cx="960120" cy="960120"/>
           </a:xfrm>
           <a:prstGeom prst="rect">
             <a:avLst/>
@@ -12562,30 +13568,30 @@
               <a:buNone/>
             </a:pPr>
             <a:r>
-              <a:rPr lang="en-US" sz="3600" b="1" dirty="0">
+              <a:rPr lang="en-US" sz="3200" dirty="0">
                 <a:solidFill>
                   <a:srgbClr val="1F1F1F"/>
                 </a:solidFill>
-                <a:latin typeface="Malgun Gothic" pitchFamily="34" charset="0"/>
-                <a:ea typeface="Malgun Gothic" pitchFamily="34" charset="-122"/>
-                <a:cs typeface="Malgun Gothic" pitchFamily="34" charset="-120"/>
+                <a:latin typeface="HY헤드라인M" pitchFamily="34" charset="0"/>
+                <a:ea typeface="HY헤드라인M" pitchFamily="34" charset="-122"/>
+                <a:cs typeface="HY헤드라인M" pitchFamily="34" charset="-120"/>
               </a:rPr>
               <a:t>1</a:t>
             </a:r>
-            <a:endParaRPr lang="en-US" sz="3600" dirty="0"/>
-          </a:p>
-        </p:txBody>
-      </p:sp>
-      <p:sp>
-        <p:nvSpPr>
-          <p:cNvPr id="6" name="Text 4"/>
-          <p:cNvSpPr/>
-          <p:nvPr/>
-        </p:nvSpPr>
-        <p:spPr>
-          <a:xfrm>
-            <a:off x="1783080" y="1143000"/>
-            <a:ext cx="4206240" cy="914400"/>
+            <a:endParaRPr lang="en-US" sz="3200" dirty="0"/>
+          </a:p>
+        </p:txBody>
+      </p:sp>
+      <p:sp>
+        <p:nvSpPr>
+          <p:cNvPr id="7" name="Text 5"/>
+          <p:cNvSpPr/>
+          <p:nvPr/>
+        </p:nvSpPr>
+        <p:spPr>
+          <a:xfrm>
+            <a:off x="1874520" y="1188720"/>
+            <a:ext cx="4114800" cy="960120"/>
           </a:xfrm>
           <a:prstGeom prst="rect">
             <a:avLst/>
@@ -12601,23 +13607,23 @@
               <a:buNone/>
             </a:pPr>
             <a:r>
-              <a:rPr lang="en-US" sz="3000" b="1" dirty="0">
+              <a:rPr lang="en-US" sz="2800" dirty="0">
                 <a:solidFill>
                   <a:srgbClr val="222222"/>
                 </a:solidFill>
-                <a:latin typeface="Malgun Gothic" pitchFamily="34" charset="0"/>
-                <a:ea typeface="Malgun Gothic" pitchFamily="34" charset="-122"/>
-                <a:cs typeface="Malgun Gothic" pitchFamily="34" charset="-120"/>
+                <a:latin typeface="HY헤드라인M" pitchFamily="34" charset="0"/>
+                <a:ea typeface="HY헤드라인M" pitchFamily="34" charset="-122"/>
+                <a:cs typeface="HY헤드라인M" pitchFamily="34" charset="-120"/>
               </a:rPr>
               <a:t>HDMI 분배기 전원부 분리</a:t>
             </a:r>
-            <a:endParaRPr lang="en-US" sz="3000" dirty="0"/>
-          </a:p>
-        </p:txBody>
-      </p:sp>
-      <p:sp>
-        <p:nvSpPr>
-          <p:cNvPr id="7" name="Text 5"/>
+            <a:endParaRPr lang="en-US" sz="2800" dirty="0"/>
+          </a:p>
+        </p:txBody>
+      </p:sp>
+      <p:sp>
+        <p:nvSpPr>
+          <p:cNvPr id="8" name="Text 6"/>
           <p:cNvSpPr/>
           <p:nvPr/>
         </p:nvSpPr>
@@ -12657,9 +13663,36 @@
           </a:p>
         </p:txBody>
       </p:sp>
+      <p:sp>
+        <p:nvSpPr>
+          <p:cNvPr id="9" name="Shape 7"/>
+          <p:cNvSpPr/>
+          <p:nvPr/>
+        </p:nvSpPr>
+        <p:spPr>
+          <a:xfrm>
+            <a:off x="6126480" y="1680210"/>
+            <a:ext cx="5394960" cy="4046220"/>
+          </a:xfrm>
+          <a:prstGeom prst="rect">
+            <a:avLst/>
+          </a:prstGeom>
+          <a:solidFill>
+            <a:srgbClr val="FFFFFF"/>
+          </a:solidFill>
+          <a:ln/>
+          <a:effectLst>
+            <a:outerShdw sx="100000" sy="100000" kx="0" ky="0" algn="bl" rotWithShape="0" blurRad="114300" dist="38100" dir="5400000">
+              <a:srgbClr val="666666">
+                <a:alpha val="30000"/>
+              </a:srgbClr>
+            </a:outerShdw>
+          </a:effectLst>
+        </p:spPr>
+      </p:sp>
       <p:pic>
         <p:nvPicPr>
-          <p:cNvPr id="8" name="Image 0" descr="/tmp/claude-0/-home-user-ars/e10980de-cf93-514e-8d8f-658883089fc8/scratchpad/photos/a5.jpg">    </p:cNvPr>
+          <p:cNvPr id="10" name="Image 0" descr="/tmp/claude-0/-home-user-ars/e10980de-cf93-514e-8d8f-658883089fc8/scratchpad/photos/a5.jpg">    </p:cNvPr>
           <p:cNvPicPr>
             <a:picLocks noChangeAspect="1"/>
           </p:cNvPicPr>
@@ -12715,32 +13748,54 @@
       </p:grpSpPr>
       <p:sp>
         <p:nvSpPr>
-          <p:cNvPr id="2" name="Text 0"/>
-          <p:cNvSpPr/>
-          <p:nvPr/>
-        </p:nvSpPr>
-        <p:spPr>
-          <a:xfrm>
-            <a:off x="640080" y="365760"/>
-            <a:ext cx="7315200" cy="320040"/>
-          </a:xfrm>
-          <a:prstGeom prst="rect">
-            <a:avLst/>
-          </a:prstGeom>
-          <a:noFill/>
-          <a:ln/>
-        </p:spPr>
-        <p:txBody>
-          <a:bodyPr wrap="square" lIns="0" tIns="0" rIns="0" bIns="0" rtlCol="0" anchor="ctr"/>
-          <a:lstStyle/>
-          <a:p>
-            <a:pPr indent="0" marL="0">
-              <a:buNone/>
-            </a:pPr>
-            <a:r>
-              <a:rPr lang="en-US" sz="1500" b="1" dirty="0">
-                <a:solidFill>
-                  <a:srgbClr val="666666"/>
+          <p:cNvPr id="2" name="Shape 0"/>
+          <p:cNvSpPr/>
+          <p:nvPr/>
+        </p:nvSpPr>
+        <p:spPr>
+          <a:xfrm>
+            <a:off x="640080" y="347472"/>
+            <a:ext cx="2377440" cy="384048"/>
+          </a:xfrm>
+          <a:prstGeom prst="roundRect">
+            <a:avLst>
+              <a:gd name="adj" fmla="val 50000"/>
+            </a:avLst>
+          </a:prstGeom>
+          <a:solidFill>
+            <a:srgbClr val="FFD400"/>
+          </a:solidFill>
+          <a:ln/>
+        </p:spPr>
+      </p:sp>
+      <p:sp>
+        <p:nvSpPr>
+          <p:cNvPr id="3" name="Text 1"/>
+          <p:cNvSpPr/>
+          <p:nvPr/>
+        </p:nvSpPr>
+        <p:spPr>
+          <a:xfrm>
+            <a:off x="640080" y="347472"/>
+            <a:ext cx="2377440" cy="384048"/>
+          </a:xfrm>
+          <a:prstGeom prst="rect">
+            <a:avLst/>
+          </a:prstGeom>
+          <a:noFill/>
+          <a:ln/>
+        </p:spPr>
+        <p:txBody>
+          <a:bodyPr wrap="square" lIns="0" tIns="0" rIns="0" bIns="0" rtlCol="0" anchor="ctr"/>
+          <a:lstStyle/>
+          <a:p>
+            <a:pPr algn="ctr" indent="0" marL="0">
+              <a:buNone/>
+            </a:pPr>
+            <a:r>
+              <a:rPr lang="en-US" sz="1250" b="1" dirty="0">
+                <a:solidFill>
+                  <a:srgbClr val="1F1F1F"/>
                 </a:solidFill>
                 <a:latin typeface="Malgun Gothic" pitchFamily="34" charset="0"/>
                 <a:ea typeface="Malgun Gothic" pitchFamily="34" charset="-122"/>
@@ -12748,20 +13803,20 @@
               </a:rPr>
               <a:t>동선스크린 설치 방법</a:t>
             </a:r>
-            <a:endParaRPr lang="en-US" sz="1500" dirty="0"/>
-          </a:p>
-        </p:txBody>
-      </p:sp>
-      <p:sp>
-        <p:nvSpPr>
-          <p:cNvPr id="3" name="Text 1"/>
+            <a:endParaRPr lang="en-US" sz="1250" dirty="0"/>
+          </a:p>
+        </p:txBody>
+      </p:sp>
+      <p:sp>
+        <p:nvSpPr>
+          <p:cNvPr id="4" name="Text 2"/>
           <p:cNvSpPr/>
           <p:nvPr/>
         </p:nvSpPr>
         <p:spPr>
           <a:xfrm>
             <a:off x="9262872" y="365760"/>
-            <a:ext cx="2286000" cy="320040"/>
+            <a:ext cx="2286000" cy="365760"/>
           </a:xfrm>
           <a:prstGeom prst="rect">
             <a:avLst/>
@@ -12793,14 +13848,14 @@
       </p:sp>
       <p:sp>
         <p:nvSpPr>
-          <p:cNvPr id="4" name="Shape 2"/>
-          <p:cNvSpPr/>
-          <p:nvPr/>
-        </p:nvSpPr>
-        <p:spPr>
-          <a:xfrm>
-            <a:off x="640080" y="1143000"/>
-            <a:ext cx="914400" cy="914400"/>
+          <p:cNvPr id="5" name="Shape 3"/>
+          <p:cNvSpPr/>
+          <p:nvPr/>
+        </p:nvSpPr>
+        <p:spPr>
+          <a:xfrm>
+            <a:off x="640080" y="1188720"/>
+            <a:ext cx="960120" cy="960120"/>
           </a:xfrm>
           <a:prstGeom prst="ellipse">
             <a:avLst/>
@@ -12809,18 +13864,25 @@
             <a:srgbClr val="FFD400"/>
           </a:solidFill>
           <a:ln/>
-        </p:spPr>
-      </p:sp>
-      <p:sp>
-        <p:nvSpPr>
-          <p:cNvPr id="5" name="Text 3"/>
-          <p:cNvSpPr/>
-          <p:nvPr/>
-        </p:nvSpPr>
-        <p:spPr>
-          <a:xfrm>
-            <a:off x="640080" y="1143000"/>
-            <a:ext cx="914400" cy="914400"/>
+          <a:effectLst>
+            <a:outerShdw sx="100000" sy="100000" kx="0" ky="0" algn="bl" rotWithShape="0" blurRad="114300" dist="38100" dir="5400000">
+              <a:srgbClr val="666666">
+                <a:alpha val="30000"/>
+              </a:srgbClr>
+            </a:outerShdw>
+          </a:effectLst>
+        </p:spPr>
+      </p:sp>
+      <p:sp>
+        <p:nvSpPr>
+          <p:cNvPr id="6" name="Text 4"/>
+          <p:cNvSpPr/>
+          <p:nvPr/>
+        </p:nvSpPr>
+        <p:spPr>
+          <a:xfrm>
+            <a:off x="640080" y="1188720"/>
+            <a:ext cx="960120" cy="960120"/>
           </a:xfrm>
           <a:prstGeom prst="rect">
             <a:avLst/>
@@ -12836,30 +13898,30 @@
               <a:buNone/>
             </a:pPr>
             <a:r>
-              <a:rPr lang="en-US" sz="3600" b="1" dirty="0">
+              <a:rPr lang="en-US" sz="3200" dirty="0">
                 <a:solidFill>
                   <a:srgbClr val="1F1F1F"/>
                 </a:solidFill>
-                <a:latin typeface="Malgun Gothic" pitchFamily="34" charset="0"/>
-                <a:ea typeface="Malgun Gothic" pitchFamily="34" charset="-122"/>
-                <a:cs typeface="Malgun Gothic" pitchFamily="34" charset="-120"/>
+                <a:latin typeface="HY헤드라인M" pitchFamily="34" charset="0"/>
+                <a:ea typeface="HY헤드라인M" pitchFamily="34" charset="-122"/>
+                <a:cs typeface="HY헤드라인M" pitchFamily="34" charset="-120"/>
               </a:rPr>
               <a:t>2</a:t>
             </a:r>
-            <a:endParaRPr lang="en-US" sz="3600" dirty="0"/>
-          </a:p>
-        </p:txBody>
-      </p:sp>
-      <p:sp>
-        <p:nvSpPr>
-          <p:cNvPr id="6" name="Text 4"/>
-          <p:cNvSpPr/>
-          <p:nvPr/>
-        </p:nvSpPr>
-        <p:spPr>
-          <a:xfrm>
-            <a:off x="1783080" y="1143000"/>
-            <a:ext cx="4206240" cy="914400"/>
+            <a:endParaRPr lang="en-US" sz="3200" dirty="0"/>
+          </a:p>
+        </p:txBody>
+      </p:sp>
+      <p:sp>
+        <p:nvSpPr>
+          <p:cNvPr id="7" name="Text 5"/>
+          <p:cNvSpPr/>
+          <p:nvPr/>
+        </p:nvSpPr>
+        <p:spPr>
+          <a:xfrm>
+            <a:off x="1874520" y="1188720"/>
+            <a:ext cx="4114800" cy="960120"/>
           </a:xfrm>
           <a:prstGeom prst="rect">
             <a:avLst/>
@@ -12875,23 +13937,23 @@
               <a:buNone/>
             </a:pPr>
             <a:r>
-              <a:rPr lang="en-US" sz="3000" b="1" dirty="0">
+              <a:rPr lang="en-US" sz="2800" dirty="0">
                 <a:solidFill>
                   <a:srgbClr val="222222"/>
                 </a:solidFill>
-                <a:latin typeface="Malgun Gothic" pitchFamily="34" charset="0"/>
-                <a:ea typeface="Malgun Gothic" pitchFamily="34" charset="-122"/>
-                <a:cs typeface="Malgun Gothic" pitchFamily="34" charset="-120"/>
+                <a:latin typeface="HY헤드라인M" pitchFamily="34" charset="0"/>
+                <a:ea typeface="HY헤드라인M" pitchFamily="34" charset="-122"/>
+                <a:cs typeface="HY헤드라인M" pitchFamily="34" charset="-120"/>
               </a:rPr>
               <a:t>USB 어댑터 연결</a:t>
             </a:r>
-            <a:endParaRPr lang="en-US" sz="3000" dirty="0"/>
-          </a:p>
-        </p:txBody>
-      </p:sp>
-      <p:sp>
-        <p:nvSpPr>
-          <p:cNvPr id="7" name="Text 5"/>
+            <a:endParaRPr lang="en-US" sz="2800" dirty="0"/>
+          </a:p>
+        </p:txBody>
+      </p:sp>
+      <p:sp>
+        <p:nvSpPr>
+          <p:cNvPr id="8" name="Text 6"/>
           <p:cNvSpPr/>
           <p:nvPr/>
         </p:nvSpPr>
@@ -12933,7 +13995,7 @@
       </p:sp>
       <p:sp>
         <p:nvSpPr>
-          <p:cNvPr id="8" name="Shape 6"/>
+          <p:cNvPr id="9" name="Shape 7"/>
           <p:cNvSpPr/>
           <p:nvPr/>
         </p:nvSpPr>
@@ -12960,7 +14022,7 @@
       </p:sp>
       <p:pic>
         <p:nvPicPr>
-          <p:cNvPr id="9" name="Image 0" descr="preencoded.png">    </p:cNvPr>
+          <p:cNvPr id="10" name="Image 0" descr="preencoded.png">    </p:cNvPr>
           <p:cNvPicPr>
             <a:picLocks noChangeAspect="1"/>
           </p:cNvPicPr>
@@ -12984,7 +14046,7 @@
       </p:pic>
       <p:sp>
         <p:nvSpPr>
-          <p:cNvPr id="10" name="Text 7"/>
+          <p:cNvPr id="11" name="Text 8"/>
           <p:cNvSpPr/>
           <p:nvPr/>
         </p:nvSpPr>
@@ -13055,32 +14117,54 @@
       </p:grpSpPr>
       <p:sp>
         <p:nvSpPr>
-          <p:cNvPr id="2" name="Text 0"/>
-          <p:cNvSpPr/>
-          <p:nvPr/>
-        </p:nvSpPr>
-        <p:spPr>
-          <a:xfrm>
-            <a:off x="640080" y="365760"/>
-            <a:ext cx="7315200" cy="320040"/>
-          </a:xfrm>
-          <a:prstGeom prst="rect">
-            <a:avLst/>
-          </a:prstGeom>
-          <a:noFill/>
-          <a:ln/>
-        </p:spPr>
-        <p:txBody>
-          <a:bodyPr wrap="square" lIns="0" tIns="0" rIns="0" bIns="0" rtlCol="0" anchor="ctr"/>
-          <a:lstStyle/>
-          <a:p>
-            <a:pPr indent="0" marL="0">
-              <a:buNone/>
-            </a:pPr>
-            <a:r>
-              <a:rPr lang="en-US" sz="1500" b="1" dirty="0">
-                <a:solidFill>
-                  <a:srgbClr val="666666"/>
+          <p:cNvPr id="2" name="Shape 0"/>
+          <p:cNvSpPr/>
+          <p:nvPr/>
+        </p:nvSpPr>
+        <p:spPr>
+          <a:xfrm>
+            <a:off x="640080" y="347472"/>
+            <a:ext cx="2377440" cy="384048"/>
+          </a:xfrm>
+          <a:prstGeom prst="roundRect">
+            <a:avLst>
+              <a:gd name="adj" fmla="val 50000"/>
+            </a:avLst>
+          </a:prstGeom>
+          <a:solidFill>
+            <a:srgbClr val="FFD400"/>
+          </a:solidFill>
+          <a:ln/>
+        </p:spPr>
+      </p:sp>
+      <p:sp>
+        <p:nvSpPr>
+          <p:cNvPr id="3" name="Text 1"/>
+          <p:cNvSpPr/>
+          <p:nvPr/>
+        </p:nvSpPr>
+        <p:spPr>
+          <a:xfrm>
+            <a:off x="640080" y="347472"/>
+            <a:ext cx="2377440" cy="384048"/>
+          </a:xfrm>
+          <a:prstGeom prst="rect">
+            <a:avLst/>
+          </a:prstGeom>
+          <a:noFill/>
+          <a:ln/>
+        </p:spPr>
+        <p:txBody>
+          <a:bodyPr wrap="square" lIns="0" tIns="0" rIns="0" bIns="0" rtlCol="0" anchor="ctr"/>
+          <a:lstStyle/>
+          <a:p>
+            <a:pPr algn="ctr" indent="0" marL="0">
+              <a:buNone/>
+            </a:pPr>
+            <a:r>
+              <a:rPr lang="en-US" sz="1250" b="1" dirty="0">
+                <a:solidFill>
+                  <a:srgbClr val="1F1F1F"/>
                 </a:solidFill>
                 <a:latin typeface="Malgun Gothic" pitchFamily="34" charset="0"/>
                 <a:ea typeface="Malgun Gothic" pitchFamily="34" charset="-122"/>
@@ -13088,20 +14172,20 @@
               </a:rPr>
               <a:t>동선스크린 설치 방법</a:t>
             </a:r>
-            <a:endParaRPr lang="en-US" sz="1500" dirty="0"/>
-          </a:p>
-        </p:txBody>
-      </p:sp>
-      <p:sp>
-        <p:nvSpPr>
-          <p:cNvPr id="3" name="Text 1"/>
+            <a:endParaRPr lang="en-US" sz="1250" dirty="0"/>
+          </a:p>
+        </p:txBody>
+      </p:sp>
+      <p:sp>
+        <p:nvSpPr>
+          <p:cNvPr id="4" name="Text 2"/>
           <p:cNvSpPr/>
           <p:nvPr/>
         </p:nvSpPr>
         <p:spPr>
           <a:xfrm>
             <a:off x="9262872" y="365760"/>
-            <a:ext cx="2286000" cy="320040"/>
+            <a:ext cx="2286000" cy="365760"/>
           </a:xfrm>
           <a:prstGeom prst="rect">
             <a:avLst/>
@@ -13133,14 +14217,14 @@
       </p:sp>
       <p:sp>
         <p:nvSpPr>
-          <p:cNvPr id="4" name="Shape 2"/>
-          <p:cNvSpPr/>
-          <p:nvPr/>
-        </p:nvSpPr>
-        <p:spPr>
-          <a:xfrm>
-            <a:off x="640080" y="1143000"/>
-            <a:ext cx="914400" cy="914400"/>
+          <p:cNvPr id="5" name="Shape 3"/>
+          <p:cNvSpPr/>
+          <p:nvPr/>
+        </p:nvSpPr>
+        <p:spPr>
+          <a:xfrm>
+            <a:off x="640080" y="1188720"/>
+            <a:ext cx="960120" cy="960120"/>
           </a:xfrm>
           <a:prstGeom prst="ellipse">
             <a:avLst/>
@@ -13149,18 +14233,25 @@
             <a:srgbClr val="FFD400"/>
           </a:solidFill>
           <a:ln/>
-        </p:spPr>
-      </p:sp>
-      <p:sp>
-        <p:nvSpPr>
-          <p:cNvPr id="5" name="Text 3"/>
-          <p:cNvSpPr/>
-          <p:nvPr/>
-        </p:nvSpPr>
-        <p:spPr>
-          <a:xfrm>
-            <a:off x="640080" y="1143000"/>
-            <a:ext cx="914400" cy="914400"/>
+          <a:effectLst>
+            <a:outerShdw sx="100000" sy="100000" kx="0" ky="0" algn="bl" rotWithShape="0" blurRad="114300" dist="38100" dir="5400000">
+              <a:srgbClr val="666666">
+                <a:alpha val="30000"/>
+              </a:srgbClr>
+            </a:outerShdw>
+          </a:effectLst>
+        </p:spPr>
+      </p:sp>
+      <p:sp>
+        <p:nvSpPr>
+          <p:cNvPr id="6" name="Text 4"/>
+          <p:cNvSpPr/>
+          <p:nvPr/>
+        </p:nvSpPr>
+        <p:spPr>
+          <a:xfrm>
+            <a:off x="640080" y="1188720"/>
+            <a:ext cx="960120" cy="960120"/>
           </a:xfrm>
           <a:prstGeom prst="rect">
             <a:avLst/>
@@ -13176,30 +14267,30 @@
               <a:buNone/>
             </a:pPr>
             <a:r>
-              <a:rPr lang="en-US" sz="3600" b="1" dirty="0">
+              <a:rPr lang="en-US" sz="3200" dirty="0">
                 <a:solidFill>
                   <a:srgbClr val="1F1F1F"/>
                 </a:solidFill>
-                <a:latin typeface="Malgun Gothic" pitchFamily="34" charset="0"/>
-                <a:ea typeface="Malgun Gothic" pitchFamily="34" charset="-122"/>
-                <a:cs typeface="Malgun Gothic" pitchFamily="34" charset="-120"/>
+                <a:latin typeface="HY헤드라인M" pitchFamily="34" charset="0"/>
+                <a:ea typeface="HY헤드라인M" pitchFamily="34" charset="-122"/>
+                <a:cs typeface="HY헤드라인M" pitchFamily="34" charset="-120"/>
               </a:rPr>
               <a:t>3</a:t>
             </a:r>
-            <a:endParaRPr lang="en-US" sz="3600" dirty="0"/>
-          </a:p>
-        </p:txBody>
-      </p:sp>
-      <p:sp>
-        <p:nvSpPr>
-          <p:cNvPr id="6" name="Text 4"/>
-          <p:cNvSpPr/>
-          <p:nvPr/>
-        </p:nvSpPr>
-        <p:spPr>
-          <a:xfrm>
-            <a:off x="1783080" y="1143000"/>
-            <a:ext cx="4206240" cy="914400"/>
+            <a:endParaRPr lang="en-US" sz="3200" dirty="0"/>
+          </a:p>
+        </p:txBody>
+      </p:sp>
+      <p:sp>
+        <p:nvSpPr>
+          <p:cNvPr id="7" name="Text 5"/>
+          <p:cNvSpPr/>
+          <p:nvPr/>
+        </p:nvSpPr>
+        <p:spPr>
+          <a:xfrm>
+            <a:off x="1874520" y="1188720"/>
+            <a:ext cx="4114800" cy="960120"/>
           </a:xfrm>
           <a:prstGeom prst="rect">
             <a:avLst/>
@@ -13215,23 +14306,23 @@
               <a:buNone/>
             </a:pPr>
             <a:r>
-              <a:rPr lang="en-US" sz="3000" b="1" dirty="0">
+              <a:rPr lang="en-US" sz="2800" dirty="0">
                 <a:solidFill>
                   <a:srgbClr val="222222"/>
                 </a:solidFill>
-                <a:latin typeface="Malgun Gothic" pitchFamily="34" charset="0"/>
-                <a:ea typeface="Malgun Gothic" pitchFamily="34" charset="-122"/>
-                <a:cs typeface="Malgun Gothic" pitchFamily="34" charset="-120"/>
+                <a:latin typeface="HY헤드라인M" pitchFamily="34" charset="0"/>
+                <a:ea typeface="HY헤드라인M" pitchFamily="34" charset="-122"/>
+                <a:cs typeface="HY헤드라인M" pitchFamily="34" charset="-120"/>
               </a:rPr>
               <a:t>콘센트 연결</a:t>
             </a:r>
-            <a:endParaRPr lang="en-US" sz="3000" dirty="0"/>
-          </a:p>
-        </p:txBody>
-      </p:sp>
-      <p:sp>
-        <p:nvSpPr>
-          <p:cNvPr id="7" name="Text 5"/>
+            <a:endParaRPr lang="en-US" sz="2800" dirty="0"/>
+          </a:p>
+        </p:txBody>
+      </p:sp>
+      <p:sp>
+        <p:nvSpPr>
+          <p:cNvPr id="8" name="Text 6"/>
           <p:cNvSpPr/>
           <p:nvPr/>
         </p:nvSpPr>
@@ -13271,9 +14362,36 @@
           </a:p>
         </p:txBody>
       </p:sp>
+      <p:sp>
+        <p:nvSpPr>
+          <p:cNvPr id="9" name="Shape 7"/>
+          <p:cNvSpPr/>
+          <p:nvPr/>
+        </p:nvSpPr>
+        <p:spPr>
+          <a:xfrm>
+            <a:off x="6903720" y="1143000"/>
+            <a:ext cx="3840480" cy="5120640"/>
+          </a:xfrm>
+          <a:prstGeom prst="rect">
+            <a:avLst/>
+          </a:prstGeom>
+          <a:solidFill>
+            <a:srgbClr val="FFFFFF"/>
+          </a:solidFill>
+          <a:ln/>
+          <a:effectLst>
+            <a:outerShdw sx="100000" sy="100000" kx="0" ky="0" algn="bl" rotWithShape="0" blurRad="114300" dist="38100" dir="5400000">
+              <a:srgbClr val="666666">
+                <a:alpha val="30000"/>
+              </a:srgbClr>
+            </a:outerShdw>
+          </a:effectLst>
+        </p:spPr>
+      </p:sp>
       <p:pic>
         <p:nvPicPr>
-          <p:cNvPr id="8" name="Image 0" descr="/tmp/claude-0/-home-user-ars/e10980de-cf93-514e-8d8f-658883089fc8/scratchpad/photos/a1.jpg">    </p:cNvPr>
+          <p:cNvPr id="10" name="Image 0" descr="/tmp/claude-0/-home-user-ars/e10980de-cf93-514e-8d8f-658883089fc8/scratchpad/photos/a1.jpg">    </p:cNvPr>
           <p:cNvPicPr>
             <a:picLocks noChangeAspect="1"/>
           </p:cNvPicPr>
@@ -13329,32 +14447,54 @@
       </p:grpSpPr>
       <p:sp>
         <p:nvSpPr>
-          <p:cNvPr id="2" name="Text 0"/>
-          <p:cNvSpPr/>
-          <p:nvPr/>
-        </p:nvSpPr>
-        <p:spPr>
-          <a:xfrm>
-            <a:off x="640080" y="365760"/>
-            <a:ext cx="7315200" cy="320040"/>
-          </a:xfrm>
-          <a:prstGeom prst="rect">
-            <a:avLst/>
-          </a:prstGeom>
-          <a:noFill/>
-          <a:ln/>
-        </p:spPr>
-        <p:txBody>
-          <a:bodyPr wrap="square" lIns="0" tIns="0" rIns="0" bIns="0" rtlCol="0" anchor="ctr"/>
-          <a:lstStyle/>
-          <a:p>
-            <a:pPr indent="0" marL="0">
-              <a:buNone/>
-            </a:pPr>
-            <a:r>
-              <a:rPr lang="en-US" sz="1500" b="1" dirty="0">
-                <a:solidFill>
-                  <a:srgbClr val="666666"/>
+          <p:cNvPr id="2" name="Shape 0"/>
+          <p:cNvSpPr/>
+          <p:nvPr/>
+        </p:nvSpPr>
+        <p:spPr>
+          <a:xfrm>
+            <a:off x="640080" y="347472"/>
+            <a:ext cx="2377440" cy="384048"/>
+          </a:xfrm>
+          <a:prstGeom prst="roundRect">
+            <a:avLst>
+              <a:gd name="adj" fmla="val 50000"/>
+            </a:avLst>
+          </a:prstGeom>
+          <a:solidFill>
+            <a:srgbClr val="FFD400"/>
+          </a:solidFill>
+          <a:ln/>
+        </p:spPr>
+      </p:sp>
+      <p:sp>
+        <p:nvSpPr>
+          <p:cNvPr id="3" name="Text 1"/>
+          <p:cNvSpPr/>
+          <p:nvPr/>
+        </p:nvSpPr>
+        <p:spPr>
+          <a:xfrm>
+            <a:off x="640080" y="347472"/>
+            <a:ext cx="2377440" cy="384048"/>
+          </a:xfrm>
+          <a:prstGeom prst="rect">
+            <a:avLst/>
+          </a:prstGeom>
+          <a:noFill/>
+          <a:ln/>
+        </p:spPr>
+        <p:txBody>
+          <a:bodyPr wrap="square" lIns="0" tIns="0" rIns="0" bIns="0" rtlCol="0" anchor="ctr"/>
+          <a:lstStyle/>
+          <a:p>
+            <a:pPr algn="ctr" indent="0" marL="0">
+              <a:buNone/>
+            </a:pPr>
+            <a:r>
+              <a:rPr lang="en-US" sz="1250" b="1" dirty="0">
+                <a:solidFill>
+                  <a:srgbClr val="1F1F1F"/>
                 </a:solidFill>
                 <a:latin typeface="Malgun Gothic" pitchFamily="34" charset="0"/>
                 <a:ea typeface="Malgun Gothic" pitchFamily="34" charset="-122"/>
@@ -13362,20 +14502,20 @@
               </a:rPr>
               <a:t>동선스크린 설치 방법</a:t>
             </a:r>
-            <a:endParaRPr lang="en-US" sz="1500" dirty="0"/>
-          </a:p>
-        </p:txBody>
-      </p:sp>
-      <p:sp>
-        <p:nvSpPr>
-          <p:cNvPr id="3" name="Text 1"/>
+            <a:endParaRPr lang="en-US" sz="1250" dirty="0"/>
+          </a:p>
+        </p:txBody>
+      </p:sp>
+      <p:sp>
+        <p:nvSpPr>
+          <p:cNvPr id="4" name="Text 2"/>
           <p:cNvSpPr/>
           <p:nvPr/>
         </p:nvSpPr>
         <p:spPr>
           <a:xfrm>
             <a:off x="9262872" y="365760"/>
-            <a:ext cx="2286000" cy="320040"/>
+            <a:ext cx="2286000" cy="365760"/>
           </a:xfrm>
           <a:prstGeom prst="rect">
             <a:avLst/>
@@ -13407,14 +14547,14 @@
       </p:sp>
       <p:sp>
         <p:nvSpPr>
-          <p:cNvPr id="4" name="Shape 2"/>
-          <p:cNvSpPr/>
-          <p:nvPr/>
-        </p:nvSpPr>
-        <p:spPr>
-          <a:xfrm>
-            <a:off x="640080" y="822960"/>
-            <a:ext cx="685800" cy="685800"/>
+          <p:cNvPr id="5" name="Shape 3"/>
+          <p:cNvSpPr/>
+          <p:nvPr/>
+        </p:nvSpPr>
+        <p:spPr>
+          <a:xfrm>
+            <a:off x="640080" y="914400"/>
+            <a:ext cx="731520" cy="731520"/>
           </a:xfrm>
           <a:prstGeom prst="ellipse">
             <a:avLst/>
@@ -13423,18 +14563,25 @@
             <a:srgbClr val="FFD400"/>
           </a:solidFill>
           <a:ln/>
-        </p:spPr>
-      </p:sp>
-      <p:sp>
-        <p:nvSpPr>
-          <p:cNvPr id="5" name="Text 3"/>
-          <p:cNvSpPr/>
-          <p:nvPr/>
-        </p:nvSpPr>
-        <p:spPr>
-          <a:xfrm>
-            <a:off x="640080" y="822960"/>
-            <a:ext cx="685800" cy="685800"/>
+          <a:effectLst>
+            <a:outerShdw sx="100000" sy="100000" kx="0" ky="0" algn="bl" rotWithShape="0" blurRad="114300" dist="38100" dir="5400000">
+              <a:srgbClr val="666666">
+                <a:alpha val="30000"/>
+              </a:srgbClr>
+            </a:outerShdw>
+          </a:effectLst>
+        </p:spPr>
+      </p:sp>
+      <p:sp>
+        <p:nvSpPr>
+          <p:cNvPr id="6" name="Text 4"/>
+          <p:cNvSpPr/>
+          <p:nvPr/>
+        </p:nvSpPr>
+        <p:spPr>
+          <a:xfrm>
+            <a:off x="640080" y="914400"/>
+            <a:ext cx="731520" cy="731520"/>
           </a:xfrm>
           <a:prstGeom prst="rect">
             <a:avLst/>
@@ -13450,30 +14597,30 @@
               <a:buNone/>
             </a:pPr>
             <a:r>
-              <a:rPr lang="en-US" sz="2600" b="1" dirty="0">
+              <a:rPr lang="en-US" sz="2400" dirty="0">
                 <a:solidFill>
                   <a:srgbClr val="1F1F1F"/>
                 </a:solidFill>
-                <a:latin typeface="Malgun Gothic" pitchFamily="34" charset="0"/>
-                <a:ea typeface="Malgun Gothic" pitchFamily="34" charset="-122"/>
-                <a:cs typeface="Malgun Gothic" pitchFamily="34" charset="-120"/>
+                <a:latin typeface="HY헤드라인M" pitchFamily="34" charset="0"/>
+                <a:ea typeface="HY헤드라인M" pitchFamily="34" charset="-122"/>
+                <a:cs typeface="HY헤드라인M" pitchFamily="34" charset="-120"/>
               </a:rPr>
               <a:t>4</a:t>
             </a:r>
-            <a:endParaRPr lang="en-US" sz="2600" dirty="0"/>
-          </a:p>
-        </p:txBody>
-      </p:sp>
-      <p:sp>
-        <p:nvSpPr>
-          <p:cNvPr id="6" name="Text 4"/>
-          <p:cNvSpPr/>
-          <p:nvPr/>
-        </p:nvSpPr>
-        <p:spPr>
-          <a:xfrm>
-            <a:off x="1554480" y="822960"/>
-            <a:ext cx="10424160" cy="685800"/>
+            <a:endParaRPr lang="en-US" sz="2400" dirty="0"/>
+          </a:p>
+        </p:txBody>
+      </p:sp>
+      <p:sp>
+        <p:nvSpPr>
+          <p:cNvPr id="7" name="Text 5"/>
+          <p:cNvSpPr/>
+          <p:nvPr/>
+        </p:nvSpPr>
+        <p:spPr>
+          <a:xfrm>
+            <a:off x="1645920" y="914400"/>
+            <a:ext cx="10241280" cy="731520"/>
           </a:xfrm>
           <a:prstGeom prst="rect">
             <a:avLst/>
@@ -13489,23 +14636,50 @@
               <a:buNone/>
             </a:pPr>
             <a:r>
-              <a:rPr lang="en-US" sz="2400" b="1" dirty="0">
+              <a:rPr lang="en-US" sz="2400" dirty="0">
                 <a:solidFill>
                   <a:srgbClr val="222222"/>
                 </a:solidFill>
-                <a:latin typeface="Malgun Gothic" pitchFamily="34" charset="0"/>
-                <a:ea typeface="Malgun Gothic" pitchFamily="34" charset="-122"/>
-                <a:cs typeface="Malgun Gothic" pitchFamily="34" charset="-120"/>
+                <a:latin typeface="HY헤드라인M" pitchFamily="34" charset="0"/>
+                <a:ea typeface="HY헤드라인M" pitchFamily="34" charset="-122"/>
+                <a:cs typeface="HY헤드라인M" pitchFamily="34" charset="-120"/>
               </a:rPr>
               <a:t>AI 카메라 연결</a:t>
             </a:r>
             <a:endParaRPr lang="en-US" sz="2400" dirty="0"/>
           </a:p>
         </p:txBody>
+      </p:sp>
+      <p:sp>
+        <p:nvSpPr>
+          <p:cNvPr id="8" name="Shape 6"/>
+          <p:cNvSpPr/>
+          <p:nvPr/>
+        </p:nvSpPr>
+        <p:spPr>
+          <a:xfrm>
+            <a:off x="3042666" y="1783080"/>
+            <a:ext cx="2914650" cy="3886200"/>
+          </a:xfrm>
+          <a:prstGeom prst="rect">
+            <a:avLst/>
+          </a:prstGeom>
+          <a:solidFill>
+            <a:srgbClr val="FFFFFF"/>
+          </a:solidFill>
+          <a:ln/>
+          <a:effectLst>
+            <a:outerShdw sx="100000" sy="100000" kx="0" ky="0" algn="bl" rotWithShape="0" blurRad="114300" dist="38100" dir="5400000">
+              <a:srgbClr val="666666">
+                <a:alpha val="30000"/>
+              </a:srgbClr>
+            </a:outerShdw>
+          </a:effectLst>
+        </p:spPr>
       </p:sp>
       <p:pic>
         <p:nvPicPr>
-          <p:cNvPr id="7" name="Image 0" descr="/tmp/claude-0/-home-user-ars/e10980de-cf93-514e-8d8f-658883089fc8/scratchpad/photos/a4.jpg">    </p:cNvPr>
+          <p:cNvPr id="9" name="Image 0" descr="/tmp/claude-0/-home-user-ars/e10980de-cf93-514e-8d8f-658883089fc8/scratchpad/photos/a4.jpg">    </p:cNvPr>
           <p:cNvPicPr>
             <a:picLocks noChangeAspect="1"/>
           </p:cNvPicPr>
@@ -13529,7 +14703,7 @@
       </p:pic>
       <p:sp>
         <p:nvSpPr>
-          <p:cNvPr id="8" name="Shape 5"/>
+          <p:cNvPr id="10" name="Shape 7"/>
           <p:cNvSpPr/>
           <p:nvPr/>
         </p:nvSpPr>
@@ -13553,7 +14727,7 @@
       </p:sp>
       <p:sp>
         <p:nvSpPr>
-          <p:cNvPr id="9" name="Text 6"/>
+          <p:cNvPr id="11" name="Text 8"/>
           <p:cNvSpPr/>
           <p:nvPr/>
         </p:nvSpPr>
@@ -13590,9 +14764,36 @@
           </a:p>
         </p:txBody>
       </p:sp>
+      <p:sp>
+        <p:nvSpPr>
+          <p:cNvPr id="12" name="Shape 9"/>
+          <p:cNvSpPr/>
+          <p:nvPr/>
+        </p:nvSpPr>
+        <p:spPr>
+          <a:xfrm>
+            <a:off x="6231636" y="1783080"/>
+            <a:ext cx="2914650" cy="3886200"/>
+          </a:xfrm>
+          <a:prstGeom prst="rect">
+            <a:avLst/>
+          </a:prstGeom>
+          <a:solidFill>
+            <a:srgbClr val="FFFFFF"/>
+          </a:solidFill>
+          <a:ln/>
+          <a:effectLst>
+            <a:outerShdw sx="100000" sy="100000" kx="0" ky="0" algn="bl" rotWithShape="0" blurRad="114300" dist="38100" dir="5400000">
+              <a:srgbClr val="666666">
+                <a:alpha val="30000"/>
+              </a:srgbClr>
+            </a:outerShdw>
+          </a:effectLst>
+        </p:spPr>
+      </p:sp>
       <p:pic>
         <p:nvPicPr>
-          <p:cNvPr id="10" name="Image 1" descr="/tmp/claude-0/-home-user-ars/e10980de-cf93-514e-8d8f-658883089fc8/scratchpad/photos/a2.jpg">    </p:cNvPr>
+          <p:cNvPr id="13" name="Image 1" descr="/tmp/claude-0/-home-user-ars/e10980de-cf93-514e-8d8f-658883089fc8/scratchpad/photos/a2.jpg">    </p:cNvPr>
           <p:cNvPicPr>
             <a:picLocks noChangeAspect="1"/>
           </p:cNvPicPr>
@@ -13616,7 +14817,7 @@
       </p:pic>
       <p:sp>
         <p:nvSpPr>
-          <p:cNvPr id="11" name="Shape 7"/>
+          <p:cNvPr id="14" name="Shape 10"/>
           <p:cNvSpPr/>
           <p:nvPr/>
         </p:nvSpPr>
@@ -13640,7 +14841,7 @@
       </p:sp>
       <p:sp>
         <p:nvSpPr>
-          <p:cNvPr id="12" name="Text 8"/>
+          <p:cNvPr id="15" name="Text 11"/>
           <p:cNvSpPr/>
           <p:nvPr/>
         </p:nvSpPr>
@@ -13679,7 +14880,7 @@
       </p:sp>
       <p:sp>
         <p:nvSpPr>
-          <p:cNvPr id="13" name="Text 9"/>
+          <p:cNvPr id="16" name="Text 12"/>
           <p:cNvSpPr/>
           <p:nvPr/>
         </p:nvSpPr>
@@ -13753,32 +14954,54 @@
       </p:grpSpPr>
       <p:sp>
         <p:nvSpPr>
-          <p:cNvPr id="2" name="Text 0"/>
-          <p:cNvSpPr/>
-          <p:nvPr/>
-        </p:nvSpPr>
-        <p:spPr>
-          <a:xfrm>
-            <a:off x="640080" y="365760"/>
-            <a:ext cx="7315200" cy="320040"/>
-          </a:xfrm>
-          <a:prstGeom prst="rect">
-            <a:avLst/>
-          </a:prstGeom>
-          <a:noFill/>
-          <a:ln/>
-        </p:spPr>
-        <p:txBody>
-          <a:bodyPr wrap="square" lIns="0" tIns="0" rIns="0" bIns="0" rtlCol="0" anchor="ctr"/>
-          <a:lstStyle/>
-          <a:p>
-            <a:pPr indent="0" marL="0">
-              <a:buNone/>
-            </a:pPr>
-            <a:r>
-              <a:rPr lang="en-US" sz="1500" b="1" dirty="0">
-                <a:solidFill>
-                  <a:srgbClr val="666666"/>
+          <p:cNvPr id="2" name="Shape 0"/>
+          <p:cNvSpPr/>
+          <p:nvPr/>
+        </p:nvSpPr>
+        <p:spPr>
+          <a:xfrm>
+            <a:off x="640080" y="347472"/>
+            <a:ext cx="2377440" cy="384048"/>
+          </a:xfrm>
+          <a:prstGeom prst="roundRect">
+            <a:avLst>
+              <a:gd name="adj" fmla="val 50000"/>
+            </a:avLst>
+          </a:prstGeom>
+          <a:solidFill>
+            <a:srgbClr val="FFD400"/>
+          </a:solidFill>
+          <a:ln/>
+        </p:spPr>
+      </p:sp>
+      <p:sp>
+        <p:nvSpPr>
+          <p:cNvPr id="3" name="Text 1"/>
+          <p:cNvSpPr/>
+          <p:nvPr/>
+        </p:nvSpPr>
+        <p:spPr>
+          <a:xfrm>
+            <a:off x="640080" y="347472"/>
+            <a:ext cx="2377440" cy="384048"/>
+          </a:xfrm>
+          <a:prstGeom prst="rect">
+            <a:avLst/>
+          </a:prstGeom>
+          <a:noFill/>
+          <a:ln/>
+        </p:spPr>
+        <p:txBody>
+          <a:bodyPr wrap="square" lIns="0" tIns="0" rIns="0" bIns="0" rtlCol="0" anchor="ctr"/>
+          <a:lstStyle/>
+          <a:p>
+            <a:pPr algn="ctr" indent="0" marL="0">
+              <a:buNone/>
+            </a:pPr>
+            <a:r>
+              <a:rPr lang="en-US" sz="1250" b="1" dirty="0">
+                <a:solidFill>
+                  <a:srgbClr val="1F1F1F"/>
                 </a:solidFill>
                 <a:latin typeface="Malgun Gothic" pitchFamily="34" charset="0"/>
                 <a:ea typeface="Malgun Gothic" pitchFamily="34" charset="-122"/>
@@ -13786,20 +15009,20 @@
               </a:rPr>
               <a:t>동선스크린 설치 방법</a:t>
             </a:r>
-            <a:endParaRPr lang="en-US" sz="1500" dirty="0"/>
-          </a:p>
-        </p:txBody>
-      </p:sp>
-      <p:sp>
-        <p:nvSpPr>
-          <p:cNvPr id="3" name="Text 1"/>
+            <a:endParaRPr lang="en-US" sz="1250" dirty="0"/>
+          </a:p>
+        </p:txBody>
+      </p:sp>
+      <p:sp>
+        <p:nvSpPr>
+          <p:cNvPr id="4" name="Text 2"/>
           <p:cNvSpPr/>
           <p:nvPr/>
         </p:nvSpPr>
         <p:spPr>
           <a:xfrm>
             <a:off x="9262872" y="365760"/>
-            <a:ext cx="2286000" cy="320040"/>
+            <a:ext cx="2286000" cy="365760"/>
           </a:xfrm>
           <a:prstGeom prst="rect">
             <a:avLst/>
@@ -13831,14 +15054,14 @@
       </p:sp>
       <p:sp>
         <p:nvSpPr>
-          <p:cNvPr id="4" name="Shape 2"/>
-          <p:cNvSpPr/>
-          <p:nvPr/>
-        </p:nvSpPr>
-        <p:spPr>
-          <a:xfrm>
-            <a:off x="640080" y="822960"/>
-            <a:ext cx="685800" cy="685800"/>
+          <p:cNvPr id="5" name="Shape 3"/>
+          <p:cNvSpPr/>
+          <p:nvPr/>
+        </p:nvSpPr>
+        <p:spPr>
+          <a:xfrm>
+            <a:off x="640080" y="914400"/>
+            <a:ext cx="731520" cy="731520"/>
           </a:xfrm>
           <a:prstGeom prst="ellipse">
             <a:avLst/>
@@ -13847,18 +15070,25 @@
             <a:srgbClr val="FFD400"/>
           </a:solidFill>
           <a:ln/>
-        </p:spPr>
-      </p:sp>
-      <p:sp>
-        <p:nvSpPr>
-          <p:cNvPr id="5" name="Text 3"/>
-          <p:cNvSpPr/>
-          <p:nvPr/>
-        </p:nvSpPr>
-        <p:spPr>
-          <a:xfrm>
-            <a:off x="640080" y="822960"/>
-            <a:ext cx="685800" cy="685800"/>
+          <a:effectLst>
+            <a:outerShdw sx="100000" sy="100000" kx="0" ky="0" algn="bl" rotWithShape="0" blurRad="114300" dist="38100" dir="5400000">
+              <a:srgbClr val="666666">
+                <a:alpha val="30000"/>
+              </a:srgbClr>
+            </a:outerShdw>
+          </a:effectLst>
+        </p:spPr>
+      </p:sp>
+      <p:sp>
+        <p:nvSpPr>
+          <p:cNvPr id="6" name="Text 4"/>
+          <p:cNvSpPr/>
+          <p:nvPr/>
+        </p:nvSpPr>
+        <p:spPr>
+          <a:xfrm>
+            <a:off x="640080" y="914400"/>
+            <a:ext cx="731520" cy="731520"/>
           </a:xfrm>
           <a:prstGeom prst="rect">
             <a:avLst/>
@@ -13874,30 +15104,30 @@
               <a:buNone/>
             </a:pPr>
             <a:r>
-              <a:rPr lang="en-US" sz="2600" b="1" dirty="0">
+              <a:rPr lang="en-US" sz="2400" dirty="0">
                 <a:solidFill>
                   <a:srgbClr val="1F1F1F"/>
                 </a:solidFill>
-                <a:latin typeface="Malgun Gothic" pitchFamily="34" charset="0"/>
-                <a:ea typeface="Malgun Gothic" pitchFamily="34" charset="-122"/>
-                <a:cs typeface="Malgun Gothic" pitchFamily="34" charset="-120"/>
+                <a:latin typeface="HY헤드라인M" pitchFamily="34" charset="0"/>
+                <a:ea typeface="HY헤드라인M" pitchFamily="34" charset="-122"/>
+                <a:cs typeface="HY헤드라인M" pitchFamily="34" charset="-120"/>
               </a:rPr>
               <a:t>5</a:t>
             </a:r>
-            <a:endParaRPr lang="en-US" sz="2600" dirty="0"/>
-          </a:p>
-        </p:txBody>
-      </p:sp>
-      <p:sp>
-        <p:nvSpPr>
-          <p:cNvPr id="6" name="Text 4"/>
-          <p:cNvSpPr/>
-          <p:nvPr/>
-        </p:nvSpPr>
-        <p:spPr>
-          <a:xfrm>
-            <a:off x="1554480" y="822960"/>
-            <a:ext cx="10424160" cy="685800"/>
+            <a:endParaRPr lang="en-US" sz="2400" dirty="0"/>
+          </a:p>
+        </p:txBody>
+      </p:sp>
+      <p:sp>
+        <p:nvSpPr>
+          <p:cNvPr id="7" name="Text 5"/>
+          <p:cNvSpPr/>
+          <p:nvPr/>
+        </p:nvSpPr>
+        <p:spPr>
+          <a:xfrm>
+            <a:off x="1645920" y="914400"/>
+            <a:ext cx="10241280" cy="731520"/>
           </a:xfrm>
           <a:prstGeom prst="rect">
             <a:avLst/>
@@ -13913,23 +15143,50 @@
               <a:buNone/>
             </a:pPr>
             <a:r>
-              <a:rPr lang="en-US" sz="2400" b="1" dirty="0">
+              <a:rPr lang="en-US" sz="2400" dirty="0">
                 <a:solidFill>
                   <a:srgbClr val="222222"/>
                 </a:solidFill>
-                <a:latin typeface="Malgun Gothic" pitchFamily="34" charset="0"/>
-                <a:ea typeface="Malgun Gothic" pitchFamily="34" charset="-122"/>
-                <a:cs typeface="Malgun Gothic" pitchFamily="34" charset="-120"/>
+                <a:latin typeface="HY헤드라인M" pitchFamily="34" charset="0"/>
+                <a:ea typeface="HY헤드라인M" pitchFamily="34" charset="-122"/>
+                <a:cs typeface="HY헤드라인M" pitchFamily="34" charset="-120"/>
               </a:rPr>
               <a:t>AI 카메라 설정 ① — 히든키 입력</a:t>
             </a:r>
             <a:endParaRPr lang="en-US" sz="2400" dirty="0"/>
           </a:p>
         </p:txBody>
+      </p:sp>
+      <p:sp>
+        <p:nvSpPr>
+          <p:cNvPr id="8" name="Shape 6"/>
+          <p:cNvSpPr/>
+          <p:nvPr/>
+        </p:nvSpPr>
+        <p:spPr>
+          <a:xfrm>
+            <a:off x="1332529" y="1783080"/>
+            <a:ext cx="2914650" cy="3886200"/>
+          </a:xfrm>
+          <a:prstGeom prst="rect">
+            <a:avLst/>
+          </a:prstGeom>
+          <a:solidFill>
+            <a:srgbClr val="FFFFFF"/>
+          </a:solidFill>
+          <a:ln/>
+          <a:effectLst>
+            <a:outerShdw sx="100000" sy="100000" kx="0" ky="0" algn="bl" rotWithShape="0" blurRad="114300" dist="38100" dir="5400000">
+              <a:srgbClr val="666666">
+                <a:alpha val="30000"/>
+              </a:srgbClr>
+            </a:outerShdw>
+          </a:effectLst>
+        </p:spPr>
       </p:sp>
       <p:pic>
         <p:nvPicPr>
-          <p:cNvPr id="7" name="Image 0" descr="/tmp/claude-0/-home-user-ars/e10980de-cf93-514e-8d8f-658883089fc8/scratchpad/photos/b4.jpg">    </p:cNvPr>
+          <p:cNvPr id="9" name="Image 0" descr="/tmp/claude-0/-home-user-ars/e10980de-cf93-514e-8d8f-658883089fc8/scratchpad/photos/b4.jpg">    </p:cNvPr>
           <p:cNvPicPr>
             <a:picLocks noChangeAspect="1"/>
           </p:cNvPicPr>
@@ -13953,7 +15210,7 @@
       </p:pic>
       <p:sp>
         <p:nvSpPr>
-          <p:cNvPr id="8" name="Shape 5"/>
+          <p:cNvPr id="10" name="Shape 7"/>
           <p:cNvSpPr/>
           <p:nvPr/>
         </p:nvSpPr>
@@ -13977,7 +15234,7 @@
       </p:sp>
       <p:sp>
         <p:nvSpPr>
-          <p:cNvPr id="9" name="Text 6"/>
+          <p:cNvPr id="11" name="Text 8"/>
           <p:cNvSpPr/>
           <p:nvPr/>
         </p:nvSpPr>
@@ -14014,9 +15271,36 @@
           </a:p>
         </p:txBody>
       </p:sp>
+      <p:sp>
+        <p:nvSpPr>
+          <p:cNvPr id="12" name="Shape 9"/>
+          <p:cNvSpPr/>
+          <p:nvPr/>
+        </p:nvSpPr>
+        <p:spPr>
+          <a:xfrm>
+            <a:off x="4521499" y="1783080"/>
+            <a:ext cx="6334924" cy="3886200"/>
+          </a:xfrm>
+          <a:prstGeom prst="rect">
+            <a:avLst/>
+          </a:prstGeom>
+          <a:solidFill>
+            <a:srgbClr val="FFFFFF"/>
+          </a:solidFill>
+          <a:ln/>
+          <a:effectLst>
+            <a:outerShdw sx="100000" sy="100000" kx="0" ky="0" algn="bl" rotWithShape="0" blurRad="114300" dist="38100" dir="5400000">
+              <a:srgbClr val="666666">
+                <a:alpha val="30000"/>
+              </a:srgbClr>
+            </a:outerShdw>
+          </a:effectLst>
+        </p:spPr>
+      </p:sp>
       <p:pic>
         <p:nvPicPr>
-          <p:cNvPr id="10" name="Image 1" descr="/tmp/claude-0/-home-user-ars/e10980de-cf93-514e-8d8f-658883089fc8/scratchpad/photos/b1.jpg">    </p:cNvPr>
+          <p:cNvPr id="13" name="Image 1" descr="/tmp/claude-0/-home-user-ars/e10980de-cf93-514e-8d8f-658883089fc8/scratchpad/photos/b1.jpg">    </p:cNvPr>
           <p:cNvPicPr>
             <a:picLocks noChangeAspect="1"/>
           </p:cNvPicPr>
@@ -14040,7 +15324,7 @@
       </p:pic>
       <p:sp>
         <p:nvSpPr>
-          <p:cNvPr id="11" name="Shape 7"/>
+          <p:cNvPr id="14" name="Shape 10"/>
           <p:cNvSpPr/>
           <p:nvPr/>
         </p:nvSpPr>
@@ -14064,7 +15348,7 @@
       </p:sp>
       <p:sp>
         <p:nvSpPr>
-          <p:cNvPr id="12" name="Text 8"/>
+          <p:cNvPr id="15" name="Text 11"/>
           <p:cNvSpPr/>
           <p:nvPr/>
         </p:nvSpPr>
@@ -14103,7 +15387,7 @@
       </p:sp>
       <p:sp>
         <p:nvSpPr>
-          <p:cNvPr id="13" name="Text 9"/>
+          <p:cNvPr id="16" name="Text 12"/>
           <p:cNvSpPr/>
           <p:nvPr/>
         </p:nvSpPr>
@@ -14177,32 +15461,54 @@
       </p:grpSpPr>
       <p:sp>
         <p:nvSpPr>
-          <p:cNvPr id="2" name="Text 0"/>
-          <p:cNvSpPr/>
-          <p:nvPr/>
-        </p:nvSpPr>
-        <p:spPr>
-          <a:xfrm>
-            <a:off x="640080" y="365760"/>
-            <a:ext cx="7315200" cy="320040"/>
-          </a:xfrm>
-          <a:prstGeom prst="rect">
-            <a:avLst/>
-          </a:prstGeom>
-          <a:noFill/>
-          <a:ln/>
-        </p:spPr>
-        <p:txBody>
-          <a:bodyPr wrap="square" lIns="0" tIns="0" rIns="0" bIns="0" rtlCol="0" anchor="ctr"/>
-          <a:lstStyle/>
-          <a:p>
-            <a:pPr indent="0" marL="0">
-              <a:buNone/>
-            </a:pPr>
-            <a:r>
-              <a:rPr lang="en-US" sz="1500" b="1" dirty="0">
-                <a:solidFill>
-                  <a:srgbClr val="666666"/>
+          <p:cNvPr id="2" name="Shape 0"/>
+          <p:cNvSpPr/>
+          <p:nvPr/>
+        </p:nvSpPr>
+        <p:spPr>
+          <a:xfrm>
+            <a:off x="640080" y="347472"/>
+            <a:ext cx="2377440" cy="384048"/>
+          </a:xfrm>
+          <a:prstGeom prst="roundRect">
+            <a:avLst>
+              <a:gd name="adj" fmla="val 50000"/>
+            </a:avLst>
+          </a:prstGeom>
+          <a:solidFill>
+            <a:srgbClr val="FFD400"/>
+          </a:solidFill>
+          <a:ln/>
+        </p:spPr>
+      </p:sp>
+      <p:sp>
+        <p:nvSpPr>
+          <p:cNvPr id="3" name="Text 1"/>
+          <p:cNvSpPr/>
+          <p:nvPr/>
+        </p:nvSpPr>
+        <p:spPr>
+          <a:xfrm>
+            <a:off x="640080" y="347472"/>
+            <a:ext cx="2377440" cy="384048"/>
+          </a:xfrm>
+          <a:prstGeom prst="rect">
+            <a:avLst/>
+          </a:prstGeom>
+          <a:noFill/>
+          <a:ln/>
+        </p:spPr>
+        <p:txBody>
+          <a:bodyPr wrap="square" lIns="0" tIns="0" rIns="0" bIns="0" rtlCol="0" anchor="ctr"/>
+          <a:lstStyle/>
+          <a:p>
+            <a:pPr algn="ctr" indent="0" marL="0">
+              <a:buNone/>
+            </a:pPr>
+            <a:r>
+              <a:rPr lang="en-US" sz="1250" b="1" dirty="0">
+                <a:solidFill>
+                  <a:srgbClr val="1F1F1F"/>
                 </a:solidFill>
                 <a:latin typeface="Malgun Gothic" pitchFamily="34" charset="0"/>
                 <a:ea typeface="Malgun Gothic" pitchFamily="34" charset="-122"/>
@@ -14210,20 +15516,20 @@
               </a:rPr>
               <a:t>동선스크린 설치 방법</a:t>
             </a:r>
-            <a:endParaRPr lang="en-US" sz="1500" dirty="0"/>
-          </a:p>
-        </p:txBody>
-      </p:sp>
-      <p:sp>
-        <p:nvSpPr>
-          <p:cNvPr id="3" name="Text 1"/>
+            <a:endParaRPr lang="en-US" sz="1250" dirty="0"/>
+          </a:p>
+        </p:txBody>
+      </p:sp>
+      <p:sp>
+        <p:nvSpPr>
+          <p:cNvPr id="4" name="Text 2"/>
           <p:cNvSpPr/>
           <p:nvPr/>
         </p:nvSpPr>
         <p:spPr>
           <a:xfrm>
             <a:off x="9262872" y="365760"/>
-            <a:ext cx="2286000" cy="320040"/>
+            <a:ext cx="2286000" cy="365760"/>
           </a:xfrm>
           <a:prstGeom prst="rect">
             <a:avLst/>
@@ -14255,14 +15561,14 @@
       </p:sp>
       <p:sp>
         <p:nvSpPr>
-          <p:cNvPr id="4" name="Shape 2"/>
-          <p:cNvSpPr/>
-          <p:nvPr/>
-        </p:nvSpPr>
-        <p:spPr>
-          <a:xfrm>
-            <a:off x="640080" y="822960"/>
-            <a:ext cx="685800" cy="685800"/>
+          <p:cNvPr id="5" name="Shape 3"/>
+          <p:cNvSpPr/>
+          <p:nvPr/>
+        </p:nvSpPr>
+        <p:spPr>
+          <a:xfrm>
+            <a:off x="640080" y="914400"/>
+            <a:ext cx="731520" cy="731520"/>
           </a:xfrm>
           <a:prstGeom prst="ellipse">
             <a:avLst/>
@@ -14271,18 +15577,25 @@
             <a:srgbClr val="FFD400"/>
           </a:solidFill>
           <a:ln/>
-        </p:spPr>
-      </p:sp>
-      <p:sp>
-        <p:nvSpPr>
-          <p:cNvPr id="5" name="Text 3"/>
-          <p:cNvSpPr/>
-          <p:nvPr/>
-        </p:nvSpPr>
-        <p:spPr>
-          <a:xfrm>
-            <a:off x="640080" y="822960"/>
-            <a:ext cx="685800" cy="685800"/>
+          <a:effectLst>
+            <a:outerShdw sx="100000" sy="100000" kx="0" ky="0" algn="bl" rotWithShape="0" blurRad="114300" dist="38100" dir="5400000">
+              <a:srgbClr val="666666">
+                <a:alpha val="30000"/>
+              </a:srgbClr>
+            </a:outerShdw>
+          </a:effectLst>
+        </p:spPr>
+      </p:sp>
+      <p:sp>
+        <p:nvSpPr>
+          <p:cNvPr id="6" name="Text 4"/>
+          <p:cNvSpPr/>
+          <p:nvPr/>
+        </p:nvSpPr>
+        <p:spPr>
+          <a:xfrm>
+            <a:off x="640080" y="914400"/>
+            <a:ext cx="731520" cy="731520"/>
           </a:xfrm>
           <a:prstGeom prst="rect">
             <a:avLst/>
@@ -14298,30 +15611,30 @@
               <a:buNone/>
             </a:pPr>
             <a:r>
-              <a:rPr lang="en-US" sz="2600" b="1" dirty="0">
+              <a:rPr lang="en-US" sz="2400" dirty="0">
                 <a:solidFill>
                   <a:srgbClr val="1F1F1F"/>
                 </a:solidFill>
-                <a:latin typeface="Malgun Gothic" pitchFamily="34" charset="0"/>
-                <a:ea typeface="Malgun Gothic" pitchFamily="34" charset="-122"/>
-                <a:cs typeface="Malgun Gothic" pitchFamily="34" charset="-120"/>
+                <a:latin typeface="HY헤드라인M" pitchFamily="34" charset="0"/>
+                <a:ea typeface="HY헤드라인M" pitchFamily="34" charset="-122"/>
+                <a:cs typeface="HY헤드라인M" pitchFamily="34" charset="-120"/>
               </a:rPr>
               <a:t>5</a:t>
             </a:r>
-            <a:endParaRPr lang="en-US" sz="2600" dirty="0"/>
-          </a:p>
-        </p:txBody>
-      </p:sp>
-      <p:sp>
-        <p:nvSpPr>
-          <p:cNvPr id="6" name="Text 4"/>
-          <p:cNvSpPr/>
-          <p:nvPr/>
-        </p:nvSpPr>
-        <p:spPr>
-          <a:xfrm>
-            <a:off x="1554480" y="822960"/>
-            <a:ext cx="10424160" cy="685800"/>
+            <a:endParaRPr lang="en-US" sz="2400" dirty="0"/>
+          </a:p>
+        </p:txBody>
+      </p:sp>
+      <p:sp>
+        <p:nvSpPr>
+          <p:cNvPr id="7" name="Text 5"/>
+          <p:cNvSpPr/>
+          <p:nvPr/>
+        </p:nvSpPr>
+        <p:spPr>
+          <a:xfrm>
+            <a:off x="1645920" y="914400"/>
+            <a:ext cx="10241280" cy="731520"/>
           </a:xfrm>
           <a:prstGeom prst="rect">
             <a:avLst/>
@@ -14337,23 +15650,50 @@
               <a:buNone/>
             </a:pPr>
             <a:r>
-              <a:rPr lang="en-US" sz="2400" b="1" dirty="0">
+              <a:rPr lang="en-US" sz="2400" dirty="0">
                 <a:solidFill>
                   <a:srgbClr val="222222"/>
                 </a:solidFill>
-                <a:latin typeface="Malgun Gothic" pitchFamily="34" charset="0"/>
-                <a:ea typeface="Malgun Gothic" pitchFamily="34" charset="-122"/>
-                <a:cs typeface="Malgun Gothic" pitchFamily="34" charset="-120"/>
+                <a:latin typeface="HY헤드라인M" pitchFamily="34" charset="0"/>
+                <a:ea typeface="HY헤드라인M" pitchFamily="34" charset="-122"/>
+                <a:cs typeface="HY헤드라인M" pitchFamily="34" charset="-120"/>
               </a:rPr>
               <a:t>AI 카메라 설정 ① — AI 모드 변경</a:t>
             </a:r>
             <a:endParaRPr lang="en-US" sz="2400" dirty="0"/>
           </a:p>
         </p:txBody>
+      </p:sp>
+      <p:sp>
+        <p:nvSpPr>
+          <p:cNvPr id="8" name="Shape 6"/>
+          <p:cNvSpPr/>
+          <p:nvPr/>
+        </p:nvSpPr>
+        <p:spPr>
+          <a:xfrm>
+            <a:off x="2501574" y="1783080"/>
+            <a:ext cx="7185804" cy="3886200"/>
+          </a:xfrm>
+          <a:prstGeom prst="rect">
+            <a:avLst/>
+          </a:prstGeom>
+          <a:solidFill>
+            <a:srgbClr val="FFFFFF"/>
+          </a:solidFill>
+          <a:ln/>
+          <a:effectLst>
+            <a:outerShdw sx="100000" sy="100000" kx="0" ky="0" algn="bl" rotWithShape="0" blurRad="114300" dist="38100" dir="5400000">
+              <a:srgbClr val="666666">
+                <a:alpha val="30000"/>
+              </a:srgbClr>
+            </a:outerShdw>
+          </a:effectLst>
+        </p:spPr>
       </p:sp>
       <p:pic>
         <p:nvPicPr>
-          <p:cNvPr id="7" name="Image 0" descr="/tmp/claude-0/-home-user-ars/e10980de-cf93-514e-8d8f-658883089fc8/scratchpad/photos/b5.jpg">    </p:cNvPr>
+          <p:cNvPr id="9" name="Image 0" descr="/tmp/claude-0/-home-user-ars/e10980de-cf93-514e-8d8f-658883089fc8/scratchpad/photos/b5.jpg">    </p:cNvPr>
           <p:cNvPicPr>
             <a:picLocks noChangeAspect="1"/>
           </p:cNvPicPr>
@@ -14377,7 +15717,7 @@
       </p:pic>
       <p:sp>
         <p:nvSpPr>
-          <p:cNvPr id="8" name="Text 5"/>
+          <p:cNvPr id="10" name="Text 7"/>
           <p:cNvSpPr/>
           <p:nvPr/>
         </p:nvSpPr>

--- a/이마트_AI카메라_설치매뉴얼.pptx
+++ b/이마트_AI카메라_설치매뉴얼.pptx
@@ -2838,13 +2838,13 @@
               <a:buNone/>
             </a:pPr>
             <a:r>
-              <a:rPr lang="en-US" sz="4600" dirty="0">
+              <a:rPr lang="en-US" sz="4600" dirty="0" b="1">
                 <a:solidFill>
                   <a:srgbClr val="FFFFFF"/>
                 </a:solidFill>
-                <a:latin typeface="HY헤드라인M" pitchFamily="34" charset="0"/>
-                <a:ea typeface="HY헤드라인M" pitchFamily="34" charset="-122"/>
-                <a:cs typeface="HY헤드라인M" pitchFamily="34" charset="-120"/>
+                <a:latin typeface="맑은 고딕" pitchFamily="34" charset="0"/>
+                <a:ea typeface="맑은 고딕" pitchFamily="34" charset="-122"/>
+                <a:cs typeface="맑은 고딕" pitchFamily="34" charset="-120"/>
               </a:rPr>
               <a:t>이마트</a:t>
             </a:r>
@@ -2858,13 +2858,13 @@
               <a:buNone/>
             </a:pPr>
             <a:r>
-              <a:rPr lang="en-US" sz="4600" dirty="0">
+              <a:rPr lang="en-US" sz="4600" dirty="0" b="1">
                 <a:solidFill>
                   <a:srgbClr val="FFFFFF"/>
                 </a:solidFill>
-                <a:latin typeface="HY헤드라인M" pitchFamily="34" charset="0"/>
-                <a:ea typeface="HY헤드라인M" pitchFamily="34" charset="-122"/>
-                <a:cs typeface="HY헤드라인M" pitchFamily="34" charset="-120"/>
+                <a:latin typeface="맑은 고딕" pitchFamily="34" charset="0"/>
+                <a:ea typeface="맑은 고딕" pitchFamily="34" charset="-122"/>
+                <a:cs typeface="맑은 고딕" pitchFamily="34" charset="-120"/>
               </a:rPr>
               <a:t>AI 카메라 설치 매뉴얼</a:t>
             </a:r>
@@ -3148,9 +3148,9 @@
             <a:pPr marL="0" indent="0" algn="ctr">
               <a:buNone/>
             </a:pPr>
-            <a:endParaRPr lang="en-US" sz="2400" dirty="0">
-              <a:latin typeface="HY헤드라인M" panose="02030600000101010101" pitchFamily="18" charset="-127"/>
-              <a:ea typeface="HY헤드라인M" panose="02030600000101010101" pitchFamily="18" charset="-127"/>
+            <a:endParaRPr lang="en-US" sz="2400" dirty="0" b="1">
+              <a:latin typeface="맑은 고딕" panose="02030600000101010101" pitchFamily="18" charset="-127"/>
+              <a:ea typeface="맑은 고딕" panose="02030600000101010101" pitchFamily="18" charset="-127"/>
             </a:endParaRPr>
           </a:p>
         </p:txBody>
@@ -3567,68 +3567,68 @@
               <a:buNone/>
             </a:pPr>
             <a:r>
-              <a:rPr lang="en-US" sz="2400" dirty="0">
+              <a:rPr lang="en-US" sz="2400" dirty="0" b="1">
                 <a:solidFill>
                   <a:srgbClr val="222222"/>
                 </a:solidFill>
-                <a:latin typeface="HY헤드라인M" pitchFamily="34" charset="0"/>
-                <a:ea typeface="HY헤드라인M" pitchFamily="34" charset="-122"/>
-                <a:cs typeface="HY헤드라인M" pitchFamily="34" charset="-120"/>
+                <a:latin typeface="맑은 고딕" pitchFamily="34" charset="0"/>
+                <a:ea typeface="맑은 고딕" pitchFamily="34" charset="-122"/>
+                <a:cs typeface="맑은 고딕" pitchFamily="34" charset="-120"/>
               </a:rPr>
               <a:t>AI 카메라 </a:t>
             </a:r>
             <a:r>
-              <a:rPr lang="en-US" sz="2400" dirty="0" err="1">
+              <a:rPr lang="en-US" sz="2400" dirty="0" err="1" b="1">
                 <a:solidFill>
                   <a:srgbClr val="222222"/>
                 </a:solidFill>
-                <a:latin typeface="HY헤드라인M" pitchFamily="34" charset="0"/>
-                <a:ea typeface="HY헤드라인M" pitchFamily="34" charset="-122"/>
-                <a:cs typeface="HY헤드라인M" pitchFamily="34" charset="-120"/>
+                <a:latin typeface="맑은 고딕" pitchFamily="34" charset="0"/>
+                <a:ea typeface="맑은 고딕" pitchFamily="34" charset="-122"/>
+                <a:cs typeface="맑은 고딕" pitchFamily="34" charset="-120"/>
               </a:rPr>
               <a:t>설정</a:t>
             </a:r>
             <a:r>
-              <a:rPr lang="en-US" sz="2400" dirty="0">
+              <a:rPr lang="en-US" sz="2400" dirty="0" b="1">
                 <a:solidFill>
                   <a:srgbClr val="222222"/>
                 </a:solidFill>
-                <a:latin typeface="HY헤드라인M" pitchFamily="34" charset="0"/>
-                <a:ea typeface="HY헤드라인M" pitchFamily="34" charset="-122"/>
-                <a:cs typeface="HY헤드라인M" pitchFamily="34" charset="-120"/>
+                <a:latin typeface="맑은 고딕" pitchFamily="34" charset="0"/>
+                <a:ea typeface="맑은 고딕" pitchFamily="34" charset="-122"/>
+                <a:cs typeface="맑은 고딕" pitchFamily="34" charset="-120"/>
               </a:rPr>
               <a:t> </a:t>
             </a:r>
             <a:r>
-              <a:rPr lang="ko-KR" altLang="en-US" sz="2400" dirty="0">
+              <a:rPr lang="ko-KR" altLang="en-US" sz="2400" dirty="0" b="1">
                 <a:solidFill>
                   <a:srgbClr val="222222"/>
                 </a:solidFill>
-                <a:latin typeface="HY헤드라인M" pitchFamily="34" charset="0"/>
-                <a:ea typeface="HY헤드라인M" pitchFamily="34" charset="-122"/>
-                <a:cs typeface="HY헤드라인M" pitchFamily="34" charset="-120"/>
+                <a:latin typeface="맑은 고딕" pitchFamily="34" charset="0"/>
+                <a:ea typeface="맑은 고딕" pitchFamily="34" charset="-122"/>
+                <a:cs typeface="맑은 고딕" pitchFamily="34" charset="-120"/>
               </a:rPr>
               <a:t>③</a:t>
             </a:r>
             <a:r>
-              <a:rPr lang="en-US" sz="2400" dirty="0">
+              <a:rPr lang="en-US" sz="2400" dirty="0" b="1">
                 <a:solidFill>
                   <a:srgbClr val="222222"/>
                 </a:solidFill>
-                <a:latin typeface="HY헤드라인M" pitchFamily="34" charset="0"/>
-                <a:ea typeface="HY헤드라인M" pitchFamily="34" charset="-122"/>
-                <a:cs typeface="HY헤드라인M" pitchFamily="34" charset="-120"/>
+                <a:latin typeface="맑은 고딕" pitchFamily="34" charset="0"/>
+                <a:ea typeface="맑은 고딕" pitchFamily="34" charset="-122"/>
+                <a:cs typeface="맑은 고딕" pitchFamily="34" charset="-120"/>
               </a:rPr>
               <a:t> — </a:t>
             </a:r>
             <a:r>
-              <a:rPr lang="ko-KR" altLang="en-US" sz="2400" dirty="0">
+              <a:rPr lang="ko-KR" altLang="en-US" sz="2400" dirty="0" b="1">
                 <a:solidFill>
                   <a:srgbClr val="222222"/>
                 </a:solidFill>
-                <a:latin typeface="HY헤드라인M" pitchFamily="34" charset="0"/>
-                <a:ea typeface="HY헤드라인M" pitchFamily="34" charset="-122"/>
-                <a:cs typeface="HY헤드라인M" pitchFamily="34" charset="-120"/>
+                <a:latin typeface="맑은 고딕" pitchFamily="34" charset="0"/>
+                <a:ea typeface="맑은 고딕" pitchFamily="34" charset="-122"/>
+                <a:cs typeface="맑은 고딕" pitchFamily="34" charset="-120"/>
               </a:rPr>
               <a:t>부착 위치 확인</a:t>
             </a:r>
@@ -3667,12 +3667,12 @@
               <a:buNone/>
             </a:pPr>
             <a:r>
-              <a:rPr lang="en-US" sz="2400" dirty="0">
+              <a:rPr lang="en-US" sz="2400" dirty="0" b="1">
                 <a:solidFill>
                   <a:srgbClr val="1F1F1F"/>
                 </a:solidFill>
-                <a:latin typeface="HY헤드라인M" pitchFamily="34" charset="0"/>
-                <a:ea typeface="HY헤드라인M" pitchFamily="34" charset="-122"/>
+                <a:latin typeface="맑은 고딕" pitchFamily="34" charset="0"/>
+                <a:ea typeface="맑은 고딕" pitchFamily="34" charset="-122"/>
               </a:rPr>
               <a:t>5</a:t>
             </a:r>
@@ -4157,12 +4157,12 @@
               <a:buNone/>
             </a:pPr>
             <a:r>
-              <a:rPr lang="en-US" sz="2400" dirty="0">
+              <a:rPr lang="en-US" sz="2400" dirty="0" b="1">
                 <a:solidFill>
                   <a:srgbClr val="1F1F1F"/>
                 </a:solidFill>
-                <a:latin typeface="HY헤드라인M" pitchFamily="34" charset="0"/>
-                <a:ea typeface="HY헤드라인M" pitchFamily="34" charset="-122"/>
+                <a:latin typeface="맑은 고딕" pitchFamily="34" charset="0"/>
+                <a:ea typeface="맑은 고딕" pitchFamily="34" charset="-122"/>
               </a:rPr>
               <a:t>6</a:t>
             </a:r>
@@ -4195,13 +4195,13 @@
               <a:buNone/>
             </a:pPr>
             <a:r>
-              <a:rPr lang="en-US" sz="2400" dirty="0">
+              <a:rPr lang="en-US" sz="2400" dirty="0" b="1">
                 <a:solidFill>
                   <a:srgbClr val="222222"/>
                 </a:solidFill>
-                <a:latin typeface="HY헤드라인M" pitchFamily="34" charset="0"/>
-                <a:ea typeface="HY헤드라인M" pitchFamily="34" charset="-122"/>
-                <a:cs typeface="HY헤드라인M" pitchFamily="34" charset="-120"/>
+                <a:latin typeface="맑은 고딕" pitchFamily="34" charset="0"/>
+                <a:ea typeface="맑은 고딕" pitchFamily="34" charset="-122"/>
+                <a:cs typeface="맑은 고딕" pitchFamily="34" charset="-120"/>
               </a:rPr>
               <a:t>AI 카메라 부착</a:t>
             </a:r>
@@ -4901,12 +4901,12 @@
               <a:buNone/>
             </a:pPr>
             <a:r>
-              <a:rPr lang="en-US" sz="2400" dirty="0">
+              <a:rPr lang="en-US" sz="2400" dirty="0" b="1">
                 <a:solidFill>
                   <a:srgbClr val="1F1F1F"/>
                 </a:solidFill>
-                <a:latin typeface="HY헤드라인M" pitchFamily="34" charset="0"/>
-                <a:ea typeface="HY헤드라인M" pitchFamily="34" charset="-122"/>
+                <a:latin typeface="맑은 고딕" pitchFamily="34" charset="0"/>
+                <a:ea typeface="맑은 고딕" pitchFamily="34" charset="-122"/>
               </a:rPr>
               <a:t>7</a:t>
             </a:r>
@@ -4939,46 +4939,46 @@
               <a:buNone/>
             </a:pPr>
             <a:r>
-              <a:rPr lang="en-US" sz="2400" dirty="0">
+              <a:rPr lang="en-US" sz="2400" dirty="0" b="1">
                 <a:solidFill>
                   <a:srgbClr val="222222"/>
                 </a:solidFill>
-                <a:latin typeface="HY헤드라인M" pitchFamily="34" charset="0"/>
-                <a:ea typeface="HY헤드라인M" pitchFamily="34" charset="-122"/>
-                <a:cs typeface="HY헤드라인M" pitchFamily="34" charset="-120"/>
+                <a:latin typeface="맑은 고딕" pitchFamily="34" charset="0"/>
+                <a:ea typeface="맑은 고딕" pitchFamily="34" charset="-122"/>
+                <a:cs typeface="맑은 고딕" pitchFamily="34" charset="-120"/>
               </a:rPr>
               <a:t>AI </a:t>
             </a:r>
             <a:r>
-              <a:rPr lang="en-US" sz="2400" dirty="0" err="1">
+              <a:rPr lang="en-US" sz="2400" dirty="0" err="1" b="1">
                 <a:solidFill>
                   <a:srgbClr val="222222"/>
                 </a:solidFill>
-                <a:latin typeface="HY헤드라인M" pitchFamily="34" charset="0"/>
-                <a:ea typeface="HY헤드라인M" pitchFamily="34" charset="-122"/>
-                <a:cs typeface="HY헤드라인M" pitchFamily="34" charset="-120"/>
+                <a:latin typeface="맑은 고딕" pitchFamily="34" charset="0"/>
+                <a:ea typeface="맑은 고딕" pitchFamily="34" charset="-122"/>
+                <a:cs typeface="맑은 고딕" pitchFamily="34" charset="-120"/>
               </a:rPr>
               <a:t>카메라</a:t>
             </a:r>
             <a:r>
-              <a:rPr lang="en-US" sz="2400" dirty="0">
+              <a:rPr lang="en-US" sz="2400" dirty="0" b="1">
                 <a:solidFill>
                   <a:srgbClr val="222222"/>
                 </a:solidFill>
-                <a:latin typeface="HY헤드라인M" pitchFamily="34" charset="0"/>
-                <a:ea typeface="HY헤드라인M" pitchFamily="34" charset="-122"/>
-                <a:cs typeface="HY헤드라인M" pitchFamily="34" charset="-120"/>
+                <a:latin typeface="맑은 고딕" pitchFamily="34" charset="0"/>
+                <a:ea typeface="맑은 고딕" pitchFamily="34" charset="-122"/>
+                <a:cs typeface="맑은 고딕" pitchFamily="34" charset="-120"/>
               </a:rPr>
               <a:t> </a:t>
             </a:r>
             <a:r>
-              <a:rPr lang="ko-KR" altLang="en-US" sz="2400" dirty="0">
+              <a:rPr lang="ko-KR" altLang="en-US" sz="2400" dirty="0" b="1">
                 <a:solidFill>
                   <a:srgbClr val="222222"/>
                 </a:solidFill>
-                <a:latin typeface="HY헤드라인M" pitchFamily="34" charset="0"/>
-                <a:ea typeface="HY헤드라인M" pitchFamily="34" charset="-122"/>
-                <a:cs typeface="HY헤드라인M" pitchFamily="34" charset="-120"/>
+                <a:latin typeface="맑은 고딕" pitchFamily="34" charset="0"/>
+                <a:ea typeface="맑은 고딕" pitchFamily="34" charset="-122"/>
+                <a:cs typeface="맑은 고딕" pitchFamily="34" charset="-120"/>
               </a:rPr>
               <a:t>서버 통신 테스트 및 기능 활성화</a:t>
             </a:r>
@@ -5849,46 +5849,46 @@
               <a:buNone/>
             </a:pPr>
             <a:r>
-              <a:rPr lang="en-US" sz="2400" dirty="0">
+              <a:rPr lang="en-US" sz="2400" dirty="0" b="1">
                 <a:solidFill>
                   <a:srgbClr val="222222"/>
                 </a:solidFill>
-                <a:latin typeface="HY헤드라인M" pitchFamily="34" charset="0"/>
-                <a:ea typeface="HY헤드라인M" pitchFamily="34" charset="-122"/>
-                <a:cs typeface="HY헤드라인M" pitchFamily="34" charset="-120"/>
+                <a:latin typeface="맑은 고딕" pitchFamily="34" charset="0"/>
+                <a:ea typeface="맑은 고딕" pitchFamily="34" charset="-122"/>
+                <a:cs typeface="맑은 고딕" pitchFamily="34" charset="-120"/>
               </a:rPr>
               <a:t>AI 카메라 LED </a:t>
             </a:r>
             <a:r>
-              <a:rPr lang="en-US" sz="2400" dirty="0" err="1">
+              <a:rPr lang="en-US" sz="2400" dirty="0" err="1" b="1">
                 <a:solidFill>
                   <a:srgbClr val="222222"/>
                 </a:solidFill>
-                <a:latin typeface="HY헤드라인M" pitchFamily="34" charset="0"/>
-                <a:ea typeface="HY헤드라인M" pitchFamily="34" charset="-122"/>
-                <a:cs typeface="HY헤드라인M" pitchFamily="34" charset="-120"/>
+                <a:latin typeface="맑은 고딕" pitchFamily="34" charset="0"/>
+                <a:ea typeface="맑은 고딕" pitchFamily="34" charset="-122"/>
+                <a:cs typeface="맑은 고딕" pitchFamily="34" charset="-120"/>
               </a:rPr>
               <a:t>가리기</a:t>
             </a:r>
             <a:r>
-              <a:rPr lang="en-US" sz="2400" dirty="0">
+              <a:rPr lang="en-US" sz="2400" dirty="0" b="1">
                 <a:solidFill>
                   <a:srgbClr val="222222"/>
                 </a:solidFill>
-                <a:latin typeface="HY헤드라인M" pitchFamily="34" charset="0"/>
-                <a:ea typeface="HY헤드라인M" pitchFamily="34" charset="-122"/>
-                <a:cs typeface="HY헤드라인M" pitchFamily="34" charset="-120"/>
+                <a:latin typeface="맑은 고딕" pitchFamily="34" charset="0"/>
+                <a:ea typeface="맑은 고딕" pitchFamily="34" charset="-122"/>
+                <a:cs typeface="맑은 고딕" pitchFamily="34" charset="-120"/>
               </a:rPr>
               <a:t>, </a:t>
             </a:r>
             <a:r>
-              <a:rPr lang="ko-KR" altLang="en-US" sz="2400" dirty="0">
+              <a:rPr lang="ko-KR" altLang="en-US" sz="2400" dirty="0" b="1">
                 <a:solidFill>
                   <a:srgbClr val="222222"/>
                 </a:solidFill>
-                <a:latin typeface="HY헤드라인M" pitchFamily="34" charset="0"/>
-                <a:ea typeface="HY헤드라인M" pitchFamily="34" charset="-122"/>
-                <a:cs typeface="HY헤드라인M" pitchFamily="34" charset="-120"/>
+                <a:latin typeface="맑은 고딕" pitchFamily="34" charset="0"/>
+                <a:ea typeface="맑은 고딕" pitchFamily="34" charset="-122"/>
+                <a:cs typeface="맑은 고딕" pitchFamily="34" charset="-120"/>
               </a:rPr>
               <a:t>선 정리</a:t>
             </a:r>
@@ -6434,12 +6434,12 @@
               <a:buNone/>
             </a:pPr>
             <a:r>
-              <a:rPr lang="en-US" sz="2400" dirty="0">
+              <a:rPr lang="en-US" sz="2400" dirty="0" b="1">
                 <a:solidFill>
                   <a:srgbClr val="1F1F1F"/>
                 </a:solidFill>
-                <a:latin typeface="HY헤드라인M" pitchFamily="34" charset="0"/>
-                <a:ea typeface="HY헤드라인M" pitchFamily="34" charset="-122"/>
+                <a:latin typeface="맑은 고딕" pitchFamily="34" charset="0"/>
+                <a:ea typeface="맑은 고딕" pitchFamily="34" charset="-122"/>
               </a:rPr>
               <a:t>8</a:t>
             </a:r>
@@ -6629,13 +6629,13 @@
               <a:buNone/>
             </a:pPr>
             <a:r>
-              <a:rPr lang="en-US" sz="4000" dirty="0">
+              <a:rPr lang="en-US" sz="4000" dirty="0" b="1">
                 <a:solidFill>
                   <a:srgbClr val="1F1F1F"/>
                 </a:solidFill>
-                <a:latin typeface="HY헤드라인M" pitchFamily="34" charset="0"/>
-                <a:ea typeface="HY헤드라인M" pitchFamily="34" charset="-122"/>
-                <a:cs typeface="HY헤드라인M" pitchFamily="34" charset="-120"/>
+                <a:latin typeface="맑은 고딕" pitchFamily="34" charset="0"/>
+                <a:ea typeface="맑은 고딕" pitchFamily="34" charset="-122"/>
+                <a:cs typeface="맑은 고딕" pitchFamily="34" charset="-120"/>
               </a:rPr>
               <a:t>02</a:t>
             </a:r>
@@ -6668,13 +6668,13 @@
               <a:buNone/>
             </a:pPr>
             <a:r>
-              <a:rPr lang="en-US" sz="4000" dirty="0">
+              <a:rPr lang="en-US" sz="4000" dirty="0" b="1">
                 <a:solidFill>
                   <a:srgbClr val="FFFFFF"/>
                 </a:solidFill>
-                <a:latin typeface="HY헤드라인M" pitchFamily="34" charset="0"/>
-                <a:ea typeface="HY헤드라인M" pitchFamily="34" charset="-122"/>
-                <a:cs typeface="HY헤드라인M" pitchFamily="34" charset="-120"/>
+                <a:latin typeface="맑은 고딕" pitchFamily="34" charset="0"/>
+                <a:ea typeface="맑은 고딕" pitchFamily="34" charset="-122"/>
+                <a:cs typeface="맑은 고딕" pitchFamily="34" charset="-120"/>
               </a:rPr>
               <a:t>계산대미디어 AI 카메라 설치 방법</a:t>
             </a:r>
@@ -6943,13 +6943,13 @@
               <a:buNone/>
             </a:pPr>
             <a:r>
-              <a:rPr lang="en-US" sz="3200" dirty="0">
+              <a:rPr lang="en-US" sz="3200" dirty="0" b="1">
                 <a:solidFill>
                   <a:srgbClr val="1F1F1F"/>
                 </a:solidFill>
-                <a:latin typeface="HY헤드라인M" pitchFamily="34" charset="0"/>
-                <a:ea typeface="HY헤드라인M" pitchFamily="34" charset="-122"/>
-                <a:cs typeface="HY헤드라인M" pitchFamily="34" charset="-120"/>
+                <a:latin typeface="맑은 고딕" pitchFamily="34" charset="0"/>
+                <a:ea typeface="맑은 고딕" pitchFamily="34" charset="-122"/>
+                <a:cs typeface="맑은 고딕" pitchFamily="34" charset="-120"/>
               </a:rPr>
               <a:t>1</a:t>
             </a:r>
@@ -6982,13 +6982,13 @@
               <a:buNone/>
             </a:pPr>
             <a:r>
-              <a:rPr lang="en-US" sz="2800" dirty="0">
+              <a:rPr lang="en-US" sz="2800" dirty="0" b="1">
                 <a:solidFill>
                   <a:srgbClr val="222222"/>
                 </a:solidFill>
-                <a:latin typeface="HY헤드라인M" pitchFamily="34" charset="0"/>
-                <a:ea typeface="HY헤드라인M" pitchFamily="34" charset="-122"/>
-                <a:cs typeface="HY헤드라인M" pitchFamily="34" charset="-120"/>
+                <a:latin typeface="맑은 고딕" pitchFamily="34" charset="0"/>
+                <a:ea typeface="맑은 고딕" pitchFamily="34" charset="-122"/>
+                <a:cs typeface="맑은 고딕" pitchFamily="34" charset="-120"/>
               </a:rPr>
               <a:t>HDMI 분배기 전원부 분리</a:t>
             </a:r>
@@ -7580,13 +7580,13 @@
               <a:buNone/>
             </a:pPr>
             <a:r>
-              <a:rPr lang="en-US" sz="3200" dirty="0">
+              <a:rPr lang="en-US" sz="3200" dirty="0" b="1">
                 <a:solidFill>
                   <a:srgbClr val="1F1F1F"/>
                 </a:solidFill>
-                <a:latin typeface="HY헤드라인M" pitchFamily="34" charset="0"/>
-                <a:ea typeface="HY헤드라인M" pitchFamily="34" charset="-122"/>
-                <a:cs typeface="HY헤드라인M" pitchFamily="34" charset="-120"/>
+                <a:latin typeface="맑은 고딕" pitchFamily="34" charset="0"/>
+                <a:ea typeface="맑은 고딕" pitchFamily="34" charset="-122"/>
+                <a:cs typeface="맑은 고딕" pitchFamily="34" charset="-120"/>
               </a:rPr>
               <a:t>2</a:t>
             </a:r>
@@ -7619,13 +7619,13 @@
               <a:buNone/>
             </a:pPr>
             <a:r>
-              <a:rPr lang="en-US" sz="2800" dirty="0">
+              <a:rPr lang="en-US" sz="2800" dirty="0" b="1">
                 <a:solidFill>
                   <a:srgbClr val="222222"/>
                 </a:solidFill>
-                <a:latin typeface="HY헤드라인M" pitchFamily="34" charset="0"/>
-                <a:ea typeface="HY헤드라인M" pitchFamily="34" charset="-122"/>
-                <a:cs typeface="HY헤드라인M" pitchFamily="34" charset="-120"/>
+                <a:latin typeface="맑은 고딕" pitchFamily="34" charset="0"/>
+                <a:ea typeface="맑은 고딕" pitchFamily="34" charset="-122"/>
+                <a:cs typeface="맑은 고딕" pitchFamily="34" charset="-120"/>
               </a:rPr>
               <a:t>USB 어댑터 연결</a:t>
             </a:r>
@@ -8217,13 +8217,13 @@
               <a:buNone/>
             </a:pPr>
             <a:r>
-              <a:rPr lang="en-US" sz="3200" dirty="0">
+              <a:rPr lang="en-US" sz="3200" dirty="0" b="1">
                 <a:solidFill>
                   <a:srgbClr val="1F1F1F"/>
                 </a:solidFill>
-                <a:latin typeface="HY헤드라인M" pitchFamily="34" charset="0"/>
-                <a:ea typeface="HY헤드라인M" pitchFamily="34" charset="-122"/>
-                <a:cs typeface="HY헤드라인M" pitchFamily="34" charset="-120"/>
+                <a:latin typeface="맑은 고딕" pitchFamily="34" charset="0"/>
+                <a:ea typeface="맑은 고딕" pitchFamily="34" charset="-122"/>
+                <a:cs typeface="맑은 고딕" pitchFamily="34" charset="-120"/>
               </a:rPr>
               <a:t>3</a:t>
             </a:r>
@@ -8256,13 +8256,13 @@
               <a:buNone/>
             </a:pPr>
             <a:r>
-              <a:rPr lang="en-US" sz="2800" dirty="0">
+              <a:rPr lang="en-US" sz="2800" dirty="0" b="1">
                 <a:solidFill>
                   <a:srgbClr val="222222"/>
                 </a:solidFill>
-                <a:latin typeface="HY헤드라인M" pitchFamily="34" charset="0"/>
-                <a:ea typeface="HY헤드라인M" pitchFamily="34" charset="-122"/>
-                <a:cs typeface="HY헤드라인M" pitchFamily="34" charset="-120"/>
+                <a:latin typeface="맑은 고딕" pitchFamily="34" charset="0"/>
+                <a:ea typeface="맑은 고딕" pitchFamily="34" charset="-122"/>
+                <a:cs typeface="맑은 고딕" pitchFamily="34" charset="-120"/>
               </a:rPr>
               <a:t>콘센트 연결</a:t>
             </a:r>
@@ -8854,13 +8854,13 @@
               <a:buNone/>
             </a:pPr>
             <a:r>
-              <a:rPr lang="en-US" sz="3200" dirty="0">
+              <a:rPr lang="en-US" sz="3200" dirty="0" b="1">
                 <a:solidFill>
                   <a:srgbClr val="1F1F1F"/>
                 </a:solidFill>
-                <a:latin typeface="HY헤드라인M" pitchFamily="34" charset="0"/>
-                <a:ea typeface="HY헤드라인M" pitchFamily="34" charset="-122"/>
-                <a:cs typeface="HY헤드라인M" pitchFamily="34" charset="-120"/>
+                <a:latin typeface="맑은 고딕" pitchFamily="34" charset="0"/>
+                <a:ea typeface="맑은 고딕" pitchFamily="34" charset="-122"/>
+                <a:cs typeface="맑은 고딕" pitchFamily="34" charset="-120"/>
               </a:rPr>
               <a:t>4</a:t>
             </a:r>
@@ -8893,13 +8893,13 @@
               <a:buNone/>
             </a:pPr>
             <a:r>
-              <a:rPr lang="en-US" sz="2800" dirty="0">
+              <a:rPr lang="en-US" sz="2800" dirty="0" b="1">
                 <a:solidFill>
                   <a:srgbClr val="222222"/>
                 </a:solidFill>
-                <a:latin typeface="HY헤드라인M" pitchFamily="34" charset="0"/>
-                <a:ea typeface="HY헤드라인M" pitchFamily="34" charset="-122"/>
-                <a:cs typeface="HY헤드라인M" pitchFamily="34" charset="-120"/>
+                <a:latin typeface="맑은 고딕" pitchFamily="34" charset="0"/>
+                <a:ea typeface="맑은 고딕" pitchFamily="34" charset="-122"/>
+                <a:cs typeface="맑은 고딕" pitchFamily="34" charset="-120"/>
               </a:rPr>
               <a:t>AI 카메라 연결</a:t>
             </a:r>
@@ -9491,13 +9491,13 @@
               <a:buNone/>
             </a:pPr>
             <a:r>
-              <a:rPr lang="en-US" sz="3200" dirty="0">
+              <a:rPr lang="en-US" sz="3200" dirty="0" b="1">
                 <a:solidFill>
                   <a:srgbClr val="1F1F1F"/>
                 </a:solidFill>
-                <a:latin typeface="HY헤드라인M" pitchFamily="34" charset="0"/>
-                <a:ea typeface="HY헤드라인M" pitchFamily="34" charset="-122"/>
-                <a:cs typeface="HY헤드라인M" pitchFamily="34" charset="-120"/>
+                <a:latin typeface="맑은 고딕" pitchFamily="34" charset="0"/>
+                <a:ea typeface="맑은 고딕" pitchFamily="34" charset="-122"/>
+                <a:cs typeface="맑은 고딕" pitchFamily="34" charset="-120"/>
               </a:rPr>
               <a:t>5</a:t>
             </a:r>
@@ -9530,13 +9530,13 @@
               <a:buNone/>
             </a:pPr>
             <a:r>
-              <a:rPr lang="en-US" sz="2800" dirty="0">
+              <a:rPr lang="en-US" sz="2800" dirty="0" b="1">
                 <a:solidFill>
                   <a:srgbClr val="222222"/>
                 </a:solidFill>
-                <a:latin typeface="HY헤드라인M" pitchFamily="34" charset="0"/>
-                <a:ea typeface="HY헤드라인M" pitchFamily="34" charset="-122"/>
-                <a:cs typeface="HY헤드라인M" pitchFamily="34" charset="-120"/>
+                <a:latin typeface="맑은 고딕" pitchFamily="34" charset="0"/>
+                <a:ea typeface="맑은 고딕" pitchFamily="34" charset="-122"/>
+                <a:cs typeface="맑은 고딕" pitchFamily="34" charset="-120"/>
               </a:rPr>
               <a:t>AI 카메라 설정 ① 모드 변경</a:t>
             </a:r>
@@ -10258,13 +10258,13 @@
               <a:buNone/>
             </a:pPr>
             <a:r>
-              <a:rPr lang="en-US" sz="3400" dirty="0">
+              <a:rPr lang="en-US" sz="3400" dirty="0" b="1">
                 <a:solidFill>
                   <a:srgbClr val="222222"/>
                 </a:solidFill>
-                <a:latin typeface="HY헤드라인M" pitchFamily="34" charset="0"/>
-                <a:ea typeface="HY헤드라인M" pitchFamily="34" charset="-122"/>
-                <a:cs typeface="HY헤드라인M" pitchFamily="34" charset="-120"/>
+                <a:latin typeface="맑은 고딕" pitchFamily="34" charset="0"/>
+                <a:ea typeface="맑은 고딕" pitchFamily="34" charset="-122"/>
+                <a:cs typeface="맑은 고딕" pitchFamily="34" charset="-120"/>
               </a:rPr>
               <a:t>설치 개요</a:t>
             </a:r>
@@ -10360,13 +10360,13 @@
               <a:buNone/>
             </a:pPr>
             <a:r>
-              <a:rPr lang="en-US" sz="2000" dirty="0">
+              <a:rPr lang="en-US" sz="2000" dirty="0" b="1">
                 <a:solidFill>
                   <a:srgbClr val="1F1F1F"/>
                 </a:solidFill>
-                <a:latin typeface="HY헤드라인M" pitchFamily="34" charset="0"/>
-                <a:ea typeface="HY헤드라인M" pitchFamily="34" charset="-122"/>
-                <a:cs typeface="HY헤드라인M" pitchFamily="34" charset="-120"/>
+                <a:latin typeface="맑은 고딕" pitchFamily="34" charset="0"/>
+                <a:ea typeface="맑은 고딕" pitchFamily="34" charset="-122"/>
+                <a:cs typeface="맑은 고딕" pitchFamily="34" charset="-120"/>
               </a:rPr>
               <a:t>01</a:t>
             </a:r>
@@ -10399,13 +10399,13 @@
               <a:buNone/>
             </a:pPr>
             <a:r>
-              <a:rPr lang="en-US" sz="2600" dirty="0">
+              <a:rPr lang="en-US" sz="2600" dirty="0" b="1">
                 <a:solidFill>
                   <a:srgbClr val="222222"/>
                 </a:solidFill>
-                <a:latin typeface="HY헤드라인M" pitchFamily="34" charset="0"/>
-                <a:ea typeface="HY헤드라인M" pitchFamily="34" charset="-122"/>
-                <a:cs typeface="HY헤드라인M" pitchFamily="34" charset="-120"/>
+                <a:latin typeface="맑은 고딕" pitchFamily="34" charset="0"/>
+                <a:ea typeface="맑은 고딕" pitchFamily="34" charset="-122"/>
+                <a:cs typeface="맑은 고딕" pitchFamily="34" charset="-120"/>
               </a:rPr>
               <a:t>동선스크린</a:t>
             </a:r>
@@ -10586,13 +10586,13 @@
               <a:buNone/>
             </a:pPr>
             <a:r>
-              <a:rPr lang="en-US" sz="2000" dirty="0">
+              <a:rPr lang="en-US" sz="2000" dirty="0" b="1">
                 <a:solidFill>
                   <a:srgbClr val="1F1F1F"/>
                 </a:solidFill>
-                <a:latin typeface="HY헤드라인M" pitchFamily="34" charset="0"/>
-                <a:ea typeface="HY헤드라인M" pitchFamily="34" charset="-122"/>
-                <a:cs typeface="HY헤드라인M" pitchFamily="34" charset="-120"/>
+                <a:latin typeface="맑은 고딕" pitchFamily="34" charset="0"/>
+                <a:ea typeface="맑은 고딕" pitchFamily="34" charset="-122"/>
+                <a:cs typeface="맑은 고딕" pitchFamily="34" charset="-120"/>
               </a:rPr>
               <a:t>02</a:t>
             </a:r>
@@ -10625,13 +10625,13 @@
               <a:buNone/>
             </a:pPr>
             <a:r>
-              <a:rPr lang="en-US" sz="2600" dirty="0">
+              <a:rPr lang="en-US" sz="2600" dirty="0" b="1">
                 <a:solidFill>
                   <a:srgbClr val="222222"/>
                 </a:solidFill>
-                <a:latin typeface="HY헤드라인M" pitchFamily="34" charset="0"/>
-                <a:ea typeface="HY헤드라인M" pitchFamily="34" charset="-122"/>
-                <a:cs typeface="HY헤드라인M" pitchFamily="34" charset="-120"/>
+                <a:latin typeface="맑은 고딕" pitchFamily="34" charset="0"/>
+                <a:ea typeface="맑은 고딕" pitchFamily="34" charset="-122"/>
+                <a:cs typeface="맑은 고딕" pitchFamily="34" charset="-120"/>
               </a:rPr>
               <a:t>계산대미디어</a:t>
             </a:r>
@@ -10923,13 +10923,13 @@
               <a:buNone/>
             </a:pPr>
             <a:r>
-              <a:rPr lang="en-US" sz="3200" dirty="0">
+              <a:rPr lang="en-US" sz="3200" dirty="0" b="1">
                 <a:solidFill>
                   <a:srgbClr val="1F1F1F"/>
                 </a:solidFill>
-                <a:latin typeface="HY헤드라인M" pitchFamily="34" charset="0"/>
-                <a:ea typeface="HY헤드라인M" pitchFamily="34" charset="-122"/>
-                <a:cs typeface="HY헤드라인M" pitchFamily="34" charset="-120"/>
+                <a:latin typeface="맑은 고딕" pitchFamily="34" charset="0"/>
+                <a:ea typeface="맑은 고딕" pitchFamily="34" charset="-122"/>
+                <a:cs typeface="맑은 고딕" pitchFamily="34" charset="-120"/>
               </a:rPr>
               <a:t>6</a:t>
             </a:r>
@@ -10962,13 +10962,13 @@
               <a:buNone/>
             </a:pPr>
             <a:r>
-              <a:rPr lang="en-US" sz="2800" dirty="0">
+              <a:rPr lang="en-US" sz="2800" dirty="0" b="1">
                 <a:solidFill>
                   <a:srgbClr val="222222"/>
                 </a:solidFill>
-                <a:latin typeface="HY헤드라인M" pitchFamily="34" charset="0"/>
-                <a:ea typeface="HY헤드라인M" pitchFamily="34" charset="-122"/>
-                <a:cs typeface="HY헤드라인M" pitchFamily="34" charset="-120"/>
+                <a:latin typeface="맑은 고딕" pitchFamily="34" charset="0"/>
+                <a:ea typeface="맑은 고딕" pitchFamily="34" charset="-122"/>
+                <a:cs typeface="맑은 고딕" pitchFamily="34" charset="-120"/>
               </a:rPr>
               <a:t>AI 카메라 설정 ② 화각 확인</a:t>
             </a:r>
@@ -11909,13 +11909,13 @@
               <a:buNone/>
             </a:pPr>
             <a:r>
-              <a:rPr lang="en-US" sz="3200" dirty="0">
+              <a:rPr lang="en-US" sz="3200" dirty="0" b="1">
                 <a:solidFill>
                   <a:srgbClr val="1F1F1F"/>
                 </a:solidFill>
-                <a:latin typeface="HY헤드라인M" pitchFamily="34" charset="0"/>
-                <a:ea typeface="HY헤드라인M" pitchFamily="34" charset="-122"/>
-                <a:cs typeface="HY헤드라인M" pitchFamily="34" charset="-120"/>
+                <a:latin typeface="맑은 고딕" pitchFamily="34" charset="0"/>
+                <a:ea typeface="맑은 고딕" pitchFamily="34" charset="-122"/>
+                <a:cs typeface="맑은 고딕" pitchFamily="34" charset="-120"/>
               </a:rPr>
               <a:t>7</a:t>
             </a:r>
@@ -11948,13 +11948,13 @@
               <a:buNone/>
             </a:pPr>
             <a:r>
-              <a:rPr lang="en-US" sz="2800" dirty="0">
+              <a:rPr lang="en-US" sz="2800" dirty="0" b="1">
                 <a:solidFill>
                   <a:srgbClr val="222222"/>
                 </a:solidFill>
-                <a:latin typeface="HY헤드라인M" pitchFamily="34" charset="0"/>
-                <a:ea typeface="HY헤드라인M" pitchFamily="34" charset="-122"/>
-                <a:cs typeface="HY헤드라인M" pitchFamily="34" charset="-120"/>
+                <a:latin typeface="맑은 고딕" pitchFamily="34" charset="0"/>
+                <a:ea typeface="맑은 고딕" pitchFamily="34" charset="-122"/>
+                <a:cs typeface="맑은 고딕" pitchFamily="34" charset="-120"/>
               </a:rPr>
               <a:t>AI 카메라 부착</a:t>
             </a:r>
@@ -12546,13 +12546,13 @@
               <a:buNone/>
             </a:pPr>
             <a:r>
-              <a:rPr lang="en-US" sz="3200" dirty="0">
+              <a:rPr lang="en-US" sz="3200" dirty="0" b="1">
                 <a:solidFill>
                   <a:srgbClr val="1F1F1F"/>
                 </a:solidFill>
-                <a:latin typeface="HY헤드라인M" pitchFamily="34" charset="0"/>
-                <a:ea typeface="HY헤드라인M" pitchFamily="34" charset="-122"/>
-                <a:cs typeface="HY헤드라인M" pitchFamily="34" charset="-120"/>
+                <a:latin typeface="맑은 고딕" pitchFamily="34" charset="0"/>
+                <a:ea typeface="맑은 고딕" pitchFamily="34" charset="-122"/>
+                <a:cs typeface="맑은 고딕" pitchFamily="34" charset="-120"/>
               </a:rPr>
               <a:t>8</a:t>
             </a:r>
@@ -12585,13 +12585,13 @@
               <a:buNone/>
             </a:pPr>
             <a:r>
-              <a:rPr lang="en-US" sz="2800" dirty="0">
+              <a:rPr lang="en-US" sz="2800" dirty="0" b="1">
                 <a:solidFill>
                   <a:srgbClr val="222222"/>
                 </a:solidFill>
-                <a:latin typeface="HY헤드라인M" pitchFamily="34" charset="0"/>
-                <a:ea typeface="HY헤드라인M" pitchFamily="34" charset="-122"/>
-                <a:cs typeface="HY헤드라인M" pitchFamily="34" charset="-120"/>
+                <a:latin typeface="맑은 고딕" pitchFamily="34" charset="0"/>
+                <a:ea typeface="맑은 고딕" pitchFamily="34" charset="-122"/>
+                <a:cs typeface="맑은 고딕" pitchFamily="34" charset="-120"/>
               </a:rPr>
               <a:t>AI 카메라 LED 가리기</a:t>
             </a:r>
@@ -13183,13 +13183,13 @@
               <a:buNone/>
             </a:pPr>
             <a:r>
-              <a:rPr lang="en-US" sz="3200" dirty="0">
+              <a:rPr lang="en-US" sz="3200" dirty="0" b="1">
                 <a:solidFill>
                   <a:srgbClr val="1F1F1F"/>
                 </a:solidFill>
-                <a:latin typeface="HY헤드라인M" pitchFamily="34" charset="0"/>
-                <a:ea typeface="HY헤드라인M" pitchFamily="34" charset="-122"/>
-                <a:cs typeface="HY헤드라인M" pitchFamily="34" charset="-120"/>
+                <a:latin typeface="맑은 고딕" pitchFamily="34" charset="0"/>
+                <a:ea typeface="맑은 고딕" pitchFamily="34" charset="-122"/>
+                <a:cs typeface="맑은 고딕" pitchFamily="34" charset="-120"/>
               </a:rPr>
               <a:t>9</a:t>
             </a:r>
@@ -13222,13 +13222,13 @@
               <a:buNone/>
             </a:pPr>
             <a:r>
-              <a:rPr lang="en-US" sz="2800" dirty="0">
+              <a:rPr lang="en-US" sz="2800" dirty="0" b="1">
                 <a:solidFill>
                   <a:srgbClr val="222222"/>
                 </a:solidFill>
-                <a:latin typeface="HY헤드라인M" pitchFamily="34" charset="0"/>
-                <a:ea typeface="HY헤드라인M" pitchFamily="34" charset="-122"/>
-                <a:cs typeface="HY헤드라인M" pitchFamily="34" charset="-120"/>
+                <a:latin typeface="맑은 고딕" pitchFamily="34" charset="0"/>
+                <a:ea typeface="맑은 고딕" pitchFamily="34" charset="-122"/>
+                <a:cs typeface="맑은 고딕" pitchFamily="34" charset="-120"/>
               </a:rPr>
               <a:t>케이블 정리</a:t>
             </a:r>
@@ -13735,13 +13735,13 @@
               <a:buNone/>
             </a:pPr>
             <a:r>
-              <a:rPr lang="en-US" sz="3600" dirty="0">
+              <a:rPr lang="en-US" sz="3600" dirty="0" b="1">
                 <a:solidFill>
                   <a:srgbClr val="FFFFFF"/>
                 </a:solidFill>
-                <a:latin typeface="HY헤드라인M" pitchFamily="34" charset="0"/>
-                <a:ea typeface="HY헤드라인M" pitchFamily="34" charset="-122"/>
-                <a:cs typeface="HY헤드라인M" pitchFamily="34" charset="-120"/>
+                <a:latin typeface="맑은 고딕" pitchFamily="34" charset="0"/>
+                <a:ea typeface="맑은 고딕" pitchFamily="34" charset="-122"/>
+                <a:cs typeface="맑은 고딕" pitchFamily="34" charset="-120"/>
               </a:rPr>
               <a:t>설치 완료 확인 사항</a:t>
             </a:r>
@@ -14661,13 +14661,13 @@
               <a:buNone/>
             </a:pPr>
             <a:r>
-              <a:rPr lang="en-US" sz="4000" dirty="0">
+              <a:rPr lang="en-US" sz="4000" dirty="0" b="1">
                 <a:solidFill>
                   <a:srgbClr val="1F1F1F"/>
                 </a:solidFill>
-                <a:latin typeface="HY헤드라인M" pitchFamily="34" charset="0"/>
-                <a:ea typeface="HY헤드라인M" pitchFamily="34" charset="-122"/>
-                <a:cs typeface="HY헤드라인M" pitchFamily="34" charset="-120"/>
+                <a:latin typeface="맑은 고딕" pitchFamily="34" charset="0"/>
+                <a:ea typeface="맑은 고딕" pitchFamily="34" charset="-122"/>
+                <a:cs typeface="맑은 고딕" pitchFamily="34" charset="-120"/>
               </a:rPr>
               <a:t>01</a:t>
             </a:r>
@@ -14700,13 +14700,13 @@
               <a:buNone/>
             </a:pPr>
             <a:r>
-              <a:rPr lang="en-US" sz="4000" dirty="0">
+              <a:rPr lang="en-US" sz="4000" dirty="0" b="1">
                 <a:solidFill>
                   <a:srgbClr val="FFFFFF"/>
                 </a:solidFill>
-                <a:latin typeface="HY헤드라인M" pitchFamily="34" charset="0"/>
-                <a:ea typeface="HY헤드라인M" pitchFamily="34" charset="-122"/>
-                <a:cs typeface="HY헤드라인M" pitchFamily="34" charset="-120"/>
+                <a:latin typeface="맑은 고딕" pitchFamily="34" charset="0"/>
+                <a:ea typeface="맑은 고딕" pitchFamily="34" charset="-122"/>
+                <a:cs typeface="맑은 고딕" pitchFamily="34" charset="-120"/>
               </a:rPr>
               <a:t>동선스크린 AI 카메라 설치 방법</a:t>
             </a:r>
@@ -14986,13 +14986,13 @@
               <a:buNone/>
             </a:pPr>
             <a:r>
-              <a:rPr lang="en-US" sz="3200" dirty="0">
+              <a:rPr lang="en-US" sz="3200" dirty="0" b="1">
                 <a:solidFill>
                   <a:srgbClr val="1F1F1F"/>
                 </a:solidFill>
-                <a:latin typeface="HY헤드라인M" pitchFamily="34" charset="0"/>
-                <a:ea typeface="HY헤드라인M" pitchFamily="34" charset="-122"/>
-                <a:cs typeface="HY헤드라인M" pitchFamily="34" charset="-120"/>
+                <a:latin typeface="맑은 고딕" pitchFamily="34" charset="0"/>
+                <a:ea typeface="맑은 고딕" pitchFamily="34" charset="-122"/>
+                <a:cs typeface="맑은 고딕" pitchFamily="34" charset="-120"/>
               </a:rPr>
               <a:t>1</a:t>
             </a:r>
@@ -15025,13 +15025,13 @@
               <a:buNone/>
             </a:pPr>
             <a:r>
-              <a:rPr lang="en-US" sz="2800" dirty="0">
+              <a:rPr lang="en-US" sz="2800" dirty="0" b="1">
                 <a:solidFill>
                   <a:srgbClr val="222222"/>
                 </a:solidFill>
-                <a:latin typeface="HY헤드라인M" pitchFamily="34" charset="0"/>
-                <a:ea typeface="HY헤드라인M" pitchFamily="34" charset="-122"/>
-                <a:cs typeface="HY헤드라인M" pitchFamily="34" charset="-120"/>
+                <a:latin typeface="맑은 고딕" pitchFamily="34" charset="0"/>
+                <a:ea typeface="맑은 고딕" pitchFamily="34" charset="-122"/>
+                <a:cs typeface="맑은 고딕" pitchFamily="34" charset="-120"/>
               </a:rPr>
               <a:t>HDMI 분배기 전원부 분리</a:t>
             </a:r>
@@ -15344,12 +15344,12 @@
               <a:buNone/>
             </a:pPr>
             <a:r>
-              <a:rPr lang="en-US" sz="3200" dirty="0">
+              <a:rPr lang="en-US" sz="3200" dirty="0" b="1">
                 <a:solidFill>
                   <a:srgbClr val="1F1F1F"/>
                 </a:solidFill>
-                <a:latin typeface="HY헤드라인M" pitchFamily="34" charset="0"/>
-                <a:ea typeface="HY헤드라인M" pitchFamily="34" charset="-122"/>
+                <a:latin typeface="맑은 고딕" pitchFamily="34" charset="0"/>
+                <a:ea typeface="맑은 고딕" pitchFamily="34" charset="-122"/>
               </a:rPr>
               <a:t>2</a:t>
             </a:r>
@@ -15382,13 +15382,13 @@
               <a:buNone/>
             </a:pPr>
             <a:r>
-              <a:rPr lang="en-US" sz="2800" dirty="0">
+              <a:rPr lang="en-US" sz="2800" dirty="0" b="1">
                 <a:solidFill>
                   <a:srgbClr val="222222"/>
                 </a:solidFill>
-                <a:latin typeface="HY헤드라인M" pitchFamily="34" charset="0"/>
-                <a:ea typeface="HY헤드라인M" pitchFamily="34" charset="-122"/>
-                <a:cs typeface="HY헤드라인M" pitchFamily="34" charset="-120"/>
+                <a:latin typeface="맑은 고딕" pitchFamily="34" charset="0"/>
+                <a:ea typeface="맑은 고딕" pitchFamily="34" charset="-122"/>
+                <a:cs typeface="맑은 고딕" pitchFamily="34" charset="-120"/>
               </a:rPr>
               <a:t>콘센트 연결</a:t>
             </a:r>
@@ -15764,12 +15764,12 @@
               <a:buNone/>
             </a:pPr>
             <a:r>
-              <a:rPr lang="en-US" sz="2400" dirty="0">
+              <a:rPr lang="en-US" sz="2400" dirty="0" b="1">
                 <a:solidFill>
                   <a:srgbClr val="1F1F1F"/>
                 </a:solidFill>
-                <a:latin typeface="HY헤드라인M" pitchFamily="34" charset="0"/>
-                <a:ea typeface="HY헤드라인M" pitchFamily="34" charset="-122"/>
+                <a:latin typeface="맑은 고딕" pitchFamily="34" charset="0"/>
+                <a:ea typeface="맑은 고딕" pitchFamily="34" charset="-122"/>
               </a:rPr>
               <a:t>3</a:t>
             </a:r>
@@ -15802,13 +15802,13 @@
               <a:buNone/>
             </a:pPr>
             <a:r>
-              <a:rPr lang="en-US" sz="2400" dirty="0">
+              <a:rPr lang="en-US" sz="2400" dirty="0" b="1">
                 <a:solidFill>
                   <a:srgbClr val="222222"/>
                 </a:solidFill>
-                <a:latin typeface="HY헤드라인M" pitchFamily="34" charset="0"/>
-                <a:ea typeface="HY헤드라인M" pitchFamily="34" charset="-122"/>
-                <a:cs typeface="HY헤드라인M" pitchFamily="34" charset="-120"/>
+                <a:latin typeface="맑은 고딕" pitchFamily="34" charset="0"/>
+                <a:ea typeface="맑은 고딕" pitchFamily="34" charset="-122"/>
+                <a:cs typeface="맑은 고딕" pitchFamily="34" charset="-120"/>
               </a:rPr>
               <a:t>AI 카메라 연결</a:t>
             </a:r>
@@ -16313,12 +16313,12 @@
               <a:buNone/>
             </a:pPr>
             <a:r>
-              <a:rPr lang="en-US" sz="2400" dirty="0">
+              <a:rPr lang="en-US" sz="2400" dirty="0" b="1">
                 <a:solidFill>
                   <a:srgbClr val="1F1F1F"/>
                 </a:solidFill>
-                <a:latin typeface="HY헤드라인M" pitchFamily="34" charset="0"/>
-                <a:ea typeface="HY헤드라인M" pitchFamily="34" charset="-122"/>
+                <a:latin typeface="맑은 고딕" pitchFamily="34" charset="0"/>
+                <a:ea typeface="맑은 고딕" pitchFamily="34" charset="-122"/>
               </a:rPr>
               <a:t>4</a:t>
             </a:r>
@@ -16351,13 +16351,13 @@
               <a:buNone/>
             </a:pPr>
             <a:r>
-              <a:rPr lang="en-US" sz="2400" dirty="0">
+              <a:rPr lang="en-US" sz="2400" dirty="0" b="1">
                 <a:solidFill>
                   <a:srgbClr val="222222"/>
                 </a:solidFill>
-                <a:latin typeface="HY헤드라인M" pitchFamily="34" charset="0"/>
-                <a:ea typeface="HY헤드라인M" pitchFamily="34" charset="-122"/>
-                <a:cs typeface="HY헤드라인M" pitchFamily="34" charset="-120"/>
+                <a:latin typeface="맑은 고딕" pitchFamily="34" charset="0"/>
+                <a:ea typeface="맑은 고딕" pitchFamily="34" charset="-122"/>
+                <a:cs typeface="맑은 고딕" pitchFamily="34" charset="-120"/>
               </a:rPr>
               <a:t>AI 카메라 설정 ① — 히든키 입력</a:t>
             </a:r>
@@ -16374,7 +16374,7 @@
         <p:spPr>
           <a:xfrm>
             <a:off x="1332529" y="1783080"/>
-            <a:ext cx="2914650" cy="3886200"/>
+            <a:ext cx="2694737" cy="3657600"/>
           </a:xfrm>
           <a:prstGeom prst="rect">
             <a:avLst/>
@@ -16416,8 +16416,8 @@
         </p:blipFill>
         <p:spPr>
           <a:xfrm>
-            <a:off x="1332529" y="1783079"/>
-            <a:ext cx="2914650" cy="3955870"/>
+            <a:off x="1335024" y="1783080"/>
+            <a:ext cx="2694629" cy="3657600"/>
           </a:xfrm>
           <a:prstGeom prst="rect">
             <a:avLst/>
@@ -16502,8 +16502,8 @@
         </p:nvSpPr>
         <p:spPr>
           <a:xfrm>
-            <a:off x="640080" y="5779008"/>
-            <a:ext cx="11247120" cy="749808"/>
+            <a:off x="640080" y="5870448"/>
+            <a:ext cx="11247120" cy="603504"/>
           </a:xfrm>
           <a:prstGeom prst="rect">
             <a:avLst/>
@@ -16694,7 +16694,7 @@
           <p:spPr>
             <a:xfrm>
               <a:off x="4521499" y="1783080"/>
-              <a:ext cx="6334924" cy="3886200"/>
+              <a:ext cx="5963717" cy="3657600"/>
             </a:xfrm>
             <a:prstGeom prst="rect">
               <a:avLst/>
@@ -16735,8 +16735,8 @@
           </p:blipFill>
           <p:spPr>
             <a:xfrm>
-              <a:off x="4521499" y="1783080"/>
-              <a:ext cx="6334924" cy="3886200"/>
+              <a:off x="4517136" y="1783080"/>
+              <a:ext cx="5964040" cy="3657600"/>
             </a:xfrm>
             <a:prstGeom prst="rect">
               <a:avLst/>
@@ -16827,8 +16827,8 @@
           </p:nvSpPr>
           <p:spPr>
             <a:xfrm>
-              <a:off x="9766001" y="1783079"/>
-              <a:ext cx="731520" cy="289561"/>
+              <a:off x="9457048" y="1783080"/>
+              <a:ext cx="688489" cy="275396"/>
             </a:xfrm>
             <a:prstGeom prst="rect">
               <a:avLst/>
@@ -16863,7 +16863,7 @@
         </p:nvSpPr>
         <p:spPr>
           <a:xfrm>
-            <a:off x="640080" y="6547104"/>
+            <a:off x="640080" y="6528816"/>
             <a:ext cx="11247120" cy="274320"/>
           </a:xfrm>
           <a:prstGeom prst="rect">
@@ -16963,8 +16963,8 @@
         </p:nvSpPr>
         <p:spPr>
           <a:xfrm>
-            <a:off x="1746250" y="4160465"/>
-            <a:ext cx="698500" cy="201985"/>
+            <a:off x="1715144" y="3979329"/>
+            <a:ext cx="641981" cy="185836"/>
           </a:xfrm>
           <a:prstGeom prst="rect">
             <a:avLst/>
@@ -17001,83 +17001,6 @@
           </a:p>
         </p:txBody>
       </p:sp>
-      <p:cxnSp>
-        <p:nvCxnSpPr>
-          <p:cNvPr id="29" name="직선 화살표 연결선 28">
-            <a:extLst>
-              <a:ext uri="{FF2B5EF4-FFF2-40B4-BE49-F238E27FC236}">
-                <a16:creationId xmlns:a16="http://schemas.microsoft.com/office/drawing/2014/main" id="{7563889F-87E9-69EA-1C00-130C6122F3F3}"/>
-              </a:ext>
-            </a:extLst>
-          </p:cNvPr>
-          <p:cNvCxnSpPr/>
-          <p:nvPr/>
-        </p:nvCxnSpPr>
-        <p:spPr>
-          <a:xfrm flipV="1">
-            <a:off x="1150620" y="4261457"/>
-            <a:ext cx="495300" cy="100993"/>
-          </a:xfrm>
-          <a:prstGeom prst="straightConnector1">
-            <a:avLst/>
-          </a:prstGeom>
-          <a:ln w="57150">
-            <a:solidFill>
-              <a:srgbClr val="FF0000"/>
-            </a:solidFill>
-            <a:tailEnd type="triangle"/>
-          </a:ln>
-        </p:spPr>
-        <p:style>
-          <a:lnRef idx="1">
-            <a:schemeClr val="accent1"/>
-          </a:lnRef>
-          <a:fillRef idx="0">
-            <a:schemeClr val="accent1"/>
-          </a:fillRef>
-          <a:effectRef idx="0">
-            <a:schemeClr val="accent1"/>
-          </a:effectRef>
-          <a:fontRef idx="minor">
-            <a:schemeClr val="tx1"/>
-          </a:fontRef>
-        </p:style>
-      </p:cxnSp>
-      <p:sp>
-        <p:nvSpPr>
-          <p:cNvPr id="30" name="TextBox 29">
-            <a:extLst>
-              <a:ext uri="{FF2B5EF4-FFF2-40B4-BE49-F238E27FC236}">
-                <a16:creationId xmlns:a16="http://schemas.microsoft.com/office/drawing/2014/main" id="{E57E5417-1EB8-B5AD-0531-293EE63D6621}"/>
-              </a:ext>
-            </a:extLst>
-          </p:cNvPr>
-          <p:cNvSpPr txBox="1"/>
-          <p:nvPr/>
-        </p:nvSpPr>
-        <p:spPr>
-          <a:xfrm>
-            <a:off x="250490" y="4261457"/>
-            <a:ext cx="1082039" cy="369332"/>
-          </a:xfrm>
-          <a:prstGeom prst="rect">
-            <a:avLst/>
-          </a:prstGeom>
-          <a:noFill/>
-        </p:spPr>
-        <p:txBody>
-          <a:bodyPr wrap="square" rtlCol="0">
-            <a:spAutoFit/>
-          </a:bodyPr>
-          <a:lstStyle/>
-          <a:p>
-            <a:r>
-              <a:rPr lang="ko-KR" altLang="en-US"/>
-              <a:t>되감기</a:t>
-            </a:r>
-          </a:p>
-        </p:txBody>
-      </p:sp>
       <p:sp>
         <p:nvSpPr>
           <p:cNvPr id="32" name="직사각형 31">
@@ -17092,8 +17015,8 @@
         </p:nvSpPr>
         <p:spPr>
           <a:xfrm>
-            <a:off x="1760519" y="4938497"/>
-            <a:ext cx="698500" cy="201985"/>
+            <a:off x="1732038" y="4697334"/>
+            <a:ext cx="641981" cy="185836"/>
           </a:xfrm>
           <a:prstGeom prst="rect">
             <a:avLst/>
@@ -17101,7 +17024,7 @@
           <a:noFill/>
           <a:ln w="38100">
             <a:solidFill>
-              <a:srgbClr val="92D050"/>
+              <a:srgbClr val="2E9E4F"/>
             </a:solidFill>
           </a:ln>
         </p:spPr>
@@ -17144,8 +17067,8 @@
         </p:nvSpPr>
         <p:spPr>
           <a:xfrm>
-            <a:off x="3270250" y="4938496"/>
-            <a:ext cx="698500" cy="201985"/>
+            <a:off x="3125812" y="4697334"/>
+            <a:ext cx="641981" cy="185836"/>
           </a:xfrm>
           <a:prstGeom prst="rect">
             <a:avLst/>
@@ -17153,7 +17076,7 @@
           <a:noFill/>
           <a:ln w="38100">
             <a:solidFill>
-              <a:srgbClr val="92D050"/>
+              <a:srgbClr val="2E9E4F"/>
             </a:solidFill>
           </a:ln>
         </p:spPr>
@@ -17182,140 +17105,170 @@
           </a:p>
         </p:txBody>
       </p:sp>
-      <p:cxnSp>
-        <p:nvCxnSpPr>
-          <p:cNvPr id="36" name="직선 화살표 연결선 35">
-            <a:extLst>
-              <a:ext uri="{FF2B5EF4-FFF2-40B4-BE49-F238E27FC236}">
-                <a16:creationId xmlns:a16="http://schemas.microsoft.com/office/drawing/2014/main" id="{6643A919-27A2-3188-E89B-44AD34D133FC}"/>
-              </a:ext>
-            </a:extLst>
-          </p:cNvPr>
-          <p:cNvCxnSpPr/>
-          <p:nvPr/>
-        </p:nvCxnSpPr>
-        <p:spPr>
-          <a:xfrm flipV="1">
-            <a:off x="1150620" y="5234940"/>
-            <a:ext cx="678180" cy="289560"/>
-          </a:xfrm>
-          <a:prstGeom prst="straightConnector1">
-            <a:avLst/>
-          </a:prstGeom>
+      <p:sp xmlns:p="http://schemas.openxmlformats.org/presentationml/2006/main" xmlns:a="http://schemas.openxmlformats.org/drawingml/2006/main">
+        <p:nvSpPr>
+          <p:cNvPr id="901" name="badge901"/>
+          <p:cNvSpPr/>
+          <p:nvPr/>
+        </p:nvSpPr>
+        <p:spPr>
+          <a:xfrm>
+            <a:off x="1577984" y="3842169"/>
+            <a:ext cx="274320" cy="274320"/>
+          </a:xfrm>
+          <a:prstGeom prst="ellipse">
+            <a:avLst/>
+          </a:prstGeom>
+          <a:solidFill>
+            <a:srgbClr val="FF0000"/>
+          </a:solidFill>
           <a:ln>
-            <a:solidFill>
-              <a:srgbClr val="92D050"/>
-            </a:solidFill>
-            <a:tailEnd type="triangle"/>
+            <a:noFill/>
           </a:ln>
         </p:spPr>
-        <p:style>
-          <a:lnRef idx="1">
-            <a:schemeClr val="accent1"/>
-          </a:lnRef>
-          <a:fillRef idx="0">
-            <a:schemeClr val="accent1"/>
-          </a:fillRef>
-          <a:effectRef idx="0">
-            <a:schemeClr val="accent1"/>
-          </a:effectRef>
-          <a:fontRef idx="minor">
-            <a:schemeClr val="tx1"/>
-          </a:fontRef>
-        </p:style>
-      </p:cxnSp>
-      <p:cxnSp>
-        <p:nvCxnSpPr>
-          <p:cNvPr id="37" name="직선 화살표 연결선 36">
-            <a:extLst>
-              <a:ext uri="{FF2B5EF4-FFF2-40B4-BE49-F238E27FC236}">
-                <a16:creationId xmlns:a16="http://schemas.microsoft.com/office/drawing/2014/main" id="{B05D98F0-A63C-2B38-7C3E-7D5E050B53EE}"/>
-              </a:ext>
-            </a:extLst>
-          </p:cNvPr>
-          <p:cNvCxnSpPr>
-            <a:cxnSpLocks/>
-          </p:cNvCxnSpPr>
-          <p:nvPr/>
-        </p:nvCxnSpPr>
-        <p:spPr>
-          <a:xfrm flipV="1">
-            <a:off x="1150620" y="5234940"/>
-            <a:ext cx="2331720" cy="286295"/>
-          </a:xfrm>
-          <a:prstGeom prst="straightConnector1">
-            <a:avLst/>
-          </a:prstGeom>
+        <p:txBody>
+          <a:bodyPr anchor="ctr" lIns="0" rIns="0" tIns="0" bIns="0"/>
+          <a:lstStyle/>
+          <a:p>
+            <a:pPr algn="ctr"/>
+            <a:r>
+              <a:rPr lang="ko-KR" sz="1100" b="1" dirty="0">
+                <a:solidFill>
+                  <a:srgbClr val="FFFFFF"/>
+                </a:solidFill>
+                <a:latin typeface="맑은 고딕"/>
+                <a:ea typeface="맑은 고딕"/>
+              </a:rPr>
+              <a:t>1</a:t>
+            </a:r>
+          </a:p>
+        </p:txBody>
+      </p:sp>
+      <p:sp xmlns:p="http://schemas.openxmlformats.org/presentationml/2006/main" xmlns:a="http://schemas.openxmlformats.org/drawingml/2006/main">
+        <p:nvSpPr>
+          <p:cNvPr id="902" name="badge902"/>
+          <p:cNvSpPr/>
+          <p:nvPr/>
+        </p:nvSpPr>
+        <p:spPr>
+          <a:xfrm>
+            <a:off x="1594878" y="4560174"/>
+            <a:ext cx="274320" cy="274320"/>
+          </a:xfrm>
+          <a:prstGeom prst="ellipse">
+            <a:avLst/>
+          </a:prstGeom>
+          <a:solidFill>
+            <a:srgbClr val="2E9E4F"/>
+          </a:solidFill>
           <a:ln>
-            <a:solidFill>
-              <a:srgbClr val="92D050"/>
-            </a:solidFill>
-            <a:tailEnd type="triangle"/>
+            <a:noFill/>
           </a:ln>
         </p:spPr>
-        <p:style>
-          <a:lnRef idx="1">
-            <a:schemeClr val="accent1"/>
-          </a:lnRef>
-          <a:fillRef idx="0">
-            <a:schemeClr val="accent1"/>
-          </a:fillRef>
-          <a:effectRef idx="0">
-            <a:schemeClr val="accent1"/>
-          </a:effectRef>
-          <a:fontRef idx="minor">
-            <a:schemeClr val="tx1"/>
-          </a:fontRef>
-        </p:style>
-      </p:cxnSp>
-      <p:sp>
-        <p:nvSpPr>
-          <p:cNvPr id="39" name="TextBox 38">
-            <a:extLst>
-              <a:ext uri="{FF2B5EF4-FFF2-40B4-BE49-F238E27FC236}">
-                <a16:creationId xmlns:a16="http://schemas.microsoft.com/office/drawing/2014/main" id="{5773C0C2-6255-E81C-A597-2E1F31C1D97A}"/>
-              </a:ext>
-            </a:extLst>
-          </p:cNvPr>
-          <p:cNvSpPr txBox="1"/>
-          <p:nvPr/>
-        </p:nvSpPr>
-        <p:spPr>
-          <a:xfrm>
-            <a:off x="202415" y="5280230"/>
-            <a:ext cx="1347769" cy="523220"/>
-          </a:xfrm>
-          <a:prstGeom prst="rect">
-            <a:avLst/>
-          </a:prstGeom>
-          <a:noFill/>
-        </p:spPr>
-        <p:txBody>
-          <a:bodyPr wrap="square" rtlCol="0">
-            <a:spAutoFit/>
-          </a:bodyPr>
-          <a:lstStyle/>
-          <a:p>
-            <a:r>
-              <a:rPr lang="ko-KR" altLang="en-US" sz="1400" dirty="0" err="1"/>
-              <a:t>페어링</a:t>
-            </a:r>
-            <a:endParaRPr lang="en-US" altLang="ko-KR" sz="1400" dirty="0"/>
-          </a:p>
-          <a:p>
-            <a:r>
-              <a:rPr lang="en-US" altLang="ko-KR" sz="1400" dirty="0"/>
-              <a:t>(</a:t>
-            </a:r>
-            <a:r>
-              <a:rPr lang="ko-KR" altLang="en-US" sz="1400" dirty="0"/>
-              <a:t>동시 입력</a:t>
-            </a:r>
-            <a:r>
-              <a:rPr lang="en-US" altLang="ko-KR" sz="1400" dirty="0"/>
-              <a:t>)</a:t>
-            </a:r>
-            <a:endParaRPr lang="ko-KR" altLang="en-US" sz="1400" dirty="0"/>
+        <p:txBody>
+          <a:bodyPr anchor="ctr" lIns="0" rIns="0" tIns="0" bIns="0"/>
+          <a:lstStyle/>
+          <a:p>
+            <a:pPr algn="ctr"/>
+            <a:r>
+              <a:rPr lang="ko-KR" sz="1100" b="1" dirty="0">
+                <a:solidFill>
+                  <a:srgbClr val="FFFFFF"/>
+                </a:solidFill>
+                <a:latin typeface="맑은 고딕"/>
+                <a:ea typeface="맑은 고딕"/>
+              </a:rPr>
+              <a:t>2</a:t>
+            </a:r>
+          </a:p>
+        </p:txBody>
+      </p:sp>
+      <p:sp xmlns:p="http://schemas.openxmlformats.org/presentationml/2006/main" xmlns:a="http://schemas.openxmlformats.org/drawingml/2006/main">
+        <p:nvSpPr>
+          <p:cNvPr id="903" name="badge903"/>
+          <p:cNvSpPr/>
+          <p:nvPr/>
+        </p:nvSpPr>
+        <p:spPr>
+          <a:xfrm>
+            <a:off x="2988652" y="4560174"/>
+            <a:ext cx="274320" cy="274320"/>
+          </a:xfrm>
+          <a:prstGeom prst="ellipse">
+            <a:avLst/>
+          </a:prstGeom>
+          <a:solidFill>
+            <a:srgbClr val="2E9E4F"/>
+          </a:solidFill>
+          <a:ln>
+            <a:noFill/>
+          </a:ln>
+        </p:spPr>
+        <p:txBody>
+          <a:bodyPr anchor="ctr" lIns="0" rIns="0" tIns="0" bIns="0"/>
+          <a:lstStyle/>
+          <a:p>
+            <a:pPr algn="ctr"/>
+            <a:r>
+              <a:rPr lang="ko-KR" sz="1100" b="1" dirty="0">
+                <a:solidFill>
+                  <a:srgbClr val="FFFFFF"/>
+                </a:solidFill>
+                <a:latin typeface="맑은 고딕"/>
+                <a:ea typeface="맑은 고딕"/>
+              </a:rPr>
+              <a:t>2</a:t>
+            </a:r>
+          </a:p>
+        </p:txBody>
+      </p:sp>
+      <p:sp xmlns:p="http://schemas.openxmlformats.org/presentationml/2006/main" xmlns:a="http://schemas.openxmlformats.org/drawingml/2006/main">
+        <p:nvSpPr>
+          <p:cNvPr id="990" name="legend"/>
+          <p:cNvSpPr/>
+          <p:nvPr/>
+        </p:nvSpPr>
+        <p:spPr>
+          <a:xfrm>
+            <a:off x="1335024" y="5522976"/>
+            <a:ext cx="8229600" cy="274320"/>
+          </a:xfrm>
+          <a:prstGeom prst="rect">
+            <a:avLst/>
+          </a:prstGeom>
+          <a:noFill/>
+        </p:spPr>
+        <p:txBody>
+          <a:bodyPr anchor="ctr" lIns="0" rIns="0" tIns="0" bIns="0"/>
+          <a:lstStyle/>
+          <a:p>
+            <a:r>
+              <a:rPr lang="ko-KR" sz="1250" b="1" dirty="0">
+                <a:solidFill>
+                  <a:srgbClr val="FF0000"/>
+                </a:solidFill>
+                <a:latin typeface="맑은 고딕"/>
+                <a:ea typeface="맑은 고딕"/>
+              </a:rPr>
+              <a:t>➊ 되감기 버튼</a:t>
+            </a:r>
+            <a:r>
+              <a:rPr lang="ko-KR" sz="1250" dirty="0">
+                <a:latin typeface="맑은 고딕"/>
+                <a:ea typeface="맑은 고딕"/>
+              </a:rPr>
+              <a:t>     </a:t>
+            </a:r>
+            <a:r>
+              <a:rPr lang="ko-KR" sz="1250" b="1" dirty="0">
+                <a:solidFill>
+                  <a:srgbClr val="2E9E4F"/>
+                </a:solidFill>
+                <a:latin typeface="맑은 고딕"/>
+                <a:ea typeface="맑은 고딕"/>
+              </a:rPr>
+              <a:t>➋ 페어링 버튼 (양쪽 동시 입력)</a:t>
+            </a:r>
           </a:p>
         </p:txBody>
       </p:sp>
@@ -17518,12 +17471,12 @@
               <a:buNone/>
             </a:pPr>
             <a:r>
-              <a:rPr lang="en-US" sz="2400" dirty="0">
+              <a:rPr lang="en-US" sz="2400" dirty="0" b="1">
                 <a:solidFill>
                   <a:srgbClr val="1F1F1F"/>
                 </a:solidFill>
-                <a:latin typeface="HY헤드라인M" pitchFamily="34" charset="0"/>
-                <a:ea typeface="HY헤드라인M" pitchFamily="34" charset="-122"/>
+                <a:latin typeface="맑은 고딕" pitchFamily="34" charset="0"/>
+                <a:ea typeface="맑은 고딕" pitchFamily="34" charset="-122"/>
               </a:rPr>
               <a:t>4</a:t>
             </a:r>
@@ -17556,13 +17509,13 @@
               <a:buNone/>
             </a:pPr>
             <a:r>
-              <a:rPr lang="en-US" sz="2400" dirty="0">
+              <a:rPr lang="en-US" sz="2400" dirty="0" b="1">
                 <a:solidFill>
                   <a:srgbClr val="222222"/>
                 </a:solidFill>
-                <a:latin typeface="HY헤드라인M" pitchFamily="34" charset="0"/>
-                <a:ea typeface="HY헤드라인M" pitchFamily="34" charset="-122"/>
-                <a:cs typeface="HY헤드라인M" pitchFamily="34" charset="-120"/>
+                <a:latin typeface="맑은 고딕" pitchFamily="34" charset="0"/>
+                <a:ea typeface="맑은 고딕" pitchFamily="34" charset="-122"/>
+                <a:cs typeface="맑은 고딕" pitchFamily="34" charset="-120"/>
               </a:rPr>
               <a:t>AI 카메라 설정 ① — AI 모드 변경</a:t>
             </a:r>
@@ -17869,12 +17822,12 @@
               <a:buNone/>
             </a:pPr>
             <a:r>
-              <a:rPr lang="en-US" sz="2400" dirty="0">
+              <a:rPr lang="en-US" sz="2400" dirty="0" b="1">
                 <a:solidFill>
                   <a:srgbClr val="1F1F1F"/>
                 </a:solidFill>
-                <a:latin typeface="HY헤드라인M" pitchFamily="34" charset="0"/>
-                <a:ea typeface="HY헤드라인M" pitchFamily="34" charset="-122"/>
+                <a:latin typeface="맑은 고딕" pitchFamily="34" charset="0"/>
+                <a:ea typeface="맑은 고딕" pitchFamily="34" charset="-122"/>
               </a:rPr>
               <a:t>5</a:t>
             </a:r>
@@ -17907,13 +17860,13 @@
               <a:buNone/>
             </a:pPr>
             <a:r>
-              <a:rPr lang="en-US" sz="2400" dirty="0">
+              <a:rPr lang="en-US" sz="2400" dirty="0" b="1">
                 <a:solidFill>
                   <a:srgbClr val="222222"/>
                 </a:solidFill>
-                <a:latin typeface="HY헤드라인M" pitchFamily="34" charset="0"/>
-                <a:ea typeface="HY헤드라인M" pitchFamily="34" charset="-122"/>
-                <a:cs typeface="HY헤드라인M" pitchFamily="34" charset="-120"/>
+                <a:latin typeface="맑은 고딕" pitchFamily="34" charset="0"/>
+                <a:ea typeface="맑은 고딕" pitchFamily="34" charset="-122"/>
+                <a:cs typeface="맑은 고딕" pitchFamily="34" charset="-120"/>
               </a:rPr>
               <a:t>AI 카메라 설정 ② — 화각 확인</a:t>
             </a:r>
